--- a/submission/REDRED_2차_발표자료_칩S.pptx
+++ b/submission/REDRED_2차_발표자료_칩S.pptx
@@ -1,9 +1,12 @@
 
 <file path=ppt/presentation.xml><?xml version="1.0" encoding="utf-8"?>
-<p:presentation xmlns:a="http://schemas.openxmlformats.org/drawingml/2006/main" xmlns:r="http://schemas.openxmlformats.org/officeDocument/2006/relationships" xmlns:p="http://schemas.openxmlformats.org/presentationml/2006/main" saveSubsetFonts="1" autoCompressPictures="0">
+<p:presentation xmlns:a="http://schemas.openxmlformats.org/drawingml/2006/main" xmlns:r="http://schemas.openxmlformats.org/officeDocument/2006/relationships" xmlns:p="http://schemas.openxmlformats.org/presentationml/2006/main" embedTrueTypeFonts="1" autoCompressPictures="0">
   <p:sldMasterIdLst>
     <p:sldMasterId id="2147483648" r:id="rId1"/>
   </p:sldMasterIdLst>
+  <p:notesMasterIdLst>
+    <p:notesMasterId r:id="rId22"/>
+  </p:notesMasterIdLst>
   <p:sldIdLst>
     <p:sldId id="256" r:id="rId2"/>
     <p:sldId id="257" r:id="rId3"/>
@@ -26,11 +29,18 @@
     <p:sldId id="274" r:id="rId20"/>
     <p:sldId id="275" r:id="rId21"/>
   </p:sldIdLst>
-  <p:notesMasterIdLst>
-    <p:notesMasterId r:id="rId22"/>
-  </p:notesMasterIdLst>
   <p:sldSz cx="12192000" cy="6858000"/>
   <p:notesSz cx="6858000" cy="12192000"/>
+  <p:embeddedFontLst>
+    <p:embeddedFont>
+      <p:font typeface="나눔스퀘어 네오 Bold" panose="00000800000000000000" pitchFamily="2" charset="-127"/>
+      <p:bold r:id="rId23"/>
+    </p:embeddedFont>
+    <p:embeddedFont>
+      <p:font typeface="나눔스퀘어 네오 Regular" panose="00000500000000000000" pitchFamily="2" charset="-127"/>
+      <p:regular r:id="rId24"/>
+    </p:embeddedFont>
+  </p:embeddedFontLst>
   <p:defaultTextStyle>
     <a:lvl1pPr marL="0" algn="l" defTabSz="914400" rtl="0" eaLnBrk="1" latinLnBrk="0" hangingPunct="1">
       <a:defRPr sz="1800" kern="1200">
@@ -123,13 +133,20 @@
       </a:defRPr>
     </a:lvl9pPr>
   </p:defaultTextStyle>
+  <p:extLst>
+    <p:ext uri="{EFAFB233-063F-42B5-8137-9DF3F51BA10A}">
+      <p15:sldGuideLst xmlns:p15="http://schemas.microsoft.com/office/powerpoint/2012/main"/>
+    </p:ext>
+  </p:extLst>
 </p:presentation>
 </file>
 
 <file path=ppt/charts/chart1.xml><?xml version="1.0" encoding="utf-8"?>
-<c:chartSpace xmlns:c="http://schemas.openxmlformats.org/drawingml/2006/chart" xmlns:a="http://schemas.openxmlformats.org/drawingml/2006/main" xmlns:r="http://schemas.openxmlformats.org/officeDocument/2006/relationships">
+<c:chartSpace xmlns:c="http://schemas.openxmlformats.org/drawingml/2006/chart" xmlns:a="http://schemas.openxmlformats.org/drawingml/2006/main" xmlns:r="http://schemas.openxmlformats.org/officeDocument/2006/relationships" xmlns:c16r2="http://schemas.microsoft.com/office/drawing/2015/06/chart">
   <c:date1904 val="0"/>
+  <c:lang val="ko-KR"/>
   <c:roundedCorners val="1"/>
+  <c:style val="2"/>
   <c:chart>
     <c:title>
       <c:tx>
@@ -161,7 +178,6 @@
           </a:p>
         </c:rich>
       </c:tx>
-      <c:layout/>
       <c:overlay val="0"/>
     </c:title>
     <c:autoTitleDeleted val="0"/>
@@ -192,42 +208,15 @@
             <a:effectLst/>
           </c:spPr>
           <c:invertIfNegative val="0"/>
-          <c:dLbls>
-            <c:numFmt formatCode="0.0" sourceLinked="0"/>
-            <c:txPr>
-              <a:bodyPr/>
-              <a:lstStyle/>
-              <a:p>
-                <a:pPr>
-                  <a:defRPr b="0" i="0" strike="noStrike" sz="1200" u="none">
-                    <a:solidFill>
-                      <a:srgbClr val="1D1D1F"/>
-                    </a:solidFill>
-                    <a:latin typeface="나눔스퀘어 네오 Regular"/>
-                    <a:ea typeface="나눔스퀘어 네오 Regular"/>
-                    <a:cs typeface="나눔스퀘어 네오 Regular"/>
-                  </a:defRPr>
-                </a:pPr>
-              </a:p>
-            </c:txPr>
-            <c:showLegendKey val="0"/>
-            <c:showVal val="1"/>
-            <c:showCatName val="0"/>
-            <c:showSerName val="0"/>
-            <c:showPercent val="0"/>
-            <c:showBubbleSize val="0"/>
-            <c:showLeaderLines val="0"/>
-          </c:dLbls>
           <c:dPt>
             <c:idx val="0"/>
             <c:invertIfNegative val="0"/>
             <c:bubble3D val="0"/>
-            <c:spPr>
-              <a:solidFill>
-                <a:srgbClr val="0066CC"/>
-              </a:solidFill>
-              <a:effectLst/>
-            </c:spPr>
+            <c:extLst>
+              <c:ext xmlns:c16="http://schemas.microsoft.com/office/drawing/2014/chart" uri="{C3380CC4-5D6E-409C-BE32-E72D297353CC}">
+                <c16:uniqueId val="{00000001-120E-4F70-A283-B4737D7E2257}"/>
+              </c:ext>
+            </c:extLst>
           </c:dPt>
           <c:dPt>
             <c:idx val="1"/>
@@ -239,22 +228,64 @@
               </a:solidFill>
               <a:effectLst/>
             </c:spPr>
+            <c:extLst>
+              <c:ext xmlns:c16="http://schemas.microsoft.com/office/drawing/2014/chart" uri="{C3380CC4-5D6E-409C-BE32-E72D297353CC}">
+                <c16:uniqueId val="{00000003-120E-4F70-A283-B4737D7E2257}"/>
+              </c:ext>
+            </c:extLst>
           </c:dPt>
+          <c:dLbls>
+            <c:numFmt formatCode="0.0" sourceLinked="0"/>
+            <c:spPr>
+              <a:noFill/>
+              <a:ln>
+                <a:noFill/>
+              </a:ln>
+              <a:effectLst/>
+            </c:spPr>
+            <c:txPr>
+              <a:bodyPr/>
+              <a:lstStyle/>
+              <a:p>
+                <a:pPr>
+                  <a:defRPr sz="1200" b="0" i="0" u="none" strike="noStrike">
+                    <a:solidFill>
+                      <a:srgbClr val="1D1D1F"/>
+                    </a:solidFill>
+                    <a:latin typeface="나눔스퀘어 네오 Regular"/>
+                    <a:ea typeface="나눔스퀘어 네오 Regular"/>
+                    <a:cs typeface="나눔스퀘어 네오 Regular"/>
+                  </a:defRPr>
+                </a:pPr>
+                <a:endParaRPr lang="ko-KR"/>
+              </a:p>
+            </c:txPr>
+            <c:showLegendKey val="0"/>
+            <c:showVal val="1"/>
+            <c:showCatName val="0"/>
+            <c:showSerName val="0"/>
+            <c:showPercent val="0"/>
+            <c:showBubbleSize val="0"/>
+            <c:showLeaderLines val="0"/>
+            <c:extLst>
+              <c:ext xmlns:c15="http://schemas.microsoft.com/office/drawing/2012/chart" uri="{CE6537A1-D6FC-4f65-9D91-7224C49458BB}">
+                <c15:showLeaderLines val="0"/>
+              </c:ext>
+            </c:extLst>
+          </c:dLbls>
           <c:cat>
-            <c:multiLvlStrRef>
+            <c:strRef>
               <c:f>Sheet1!$A$2:$A$3</c:f>
-              <c:multiLvlStrCache>
+              <c:strCache>
                 <c:ptCount val="2"/>
-                <c:lvl>
-                  <c:pt idx="0">
-                    <c:v>FF+클록게이팅</c:v>
-                  </c:pt>
-                  <c:pt idx="1">
-                    <c:v>FF(게이팅 없음)</c:v>
-                  </c:pt>
-                </c:lvl>
-              </c:multiLvlStrCache>
-            </c:multiLvlStrRef>
+                <c:pt idx="0">
+                  <c:v>FF+클록게이팅</c:v>
+                </c:pt>
+                <c:pt idx="1">
+                  <c:v>FF(게이팅 없음)</c:v>
+                </c:pt>
+              </c:strCache>
+            </c:strRef>
           </c:cat>
           <c:val>
             <c:numRef>
@@ -271,38 +302,23 @@
               </c:numCache>
             </c:numRef>
           </c:val>
+          <c:extLst>
+            <c:ext xmlns:c16="http://schemas.microsoft.com/office/drawing/2014/chart" uri="{C3380CC4-5D6E-409C-BE32-E72D297353CC}">
+              <c16:uniqueId val="{00000004-120E-4F70-A283-B4737D7E2257}"/>
+            </c:ext>
+          </c:extLst>
         </c:ser>
         <c:dLbls>
-          <c:numFmt formatCode="0.0" sourceLinked="0"/>
-          <c:txPr>
-            <a:bodyPr/>
-            <a:lstStyle/>
-            <a:p>
-              <a:pPr>
-                <a:defRPr b="0" i="0" strike="noStrike" sz="1200" u="none">
-                  <a:solidFill>
-                    <a:srgbClr val="1D1D1F"/>
-                  </a:solidFill>
-                  <a:latin typeface="나눔스퀘어 네오 Regular"/>
-                  <a:ea typeface="나눔스퀘어 네오 Regular"/>
-                  <a:cs typeface="나눔스퀘어 네오 Regular"/>
-                </a:defRPr>
-              </a:pPr>
-            </a:p>
-          </c:txPr>
           <c:showLegendKey val="0"/>
           <c:showVal val="1"/>
           <c:showCatName val="0"/>
           <c:showSerName val="0"/>
           <c:showPercent val="0"/>
           <c:showBubbleSize val="0"/>
-          <c:showLeaderLines val="0"/>
         </c:dLbls>
         <c:gapWidth val="60"/>
-        <c:overlap val="0"/>
         <c:axId val="2094734554"/>
         <c:axId val="2094734552"/>
-        <c:axId val="2094734556"/>
       </c:barChart>
       <c:catAx>
         <c:axId val="2094734554"/>
@@ -338,13 +354,14 @@
                 <a:cs typeface="나눔스퀘어 네오 Regular"/>
               </a:defRPr>
             </a:pPr>
-            <a:endParaRPr lang="en-US"/>
+            <a:endParaRPr lang="ko-KR"/>
           </a:p>
         </c:txPr>
         <c:crossAx val="2094734552"/>
         <c:crosses val="autoZero"/>
         <c:auto val="1"/>
         <c:lblAlgn val="ctr"/>
+        <c:lblOffset val="100"/>
         <c:noMultiLvlLbl val="1"/>
       </c:catAx>
       <c:valAx>
@@ -392,7 +409,7 @@
                 <a:cs typeface="나눔스퀘어 네오 Regular"/>
               </a:defRPr>
             </a:pPr>
-            <a:endParaRPr lang="en-US"/>
+            <a:endParaRPr lang="ko-KR"/>
           </a:p>
         </c:txPr>
         <c:crossAx val="2094734554"/>
@@ -409,6 +426,7 @@
     </c:plotArea>
     <c:plotVisOnly val="1"/>
     <c:dispBlanksAs val="span"/>
+    <c:showDLblsOverMax val="1"/>
   </c:chart>
   <c:spPr>
     <a:noFill/>
@@ -445,240 +463,16 @@
           <a:chExt cx="0" cy="0"/>
         </a:xfrm>
       </p:grpSpPr>
-      <p:sp>
-        <p:nvSpPr>
-          <p:cNvPr id="2" name="Header Placeholder 1"/>
-          <p:cNvSpPr>
-            <a:spLocks noGrp="1"/>
-          </p:cNvSpPr>
-          <p:nvPr>
-            <p:ph type="hdr" sz="quarter"/>
-          </p:nvPr>
-        </p:nvSpPr>
-        <p:spPr>
-          <a:xfrm>
-            <a:off x="0" y="0"/>
-            <a:ext cx="2971800" cy="458788"/>
-          </a:xfrm>
-          <a:prstGeom prst="rect">
-            <a:avLst/>
-          </a:prstGeom>
-        </p:spPr>
-        <p:txBody>
-          <a:bodyPr vert="horz" lIns="91440" tIns="45720" rIns="91440" bIns="45720" rtlCol="0"/>
-          <a:lstStyle>
-            <a:lvl1pPr algn="l">
-              <a:defRPr sz="1200"/>
-            </a:lvl1pPr>
-          </a:lstStyle>
-          <a:p>
-            <a:endParaRPr lang="en-US"/>
-          </a:p>
-        </p:txBody>
-      </p:sp>
-      <p:sp>
-        <p:nvSpPr>
-          <p:cNvPr id="3" name="Date Placeholder 2"/>
-          <p:cNvSpPr>
-            <a:spLocks noGrp="1"/>
-          </p:cNvSpPr>
-          <p:nvPr>
-            <p:ph type="dt" idx="1"/>
-          </p:nvPr>
-        </p:nvSpPr>
-        <p:spPr>
-          <a:xfrm>
-            <a:off x="3884613" y="0"/>
-            <a:ext cx="2971800" cy="458788"/>
-          </a:xfrm>
-          <a:prstGeom prst="rect">
-            <a:avLst/>
-          </a:prstGeom>
-        </p:spPr>
-        <p:txBody>
-          <a:bodyPr vert="horz" lIns="91440" tIns="45720" rIns="91440" bIns="45720" rtlCol="0"/>
-          <a:lstStyle>
-            <a:lvl1pPr algn="r">
-              <a:defRPr sz="1200"/>
-            </a:lvl1pPr>
-          </a:lstStyle>
-          <a:p>
-            <a:fld id="{5282F153-3F37-0F45-9E97-73ACFA13230C}" type="datetimeFigureOut">
-              <a:rPr lang="en-US"/>
-              <a:t>7/23/19</a:t>
-            </a:fld>
-            <a:endParaRPr lang="en-US"/>
-          </a:p>
-        </p:txBody>
-      </p:sp>
-      <p:sp>
-        <p:nvSpPr>
-          <p:cNvPr id="4" name="Slide Image Placeholder 3"/>
-          <p:cNvSpPr>
-            <a:spLocks noGrp="1" noRot="1" noChangeAspect="1"/>
-          </p:cNvSpPr>
-          <p:nvPr>
-            <p:ph type="sldImg" idx="2"/>
-          </p:nvPr>
-        </p:nvSpPr>
-        <p:spPr>
-          <a:xfrm>
-            <a:off x="685800" y="1143000"/>
-            <a:ext cx="5486400" cy="3086100"/>
-          </a:xfrm>
-          <a:prstGeom prst="rect">
-            <a:avLst/>
-          </a:prstGeom>
-          <a:noFill/>
-          <a:ln w="12700">
-            <a:solidFill>
-              <a:prstClr val="black"/>
-            </a:solidFill>
-          </a:ln>
-        </p:spPr>
-        <p:txBody>
-          <a:bodyPr vert="horz" lIns="91440" tIns="45720" rIns="91440" bIns="45720" rtlCol="0" anchor="ctr"/>
-          <a:lstStyle/>
-          <a:p>
-            <a:endParaRPr lang="en-US"/>
-          </a:p>
-        </p:txBody>
-      </p:sp>
-      <p:sp>
-        <p:nvSpPr>
-          <p:cNvPr id="5" name="Notes Placeholder 4"/>
-          <p:cNvSpPr>
-            <a:spLocks noGrp="1"/>
-          </p:cNvSpPr>
-          <p:nvPr>
-            <p:ph type="body" sz="quarter" idx="3"/>
-          </p:nvPr>
-        </p:nvSpPr>
-        <p:spPr>
-          <a:xfrm>
-            <a:off x="685800" y="4400550"/>
-            <a:ext cx="5486400" cy="3600450"/>
-          </a:xfrm>
-          <a:prstGeom prst="rect">
-            <a:avLst/>
-          </a:prstGeom>
-        </p:spPr>
-        <p:txBody>
-          <a:bodyPr vert="horz" lIns="91440" tIns="45720" rIns="91440" bIns="45720" rtlCol="0"/>
-          <a:lstStyle/>
-          <a:p>
-            <a:pPr lvl="0"/>
-            <a:r>
-              <a:rPr lang="en-US"/>
-              <a:t>Click to edit Master text styles</a:t>
-            </a:r>
-          </a:p>
-          <a:p>
-            <a:pPr lvl="1"/>
-            <a:r>
-              <a:rPr lang="en-US"/>
-              <a:t>Second level</a:t>
-            </a:r>
-          </a:p>
-          <a:p>
-            <a:pPr lvl="2"/>
-            <a:r>
-              <a:rPr lang="en-US"/>
-              <a:t>Third level</a:t>
-            </a:r>
-          </a:p>
-          <a:p>
-            <a:pPr lvl="3"/>
-            <a:r>
-              <a:rPr lang="en-US"/>
-              <a:t>Fourth level</a:t>
-            </a:r>
-          </a:p>
-          <a:p>
-            <a:pPr lvl="4"/>
-            <a:r>
-              <a:rPr lang="en-US"/>
-              <a:t>Fifth level</a:t>
-            </a:r>
-          </a:p>
-        </p:txBody>
-      </p:sp>
-      <p:sp>
-        <p:nvSpPr>
-          <p:cNvPr id="6" name="Footer Placeholder 5"/>
-          <p:cNvSpPr>
-            <a:spLocks noGrp="1"/>
-          </p:cNvSpPr>
-          <p:nvPr>
-            <p:ph type="ftr" sz="quarter" idx="4"/>
-          </p:nvPr>
-        </p:nvSpPr>
-        <p:spPr>
-          <a:xfrm>
-            <a:off x="0" y="8685213"/>
-            <a:ext cx="2971800" cy="458787"/>
-          </a:xfrm>
-          <a:prstGeom prst="rect">
-            <a:avLst/>
-          </a:prstGeom>
-        </p:spPr>
-        <p:txBody>
-          <a:bodyPr vert="horz" lIns="91440" tIns="45720" rIns="91440" bIns="45720" rtlCol="0" anchor="b"/>
-          <a:lstStyle>
-            <a:lvl1pPr algn="l">
-              <a:defRPr sz="1200"/>
-            </a:lvl1pPr>
-          </a:lstStyle>
-          <a:p>
-            <a:endParaRPr lang="en-US"/>
-          </a:p>
-        </p:txBody>
-      </p:sp>
-      <p:sp>
-        <p:nvSpPr>
-          <p:cNvPr id="7" name="Slide Number Placeholder 6"/>
-          <p:cNvSpPr>
-            <a:spLocks noGrp="1"/>
-          </p:cNvSpPr>
-          <p:nvPr>
-            <p:ph type="sldNum" sz="quarter" idx="5"/>
-          </p:nvPr>
-        </p:nvSpPr>
-        <p:spPr>
-          <a:xfrm>
-            <a:off x="3884613" y="8685213"/>
-            <a:ext cx="2971800" cy="458787"/>
-          </a:xfrm>
-          <a:prstGeom prst="rect">
-            <a:avLst/>
-          </a:prstGeom>
-        </p:spPr>
-        <p:txBody>
-          <a:bodyPr vert="horz" lIns="91440" tIns="45720" rIns="91440" bIns="45720" rtlCol="0" anchor="b"/>
-          <a:lstStyle>
-            <a:lvl1pPr algn="r">
-              <a:defRPr sz="1200"/>
-            </a:lvl1pPr>
-          </a:lstStyle>
-          <a:p>
-            <a:fld id="{CE5E9CC1-C706-0F49-92D6-E571CC5EEA8F}" type="slidenum">
-              <a:rPr lang="en-US"/>
-              <a:t>‹#›</a:t>
-            </a:fld>
-            <a:endParaRPr lang="en-US"/>
-          </a:p>
-        </p:txBody>
-      </p:sp>
     </p:spTree>
     <p:extLst>
       <p:ext uri="{BB962C8B-B14F-4D97-AF65-F5344CB8AC3E}">
-        <p14:creationId xmlns:p14="http://schemas.microsoft.com/office/powerpoint/2010/main" val="1024086991"/>
+        <p14:creationId xmlns:p14="http://schemas.microsoft.com/office/powerpoint/2010/main" val="1389693394"/>
       </p:ext>
     </p:extLst>
   </p:cSld>
   <p:clrMap bg1="lt1" tx1="dk1" bg2="lt2" tx2="dk2" accent1="accent1" accent2="accent2" accent3="accent3" accent4="accent4" accent5="accent5" accent6="accent6" hlink="hlink" folHlink="folHlink"/>
   <p:notesStyle>
-    <a:lvl1pPr marL="0" algn="l" defTabSz="914400" rtl="0" eaLnBrk="1" latinLnBrk="0" hangingPunct="1">
+    <a:lvl1pPr marL="0" algn="l" defTabSz="914400" rtl="0" eaLnBrk="1" latinLnBrk="1" hangingPunct="1">
       <a:defRPr sz="1200" kern="1200">
         <a:solidFill>
           <a:schemeClr val="tx1"/>
@@ -688,7 +482,7 @@
         <a:cs typeface="+mn-cs"/>
       </a:defRPr>
     </a:lvl1pPr>
-    <a:lvl2pPr marL="457200" algn="l" defTabSz="914400" rtl="0" eaLnBrk="1" latinLnBrk="0" hangingPunct="1">
+    <a:lvl2pPr marL="457200" algn="l" defTabSz="914400" rtl="0" eaLnBrk="1" latinLnBrk="1" hangingPunct="1">
       <a:defRPr sz="1200" kern="1200">
         <a:solidFill>
           <a:schemeClr val="tx1"/>
@@ -698,7 +492,7 @@
         <a:cs typeface="+mn-cs"/>
       </a:defRPr>
     </a:lvl2pPr>
-    <a:lvl3pPr marL="914400" algn="l" defTabSz="914400" rtl="0" eaLnBrk="1" latinLnBrk="0" hangingPunct="1">
+    <a:lvl3pPr marL="914400" algn="l" defTabSz="914400" rtl="0" eaLnBrk="1" latinLnBrk="1" hangingPunct="1">
       <a:defRPr sz="1200" kern="1200">
         <a:solidFill>
           <a:schemeClr val="tx1"/>
@@ -708,7 +502,7 @@
         <a:cs typeface="+mn-cs"/>
       </a:defRPr>
     </a:lvl3pPr>
-    <a:lvl4pPr marL="1371600" algn="l" defTabSz="914400" rtl="0" eaLnBrk="1" latinLnBrk="0" hangingPunct="1">
+    <a:lvl4pPr marL="1371600" algn="l" defTabSz="914400" rtl="0" eaLnBrk="1" latinLnBrk="1" hangingPunct="1">
       <a:defRPr sz="1200" kern="1200">
         <a:solidFill>
           <a:schemeClr val="tx1"/>
@@ -718,7 +512,7 @@
         <a:cs typeface="+mn-cs"/>
       </a:defRPr>
     </a:lvl4pPr>
-    <a:lvl5pPr marL="1828800" algn="l" defTabSz="914400" rtl="0" eaLnBrk="1" latinLnBrk="0" hangingPunct="1">
+    <a:lvl5pPr marL="1828800" algn="l" defTabSz="914400" rtl="0" eaLnBrk="1" latinLnBrk="1" hangingPunct="1">
       <a:defRPr sz="1200" kern="1200">
         <a:solidFill>
           <a:schemeClr val="tx1"/>
@@ -728,7 +522,7 @@
         <a:cs typeface="+mn-cs"/>
       </a:defRPr>
     </a:lvl5pPr>
-    <a:lvl6pPr marL="2286000" algn="l" defTabSz="914400" rtl="0" eaLnBrk="1" latinLnBrk="0" hangingPunct="1">
+    <a:lvl6pPr marL="2286000" algn="l" defTabSz="914400" rtl="0" eaLnBrk="1" latinLnBrk="1" hangingPunct="1">
       <a:defRPr sz="1200" kern="1200">
         <a:solidFill>
           <a:schemeClr val="tx1"/>
@@ -738,7 +532,7 @@
         <a:cs typeface="+mn-cs"/>
       </a:defRPr>
     </a:lvl6pPr>
-    <a:lvl7pPr marL="2743200" algn="l" defTabSz="914400" rtl="0" eaLnBrk="1" latinLnBrk="0" hangingPunct="1">
+    <a:lvl7pPr marL="2743200" algn="l" defTabSz="914400" rtl="0" eaLnBrk="1" latinLnBrk="1" hangingPunct="1">
       <a:defRPr sz="1200" kern="1200">
         <a:solidFill>
           <a:schemeClr val="tx1"/>
@@ -748,7 +542,7 @@
         <a:cs typeface="+mn-cs"/>
       </a:defRPr>
     </a:lvl7pPr>
-    <a:lvl8pPr marL="3200400" algn="l" defTabSz="914400" rtl="0" eaLnBrk="1" latinLnBrk="0" hangingPunct="1">
+    <a:lvl8pPr marL="3200400" algn="l" defTabSz="914400" rtl="0" eaLnBrk="1" latinLnBrk="1" hangingPunct="1">
       <a:defRPr sz="1200" kern="1200">
         <a:solidFill>
           <a:schemeClr val="tx1"/>
@@ -758,7 +552,7 @@
         <a:cs typeface="+mn-cs"/>
       </a:defRPr>
     </a:lvl8pPr>
-    <a:lvl9pPr marL="3657600" algn="l" defTabSz="914400" rtl="0" eaLnBrk="1" latinLnBrk="0" hangingPunct="1">
+    <a:lvl9pPr marL="3657600" algn="l" defTabSz="914400" rtl="0" eaLnBrk="1" latinLnBrk="1" hangingPunct="1">
       <a:defRPr sz="1200" kern="1200">
         <a:solidFill>
           <a:schemeClr val="tx1"/>
@@ -820,7 +614,6 @@
               <a:rPr lang="en-US" dirty="0"/>
               <a:t>안녕하세요, 팀 REDRED입니다. 저희는 회전하는 이벤트 카메라가 내보내는 이벤트를 하나의 월드 지도에 쌓는 칩을 만들었습니다. 교수님 센서의 원본 데이터 형식을 직접 해독해서 칩 입력으로 쓰고, 설계부터 배치배선과 검증까지 끝낸 풀칩입니다. 이 발표에서는 결과뿐 아니라 안 된 것과 고친 과정, 그리고 아직 남은 한계도 숨기지 않고 말씀드리겠습니다.</a:t>
             </a:r>
-            <a:endParaRPr lang="en-US" dirty="0"/>
           </a:p>
         </p:txBody>
       </p:sp>
@@ -908,7 +701,6 @@
               <a:rPr lang="en-US" dirty="0"/>
               <a:t>현수의 자기보정이 정말 일반화되는지, 저희는 정답을 아는 합성 장면에서 다시 확인했습니다. 센서가 피벗 주위로 도는 장면을 만들고 피벗 위치를 바꿔 가며 현수의 코드를 수정 없이 돌렸습니다. 먼저 평가 기준을 코드 작성 전에 커밋했습니다. 피벗이 150픽셀 이하인 주 시험에서는 피벗 복원 오차가 0.7에서 6.9픽셀이었습니다. 다만 이 범위에서는 상수를 잘못 써도 손해가 거의 없어서, 상수가 중요하다는 기준은 실패했습니다. 그래서 먼 피벗 변형을 따로 등록해서 돌렸습니다. 피벗이 1500에서 6000픽셀이면 복원이 정확하고 프리즈는 8도에서 18도로 무너졌습니다. pan 크기인 2만 픽셀에서는 반지름 추정이 29퍼센트에서 55퍼센트 흔들려 오차가 1.7도 남았지만, 프리즈의 116도보다는 훨씬 낫습니다.</a:t>
             </a:r>
-            <a:endParaRPr lang="en-US" dirty="0"/>
           </a:p>
         </p:txBody>
       </p:sp>
@@ -996,7 +788,6 @@
               <a:rPr lang="en-US" dirty="0"/>
               <a:t>이 알고리즘을 칩에 넣는 작업을 시작했습니다. 칩의 추정기 설정은 정적 입력이라서, 부트스트랩 구간에는 3자유도로 돌려 각도와 이동량을 모으고, 피벗을 구한 뒤 roll 모드로 전환하는 구조를 잡았습니다. 먼저 현수의 정수 기준모델을 로컬에서 재현해서 0.467도가 그대로 나오는 것을 확인했고, 3자유도 모드로 roll 전체를 5초에 돌려 봤습니다. 정수 3자유도의 각도 오차는 0.9에서 1.2도이고, 피벗 최소제곱은 반지름 26에서 39픽셀이 나옵니다. float의 49픽셀보다 작은데, 정수 3자유도의 이동량 잡음 때문입니다. 설명도 기준 0.9에 걸리는 경계 사례도 있어서, 이 판정 처리가 다음 과제입니다. 아직 RTL에는 들어가지 않았다는 점을 분명히 말씀드립니다.</a:t>
             </a:r>
-            <a:endParaRPr lang="en-US" dirty="0"/>
           </a:p>
         </p:txBody>
       </p:sp>
@@ -1084,7 +875,6 @@
               <a:rPr lang="en-US" dirty="0"/>
               <a:t>좌표 변환은 후보를 넓게 비교해서 골랐습니다. 직접 곱셈, CORDIC, 3단 전단 분해, 그리고 이번에 채택한 증분 변환을 같은 통합 모델에서 비교했습니다. 증분 변환 8레인은 곱셈기가 없고, 직접 곱셈과 출력이 한 비트도 다르지 않으면서 합성 면적은 2.29분의 1, 전력은 2.54분의 1입니다. 단, 이 이득은 센서가 8픽셀 묶음으로 데이터를 줄 때만 납니다. 한 픽셀씩 직렬로 처리하면 오히려 1.9배 큽니다. 교수님 센서가 group AER라서 맞아떨어진 선택입니다. CORDIC은 면적이 커서, 3단 전단은 정수 픽셀 전단이 비트 일치가 아니어서 탈락했습니다.</a:t>
             </a:r>
-            <a:endParaRPr lang="en-US" dirty="0"/>
           </a:p>
         </p:txBody>
       </p:sp>
@@ -1172,7 +962,6 @@
               <a:rPr lang="en-US" dirty="0"/>
               <a:t>월드 메모리는 8픽셀 단위 셀에 4비트짜리 확률적 로그 카운터를 둡니다. 이벤트가 들어올 때마다 셀 값을 올리는데, LFSR 난수로 확률적으로 올려서 4비트로도 넓은 범위를 셉니다. 2비트 극성은 셀의 96퍼센트가 포화돼서 장면이 거의 안 남아 탈락했습니다. 메모리는 8킬로비트 하드매크로 뱅크로 쪼개서 공간 타일로 배치했고, 시야 아래쪽 뱅크만 클록을 켭니다. 읽기와 쓰기 횟수를 줄이려고 프레임 단위로 비우는 64칸 병합 캐시를 앞에 두었는데, 64칸이면 프레임당 서로 다른 워드 수와 정확히 같아서 이상적인 병합입니다. 면적은 사실상 메모리가 결정합니다.</a:t>
             </a:r>
-            <a:endParaRPr lang="en-US" dirty="0"/>
           </a:p>
         </p:txBody>
       </p:sp>
@@ -1260,7 +1049,6 @@
               <a:rPr lang="en-US" dirty="0"/>
               <a:t>자세 추정기는 이벤트만으로 회전각을 구합니다. 시야 범위를 3픽셀 셀로 나눈 1비트 지도를 세 장 둡니다. 직전 창, 현재 창, 그리고 키프레임 앵커입니다. 창의 이벤트를 후보 각도 아홉 개로 돌려서 직전 지도와 겹치는 정도를 점수로 매기고, 가장 높은 후보를 포물선으로 보정합니다. 느릴 때만 창을 8프레임으로 늘리고, 속도는 이전 값과 섞습니다. 키프레임은 각도가 30도 이상 벌어지면 교체해서 누적 오차를 줄입니다. 이 구조를 정수 기준모델로 먼저 만들고, 같은 동작을 RTL로 구현해 비트 단위로 맞췄습니다.</a:t>
             </a:r>
-            <a:endParaRPr lang="en-US" dirty="0"/>
           </a:p>
         </p:txBody>
       </p:sp>
@@ -1348,7 +1136,6 @@
               <a:rPr lang="en-US" dirty="0"/>
               <a:t>가장 큰 시행착오입니다. 5.5나노초를 목표로 배치배선했고 정적 타이밍 분석은 여유가 25피코초로 통과했습니다. 그런데 느린 코너 SDF로 게이트 시뮬레이션을 돌리면 5.5나노초에서 정지했고 6나노초에서는 불일치가 났습니다. 8나노초와 12나노초에서는 완주해서 비트 단위로 일치합니다. 같은 넷리스트가 정적 분석에서는 위반이 없는데 시뮬에서만 이상해서 원인을 추적했습니다. 매크로 모델의 경주, 입력 인가 지연, 셀 모델의 타이밍 검사를 하나씩 배제했지만 끝내 규명하지 못했습니다. 그래서 출하 클록을 8나노초로 고정하고, 규명하지 못했다는 사실을 한계로 적었습니다.</a:t>
             </a:r>
-            <a:endParaRPr lang="en-US" dirty="0"/>
           </a:p>
         </p:txBody>
       </p:sp>
@@ -1436,7 +1223,6 @@
               <a:rPr lang="en-US" dirty="0"/>
               <a:t>설계는 후보를 먼저 넓게 모으고 측정으로 걸러서 정했습니다. 약 60개 후보가 있었고, 후보마다 측정 결과와 탈락 사유를 문서로 남겼습니다. 월드 표현에서는 해시 스케치, 블록 부동소수점, 희소 월드, 로그 극좌표를 시험했는데 모두 상관이나 비트 비용에서 졌습니다. 추정기에서는 셀별 깊이 지도가 정답 궤적에서는 10퍼센트 좋아 보였지만 칩 안 추정 궤적에서는 틀린 방향 대조군이 더 높게 나와서 추정 오차를 흡수하는 것으로 판단하고 뺐습니다. 래치 메모리는 배치 후 시뮬에서 24퍼센트가 불일치해서 탈락했습니다. 무엇을 안 했는지도 설계의 일부라고 생각합니다.</a:t>
             </a:r>
-            <a:endParaRPr lang="en-US" dirty="0"/>
           </a:p>
         </p:txBody>
       </p:sp>
@@ -1524,7 +1310,6 @@
               <a:rPr lang="en-US" dirty="0"/>
               <a:t>메모리 구현과 물리 설계에서 많이 막혔습니다. 교육용 PDK에는 SRAM이 없어서 32킬로비트 뱅크로 세 방식을 실측했습니다. 플립플롭과 클록 게이팅은 레이아웃, 추출, 배치 후 시뮬이 전부 닫히는 유일한 방식이었고, 래치는 시뮬이 맞지 않았고, 오픈 소스 메모리는 GDS 병합이 안 됐습니다. 추정기 평면은 비트마다 유지용 선택기가 붙어서 면적이 0.55제곱밀리미터 늘고 클록 게이팅이 안 걸려서 단어 단위 쓰기로 다시 만들었습니다. 풀칩 DRC는 전원선 via 스택 105건에서 시작해 26건, 10건으로 줄였는데, 고치는 스크립트의 버그로 전원 연결이 끊긴 곳이 15에서 36곳 생겨서 사전 검사 방식으로 바꿨습니다.</a:t>
             </a:r>
-            <a:endParaRPr lang="en-US" dirty="0"/>
           </a:p>
         </p:txBody>
       </p:sp>
@@ -1612,7 +1397,6 @@
               <a:rPr lang="en-US" dirty="0"/>
               <a:t>팀 안에서 저희는 다른 설계 라인도 병행해서 만들었습니다. 이 라인에서 얻은 시행착오를 함께 적습니다. 첫째, 클록 게이팅 hold 위반이 마이너스 30피코초였는데, 원인이 클록 트리가 래치를 일찍 여는 것임을 찾아 라이브러리 클록 게이트 셀로 바꿔 해결했습니다. 남은 7피코초 위반은 버퍼를 넣는 방법이 밀집 영역에서 멀리 밀려나 실패했고, 선택 회로를 한 단계 느린 셀로 교체하는 방법으로 풀었습니다. 둘째, 키프레임과 루프 클로저를 쓰는 SLAM식 지도는 합성과 실제 영상 모두에서 이득이 없어 기각했습니다. 셋째, 1024각도 좌표 변환은 표 방식이 배선이 안 풀려 직접 행렬곱이 맞았습니다. 넷째, 추정기를 플립플롭 메모리로 단독 배치배선하면 타이밍이 17나노초 모자라 SRAM이 필요하다는 근거가 되었습니다.</a:t>
             </a:r>
-            <a:endParaRPr lang="en-US" dirty="0"/>
           </a:p>
         </p:txBody>
       </p:sp>
@@ -1700,7 +1484,6 @@
               <a:rPr lang="en-US" dirty="0"/>
               <a:t>병행 설계 라인에서 저희는 생체 모방 아이디어를 여러 개 시도했습니다. 원칙은 합성 장면에서 좋아 보여도 실제 프레임과 사전에 정한 기준으로 다시 확인하는 것이었습니다. 채택한 것은 세 가지입니다. 이벤트를 열 단위로 묶는 중심와식 클러스터링은 손실을 57.6퍼센트에서 6.9퍼센트로 줄였고, 눈 깜빡임을 본뜬 유휴 시 코어 클록 차단은 유휴가 긴 입력에서 전력을 71퍼센트 줄였으며, 메모리 행 단위 선택적 활성화는 실제 DELTA 활동도에서 전력을 65.5퍼센트 줄였습니다. 반대로 이득 조절은 합성 장면에서만 이득이 있어 정정했고, 원심성 복사는 UZH에서는 23.4도에서 8.5도로 좋아졌지만 RobotEvt에서는 기준을 못 넘어 기각했습니다. 희소 행 할당과 기억 소멸, 키프레임 지도도 사전 기준을 넘지 못했습니다. 칩 S의 전력 13밀리와트는 활동도 입력이 없는 값이라서, 절감 효과는 이 병행 실측으로 보강합니다. 단 blink의 71퍼센트는 유휴가 길도록 만든 시험 입력의 값이고, 실제 DELTA에서 칩이 일하는 시간은 3에서 25퍼센트입니다.</a:t>
             </a:r>
-            <a:endParaRPr lang="en-US" dirty="0"/>
           </a:p>
         </p:txBody>
       </p:sp>
@@ -1788,7 +1571,6 @@
               <a:rPr lang="en-US" dirty="0"/>
               <a:t>이 발표의 핵심 특장점 여섯 가지를 먼저 말씀드립니다. 첫째, 설계한 RTL이 기준모델과 한 비트도 다르지 않습니다. 변환과 쓰기 경로, 추정기, 종단 시뮬레이션이 모두 불일치 0이고 논리 동등성 검사도 통과했습니다. 둘째, 풀칩을 8나노초에서 배치배선하고 signoff 타이밍 여유 2.4나노초로 통과했습니다. 셋째, 교수님의 실제 roll 영상에서 각도 오차가 평균 0.47도입니다. 넷째, 칩에 녹화에 맞춘 상수가 있었는데 그게 사실 피벗 하나였고, 데이터에서 구하는 알고리즘으로 61도 붕괴가 0.67도로 줄어드는 것을 정답 있는 합성 장면에서 독립적으로 확인했습니다. 다섯째, 교수님 센서의 원본 데이터를 직접 해독해서 칩이 그대로 받습니다. 여섯째, 후보 약 60개를 측정으로 걸러냈고 안 된 것과 고친 과정도 다섯 쪽에 걸쳐 모두 적었습니다. 그리고 한계도 분명합니다. 자기보정은 아직 칩 RTL에 들어가지 않았고, 출하 클록은 8나노초이며, 전력은 활동도 입력이 없는 값입니다.</a:t>
             </a:r>
-            <a:endParaRPr lang="en-US" dirty="0"/>
           </a:p>
         </p:txBody>
       </p:sp>
@@ -1876,7 +1658,6 @@
               <a:rPr lang="en-US" dirty="0"/>
               <a:t>정리하면 이 칩의 장점은 교수님 센서의 원본 데이터를 직접 받아 실제 영상에서 동작하고, 기준모델과 비트 단위로 같고, 배치배선과 signoff까지 닫혔다는 점입니다. 단점도 분명합니다. 칩에는 녹화에서 맞춘 상수가 남아 있어서 자기보정을 칩에 넣는 일이 남았고, 출하 클록이 8나노초로 물러났고, 느린 코너 시뮬이 5.5나노초에서 맞지 않는 이유를 규명하지 못했습니다. 고려할 점으로, 월드를 1024 곱하기 1024로 키우면 메모리가 지배하므로 SRAM이 필요하고, 전력은 활동도 기반 측정이 필요합니다.</a:t>
             </a:r>
-            <a:endParaRPr lang="en-US" dirty="0"/>
           </a:p>
         </p:txBody>
       </p:sp>
@@ -1964,7 +1745,6 @@
               <a:rPr lang="en-US" dirty="0"/>
               <a:t>이벤트 카메라는 밝기가 변한 픽셀의 주소와 극성만 내보냅니다. 카메라가 회전하면 같은 물체가 센서의 다른 픽셀에서 발화하므로, 이벤트를 그대로 쌓으면 왼쪽처럼 소용돌이로 번집니다. 회전각으로 좌표를 되돌려 쌓으면 오른쪽처럼 방의 구조가 보입니다. 그래서 칩이 해야 할 일은 두 가지입니다. 회전각을 구하고, 그 각도로 이벤트마다 월드 좌표를 계산해 월드 메모리에 쓰는 것입니다. 제약은 교수님 Q&amp;A로 확정됐습니다. 회전은 180도 이내이고 평행 이동은 없습니다.</a:t>
             </a:r>
-            <a:endParaRPr lang="en-US" dirty="0"/>
           </a:p>
         </p:txBody>
       </p:sp>
@@ -2052,7 +1832,6 @@
               <a:rPr lang="en-US" dirty="0"/>
               <a:t>교수님이 주신 녹화는 .dvs 파일이고, 삼성 S5KRC1S 센서의 group AER 형식입니다. 이벤트 워드 하나가 최대 16픽셀을 담고, 컬럼 주소는 컬럼마다 한 번, 타임스탬프는 프레임마다 하나입니다. 프레임 주기는 1000fps가 아니라 실측 773마이크로초, 약 1294fps였습니다. 녹화는 두 개입니다. roll은 7500만 이벤트에 총 323도 회전하고, pan은 8700만 이벤트에 수평 1680픽셀 움직입니다. 정답 각도가 없어서 프레임끼리 정합하는 방법으로 정답을 대신 만들었고, 외부 벤치마크로 UZH 회전 시퀀스도 같은 디코더에 넣어 확인했습니다.</a:t>
             </a:r>
-            <a:endParaRPr lang="en-US" dirty="0"/>
           </a:p>
         </p:txBody>
       </p:sp>
@@ -2140,7 +1919,6 @@
               <a:rPr lang="en-US" dirty="0"/>
               <a:t>칩의 구조입니다. 위쪽 줄이 쓰기 경로입니다. 센서의 group AER 워드가 디코더로 들어가고, 변환 8레인이 픽셀마다 월드 좌표를 계산하고, 직렬화기와 월드 라이터를 거쳐 월드 메모리 뱅크에 쓰입니다. 아래쪽 줄이 자세 추정기입니다. 같은 워드를 받아 시야 범위의 1비트 지도 세 장으로 회전각을 추정하고, CORDIC으로 만든 프레임 파라미터를 변환 레인에 프레임마다 한 번 넘겨줍니다. 칩 안에서 이벤트만으로 각도를 구하므로 외부에서 각도를 받을 필요가 없습니다.</a:t>
             </a:r>
-            <a:endParaRPr lang="en-US" dirty="0"/>
           </a:p>
         </p:txBody>
       </p:sp>
@@ -2228,7 +2006,6 @@
               <a:rPr lang="en-US" dirty="0"/>
               <a:t>풀칩을 배치배선하고 독립 Quantus 추출로 signoff 타이밍을 쟀습니다. 8 ns, 125메가헤르츠에서 setup 여유가 2.4나노초, hold 여유는 7피코초로 위반이 없습니다. 센서의 최악 처리량이 약 112메가헤르츠라서 8나노초면 충족합니다. 8킬로비트 하드매크로 46개가 면적의 대부분이고, 표준셀은 0.33제곱밀리미터뿐입니다. DRC는 전원선 via 스택 10건만 남았는데, 신호선과 표준셀 위반은 없습니다. 이 10건을 없애려면 전원 배선부터 다시 만드는 풀 P&amp;R이 필요해서 타이밍 클로저 위험 때문에 하지 않았습니다. 전력 13밀리와트는 벡터 없는 기본 활동도 값이고 매크로 내부 전력이 0으로 잡혀 있어 절대값 신뢰도는 낮습니다.</a:t>
             </a:r>
-            <a:endParaRPr lang="en-US" dirty="0"/>
           </a:p>
         </p:txBody>
       </p:sp>
@@ -2316,7 +2093,6 @@
               <a:rPr lang="en-US" dirty="0"/>
               <a:t>검증은 기준모델을 정답으로 두고 RTL이 한 비트도 다르지 않은지 보는 방식입니다. 변환과 쓰기 경로는 교수 roll, pan과 UZH 세 데이터에서 픽셀마다 좌표와 뱅크, 주소, 니블을 비교하고, 끝에 월드 메모리 전체를 비교했는데 불일치가 없었습니다. 추정기는 교수 데이터 네 구간에서 프레임 파라미터와 창 상태, 점수, 끝 평면이 전부 일치했습니다. 칩 전체를 이은 종단 시뮬레이션도 프레임 파라미터, 창 상태, 최종 월드 메모리 2048워드까지 일치했습니다. 논리 동등성 검사는 합성 결과와 최종 넷리스트가 같은지 확인해 통과했고, 처음 시도한 평면 비교는 중단돼서 두 단계로 나눠 풀었습니다.</a:t>
             </a:r>
-            <a:endParaRPr lang="en-US" dirty="0"/>
           </a:p>
         </p:txBody>
       </p:sp>
@@ -2404,7 +2180,6 @@
               <a:rPr lang="en-US" dirty="0"/>
               <a:t>정수 기준모델의 정확도입니다. roll 녹화에서 ECC 정답 대비 평균 0.47도, pan에서 평균 14픽셀입니다. 이 정수 모델은 RTL의 사양이고, RTL과 비트 단위로 일치합니다. 다만 UZH 회전 시퀀스에서 3자유도 정수 모델의 정확도는 좋지 않았습니다. 5초 간격 중복 지표가 91픽셀로, float 기준 15픽셀에 한참 못 미칩니다. 원인은 이동량 차이를 기준 평면 각도로 돌려 주지 않는 근사로 의심되고, 교수님 데이터는 회전 한 자유도라 영향이 없습니다. 그래서 UZH에서의 RTL은 하드웨어 일치 검증용으로만 쓰고 정확도 수치로는 인용하지 않습니다.</a:t>
             </a:r>
-            <a:endParaRPr lang="en-US" dirty="0"/>
           </a:p>
         </p:txBody>
       </p:sp>
@@ -2492,7 +2267,6 @@
               <a:rPr lang="en-US" dirty="0"/>
               <a:t>저희가 가장 중요하게 본 약점입니다. 칩에는 녹화에서 맞춘 상수가 있었습니다. roll의 회전 중심, pan의 회전·이동 연동 상수 네 개입니다. 그런데 이 네 상수를 분석해 보니 사실 먼 피벗을 중심으로 한 회전 하나였습니다. 센서가 봉 주위를 도는 것이라서, roll과 pan은 같은 모델에서 피벗 반지름만 다릅니다. roll은 약 50픽셀, pan은 약 2만 픽셀입니다. 그래서 한 녹화의 상수를 다른 녹화에 쓰면 roll은 61도가 틀어지고 pan은 470픽셀이 틀어집니다. 상수를 데이터에서 직접 구하는 자기보정을 float 모델로 만들었더니, roll은 0.67도로 다시 맞춘 값과 거의 같아졌습니다.</a:t>
             </a:r>
-            <a:endParaRPr lang="en-US" dirty="0"/>
           </a:p>
         </p:txBody>
       </p:sp>
@@ -2570,6 +2344,7 @@
         <a:solidFill>
           <a:srgbClr val="FFFFFF"/>
         </a:solidFill>
+        <a:effectLst/>
       </p:bgPr>
     </p:bg>
     <p:spTree>
@@ -2607,7 +2382,7 @@
           <a:bodyPr wrap="square" lIns="0" tIns="0" rIns="0" bIns="0" rtlCol="0" anchor="ctr"/>
           <a:lstStyle/>
           <a:p>
-            <a:pPr indent="0" marL="0">
+            <a:pPr marL="0" indent="0">
               <a:buNone/>
             </a:pPr>
             <a:r>
@@ -2645,7 +2420,7 @@
           </a:prstGeom>
           <a:extLst>
             <a:ext uri="{C572A759-6A51-4108-AA02-DFA0A04FC94B}">
-              <ma14:wrappingTextBoxFlag xmlns:ma14="http://schemas.microsoft.com/office/mac/drawingml/2011/main" val="0"/>
+              <ma14:wrappingTextBoxFlag xmlns:ma14="http://schemas.microsoft.com/office/mac/drawingml/2011/main" xmlns="" val="0"/>
             </a:ext>
           </a:extLst>
         </p:spPr>
@@ -2666,8 +2441,8 @@
           <a:p>
             <a:pPr algn="r"/>
             <a:fld id="{F7021451-1387-4CA6-816F-3879F97B5CBC}" type="slidenum">
-              <a:rPr b="0" lang="en-US"/>
-              <a:t>1002</a:t>
+              <a:rPr lang="en-US" b="0"/>
+              <a:t>‹#›</a:t>
             </a:fld>
             <a:endParaRPr lang="en-US"/>
           </a:p>
@@ -2689,6 +2464,7 @@
         <a:solidFill>
           <a:srgbClr val="F5F5F7"/>
         </a:solidFill>
+        <a:effectLst/>
       </p:bgPr>
     </p:bg>
     <p:spTree>
@@ -2726,7 +2502,7 @@
           <a:bodyPr wrap="square" lIns="0" tIns="0" rIns="0" bIns="0" rtlCol="0" anchor="ctr"/>
           <a:lstStyle/>
           <a:p>
-            <a:pPr indent="0" marL="0">
+            <a:pPr marL="0" indent="0">
               <a:buNone/>
             </a:pPr>
             <a:r>
@@ -2764,7 +2540,7 @@
           </a:prstGeom>
           <a:extLst>
             <a:ext uri="{C572A759-6A51-4108-AA02-DFA0A04FC94B}">
-              <ma14:wrappingTextBoxFlag xmlns:ma14="http://schemas.microsoft.com/office/mac/drawingml/2011/main" val="0"/>
+              <ma14:wrappingTextBoxFlag xmlns:ma14="http://schemas.microsoft.com/office/mac/drawingml/2011/main" xmlns="" val="0"/>
             </a:ext>
           </a:extLst>
         </p:spPr>
@@ -2785,8 +2561,8 @@
           <a:p>
             <a:pPr algn="r"/>
             <a:fld id="{F7021451-1387-4CA6-816F-3879F97B5CBC}" type="slidenum">
-              <a:rPr b="0" lang="en-US"/>
-              <a:t>1003</a:t>
+              <a:rPr lang="en-US" b="0"/>
+              <a:t>‹#›</a:t>
             </a:fld>
             <a:endParaRPr lang="en-US"/>
           </a:p>
@@ -2808,6 +2584,7 @@
         <a:solidFill>
           <a:srgbClr val="272729"/>
         </a:solidFill>
+        <a:effectLst/>
       </p:bgPr>
     </p:bg>
     <p:spTree>
@@ -2835,6 +2612,11 @@
 <file path=ppt/slideMasters/slideMaster1.xml><?xml version="1.0" encoding="utf-8"?>
 <p:sldMaster xmlns:a="http://schemas.openxmlformats.org/drawingml/2006/main" xmlns:r="http://schemas.openxmlformats.org/officeDocument/2006/relationships" xmlns:p="http://schemas.openxmlformats.org/presentationml/2006/main">
   <p:cSld>
+    <p:bg>
+      <p:bgRef idx="1001">
+        <a:schemeClr val="bg1"/>
+      </p:bgRef>
+    </p:bg>
     <p:spTree>
       <p:nvGrpSpPr>
         <p:cNvPr id="1" name=""/>
@@ -2869,7 +2651,7 @@
           </a:prstGeom>
           <a:extLst>
             <a:ext uri="{C572A759-6A51-4108-AA02-DFA0A04FC94B}">
-              <ma14:wrappingTextBoxFlag xmlns:ma14="http://schemas.microsoft.com/office/mac/drawingml/2011/main" val="0"/>
+              <ma14:wrappingTextBoxFlag xmlns:ma14="http://schemas.microsoft.com/office/mac/drawingml/2011/main" xmlns="" val="0"/>
             </a:ext>
           </a:extLst>
         </p:spPr>
@@ -2890,8 +2672,8 @@
           <a:p>
             <a:pPr algn="r"/>
             <a:fld id="{F7021451-1387-4CA6-816F-3879F97B5CBC}" type="slidenum">
-              <a:rPr b="0" lang="en-US"/>
-              <a:t>null</a:t>
+              <a:rPr lang="en-US" b="0"/>
+              <a:t>‹#›</a:t>
             </a:fld>
             <a:endParaRPr lang="en-US"/>
           </a:p>
@@ -3198,7 +2980,7 @@
           <a:bodyPr wrap="square" lIns="0" tIns="0" rIns="0" bIns="0" rtlCol="0" anchor="t"/>
           <a:lstStyle/>
           <a:p>
-            <a:pPr eaLnBrk="0" indent="0" marL="0">
+            <a:pPr marL="0" indent="0" eaLnBrk="0">
               <a:buNone/>
             </a:pPr>
             <a:r>
@@ -3237,7 +3019,7 @@
           <a:bodyPr wrap="square" lIns="0" tIns="0" rIns="0" bIns="0" rtlCol="0" anchor="t"/>
           <a:lstStyle/>
           <a:p>
-            <a:pPr eaLnBrk="0" indent="0" marL="0">
+            <a:pPr marL="0" indent="0" eaLnBrk="0">
               <a:buNone/>
             </a:pPr>
             <a:r>
@@ -3254,7 +3036,7 @@
             <a:endParaRPr lang="en-US" sz="4000" dirty="0"/>
           </a:p>
           <a:p>
-            <a:pPr eaLnBrk="0" indent="0" marL="0">
+            <a:pPr marL="0" indent="0" eaLnBrk="0">
               <a:buNone/>
             </a:pPr>
             <a:r>
@@ -3293,7 +3075,7 @@
           <a:bodyPr wrap="square" lIns="0" tIns="0" rIns="0" bIns="0" rtlCol="0" anchor="t"/>
           <a:lstStyle/>
           <a:p>
-            <a:pPr eaLnBrk="0" indent="0" marL="0">
+            <a:pPr marL="0" indent="0" eaLnBrk="0">
               <a:buNone/>
             </a:pPr>
             <a:r>
@@ -3332,7 +3114,7 @@
           <a:bodyPr wrap="square" lIns="0" tIns="0" rIns="0" bIns="0" rtlCol="0" anchor="t"/>
           <a:lstStyle/>
           <a:p>
-            <a:pPr eaLnBrk="0" indent="0" marL="0">
+            <a:pPr marL="0" indent="0" eaLnBrk="0">
               <a:buNone/>
             </a:pPr>
             <a:r>
@@ -3398,7 +3180,7 @@
           </a:bodyPr>
           <a:lstStyle/>
           <a:p>
-            <a:pPr eaLnBrk="0" indent="0" marL="0">
+            <a:pPr marL="0" indent="0" eaLnBrk="0">
               <a:buNone/>
             </a:pPr>
             <a:r>
@@ -3439,12 +3221,48 @@
             <a:tbl>
               <a:tblPr/>
               <a:tblGrid>
-                <a:gridCol w="2377440"/>
-                <a:gridCol w="822960"/>
-                <a:gridCol w="2651760"/>
-                <a:gridCol w="1371600"/>
-                <a:gridCol w="1188720"/>
-                <a:gridCol w="2651760"/>
+                <a:gridCol w="2377440">
+                  <a:extLst>
+                    <a:ext uri="{9D8B030D-6E8A-4147-A177-3AD203B41FA5}">
+                      <a16:colId xmlns:a16="http://schemas.microsoft.com/office/drawing/2014/main" val="20000"/>
+                    </a:ext>
+                  </a:extLst>
+                </a:gridCol>
+                <a:gridCol w="822960">
+                  <a:extLst>
+                    <a:ext uri="{9D8B030D-6E8A-4147-A177-3AD203B41FA5}">
+                      <a16:colId xmlns:a16="http://schemas.microsoft.com/office/drawing/2014/main" val="20001"/>
+                    </a:ext>
+                  </a:extLst>
+                </a:gridCol>
+                <a:gridCol w="2651760">
+                  <a:extLst>
+                    <a:ext uri="{9D8B030D-6E8A-4147-A177-3AD203B41FA5}">
+                      <a16:colId xmlns:a16="http://schemas.microsoft.com/office/drawing/2014/main" val="20002"/>
+                    </a:ext>
+                  </a:extLst>
+                </a:gridCol>
+                <a:gridCol w="1371600">
+                  <a:extLst>
+                    <a:ext uri="{9D8B030D-6E8A-4147-A177-3AD203B41FA5}">
+                      <a16:colId xmlns:a16="http://schemas.microsoft.com/office/drawing/2014/main" val="20003"/>
+                    </a:ext>
+                  </a:extLst>
+                </a:gridCol>
+                <a:gridCol w="1188720">
+                  <a:extLst>
+                    <a:ext uri="{9D8B030D-6E8A-4147-A177-3AD203B41FA5}">
+                      <a16:colId xmlns:a16="http://schemas.microsoft.com/office/drawing/2014/main" val="20004"/>
+                    </a:ext>
+                  </a:extLst>
+                </a:gridCol>
+                <a:gridCol w="2651760">
+                  <a:extLst>
+                    <a:ext uri="{9D8B030D-6E8A-4147-A177-3AD203B41FA5}">
+                      <a16:colId xmlns:a16="http://schemas.microsoft.com/office/drawing/2014/main" val="20005"/>
+                    </a:ext>
+                  </a:extLst>
+                </a:gridCol>
               </a:tblGrid>
               <a:tr h="566928">
                 <a:tc>
@@ -3452,7 +3270,7 @@
                     <a:bodyPr/>
                     <a:lstStyle/>
                     <a:p>
-                      <a:pPr eaLnBrk="0" indent="0" marL="0">
+                      <a:pPr marL="0" indent="0" eaLnBrk="0">
                         <a:buNone/>
                       </a:pPr>
                       <a:r>
@@ -3520,7 +3338,7 @@
                     <a:bodyPr/>
                     <a:lstStyle/>
                     <a:p>
-                      <a:pPr eaLnBrk="0" indent="0" marL="0">
+                      <a:pPr marL="0" indent="0" eaLnBrk="0">
                         <a:buNone/>
                       </a:pPr>
                       <a:r>
@@ -3588,7 +3406,7 @@
                     <a:bodyPr/>
                     <a:lstStyle/>
                     <a:p>
-                      <a:pPr eaLnBrk="0" indent="0" marL="0">
+                      <a:pPr marL="0" indent="0" eaLnBrk="0">
                         <a:buNone/>
                       </a:pPr>
                       <a:r>
@@ -3656,7 +3474,7 @@
                     <a:bodyPr/>
                     <a:lstStyle/>
                     <a:p>
-                      <a:pPr eaLnBrk="0" indent="0" marL="0">
+                      <a:pPr marL="0" indent="0" eaLnBrk="0">
                         <a:buNone/>
                       </a:pPr>
                       <a:r>
@@ -3724,7 +3542,7 @@
                     <a:bodyPr/>
                     <a:lstStyle/>
                     <a:p>
-                      <a:pPr eaLnBrk="0" indent="0" marL="0">
+                      <a:pPr marL="0" indent="0" eaLnBrk="0">
                         <a:buNone/>
                       </a:pPr>
                       <a:r>
@@ -3792,7 +3610,7 @@
                     <a:bodyPr/>
                     <a:lstStyle/>
                     <a:p>
-                      <a:pPr eaLnBrk="0" indent="0" marL="0">
+                      <a:pPr marL="0" indent="0" eaLnBrk="0">
                         <a:buNone/>
                       </a:pPr>
                       <a:r>
@@ -3855,6 +3673,11 @@
                     </a:solidFill>
                   </a:tcPr>
                 </a:tc>
+                <a:extLst>
+                  <a:ext uri="{0D108BD9-81ED-4DB2-BD59-A6C34878D82A}">
+                    <a16:rowId xmlns:a16="http://schemas.microsoft.com/office/drawing/2014/main" val="10000"/>
+                  </a:ext>
+                </a:extLst>
               </a:tr>
               <a:tr h="566928">
                 <a:tc>
@@ -3862,7 +3685,7 @@
                     <a:bodyPr/>
                     <a:lstStyle/>
                     <a:p>
-                      <a:pPr eaLnBrk="0" indent="0" marL="0">
+                      <a:pPr marL="0" indent="0" eaLnBrk="0">
                         <a:buNone/>
                       </a:pPr>
                       <a:r>
@@ -3930,7 +3753,7 @@
                     <a:bodyPr/>
                     <a:lstStyle/>
                     <a:p>
-                      <a:pPr eaLnBrk="0" indent="0" marL="0">
+                      <a:pPr marL="0" indent="0" eaLnBrk="0">
                         <a:buNone/>
                       </a:pPr>
                       <a:r>
@@ -3998,7 +3821,7 @@
                     <a:bodyPr/>
                     <a:lstStyle/>
                     <a:p>
-                      <a:pPr eaLnBrk="0" indent="0" marL="0">
+                      <a:pPr marL="0" indent="0" eaLnBrk="0">
                         <a:buNone/>
                       </a:pPr>
                       <a:r>
@@ -4066,7 +3889,7 @@
                     <a:bodyPr/>
                     <a:lstStyle/>
                     <a:p>
-                      <a:pPr eaLnBrk="0" indent="0" marL="0">
+                      <a:pPr marL="0" indent="0" eaLnBrk="0">
                         <a:buNone/>
                       </a:pPr>
                       <a:r>
@@ -4134,7 +3957,7 @@
                     <a:bodyPr/>
                     <a:lstStyle/>
                     <a:p>
-                      <a:pPr eaLnBrk="0" indent="0" marL="0">
+                      <a:pPr marL="0" indent="0" eaLnBrk="0">
                         <a:buNone/>
                       </a:pPr>
                       <a:r>
@@ -4202,7 +4025,7 @@
                     <a:bodyPr/>
                     <a:lstStyle/>
                     <a:p>
-                      <a:pPr eaLnBrk="0" indent="0" marL="0">
+                      <a:pPr marL="0" indent="0" eaLnBrk="0">
                         <a:buNone/>
                       </a:pPr>
                       <a:r>
@@ -4265,6 +4088,11 @@
                     </a:solidFill>
                   </a:tcPr>
                 </a:tc>
+                <a:extLst>
+                  <a:ext uri="{0D108BD9-81ED-4DB2-BD59-A6C34878D82A}">
+                    <a16:rowId xmlns:a16="http://schemas.microsoft.com/office/drawing/2014/main" val="10001"/>
+                  </a:ext>
+                </a:extLst>
               </a:tr>
               <a:tr h="566928">
                 <a:tc>
@@ -4272,7 +4100,7 @@
                     <a:bodyPr/>
                     <a:lstStyle/>
                     <a:p>
-                      <a:pPr eaLnBrk="0" indent="0" marL="0">
+                      <a:pPr marL="0" indent="0" eaLnBrk="0">
                         <a:buNone/>
                       </a:pPr>
                       <a:r>
@@ -4340,7 +4168,7 @@
                     <a:bodyPr/>
                     <a:lstStyle/>
                     <a:p>
-                      <a:pPr eaLnBrk="0" indent="0" marL="0">
+                      <a:pPr marL="0" indent="0" eaLnBrk="0">
                         <a:buNone/>
                       </a:pPr>
                       <a:r>
@@ -4408,7 +4236,7 @@
                     <a:bodyPr/>
                     <a:lstStyle/>
                     <a:p>
-                      <a:pPr eaLnBrk="0" indent="0" marL="0">
+                      <a:pPr marL="0" indent="0" eaLnBrk="0">
                         <a:buNone/>
                       </a:pPr>
                       <a:r>
@@ -4476,7 +4304,7 @@
                     <a:bodyPr/>
                     <a:lstStyle/>
                     <a:p>
-                      <a:pPr eaLnBrk="0" indent="0" marL="0">
+                      <a:pPr marL="0" indent="0" eaLnBrk="0">
                         <a:buNone/>
                       </a:pPr>
                       <a:r>
@@ -4544,7 +4372,7 @@
                     <a:bodyPr/>
                     <a:lstStyle/>
                     <a:p>
-                      <a:pPr eaLnBrk="0" indent="0" marL="0">
+                      <a:pPr marL="0" indent="0" eaLnBrk="0">
                         <a:buNone/>
                       </a:pPr>
                       <a:r>
@@ -4612,7 +4440,7 @@
                     <a:bodyPr/>
                     <a:lstStyle/>
                     <a:p>
-                      <a:pPr eaLnBrk="0" indent="0" marL="0">
+                      <a:pPr marL="0" indent="0" eaLnBrk="0">
                         <a:buNone/>
                       </a:pPr>
                       <a:r>
@@ -4675,6 +4503,11 @@
                     </a:solidFill>
                   </a:tcPr>
                 </a:tc>
+                <a:extLst>
+                  <a:ext uri="{0D108BD9-81ED-4DB2-BD59-A6C34878D82A}">
+                    <a16:rowId xmlns:a16="http://schemas.microsoft.com/office/drawing/2014/main" val="10002"/>
+                  </a:ext>
+                </a:extLst>
               </a:tr>
               <a:tr h="566928">
                 <a:tc>
@@ -4682,7 +4515,7 @@
                     <a:bodyPr/>
                     <a:lstStyle/>
                     <a:p>
-                      <a:pPr eaLnBrk="0" indent="0" marL="0">
+                      <a:pPr marL="0" indent="0" eaLnBrk="0">
                         <a:buNone/>
                       </a:pPr>
                       <a:r>
@@ -4750,7 +4583,7 @@
                     <a:bodyPr/>
                     <a:lstStyle/>
                     <a:p>
-                      <a:pPr eaLnBrk="0" indent="0" marL="0">
+                      <a:pPr marL="0" indent="0" eaLnBrk="0">
                         <a:buNone/>
                       </a:pPr>
                       <a:r>
@@ -4818,7 +4651,7 @@
                     <a:bodyPr/>
                     <a:lstStyle/>
                     <a:p>
-                      <a:pPr eaLnBrk="0" indent="0" marL="0">
+                      <a:pPr marL="0" indent="0" eaLnBrk="0">
                         <a:buNone/>
                       </a:pPr>
                       <a:r>
@@ -4886,7 +4719,7 @@
                     <a:bodyPr/>
                     <a:lstStyle/>
                     <a:p>
-                      <a:pPr eaLnBrk="0" indent="0" marL="0">
+                      <a:pPr marL="0" indent="0" eaLnBrk="0">
                         <a:buNone/>
                       </a:pPr>
                       <a:r>
@@ -4954,7 +4787,7 @@
                     <a:bodyPr/>
                     <a:lstStyle/>
                     <a:p>
-                      <a:pPr eaLnBrk="0" indent="0" marL="0">
+                      <a:pPr marL="0" indent="0" eaLnBrk="0">
                         <a:buNone/>
                       </a:pPr>
                       <a:r>
@@ -5022,7 +4855,7 @@
                     <a:bodyPr/>
                     <a:lstStyle/>
                     <a:p>
-                      <a:pPr eaLnBrk="0" indent="0" marL="0">
+                      <a:pPr marL="0" indent="0" eaLnBrk="0">
                         <a:buNone/>
                       </a:pPr>
                       <a:r>
@@ -5085,6 +4918,11 @@
                     </a:solidFill>
                   </a:tcPr>
                 </a:tc>
+                <a:extLst>
+                  <a:ext uri="{0D108BD9-81ED-4DB2-BD59-A6C34878D82A}">
+                    <a16:rowId xmlns:a16="http://schemas.microsoft.com/office/drawing/2014/main" val="10003"/>
+                  </a:ext>
+                </a:extLst>
               </a:tr>
               <a:tr h="566928">
                 <a:tc>
@@ -5092,7 +4930,7 @@
                     <a:bodyPr/>
                     <a:lstStyle/>
                     <a:p>
-                      <a:pPr eaLnBrk="0" indent="0" marL="0">
+                      <a:pPr marL="0" indent="0" eaLnBrk="0">
                         <a:buNone/>
                       </a:pPr>
                       <a:r>
@@ -5160,7 +4998,7 @@
                     <a:bodyPr/>
                     <a:lstStyle/>
                     <a:p>
-                      <a:pPr eaLnBrk="0" indent="0" marL="0">
+                      <a:pPr marL="0" indent="0" eaLnBrk="0">
                         <a:buNone/>
                       </a:pPr>
                       <a:r>
@@ -5228,7 +5066,7 @@
                     <a:bodyPr/>
                     <a:lstStyle/>
                     <a:p>
-                      <a:pPr eaLnBrk="0" indent="0" marL="0">
+                      <a:pPr marL="0" indent="0" eaLnBrk="0">
                         <a:buNone/>
                       </a:pPr>
                       <a:r>
@@ -5296,7 +5134,7 @@
                     <a:bodyPr/>
                     <a:lstStyle/>
                     <a:p>
-                      <a:pPr eaLnBrk="0" indent="0" marL="0">
+                      <a:pPr marL="0" indent="0" eaLnBrk="0">
                         <a:buNone/>
                       </a:pPr>
                       <a:r>
@@ -5364,7 +5202,7 @@
                     <a:bodyPr/>
                     <a:lstStyle/>
                     <a:p>
-                      <a:pPr eaLnBrk="0" indent="0" marL="0">
+                      <a:pPr marL="0" indent="0" eaLnBrk="0">
                         <a:buNone/>
                       </a:pPr>
                       <a:r>
@@ -5432,7 +5270,7 @@
                     <a:bodyPr/>
                     <a:lstStyle/>
                     <a:p>
-                      <a:pPr eaLnBrk="0" indent="0" marL="0">
+                      <a:pPr marL="0" indent="0" eaLnBrk="0">
                         <a:buNone/>
                       </a:pPr>
                       <a:r>
@@ -5495,6 +5333,11 @@
                     </a:solidFill>
                   </a:tcPr>
                 </a:tc>
+                <a:extLst>
+                  <a:ext uri="{0D108BD9-81ED-4DB2-BD59-A6C34878D82A}">
+                    <a16:rowId xmlns:a16="http://schemas.microsoft.com/office/drawing/2014/main" val="10004"/>
+                  </a:ext>
+                </a:extLst>
               </a:tr>
             </a:tbl>
           </a:graphicData>
@@ -5526,6 +5369,13 @@
             <a:prstDash val="solid"/>
           </a:ln>
         </p:spPr>
+        <p:txBody>
+          <a:bodyPr/>
+          <a:lstStyle/>
+          <a:p>
+            <a:endParaRPr lang="ko-KR" altLang="en-US"/>
+          </a:p>
+        </p:txBody>
       </p:sp>
       <p:sp>
         <p:nvSpPr>
@@ -5548,7 +5398,7 @@
           <a:bodyPr wrap="square" lIns="0" tIns="0" rIns="0" bIns="0" rtlCol="0" anchor="t"/>
           <a:lstStyle/>
           <a:p>
-            <a:pPr eaLnBrk="0" indent="0" marL="0">
+            <a:pPr marL="0" indent="0" eaLnBrk="0">
               <a:buNone/>
             </a:pPr>
             <a:r>
@@ -5587,7 +5437,7 @@
           <a:bodyPr wrap="square" lIns="0" tIns="0" rIns="0" bIns="0" rtlCol="0" anchor="t"/>
           <a:lstStyle/>
           <a:p>
-            <a:pPr eaLnBrk="0" indent="0" marL="0">
+            <a:pPr marL="0" indent="0" eaLnBrk="0">
               <a:buNone/>
             </a:pPr>
             <a:r>
@@ -5631,6 +5481,13 @@
             <a:prstDash val="solid"/>
           </a:ln>
         </p:spPr>
+        <p:txBody>
+          <a:bodyPr/>
+          <a:lstStyle/>
+          <a:p>
+            <a:endParaRPr lang="ko-KR" altLang="en-US"/>
+          </a:p>
+        </p:txBody>
       </p:sp>
       <p:sp>
         <p:nvSpPr>
@@ -5653,7 +5510,7 @@
           <a:bodyPr wrap="square" lIns="0" tIns="0" rIns="0" bIns="0" rtlCol="0" anchor="t"/>
           <a:lstStyle/>
           <a:p>
-            <a:pPr eaLnBrk="0" indent="0" marL="0">
+            <a:pPr marL="0" indent="0" eaLnBrk="0">
               <a:buNone/>
             </a:pPr>
             <a:r>
@@ -5692,7 +5549,7 @@
           <a:bodyPr wrap="square" lIns="0" tIns="0" rIns="0" bIns="0" rtlCol="0" anchor="t"/>
           <a:lstStyle/>
           <a:p>
-            <a:pPr eaLnBrk="0" indent="0" marL="0">
+            <a:pPr marL="0" indent="0" eaLnBrk="0">
               <a:buNone/>
             </a:pPr>
             <a:r>
@@ -5730,7 +5587,7 @@
           </a:prstGeom>
           <a:extLst>
             <a:ext uri="{C572A759-6A51-4108-AA02-DFA0A04FC94B}">
-              <ma14:wrappingTextBoxFlag xmlns:ma14="http://schemas.microsoft.com/office/mac/drawingml/2011/main" val="0"/>
+              <ma14:wrappingTextBoxFlag xmlns:ma14="http://schemas.microsoft.com/office/mac/drawingml/2011/main" xmlns="" val="0"/>
             </a:ext>
           </a:extLst>
         </p:spPr>
@@ -5749,9 +5606,9 @@
             </a:lvl1pPr>
           </a:lstStyle>
           <a:p>
-            <a:pPr eaLnBrk="0" algn="r"/>
+            <a:pPr algn="r" eaLnBrk="0"/>
             <a:fld id="{F7021451-1387-4CA6-816F-3879F97B5CBC}" type="slidenum">
-              <a:rPr b="0" lang="en-US"/>
+              <a:rPr lang="en-US" b="0"/>
               <a:t>10</a:t>
             </a:fld>
             <a:endParaRPr lang="en-US"/>
@@ -5806,7 +5663,7 @@
           </a:bodyPr>
           <a:lstStyle/>
           <a:p>
-            <a:pPr eaLnBrk="0" indent="0" marL="0">
+            <a:pPr marL="0" indent="0" eaLnBrk="0">
               <a:buNone/>
             </a:pPr>
             <a:r>
@@ -5847,9 +5704,27 @@
             <a:tbl>
               <a:tblPr/>
               <a:tblGrid>
-                <a:gridCol w="3291840"/>
-                <a:gridCol w="914400"/>
-                <a:gridCol w="6858000"/>
+                <a:gridCol w="3291840">
+                  <a:extLst>
+                    <a:ext uri="{9D8B030D-6E8A-4147-A177-3AD203B41FA5}">
+                      <a16:colId xmlns:a16="http://schemas.microsoft.com/office/drawing/2014/main" val="20000"/>
+                    </a:ext>
+                  </a:extLst>
+                </a:gridCol>
+                <a:gridCol w="914400">
+                  <a:extLst>
+                    <a:ext uri="{9D8B030D-6E8A-4147-A177-3AD203B41FA5}">
+                      <a16:colId xmlns:a16="http://schemas.microsoft.com/office/drawing/2014/main" val="20001"/>
+                    </a:ext>
+                  </a:extLst>
+                </a:gridCol>
+                <a:gridCol w="6858000">
+                  <a:extLst>
+                    <a:ext uri="{9D8B030D-6E8A-4147-A177-3AD203B41FA5}">
+                      <a16:colId xmlns:a16="http://schemas.microsoft.com/office/drawing/2014/main" val="20002"/>
+                    </a:ext>
+                  </a:extLst>
+                </a:gridCol>
               </a:tblGrid>
               <a:tr h="457200">
                 <a:tc>
@@ -5857,7 +5732,7 @@
                     <a:bodyPr/>
                     <a:lstStyle/>
                     <a:p>
-                      <a:pPr eaLnBrk="0" indent="0" marL="0">
+                      <a:pPr marL="0" indent="0" eaLnBrk="0">
                         <a:buNone/>
                       </a:pPr>
                       <a:r>
@@ -5925,7 +5800,7 @@
                     <a:bodyPr/>
                     <a:lstStyle/>
                     <a:p>
-                      <a:pPr eaLnBrk="0" indent="0" marL="0">
+                      <a:pPr marL="0" indent="0" eaLnBrk="0">
                         <a:buNone/>
                       </a:pPr>
                       <a:r>
@@ -5993,7 +5868,7 @@
                     <a:bodyPr/>
                     <a:lstStyle/>
                     <a:p>
-                      <a:pPr eaLnBrk="0" indent="0" marL="0">
+                      <a:pPr marL="0" indent="0" eaLnBrk="0">
                         <a:buNone/>
                       </a:pPr>
                       <a:r>
@@ -6056,6 +5931,11 @@
                     </a:solidFill>
                   </a:tcPr>
                 </a:tc>
+                <a:extLst>
+                  <a:ext uri="{0D108BD9-81ED-4DB2-BD59-A6C34878D82A}">
+                    <a16:rowId xmlns:a16="http://schemas.microsoft.com/office/drawing/2014/main" val="10000"/>
+                  </a:ext>
+                </a:extLst>
               </a:tr>
               <a:tr h="457200">
                 <a:tc>
@@ -6063,7 +5943,7 @@
                     <a:bodyPr/>
                     <a:lstStyle/>
                     <a:p>
-                      <a:pPr eaLnBrk="0" indent="0" marL="0">
+                      <a:pPr marL="0" indent="0" eaLnBrk="0">
                         <a:buNone/>
                       </a:pPr>
                       <a:r>
@@ -6131,7 +6011,7 @@
                     <a:bodyPr/>
                     <a:lstStyle/>
                     <a:p>
-                      <a:pPr eaLnBrk="0" indent="0" marL="0">
+                      <a:pPr marL="0" indent="0" eaLnBrk="0">
                         <a:buNone/>
                       </a:pPr>
                       <a:r>
@@ -6199,7 +6079,7 @@
                     <a:bodyPr/>
                     <a:lstStyle/>
                     <a:p>
-                      <a:pPr eaLnBrk="0" indent="0" marL="0">
+                      <a:pPr marL="0" indent="0" eaLnBrk="0">
                         <a:buNone/>
                       </a:pPr>
                       <a:r>
@@ -6262,6 +6142,11 @@
                     </a:solidFill>
                   </a:tcPr>
                 </a:tc>
+                <a:extLst>
+                  <a:ext uri="{0D108BD9-81ED-4DB2-BD59-A6C34878D82A}">
+                    <a16:rowId xmlns:a16="http://schemas.microsoft.com/office/drawing/2014/main" val="10001"/>
+                  </a:ext>
+                </a:extLst>
               </a:tr>
               <a:tr h="457200">
                 <a:tc>
@@ -6269,7 +6154,7 @@
                     <a:bodyPr/>
                     <a:lstStyle/>
                     <a:p>
-                      <a:pPr eaLnBrk="0" indent="0" marL="0">
+                      <a:pPr marL="0" indent="0" eaLnBrk="0">
                         <a:buNone/>
                       </a:pPr>
                       <a:r>
@@ -6337,7 +6222,7 @@
                     <a:bodyPr/>
                     <a:lstStyle/>
                     <a:p>
-                      <a:pPr eaLnBrk="0" indent="0" marL="0">
+                      <a:pPr marL="0" indent="0" eaLnBrk="0">
                         <a:buNone/>
                       </a:pPr>
                       <a:r>
@@ -6405,7 +6290,7 @@
                     <a:bodyPr/>
                     <a:lstStyle/>
                     <a:p>
-                      <a:pPr eaLnBrk="0" indent="0" marL="0">
+                      <a:pPr marL="0" indent="0" eaLnBrk="0">
                         <a:buNone/>
                       </a:pPr>
                       <a:r>
@@ -6468,6 +6353,11 @@
                     </a:solidFill>
                   </a:tcPr>
                 </a:tc>
+                <a:extLst>
+                  <a:ext uri="{0D108BD9-81ED-4DB2-BD59-A6C34878D82A}">
+                    <a16:rowId xmlns:a16="http://schemas.microsoft.com/office/drawing/2014/main" val="10002"/>
+                  </a:ext>
+                </a:extLst>
               </a:tr>
               <a:tr h="457200">
                 <a:tc>
@@ -6475,7 +6365,7 @@
                     <a:bodyPr/>
                     <a:lstStyle/>
                     <a:p>
-                      <a:pPr eaLnBrk="0" indent="0" marL="0">
+                      <a:pPr marL="0" indent="0" eaLnBrk="0">
                         <a:buNone/>
                       </a:pPr>
                       <a:r>
@@ -6543,7 +6433,7 @@
                     <a:bodyPr/>
                     <a:lstStyle/>
                     <a:p>
-                      <a:pPr eaLnBrk="0" indent="0" marL="0">
+                      <a:pPr marL="0" indent="0" eaLnBrk="0">
                         <a:buNone/>
                       </a:pPr>
                       <a:r>
@@ -6611,7 +6501,7 @@
                     <a:bodyPr/>
                     <a:lstStyle/>
                     <a:p>
-                      <a:pPr eaLnBrk="0" indent="0" marL="0">
+                      <a:pPr marL="0" indent="0" eaLnBrk="0">
                         <a:buNone/>
                       </a:pPr>
                       <a:r>
@@ -6674,6 +6564,11 @@
                     </a:solidFill>
                   </a:tcPr>
                 </a:tc>
+                <a:extLst>
+                  <a:ext uri="{0D108BD9-81ED-4DB2-BD59-A6C34878D82A}">
+                    <a16:rowId xmlns:a16="http://schemas.microsoft.com/office/drawing/2014/main" val="10003"/>
+                  </a:ext>
+                </a:extLst>
               </a:tr>
               <a:tr h="457200">
                 <a:tc>
@@ -6681,7 +6576,7 @@
                     <a:bodyPr/>
                     <a:lstStyle/>
                     <a:p>
-                      <a:pPr eaLnBrk="0" indent="0" marL="0">
+                      <a:pPr marL="0" indent="0" eaLnBrk="0">
                         <a:buNone/>
                       </a:pPr>
                       <a:r>
@@ -6749,7 +6644,7 @@
                     <a:bodyPr/>
                     <a:lstStyle/>
                     <a:p>
-                      <a:pPr eaLnBrk="0" indent="0" marL="0">
+                      <a:pPr marL="0" indent="0" eaLnBrk="0">
                         <a:buNone/>
                       </a:pPr>
                       <a:r>
@@ -6817,7 +6712,7 @@
                     <a:bodyPr/>
                     <a:lstStyle/>
                     <a:p>
-                      <a:pPr eaLnBrk="0" indent="0" marL="0">
+                      <a:pPr marL="0" indent="0" eaLnBrk="0">
                         <a:buNone/>
                       </a:pPr>
                       <a:r>
@@ -6880,6 +6775,11 @@
                     </a:solidFill>
                   </a:tcPr>
                 </a:tc>
+                <a:extLst>
+                  <a:ext uri="{0D108BD9-81ED-4DB2-BD59-A6C34878D82A}">
+                    <a16:rowId xmlns:a16="http://schemas.microsoft.com/office/drawing/2014/main" val="10004"/>
+                  </a:ext>
+                </a:extLst>
               </a:tr>
               <a:tr h="457200">
                 <a:tc>
@@ -6887,7 +6787,7 @@
                     <a:bodyPr/>
                     <a:lstStyle/>
                     <a:p>
-                      <a:pPr eaLnBrk="0" indent="0" marL="0">
+                      <a:pPr marL="0" indent="0" eaLnBrk="0">
                         <a:buNone/>
                       </a:pPr>
                       <a:r>
@@ -6955,7 +6855,7 @@
                     <a:bodyPr/>
                     <a:lstStyle/>
                     <a:p>
-                      <a:pPr eaLnBrk="0" indent="0" marL="0">
+                      <a:pPr marL="0" indent="0" eaLnBrk="0">
                         <a:buNone/>
                       </a:pPr>
                       <a:r>
@@ -7023,7 +6923,7 @@
                     <a:bodyPr/>
                     <a:lstStyle/>
                     <a:p>
-                      <a:pPr eaLnBrk="0" indent="0" marL="0">
+                      <a:pPr marL="0" indent="0" eaLnBrk="0">
                         <a:buNone/>
                       </a:pPr>
                       <a:r>
@@ -7086,6 +6986,11 @@
                     </a:solidFill>
                   </a:tcPr>
                 </a:tc>
+                <a:extLst>
+                  <a:ext uri="{0D108BD9-81ED-4DB2-BD59-A6C34878D82A}">
+                    <a16:rowId xmlns:a16="http://schemas.microsoft.com/office/drawing/2014/main" val="10005"/>
+                  </a:ext>
+                </a:extLst>
               </a:tr>
               <a:tr h="457200">
                 <a:tc>
@@ -7093,7 +6998,7 @@
                     <a:bodyPr/>
                     <a:lstStyle/>
                     <a:p>
-                      <a:pPr eaLnBrk="0" indent="0" marL="0">
+                      <a:pPr marL="0" indent="0" eaLnBrk="0">
                         <a:buNone/>
                       </a:pPr>
                       <a:r>
@@ -7161,7 +7066,7 @@
                     <a:bodyPr/>
                     <a:lstStyle/>
                     <a:p>
-                      <a:pPr eaLnBrk="0" indent="0" marL="0">
+                      <a:pPr marL="0" indent="0" eaLnBrk="0">
                         <a:buNone/>
                       </a:pPr>
                       <a:r>
@@ -7229,7 +7134,7 @@
                     <a:bodyPr/>
                     <a:lstStyle/>
                     <a:p>
-                      <a:pPr eaLnBrk="0" indent="0" marL="0">
+                      <a:pPr marL="0" indent="0" eaLnBrk="0">
                         <a:buNone/>
                       </a:pPr>
                       <a:r>
@@ -7292,6 +7197,11 @@
                     </a:solidFill>
                   </a:tcPr>
                 </a:tc>
+                <a:extLst>
+                  <a:ext uri="{0D108BD9-81ED-4DB2-BD59-A6C34878D82A}">
+                    <a16:rowId xmlns:a16="http://schemas.microsoft.com/office/drawing/2014/main" val="10006"/>
+                  </a:ext>
+                </a:extLst>
               </a:tr>
             </a:tbl>
           </a:graphicData>
@@ -7323,6 +7233,13 @@
             <a:prstDash val="solid"/>
           </a:ln>
         </p:spPr>
+        <p:txBody>
+          <a:bodyPr/>
+          <a:lstStyle/>
+          <a:p>
+            <a:endParaRPr lang="ko-KR" altLang="en-US"/>
+          </a:p>
+        </p:txBody>
       </p:sp>
       <p:sp>
         <p:nvSpPr>
@@ -7345,7 +7262,7 @@
           <a:bodyPr wrap="square" lIns="0" tIns="0" rIns="0" bIns="0" rtlCol="0" anchor="t"/>
           <a:lstStyle/>
           <a:p>
-            <a:pPr eaLnBrk="0" indent="0" marL="0">
+            <a:pPr marL="0" indent="0" eaLnBrk="0">
               <a:buNone/>
             </a:pPr>
             <a:r>
@@ -7384,7 +7301,7 @@
           <a:bodyPr wrap="square" lIns="0" tIns="0" rIns="0" bIns="0" rtlCol="0" anchor="t"/>
           <a:lstStyle/>
           <a:p>
-            <a:pPr eaLnBrk="0" indent="0" marL="0">
+            <a:pPr marL="0" indent="0" eaLnBrk="0">
               <a:buNone/>
             </a:pPr>
             <a:r>
@@ -7428,6 +7345,13 @@
             <a:prstDash val="solid"/>
           </a:ln>
         </p:spPr>
+        <p:txBody>
+          <a:bodyPr/>
+          <a:lstStyle/>
+          <a:p>
+            <a:endParaRPr lang="ko-KR" altLang="en-US"/>
+          </a:p>
+        </p:txBody>
       </p:sp>
       <p:sp>
         <p:nvSpPr>
@@ -7450,7 +7374,7 @@
           <a:bodyPr wrap="square" lIns="0" tIns="0" rIns="0" bIns="0" rtlCol="0" anchor="t"/>
           <a:lstStyle/>
           <a:p>
-            <a:pPr eaLnBrk="0" indent="0" marL="0">
+            <a:pPr marL="0" indent="0" eaLnBrk="0">
               <a:buNone/>
             </a:pPr>
             <a:r>
@@ -7489,7 +7413,7 @@
           <a:bodyPr wrap="square" lIns="0" tIns="0" rIns="0" bIns="0" rtlCol="0" anchor="t"/>
           <a:lstStyle/>
           <a:p>
-            <a:pPr eaLnBrk="0" indent="0" marL="0">
+            <a:pPr marL="0" indent="0" eaLnBrk="0">
               <a:buNone/>
             </a:pPr>
             <a:r>
@@ -7527,7 +7451,7 @@
           </a:prstGeom>
           <a:extLst>
             <a:ext uri="{C572A759-6A51-4108-AA02-DFA0A04FC94B}">
-              <ma14:wrappingTextBoxFlag xmlns:ma14="http://schemas.microsoft.com/office/mac/drawingml/2011/main" val="0"/>
+              <ma14:wrappingTextBoxFlag xmlns:ma14="http://schemas.microsoft.com/office/mac/drawingml/2011/main" xmlns="" val="0"/>
             </a:ext>
           </a:extLst>
         </p:spPr>
@@ -7546,9 +7470,9 @@
             </a:lvl1pPr>
           </a:lstStyle>
           <a:p>
-            <a:pPr eaLnBrk="0" algn="r"/>
+            <a:pPr algn="r" eaLnBrk="0"/>
             <a:fld id="{F7021451-1387-4CA6-816F-3879F97B5CBC}" type="slidenum">
-              <a:rPr b="0" lang="en-US"/>
+              <a:rPr lang="en-US" b="0"/>
               <a:t>11</a:t>
             </a:fld>
             <a:endParaRPr lang="en-US"/>
@@ -7603,7 +7527,7 @@
           </a:bodyPr>
           <a:lstStyle/>
           <a:p>
-            <a:pPr eaLnBrk="0" indent="0" marL="0">
+            <a:pPr marL="0" indent="0" eaLnBrk="0">
               <a:buNone/>
             </a:pPr>
             <a:r>
@@ -7644,9 +7568,27 @@
             <a:tbl>
               <a:tblPr/>
               <a:tblGrid>
-                <a:gridCol w="3108960"/>
-                <a:gridCol w="1097280"/>
-                <a:gridCol w="6858000"/>
+                <a:gridCol w="3108960">
+                  <a:extLst>
+                    <a:ext uri="{9D8B030D-6E8A-4147-A177-3AD203B41FA5}">
+                      <a16:colId xmlns:a16="http://schemas.microsoft.com/office/drawing/2014/main" val="20000"/>
+                    </a:ext>
+                  </a:extLst>
+                </a:gridCol>
+                <a:gridCol w="1097280">
+                  <a:extLst>
+                    <a:ext uri="{9D8B030D-6E8A-4147-A177-3AD203B41FA5}">
+                      <a16:colId xmlns:a16="http://schemas.microsoft.com/office/drawing/2014/main" val="20001"/>
+                    </a:ext>
+                  </a:extLst>
+                </a:gridCol>
+                <a:gridCol w="6858000">
+                  <a:extLst>
+                    <a:ext uri="{9D8B030D-6E8A-4147-A177-3AD203B41FA5}">
+                      <a16:colId xmlns:a16="http://schemas.microsoft.com/office/drawing/2014/main" val="20002"/>
+                    </a:ext>
+                  </a:extLst>
+                </a:gridCol>
               </a:tblGrid>
               <a:tr h="457200">
                 <a:tc>
@@ -7654,7 +7596,7 @@
                     <a:bodyPr/>
                     <a:lstStyle/>
                     <a:p>
-                      <a:pPr eaLnBrk="0" indent="0" marL="0">
+                      <a:pPr marL="0" indent="0" eaLnBrk="0">
                         <a:buNone/>
                       </a:pPr>
                       <a:r>
@@ -7722,7 +7664,7 @@
                     <a:bodyPr/>
                     <a:lstStyle/>
                     <a:p>
-                      <a:pPr eaLnBrk="0" indent="0" marL="0">
+                      <a:pPr marL="0" indent="0" eaLnBrk="0">
                         <a:buNone/>
                       </a:pPr>
                       <a:r>
@@ -7790,7 +7732,7 @@
                     <a:bodyPr/>
                     <a:lstStyle/>
                     <a:p>
-                      <a:pPr eaLnBrk="0" indent="0" marL="0">
+                      <a:pPr marL="0" indent="0" eaLnBrk="0">
                         <a:buNone/>
                       </a:pPr>
                       <a:r>
@@ -7853,6 +7795,11 @@
                     </a:solidFill>
                   </a:tcPr>
                 </a:tc>
+                <a:extLst>
+                  <a:ext uri="{0D108BD9-81ED-4DB2-BD59-A6C34878D82A}">
+                    <a16:rowId xmlns:a16="http://schemas.microsoft.com/office/drawing/2014/main" val="10000"/>
+                  </a:ext>
+                </a:extLst>
               </a:tr>
               <a:tr h="457200">
                 <a:tc>
@@ -7860,7 +7807,7 @@
                     <a:bodyPr/>
                     <a:lstStyle/>
                     <a:p>
-                      <a:pPr eaLnBrk="0" indent="0" marL="0">
+                      <a:pPr marL="0" indent="0" eaLnBrk="0">
                         <a:buNone/>
                       </a:pPr>
                       <a:r>
@@ -7928,7 +7875,7 @@
                     <a:bodyPr/>
                     <a:lstStyle/>
                     <a:p>
-                      <a:pPr eaLnBrk="0" indent="0" marL="0">
+                      <a:pPr marL="0" indent="0" eaLnBrk="0">
                         <a:buNone/>
                       </a:pPr>
                       <a:r>
@@ -7996,7 +7943,7 @@
                     <a:bodyPr/>
                     <a:lstStyle/>
                     <a:p>
-                      <a:pPr eaLnBrk="0" indent="0" marL="0">
+                      <a:pPr marL="0" indent="0" eaLnBrk="0">
                         <a:buNone/>
                       </a:pPr>
                       <a:r>
@@ -8059,6 +8006,11 @@
                     </a:solidFill>
                   </a:tcPr>
                 </a:tc>
+                <a:extLst>
+                  <a:ext uri="{0D108BD9-81ED-4DB2-BD59-A6C34878D82A}">
+                    <a16:rowId xmlns:a16="http://schemas.microsoft.com/office/drawing/2014/main" val="10001"/>
+                  </a:ext>
+                </a:extLst>
               </a:tr>
               <a:tr h="457200">
                 <a:tc>
@@ -8066,7 +8018,7 @@
                     <a:bodyPr/>
                     <a:lstStyle/>
                     <a:p>
-                      <a:pPr eaLnBrk="0" indent="0" marL="0">
+                      <a:pPr marL="0" indent="0" eaLnBrk="0">
                         <a:buNone/>
                       </a:pPr>
                       <a:r>
@@ -8134,7 +8086,7 @@
                     <a:bodyPr/>
                     <a:lstStyle/>
                     <a:p>
-                      <a:pPr eaLnBrk="0" indent="0" marL="0">
+                      <a:pPr marL="0" indent="0" eaLnBrk="0">
                         <a:buNone/>
                       </a:pPr>
                       <a:r>
@@ -8202,7 +8154,7 @@
                     <a:bodyPr/>
                     <a:lstStyle/>
                     <a:p>
-                      <a:pPr eaLnBrk="0" indent="0" marL="0">
+                      <a:pPr marL="0" indent="0" eaLnBrk="0">
                         <a:buNone/>
                       </a:pPr>
                       <a:r>
@@ -8265,6 +8217,11 @@
                     </a:solidFill>
                   </a:tcPr>
                 </a:tc>
+                <a:extLst>
+                  <a:ext uri="{0D108BD9-81ED-4DB2-BD59-A6C34878D82A}">
+                    <a16:rowId xmlns:a16="http://schemas.microsoft.com/office/drawing/2014/main" val="10002"/>
+                  </a:ext>
+                </a:extLst>
               </a:tr>
               <a:tr h="457200">
                 <a:tc>
@@ -8272,7 +8229,7 @@
                     <a:bodyPr/>
                     <a:lstStyle/>
                     <a:p>
-                      <a:pPr eaLnBrk="0" indent="0" marL="0">
+                      <a:pPr marL="0" indent="0" eaLnBrk="0">
                         <a:buNone/>
                       </a:pPr>
                       <a:r>
@@ -8340,7 +8297,7 @@
                     <a:bodyPr/>
                     <a:lstStyle/>
                     <a:p>
-                      <a:pPr eaLnBrk="0" indent="0" marL="0">
+                      <a:pPr marL="0" indent="0" eaLnBrk="0">
                         <a:buNone/>
                       </a:pPr>
                       <a:r>
@@ -8408,7 +8365,7 @@
                     <a:bodyPr/>
                     <a:lstStyle/>
                     <a:p>
-                      <a:pPr eaLnBrk="0" indent="0" marL="0">
+                      <a:pPr marL="0" indent="0" eaLnBrk="0">
                         <a:buNone/>
                       </a:pPr>
                       <a:r>
@@ -8471,6 +8428,11 @@
                     </a:solidFill>
                   </a:tcPr>
                 </a:tc>
+                <a:extLst>
+                  <a:ext uri="{0D108BD9-81ED-4DB2-BD59-A6C34878D82A}">
+                    <a16:rowId xmlns:a16="http://schemas.microsoft.com/office/drawing/2014/main" val="10003"/>
+                  </a:ext>
+                </a:extLst>
               </a:tr>
               <a:tr h="457200">
                 <a:tc>
@@ -8478,7 +8440,7 @@
                     <a:bodyPr/>
                     <a:lstStyle/>
                     <a:p>
-                      <a:pPr eaLnBrk="0" indent="0" marL="0">
+                      <a:pPr marL="0" indent="0" eaLnBrk="0">
                         <a:buNone/>
                       </a:pPr>
                       <a:r>
@@ -8546,7 +8508,7 @@
                     <a:bodyPr/>
                     <a:lstStyle/>
                     <a:p>
-                      <a:pPr eaLnBrk="0" indent="0" marL="0">
+                      <a:pPr marL="0" indent="0" eaLnBrk="0">
                         <a:buNone/>
                       </a:pPr>
                       <a:r>
@@ -8614,7 +8576,7 @@
                     <a:bodyPr/>
                     <a:lstStyle/>
                     <a:p>
-                      <a:pPr eaLnBrk="0" indent="0" marL="0">
+                      <a:pPr marL="0" indent="0" eaLnBrk="0">
                         <a:buNone/>
                       </a:pPr>
                       <a:r>
@@ -8677,6 +8639,11 @@
                     </a:solidFill>
                   </a:tcPr>
                 </a:tc>
+                <a:extLst>
+                  <a:ext uri="{0D108BD9-81ED-4DB2-BD59-A6C34878D82A}">
+                    <a16:rowId xmlns:a16="http://schemas.microsoft.com/office/drawing/2014/main" val="10004"/>
+                  </a:ext>
+                </a:extLst>
               </a:tr>
               <a:tr h="457200">
                 <a:tc>
@@ -8684,7 +8651,7 @@
                     <a:bodyPr/>
                     <a:lstStyle/>
                     <a:p>
-                      <a:pPr eaLnBrk="0" indent="0" marL="0">
+                      <a:pPr marL="0" indent="0" eaLnBrk="0">
                         <a:buNone/>
                       </a:pPr>
                       <a:r>
@@ -8752,7 +8719,7 @@
                     <a:bodyPr/>
                     <a:lstStyle/>
                     <a:p>
-                      <a:pPr eaLnBrk="0" indent="0" marL="0">
+                      <a:pPr marL="0" indent="0" eaLnBrk="0">
                         <a:buNone/>
                       </a:pPr>
                       <a:r>
@@ -8820,7 +8787,7 @@
                     <a:bodyPr/>
                     <a:lstStyle/>
                     <a:p>
-                      <a:pPr eaLnBrk="0" indent="0" marL="0">
+                      <a:pPr marL="0" indent="0" eaLnBrk="0">
                         <a:buNone/>
                       </a:pPr>
                       <a:r>
@@ -8883,6 +8850,11 @@
                     </a:solidFill>
                   </a:tcPr>
                 </a:tc>
+                <a:extLst>
+                  <a:ext uri="{0D108BD9-81ED-4DB2-BD59-A6C34878D82A}">
+                    <a16:rowId xmlns:a16="http://schemas.microsoft.com/office/drawing/2014/main" val="10005"/>
+                  </a:ext>
+                </a:extLst>
               </a:tr>
               <a:tr h="457200">
                 <a:tc>
@@ -8890,7 +8862,7 @@
                     <a:bodyPr/>
                     <a:lstStyle/>
                     <a:p>
-                      <a:pPr eaLnBrk="0" indent="0" marL="0">
+                      <a:pPr marL="0" indent="0" eaLnBrk="0">
                         <a:buNone/>
                       </a:pPr>
                       <a:r>
@@ -8958,7 +8930,7 @@
                     <a:bodyPr/>
                     <a:lstStyle/>
                     <a:p>
-                      <a:pPr eaLnBrk="0" indent="0" marL="0">
+                      <a:pPr marL="0" indent="0" eaLnBrk="0">
                         <a:buNone/>
                       </a:pPr>
                       <a:r>
@@ -9026,7 +8998,7 @@
                     <a:bodyPr/>
                     <a:lstStyle/>
                     <a:p>
-                      <a:pPr eaLnBrk="0" indent="0" marL="0">
+                      <a:pPr marL="0" indent="0" eaLnBrk="0">
                         <a:buNone/>
                       </a:pPr>
                       <a:r>
@@ -9089,6 +9061,11 @@
                     </a:solidFill>
                   </a:tcPr>
                 </a:tc>
+                <a:extLst>
+                  <a:ext uri="{0D108BD9-81ED-4DB2-BD59-A6C34878D82A}">
+                    <a16:rowId xmlns:a16="http://schemas.microsoft.com/office/drawing/2014/main" val="10006"/>
+                  </a:ext>
+                </a:extLst>
               </a:tr>
             </a:tbl>
           </a:graphicData>
@@ -9120,6 +9097,13 @@
             <a:prstDash val="solid"/>
           </a:ln>
         </p:spPr>
+        <p:txBody>
+          <a:bodyPr/>
+          <a:lstStyle/>
+          <a:p>
+            <a:endParaRPr lang="ko-KR" altLang="en-US"/>
+          </a:p>
+        </p:txBody>
       </p:sp>
       <p:sp>
         <p:nvSpPr>
@@ -9142,7 +9126,7 @@
           <a:bodyPr wrap="square" lIns="0" tIns="0" rIns="0" bIns="0" rtlCol="0" anchor="t"/>
           <a:lstStyle/>
           <a:p>
-            <a:pPr eaLnBrk="0" indent="0" marL="0">
+            <a:pPr marL="0" indent="0" eaLnBrk="0">
               <a:buNone/>
             </a:pPr>
             <a:r>
@@ -9181,7 +9165,7 @@
           <a:bodyPr wrap="square" lIns="0" tIns="0" rIns="0" bIns="0" rtlCol="0" anchor="t"/>
           <a:lstStyle/>
           <a:p>
-            <a:pPr eaLnBrk="0" indent="0" marL="0">
+            <a:pPr marL="0" indent="0" eaLnBrk="0">
               <a:buNone/>
             </a:pPr>
             <a:r>
@@ -9198,7 +9182,7 @@
             <a:endParaRPr lang="en-US" sz="1300" dirty="0"/>
           </a:p>
           <a:p>
-            <a:pPr eaLnBrk="0" indent="0" marL="0">
+            <a:pPr marL="0" indent="0" eaLnBrk="0">
               <a:buNone/>
             </a:pPr>
             <a:r>
@@ -9242,6 +9226,13 @@
             <a:prstDash val="solid"/>
           </a:ln>
         </p:spPr>
+        <p:txBody>
+          <a:bodyPr/>
+          <a:lstStyle/>
+          <a:p>
+            <a:endParaRPr lang="ko-KR" altLang="en-US"/>
+          </a:p>
+        </p:txBody>
       </p:sp>
       <p:sp>
         <p:nvSpPr>
@@ -9264,7 +9255,7 @@
           <a:bodyPr wrap="square" lIns="0" tIns="0" rIns="0" bIns="0" rtlCol="0" anchor="t"/>
           <a:lstStyle/>
           <a:p>
-            <a:pPr eaLnBrk="0" indent="0" marL="0">
+            <a:pPr marL="0" indent="0" eaLnBrk="0">
               <a:buNone/>
             </a:pPr>
             <a:r>
@@ -9303,7 +9294,7 @@
           <a:bodyPr wrap="square" lIns="0" tIns="0" rIns="0" bIns="0" rtlCol="0" anchor="t"/>
           <a:lstStyle/>
           <a:p>
-            <a:pPr eaLnBrk="0" indent="0" marL="0">
+            <a:pPr marL="0" indent="0" eaLnBrk="0">
               <a:buNone/>
             </a:pPr>
             <a:r>
@@ -9341,7 +9332,7 @@
           </a:prstGeom>
           <a:extLst>
             <a:ext uri="{C572A759-6A51-4108-AA02-DFA0A04FC94B}">
-              <ma14:wrappingTextBoxFlag xmlns:ma14="http://schemas.microsoft.com/office/mac/drawingml/2011/main" val="0"/>
+              <ma14:wrappingTextBoxFlag xmlns:ma14="http://schemas.microsoft.com/office/mac/drawingml/2011/main" xmlns="" val="0"/>
             </a:ext>
           </a:extLst>
         </p:spPr>
@@ -9360,9 +9351,9 @@
             </a:lvl1pPr>
           </a:lstStyle>
           <a:p>
-            <a:pPr eaLnBrk="0" algn="r"/>
+            <a:pPr algn="r" eaLnBrk="0"/>
             <a:fld id="{F7021451-1387-4CA6-816F-3879F97B5CBC}" type="slidenum">
-              <a:rPr b="0" lang="en-US"/>
+              <a:rPr lang="en-US" b="0"/>
               <a:t>12</a:t>
             </a:fld>
             <a:endParaRPr lang="en-US"/>
@@ -9417,7 +9408,7 @@
           </a:bodyPr>
           <a:lstStyle/>
           <a:p>
-            <a:pPr eaLnBrk="0" indent="0" marL="0">
+            <a:pPr marL="0" indent="0" eaLnBrk="0">
               <a:buNone/>
             </a:pPr>
             <a:r>
@@ -9458,8 +9449,20 @@
             <a:tbl>
               <a:tblPr/>
               <a:tblGrid>
-                <a:gridCol w="1554480"/>
-                <a:gridCol w="5394960"/>
+                <a:gridCol w="1554480">
+                  <a:extLst>
+                    <a:ext uri="{9D8B030D-6E8A-4147-A177-3AD203B41FA5}">
+                      <a16:colId xmlns:a16="http://schemas.microsoft.com/office/drawing/2014/main" val="20000"/>
+                    </a:ext>
+                  </a:extLst>
+                </a:gridCol>
+                <a:gridCol w="5394960">
+                  <a:extLst>
+                    <a:ext uri="{9D8B030D-6E8A-4147-A177-3AD203B41FA5}">
+                      <a16:colId xmlns:a16="http://schemas.microsoft.com/office/drawing/2014/main" val="20001"/>
+                    </a:ext>
+                  </a:extLst>
+                </a:gridCol>
               </a:tblGrid>
               <a:tr h="566928">
                 <a:tc>
@@ -9467,7 +9470,7 @@
                     <a:bodyPr/>
                     <a:lstStyle/>
                     <a:p>
-                      <a:pPr eaLnBrk="0" indent="0" marL="0">
+                      <a:pPr marL="0" indent="0" eaLnBrk="0">
                         <a:buNone/>
                       </a:pPr>
                       <a:r>
@@ -9535,7 +9538,7 @@
                     <a:bodyPr/>
                     <a:lstStyle/>
                     <a:p>
-                      <a:pPr eaLnBrk="0" indent="0" marL="0">
+                      <a:pPr marL="0" indent="0" eaLnBrk="0">
                         <a:buNone/>
                       </a:pPr>
                       <a:r>
@@ -9598,6 +9601,11 @@
                     </a:solidFill>
                   </a:tcPr>
                 </a:tc>
+                <a:extLst>
+                  <a:ext uri="{0D108BD9-81ED-4DB2-BD59-A6C34878D82A}">
+                    <a16:rowId xmlns:a16="http://schemas.microsoft.com/office/drawing/2014/main" val="10000"/>
+                  </a:ext>
+                </a:extLst>
               </a:tr>
               <a:tr h="566928">
                 <a:tc>
@@ -9605,7 +9613,7 @@
                     <a:bodyPr/>
                     <a:lstStyle/>
                     <a:p>
-                      <a:pPr eaLnBrk="0" indent="0" marL="0">
+                      <a:pPr marL="0" indent="0" eaLnBrk="0">
                         <a:buNone/>
                       </a:pPr>
                       <a:r>
@@ -9673,7 +9681,7 @@
                     <a:bodyPr/>
                     <a:lstStyle/>
                     <a:p>
-                      <a:pPr eaLnBrk="0" indent="0" marL="0">
+                      <a:pPr marL="0" indent="0" eaLnBrk="0">
                         <a:buNone/>
                       </a:pPr>
                       <a:r>
@@ -9736,6 +9744,11 @@
                     </a:solidFill>
                   </a:tcPr>
                 </a:tc>
+                <a:extLst>
+                  <a:ext uri="{0D108BD9-81ED-4DB2-BD59-A6C34878D82A}">
+                    <a16:rowId xmlns:a16="http://schemas.microsoft.com/office/drawing/2014/main" val="10001"/>
+                  </a:ext>
+                </a:extLst>
               </a:tr>
               <a:tr h="566928">
                 <a:tc>
@@ -9743,7 +9756,7 @@
                     <a:bodyPr/>
                     <a:lstStyle/>
                     <a:p>
-                      <a:pPr eaLnBrk="0" indent="0" marL="0">
+                      <a:pPr marL="0" indent="0" eaLnBrk="0">
                         <a:buNone/>
                       </a:pPr>
                       <a:r>
@@ -9811,7 +9824,7 @@
                     <a:bodyPr/>
                     <a:lstStyle/>
                     <a:p>
-                      <a:pPr eaLnBrk="0" indent="0" marL="0">
+                      <a:pPr marL="0" indent="0" eaLnBrk="0">
                         <a:buNone/>
                       </a:pPr>
                       <a:r>
@@ -9874,6 +9887,11 @@
                     </a:solidFill>
                   </a:tcPr>
                 </a:tc>
+                <a:extLst>
+                  <a:ext uri="{0D108BD9-81ED-4DB2-BD59-A6C34878D82A}">
+                    <a16:rowId xmlns:a16="http://schemas.microsoft.com/office/drawing/2014/main" val="10002"/>
+                  </a:ext>
+                </a:extLst>
               </a:tr>
               <a:tr h="566928">
                 <a:tc>
@@ -9881,7 +9899,7 @@
                     <a:bodyPr/>
                     <a:lstStyle/>
                     <a:p>
-                      <a:pPr eaLnBrk="0" indent="0" marL="0">
+                      <a:pPr marL="0" indent="0" eaLnBrk="0">
                         <a:buNone/>
                       </a:pPr>
                       <a:r>
@@ -9949,7 +9967,7 @@
                     <a:bodyPr/>
                     <a:lstStyle/>
                     <a:p>
-                      <a:pPr eaLnBrk="0" indent="0" marL="0">
+                      <a:pPr marL="0" indent="0" eaLnBrk="0">
                         <a:buNone/>
                       </a:pPr>
                       <a:r>
@@ -10012,6 +10030,11 @@
                     </a:solidFill>
                   </a:tcPr>
                 </a:tc>
+                <a:extLst>
+                  <a:ext uri="{0D108BD9-81ED-4DB2-BD59-A6C34878D82A}">
+                    <a16:rowId xmlns:a16="http://schemas.microsoft.com/office/drawing/2014/main" val="10003"/>
+                  </a:ext>
+                </a:extLst>
               </a:tr>
               <a:tr h="566928">
                 <a:tc>
@@ -10019,7 +10042,7 @@
                     <a:bodyPr/>
                     <a:lstStyle/>
                     <a:p>
-                      <a:pPr eaLnBrk="0" indent="0" marL="0">
+                      <a:pPr marL="0" indent="0" eaLnBrk="0">
                         <a:buNone/>
                       </a:pPr>
                       <a:r>
@@ -10087,7 +10110,7 @@
                     <a:bodyPr/>
                     <a:lstStyle/>
                     <a:p>
-                      <a:pPr eaLnBrk="0" indent="0" marL="0">
+                      <a:pPr marL="0" indent="0" eaLnBrk="0">
                         <a:buNone/>
                       </a:pPr>
                       <a:r>
@@ -10150,6 +10173,11 @@
                     </a:solidFill>
                   </a:tcPr>
                 </a:tc>
+                <a:extLst>
+                  <a:ext uri="{0D108BD9-81ED-4DB2-BD59-A6C34878D82A}">
+                    <a16:rowId xmlns:a16="http://schemas.microsoft.com/office/drawing/2014/main" val="10004"/>
+                  </a:ext>
+                </a:extLst>
               </a:tr>
               <a:tr h="566928">
                 <a:tc>
@@ -10157,7 +10185,7 @@
                     <a:bodyPr/>
                     <a:lstStyle/>
                     <a:p>
-                      <a:pPr eaLnBrk="0" indent="0" marL="0">
+                      <a:pPr marL="0" indent="0" eaLnBrk="0">
                         <a:buNone/>
                       </a:pPr>
                       <a:r>
@@ -10225,7 +10253,7 @@
                     <a:bodyPr/>
                     <a:lstStyle/>
                     <a:p>
-                      <a:pPr eaLnBrk="0" indent="0" marL="0">
+                      <a:pPr marL="0" indent="0" eaLnBrk="0">
                         <a:buNone/>
                       </a:pPr>
                       <a:r>
@@ -10288,6 +10316,11 @@
                     </a:solidFill>
                   </a:tcPr>
                 </a:tc>
+                <a:extLst>
+                  <a:ext uri="{0D108BD9-81ED-4DB2-BD59-A6C34878D82A}">
+                    <a16:rowId xmlns:a16="http://schemas.microsoft.com/office/drawing/2014/main" val="10005"/>
+                  </a:ext>
+                </a:extLst>
               </a:tr>
             </a:tbl>
           </a:graphicData>
@@ -10295,7 +10328,7 @@
       </p:graphicFrame>
       <p:graphicFrame>
         <p:nvGraphicFramePr>
-          <p:cNvPr id="5" name="Chart 0" descr=""/>
+          <p:cNvPr id="5" name="Chart 0"/>
           <p:cNvGraphicFramePr/>
           <p:nvPr/>
         </p:nvGraphicFramePr>
@@ -10303,9 +10336,9 @@
           <a:off x="7772400" y="1371600"/>
           <a:ext cx="3840480" cy="2743200"/>
         </p:xfrm>
-        <a:graphic xmlns:a="http://schemas.openxmlformats.org/drawingml/2006/main">
+        <a:graphic>
           <a:graphicData uri="http://schemas.openxmlformats.org/drawingml/2006/chart">
-            <c:chart xmlns:c="http://schemas.openxmlformats.org/drawingml/2006/chart" r:id="rId1"/>
+            <c:chart xmlns:c="http://schemas.openxmlformats.org/drawingml/2006/chart" xmlns:r="http://schemas.openxmlformats.org/officeDocument/2006/relationships" r:id="rId3"/>
           </a:graphicData>
         </a:graphic>
       </p:graphicFrame>
@@ -10335,6 +10368,13 @@
             <a:prstDash val="solid"/>
           </a:ln>
         </p:spPr>
+        <p:txBody>
+          <a:bodyPr/>
+          <a:lstStyle/>
+          <a:p>
+            <a:endParaRPr lang="ko-KR" altLang="en-US"/>
+          </a:p>
+        </p:txBody>
       </p:sp>
       <p:sp>
         <p:nvSpPr>
@@ -10357,7 +10397,7 @@
           <a:bodyPr wrap="square" lIns="0" tIns="0" rIns="0" bIns="0" rtlCol="0" anchor="t"/>
           <a:lstStyle/>
           <a:p>
-            <a:pPr eaLnBrk="0" indent="0" marL="0">
+            <a:pPr marL="0" indent="0" eaLnBrk="0">
               <a:buNone/>
             </a:pPr>
             <a:r>
@@ -10396,7 +10436,7 @@
           <a:bodyPr wrap="square" lIns="0" tIns="0" rIns="0" bIns="0" rtlCol="0" anchor="t"/>
           <a:lstStyle/>
           <a:p>
-            <a:pPr eaLnBrk="0" indent="0" marL="0">
+            <a:pPr marL="0" indent="0" eaLnBrk="0">
               <a:buNone/>
             </a:pPr>
             <a:r>
@@ -10440,6 +10480,13 @@
             <a:prstDash val="solid"/>
           </a:ln>
         </p:spPr>
+        <p:txBody>
+          <a:bodyPr/>
+          <a:lstStyle/>
+          <a:p>
+            <a:endParaRPr lang="ko-KR" altLang="en-US"/>
+          </a:p>
+        </p:txBody>
       </p:sp>
       <p:sp>
         <p:nvSpPr>
@@ -10462,7 +10509,7 @@
           <a:bodyPr wrap="square" lIns="0" tIns="0" rIns="0" bIns="0" rtlCol="0" anchor="t"/>
           <a:lstStyle/>
           <a:p>
-            <a:pPr eaLnBrk="0" indent="0" marL="0">
+            <a:pPr marL="0" indent="0" eaLnBrk="0">
               <a:buNone/>
             </a:pPr>
             <a:r>
@@ -10501,7 +10548,7 @@
           <a:bodyPr wrap="square" lIns="0" tIns="0" rIns="0" bIns="0" rtlCol="0" anchor="t"/>
           <a:lstStyle/>
           <a:p>
-            <a:pPr eaLnBrk="0" indent="0" marL="0">
+            <a:pPr marL="0" indent="0" eaLnBrk="0">
               <a:buNone/>
             </a:pPr>
             <a:r>
@@ -10539,7 +10586,7 @@
           </a:prstGeom>
           <a:extLst>
             <a:ext uri="{C572A759-6A51-4108-AA02-DFA0A04FC94B}">
-              <ma14:wrappingTextBoxFlag xmlns:ma14="http://schemas.microsoft.com/office/mac/drawingml/2011/main" val="0"/>
+              <ma14:wrappingTextBoxFlag xmlns:ma14="http://schemas.microsoft.com/office/mac/drawingml/2011/main" xmlns="" val="0"/>
             </a:ext>
           </a:extLst>
         </p:spPr>
@@ -10558,9 +10605,9 @@
             </a:lvl1pPr>
           </a:lstStyle>
           <a:p>
-            <a:pPr eaLnBrk="0" algn="r"/>
+            <a:pPr algn="r" eaLnBrk="0"/>
             <a:fld id="{F7021451-1387-4CA6-816F-3879F97B5CBC}" type="slidenum">
-              <a:rPr b="0" lang="en-US"/>
+              <a:rPr lang="en-US" b="0"/>
               <a:t>13</a:t>
             </a:fld>
             <a:endParaRPr lang="en-US"/>
@@ -10615,7 +10662,7 @@
           </a:bodyPr>
           <a:lstStyle/>
           <a:p>
-            <a:pPr eaLnBrk="0" indent="0" marL="0">
+            <a:pPr marL="0" indent="0" eaLnBrk="0">
               <a:buNone/>
             </a:pPr>
             <a:r>
@@ -10659,6 +10706,13 @@
             <a:prstDash val="solid"/>
           </a:ln>
         </p:spPr>
+        <p:txBody>
+          <a:bodyPr/>
+          <a:lstStyle/>
+          <a:p>
+            <a:endParaRPr lang="ko-KR" altLang="en-US"/>
+          </a:p>
+        </p:txBody>
       </p:sp>
       <p:sp>
         <p:nvSpPr>
@@ -10681,7 +10735,7 @@
           <a:bodyPr wrap="square" lIns="0" tIns="0" rIns="0" bIns="0" rtlCol="0" anchor="t"/>
           <a:lstStyle/>
           <a:p>
-            <a:pPr eaLnBrk="0" indent="0" marL="0">
+            <a:pPr marL="0" indent="0" eaLnBrk="0">
               <a:buNone/>
             </a:pPr>
             <a:r>
@@ -10720,7 +10774,7 @@
           <a:bodyPr wrap="square" lIns="0" tIns="0" rIns="0" bIns="0" rtlCol="0" anchor="t"/>
           <a:lstStyle/>
           <a:p>
-            <a:pPr eaLnBrk="0" indent="0" marL="0">
+            <a:pPr marL="0" indent="0" eaLnBrk="0">
               <a:buNone/>
             </a:pPr>
             <a:r>
@@ -10737,7 +10791,7 @@
             <a:endParaRPr lang="en-US" sz="1400" dirty="0"/>
           </a:p>
           <a:p>
-            <a:pPr eaLnBrk="0" indent="0" marL="0">
+            <a:pPr marL="0" indent="0" eaLnBrk="0">
               <a:buNone/>
             </a:pPr>
             <a:r>
@@ -10754,7 +10808,7 @@
             <a:endParaRPr lang="en-US" sz="1400" dirty="0"/>
           </a:p>
           <a:p>
-            <a:pPr eaLnBrk="0" indent="0" marL="0">
+            <a:pPr marL="0" indent="0" eaLnBrk="0">
               <a:buNone/>
             </a:pPr>
             <a:r>
@@ -10771,7 +10825,7 @@
             <a:endParaRPr lang="en-US" sz="1400" dirty="0"/>
           </a:p>
           <a:p>
-            <a:pPr eaLnBrk="0" indent="0" marL="0">
+            <a:pPr marL="0" indent="0" eaLnBrk="0">
               <a:buNone/>
             </a:pPr>
             <a:r>
@@ -10815,6 +10869,13 @@
             <a:prstDash val="solid"/>
           </a:ln>
         </p:spPr>
+        <p:txBody>
+          <a:bodyPr/>
+          <a:lstStyle/>
+          <a:p>
+            <a:endParaRPr lang="ko-KR" altLang="en-US"/>
+          </a:p>
+        </p:txBody>
       </p:sp>
       <p:sp>
         <p:nvSpPr>
@@ -10837,7 +10898,7 @@
           <a:bodyPr wrap="square" lIns="0" tIns="0" rIns="0" bIns="0" rtlCol="0" anchor="t"/>
           <a:lstStyle/>
           <a:p>
-            <a:pPr eaLnBrk="0" indent="0" marL="0">
+            <a:pPr marL="0" indent="0" eaLnBrk="0">
               <a:buNone/>
             </a:pPr>
             <a:r>
@@ -10876,7 +10937,7 @@
           <a:bodyPr wrap="square" lIns="0" tIns="0" rIns="0" bIns="0" rtlCol="0" anchor="t"/>
           <a:lstStyle/>
           <a:p>
-            <a:pPr eaLnBrk="0" indent="0" marL="0">
+            <a:pPr marL="0" indent="0" eaLnBrk="0">
               <a:buNone/>
             </a:pPr>
             <a:r>
@@ -10893,7 +10954,7 @@
             <a:endParaRPr lang="en-US" sz="1400" dirty="0"/>
           </a:p>
           <a:p>
-            <a:pPr eaLnBrk="0" indent="0" marL="0">
+            <a:pPr marL="0" indent="0" eaLnBrk="0">
               <a:buNone/>
             </a:pPr>
             <a:r>
@@ -10910,7 +10971,7 @@
             <a:endParaRPr lang="en-US" sz="1400" dirty="0"/>
           </a:p>
           <a:p>
-            <a:pPr eaLnBrk="0" indent="0" marL="0">
+            <a:pPr marL="0" indent="0" eaLnBrk="0">
               <a:buNone/>
             </a:pPr>
             <a:r>
@@ -10927,7 +10988,7 @@
             <a:endParaRPr lang="en-US" sz="1400" dirty="0"/>
           </a:p>
           <a:p>
-            <a:pPr eaLnBrk="0" indent="0" marL="0">
+            <a:pPr marL="0" indent="0" eaLnBrk="0">
               <a:buNone/>
             </a:pPr>
             <a:r>
@@ -10971,6 +11032,13 @@
             <a:prstDash val="solid"/>
           </a:ln>
         </p:spPr>
+        <p:txBody>
+          <a:bodyPr/>
+          <a:lstStyle/>
+          <a:p>
+            <a:endParaRPr lang="ko-KR" altLang="en-US"/>
+          </a:p>
+        </p:txBody>
       </p:sp>
       <p:sp>
         <p:nvSpPr>
@@ -10993,7 +11061,7 @@
           <a:bodyPr wrap="square" lIns="0" tIns="0" rIns="0" bIns="0" rtlCol="0" anchor="t"/>
           <a:lstStyle/>
           <a:p>
-            <a:pPr eaLnBrk="0" indent="0" marL="0">
+            <a:pPr marL="0" indent="0" eaLnBrk="0">
               <a:buNone/>
             </a:pPr>
             <a:r>
@@ -11032,7 +11100,7 @@
           <a:bodyPr wrap="square" lIns="0" tIns="0" rIns="0" bIns="0" rtlCol="0" anchor="t"/>
           <a:lstStyle/>
           <a:p>
-            <a:pPr eaLnBrk="0" indent="0" marL="0">
+            <a:pPr marL="0" indent="0" eaLnBrk="0">
               <a:buNone/>
             </a:pPr>
             <a:r>
@@ -11049,7 +11117,7 @@
             <a:endParaRPr lang="en-US" sz="1400" dirty="0"/>
           </a:p>
           <a:p>
-            <a:pPr eaLnBrk="0" indent="0" marL="0">
+            <a:pPr marL="0" indent="0" eaLnBrk="0">
               <a:buNone/>
             </a:pPr>
             <a:r>
@@ -11090,8 +11158,20 @@
             <a:tbl>
               <a:tblPr/>
               <a:tblGrid>
-                <a:gridCol w="3657600"/>
-                <a:gridCol w="7406640"/>
+                <a:gridCol w="3657600">
+                  <a:extLst>
+                    <a:ext uri="{9D8B030D-6E8A-4147-A177-3AD203B41FA5}">
+                      <a16:colId xmlns:a16="http://schemas.microsoft.com/office/drawing/2014/main" val="20000"/>
+                    </a:ext>
+                  </a:extLst>
+                </a:gridCol>
+                <a:gridCol w="7406640">
+                  <a:extLst>
+                    <a:ext uri="{9D8B030D-6E8A-4147-A177-3AD203B41FA5}">
+                      <a16:colId xmlns:a16="http://schemas.microsoft.com/office/drawing/2014/main" val="20001"/>
+                    </a:ext>
+                  </a:extLst>
+                </a:gridCol>
               </a:tblGrid>
               <a:tr h="502920">
                 <a:tc>
@@ -11099,7 +11179,7 @@
                     <a:bodyPr/>
                     <a:lstStyle/>
                     <a:p>
-                      <a:pPr eaLnBrk="0" indent="0" marL="0">
+                      <a:pPr marL="0" indent="0" eaLnBrk="0">
                         <a:buNone/>
                       </a:pPr>
                       <a:r>
@@ -11167,7 +11247,7 @@
                     <a:bodyPr/>
                     <a:lstStyle/>
                     <a:p>
-                      <a:pPr eaLnBrk="0" indent="0" marL="0">
+                      <a:pPr marL="0" indent="0" eaLnBrk="0">
                         <a:buNone/>
                       </a:pPr>
                       <a:r>
@@ -11230,6 +11310,11 @@
                     </a:solidFill>
                   </a:tcPr>
                 </a:tc>
+                <a:extLst>
+                  <a:ext uri="{0D108BD9-81ED-4DB2-BD59-A6C34878D82A}">
+                    <a16:rowId xmlns:a16="http://schemas.microsoft.com/office/drawing/2014/main" val="10000"/>
+                  </a:ext>
+                </a:extLst>
               </a:tr>
               <a:tr h="502920">
                 <a:tc>
@@ -11237,7 +11322,7 @@
                     <a:bodyPr/>
                     <a:lstStyle/>
                     <a:p>
-                      <a:pPr eaLnBrk="0" indent="0" marL="0">
+                      <a:pPr marL="0" indent="0" eaLnBrk="0">
                         <a:buNone/>
                       </a:pPr>
                       <a:r>
@@ -11305,7 +11390,7 @@
                     <a:bodyPr/>
                     <a:lstStyle/>
                     <a:p>
-                      <a:pPr eaLnBrk="0" indent="0" marL="0">
+                      <a:pPr marL="0" indent="0" eaLnBrk="0">
                         <a:buNone/>
                       </a:pPr>
                       <a:r>
@@ -11368,6 +11453,11 @@
                     </a:solidFill>
                   </a:tcPr>
                 </a:tc>
+                <a:extLst>
+                  <a:ext uri="{0D108BD9-81ED-4DB2-BD59-A6C34878D82A}">
+                    <a16:rowId xmlns:a16="http://schemas.microsoft.com/office/drawing/2014/main" val="10001"/>
+                  </a:ext>
+                </a:extLst>
               </a:tr>
               <a:tr h="502920">
                 <a:tc>
@@ -11375,7 +11465,7 @@
                     <a:bodyPr/>
                     <a:lstStyle/>
                     <a:p>
-                      <a:pPr eaLnBrk="0" indent="0" marL="0">
+                      <a:pPr marL="0" indent="0" eaLnBrk="0">
                         <a:buNone/>
                       </a:pPr>
                       <a:r>
@@ -11443,7 +11533,7 @@
                     <a:bodyPr/>
                     <a:lstStyle/>
                     <a:p>
-                      <a:pPr eaLnBrk="0" indent="0" marL="0">
+                      <a:pPr marL="0" indent="0" eaLnBrk="0">
                         <a:buNone/>
                       </a:pPr>
                       <a:r>
@@ -11506,6 +11596,11 @@
                     </a:solidFill>
                   </a:tcPr>
                 </a:tc>
+                <a:extLst>
+                  <a:ext uri="{0D108BD9-81ED-4DB2-BD59-A6C34878D82A}">
+                    <a16:rowId xmlns:a16="http://schemas.microsoft.com/office/drawing/2014/main" val="10002"/>
+                  </a:ext>
+                </a:extLst>
               </a:tr>
               <a:tr h="502920">
                 <a:tc>
@@ -11513,7 +11608,7 @@
                     <a:bodyPr/>
                     <a:lstStyle/>
                     <a:p>
-                      <a:pPr eaLnBrk="0" indent="0" marL="0">
+                      <a:pPr marL="0" indent="0" eaLnBrk="0">
                         <a:buNone/>
                       </a:pPr>
                       <a:r>
@@ -11581,7 +11676,7 @@
                     <a:bodyPr/>
                     <a:lstStyle/>
                     <a:p>
-                      <a:pPr eaLnBrk="0" indent="0" marL="0">
+                      <a:pPr marL="0" indent="0" eaLnBrk="0">
                         <a:buNone/>
                       </a:pPr>
                       <a:r>
@@ -11644,6 +11739,11 @@
                     </a:solidFill>
                   </a:tcPr>
                 </a:tc>
+                <a:extLst>
+                  <a:ext uri="{0D108BD9-81ED-4DB2-BD59-A6C34878D82A}">
+                    <a16:rowId xmlns:a16="http://schemas.microsoft.com/office/drawing/2014/main" val="10003"/>
+                  </a:ext>
+                </a:extLst>
               </a:tr>
             </a:tbl>
           </a:graphicData>
@@ -11670,7 +11770,7 @@
           <a:bodyPr wrap="square" lIns="0" tIns="0" rIns="0" bIns="0" rtlCol="0" anchor="t"/>
           <a:lstStyle/>
           <a:p>
-            <a:pPr eaLnBrk="0" indent="0" marL="0">
+            <a:pPr marL="0" indent="0" eaLnBrk="0">
               <a:buNone/>
             </a:pPr>
             <a:r>
@@ -11708,7 +11808,7 @@
           </a:prstGeom>
           <a:extLst>
             <a:ext uri="{C572A759-6A51-4108-AA02-DFA0A04FC94B}">
-              <ma14:wrappingTextBoxFlag xmlns:ma14="http://schemas.microsoft.com/office/mac/drawingml/2011/main" val="0"/>
+              <ma14:wrappingTextBoxFlag xmlns:ma14="http://schemas.microsoft.com/office/mac/drawingml/2011/main" xmlns="" val="0"/>
             </a:ext>
           </a:extLst>
         </p:spPr>
@@ -11727,9 +11827,9 @@
             </a:lvl1pPr>
           </a:lstStyle>
           <a:p>
-            <a:pPr eaLnBrk="0" algn="r"/>
+            <a:pPr algn="r" eaLnBrk="0"/>
             <a:fld id="{F7021451-1387-4CA6-816F-3879F97B5CBC}" type="slidenum">
-              <a:rPr b="0" lang="en-US"/>
+              <a:rPr lang="en-US" b="0"/>
               <a:t>14</a:t>
             </a:fld>
             <a:endParaRPr lang="en-US"/>
@@ -11784,7 +11884,7 @@
           </a:bodyPr>
           <a:lstStyle/>
           <a:p>
-            <a:pPr eaLnBrk="0" indent="0" marL="0">
+            <a:pPr marL="0" indent="0" eaLnBrk="0">
               <a:buNone/>
             </a:pPr>
             <a:r>
@@ -11825,9 +11925,27 @@
             <a:tbl>
               <a:tblPr/>
               <a:tblGrid>
-                <a:gridCol w="1188720"/>
-                <a:gridCol w="2743200"/>
-                <a:gridCol w="2834640"/>
+                <a:gridCol w="1188720">
+                  <a:extLst>
+                    <a:ext uri="{9D8B030D-6E8A-4147-A177-3AD203B41FA5}">
+                      <a16:colId xmlns:a16="http://schemas.microsoft.com/office/drawing/2014/main" val="20000"/>
+                    </a:ext>
+                  </a:extLst>
+                </a:gridCol>
+                <a:gridCol w="2743200">
+                  <a:extLst>
+                    <a:ext uri="{9D8B030D-6E8A-4147-A177-3AD203B41FA5}">
+                      <a16:colId xmlns:a16="http://schemas.microsoft.com/office/drawing/2014/main" val="20001"/>
+                    </a:ext>
+                  </a:extLst>
+                </a:gridCol>
+                <a:gridCol w="2834640">
+                  <a:extLst>
+                    <a:ext uri="{9D8B030D-6E8A-4147-A177-3AD203B41FA5}">
+                      <a16:colId xmlns:a16="http://schemas.microsoft.com/office/drawing/2014/main" val="20002"/>
+                    </a:ext>
+                  </a:extLst>
+                </a:gridCol>
               </a:tblGrid>
               <a:tr h="530352">
                 <a:tc>
@@ -11835,7 +11953,7 @@
                     <a:bodyPr/>
                     <a:lstStyle/>
                     <a:p>
-                      <a:pPr eaLnBrk="0" indent="0" marL="0">
+                      <a:pPr marL="0" indent="0" eaLnBrk="0">
                         <a:buNone/>
                       </a:pPr>
                       <a:r>
@@ -11903,7 +12021,7 @@
                     <a:bodyPr/>
                     <a:lstStyle/>
                     <a:p>
-                      <a:pPr eaLnBrk="0" indent="0" marL="0">
+                      <a:pPr marL="0" indent="0" eaLnBrk="0">
                         <a:buNone/>
                       </a:pPr>
                       <a:r>
@@ -11971,7 +12089,7 @@
                     <a:bodyPr/>
                     <a:lstStyle/>
                     <a:p>
-                      <a:pPr eaLnBrk="0" indent="0" marL="0">
+                      <a:pPr marL="0" indent="0" eaLnBrk="0">
                         <a:buNone/>
                       </a:pPr>
                       <a:r>
@@ -12034,6 +12152,11 @@
                     </a:solidFill>
                   </a:tcPr>
                 </a:tc>
+                <a:extLst>
+                  <a:ext uri="{0D108BD9-81ED-4DB2-BD59-A6C34878D82A}">
+                    <a16:rowId xmlns:a16="http://schemas.microsoft.com/office/drawing/2014/main" val="10000"/>
+                  </a:ext>
+                </a:extLst>
               </a:tr>
               <a:tr h="530352">
                 <a:tc>
@@ -12041,7 +12164,7 @@
                     <a:bodyPr/>
                     <a:lstStyle/>
                     <a:p>
-                      <a:pPr eaLnBrk="0" indent="0" marL="0">
+                      <a:pPr marL="0" indent="0" eaLnBrk="0">
                         <a:buNone/>
                       </a:pPr>
                       <a:r>
@@ -12109,7 +12232,7 @@
                     <a:bodyPr/>
                     <a:lstStyle/>
                     <a:p>
-                      <a:pPr eaLnBrk="0" indent="0" marL="0">
+                      <a:pPr marL="0" indent="0" eaLnBrk="0">
                         <a:buNone/>
                       </a:pPr>
                       <a:r>
@@ -12177,7 +12300,7 @@
                     <a:bodyPr/>
                     <a:lstStyle/>
                     <a:p>
-                      <a:pPr eaLnBrk="0" indent="0" marL="0">
+                      <a:pPr marL="0" indent="0" eaLnBrk="0">
                         <a:buNone/>
                       </a:pPr>
                       <a:r>
@@ -12240,6 +12363,11 @@
                     </a:solidFill>
                   </a:tcPr>
                 </a:tc>
+                <a:extLst>
+                  <a:ext uri="{0D108BD9-81ED-4DB2-BD59-A6C34878D82A}">
+                    <a16:rowId xmlns:a16="http://schemas.microsoft.com/office/drawing/2014/main" val="10001"/>
+                  </a:ext>
+                </a:extLst>
               </a:tr>
               <a:tr h="530352">
                 <a:tc>
@@ -12247,7 +12375,7 @@
                     <a:bodyPr/>
                     <a:lstStyle/>
                     <a:p>
-                      <a:pPr eaLnBrk="0" indent="0" marL="0">
+                      <a:pPr marL="0" indent="0" eaLnBrk="0">
                         <a:buNone/>
                       </a:pPr>
                       <a:r>
@@ -12315,7 +12443,7 @@
                     <a:bodyPr/>
                     <a:lstStyle/>
                     <a:p>
-                      <a:pPr eaLnBrk="0" indent="0" marL="0">
+                      <a:pPr marL="0" indent="0" eaLnBrk="0">
                         <a:buNone/>
                       </a:pPr>
                       <a:r>
@@ -12383,7 +12511,7 @@
                     <a:bodyPr/>
                     <a:lstStyle/>
                     <a:p>
-                      <a:pPr eaLnBrk="0" indent="0" marL="0">
+                      <a:pPr marL="0" indent="0" eaLnBrk="0">
                         <a:buNone/>
                       </a:pPr>
                       <a:r>
@@ -12446,6 +12574,11 @@
                     </a:solidFill>
                   </a:tcPr>
                 </a:tc>
+                <a:extLst>
+                  <a:ext uri="{0D108BD9-81ED-4DB2-BD59-A6C34878D82A}">
+                    <a16:rowId xmlns:a16="http://schemas.microsoft.com/office/drawing/2014/main" val="10002"/>
+                  </a:ext>
+                </a:extLst>
               </a:tr>
               <a:tr h="530352">
                 <a:tc>
@@ -12453,7 +12586,7 @@
                     <a:bodyPr/>
                     <a:lstStyle/>
                     <a:p>
-                      <a:pPr eaLnBrk="0" indent="0" marL="0">
+                      <a:pPr marL="0" indent="0" eaLnBrk="0">
                         <a:buNone/>
                       </a:pPr>
                       <a:r>
@@ -12521,7 +12654,7 @@
                     <a:bodyPr/>
                     <a:lstStyle/>
                     <a:p>
-                      <a:pPr eaLnBrk="0" indent="0" marL="0">
+                      <a:pPr marL="0" indent="0" eaLnBrk="0">
                         <a:buNone/>
                       </a:pPr>
                       <a:r>
@@ -12589,7 +12722,7 @@
                     <a:bodyPr/>
                     <a:lstStyle/>
                     <a:p>
-                      <a:pPr eaLnBrk="0" indent="0" marL="0">
+                      <a:pPr marL="0" indent="0" eaLnBrk="0">
                         <a:buNone/>
                       </a:pPr>
                       <a:r>
@@ -12652,6 +12785,11 @@
                     </a:solidFill>
                   </a:tcPr>
                 </a:tc>
+                <a:extLst>
+                  <a:ext uri="{0D108BD9-81ED-4DB2-BD59-A6C34878D82A}">
+                    <a16:rowId xmlns:a16="http://schemas.microsoft.com/office/drawing/2014/main" val="10003"/>
+                  </a:ext>
+                </a:extLst>
               </a:tr>
               <a:tr h="530352">
                 <a:tc>
@@ -12659,7 +12797,7 @@
                     <a:bodyPr/>
                     <a:lstStyle/>
                     <a:p>
-                      <a:pPr eaLnBrk="0" indent="0" marL="0">
+                      <a:pPr marL="0" indent="0" eaLnBrk="0">
                         <a:buNone/>
                       </a:pPr>
                       <a:r>
@@ -12727,7 +12865,7 @@
                     <a:bodyPr/>
                     <a:lstStyle/>
                     <a:p>
-                      <a:pPr eaLnBrk="0" indent="0" marL="0">
+                      <a:pPr marL="0" indent="0" eaLnBrk="0">
                         <a:buNone/>
                       </a:pPr>
                       <a:r>
@@ -12795,7 +12933,7 @@
                     <a:bodyPr/>
                     <a:lstStyle/>
                     <a:p>
-                      <a:pPr eaLnBrk="0" indent="0" marL="0">
+                      <a:pPr marL="0" indent="0" eaLnBrk="0">
                         <a:buNone/>
                       </a:pPr>
                       <a:r>
@@ -12858,6 +12996,11 @@
                     </a:solidFill>
                   </a:tcPr>
                 </a:tc>
+                <a:extLst>
+                  <a:ext uri="{0D108BD9-81ED-4DB2-BD59-A6C34878D82A}">
+                    <a16:rowId xmlns:a16="http://schemas.microsoft.com/office/drawing/2014/main" val="10004"/>
+                  </a:ext>
+                </a:extLst>
               </a:tr>
             </a:tbl>
           </a:graphicData>
@@ -12889,6 +13032,13 @@
             <a:prstDash val="solid"/>
           </a:ln>
         </p:spPr>
+        <p:txBody>
+          <a:bodyPr/>
+          <a:lstStyle/>
+          <a:p>
+            <a:endParaRPr lang="ko-KR" altLang="en-US"/>
+          </a:p>
+        </p:txBody>
       </p:sp>
       <p:sp>
         <p:nvSpPr>
@@ -12911,7 +13061,7 @@
           <a:bodyPr wrap="square" lIns="0" tIns="0" rIns="0" bIns="0" rtlCol="0" anchor="t"/>
           <a:lstStyle/>
           <a:p>
-            <a:pPr eaLnBrk="0" indent="0" marL="0">
+            <a:pPr marL="0" indent="0" eaLnBrk="0">
               <a:buNone/>
             </a:pPr>
             <a:r>
@@ -12950,7 +13100,7 @@
           <a:bodyPr wrap="square" lIns="0" tIns="0" rIns="0" bIns="0" rtlCol="0" anchor="t"/>
           <a:lstStyle/>
           <a:p>
-            <a:pPr eaLnBrk="0" indent="0" marL="0">
+            <a:pPr marL="0" indent="0" eaLnBrk="0">
               <a:buNone/>
             </a:pPr>
             <a:r>
@@ -12967,7 +13117,7 @@
             <a:endParaRPr lang="en-US" sz="1200" dirty="0"/>
           </a:p>
           <a:p>
-            <a:pPr eaLnBrk="0" indent="0" marL="0">
+            <a:pPr marL="0" indent="0" eaLnBrk="0">
               <a:buNone/>
             </a:pPr>
             <a:r>
@@ -12984,7 +13134,7 @@
             <a:endParaRPr lang="en-US" sz="1200" dirty="0"/>
           </a:p>
           <a:p>
-            <a:pPr eaLnBrk="0" indent="0" marL="0">
+            <a:pPr marL="0" indent="0" eaLnBrk="0">
               <a:buNone/>
             </a:pPr>
             <a:r>
@@ -13001,7 +13151,7 @@
             <a:endParaRPr lang="en-US" sz="1200" dirty="0"/>
           </a:p>
           <a:p>
-            <a:pPr eaLnBrk="0" indent="0" marL="0">
+            <a:pPr marL="0" indent="0" eaLnBrk="0">
               <a:buNone/>
             </a:pPr>
             <a:r>
@@ -13045,6 +13195,13 @@
             <a:prstDash val="solid"/>
           </a:ln>
         </p:spPr>
+        <p:txBody>
+          <a:bodyPr/>
+          <a:lstStyle/>
+          <a:p>
+            <a:endParaRPr lang="ko-KR" altLang="en-US"/>
+          </a:p>
+        </p:txBody>
       </p:sp>
       <p:sp>
         <p:nvSpPr>
@@ -13067,7 +13224,7 @@
           <a:bodyPr wrap="square" lIns="0" tIns="0" rIns="0" bIns="0" rtlCol="0" anchor="t"/>
           <a:lstStyle/>
           <a:p>
-            <a:pPr eaLnBrk="0" indent="0" marL="0">
+            <a:pPr marL="0" indent="0" eaLnBrk="0">
               <a:buNone/>
             </a:pPr>
             <a:r>
@@ -13106,7 +13263,7 @@
           <a:bodyPr wrap="square" lIns="0" tIns="0" rIns="0" bIns="0" rtlCol="0" anchor="t"/>
           <a:lstStyle/>
           <a:p>
-            <a:pPr eaLnBrk="0" indent="0" marL="0">
+            <a:pPr marL="0" indent="0" eaLnBrk="0">
               <a:buNone/>
             </a:pPr>
             <a:r>
@@ -13123,7 +13280,7 @@
             <a:endParaRPr lang="en-US" sz="1200" dirty="0"/>
           </a:p>
           <a:p>
-            <a:pPr eaLnBrk="0" indent="0" marL="0">
+            <a:pPr marL="0" indent="0" eaLnBrk="0">
               <a:buNone/>
             </a:pPr>
             <a:r>
@@ -13140,7 +13297,7 @@
             <a:endParaRPr lang="en-US" sz="1200" dirty="0"/>
           </a:p>
           <a:p>
-            <a:pPr eaLnBrk="0" indent="0" marL="0">
+            <a:pPr marL="0" indent="0" eaLnBrk="0">
               <a:buNone/>
             </a:pPr>
             <a:r>
@@ -13184,6 +13341,13 @@
             <a:prstDash val="solid"/>
           </a:ln>
         </p:spPr>
+        <p:txBody>
+          <a:bodyPr/>
+          <a:lstStyle/>
+          <a:p>
+            <a:endParaRPr lang="ko-KR" altLang="en-US"/>
+          </a:p>
+        </p:txBody>
       </p:sp>
       <p:sp>
         <p:nvSpPr>
@@ -13206,7 +13370,7 @@
           <a:bodyPr wrap="square" lIns="0" tIns="0" rIns="0" bIns="0" rtlCol="0" anchor="t"/>
           <a:lstStyle/>
           <a:p>
-            <a:pPr eaLnBrk="0" indent="0" marL="0">
+            <a:pPr marL="0" indent="0" eaLnBrk="0">
               <a:buNone/>
             </a:pPr>
             <a:r>
@@ -13245,7 +13409,7 @@
           <a:bodyPr wrap="square" lIns="0" tIns="0" rIns="0" bIns="0" rtlCol="0" anchor="t"/>
           <a:lstStyle/>
           <a:p>
-            <a:pPr eaLnBrk="0" indent="0" marL="0">
+            <a:pPr marL="0" indent="0" eaLnBrk="0">
               <a:buNone/>
             </a:pPr>
             <a:r>
@@ -13283,7 +13447,7 @@
           </a:prstGeom>
           <a:extLst>
             <a:ext uri="{C572A759-6A51-4108-AA02-DFA0A04FC94B}">
-              <ma14:wrappingTextBoxFlag xmlns:ma14="http://schemas.microsoft.com/office/mac/drawingml/2011/main" val="0"/>
+              <ma14:wrappingTextBoxFlag xmlns:ma14="http://schemas.microsoft.com/office/mac/drawingml/2011/main" xmlns="" val="0"/>
             </a:ext>
           </a:extLst>
         </p:spPr>
@@ -13302,9 +13466,9 @@
             </a:lvl1pPr>
           </a:lstStyle>
           <a:p>
-            <a:pPr eaLnBrk="0" algn="r"/>
+            <a:pPr algn="r" eaLnBrk="0"/>
             <a:fld id="{F7021451-1387-4CA6-816F-3879F97B5CBC}" type="slidenum">
-              <a:rPr b="0" lang="en-US"/>
+              <a:rPr lang="en-US" b="0"/>
               <a:t>15</a:t>
             </a:fld>
             <a:endParaRPr lang="en-US"/>
@@ -13359,7 +13523,7 @@
           </a:bodyPr>
           <a:lstStyle/>
           <a:p>
-            <a:pPr eaLnBrk="0" indent="0" marL="0">
+            <a:pPr marL="0" indent="0" eaLnBrk="0">
               <a:buNone/>
             </a:pPr>
             <a:r>
@@ -13400,9 +13564,27 @@
             <a:tbl>
               <a:tblPr/>
               <a:tblGrid>
-                <a:gridCol w="3017520"/>
-                <a:gridCol w="914400"/>
-                <a:gridCol w="7132320"/>
+                <a:gridCol w="3017520">
+                  <a:extLst>
+                    <a:ext uri="{9D8B030D-6E8A-4147-A177-3AD203B41FA5}">
+                      <a16:colId xmlns:a16="http://schemas.microsoft.com/office/drawing/2014/main" val="20000"/>
+                    </a:ext>
+                  </a:extLst>
+                </a:gridCol>
+                <a:gridCol w="914400">
+                  <a:extLst>
+                    <a:ext uri="{9D8B030D-6E8A-4147-A177-3AD203B41FA5}">
+                      <a16:colId xmlns:a16="http://schemas.microsoft.com/office/drawing/2014/main" val="20001"/>
+                    </a:ext>
+                  </a:extLst>
+                </a:gridCol>
+                <a:gridCol w="7132320">
+                  <a:extLst>
+                    <a:ext uri="{9D8B030D-6E8A-4147-A177-3AD203B41FA5}">
+                      <a16:colId xmlns:a16="http://schemas.microsoft.com/office/drawing/2014/main" val="20002"/>
+                    </a:ext>
+                  </a:extLst>
+                </a:gridCol>
               </a:tblGrid>
               <a:tr h="457200">
                 <a:tc>
@@ -13410,7 +13592,7 @@
                     <a:bodyPr/>
                     <a:lstStyle/>
                     <a:p>
-                      <a:pPr eaLnBrk="0" indent="0" marL="0">
+                      <a:pPr marL="0" indent="0" eaLnBrk="0">
                         <a:buNone/>
                       </a:pPr>
                       <a:r>
@@ -13478,7 +13660,7 @@
                     <a:bodyPr/>
                     <a:lstStyle/>
                     <a:p>
-                      <a:pPr eaLnBrk="0" indent="0" marL="0">
+                      <a:pPr marL="0" indent="0" eaLnBrk="0">
                         <a:buNone/>
                       </a:pPr>
                       <a:r>
@@ -13546,7 +13728,7 @@
                     <a:bodyPr/>
                     <a:lstStyle/>
                     <a:p>
-                      <a:pPr eaLnBrk="0" indent="0" marL="0">
+                      <a:pPr marL="0" indent="0" eaLnBrk="0">
                         <a:buNone/>
                       </a:pPr>
                       <a:r>
@@ -13609,6 +13791,11 @@
                     </a:solidFill>
                   </a:tcPr>
                 </a:tc>
+                <a:extLst>
+                  <a:ext uri="{0D108BD9-81ED-4DB2-BD59-A6C34878D82A}">
+                    <a16:rowId xmlns:a16="http://schemas.microsoft.com/office/drawing/2014/main" val="10000"/>
+                  </a:ext>
+                </a:extLst>
               </a:tr>
               <a:tr h="457200">
                 <a:tc>
@@ -13616,7 +13803,7 @@
                     <a:bodyPr/>
                     <a:lstStyle/>
                     <a:p>
-                      <a:pPr eaLnBrk="0" indent="0" marL="0">
+                      <a:pPr marL="0" indent="0" eaLnBrk="0">
                         <a:buNone/>
                       </a:pPr>
                       <a:r>
@@ -13684,7 +13871,7 @@
                     <a:bodyPr/>
                     <a:lstStyle/>
                     <a:p>
-                      <a:pPr eaLnBrk="0" indent="0" marL="0">
+                      <a:pPr marL="0" indent="0" eaLnBrk="0">
                         <a:buNone/>
                       </a:pPr>
                       <a:r>
@@ -13752,7 +13939,7 @@
                     <a:bodyPr/>
                     <a:lstStyle/>
                     <a:p>
-                      <a:pPr eaLnBrk="0" indent="0" marL="0">
+                      <a:pPr marL="0" indent="0" eaLnBrk="0">
                         <a:buNone/>
                       </a:pPr>
                       <a:r>
@@ -13815,6 +14002,11 @@
                     </a:solidFill>
                   </a:tcPr>
                 </a:tc>
+                <a:extLst>
+                  <a:ext uri="{0D108BD9-81ED-4DB2-BD59-A6C34878D82A}">
+                    <a16:rowId xmlns:a16="http://schemas.microsoft.com/office/drawing/2014/main" val="10001"/>
+                  </a:ext>
+                </a:extLst>
               </a:tr>
               <a:tr h="457200">
                 <a:tc>
@@ -13822,7 +14014,7 @@
                     <a:bodyPr/>
                     <a:lstStyle/>
                     <a:p>
-                      <a:pPr eaLnBrk="0" indent="0" marL="0">
+                      <a:pPr marL="0" indent="0" eaLnBrk="0">
                         <a:buNone/>
                       </a:pPr>
                       <a:r>
@@ -13890,7 +14082,7 @@
                     <a:bodyPr/>
                     <a:lstStyle/>
                     <a:p>
-                      <a:pPr eaLnBrk="0" indent="0" marL="0">
+                      <a:pPr marL="0" indent="0" eaLnBrk="0">
                         <a:buNone/>
                       </a:pPr>
                       <a:r>
@@ -13958,7 +14150,7 @@
                     <a:bodyPr/>
                     <a:lstStyle/>
                     <a:p>
-                      <a:pPr eaLnBrk="0" indent="0" marL="0">
+                      <a:pPr marL="0" indent="0" eaLnBrk="0">
                         <a:buNone/>
                       </a:pPr>
                       <a:r>
@@ -14021,6 +14213,11 @@
                     </a:solidFill>
                   </a:tcPr>
                 </a:tc>
+                <a:extLst>
+                  <a:ext uri="{0D108BD9-81ED-4DB2-BD59-A6C34878D82A}">
+                    <a16:rowId xmlns:a16="http://schemas.microsoft.com/office/drawing/2014/main" val="10002"/>
+                  </a:ext>
+                </a:extLst>
               </a:tr>
               <a:tr h="457200">
                 <a:tc>
@@ -14028,7 +14225,7 @@
                     <a:bodyPr/>
                     <a:lstStyle/>
                     <a:p>
-                      <a:pPr eaLnBrk="0" indent="0" marL="0">
+                      <a:pPr marL="0" indent="0" eaLnBrk="0">
                         <a:buNone/>
                       </a:pPr>
                       <a:r>
@@ -14096,7 +14293,7 @@
                     <a:bodyPr/>
                     <a:lstStyle/>
                     <a:p>
-                      <a:pPr eaLnBrk="0" indent="0" marL="0">
+                      <a:pPr marL="0" indent="0" eaLnBrk="0">
                         <a:buNone/>
                       </a:pPr>
                       <a:r>
@@ -14164,7 +14361,7 @@
                     <a:bodyPr/>
                     <a:lstStyle/>
                     <a:p>
-                      <a:pPr eaLnBrk="0" indent="0" marL="0">
+                      <a:pPr marL="0" indent="0" eaLnBrk="0">
                         <a:buNone/>
                       </a:pPr>
                       <a:r>
@@ -14227,6 +14424,11 @@
                     </a:solidFill>
                   </a:tcPr>
                 </a:tc>
+                <a:extLst>
+                  <a:ext uri="{0D108BD9-81ED-4DB2-BD59-A6C34878D82A}">
+                    <a16:rowId xmlns:a16="http://schemas.microsoft.com/office/drawing/2014/main" val="10003"/>
+                  </a:ext>
+                </a:extLst>
               </a:tr>
               <a:tr h="457200">
                 <a:tc>
@@ -14234,7 +14436,7 @@
                     <a:bodyPr/>
                     <a:lstStyle/>
                     <a:p>
-                      <a:pPr eaLnBrk="0" indent="0" marL="0">
+                      <a:pPr marL="0" indent="0" eaLnBrk="0">
                         <a:buNone/>
                       </a:pPr>
                       <a:r>
@@ -14302,7 +14504,7 @@
                     <a:bodyPr/>
                     <a:lstStyle/>
                     <a:p>
-                      <a:pPr eaLnBrk="0" indent="0" marL="0">
+                      <a:pPr marL="0" indent="0" eaLnBrk="0">
                         <a:buNone/>
                       </a:pPr>
                       <a:r>
@@ -14370,7 +14572,7 @@
                     <a:bodyPr/>
                     <a:lstStyle/>
                     <a:p>
-                      <a:pPr eaLnBrk="0" indent="0" marL="0">
+                      <a:pPr marL="0" indent="0" eaLnBrk="0">
                         <a:buNone/>
                       </a:pPr>
                       <a:r>
@@ -14433,6 +14635,11 @@
                     </a:solidFill>
                   </a:tcPr>
                 </a:tc>
+                <a:extLst>
+                  <a:ext uri="{0D108BD9-81ED-4DB2-BD59-A6C34878D82A}">
+                    <a16:rowId xmlns:a16="http://schemas.microsoft.com/office/drawing/2014/main" val="10004"/>
+                  </a:ext>
+                </a:extLst>
               </a:tr>
               <a:tr h="457200">
                 <a:tc>
@@ -14440,7 +14647,7 @@
                     <a:bodyPr/>
                     <a:lstStyle/>
                     <a:p>
-                      <a:pPr eaLnBrk="0" indent="0" marL="0">
+                      <a:pPr marL="0" indent="0" eaLnBrk="0">
                         <a:buNone/>
                       </a:pPr>
                       <a:r>
@@ -14508,7 +14715,7 @@
                     <a:bodyPr/>
                     <a:lstStyle/>
                     <a:p>
-                      <a:pPr eaLnBrk="0" indent="0" marL="0">
+                      <a:pPr marL="0" indent="0" eaLnBrk="0">
                         <a:buNone/>
                       </a:pPr>
                       <a:r>
@@ -14576,7 +14783,7 @@
                     <a:bodyPr/>
                     <a:lstStyle/>
                     <a:p>
-                      <a:pPr eaLnBrk="0" indent="0" marL="0">
+                      <a:pPr marL="0" indent="0" eaLnBrk="0">
                         <a:buNone/>
                       </a:pPr>
                       <a:r>
@@ -14639,6 +14846,11 @@
                     </a:solidFill>
                   </a:tcPr>
                 </a:tc>
+                <a:extLst>
+                  <a:ext uri="{0D108BD9-81ED-4DB2-BD59-A6C34878D82A}">
+                    <a16:rowId xmlns:a16="http://schemas.microsoft.com/office/drawing/2014/main" val="10005"/>
+                  </a:ext>
+                </a:extLst>
               </a:tr>
               <a:tr h="457200">
                 <a:tc>
@@ -14646,7 +14858,7 @@
                     <a:bodyPr/>
                     <a:lstStyle/>
                     <a:p>
-                      <a:pPr eaLnBrk="0" indent="0" marL="0">
+                      <a:pPr marL="0" indent="0" eaLnBrk="0">
                         <a:buNone/>
                       </a:pPr>
                       <a:r>
@@ -14714,7 +14926,7 @@
                     <a:bodyPr/>
                     <a:lstStyle/>
                     <a:p>
-                      <a:pPr eaLnBrk="0" indent="0" marL="0">
+                      <a:pPr marL="0" indent="0" eaLnBrk="0">
                         <a:buNone/>
                       </a:pPr>
                       <a:r>
@@ -14782,7 +14994,7 @@
                     <a:bodyPr/>
                     <a:lstStyle/>
                     <a:p>
-                      <a:pPr eaLnBrk="0" indent="0" marL="0">
+                      <a:pPr marL="0" indent="0" eaLnBrk="0">
                         <a:buNone/>
                       </a:pPr>
                       <a:r>
@@ -14845,6 +15057,11 @@
                     </a:solidFill>
                   </a:tcPr>
                 </a:tc>
+                <a:extLst>
+                  <a:ext uri="{0D108BD9-81ED-4DB2-BD59-A6C34878D82A}">
+                    <a16:rowId xmlns:a16="http://schemas.microsoft.com/office/drawing/2014/main" val="10006"/>
+                  </a:ext>
+                </a:extLst>
               </a:tr>
               <a:tr h="457200">
                 <a:tc>
@@ -14852,7 +15069,7 @@
                     <a:bodyPr/>
                     <a:lstStyle/>
                     <a:p>
-                      <a:pPr eaLnBrk="0" indent="0" marL="0">
+                      <a:pPr marL="0" indent="0" eaLnBrk="0">
                         <a:buNone/>
                       </a:pPr>
                       <a:r>
@@ -14920,7 +15137,7 @@
                     <a:bodyPr/>
                     <a:lstStyle/>
                     <a:p>
-                      <a:pPr eaLnBrk="0" indent="0" marL="0">
+                      <a:pPr marL="0" indent="0" eaLnBrk="0">
                         <a:buNone/>
                       </a:pPr>
                       <a:r>
@@ -14988,7 +15205,7 @@
                     <a:bodyPr/>
                     <a:lstStyle/>
                     <a:p>
-                      <a:pPr eaLnBrk="0" indent="0" marL="0">
+                      <a:pPr marL="0" indent="0" eaLnBrk="0">
                         <a:buNone/>
                       </a:pPr>
                       <a:r>
@@ -15051,6 +15268,11 @@
                     </a:solidFill>
                   </a:tcPr>
                 </a:tc>
+                <a:extLst>
+                  <a:ext uri="{0D108BD9-81ED-4DB2-BD59-A6C34878D82A}">
+                    <a16:rowId xmlns:a16="http://schemas.microsoft.com/office/drawing/2014/main" val="10007"/>
+                  </a:ext>
+                </a:extLst>
               </a:tr>
               <a:tr h="457200">
                 <a:tc>
@@ -15058,7 +15280,7 @@
                     <a:bodyPr/>
                     <a:lstStyle/>
                     <a:p>
-                      <a:pPr eaLnBrk="0" indent="0" marL="0">
+                      <a:pPr marL="0" indent="0" eaLnBrk="0">
                         <a:buNone/>
                       </a:pPr>
                       <a:r>
@@ -15126,7 +15348,7 @@
                     <a:bodyPr/>
                     <a:lstStyle/>
                     <a:p>
-                      <a:pPr eaLnBrk="0" indent="0" marL="0">
+                      <a:pPr marL="0" indent="0" eaLnBrk="0">
                         <a:buNone/>
                       </a:pPr>
                       <a:r>
@@ -15194,7 +15416,7 @@
                     <a:bodyPr/>
                     <a:lstStyle/>
                     <a:p>
-                      <a:pPr eaLnBrk="0" indent="0" marL="0">
+                      <a:pPr marL="0" indent="0" eaLnBrk="0">
                         <a:buNone/>
                       </a:pPr>
                       <a:r>
@@ -15257,6 +15479,11 @@
                     </a:solidFill>
                   </a:tcPr>
                 </a:tc>
+                <a:extLst>
+                  <a:ext uri="{0D108BD9-81ED-4DB2-BD59-A6C34878D82A}">
+                    <a16:rowId xmlns:a16="http://schemas.microsoft.com/office/drawing/2014/main" val="10008"/>
+                  </a:ext>
+                </a:extLst>
               </a:tr>
               <a:tr h="457200">
                 <a:tc>
@@ -15264,7 +15491,7 @@
                     <a:bodyPr/>
                     <a:lstStyle/>
                     <a:p>
-                      <a:pPr eaLnBrk="0" indent="0" marL="0">
+                      <a:pPr marL="0" indent="0" eaLnBrk="0">
                         <a:buNone/>
                       </a:pPr>
                       <a:r>
@@ -15332,7 +15559,7 @@
                     <a:bodyPr/>
                     <a:lstStyle/>
                     <a:p>
-                      <a:pPr eaLnBrk="0" indent="0" marL="0">
+                      <a:pPr marL="0" indent="0" eaLnBrk="0">
                         <a:buNone/>
                       </a:pPr>
                       <a:r>
@@ -15400,7 +15627,7 @@
                     <a:bodyPr/>
                     <a:lstStyle/>
                     <a:p>
-                      <a:pPr eaLnBrk="0" indent="0" marL="0">
+                      <a:pPr marL="0" indent="0" eaLnBrk="0">
                         <a:buNone/>
                       </a:pPr>
                       <a:r>
@@ -15463,6 +15690,11 @@
                     </a:solidFill>
                   </a:tcPr>
                 </a:tc>
+                <a:extLst>
+                  <a:ext uri="{0D108BD9-81ED-4DB2-BD59-A6C34878D82A}">
+                    <a16:rowId xmlns:a16="http://schemas.microsoft.com/office/drawing/2014/main" val="10009"/>
+                  </a:ext>
+                </a:extLst>
               </a:tr>
             </a:tbl>
           </a:graphicData>
@@ -15488,7 +15720,7 @@
           </a:prstGeom>
           <a:extLst>
             <a:ext uri="{C572A759-6A51-4108-AA02-DFA0A04FC94B}">
-              <ma14:wrappingTextBoxFlag xmlns:ma14="http://schemas.microsoft.com/office/mac/drawingml/2011/main" val="0"/>
+              <ma14:wrappingTextBoxFlag xmlns:ma14="http://schemas.microsoft.com/office/mac/drawingml/2011/main" xmlns="" val="0"/>
             </a:ext>
           </a:extLst>
         </p:spPr>
@@ -15507,9 +15739,9 @@
             </a:lvl1pPr>
           </a:lstStyle>
           <a:p>
-            <a:pPr eaLnBrk="0" algn="r"/>
+            <a:pPr algn="r" eaLnBrk="0"/>
             <a:fld id="{F7021451-1387-4CA6-816F-3879F97B5CBC}" type="slidenum">
-              <a:rPr b="0" lang="en-US"/>
+              <a:rPr lang="en-US" b="0"/>
               <a:t>16</a:t>
             </a:fld>
             <a:endParaRPr lang="en-US"/>
@@ -15564,7 +15796,7 @@
           </a:bodyPr>
           <a:lstStyle/>
           <a:p>
-            <a:pPr eaLnBrk="0" indent="0" marL="0">
+            <a:pPr marL="0" indent="0" eaLnBrk="0">
               <a:buNone/>
             </a:pPr>
             <a:r>
@@ -15605,8 +15837,20 @@
             <a:tbl>
               <a:tblPr/>
               <a:tblGrid>
-                <a:gridCol w="2651760"/>
-                <a:gridCol w="8412480"/>
+                <a:gridCol w="2651760">
+                  <a:extLst>
+                    <a:ext uri="{9D8B030D-6E8A-4147-A177-3AD203B41FA5}">
+                      <a16:colId xmlns:a16="http://schemas.microsoft.com/office/drawing/2014/main" val="20000"/>
+                    </a:ext>
+                  </a:extLst>
+                </a:gridCol>
+                <a:gridCol w="8412480">
+                  <a:extLst>
+                    <a:ext uri="{9D8B030D-6E8A-4147-A177-3AD203B41FA5}">
+                      <a16:colId xmlns:a16="http://schemas.microsoft.com/office/drawing/2014/main" val="20001"/>
+                    </a:ext>
+                  </a:extLst>
+                </a:gridCol>
               </a:tblGrid>
               <a:tr h="640080">
                 <a:tc>
@@ -15614,7 +15858,7 @@
                     <a:bodyPr/>
                     <a:lstStyle/>
                     <a:p>
-                      <a:pPr eaLnBrk="0" indent="0" marL="0">
+                      <a:pPr marL="0" indent="0" eaLnBrk="0">
                         <a:buNone/>
                       </a:pPr>
                       <a:r>
@@ -15682,7 +15926,7 @@
                     <a:bodyPr/>
                     <a:lstStyle/>
                     <a:p>
-                      <a:pPr eaLnBrk="0" indent="0" marL="0">
+                      <a:pPr marL="0" indent="0" eaLnBrk="0">
                         <a:buNone/>
                       </a:pPr>
                       <a:r>
@@ -15745,6 +15989,11 @@
                     </a:solidFill>
                   </a:tcPr>
                 </a:tc>
+                <a:extLst>
+                  <a:ext uri="{0D108BD9-81ED-4DB2-BD59-A6C34878D82A}">
+                    <a16:rowId xmlns:a16="http://schemas.microsoft.com/office/drawing/2014/main" val="10000"/>
+                  </a:ext>
+                </a:extLst>
               </a:tr>
               <a:tr h="640080">
                 <a:tc>
@@ -15752,7 +16001,7 @@
                     <a:bodyPr/>
                     <a:lstStyle/>
                     <a:p>
-                      <a:pPr eaLnBrk="0" indent="0" marL="0">
+                      <a:pPr marL="0" indent="0" eaLnBrk="0">
                         <a:buNone/>
                       </a:pPr>
                       <a:r>
@@ -15820,7 +16069,7 @@
                     <a:bodyPr/>
                     <a:lstStyle/>
                     <a:p>
-                      <a:pPr eaLnBrk="0" indent="0" marL="0">
+                      <a:pPr marL="0" indent="0" eaLnBrk="0">
                         <a:buNone/>
                       </a:pPr>
                       <a:r>
@@ -15883,6 +16132,11 @@
                     </a:solidFill>
                   </a:tcPr>
                 </a:tc>
+                <a:extLst>
+                  <a:ext uri="{0D108BD9-81ED-4DB2-BD59-A6C34878D82A}">
+                    <a16:rowId xmlns:a16="http://schemas.microsoft.com/office/drawing/2014/main" val="10001"/>
+                  </a:ext>
+                </a:extLst>
               </a:tr>
               <a:tr h="640080">
                 <a:tc>
@@ -15890,7 +16144,7 @@
                     <a:bodyPr/>
                     <a:lstStyle/>
                     <a:p>
-                      <a:pPr eaLnBrk="0" indent="0" marL="0">
+                      <a:pPr marL="0" indent="0" eaLnBrk="0">
                         <a:buNone/>
                       </a:pPr>
                       <a:r>
@@ -15958,7 +16212,7 @@
                     <a:bodyPr/>
                     <a:lstStyle/>
                     <a:p>
-                      <a:pPr eaLnBrk="0" indent="0" marL="0">
+                      <a:pPr marL="0" indent="0" eaLnBrk="0">
                         <a:buNone/>
                       </a:pPr>
                       <a:r>
@@ -16021,6 +16275,11 @@
                     </a:solidFill>
                   </a:tcPr>
                 </a:tc>
+                <a:extLst>
+                  <a:ext uri="{0D108BD9-81ED-4DB2-BD59-A6C34878D82A}">
+                    <a16:rowId xmlns:a16="http://schemas.microsoft.com/office/drawing/2014/main" val="10002"/>
+                  </a:ext>
+                </a:extLst>
               </a:tr>
               <a:tr h="640080">
                 <a:tc>
@@ -16028,7 +16287,7 @@
                     <a:bodyPr/>
                     <a:lstStyle/>
                     <a:p>
-                      <a:pPr eaLnBrk="0" indent="0" marL="0">
+                      <a:pPr marL="0" indent="0" eaLnBrk="0">
                         <a:buNone/>
                       </a:pPr>
                       <a:r>
@@ -16096,7 +16355,7 @@
                     <a:bodyPr/>
                     <a:lstStyle/>
                     <a:p>
-                      <a:pPr eaLnBrk="0" indent="0" marL="0">
+                      <a:pPr marL="0" indent="0" eaLnBrk="0">
                         <a:buNone/>
                       </a:pPr>
                       <a:r>
@@ -16159,6 +16418,11 @@
                     </a:solidFill>
                   </a:tcPr>
                 </a:tc>
+                <a:extLst>
+                  <a:ext uri="{0D108BD9-81ED-4DB2-BD59-A6C34878D82A}">
+                    <a16:rowId xmlns:a16="http://schemas.microsoft.com/office/drawing/2014/main" val="10003"/>
+                  </a:ext>
+                </a:extLst>
               </a:tr>
               <a:tr h="640080">
                 <a:tc>
@@ -16166,7 +16430,7 @@
                     <a:bodyPr/>
                     <a:lstStyle/>
                     <a:p>
-                      <a:pPr eaLnBrk="0" indent="0" marL="0">
+                      <a:pPr marL="0" indent="0" eaLnBrk="0">
                         <a:buNone/>
                       </a:pPr>
                       <a:r>
@@ -16234,7 +16498,7 @@
                     <a:bodyPr/>
                     <a:lstStyle/>
                     <a:p>
-                      <a:pPr eaLnBrk="0" indent="0" marL="0">
+                      <a:pPr marL="0" indent="0" eaLnBrk="0">
                         <a:buNone/>
                       </a:pPr>
                       <a:r>
@@ -16297,6 +16561,11 @@
                     </a:solidFill>
                   </a:tcPr>
                 </a:tc>
+                <a:extLst>
+                  <a:ext uri="{0D108BD9-81ED-4DB2-BD59-A6C34878D82A}">
+                    <a16:rowId xmlns:a16="http://schemas.microsoft.com/office/drawing/2014/main" val="10004"/>
+                  </a:ext>
+                </a:extLst>
               </a:tr>
               <a:tr h="640080">
                 <a:tc>
@@ -16304,7 +16573,7 @@
                     <a:bodyPr/>
                     <a:lstStyle/>
                     <a:p>
-                      <a:pPr eaLnBrk="0" indent="0" marL="0">
+                      <a:pPr marL="0" indent="0" eaLnBrk="0">
                         <a:buNone/>
                       </a:pPr>
                       <a:r>
@@ -16372,7 +16641,7 @@
                     <a:bodyPr/>
                     <a:lstStyle/>
                     <a:p>
-                      <a:pPr eaLnBrk="0" indent="0" marL="0">
+                      <a:pPr marL="0" indent="0" eaLnBrk="0">
                         <a:buNone/>
                       </a:pPr>
                       <a:r>
@@ -16435,6 +16704,11 @@
                     </a:solidFill>
                   </a:tcPr>
                 </a:tc>
+                <a:extLst>
+                  <a:ext uri="{0D108BD9-81ED-4DB2-BD59-A6C34878D82A}">
+                    <a16:rowId xmlns:a16="http://schemas.microsoft.com/office/drawing/2014/main" val="10005"/>
+                  </a:ext>
+                </a:extLst>
               </a:tr>
             </a:tbl>
           </a:graphicData>
@@ -16466,6 +16740,13 @@
             <a:prstDash val="solid"/>
           </a:ln>
         </p:spPr>
+        <p:txBody>
+          <a:bodyPr/>
+          <a:lstStyle/>
+          <a:p>
+            <a:endParaRPr lang="ko-KR" altLang="en-US"/>
+          </a:p>
+        </p:txBody>
       </p:sp>
       <p:sp>
         <p:nvSpPr>
@@ -16488,7 +16769,7 @@
           <a:bodyPr wrap="square" lIns="0" tIns="0" rIns="0" bIns="0" rtlCol="0" anchor="t"/>
           <a:lstStyle/>
           <a:p>
-            <a:pPr eaLnBrk="0" indent="0" marL="0">
+            <a:pPr marL="0" indent="0" eaLnBrk="0">
               <a:buNone/>
             </a:pPr>
             <a:r>
@@ -16527,7 +16808,7 @@
           <a:bodyPr wrap="square" lIns="0" tIns="0" rIns="0" bIns="0" rtlCol="0" anchor="t"/>
           <a:lstStyle/>
           <a:p>
-            <a:pPr eaLnBrk="0" indent="0" marL="0">
+            <a:pPr marL="0" indent="0" eaLnBrk="0">
               <a:buNone/>
             </a:pPr>
             <a:r>
@@ -16565,7 +16846,7 @@
           </a:prstGeom>
           <a:extLst>
             <a:ext uri="{C572A759-6A51-4108-AA02-DFA0A04FC94B}">
-              <ma14:wrappingTextBoxFlag xmlns:ma14="http://schemas.microsoft.com/office/mac/drawingml/2011/main" val="0"/>
+              <ma14:wrappingTextBoxFlag xmlns:ma14="http://schemas.microsoft.com/office/mac/drawingml/2011/main" xmlns="" val="0"/>
             </a:ext>
           </a:extLst>
         </p:spPr>
@@ -16584,9 +16865,9 @@
             </a:lvl1pPr>
           </a:lstStyle>
           <a:p>
-            <a:pPr eaLnBrk="0" algn="r"/>
+            <a:pPr algn="r" eaLnBrk="0"/>
             <a:fld id="{F7021451-1387-4CA6-816F-3879F97B5CBC}" type="slidenum">
-              <a:rPr b="0" lang="en-US"/>
+              <a:rPr lang="en-US" b="0"/>
               <a:t>17</a:t>
             </a:fld>
             <a:endParaRPr lang="en-US"/>
@@ -16641,7 +16922,7 @@
           </a:bodyPr>
           <a:lstStyle/>
           <a:p>
-            <a:pPr eaLnBrk="0" indent="0" marL="0">
+            <a:pPr marL="0" indent="0" eaLnBrk="0">
               <a:buNone/>
             </a:pPr>
             <a:r>
@@ -16682,9 +16963,27 @@
             <a:tbl>
               <a:tblPr/>
               <a:tblGrid>
-                <a:gridCol w="2651760"/>
-                <a:gridCol w="4663440"/>
-                <a:gridCol w="3749040"/>
+                <a:gridCol w="2651760">
+                  <a:extLst>
+                    <a:ext uri="{9D8B030D-6E8A-4147-A177-3AD203B41FA5}">
+                      <a16:colId xmlns:a16="http://schemas.microsoft.com/office/drawing/2014/main" val="20000"/>
+                    </a:ext>
+                  </a:extLst>
+                </a:gridCol>
+                <a:gridCol w="4663440">
+                  <a:extLst>
+                    <a:ext uri="{9D8B030D-6E8A-4147-A177-3AD203B41FA5}">
+                      <a16:colId xmlns:a16="http://schemas.microsoft.com/office/drawing/2014/main" val="20001"/>
+                    </a:ext>
+                  </a:extLst>
+                </a:gridCol>
+                <a:gridCol w="3749040">
+                  <a:extLst>
+                    <a:ext uri="{9D8B030D-6E8A-4147-A177-3AD203B41FA5}">
+                      <a16:colId xmlns:a16="http://schemas.microsoft.com/office/drawing/2014/main" val="20002"/>
+                    </a:ext>
+                  </a:extLst>
+                </a:gridCol>
               </a:tblGrid>
               <a:tr h="713232">
                 <a:tc>
@@ -16692,7 +16991,7 @@
                     <a:bodyPr/>
                     <a:lstStyle/>
                     <a:p>
-                      <a:pPr eaLnBrk="0" indent="0" marL="0">
+                      <a:pPr marL="0" indent="0" eaLnBrk="0">
                         <a:buNone/>
                       </a:pPr>
                       <a:r>
@@ -16760,7 +17059,7 @@
                     <a:bodyPr/>
                     <a:lstStyle/>
                     <a:p>
-                      <a:pPr eaLnBrk="0" indent="0" marL="0">
+                      <a:pPr marL="0" indent="0" eaLnBrk="0">
                         <a:buNone/>
                       </a:pPr>
                       <a:r>
@@ -16828,7 +17127,7 @@
                     <a:bodyPr/>
                     <a:lstStyle/>
                     <a:p>
-                      <a:pPr eaLnBrk="0" indent="0" marL="0">
+                      <a:pPr marL="0" indent="0" eaLnBrk="0">
                         <a:buNone/>
                       </a:pPr>
                       <a:r>
@@ -16891,6 +17190,11 @@
                     </a:solidFill>
                   </a:tcPr>
                 </a:tc>
+                <a:extLst>
+                  <a:ext uri="{0D108BD9-81ED-4DB2-BD59-A6C34878D82A}">
+                    <a16:rowId xmlns:a16="http://schemas.microsoft.com/office/drawing/2014/main" val="10000"/>
+                  </a:ext>
+                </a:extLst>
               </a:tr>
               <a:tr h="713232">
                 <a:tc>
@@ -16898,7 +17202,7 @@
                     <a:bodyPr/>
                     <a:lstStyle/>
                     <a:p>
-                      <a:pPr eaLnBrk="0" indent="0" marL="0">
+                      <a:pPr marL="0" indent="0" eaLnBrk="0">
                         <a:buNone/>
                       </a:pPr>
                       <a:r>
@@ -16966,7 +17270,7 @@
                     <a:bodyPr/>
                     <a:lstStyle/>
                     <a:p>
-                      <a:pPr eaLnBrk="0" indent="0" marL="0">
+                      <a:pPr marL="0" indent="0" eaLnBrk="0">
                         <a:buNone/>
                       </a:pPr>
                       <a:r>
@@ -17034,7 +17338,7 @@
                     <a:bodyPr/>
                     <a:lstStyle/>
                     <a:p>
-                      <a:pPr eaLnBrk="0" indent="0" marL="0">
+                      <a:pPr marL="0" indent="0" eaLnBrk="0">
                         <a:buNone/>
                       </a:pPr>
                       <a:r>
@@ -17097,6 +17401,11 @@
                     </a:solidFill>
                   </a:tcPr>
                 </a:tc>
+                <a:extLst>
+                  <a:ext uri="{0D108BD9-81ED-4DB2-BD59-A6C34878D82A}">
+                    <a16:rowId xmlns:a16="http://schemas.microsoft.com/office/drawing/2014/main" val="10001"/>
+                  </a:ext>
+                </a:extLst>
               </a:tr>
               <a:tr h="713232">
                 <a:tc>
@@ -17104,7 +17413,7 @@
                     <a:bodyPr/>
                     <a:lstStyle/>
                     <a:p>
-                      <a:pPr eaLnBrk="0" indent="0" marL="0">
+                      <a:pPr marL="0" indent="0" eaLnBrk="0">
                         <a:buNone/>
                       </a:pPr>
                       <a:r>
@@ -17172,7 +17481,7 @@
                     <a:bodyPr/>
                     <a:lstStyle/>
                     <a:p>
-                      <a:pPr eaLnBrk="0" indent="0" marL="0">
+                      <a:pPr marL="0" indent="0" eaLnBrk="0">
                         <a:buNone/>
                       </a:pPr>
                       <a:r>
@@ -17240,7 +17549,7 @@
                     <a:bodyPr/>
                     <a:lstStyle/>
                     <a:p>
-                      <a:pPr eaLnBrk="0" indent="0" marL="0">
+                      <a:pPr marL="0" indent="0" eaLnBrk="0">
                         <a:buNone/>
                       </a:pPr>
                       <a:r>
@@ -17303,6 +17612,11 @@
                     </a:solidFill>
                   </a:tcPr>
                 </a:tc>
+                <a:extLst>
+                  <a:ext uri="{0D108BD9-81ED-4DB2-BD59-A6C34878D82A}">
+                    <a16:rowId xmlns:a16="http://schemas.microsoft.com/office/drawing/2014/main" val="10002"/>
+                  </a:ext>
+                </a:extLst>
               </a:tr>
               <a:tr h="713232">
                 <a:tc>
@@ -17310,7 +17624,7 @@
                     <a:bodyPr/>
                     <a:lstStyle/>
                     <a:p>
-                      <a:pPr eaLnBrk="0" indent="0" marL="0">
+                      <a:pPr marL="0" indent="0" eaLnBrk="0">
                         <a:buNone/>
                       </a:pPr>
                       <a:r>
@@ -17378,7 +17692,7 @@
                     <a:bodyPr/>
                     <a:lstStyle/>
                     <a:p>
-                      <a:pPr eaLnBrk="0" indent="0" marL="0">
+                      <a:pPr marL="0" indent="0" eaLnBrk="0">
                         <a:buNone/>
                       </a:pPr>
                       <a:r>
@@ -17446,7 +17760,7 @@
                     <a:bodyPr/>
                     <a:lstStyle/>
                     <a:p>
-                      <a:pPr eaLnBrk="0" indent="0" marL="0">
+                      <a:pPr marL="0" indent="0" eaLnBrk="0">
                         <a:buNone/>
                       </a:pPr>
                       <a:r>
@@ -17509,6 +17823,11 @@
                     </a:solidFill>
                   </a:tcPr>
                 </a:tc>
+                <a:extLst>
+                  <a:ext uri="{0D108BD9-81ED-4DB2-BD59-A6C34878D82A}">
+                    <a16:rowId xmlns:a16="http://schemas.microsoft.com/office/drawing/2014/main" val="10003"/>
+                  </a:ext>
+                </a:extLst>
               </a:tr>
               <a:tr h="713232">
                 <a:tc>
@@ -17516,7 +17835,7 @@
                     <a:bodyPr/>
                     <a:lstStyle/>
                     <a:p>
-                      <a:pPr eaLnBrk="0" indent="0" marL="0">
+                      <a:pPr marL="0" indent="0" eaLnBrk="0">
                         <a:buNone/>
                       </a:pPr>
                       <a:r>
@@ -17584,7 +17903,7 @@
                     <a:bodyPr/>
                     <a:lstStyle/>
                     <a:p>
-                      <a:pPr eaLnBrk="0" indent="0" marL="0">
+                      <a:pPr marL="0" indent="0" eaLnBrk="0">
                         <a:buNone/>
                       </a:pPr>
                       <a:r>
@@ -17652,7 +17971,7 @@
                     <a:bodyPr/>
                     <a:lstStyle/>
                     <a:p>
-                      <a:pPr eaLnBrk="0" indent="0" marL="0">
+                      <a:pPr marL="0" indent="0" eaLnBrk="0">
                         <a:buNone/>
                       </a:pPr>
                       <a:r>
@@ -17715,6 +18034,11 @@
                     </a:solidFill>
                   </a:tcPr>
                 </a:tc>
+                <a:extLst>
+                  <a:ext uri="{0D108BD9-81ED-4DB2-BD59-A6C34878D82A}">
+                    <a16:rowId xmlns:a16="http://schemas.microsoft.com/office/drawing/2014/main" val="10004"/>
+                  </a:ext>
+                </a:extLst>
               </a:tr>
               <a:tr h="713232">
                 <a:tc>
@@ -17722,7 +18046,7 @@
                     <a:bodyPr/>
                     <a:lstStyle/>
                     <a:p>
-                      <a:pPr eaLnBrk="0" indent="0" marL="0">
+                      <a:pPr marL="0" indent="0" eaLnBrk="0">
                         <a:buNone/>
                       </a:pPr>
                       <a:r>
@@ -17790,7 +18114,7 @@
                     <a:bodyPr/>
                     <a:lstStyle/>
                     <a:p>
-                      <a:pPr eaLnBrk="0" indent="0" marL="0">
+                      <a:pPr marL="0" indent="0" eaLnBrk="0">
                         <a:buNone/>
                       </a:pPr>
                       <a:r>
@@ -17858,7 +18182,7 @@
                     <a:bodyPr/>
                     <a:lstStyle/>
                     <a:p>
-                      <a:pPr eaLnBrk="0" indent="0" marL="0">
+                      <a:pPr marL="0" indent="0" eaLnBrk="0">
                         <a:buNone/>
                       </a:pPr>
                       <a:r>
@@ -17921,6 +18245,11 @@
                     </a:solidFill>
                   </a:tcPr>
                 </a:tc>
+                <a:extLst>
+                  <a:ext uri="{0D108BD9-81ED-4DB2-BD59-A6C34878D82A}">
+                    <a16:rowId xmlns:a16="http://schemas.microsoft.com/office/drawing/2014/main" val="10005"/>
+                  </a:ext>
+                </a:extLst>
               </a:tr>
               <a:tr h="713232">
                 <a:tc>
@@ -17928,7 +18257,7 @@
                     <a:bodyPr/>
                     <a:lstStyle/>
                     <a:p>
-                      <a:pPr eaLnBrk="0" indent="0" marL="0">
+                      <a:pPr marL="0" indent="0" eaLnBrk="0">
                         <a:buNone/>
                       </a:pPr>
                       <a:r>
@@ -17996,7 +18325,7 @@
                     <a:bodyPr/>
                     <a:lstStyle/>
                     <a:p>
-                      <a:pPr eaLnBrk="0" indent="0" marL="0">
+                      <a:pPr marL="0" indent="0" eaLnBrk="0">
                         <a:buNone/>
                       </a:pPr>
                       <a:r>
@@ -18064,7 +18393,7 @@
                     <a:bodyPr/>
                     <a:lstStyle/>
                     <a:p>
-                      <a:pPr eaLnBrk="0" indent="0" marL="0">
+                      <a:pPr marL="0" indent="0" eaLnBrk="0">
                         <a:buNone/>
                       </a:pPr>
                       <a:r>
@@ -18127,6 +18456,11 @@
                     </a:solidFill>
                   </a:tcPr>
                 </a:tc>
+                <a:extLst>
+                  <a:ext uri="{0D108BD9-81ED-4DB2-BD59-A6C34878D82A}">
+                    <a16:rowId xmlns:a16="http://schemas.microsoft.com/office/drawing/2014/main" val="10006"/>
+                  </a:ext>
+                </a:extLst>
               </a:tr>
             </a:tbl>
           </a:graphicData>
@@ -18152,7 +18486,7 @@
           </a:prstGeom>
           <a:extLst>
             <a:ext uri="{C572A759-6A51-4108-AA02-DFA0A04FC94B}">
-              <ma14:wrappingTextBoxFlag xmlns:ma14="http://schemas.microsoft.com/office/mac/drawingml/2011/main" val="0"/>
+              <ma14:wrappingTextBoxFlag xmlns:ma14="http://schemas.microsoft.com/office/mac/drawingml/2011/main" xmlns="" val="0"/>
             </a:ext>
           </a:extLst>
         </p:spPr>
@@ -18171,9 +18505,9 @@
             </a:lvl1pPr>
           </a:lstStyle>
           <a:p>
-            <a:pPr eaLnBrk="0" algn="r"/>
+            <a:pPr algn="r" eaLnBrk="0"/>
             <a:fld id="{F7021451-1387-4CA6-816F-3879F97B5CBC}" type="slidenum">
-              <a:rPr b="0" lang="en-US"/>
+              <a:rPr lang="en-US" b="0"/>
               <a:t>18</a:t>
             </a:fld>
             <a:endParaRPr lang="en-US"/>
@@ -18228,7 +18562,7 @@
           </a:bodyPr>
           <a:lstStyle/>
           <a:p>
-            <a:pPr eaLnBrk="0" indent="0" marL="0">
+            <a:pPr marL="0" indent="0" eaLnBrk="0">
               <a:buNone/>
             </a:pPr>
             <a:r>
@@ -18269,9 +18603,27 @@
             <a:tbl>
               <a:tblPr/>
               <a:tblGrid>
-                <a:gridCol w="2834640"/>
-                <a:gridCol w="822960"/>
-                <a:gridCol w="4114800"/>
+                <a:gridCol w="2834640">
+                  <a:extLst>
+                    <a:ext uri="{9D8B030D-6E8A-4147-A177-3AD203B41FA5}">
+                      <a16:colId xmlns:a16="http://schemas.microsoft.com/office/drawing/2014/main" val="20000"/>
+                    </a:ext>
+                  </a:extLst>
+                </a:gridCol>
+                <a:gridCol w="822960">
+                  <a:extLst>
+                    <a:ext uri="{9D8B030D-6E8A-4147-A177-3AD203B41FA5}">
+                      <a16:colId xmlns:a16="http://schemas.microsoft.com/office/drawing/2014/main" val="20001"/>
+                    </a:ext>
+                  </a:extLst>
+                </a:gridCol>
+                <a:gridCol w="4114800">
+                  <a:extLst>
+                    <a:ext uri="{9D8B030D-6E8A-4147-A177-3AD203B41FA5}">
+                      <a16:colId xmlns:a16="http://schemas.microsoft.com/office/drawing/2014/main" val="20002"/>
+                    </a:ext>
+                  </a:extLst>
+                </a:gridCol>
               </a:tblGrid>
               <a:tr h="402336">
                 <a:tc>
@@ -18279,7 +18631,7 @@
                     <a:bodyPr/>
                     <a:lstStyle/>
                     <a:p>
-                      <a:pPr eaLnBrk="0" indent="0" marL="0">
+                      <a:pPr marL="0" indent="0" eaLnBrk="0">
                         <a:buNone/>
                       </a:pPr>
                       <a:r>
@@ -18347,7 +18699,7 @@
                     <a:bodyPr/>
                     <a:lstStyle/>
                     <a:p>
-                      <a:pPr eaLnBrk="0" indent="0" marL="0">
+                      <a:pPr marL="0" indent="0" eaLnBrk="0">
                         <a:buNone/>
                       </a:pPr>
                       <a:r>
@@ -18415,7 +18767,7 @@
                     <a:bodyPr/>
                     <a:lstStyle/>
                     <a:p>
-                      <a:pPr eaLnBrk="0" indent="0" marL="0">
+                      <a:pPr marL="0" indent="0" eaLnBrk="0">
                         <a:buNone/>
                       </a:pPr>
                       <a:r>
@@ -18478,6 +18830,11 @@
                     </a:solidFill>
                   </a:tcPr>
                 </a:tc>
+                <a:extLst>
+                  <a:ext uri="{0D108BD9-81ED-4DB2-BD59-A6C34878D82A}">
+                    <a16:rowId xmlns:a16="http://schemas.microsoft.com/office/drawing/2014/main" val="10000"/>
+                  </a:ext>
+                </a:extLst>
               </a:tr>
               <a:tr h="402336">
                 <a:tc>
@@ -18485,7 +18842,7 @@
                     <a:bodyPr/>
                     <a:lstStyle/>
                     <a:p>
-                      <a:pPr eaLnBrk="0" indent="0" marL="0">
+                      <a:pPr marL="0" indent="0" eaLnBrk="0">
                         <a:buNone/>
                       </a:pPr>
                       <a:r>
@@ -18553,7 +18910,7 @@
                     <a:bodyPr/>
                     <a:lstStyle/>
                     <a:p>
-                      <a:pPr eaLnBrk="0" indent="0" marL="0">
+                      <a:pPr marL="0" indent="0" eaLnBrk="0">
                         <a:buNone/>
                       </a:pPr>
                       <a:r>
@@ -18621,7 +18978,7 @@
                     <a:bodyPr/>
                     <a:lstStyle/>
                     <a:p>
-                      <a:pPr eaLnBrk="0" indent="0" marL="0">
+                      <a:pPr marL="0" indent="0" eaLnBrk="0">
                         <a:buNone/>
                       </a:pPr>
                       <a:r>
@@ -18684,6 +19041,11 @@
                     </a:solidFill>
                   </a:tcPr>
                 </a:tc>
+                <a:extLst>
+                  <a:ext uri="{0D108BD9-81ED-4DB2-BD59-A6C34878D82A}">
+                    <a16:rowId xmlns:a16="http://schemas.microsoft.com/office/drawing/2014/main" val="10001"/>
+                  </a:ext>
+                </a:extLst>
               </a:tr>
               <a:tr h="402336">
                 <a:tc>
@@ -18691,7 +19053,7 @@
                     <a:bodyPr/>
                     <a:lstStyle/>
                     <a:p>
-                      <a:pPr eaLnBrk="0" indent="0" marL="0">
+                      <a:pPr marL="0" indent="0" eaLnBrk="0">
                         <a:buNone/>
                       </a:pPr>
                       <a:r>
@@ -18759,7 +19121,7 @@
                     <a:bodyPr/>
                     <a:lstStyle/>
                     <a:p>
-                      <a:pPr eaLnBrk="0" indent="0" marL="0">
+                      <a:pPr marL="0" indent="0" eaLnBrk="0">
                         <a:buNone/>
                       </a:pPr>
                       <a:r>
@@ -18827,7 +19189,7 @@
                     <a:bodyPr/>
                     <a:lstStyle/>
                     <a:p>
-                      <a:pPr eaLnBrk="0" indent="0" marL="0">
+                      <a:pPr marL="0" indent="0" eaLnBrk="0">
                         <a:buNone/>
                       </a:pPr>
                       <a:r>
@@ -18890,6 +19252,11 @@
                     </a:solidFill>
                   </a:tcPr>
                 </a:tc>
+                <a:extLst>
+                  <a:ext uri="{0D108BD9-81ED-4DB2-BD59-A6C34878D82A}">
+                    <a16:rowId xmlns:a16="http://schemas.microsoft.com/office/drawing/2014/main" val="10002"/>
+                  </a:ext>
+                </a:extLst>
               </a:tr>
               <a:tr h="402336">
                 <a:tc>
@@ -18897,7 +19264,7 @@
                     <a:bodyPr/>
                     <a:lstStyle/>
                     <a:p>
-                      <a:pPr eaLnBrk="0" indent="0" marL="0">
+                      <a:pPr marL="0" indent="0" eaLnBrk="0">
                         <a:buNone/>
                       </a:pPr>
                       <a:r>
@@ -18965,7 +19332,7 @@
                     <a:bodyPr/>
                     <a:lstStyle/>
                     <a:p>
-                      <a:pPr eaLnBrk="0" indent="0" marL="0">
+                      <a:pPr marL="0" indent="0" eaLnBrk="0">
                         <a:buNone/>
                       </a:pPr>
                       <a:r>
@@ -19033,7 +19400,7 @@
                     <a:bodyPr/>
                     <a:lstStyle/>
                     <a:p>
-                      <a:pPr eaLnBrk="0" indent="0" marL="0">
+                      <a:pPr marL="0" indent="0" eaLnBrk="0">
                         <a:buNone/>
                       </a:pPr>
                       <a:r>
@@ -19096,6 +19463,11 @@
                     </a:solidFill>
                   </a:tcPr>
                 </a:tc>
+                <a:extLst>
+                  <a:ext uri="{0D108BD9-81ED-4DB2-BD59-A6C34878D82A}">
+                    <a16:rowId xmlns:a16="http://schemas.microsoft.com/office/drawing/2014/main" val="10003"/>
+                  </a:ext>
+                </a:extLst>
               </a:tr>
               <a:tr h="402336">
                 <a:tc>
@@ -19103,7 +19475,7 @@
                     <a:bodyPr/>
                     <a:lstStyle/>
                     <a:p>
-                      <a:pPr eaLnBrk="0" indent="0" marL="0">
+                      <a:pPr marL="0" indent="0" eaLnBrk="0">
                         <a:buNone/>
                       </a:pPr>
                       <a:r>
@@ -19171,7 +19543,7 @@
                     <a:bodyPr/>
                     <a:lstStyle/>
                     <a:p>
-                      <a:pPr eaLnBrk="0" indent="0" marL="0">
+                      <a:pPr marL="0" indent="0" eaLnBrk="0">
                         <a:buNone/>
                       </a:pPr>
                       <a:r>
@@ -19239,7 +19611,7 @@
                     <a:bodyPr/>
                     <a:lstStyle/>
                     <a:p>
-                      <a:pPr eaLnBrk="0" indent="0" marL="0">
+                      <a:pPr marL="0" indent="0" eaLnBrk="0">
                         <a:buNone/>
                       </a:pPr>
                       <a:r>
@@ -19302,6 +19674,11 @@
                     </a:solidFill>
                   </a:tcPr>
                 </a:tc>
+                <a:extLst>
+                  <a:ext uri="{0D108BD9-81ED-4DB2-BD59-A6C34878D82A}">
+                    <a16:rowId xmlns:a16="http://schemas.microsoft.com/office/drawing/2014/main" val="10004"/>
+                  </a:ext>
+                </a:extLst>
               </a:tr>
               <a:tr h="402336">
                 <a:tc>
@@ -19309,7 +19686,7 @@
                     <a:bodyPr/>
                     <a:lstStyle/>
                     <a:p>
-                      <a:pPr eaLnBrk="0" indent="0" marL="0">
+                      <a:pPr marL="0" indent="0" eaLnBrk="0">
                         <a:buNone/>
                       </a:pPr>
                       <a:r>
@@ -19377,7 +19754,7 @@
                     <a:bodyPr/>
                     <a:lstStyle/>
                     <a:p>
-                      <a:pPr eaLnBrk="0" indent="0" marL="0">
+                      <a:pPr marL="0" indent="0" eaLnBrk="0">
                         <a:buNone/>
                       </a:pPr>
                       <a:r>
@@ -19445,7 +19822,7 @@
                     <a:bodyPr/>
                     <a:lstStyle/>
                     <a:p>
-                      <a:pPr eaLnBrk="0" indent="0" marL="0">
+                      <a:pPr marL="0" indent="0" eaLnBrk="0">
                         <a:buNone/>
                       </a:pPr>
                       <a:r>
@@ -19508,6 +19885,11 @@
                     </a:solidFill>
                   </a:tcPr>
                 </a:tc>
+                <a:extLst>
+                  <a:ext uri="{0D108BD9-81ED-4DB2-BD59-A6C34878D82A}">
+                    <a16:rowId xmlns:a16="http://schemas.microsoft.com/office/drawing/2014/main" val="10005"/>
+                  </a:ext>
+                </a:extLst>
               </a:tr>
               <a:tr h="402336">
                 <a:tc>
@@ -19515,7 +19897,7 @@
                     <a:bodyPr/>
                     <a:lstStyle/>
                     <a:p>
-                      <a:pPr eaLnBrk="0" indent="0" marL="0">
+                      <a:pPr marL="0" indent="0" eaLnBrk="0">
                         <a:buNone/>
                       </a:pPr>
                       <a:r>
@@ -19583,7 +19965,7 @@
                     <a:bodyPr/>
                     <a:lstStyle/>
                     <a:p>
-                      <a:pPr eaLnBrk="0" indent="0" marL="0">
+                      <a:pPr marL="0" indent="0" eaLnBrk="0">
                         <a:buNone/>
                       </a:pPr>
                       <a:r>
@@ -19651,7 +20033,7 @@
                     <a:bodyPr/>
                     <a:lstStyle/>
                     <a:p>
-                      <a:pPr eaLnBrk="0" indent="0" marL="0">
+                      <a:pPr marL="0" indent="0" eaLnBrk="0">
                         <a:buNone/>
                       </a:pPr>
                       <a:r>
@@ -19714,6 +20096,11 @@
                     </a:solidFill>
                   </a:tcPr>
                 </a:tc>
+                <a:extLst>
+                  <a:ext uri="{0D108BD9-81ED-4DB2-BD59-A6C34878D82A}">
+                    <a16:rowId xmlns:a16="http://schemas.microsoft.com/office/drawing/2014/main" val="10006"/>
+                  </a:ext>
+                </a:extLst>
               </a:tr>
               <a:tr h="402336">
                 <a:tc>
@@ -19721,7 +20108,7 @@
                     <a:bodyPr/>
                     <a:lstStyle/>
                     <a:p>
-                      <a:pPr eaLnBrk="0" indent="0" marL="0">
+                      <a:pPr marL="0" indent="0" eaLnBrk="0">
                         <a:buNone/>
                       </a:pPr>
                       <a:r>
@@ -19789,7 +20176,7 @@
                     <a:bodyPr/>
                     <a:lstStyle/>
                     <a:p>
-                      <a:pPr eaLnBrk="0" indent="0" marL="0">
+                      <a:pPr marL="0" indent="0" eaLnBrk="0">
                         <a:buNone/>
                       </a:pPr>
                       <a:r>
@@ -19857,7 +20244,7 @@
                     <a:bodyPr/>
                     <a:lstStyle/>
                     <a:p>
-                      <a:pPr eaLnBrk="0" indent="0" marL="0">
+                      <a:pPr marL="0" indent="0" eaLnBrk="0">
                         <a:buNone/>
                       </a:pPr>
                       <a:r>
@@ -19920,6 +20307,11 @@
                     </a:solidFill>
                   </a:tcPr>
                 </a:tc>
+                <a:extLst>
+                  <a:ext uri="{0D108BD9-81ED-4DB2-BD59-A6C34878D82A}">
+                    <a16:rowId xmlns:a16="http://schemas.microsoft.com/office/drawing/2014/main" val="10007"/>
+                  </a:ext>
+                </a:extLst>
               </a:tr>
               <a:tr h="402336">
                 <a:tc>
@@ -19927,7 +20319,7 @@
                     <a:bodyPr/>
                     <a:lstStyle/>
                     <a:p>
-                      <a:pPr eaLnBrk="0" indent="0" marL="0">
+                      <a:pPr marL="0" indent="0" eaLnBrk="0">
                         <a:buNone/>
                       </a:pPr>
                       <a:r>
@@ -19995,7 +20387,7 @@
                     <a:bodyPr/>
                     <a:lstStyle/>
                     <a:p>
-                      <a:pPr eaLnBrk="0" indent="0" marL="0">
+                      <a:pPr marL="0" indent="0" eaLnBrk="0">
                         <a:buNone/>
                       </a:pPr>
                       <a:r>
@@ -20063,7 +20455,7 @@
                     <a:bodyPr/>
                     <a:lstStyle/>
                     <a:p>
-                      <a:pPr eaLnBrk="0" indent="0" marL="0">
+                      <a:pPr marL="0" indent="0" eaLnBrk="0">
                         <a:buNone/>
                       </a:pPr>
                       <a:r>
@@ -20126,6 +20518,11 @@
                     </a:solidFill>
                   </a:tcPr>
                 </a:tc>
+                <a:extLst>
+                  <a:ext uri="{0D108BD9-81ED-4DB2-BD59-A6C34878D82A}">
+                    <a16:rowId xmlns:a16="http://schemas.microsoft.com/office/drawing/2014/main" val="10008"/>
+                  </a:ext>
+                </a:extLst>
               </a:tr>
               <a:tr h="402336">
                 <a:tc>
@@ -20133,7 +20530,7 @@
                     <a:bodyPr/>
                     <a:lstStyle/>
                     <a:p>
-                      <a:pPr eaLnBrk="0" indent="0" marL="0">
+                      <a:pPr marL="0" indent="0" eaLnBrk="0">
                         <a:buNone/>
                       </a:pPr>
                       <a:r>
@@ -20201,7 +20598,7 @@
                     <a:bodyPr/>
                     <a:lstStyle/>
                     <a:p>
-                      <a:pPr eaLnBrk="0" indent="0" marL="0">
+                      <a:pPr marL="0" indent="0" eaLnBrk="0">
                         <a:buNone/>
                       </a:pPr>
                       <a:r>
@@ -20269,7 +20666,7 @@
                     <a:bodyPr/>
                     <a:lstStyle/>
                     <a:p>
-                      <a:pPr eaLnBrk="0" indent="0" marL="0">
+                      <a:pPr marL="0" indent="0" eaLnBrk="0">
                         <a:buNone/>
                       </a:pPr>
                       <a:r>
@@ -20332,6 +20729,11 @@
                     </a:solidFill>
                   </a:tcPr>
                 </a:tc>
+                <a:extLst>
+                  <a:ext uri="{0D108BD9-81ED-4DB2-BD59-A6C34878D82A}">
+                    <a16:rowId xmlns:a16="http://schemas.microsoft.com/office/drawing/2014/main" val="10009"/>
+                  </a:ext>
+                </a:extLst>
               </a:tr>
               <a:tr h="402336">
                 <a:tc>
@@ -20339,7 +20741,7 @@
                     <a:bodyPr/>
                     <a:lstStyle/>
                     <a:p>
-                      <a:pPr eaLnBrk="0" indent="0" marL="0">
+                      <a:pPr marL="0" indent="0" eaLnBrk="0">
                         <a:buNone/>
                       </a:pPr>
                       <a:r>
@@ -20407,7 +20809,7 @@
                     <a:bodyPr/>
                     <a:lstStyle/>
                     <a:p>
-                      <a:pPr eaLnBrk="0" indent="0" marL="0">
+                      <a:pPr marL="0" indent="0" eaLnBrk="0">
                         <a:buNone/>
                       </a:pPr>
                       <a:r>
@@ -20475,7 +20877,7 @@
                     <a:bodyPr/>
                     <a:lstStyle/>
                     <a:p>
-                      <a:pPr eaLnBrk="0" indent="0" marL="0">
+                      <a:pPr marL="0" indent="0" eaLnBrk="0">
                         <a:buNone/>
                       </a:pPr>
                       <a:r>
@@ -20538,6 +20940,11 @@
                     </a:solidFill>
                   </a:tcPr>
                 </a:tc>
+                <a:extLst>
+                  <a:ext uri="{0D108BD9-81ED-4DB2-BD59-A6C34878D82A}">
+                    <a16:rowId xmlns:a16="http://schemas.microsoft.com/office/drawing/2014/main" val="10010"/>
+                  </a:ext>
+                </a:extLst>
               </a:tr>
             </a:tbl>
           </a:graphicData>
@@ -20569,6 +20976,13 @@
             <a:prstDash val="solid"/>
           </a:ln>
         </p:spPr>
+        <p:txBody>
+          <a:bodyPr/>
+          <a:lstStyle/>
+          <a:p>
+            <a:endParaRPr lang="ko-KR" altLang="en-US"/>
+          </a:p>
+        </p:txBody>
       </p:sp>
       <p:sp>
         <p:nvSpPr>
@@ -20591,7 +21005,7 @@
           <a:bodyPr wrap="square" lIns="0" tIns="0" rIns="0" bIns="0" rtlCol="0" anchor="ctr"/>
           <a:lstStyle/>
           <a:p>
-            <a:pPr eaLnBrk="0" indent="0" marL="0">
+            <a:pPr marL="0" indent="0" eaLnBrk="0">
               <a:buNone/>
             </a:pPr>
             <a:r>
@@ -20630,7 +21044,7 @@
           <a:bodyPr wrap="square" lIns="0" tIns="0" rIns="0" bIns="0" rtlCol="0" anchor="t"/>
           <a:lstStyle/>
           <a:p>
-            <a:pPr eaLnBrk="0" indent="0" marL="0">
+            <a:pPr marL="0" indent="0" eaLnBrk="0">
               <a:buNone/>
             </a:pPr>
             <a:r>
@@ -20647,7 +21061,7 @@
             <a:endParaRPr lang="en-US" sz="1200" dirty="0"/>
           </a:p>
           <a:p>
-            <a:pPr eaLnBrk="0" indent="0" marL="0">
+            <a:pPr marL="0" indent="0" eaLnBrk="0">
               <a:buNone/>
             </a:pPr>
             <a:r>
@@ -20691,6 +21105,13 @@
             <a:prstDash val="solid"/>
           </a:ln>
         </p:spPr>
+        <p:txBody>
+          <a:bodyPr/>
+          <a:lstStyle/>
+          <a:p>
+            <a:endParaRPr lang="ko-KR" altLang="en-US"/>
+          </a:p>
+        </p:txBody>
       </p:sp>
       <p:sp>
         <p:nvSpPr>
@@ -20713,7 +21134,7 @@
           <a:bodyPr wrap="square" lIns="0" tIns="0" rIns="0" bIns="0" rtlCol="0" anchor="ctr"/>
           <a:lstStyle/>
           <a:p>
-            <a:pPr eaLnBrk="0" indent="0" marL="0">
+            <a:pPr marL="0" indent="0" eaLnBrk="0">
               <a:buNone/>
             </a:pPr>
             <a:r>
@@ -20752,7 +21173,7 @@
           <a:bodyPr wrap="square" lIns="0" tIns="0" rIns="0" bIns="0" rtlCol="0" anchor="t"/>
           <a:lstStyle/>
           <a:p>
-            <a:pPr eaLnBrk="0" indent="0" marL="0">
+            <a:pPr marL="0" indent="0" eaLnBrk="0">
               <a:buNone/>
             </a:pPr>
             <a:r>
@@ -20769,7 +21190,7 @@
             <a:endParaRPr lang="en-US" sz="1200" dirty="0"/>
           </a:p>
           <a:p>
-            <a:pPr eaLnBrk="0" indent="0" marL="0">
+            <a:pPr marL="0" indent="0" eaLnBrk="0">
               <a:buNone/>
             </a:pPr>
             <a:r>
@@ -20813,6 +21234,13 @@
             <a:prstDash val="solid"/>
           </a:ln>
         </p:spPr>
+        <p:txBody>
+          <a:bodyPr/>
+          <a:lstStyle/>
+          <a:p>
+            <a:endParaRPr lang="ko-KR" altLang="en-US"/>
+          </a:p>
+        </p:txBody>
       </p:sp>
       <p:sp>
         <p:nvSpPr>
@@ -20835,7 +21263,7 @@
           <a:bodyPr wrap="square" lIns="0" tIns="0" rIns="0" bIns="0" rtlCol="0" anchor="t"/>
           <a:lstStyle/>
           <a:p>
-            <a:pPr eaLnBrk="0" indent="0" marL="0">
+            <a:pPr marL="0" indent="0" eaLnBrk="0">
               <a:buNone/>
             </a:pPr>
             <a:r>
@@ -20874,7 +21302,7 @@
           <a:bodyPr wrap="square" lIns="0" tIns="0" rIns="0" bIns="0" rtlCol="0" anchor="t"/>
           <a:lstStyle/>
           <a:p>
-            <a:pPr eaLnBrk="0" indent="0" marL="0">
+            <a:pPr marL="0" indent="0" eaLnBrk="0">
               <a:buNone/>
             </a:pPr>
             <a:r>
@@ -20913,7 +21341,7 @@
           <a:bodyPr wrap="square" lIns="0" tIns="0" rIns="0" bIns="0" rtlCol="0" anchor="t"/>
           <a:lstStyle/>
           <a:p>
-            <a:pPr eaLnBrk="0" indent="0" marL="0">
+            <a:pPr marL="0" indent="0" eaLnBrk="0">
               <a:buNone/>
             </a:pPr>
             <a:r>
@@ -20951,7 +21379,7 @@
           </a:prstGeom>
           <a:extLst>
             <a:ext uri="{C572A759-6A51-4108-AA02-DFA0A04FC94B}">
-              <ma14:wrappingTextBoxFlag xmlns:ma14="http://schemas.microsoft.com/office/mac/drawingml/2011/main" val="0"/>
+              <ma14:wrappingTextBoxFlag xmlns:ma14="http://schemas.microsoft.com/office/mac/drawingml/2011/main" xmlns="" val="0"/>
             </a:ext>
           </a:extLst>
         </p:spPr>
@@ -20970,9 +21398,9 @@
             </a:lvl1pPr>
           </a:lstStyle>
           <a:p>
-            <a:pPr eaLnBrk="0" algn="r"/>
+            <a:pPr algn="r" eaLnBrk="0"/>
             <a:fld id="{F7021451-1387-4CA6-816F-3879F97B5CBC}" type="slidenum">
-              <a:rPr b="0" lang="en-US"/>
+              <a:rPr lang="en-US" b="0"/>
               <a:t>19</a:t>
             </a:fld>
             <a:endParaRPr lang="en-US"/>
@@ -21025,7 +21453,7 @@
           <a:bodyPr wrap="square" lIns="0" tIns="0" rIns="0" bIns="0" rtlCol="0" anchor="t"/>
           <a:lstStyle/>
           <a:p>
-            <a:pPr eaLnBrk="0" indent="0" marL="0">
+            <a:pPr marL="0" indent="0" eaLnBrk="0">
               <a:buNone/>
             </a:pPr>
             <a:r>
@@ -21064,7 +21492,7 @@
           <a:bodyPr wrap="square" lIns="0" tIns="0" rIns="0" bIns="0" rtlCol="0" anchor="t"/>
           <a:lstStyle/>
           <a:p>
-            <a:pPr eaLnBrk="0" indent="0" marL="0">
+            <a:pPr marL="0" indent="0" eaLnBrk="0">
               <a:buNone/>
             </a:pPr>
             <a:r>
@@ -21108,6 +21536,13 @@
             <a:prstDash val="solid"/>
           </a:ln>
         </p:spPr>
+        <p:txBody>
+          <a:bodyPr/>
+          <a:lstStyle/>
+          <a:p>
+            <a:endParaRPr lang="ko-KR" altLang="en-US"/>
+          </a:p>
+        </p:txBody>
       </p:sp>
       <p:sp>
         <p:nvSpPr>
@@ -21130,7 +21565,7 @@
           <a:bodyPr wrap="square" lIns="0" tIns="0" rIns="0" bIns="0" rtlCol="0" anchor="ctr"/>
           <a:lstStyle/>
           <a:p>
-            <a:pPr eaLnBrk="0" indent="0" marL="0">
+            <a:pPr marL="0" indent="0" eaLnBrk="0">
               <a:buNone/>
             </a:pPr>
             <a:r>
@@ -21169,7 +21604,7 @@
           <a:bodyPr wrap="square" lIns="0" tIns="0" rIns="0" bIns="0" rtlCol="0" anchor="t"/>
           <a:lstStyle/>
           <a:p>
-            <a:pPr eaLnBrk="0" indent="0" marL="0">
+            <a:pPr marL="0" indent="0" eaLnBrk="0">
               <a:buNone/>
             </a:pPr>
             <a:r>
@@ -21208,7 +21643,7 @@
           <a:bodyPr wrap="square" lIns="0" tIns="0" rIns="0" bIns="0" rtlCol="0" anchor="t"/>
           <a:lstStyle/>
           <a:p>
-            <a:pPr eaLnBrk="0" indent="0" marL="0">
+            <a:pPr marL="0" indent="0" eaLnBrk="0">
               <a:buNone/>
             </a:pPr>
             <a:r>
@@ -21252,6 +21687,13 @@
             <a:prstDash val="solid"/>
           </a:ln>
         </p:spPr>
+        <p:txBody>
+          <a:bodyPr/>
+          <a:lstStyle/>
+          <a:p>
+            <a:endParaRPr lang="ko-KR" altLang="en-US"/>
+          </a:p>
+        </p:txBody>
       </p:sp>
       <p:sp>
         <p:nvSpPr>
@@ -21274,7 +21716,7 @@
           <a:bodyPr wrap="square" lIns="0" tIns="0" rIns="0" bIns="0" rtlCol="0" anchor="ctr"/>
           <a:lstStyle/>
           <a:p>
-            <a:pPr eaLnBrk="0" indent="0" marL="0">
+            <a:pPr marL="0" indent="0" eaLnBrk="0">
               <a:buNone/>
             </a:pPr>
             <a:r>
@@ -21313,7 +21755,7 @@
           <a:bodyPr wrap="square" lIns="0" tIns="0" rIns="0" bIns="0" rtlCol="0" anchor="t"/>
           <a:lstStyle/>
           <a:p>
-            <a:pPr eaLnBrk="0" indent="0" marL="0">
+            <a:pPr marL="0" indent="0" eaLnBrk="0">
               <a:buNone/>
             </a:pPr>
             <a:r>
@@ -21352,7 +21794,7 @@
           <a:bodyPr wrap="square" lIns="0" tIns="0" rIns="0" bIns="0" rtlCol="0" anchor="t"/>
           <a:lstStyle/>
           <a:p>
-            <a:pPr eaLnBrk="0" indent="0" marL="0">
+            <a:pPr marL="0" indent="0" eaLnBrk="0">
               <a:buNone/>
             </a:pPr>
             <a:r>
@@ -21396,6 +21838,13 @@
             <a:prstDash val="solid"/>
           </a:ln>
         </p:spPr>
+        <p:txBody>
+          <a:bodyPr/>
+          <a:lstStyle/>
+          <a:p>
+            <a:endParaRPr lang="ko-KR" altLang="en-US"/>
+          </a:p>
+        </p:txBody>
       </p:sp>
       <p:sp>
         <p:nvSpPr>
@@ -21418,7 +21867,7 @@
           <a:bodyPr wrap="square" lIns="0" tIns="0" rIns="0" bIns="0" rtlCol="0" anchor="ctr"/>
           <a:lstStyle/>
           <a:p>
-            <a:pPr eaLnBrk="0" indent="0" marL="0">
+            <a:pPr marL="0" indent="0" eaLnBrk="0">
               <a:buNone/>
             </a:pPr>
             <a:r>
@@ -21457,7 +21906,7 @@
           <a:bodyPr wrap="square" lIns="0" tIns="0" rIns="0" bIns="0" rtlCol="0" anchor="t"/>
           <a:lstStyle/>
           <a:p>
-            <a:pPr eaLnBrk="0" indent="0" marL="0">
+            <a:pPr marL="0" indent="0" eaLnBrk="0">
               <a:buNone/>
             </a:pPr>
             <a:r>
@@ -21496,7 +21945,7 @@
           <a:bodyPr wrap="square" lIns="0" tIns="0" rIns="0" bIns="0" rtlCol="0" anchor="t"/>
           <a:lstStyle/>
           <a:p>
-            <a:pPr eaLnBrk="0" indent="0" marL="0">
+            <a:pPr marL="0" indent="0" eaLnBrk="0">
               <a:buNone/>
             </a:pPr>
             <a:r>
@@ -21540,6 +21989,13 @@
             <a:prstDash val="solid"/>
           </a:ln>
         </p:spPr>
+        <p:txBody>
+          <a:bodyPr/>
+          <a:lstStyle/>
+          <a:p>
+            <a:endParaRPr lang="ko-KR" altLang="en-US"/>
+          </a:p>
+        </p:txBody>
       </p:sp>
       <p:sp>
         <p:nvSpPr>
@@ -21562,7 +22018,7 @@
           <a:bodyPr wrap="square" lIns="0" tIns="0" rIns="0" bIns="0" rtlCol="0" anchor="ctr"/>
           <a:lstStyle/>
           <a:p>
-            <a:pPr eaLnBrk="0" indent="0" marL="0">
+            <a:pPr marL="0" indent="0" eaLnBrk="0">
               <a:buNone/>
             </a:pPr>
             <a:r>
@@ -21601,7 +22057,7 @@
           <a:bodyPr wrap="square" lIns="0" tIns="0" rIns="0" bIns="0" rtlCol="0" anchor="t"/>
           <a:lstStyle/>
           <a:p>
-            <a:pPr eaLnBrk="0" indent="0" marL="0">
+            <a:pPr marL="0" indent="0" eaLnBrk="0">
               <a:buNone/>
             </a:pPr>
             <a:r>
@@ -21640,7 +22096,7 @@
           <a:bodyPr wrap="square" lIns="0" tIns="0" rIns="0" bIns="0" rtlCol="0" anchor="t"/>
           <a:lstStyle/>
           <a:p>
-            <a:pPr eaLnBrk="0" indent="0" marL="0">
+            <a:pPr marL="0" indent="0" eaLnBrk="0">
               <a:buNone/>
             </a:pPr>
             <a:r>
@@ -21684,6 +22140,13 @@
             <a:prstDash val="solid"/>
           </a:ln>
         </p:spPr>
+        <p:txBody>
+          <a:bodyPr/>
+          <a:lstStyle/>
+          <a:p>
+            <a:endParaRPr lang="ko-KR" altLang="en-US"/>
+          </a:p>
+        </p:txBody>
       </p:sp>
       <p:sp>
         <p:nvSpPr>
@@ -21706,7 +22169,7 @@
           <a:bodyPr wrap="square" lIns="0" tIns="0" rIns="0" bIns="0" rtlCol="0" anchor="ctr"/>
           <a:lstStyle/>
           <a:p>
-            <a:pPr eaLnBrk="0" indent="0" marL="0">
+            <a:pPr marL="0" indent="0" eaLnBrk="0">
               <a:buNone/>
             </a:pPr>
             <a:r>
@@ -21745,7 +22208,7 @@
           <a:bodyPr wrap="square" lIns="0" tIns="0" rIns="0" bIns="0" rtlCol="0" anchor="t"/>
           <a:lstStyle/>
           <a:p>
-            <a:pPr eaLnBrk="0" indent="0" marL="0">
+            <a:pPr marL="0" indent="0" eaLnBrk="0">
               <a:buNone/>
             </a:pPr>
             <a:r>
@@ -21784,7 +22247,7 @@
           <a:bodyPr wrap="square" lIns="0" tIns="0" rIns="0" bIns="0" rtlCol="0" anchor="t"/>
           <a:lstStyle/>
           <a:p>
-            <a:pPr eaLnBrk="0" indent="0" marL="0">
+            <a:pPr marL="0" indent="0" eaLnBrk="0">
               <a:buNone/>
             </a:pPr>
             <a:r>
@@ -21828,6 +22291,13 @@
             <a:prstDash val="solid"/>
           </a:ln>
         </p:spPr>
+        <p:txBody>
+          <a:bodyPr/>
+          <a:lstStyle/>
+          <a:p>
+            <a:endParaRPr lang="ko-KR" altLang="en-US"/>
+          </a:p>
+        </p:txBody>
       </p:sp>
       <p:sp>
         <p:nvSpPr>
@@ -21850,7 +22320,7 @@
           <a:bodyPr wrap="square" lIns="0" tIns="0" rIns="0" bIns="0" rtlCol="0" anchor="ctr"/>
           <a:lstStyle/>
           <a:p>
-            <a:pPr eaLnBrk="0" indent="0" marL="0">
+            <a:pPr marL="0" indent="0" eaLnBrk="0">
               <a:buNone/>
             </a:pPr>
             <a:r>
@@ -21889,7 +22359,7 @@
           <a:bodyPr wrap="square" lIns="0" tIns="0" rIns="0" bIns="0" rtlCol="0" anchor="t"/>
           <a:lstStyle/>
           <a:p>
-            <a:pPr eaLnBrk="0" indent="0" marL="0">
+            <a:pPr marL="0" indent="0" eaLnBrk="0">
               <a:buNone/>
             </a:pPr>
             <a:r>
@@ -21928,7 +22398,7 @@
           <a:bodyPr wrap="square" lIns="0" tIns="0" rIns="0" bIns="0" rtlCol="0" anchor="t"/>
           <a:lstStyle/>
           <a:p>
-            <a:pPr eaLnBrk="0" indent="0" marL="0">
+            <a:pPr marL="0" indent="0" eaLnBrk="0">
               <a:buNone/>
             </a:pPr>
             <a:r>
@@ -21967,7 +22437,7 @@
           <a:bodyPr wrap="square" lIns="0" tIns="0" rIns="0" bIns="0" rtlCol="0" anchor="t"/>
           <a:lstStyle/>
           <a:p>
-            <a:pPr eaLnBrk="0" indent="0" marL="0">
+            <a:pPr marL="0" indent="0" eaLnBrk="0">
               <a:buNone/>
             </a:pPr>
             <a:r>
@@ -22006,7 +22476,7 @@
           <a:bodyPr wrap="square" lIns="0" tIns="0" rIns="0" bIns="0" rtlCol="0" anchor="t"/>
           <a:lstStyle/>
           <a:p>
-            <a:pPr eaLnBrk="0" indent="0" marL="0">
+            <a:pPr marL="0" indent="0" eaLnBrk="0">
               <a:buNone/>
             </a:pPr>
             <a:r>
@@ -22072,7 +22542,7 @@
           </a:bodyPr>
           <a:lstStyle/>
           <a:p>
-            <a:pPr eaLnBrk="0" indent="0" marL="0">
+            <a:pPr marL="0" indent="0" eaLnBrk="0">
               <a:buNone/>
             </a:pPr>
             <a:r>
@@ -22116,6 +22586,13 @@
             <a:prstDash val="solid"/>
           </a:ln>
         </p:spPr>
+        <p:txBody>
+          <a:bodyPr/>
+          <a:lstStyle/>
+          <a:p>
+            <a:endParaRPr lang="ko-KR" altLang="en-US"/>
+          </a:p>
+        </p:txBody>
       </p:sp>
       <p:sp>
         <p:nvSpPr>
@@ -22138,7 +22615,7 @@
           <a:bodyPr wrap="square" lIns="0" tIns="0" rIns="0" bIns="0" rtlCol="0" anchor="t"/>
           <a:lstStyle/>
           <a:p>
-            <a:pPr eaLnBrk="0" indent="0" marL="0">
+            <a:pPr marL="0" indent="0" eaLnBrk="0">
               <a:buNone/>
             </a:pPr>
             <a:r>
@@ -22177,7 +22654,7 @@
           <a:bodyPr wrap="square" lIns="0" tIns="0" rIns="0" bIns="0" rtlCol="0" anchor="t"/>
           <a:lstStyle/>
           <a:p>
-            <a:pPr eaLnBrk="0" indent="0" marL="0">
+            <a:pPr marL="0" indent="0" eaLnBrk="0">
               <a:buNone/>
             </a:pPr>
             <a:r>
@@ -22194,7 +22671,7 @@
             <a:endParaRPr lang="en-US" sz="1400" dirty="0"/>
           </a:p>
           <a:p>
-            <a:pPr eaLnBrk="0" indent="0" marL="0">
+            <a:pPr marL="0" indent="0" eaLnBrk="0">
               <a:buNone/>
             </a:pPr>
             <a:r>
@@ -22211,7 +22688,7 @@
             <a:endParaRPr lang="en-US" sz="1400" dirty="0"/>
           </a:p>
           <a:p>
-            <a:pPr eaLnBrk="0" indent="0" marL="0">
+            <a:pPr marL="0" indent="0" eaLnBrk="0">
               <a:buNone/>
             </a:pPr>
             <a:r>
@@ -22228,7 +22705,7 @@
             <a:endParaRPr lang="en-US" sz="1400" dirty="0"/>
           </a:p>
           <a:p>
-            <a:pPr eaLnBrk="0" indent="0" marL="0">
+            <a:pPr marL="0" indent="0" eaLnBrk="0">
               <a:buNone/>
             </a:pPr>
             <a:r>
@@ -22272,6 +22749,13 @@
             <a:prstDash val="solid"/>
           </a:ln>
         </p:spPr>
+        <p:txBody>
+          <a:bodyPr/>
+          <a:lstStyle/>
+          <a:p>
+            <a:endParaRPr lang="ko-KR" altLang="en-US"/>
+          </a:p>
+        </p:txBody>
       </p:sp>
       <p:sp>
         <p:nvSpPr>
@@ -22294,7 +22778,7 @@
           <a:bodyPr wrap="square" lIns="0" tIns="0" rIns="0" bIns="0" rtlCol="0" anchor="t"/>
           <a:lstStyle/>
           <a:p>
-            <a:pPr eaLnBrk="0" indent="0" marL="0">
+            <a:pPr marL="0" indent="0" eaLnBrk="0">
               <a:buNone/>
             </a:pPr>
             <a:r>
@@ -22333,7 +22817,7 @@
           <a:bodyPr wrap="square" lIns="0" tIns="0" rIns="0" bIns="0" rtlCol="0" anchor="t"/>
           <a:lstStyle/>
           <a:p>
-            <a:pPr eaLnBrk="0" indent="0" marL="0">
+            <a:pPr marL="0" indent="0" eaLnBrk="0">
               <a:buNone/>
             </a:pPr>
             <a:r>
@@ -22350,7 +22834,7 @@
             <a:endParaRPr lang="en-US" sz="1400" dirty="0"/>
           </a:p>
           <a:p>
-            <a:pPr eaLnBrk="0" indent="0" marL="0">
+            <a:pPr marL="0" indent="0" eaLnBrk="0">
               <a:buNone/>
             </a:pPr>
             <a:r>
@@ -22367,7 +22851,7 @@
             <a:endParaRPr lang="en-US" sz="1400" dirty="0"/>
           </a:p>
           <a:p>
-            <a:pPr eaLnBrk="0" indent="0" marL="0">
+            <a:pPr marL="0" indent="0" eaLnBrk="0">
               <a:buNone/>
             </a:pPr>
             <a:r>
@@ -22384,7 +22868,7 @@
             <a:endParaRPr lang="en-US" sz="1400" dirty="0"/>
           </a:p>
           <a:p>
-            <a:pPr eaLnBrk="0" indent="0" marL="0">
+            <a:pPr marL="0" indent="0" eaLnBrk="0">
               <a:buNone/>
             </a:pPr>
             <a:r>
@@ -22428,6 +22912,13 @@
             <a:prstDash val="solid"/>
           </a:ln>
         </p:spPr>
+        <p:txBody>
+          <a:bodyPr/>
+          <a:lstStyle/>
+          <a:p>
+            <a:endParaRPr lang="ko-KR" altLang="en-US"/>
+          </a:p>
+        </p:txBody>
       </p:sp>
       <p:sp>
         <p:nvSpPr>
@@ -22450,7 +22941,7 @@
           <a:bodyPr wrap="square" lIns="0" tIns="0" rIns="0" bIns="0" rtlCol="0" anchor="t"/>
           <a:lstStyle/>
           <a:p>
-            <a:pPr eaLnBrk="0" indent="0" marL="0">
+            <a:pPr marL="0" indent="0" eaLnBrk="0">
               <a:buNone/>
             </a:pPr>
             <a:r>
@@ -22489,7 +22980,7 @@
           <a:bodyPr wrap="square" lIns="0" tIns="0" rIns="0" bIns="0" rtlCol="0" anchor="t"/>
           <a:lstStyle/>
           <a:p>
-            <a:pPr eaLnBrk="0" indent="0" marL="0">
+            <a:pPr marL="0" indent="0" eaLnBrk="0">
               <a:buNone/>
             </a:pPr>
             <a:r>
@@ -22506,7 +22997,7 @@
             <a:endParaRPr lang="en-US" sz="1400" dirty="0"/>
           </a:p>
           <a:p>
-            <a:pPr eaLnBrk="0" indent="0" marL="0">
+            <a:pPr marL="0" indent="0" eaLnBrk="0">
               <a:buNone/>
             </a:pPr>
             <a:r>
@@ -22523,7 +23014,7 @@
             <a:endParaRPr lang="en-US" sz="1400" dirty="0"/>
           </a:p>
           <a:p>
-            <a:pPr eaLnBrk="0" indent="0" marL="0">
+            <a:pPr marL="0" indent="0" eaLnBrk="0">
               <a:buNone/>
             </a:pPr>
             <a:r>
@@ -22561,7 +23052,7 @@
           </a:prstGeom>
           <a:extLst>
             <a:ext uri="{C572A759-6A51-4108-AA02-DFA0A04FC94B}">
-              <ma14:wrappingTextBoxFlag xmlns:ma14="http://schemas.microsoft.com/office/mac/drawingml/2011/main" val="0"/>
+              <ma14:wrappingTextBoxFlag xmlns:ma14="http://schemas.microsoft.com/office/mac/drawingml/2011/main" xmlns="" val="0"/>
             </a:ext>
           </a:extLst>
         </p:spPr>
@@ -22580,9 +23071,9 @@
             </a:lvl1pPr>
           </a:lstStyle>
           <a:p>
-            <a:pPr eaLnBrk="0" algn="r"/>
+            <a:pPr algn="r" eaLnBrk="0"/>
             <a:fld id="{F7021451-1387-4CA6-816F-3879F97B5CBC}" type="slidenum">
-              <a:rPr b="0" lang="en-US"/>
+              <a:rPr lang="en-US" b="0"/>
               <a:t>20</a:t>
             </a:fld>
             <a:endParaRPr lang="en-US"/>
@@ -22637,7 +23128,7 @@
           </a:bodyPr>
           <a:lstStyle/>
           <a:p>
-            <a:pPr eaLnBrk="0" indent="0" marL="0">
+            <a:pPr marL="0" indent="0" eaLnBrk="0">
               <a:buNone/>
             </a:pPr>
             <a:r>
@@ -22681,6 +23172,13 @@
             <a:prstDash val="solid"/>
           </a:ln>
         </p:spPr>
+        <p:txBody>
+          <a:bodyPr/>
+          <a:lstStyle/>
+          <a:p>
+            <a:endParaRPr lang="ko-KR" altLang="en-US"/>
+          </a:p>
+        </p:txBody>
       </p:sp>
       <p:sp>
         <p:nvSpPr>
@@ -22703,7 +23201,7 @@
           <a:bodyPr wrap="square" lIns="0" tIns="0" rIns="0" bIns="0" rtlCol="0" anchor="t"/>
           <a:lstStyle/>
           <a:p>
-            <a:pPr eaLnBrk="0" indent="0" marL="0">
+            <a:pPr marL="0" indent="0" eaLnBrk="0">
               <a:buNone/>
             </a:pPr>
             <a:r>
@@ -22742,7 +23240,7 @@
           <a:bodyPr wrap="square" lIns="0" tIns="0" rIns="0" bIns="0" rtlCol="0" anchor="t"/>
           <a:lstStyle/>
           <a:p>
-            <a:pPr eaLnBrk="0" indent="0" marL="0">
+            <a:pPr marL="0" indent="0" eaLnBrk="0">
               <a:buNone/>
             </a:pPr>
             <a:r>
@@ -22759,7 +23257,7 @@
             <a:endParaRPr lang="en-US" sz="1500" dirty="0"/>
           </a:p>
           <a:p>
-            <a:pPr eaLnBrk="0" indent="0" marL="0">
+            <a:pPr marL="0" indent="0" eaLnBrk="0">
               <a:buNone/>
             </a:pPr>
             <a:r>
@@ -22776,7 +23274,7 @@
             <a:endParaRPr lang="en-US" sz="1500" dirty="0"/>
           </a:p>
           <a:p>
-            <a:pPr eaLnBrk="0" indent="0" marL="0">
+            <a:pPr marL="0" indent="0" eaLnBrk="0">
               <a:buNone/>
             </a:pPr>
             <a:r>
@@ -22820,6 +23318,13 @@
             <a:prstDash val="solid"/>
           </a:ln>
         </p:spPr>
+        <p:txBody>
+          <a:bodyPr/>
+          <a:lstStyle/>
+          <a:p>
+            <a:endParaRPr lang="ko-KR" altLang="en-US"/>
+          </a:p>
+        </p:txBody>
       </p:sp>
       <p:sp>
         <p:nvSpPr>
@@ -22842,7 +23347,7 @@
           <a:bodyPr wrap="square" lIns="0" tIns="0" rIns="0" bIns="0" rtlCol="0" anchor="t"/>
           <a:lstStyle/>
           <a:p>
-            <a:pPr eaLnBrk="0" indent="0" marL="0">
+            <a:pPr marL="0" indent="0" eaLnBrk="0">
               <a:buNone/>
             </a:pPr>
             <a:r>
@@ -22881,7 +23386,7 @@
           <a:bodyPr wrap="square" lIns="0" tIns="0" rIns="0" bIns="0" rtlCol="0" anchor="t"/>
           <a:lstStyle/>
           <a:p>
-            <a:pPr eaLnBrk="0" indent="0" marL="0">
+            <a:pPr marL="0" indent="0" eaLnBrk="0">
               <a:buNone/>
             </a:pPr>
             <a:r>
@@ -22898,7 +23403,7 @@
             <a:endParaRPr lang="en-US" sz="1500" dirty="0"/>
           </a:p>
           <a:p>
-            <a:pPr eaLnBrk="0" indent="0" marL="0">
+            <a:pPr marL="0" indent="0" eaLnBrk="0">
               <a:buNone/>
             </a:pPr>
             <a:r>
@@ -22915,7 +23420,7 @@
             <a:endParaRPr lang="en-US" sz="1500" dirty="0"/>
           </a:p>
           <a:p>
-            <a:pPr eaLnBrk="0" indent="0" marL="0">
+            <a:pPr marL="0" indent="0" eaLnBrk="0">
               <a:buNone/>
             </a:pPr>
             <a:r>
@@ -22959,6 +23464,13 @@
             <a:prstDash val="solid"/>
           </a:ln>
         </p:spPr>
+        <p:txBody>
+          <a:bodyPr/>
+          <a:lstStyle/>
+          <a:p>
+            <a:endParaRPr lang="ko-KR" altLang="en-US"/>
+          </a:p>
+        </p:txBody>
       </p:sp>
       <p:sp>
         <p:nvSpPr>
@@ -22981,7 +23493,7 @@
           <a:bodyPr wrap="square" lIns="0" tIns="0" rIns="0" bIns="0" rtlCol="0" anchor="t"/>
           <a:lstStyle/>
           <a:p>
-            <a:pPr eaLnBrk="0" indent="0" marL="0">
+            <a:pPr marL="0" indent="0" eaLnBrk="0">
               <a:buNone/>
             </a:pPr>
             <a:r>
@@ -23020,7 +23532,7 @@
           <a:bodyPr wrap="square" lIns="0" tIns="0" rIns="0" bIns="0" rtlCol="0" anchor="t"/>
           <a:lstStyle/>
           <a:p>
-            <a:pPr eaLnBrk="0" indent="0" marL="0">
+            <a:pPr marL="0" indent="0" eaLnBrk="0">
               <a:buNone/>
             </a:pPr>
             <a:r>
@@ -23037,7 +23549,7 @@
             <a:endParaRPr lang="en-US" sz="1500" dirty="0"/>
           </a:p>
           <a:p>
-            <a:pPr eaLnBrk="0" indent="0" marL="0">
+            <a:pPr marL="0" indent="0" eaLnBrk="0">
               <a:buNone/>
             </a:pPr>
             <a:r>
@@ -23054,7 +23566,7 @@
             <a:endParaRPr lang="en-US" sz="1500" dirty="0"/>
           </a:p>
           <a:p>
-            <a:pPr eaLnBrk="0" indent="0" marL="0">
+            <a:pPr marL="0" indent="0" eaLnBrk="0">
               <a:buNone/>
             </a:pPr>
             <a:r>
@@ -23074,14 +23586,14 @@
       </p:sp>
       <p:pic>
         <p:nvPicPr>
-          <p:cNvPr id="13" name="Image 0" descr="C:\SNU\포트폴리오\전국AI반도체경진대회\results_delta\worldmap_uncorrected_vs_omega_only.png">    </p:cNvPr>
+          <p:cNvPr id="13" name="Image 0" descr="C:\SNU\포트폴리오\전국AI반도체경진대회\results_delta\worldmap_uncorrected_vs_omega_only.png"/>
           <p:cNvPicPr>
             <a:picLocks noChangeAspect="1"/>
           </p:cNvPicPr>
           <p:nvPr/>
         </p:nvPicPr>
         <p:blipFill>
-          <a:blip r:embed="rId1"/>
+          <a:blip r:embed="rId3"/>
           <a:stretch>
             <a:fillRect/>
           </a:stretch>
@@ -23117,7 +23629,7 @@
           <a:bodyPr wrap="square" lIns="0" tIns="0" rIns="0" bIns="0" rtlCol="0" anchor="t"/>
           <a:lstStyle/>
           <a:p>
-            <a:pPr eaLnBrk="0" indent="0" marL="0">
+            <a:pPr marL="0" indent="0" eaLnBrk="0">
               <a:buNone/>
             </a:pPr>
             <a:r>
@@ -23161,6 +23673,13 @@
             <a:prstDash val="solid"/>
           </a:ln>
         </p:spPr>
+        <p:txBody>
+          <a:bodyPr/>
+          <a:lstStyle/>
+          <a:p>
+            <a:endParaRPr lang="ko-KR" altLang="en-US"/>
+          </a:p>
+        </p:txBody>
       </p:sp>
       <p:sp>
         <p:nvSpPr>
@@ -23183,7 +23702,7 @@
           <a:bodyPr wrap="square" lIns="0" tIns="0" rIns="0" bIns="0" rtlCol="0" anchor="t"/>
           <a:lstStyle/>
           <a:p>
-            <a:pPr eaLnBrk="0" indent="0" marL="0">
+            <a:pPr marL="0" indent="0" eaLnBrk="0">
               <a:buNone/>
             </a:pPr>
             <a:r>
@@ -23222,7 +23741,7 @@
           <a:bodyPr wrap="square" lIns="0" tIns="0" rIns="0" bIns="0" rtlCol="0" anchor="t"/>
           <a:lstStyle/>
           <a:p>
-            <a:pPr eaLnBrk="0" marL="342900" indent="-342900">
+            <a:pPr marL="342900" indent="-342900" eaLnBrk="0">
               <a:spcAft>
                 <a:spcPts val="400"/>
               </a:spcAft>
@@ -23243,7 +23762,7 @@
             <a:endParaRPr lang="en-US" sz="1500" dirty="0"/>
           </a:p>
           <a:p>
-            <a:pPr eaLnBrk="0" marL="342900" indent="-342900">
+            <a:pPr marL="342900" indent="-342900" eaLnBrk="0">
               <a:spcAft>
                 <a:spcPts val="400"/>
               </a:spcAft>
@@ -23264,7 +23783,7 @@
             <a:endParaRPr lang="en-US" sz="1500" dirty="0"/>
           </a:p>
           <a:p>
-            <a:pPr eaLnBrk="0" marL="342900" indent="-342900">
+            <a:pPr marL="342900" indent="-342900" eaLnBrk="0">
               <a:spcAft>
                 <a:spcPts val="400"/>
               </a:spcAft>
@@ -23285,7 +23804,7 @@
             <a:endParaRPr lang="en-US" sz="1500" dirty="0"/>
           </a:p>
           <a:p>
-            <a:pPr eaLnBrk="0" marL="342900" indent="-342900">
+            <a:pPr marL="342900" indent="-342900" eaLnBrk="0">
               <a:spcAft>
                 <a:spcPts val="400"/>
               </a:spcAft>
@@ -23327,7 +23846,7 @@
           </a:prstGeom>
           <a:extLst>
             <a:ext uri="{C572A759-6A51-4108-AA02-DFA0A04FC94B}">
-              <ma14:wrappingTextBoxFlag xmlns:ma14="http://schemas.microsoft.com/office/mac/drawingml/2011/main" val="0"/>
+              <ma14:wrappingTextBoxFlag xmlns:ma14="http://schemas.microsoft.com/office/mac/drawingml/2011/main" xmlns="" val="0"/>
             </a:ext>
           </a:extLst>
         </p:spPr>
@@ -23346,9 +23865,9 @@
             </a:lvl1pPr>
           </a:lstStyle>
           <a:p>
-            <a:pPr eaLnBrk="0" algn="r"/>
+            <a:pPr algn="r" eaLnBrk="0"/>
             <a:fld id="{F7021451-1387-4CA6-816F-3879F97B5CBC}" type="slidenum">
-              <a:rPr b="0" lang="en-US"/>
+              <a:rPr lang="en-US" b="0"/>
               <a:t>3</a:t>
             </a:fld>
             <a:endParaRPr lang="en-US"/>
@@ -23403,7 +23922,7 @@
           </a:bodyPr>
           <a:lstStyle/>
           <a:p>
-            <a:pPr eaLnBrk="0" indent="0" marL="0">
+            <a:pPr marL="0" indent="0" eaLnBrk="0">
               <a:buNone/>
             </a:pPr>
             <a:r>
@@ -23444,8 +23963,20 @@
             <a:tbl>
               <a:tblPr/>
               <a:tblGrid>
-                <a:gridCol w="2194560"/>
-                <a:gridCol w="8869680"/>
+                <a:gridCol w="2194560">
+                  <a:extLst>
+                    <a:ext uri="{9D8B030D-6E8A-4147-A177-3AD203B41FA5}">
+                      <a16:colId xmlns:a16="http://schemas.microsoft.com/office/drawing/2014/main" val="20000"/>
+                    </a:ext>
+                  </a:extLst>
+                </a:gridCol>
+                <a:gridCol w="8869680">
+                  <a:extLst>
+                    <a:ext uri="{9D8B030D-6E8A-4147-A177-3AD203B41FA5}">
+                      <a16:colId xmlns:a16="http://schemas.microsoft.com/office/drawing/2014/main" val="20001"/>
+                    </a:ext>
+                  </a:extLst>
+                </a:gridCol>
               </a:tblGrid>
               <a:tr h="566928">
                 <a:tc>
@@ -23453,7 +23984,7 @@
                     <a:bodyPr/>
                     <a:lstStyle/>
                     <a:p>
-                      <a:pPr eaLnBrk="0" indent="0" marL="0">
+                      <a:pPr marL="0" indent="0" eaLnBrk="0">
                         <a:buNone/>
                       </a:pPr>
                       <a:r>
@@ -23521,7 +24052,7 @@
                     <a:bodyPr/>
                     <a:lstStyle/>
                     <a:p>
-                      <a:pPr eaLnBrk="0" indent="0" marL="0">
+                      <a:pPr marL="0" indent="0" eaLnBrk="0">
                         <a:buNone/>
                       </a:pPr>
                       <a:r>
@@ -23584,6 +24115,11 @@
                     </a:solidFill>
                   </a:tcPr>
                 </a:tc>
+                <a:extLst>
+                  <a:ext uri="{0D108BD9-81ED-4DB2-BD59-A6C34878D82A}">
+                    <a16:rowId xmlns:a16="http://schemas.microsoft.com/office/drawing/2014/main" val="10000"/>
+                  </a:ext>
+                </a:extLst>
               </a:tr>
               <a:tr h="566928">
                 <a:tc>
@@ -23591,7 +24127,7 @@
                     <a:bodyPr/>
                     <a:lstStyle/>
                     <a:p>
-                      <a:pPr eaLnBrk="0" indent="0" marL="0">
+                      <a:pPr marL="0" indent="0" eaLnBrk="0">
                         <a:buNone/>
                       </a:pPr>
                       <a:r>
@@ -23659,7 +24195,7 @@
                     <a:bodyPr/>
                     <a:lstStyle/>
                     <a:p>
-                      <a:pPr eaLnBrk="0" indent="0" marL="0">
+                      <a:pPr marL="0" indent="0" eaLnBrk="0">
                         <a:buNone/>
                       </a:pPr>
                       <a:r>
@@ -23722,6 +24258,11 @@
                     </a:solidFill>
                   </a:tcPr>
                 </a:tc>
+                <a:extLst>
+                  <a:ext uri="{0D108BD9-81ED-4DB2-BD59-A6C34878D82A}">
+                    <a16:rowId xmlns:a16="http://schemas.microsoft.com/office/drawing/2014/main" val="10001"/>
+                  </a:ext>
+                </a:extLst>
               </a:tr>
               <a:tr h="566928">
                 <a:tc>
@@ -23729,7 +24270,7 @@
                     <a:bodyPr/>
                     <a:lstStyle/>
                     <a:p>
-                      <a:pPr eaLnBrk="0" indent="0" marL="0">
+                      <a:pPr marL="0" indent="0" eaLnBrk="0">
                         <a:buNone/>
                       </a:pPr>
                       <a:r>
@@ -23797,7 +24338,7 @@
                     <a:bodyPr/>
                     <a:lstStyle/>
                     <a:p>
-                      <a:pPr eaLnBrk="0" indent="0" marL="0">
+                      <a:pPr marL="0" indent="0" eaLnBrk="0">
                         <a:buNone/>
                       </a:pPr>
                       <a:r>
@@ -23860,6 +24401,11 @@
                     </a:solidFill>
                   </a:tcPr>
                 </a:tc>
+                <a:extLst>
+                  <a:ext uri="{0D108BD9-81ED-4DB2-BD59-A6C34878D82A}">
+                    <a16:rowId xmlns:a16="http://schemas.microsoft.com/office/drawing/2014/main" val="10002"/>
+                  </a:ext>
+                </a:extLst>
               </a:tr>
               <a:tr h="566928">
                 <a:tc>
@@ -23867,7 +24413,7 @@
                     <a:bodyPr/>
                     <a:lstStyle/>
                     <a:p>
-                      <a:pPr eaLnBrk="0" indent="0" marL="0">
+                      <a:pPr marL="0" indent="0" eaLnBrk="0">
                         <a:buNone/>
                       </a:pPr>
                       <a:r>
@@ -23935,7 +24481,7 @@
                     <a:bodyPr/>
                     <a:lstStyle/>
                     <a:p>
-                      <a:pPr eaLnBrk="0" indent="0" marL="0">
+                      <a:pPr marL="0" indent="0" eaLnBrk="0">
                         <a:buNone/>
                       </a:pPr>
                       <a:r>
@@ -23998,6 +24544,11 @@
                     </a:solidFill>
                   </a:tcPr>
                 </a:tc>
+                <a:extLst>
+                  <a:ext uri="{0D108BD9-81ED-4DB2-BD59-A6C34878D82A}">
+                    <a16:rowId xmlns:a16="http://schemas.microsoft.com/office/drawing/2014/main" val="10003"/>
+                  </a:ext>
+                </a:extLst>
               </a:tr>
               <a:tr h="566928">
                 <a:tc>
@@ -24005,7 +24556,7 @@
                     <a:bodyPr/>
                     <a:lstStyle/>
                     <a:p>
-                      <a:pPr eaLnBrk="0" indent="0" marL="0">
+                      <a:pPr marL="0" indent="0" eaLnBrk="0">
                         <a:buNone/>
                       </a:pPr>
                       <a:r>
@@ -24073,7 +24624,7 @@
                     <a:bodyPr/>
                     <a:lstStyle/>
                     <a:p>
-                      <a:pPr eaLnBrk="0" indent="0" marL="0">
+                      <a:pPr marL="0" indent="0" eaLnBrk="0">
                         <a:buNone/>
                       </a:pPr>
                       <a:r>
@@ -24136,6 +24687,11 @@
                     </a:solidFill>
                   </a:tcPr>
                 </a:tc>
+                <a:extLst>
+                  <a:ext uri="{0D108BD9-81ED-4DB2-BD59-A6C34878D82A}">
+                    <a16:rowId xmlns:a16="http://schemas.microsoft.com/office/drawing/2014/main" val="10004"/>
+                  </a:ext>
+                </a:extLst>
               </a:tr>
               <a:tr h="566928">
                 <a:tc>
@@ -24143,7 +24699,7 @@
                     <a:bodyPr/>
                     <a:lstStyle/>
                     <a:p>
-                      <a:pPr eaLnBrk="0" indent="0" marL="0">
+                      <a:pPr marL="0" indent="0" eaLnBrk="0">
                         <a:buNone/>
                       </a:pPr>
                       <a:r>
@@ -24211,7 +24767,7 @@
                     <a:bodyPr/>
                     <a:lstStyle/>
                     <a:p>
-                      <a:pPr eaLnBrk="0" indent="0" marL="0">
+                      <a:pPr marL="0" indent="0" eaLnBrk="0">
                         <a:buNone/>
                       </a:pPr>
                       <a:r>
@@ -24274,6 +24830,11 @@
                     </a:solidFill>
                   </a:tcPr>
                 </a:tc>
+                <a:extLst>
+                  <a:ext uri="{0D108BD9-81ED-4DB2-BD59-A6C34878D82A}">
+                    <a16:rowId xmlns:a16="http://schemas.microsoft.com/office/drawing/2014/main" val="10005"/>
+                  </a:ext>
+                </a:extLst>
               </a:tr>
               <a:tr h="566928">
                 <a:tc>
@@ -24281,7 +24842,7 @@
                     <a:bodyPr/>
                     <a:lstStyle/>
                     <a:p>
-                      <a:pPr eaLnBrk="0" indent="0" marL="0">
+                      <a:pPr marL="0" indent="0" eaLnBrk="0">
                         <a:buNone/>
                       </a:pPr>
                       <a:r>
@@ -24349,7 +24910,7 @@
                     <a:bodyPr/>
                     <a:lstStyle/>
                     <a:p>
-                      <a:pPr eaLnBrk="0" indent="0" marL="0">
+                      <a:pPr marL="0" indent="0" eaLnBrk="0">
                         <a:buNone/>
                       </a:pPr>
                       <a:r>
@@ -24412,6 +24973,11 @@
                     </a:solidFill>
                   </a:tcPr>
                 </a:tc>
+                <a:extLst>
+                  <a:ext uri="{0D108BD9-81ED-4DB2-BD59-A6C34878D82A}">
+                    <a16:rowId xmlns:a16="http://schemas.microsoft.com/office/drawing/2014/main" val="10006"/>
+                  </a:ext>
+                </a:extLst>
               </a:tr>
             </a:tbl>
           </a:graphicData>
@@ -24419,7 +24985,7 @@
       </p:graphicFrame>
       <p:sp>
         <p:nvSpPr>
-          <p:cNvPr id="5" name="Shape 1"/>
+          <p:cNvPr id="3" name="Shape 1"/>
           <p:cNvSpPr/>
           <p:nvPr/>
         </p:nvSpPr>
@@ -24443,6 +25009,13 @@
             <a:prstDash val="solid"/>
           </a:ln>
         </p:spPr>
+        <p:txBody>
+          <a:bodyPr/>
+          <a:lstStyle/>
+          <a:p>
+            <a:endParaRPr lang="ko-KR" altLang="en-US"/>
+          </a:p>
+        </p:txBody>
       </p:sp>
       <p:sp>
         <p:nvSpPr>
@@ -24465,7 +25038,7 @@
           <a:bodyPr wrap="square" lIns="0" tIns="0" rIns="0" bIns="0" rtlCol="0" anchor="t"/>
           <a:lstStyle/>
           <a:p>
-            <a:pPr eaLnBrk="0" indent="0" marL="0">
+            <a:pPr marL="0" indent="0" eaLnBrk="0">
               <a:buNone/>
             </a:pPr>
             <a:r>
@@ -24504,7 +25077,7 @@
           <a:bodyPr wrap="square" lIns="0" tIns="0" rIns="0" bIns="0" rtlCol="0" anchor="t"/>
           <a:lstStyle/>
           <a:p>
-            <a:pPr eaLnBrk="0" indent="0" marL="0">
+            <a:pPr marL="0" indent="0" eaLnBrk="0">
               <a:buNone/>
             </a:pPr>
             <a:r>
@@ -24542,7 +25115,7 @@
           </a:prstGeom>
           <a:extLst>
             <a:ext uri="{C572A759-6A51-4108-AA02-DFA0A04FC94B}">
-              <ma14:wrappingTextBoxFlag xmlns:ma14="http://schemas.microsoft.com/office/mac/drawingml/2011/main" val="0"/>
+              <ma14:wrappingTextBoxFlag xmlns:ma14="http://schemas.microsoft.com/office/mac/drawingml/2011/main" xmlns="" val="0"/>
             </a:ext>
           </a:extLst>
         </p:spPr>
@@ -24561,9 +25134,9 @@
             </a:lvl1pPr>
           </a:lstStyle>
           <a:p>
-            <a:pPr eaLnBrk="0" algn="r"/>
+            <a:pPr algn="r" eaLnBrk="0"/>
             <a:fld id="{F7021451-1387-4CA6-816F-3879F97B5CBC}" type="slidenum">
-              <a:rPr b="0" lang="en-US"/>
+              <a:rPr lang="en-US" b="0"/>
               <a:t>4</a:t>
             </a:fld>
             <a:endParaRPr lang="en-US"/>
@@ -24618,7 +25191,7 @@
           </a:bodyPr>
           <a:lstStyle/>
           <a:p>
-            <a:pPr eaLnBrk="0" indent="0" marL="0">
+            <a:pPr marL="0" indent="0" eaLnBrk="0">
               <a:buNone/>
             </a:pPr>
             <a:r>
@@ -24662,6 +25235,13 @@
             <a:prstDash val="solid"/>
           </a:ln>
         </p:spPr>
+        <p:txBody>
+          <a:bodyPr/>
+          <a:lstStyle/>
+          <a:p>
+            <a:endParaRPr lang="ko-KR" altLang="en-US"/>
+          </a:p>
+        </p:txBody>
       </p:sp>
       <p:sp>
         <p:nvSpPr>
@@ -24684,7 +25264,7 @@
           <a:bodyPr wrap="square" lIns="0" tIns="0" rIns="0" bIns="0" rtlCol="0" anchor="t"/>
           <a:lstStyle/>
           <a:p>
-            <a:pPr eaLnBrk="0" algn="ctr" indent="0" marL="0">
+            <a:pPr marL="0" indent="0" algn="ctr" eaLnBrk="0">
               <a:buNone/>
             </a:pPr>
             <a:r>
@@ -24723,7 +25303,7 @@
           <a:bodyPr wrap="square" lIns="0" tIns="0" rIns="0" bIns="0" rtlCol="0" anchor="t"/>
           <a:lstStyle/>
           <a:p>
-            <a:pPr eaLnBrk="0" algn="ctr" indent="0" marL="0">
+            <a:pPr marL="0" indent="0" algn="ctr" eaLnBrk="0">
               <a:buNone/>
             </a:pPr>
             <a:r>
@@ -24740,7 +25320,7 @@
             <a:endParaRPr lang="en-US" sz="1100" dirty="0"/>
           </a:p>
           <a:p>
-            <a:pPr eaLnBrk="0" algn="ctr" indent="0" marL="0">
+            <a:pPr marL="0" indent="0" algn="ctr" eaLnBrk="0">
               <a:buNone/>
             </a:pPr>
             <a:r>
@@ -24784,6 +25364,13 @@
             <a:prstDash val="solid"/>
           </a:ln>
         </p:spPr>
+        <p:txBody>
+          <a:bodyPr/>
+          <a:lstStyle/>
+          <a:p>
+            <a:endParaRPr lang="ko-KR" altLang="en-US"/>
+          </a:p>
+        </p:txBody>
       </p:sp>
       <p:sp>
         <p:nvSpPr>
@@ -24806,7 +25393,7 @@
           <a:bodyPr wrap="square" lIns="0" tIns="0" rIns="0" bIns="0" rtlCol="0" anchor="t"/>
           <a:lstStyle/>
           <a:p>
-            <a:pPr eaLnBrk="0" algn="ctr" indent="0" marL="0">
+            <a:pPr marL="0" indent="0" algn="ctr" eaLnBrk="0">
               <a:buNone/>
             </a:pPr>
             <a:r>
@@ -24845,7 +25432,7 @@
           <a:bodyPr wrap="square" lIns="0" tIns="0" rIns="0" bIns="0" rtlCol="0" anchor="t"/>
           <a:lstStyle/>
           <a:p>
-            <a:pPr eaLnBrk="0" algn="ctr" indent="0" marL="0">
+            <a:pPr marL="0" indent="0" algn="ctr" eaLnBrk="0">
               <a:buNone/>
             </a:pPr>
             <a:r>
@@ -24862,7 +25449,7 @@
             <a:endParaRPr lang="en-US" sz="1100" dirty="0"/>
           </a:p>
           <a:p>
-            <a:pPr eaLnBrk="0" algn="ctr" indent="0" marL="0">
+            <a:pPr marL="0" indent="0" algn="ctr" eaLnBrk="0">
               <a:buNone/>
             </a:pPr>
             <a:r>
@@ -24906,6 +25493,13 @@
             <a:prstDash val="solid"/>
           </a:ln>
         </p:spPr>
+        <p:txBody>
+          <a:bodyPr/>
+          <a:lstStyle/>
+          <a:p>
+            <a:endParaRPr lang="ko-KR" altLang="en-US"/>
+          </a:p>
+        </p:txBody>
       </p:sp>
       <p:sp>
         <p:nvSpPr>
@@ -24928,7 +25522,7 @@
           <a:bodyPr wrap="square" lIns="0" tIns="0" rIns="0" bIns="0" rtlCol="0" anchor="t"/>
           <a:lstStyle/>
           <a:p>
-            <a:pPr eaLnBrk="0" algn="ctr" indent="0" marL="0">
+            <a:pPr marL="0" indent="0" algn="ctr" eaLnBrk="0">
               <a:buNone/>
             </a:pPr>
             <a:r>
@@ -24967,7 +25561,7 @@
           <a:bodyPr wrap="square" lIns="0" tIns="0" rIns="0" bIns="0" rtlCol="0" anchor="t"/>
           <a:lstStyle/>
           <a:p>
-            <a:pPr eaLnBrk="0" algn="ctr" indent="0" marL="0">
+            <a:pPr marL="0" indent="0" algn="ctr" eaLnBrk="0">
               <a:buNone/>
             </a:pPr>
             <a:r>
@@ -24984,7 +25578,7 @@
             <a:endParaRPr lang="en-US" sz="1100" dirty="0"/>
           </a:p>
           <a:p>
-            <a:pPr eaLnBrk="0" algn="ctr" indent="0" marL="0">
+            <a:pPr marL="0" indent="0" algn="ctr" eaLnBrk="0">
               <a:buNone/>
             </a:pPr>
             <a:r>
@@ -25028,6 +25622,13 @@
             <a:prstDash val="solid"/>
           </a:ln>
         </p:spPr>
+        <p:txBody>
+          <a:bodyPr/>
+          <a:lstStyle/>
+          <a:p>
+            <a:endParaRPr lang="ko-KR" altLang="en-US"/>
+          </a:p>
+        </p:txBody>
       </p:sp>
       <p:sp>
         <p:nvSpPr>
@@ -25050,7 +25651,7 @@
           <a:bodyPr wrap="square" lIns="0" tIns="0" rIns="0" bIns="0" rtlCol="0" anchor="t"/>
           <a:lstStyle/>
           <a:p>
-            <a:pPr eaLnBrk="0" algn="ctr" indent="0" marL="0">
+            <a:pPr marL="0" indent="0" algn="ctr" eaLnBrk="0">
               <a:buNone/>
             </a:pPr>
             <a:r>
@@ -25089,7 +25690,7 @@
           <a:bodyPr wrap="square" lIns="0" tIns="0" rIns="0" bIns="0" rtlCol="0" anchor="t"/>
           <a:lstStyle/>
           <a:p>
-            <a:pPr eaLnBrk="0" algn="ctr" indent="0" marL="0">
+            <a:pPr marL="0" indent="0" algn="ctr" eaLnBrk="0">
               <a:buNone/>
             </a:pPr>
             <a:r>
@@ -25106,7 +25707,7 @@
             <a:endParaRPr lang="en-US" sz="1100" dirty="0"/>
           </a:p>
           <a:p>
-            <a:pPr eaLnBrk="0" algn="ctr" indent="0" marL="0">
+            <a:pPr marL="0" indent="0" algn="ctr" eaLnBrk="0">
               <a:buNone/>
             </a:pPr>
             <a:r>
@@ -25150,6 +25751,13 @@
             <a:prstDash val="solid"/>
           </a:ln>
         </p:spPr>
+        <p:txBody>
+          <a:bodyPr/>
+          <a:lstStyle/>
+          <a:p>
+            <a:endParaRPr lang="ko-KR" altLang="en-US"/>
+          </a:p>
+        </p:txBody>
       </p:sp>
       <p:sp>
         <p:nvSpPr>
@@ -25172,7 +25780,7 @@
           <a:bodyPr wrap="square" lIns="0" tIns="0" rIns="0" bIns="0" rtlCol="0" anchor="t"/>
           <a:lstStyle/>
           <a:p>
-            <a:pPr eaLnBrk="0" algn="ctr" indent="0" marL="0">
+            <a:pPr marL="0" indent="0" algn="ctr" eaLnBrk="0">
               <a:buNone/>
             </a:pPr>
             <a:r>
@@ -25211,7 +25819,7 @@
           <a:bodyPr wrap="square" lIns="0" tIns="0" rIns="0" bIns="0" rtlCol="0" anchor="t"/>
           <a:lstStyle/>
           <a:p>
-            <a:pPr eaLnBrk="0" algn="ctr" indent="0" marL="0">
+            <a:pPr marL="0" indent="0" algn="ctr" eaLnBrk="0">
               <a:buNone/>
             </a:pPr>
             <a:r>
@@ -25228,7 +25836,7 @@
             <a:endParaRPr lang="en-US" sz="1100" dirty="0"/>
           </a:p>
           <a:p>
-            <a:pPr eaLnBrk="0" algn="ctr" indent="0" marL="0">
+            <a:pPr marL="0" indent="0" algn="ctr" eaLnBrk="0">
               <a:buNone/>
             </a:pPr>
             <a:r>
@@ -25269,6 +25877,13 @@
             <a:tailEnd type="triangle"/>
           </a:ln>
         </p:spPr>
+        <p:txBody>
+          <a:bodyPr/>
+          <a:lstStyle/>
+          <a:p>
+            <a:endParaRPr lang="ko-KR" altLang="en-US"/>
+          </a:p>
+        </p:txBody>
       </p:sp>
       <p:sp>
         <p:nvSpPr>
@@ -25293,6 +25908,13 @@
             <a:tailEnd type="triangle"/>
           </a:ln>
         </p:spPr>
+        <p:txBody>
+          <a:bodyPr/>
+          <a:lstStyle/>
+          <a:p>
+            <a:endParaRPr lang="ko-KR" altLang="en-US"/>
+          </a:p>
+        </p:txBody>
       </p:sp>
       <p:sp>
         <p:nvSpPr>
@@ -25317,6 +25939,13 @@
             <a:tailEnd type="triangle"/>
           </a:ln>
         </p:spPr>
+        <p:txBody>
+          <a:bodyPr/>
+          <a:lstStyle/>
+          <a:p>
+            <a:endParaRPr lang="ko-KR" altLang="en-US"/>
+          </a:p>
+        </p:txBody>
       </p:sp>
       <p:sp>
         <p:nvSpPr>
@@ -25341,6 +25970,13 @@
             <a:tailEnd type="triangle"/>
           </a:ln>
         </p:spPr>
+        <p:txBody>
+          <a:bodyPr/>
+          <a:lstStyle/>
+          <a:p>
+            <a:endParaRPr lang="ko-KR" altLang="en-US"/>
+          </a:p>
+        </p:txBody>
       </p:sp>
       <p:sp>
         <p:nvSpPr>
@@ -25368,6 +26004,13 @@
             <a:prstDash val="solid"/>
           </a:ln>
         </p:spPr>
+        <p:txBody>
+          <a:bodyPr/>
+          <a:lstStyle/>
+          <a:p>
+            <a:endParaRPr lang="ko-KR" altLang="en-US"/>
+          </a:p>
+        </p:txBody>
       </p:sp>
       <p:sp>
         <p:nvSpPr>
@@ -25390,7 +26033,7 @@
           <a:bodyPr wrap="square" lIns="0" tIns="0" rIns="0" bIns="0" rtlCol="0" anchor="t"/>
           <a:lstStyle/>
           <a:p>
-            <a:pPr eaLnBrk="0" algn="ctr" indent="0" marL="0">
+            <a:pPr marL="0" indent="0" algn="ctr" eaLnBrk="0">
               <a:buNone/>
             </a:pPr>
             <a:r>
@@ -25429,7 +26072,7 @@
           <a:bodyPr wrap="square" lIns="0" tIns="0" rIns="0" bIns="0" rtlCol="0" anchor="t"/>
           <a:lstStyle/>
           <a:p>
-            <a:pPr eaLnBrk="0" algn="ctr" indent="0" marL="0">
+            <a:pPr marL="0" indent="0" algn="ctr" eaLnBrk="0">
               <a:buNone/>
             </a:pPr>
             <a:r>
@@ -25446,7 +26089,7 @@
             <a:endParaRPr lang="en-US" sz="1100" dirty="0"/>
           </a:p>
           <a:p>
-            <a:pPr eaLnBrk="0" algn="ctr" indent="0" marL="0">
+            <a:pPr marL="0" indent="0" algn="ctr" eaLnBrk="0">
               <a:buNone/>
             </a:pPr>
             <a:r>
@@ -25490,6 +26133,13 @@
             <a:prstDash val="solid"/>
           </a:ln>
         </p:spPr>
+        <p:txBody>
+          <a:bodyPr/>
+          <a:lstStyle/>
+          <a:p>
+            <a:endParaRPr lang="ko-KR" altLang="en-US"/>
+          </a:p>
+        </p:txBody>
       </p:sp>
       <p:sp>
         <p:nvSpPr>
@@ -25512,7 +26162,7 @@
           <a:bodyPr wrap="square" lIns="0" tIns="0" rIns="0" bIns="0" rtlCol="0" anchor="t"/>
           <a:lstStyle/>
           <a:p>
-            <a:pPr eaLnBrk="0" algn="ctr" indent="0" marL="0">
+            <a:pPr marL="0" indent="0" algn="ctr" eaLnBrk="0">
               <a:buNone/>
             </a:pPr>
             <a:r>
@@ -25551,7 +26201,7 @@
           <a:bodyPr wrap="square" lIns="0" tIns="0" rIns="0" bIns="0" rtlCol="0" anchor="t"/>
           <a:lstStyle/>
           <a:p>
-            <a:pPr eaLnBrk="0" algn="ctr" indent="0" marL="0">
+            <a:pPr marL="0" indent="0" algn="ctr" eaLnBrk="0">
               <a:buNone/>
             </a:pPr>
             <a:r>
@@ -25568,7 +26218,7 @@
             <a:endParaRPr lang="en-US" sz="1100" dirty="0"/>
           </a:p>
           <a:p>
-            <a:pPr eaLnBrk="0" algn="ctr" indent="0" marL="0">
+            <a:pPr marL="0" indent="0" algn="ctr" eaLnBrk="0">
               <a:buNone/>
             </a:pPr>
             <a:r>
@@ -25612,6 +26262,13 @@
             <a:prstDash val="solid"/>
           </a:ln>
         </p:spPr>
+        <p:txBody>
+          <a:bodyPr/>
+          <a:lstStyle/>
+          <a:p>
+            <a:endParaRPr lang="ko-KR" altLang="en-US"/>
+          </a:p>
+        </p:txBody>
       </p:sp>
       <p:sp>
         <p:nvSpPr>
@@ -25634,7 +26291,7 @@
           <a:bodyPr wrap="square" lIns="0" tIns="0" rIns="0" bIns="0" rtlCol="0" anchor="t"/>
           <a:lstStyle/>
           <a:p>
-            <a:pPr eaLnBrk="0" algn="ctr" indent="0" marL="0">
+            <a:pPr marL="0" indent="0" algn="ctr" eaLnBrk="0">
               <a:buNone/>
             </a:pPr>
             <a:r>
@@ -25673,7 +26330,7 @@
           <a:bodyPr wrap="square" lIns="0" tIns="0" rIns="0" bIns="0" rtlCol="0" anchor="t"/>
           <a:lstStyle/>
           <a:p>
-            <a:pPr eaLnBrk="0" algn="ctr" indent="0" marL="0">
+            <a:pPr marL="0" indent="0" algn="ctr" eaLnBrk="0">
               <a:buNone/>
             </a:pPr>
             <a:r>
@@ -25690,7 +26347,7 @@
             <a:endParaRPr lang="en-US" sz="1100" dirty="0"/>
           </a:p>
           <a:p>
-            <a:pPr eaLnBrk="0" algn="ctr" indent="0" marL="0">
+            <a:pPr marL="0" indent="0" algn="ctr" eaLnBrk="0">
               <a:buNone/>
             </a:pPr>
             <a:r>
@@ -25731,6 +26388,13 @@
             <a:tailEnd type="triangle"/>
           </a:ln>
         </p:spPr>
+        <p:txBody>
+          <a:bodyPr/>
+          <a:lstStyle/>
+          <a:p>
+            <a:endParaRPr lang="ko-KR" altLang="en-US"/>
+          </a:p>
+        </p:txBody>
       </p:sp>
       <p:sp>
         <p:nvSpPr>
@@ -25755,6 +26419,13 @@
             <a:tailEnd type="triangle"/>
           </a:ln>
         </p:spPr>
+        <p:txBody>
+          <a:bodyPr/>
+          <a:lstStyle/>
+          <a:p>
+            <a:endParaRPr lang="ko-KR" altLang="en-US"/>
+          </a:p>
+        </p:txBody>
       </p:sp>
       <p:sp>
         <p:nvSpPr>
@@ -25779,6 +26450,13 @@
             <a:tailEnd type="triangle"/>
           </a:ln>
         </p:spPr>
+        <p:txBody>
+          <a:bodyPr/>
+          <a:lstStyle/>
+          <a:p>
+            <a:endParaRPr lang="ko-KR" altLang="en-US"/>
+          </a:p>
+        </p:txBody>
       </p:sp>
       <p:sp>
         <p:nvSpPr>
@@ -25803,6 +26481,13 @@
             <a:headEnd type="triangle"/>
           </a:ln>
         </p:spPr>
+        <p:txBody>
+          <a:bodyPr/>
+          <a:lstStyle/>
+          <a:p>
+            <a:endParaRPr lang="ko-KR" altLang="en-US"/>
+          </a:p>
+        </p:txBody>
       </p:sp>
       <p:sp>
         <p:nvSpPr>
@@ -25825,7 +26510,7 @@
           <a:bodyPr wrap="square" lIns="0" tIns="0" rIns="0" bIns="0" rtlCol="0" anchor="t"/>
           <a:lstStyle/>
           <a:p>
-            <a:pPr eaLnBrk="0" indent="0" marL="0">
+            <a:pPr marL="0" indent="0" eaLnBrk="0">
               <a:buNone/>
             </a:pPr>
             <a:r>
@@ -25869,6 +26554,13 @@
             <a:prstDash val="solid"/>
           </a:ln>
         </p:spPr>
+        <p:txBody>
+          <a:bodyPr/>
+          <a:lstStyle/>
+          <a:p>
+            <a:endParaRPr lang="ko-KR" altLang="en-US"/>
+          </a:p>
+        </p:txBody>
       </p:sp>
       <p:sp>
         <p:nvSpPr>
@@ -25891,7 +26583,7 @@
           <a:bodyPr wrap="square" lIns="0" tIns="0" rIns="0" bIns="0" rtlCol="0" anchor="t"/>
           <a:lstStyle/>
           <a:p>
-            <a:pPr eaLnBrk="0" indent="0" marL="0">
+            <a:pPr marL="0" indent="0" eaLnBrk="0">
               <a:buNone/>
             </a:pPr>
             <a:r>
@@ -25930,7 +26622,7 @@
           <a:bodyPr wrap="square" lIns="0" tIns="0" rIns="0" bIns="0" rtlCol="0" anchor="t"/>
           <a:lstStyle/>
           <a:p>
-            <a:pPr eaLnBrk="0" indent="0" marL="0">
+            <a:pPr marL="0" indent="0" eaLnBrk="0">
               <a:buNone/>
             </a:pPr>
             <a:r>
@@ -25974,6 +26666,13 @@
             <a:prstDash val="solid"/>
           </a:ln>
         </p:spPr>
+        <p:txBody>
+          <a:bodyPr/>
+          <a:lstStyle/>
+          <a:p>
+            <a:endParaRPr lang="ko-KR" altLang="en-US"/>
+          </a:p>
+        </p:txBody>
       </p:sp>
       <p:sp>
         <p:nvSpPr>
@@ -25996,7 +26695,7 @@
           <a:bodyPr wrap="square" lIns="0" tIns="0" rIns="0" bIns="0" rtlCol="0" anchor="t"/>
           <a:lstStyle/>
           <a:p>
-            <a:pPr eaLnBrk="0" indent="0" marL="0">
+            <a:pPr marL="0" indent="0" eaLnBrk="0">
               <a:buNone/>
             </a:pPr>
             <a:r>
@@ -26035,7 +26734,7 @@
           <a:bodyPr wrap="square" lIns="0" tIns="0" rIns="0" bIns="0" rtlCol="0" anchor="t"/>
           <a:lstStyle/>
           <a:p>
-            <a:pPr eaLnBrk="0" indent="0" marL="0">
+            <a:pPr marL="0" indent="0" eaLnBrk="0">
               <a:buNone/>
             </a:pPr>
             <a:r>
@@ -26055,7 +26754,7 @@
       </p:sp>
       <p:sp>
         <p:nvSpPr>
-          <p:cNvPr id="25" name="Slide Number Placeholder 0"/>
+          <p:cNvPr id="3" name="Slide Number Placeholder 0"/>
           <p:cNvSpPr>
             <a:spLocks noGrp="1"/>
           </p:cNvSpPr>
@@ -26073,7 +26772,7 @@
           </a:prstGeom>
           <a:extLst>
             <a:ext uri="{C572A759-6A51-4108-AA02-DFA0A04FC94B}">
-              <ma14:wrappingTextBoxFlag xmlns:ma14="http://schemas.microsoft.com/office/mac/drawingml/2011/main" val="0"/>
+              <ma14:wrappingTextBoxFlag xmlns:ma14="http://schemas.microsoft.com/office/mac/drawingml/2011/main" xmlns="" val="0"/>
             </a:ext>
           </a:extLst>
         </p:spPr>
@@ -26092,9 +26791,9 @@
             </a:lvl1pPr>
           </a:lstStyle>
           <a:p>
-            <a:pPr eaLnBrk="0" algn="r"/>
+            <a:pPr algn="r" eaLnBrk="0"/>
             <a:fld id="{F7021451-1387-4CA6-816F-3879F97B5CBC}" type="slidenum">
-              <a:rPr b="0" lang="en-US"/>
+              <a:rPr lang="en-US" b="0"/>
               <a:t>5</a:t>
             </a:fld>
             <a:endParaRPr lang="en-US"/>
@@ -26149,7 +26848,7 @@
           </a:bodyPr>
           <a:lstStyle/>
           <a:p>
-            <a:pPr eaLnBrk="0" indent="0" marL="0">
+            <a:pPr marL="0" indent="0" eaLnBrk="0">
               <a:buNone/>
             </a:pPr>
             <a:r>
@@ -26169,14 +26868,14 @@
       </p:sp>
       <p:pic>
         <p:nvPicPr>
-          <p:cNvPr id="4" name="Image 0" descr="C:\SNU\포트폴리오\전국AI반도체경진대회\submission\figs\chipS_floorplan.png">    </p:cNvPr>
+          <p:cNvPr id="4" name="Image 0" descr="C:\SNU\포트폴리오\전국AI반도체경진대회\submission\figs\chipS_floorplan.png"/>
           <p:cNvPicPr>
             <a:picLocks noChangeAspect="1"/>
           </p:cNvPicPr>
           <p:nvPr/>
         </p:nvPicPr>
         <p:blipFill>
-          <a:blip r:embed="rId1"/>
+          <a:blip r:embed="rId3"/>
           <a:stretch>
             <a:fillRect/>
           </a:stretch>
@@ -26212,7 +26911,7 @@
           <a:bodyPr wrap="square" lIns="0" tIns="0" rIns="0" bIns="0" rtlCol="0" anchor="t"/>
           <a:lstStyle/>
           <a:p>
-            <a:pPr eaLnBrk="0" indent="0" marL="0">
+            <a:pPr marL="0" indent="0" eaLnBrk="0">
               <a:buNone/>
             </a:pPr>
             <a:r>
@@ -26253,8 +26952,20 @@
             <a:tbl>
               <a:tblPr/>
               <a:tblGrid>
-                <a:gridCol w="2011680"/>
-                <a:gridCol w="3017520"/>
+                <a:gridCol w="2011680">
+                  <a:extLst>
+                    <a:ext uri="{9D8B030D-6E8A-4147-A177-3AD203B41FA5}">
+                      <a16:colId xmlns:a16="http://schemas.microsoft.com/office/drawing/2014/main" val="20000"/>
+                    </a:ext>
+                  </a:extLst>
+                </a:gridCol>
+                <a:gridCol w="3017520">
+                  <a:extLst>
+                    <a:ext uri="{9D8B030D-6E8A-4147-A177-3AD203B41FA5}">
+                      <a16:colId xmlns:a16="http://schemas.microsoft.com/office/drawing/2014/main" val="20001"/>
+                    </a:ext>
+                  </a:extLst>
+                </a:gridCol>
               </a:tblGrid>
               <a:tr h="457200">
                 <a:tc>
@@ -26262,7 +26973,7 @@
                     <a:bodyPr/>
                     <a:lstStyle/>
                     <a:p>
-                      <a:pPr eaLnBrk="0" indent="0" marL="0">
+                      <a:pPr marL="0" indent="0" eaLnBrk="0">
                         <a:buNone/>
                       </a:pPr>
                       <a:r>
@@ -26330,7 +27041,7 @@
                     <a:bodyPr/>
                     <a:lstStyle/>
                     <a:p>
-                      <a:pPr eaLnBrk="0" indent="0" marL="0">
+                      <a:pPr marL="0" indent="0" eaLnBrk="0">
                         <a:buNone/>
                       </a:pPr>
                       <a:r>
@@ -26393,6 +27104,11 @@
                     </a:solidFill>
                   </a:tcPr>
                 </a:tc>
+                <a:extLst>
+                  <a:ext uri="{0D108BD9-81ED-4DB2-BD59-A6C34878D82A}">
+                    <a16:rowId xmlns:a16="http://schemas.microsoft.com/office/drawing/2014/main" val="10000"/>
+                  </a:ext>
+                </a:extLst>
               </a:tr>
               <a:tr h="457200">
                 <a:tc>
@@ -26400,7 +27116,7 @@
                     <a:bodyPr/>
                     <a:lstStyle/>
                     <a:p>
-                      <a:pPr eaLnBrk="0" indent="0" marL="0">
+                      <a:pPr marL="0" indent="0" eaLnBrk="0">
                         <a:buNone/>
                       </a:pPr>
                       <a:r>
@@ -26468,7 +27184,7 @@
                     <a:bodyPr/>
                     <a:lstStyle/>
                     <a:p>
-                      <a:pPr eaLnBrk="0" indent="0" marL="0">
+                      <a:pPr marL="0" indent="0" eaLnBrk="0">
                         <a:buNone/>
                       </a:pPr>
                       <a:r>
@@ -26531,6 +27247,11 @@
                     </a:solidFill>
                   </a:tcPr>
                 </a:tc>
+                <a:extLst>
+                  <a:ext uri="{0D108BD9-81ED-4DB2-BD59-A6C34878D82A}">
+                    <a16:rowId xmlns:a16="http://schemas.microsoft.com/office/drawing/2014/main" val="10001"/>
+                  </a:ext>
+                </a:extLst>
               </a:tr>
               <a:tr h="457200">
                 <a:tc>
@@ -26538,7 +27259,7 @@
                     <a:bodyPr/>
                     <a:lstStyle/>
                     <a:p>
-                      <a:pPr eaLnBrk="0" indent="0" marL="0">
+                      <a:pPr marL="0" indent="0" eaLnBrk="0">
                         <a:buNone/>
                       </a:pPr>
                       <a:r>
@@ -26606,7 +27327,7 @@
                     <a:bodyPr/>
                     <a:lstStyle/>
                     <a:p>
-                      <a:pPr eaLnBrk="0" indent="0" marL="0">
+                      <a:pPr marL="0" indent="0" eaLnBrk="0">
                         <a:buNone/>
                       </a:pPr>
                       <a:r>
@@ -26669,6 +27390,11 @@
                     </a:solidFill>
                   </a:tcPr>
                 </a:tc>
+                <a:extLst>
+                  <a:ext uri="{0D108BD9-81ED-4DB2-BD59-A6C34878D82A}">
+                    <a16:rowId xmlns:a16="http://schemas.microsoft.com/office/drawing/2014/main" val="10002"/>
+                  </a:ext>
+                </a:extLst>
               </a:tr>
               <a:tr h="457200">
                 <a:tc>
@@ -26676,7 +27402,7 @@
                     <a:bodyPr/>
                     <a:lstStyle/>
                     <a:p>
-                      <a:pPr eaLnBrk="0" indent="0" marL="0">
+                      <a:pPr marL="0" indent="0" eaLnBrk="0">
                         <a:buNone/>
                       </a:pPr>
                       <a:r>
@@ -26744,7 +27470,7 @@
                     <a:bodyPr/>
                     <a:lstStyle/>
                     <a:p>
-                      <a:pPr eaLnBrk="0" indent="0" marL="0">
+                      <a:pPr marL="0" indent="0" eaLnBrk="0">
                         <a:buNone/>
                       </a:pPr>
                       <a:r>
@@ -26807,6 +27533,11 @@
                     </a:solidFill>
                   </a:tcPr>
                 </a:tc>
+                <a:extLst>
+                  <a:ext uri="{0D108BD9-81ED-4DB2-BD59-A6C34878D82A}">
+                    <a16:rowId xmlns:a16="http://schemas.microsoft.com/office/drawing/2014/main" val="10003"/>
+                  </a:ext>
+                </a:extLst>
               </a:tr>
               <a:tr h="457200">
                 <a:tc>
@@ -26814,7 +27545,7 @@
                     <a:bodyPr/>
                     <a:lstStyle/>
                     <a:p>
-                      <a:pPr eaLnBrk="0" indent="0" marL="0">
+                      <a:pPr marL="0" indent="0" eaLnBrk="0">
                         <a:buNone/>
                       </a:pPr>
                       <a:r>
@@ -26882,7 +27613,7 @@
                     <a:bodyPr/>
                     <a:lstStyle/>
                     <a:p>
-                      <a:pPr eaLnBrk="0" indent="0" marL="0">
+                      <a:pPr marL="0" indent="0" eaLnBrk="0">
                         <a:buNone/>
                       </a:pPr>
                       <a:r>
@@ -26945,6 +27676,11 @@
                     </a:solidFill>
                   </a:tcPr>
                 </a:tc>
+                <a:extLst>
+                  <a:ext uri="{0D108BD9-81ED-4DB2-BD59-A6C34878D82A}">
+                    <a16:rowId xmlns:a16="http://schemas.microsoft.com/office/drawing/2014/main" val="10004"/>
+                  </a:ext>
+                </a:extLst>
               </a:tr>
               <a:tr h="457200">
                 <a:tc>
@@ -26952,7 +27688,7 @@
                     <a:bodyPr/>
                     <a:lstStyle/>
                     <a:p>
-                      <a:pPr eaLnBrk="0" indent="0" marL="0">
+                      <a:pPr marL="0" indent="0" eaLnBrk="0">
                         <a:buNone/>
                       </a:pPr>
                       <a:r>
@@ -27020,7 +27756,7 @@
                     <a:bodyPr/>
                     <a:lstStyle/>
                     <a:p>
-                      <a:pPr eaLnBrk="0" indent="0" marL="0">
+                      <a:pPr marL="0" indent="0" eaLnBrk="0">
                         <a:buNone/>
                       </a:pPr>
                       <a:r>
@@ -27083,6 +27819,11 @@
                     </a:solidFill>
                   </a:tcPr>
                 </a:tc>
+                <a:extLst>
+                  <a:ext uri="{0D108BD9-81ED-4DB2-BD59-A6C34878D82A}">
+                    <a16:rowId xmlns:a16="http://schemas.microsoft.com/office/drawing/2014/main" val="10005"/>
+                  </a:ext>
+                </a:extLst>
               </a:tr>
               <a:tr h="457200">
                 <a:tc>
@@ -27090,7 +27831,7 @@
                     <a:bodyPr/>
                     <a:lstStyle/>
                     <a:p>
-                      <a:pPr eaLnBrk="0" indent="0" marL="0">
+                      <a:pPr marL="0" indent="0" eaLnBrk="0">
                         <a:buNone/>
                       </a:pPr>
                       <a:r>
@@ -27158,7 +27899,7 @@
                     <a:bodyPr/>
                     <a:lstStyle/>
                     <a:p>
-                      <a:pPr eaLnBrk="0" indent="0" marL="0">
+                      <a:pPr marL="0" indent="0" eaLnBrk="0">
                         <a:buNone/>
                       </a:pPr>
                       <a:r>
@@ -27221,6 +27962,11 @@
                     </a:solidFill>
                   </a:tcPr>
                 </a:tc>
+                <a:extLst>
+                  <a:ext uri="{0D108BD9-81ED-4DB2-BD59-A6C34878D82A}">
+                    <a16:rowId xmlns:a16="http://schemas.microsoft.com/office/drawing/2014/main" val="10006"/>
+                  </a:ext>
+                </a:extLst>
               </a:tr>
               <a:tr h="457200">
                 <a:tc>
@@ -27228,7 +27974,7 @@
                     <a:bodyPr/>
                     <a:lstStyle/>
                     <a:p>
-                      <a:pPr eaLnBrk="0" indent="0" marL="0">
+                      <a:pPr marL="0" indent="0" eaLnBrk="0">
                         <a:buNone/>
                       </a:pPr>
                       <a:r>
@@ -27296,7 +28042,7 @@
                     <a:bodyPr/>
                     <a:lstStyle/>
                     <a:p>
-                      <a:pPr eaLnBrk="0" indent="0" marL="0">
+                      <a:pPr marL="0" indent="0" eaLnBrk="0">
                         <a:buNone/>
                       </a:pPr>
                       <a:r>
@@ -27359,6 +28105,11 @@
                     </a:solidFill>
                   </a:tcPr>
                 </a:tc>
+                <a:extLst>
+                  <a:ext uri="{0D108BD9-81ED-4DB2-BD59-A6C34878D82A}">
+                    <a16:rowId xmlns:a16="http://schemas.microsoft.com/office/drawing/2014/main" val="10007"/>
+                  </a:ext>
+                </a:extLst>
               </a:tr>
             </a:tbl>
           </a:graphicData>
@@ -27366,7 +28117,7 @@
       </p:graphicFrame>
       <p:sp>
         <p:nvSpPr>
-          <p:cNvPr id="7" name="Text 2"/>
+          <p:cNvPr id="3" name="Text 2"/>
           <p:cNvSpPr txBox="1"/>
           <p:nvPr/>
         </p:nvSpPr>
@@ -27385,7 +28136,7 @@
           <a:bodyPr wrap="square" lIns="0" tIns="0" rIns="0" bIns="0" rtlCol="0" anchor="t"/>
           <a:lstStyle/>
           <a:p>
-            <a:pPr eaLnBrk="0" indent="0" marL="0">
+            <a:pPr marL="0" indent="0" eaLnBrk="0">
               <a:buNone/>
             </a:pPr>
             <a:r>
@@ -27423,7 +28174,7 @@
           </a:prstGeom>
           <a:extLst>
             <a:ext uri="{C572A759-6A51-4108-AA02-DFA0A04FC94B}">
-              <ma14:wrappingTextBoxFlag xmlns:ma14="http://schemas.microsoft.com/office/mac/drawingml/2011/main" val="0"/>
+              <ma14:wrappingTextBoxFlag xmlns:ma14="http://schemas.microsoft.com/office/mac/drawingml/2011/main" xmlns="" val="0"/>
             </a:ext>
           </a:extLst>
         </p:spPr>
@@ -27442,9 +28193,9 @@
             </a:lvl1pPr>
           </a:lstStyle>
           <a:p>
-            <a:pPr eaLnBrk="0" algn="r"/>
+            <a:pPr algn="r" eaLnBrk="0"/>
             <a:fld id="{F7021451-1387-4CA6-816F-3879F97B5CBC}" type="slidenum">
-              <a:rPr b="0" lang="en-US"/>
+              <a:rPr lang="en-US" b="0"/>
               <a:t>6</a:t>
             </a:fld>
             <a:endParaRPr lang="en-US"/>
@@ -27499,7 +28250,7 @@
           </a:bodyPr>
           <a:lstStyle/>
           <a:p>
-            <a:pPr eaLnBrk="0" indent="0" marL="0">
+            <a:pPr marL="0" indent="0" eaLnBrk="0">
               <a:buNone/>
             </a:pPr>
             <a:r>
@@ -27540,9 +28291,27 @@
             <a:tbl>
               <a:tblPr/>
               <a:tblGrid>
-                <a:gridCol w="2926080"/>
-                <a:gridCol w="6309360"/>
-                <a:gridCol w="1828800"/>
+                <a:gridCol w="2926080">
+                  <a:extLst>
+                    <a:ext uri="{9D8B030D-6E8A-4147-A177-3AD203B41FA5}">
+                      <a16:colId xmlns:a16="http://schemas.microsoft.com/office/drawing/2014/main" val="20000"/>
+                    </a:ext>
+                  </a:extLst>
+                </a:gridCol>
+                <a:gridCol w="6309360">
+                  <a:extLst>
+                    <a:ext uri="{9D8B030D-6E8A-4147-A177-3AD203B41FA5}">
+                      <a16:colId xmlns:a16="http://schemas.microsoft.com/office/drawing/2014/main" val="20001"/>
+                    </a:ext>
+                  </a:extLst>
+                </a:gridCol>
+                <a:gridCol w="1828800">
+                  <a:extLst>
+                    <a:ext uri="{9D8B030D-6E8A-4147-A177-3AD203B41FA5}">
+                      <a16:colId xmlns:a16="http://schemas.microsoft.com/office/drawing/2014/main" val="20002"/>
+                    </a:ext>
+                  </a:extLst>
+                </a:gridCol>
               </a:tblGrid>
               <a:tr h="566928">
                 <a:tc>
@@ -27550,7 +28319,7 @@
                     <a:bodyPr/>
                     <a:lstStyle/>
                     <a:p>
-                      <a:pPr eaLnBrk="0" indent="0" marL="0">
+                      <a:pPr marL="0" indent="0" eaLnBrk="0">
                         <a:buNone/>
                       </a:pPr>
                       <a:r>
@@ -27618,7 +28387,7 @@
                     <a:bodyPr/>
                     <a:lstStyle/>
                     <a:p>
-                      <a:pPr eaLnBrk="0" indent="0" marL="0">
+                      <a:pPr marL="0" indent="0" eaLnBrk="0">
                         <a:buNone/>
                       </a:pPr>
                       <a:r>
@@ -27686,7 +28455,7 @@
                     <a:bodyPr/>
                     <a:lstStyle/>
                     <a:p>
-                      <a:pPr eaLnBrk="0" indent="0" marL="0">
+                      <a:pPr marL="0" indent="0" eaLnBrk="0">
                         <a:buNone/>
                       </a:pPr>
                       <a:r>
@@ -27749,6 +28518,11 @@
                     </a:solidFill>
                   </a:tcPr>
                 </a:tc>
+                <a:extLst>
+                  <a:ext uri="{0D108BD9-81ED-4DB2-BD59-A6C34878D82A}">
+                    <a16:rowId xmlns:a16="http://schemas.microsoft.com/office/drawing/2014/main" val="10000"/>
+                  </a:ext>
+                </a:extLst>
               </a:tr>
               <a:tr h="566928">
                 <a:tc>
@@ -27756,7 +28530,7 @@
                     <a:bodyPr/>
                     <a:lstStyle/>
                     <a:p>
-                      <a:pPr eaLnBrk="0" indent="0" marL="0">
+                      <a:pPr marL="0" indent="0" eaLnBrk="0">
                         <a:buNone/>
                       </a:pPr>
                       <a:r>
@@ -27824,7 +28598,7 @@
                     <a:bodyPr/>
                     <a:lstStyle/>
                     <a:p>
-                      <a:pPr eaLnBrk="0" indent="0" marL="0">
+                      <a:pPr marL="0" indent="0" eaLnBrk="0">
                         <a:buNone/>
                       </a:pPr>
                       <a:r>
@@ -27892,7 +28666,7 @@
                     <a:bodyPr/>
                     <a:lstStyle/>
                     <a:p>
-                      <a:pPr eaLnBrk="0" indent="0" marL="0">
+                      <a:pPr marL="0" indent="0" eaLnBrk="0">
                         <a:buNone/>
                       </a:pPr>
                       <a:r>
@@ -27955,6 +28729,11 @@
                     </a:solidFill>
                   </a:tcPr>
                 </a:tc>
+                <a:extLst>
+                  <a:ext uri="{0D108BD9-81ED-4DB2-BD59-A6C34878D82A}">
+                    <a16:rowId xmlns:a16="http://schemas.microsoft.com/office/drawing/2014/main" val="10001"/>
+                  </a:ext>
+                </a:extLst>
               </a:tr>
               <a:tr h="566928">
                 <a:tc>
@@ -27962,7 +28741,7 @@
                     <a:bodyPr/>
                     <a:lstStyle/>
                     <a:p>
-                      <a:pPr eaLnBrk="0" indent="0" marL="0">
+                      <a:pPr marL="0" indent="0" eaLnBrk="0">
                         <a:buNone/>
                       </a:pPr>
                       <a:r>
@@ -28030,7 +28809,7 @@
                     <a:bodyPr/>
                     <a:lstStyle/>
                     <a:p>
-                      <a:pPr eaLnBrk="0" indent="0" marL="0">
+                      <a:pPr marL="0" indent="0" eaLnBrk="0">
                         <a:buNone/>
                       </a:pPr>
                       <a:r>
@@ -28098,7 +28877,7 @@
                     <a:bodyPr/>
                     <a:lstStyle/>
                     <a:p>
-                      <a:pPr eaLnBrk="0" indent="0" marL="0">
+                      <a:pPr marL="0" indent="0" eaLnBrk="0">
                         <a:buNone/>
                       </a:pPr>
                       <a:r>
@@ -28161,6 +28940,11 @@
                     </a:solidFill>
                   </a:tcPr>
                 </a:tc>
+                <a:extLst>
+                  <a:ext uri="{0D108BD9-81ED-4DB2-BD59-A6C34878D82A}">
+                    <a16:rowId xmlns:a16="http://schemas.microsoft.com/office/drawing/2014/main" val="10002"/>
+                  </a:ext>
+                </a:extLst>
               </a:tr>
               <a:tr h="566928">
                 <a:tc>
@@ -28168,7 +28952,7 @@
                     <a:bodyPr/>
                     <a:lstStyle/>
                     <a:p>
-                      <a:pPr eaLnBrk="0" indent="0" marL="0">
+                      <a:pPr marL="0" indent="0" eaLnBrk="0">
                         <a:buNone/>
                       </a:pPr>
                       <a:r>
@@ -28236,7 +29020,7 @@
                     <a:bodyPr/>
                     <a:lstStyle/>
                     <a:p>
-                      <a:pPr eaLnBrk="0" indent="0" marL="0">
+                      <a:pPr marL="0" indent="0" eaLnBrk="0">
                         <a:buNone/>
                       </a:pPr>
                       <a:r>
@@ -28304,7 +29088,7 @@
                     <a:bodyPr/>
                     <a:lstStyle/>
                     <a:p>
-                      <a:pPr eaLnBrk="0" indent="0" marL="0">
+                      <a:pPr marL="0" indent="0" eaLnBrk="0">
                         <a:buNone/>
                       </a:pPr>
                       <a:r>
@@ -28367,6 +29151,11 @@
                     </a:solidFill>
                   </a:tcPr>
                 </a:tc>
+                <a:extLst>
+                  <a:ext uri="{0D108BD9-81ED-4DB2-BD59-A6C34878D82A}">
+                    <a16:rowId xmlns:a16="http://schemas.microsoft.com/office/drawing/2014/main" val="10003"/>
+                  </a:ext>
+                </a:extLst>
               </a:tr>
               <a:tr h="566928">
                 <a:tc>
@@ -28374,7 +29163,7 @@
                     <a:bodyPr/>
                     <a:lstStyle/>
                     <a:p>
-                      <a:pPr eaLnBrk="0" indent="0" marL="0">
+                      <a:pPr marL="0" indent="0" eaLnBrk="0">
                         <a:buNone/>
                       </a:pPr>
                       <a:r>
@@ -28442,7 +29231,7 @@
                     <a:bodyPr/>
                     <a:lstStyle/>
                     <a:p>
-                      <a:pPr eaLnBrk="0" indent="0" marL="0">
+                      <a:pPr marL="0" indent="0" eaLnBrk="0">
                         <a:buNone/>
                       </a:pPr>
                       <a:r>
@@ -28510,7 +29299,7 @@
                     <a:bodyPr/>
                     <a:lstStyle/>
                     <a:p>
-                      <a:pPr eaLnBrk="0" indent="0" marL="0">
+                      <a:pPr marL="0" indent="0" eaLnBrk="0">
                         <a:buNone/>
                       </a:pPr>
                       <a:r>
@@ -28573,6 +29362,11 @@
                     </a:solidFill>
                   </a:tcPr>
                 </a:tc>
+                <a:extLst>
+                  <a:ext uri="{0D108BD9-81ED-4DB2-BD59-A6C34878D82A}">
+                    <a16:rowId xmlns:a16="http://schemas.microsoft.com/office/drawing/2014/main" val="10004"/>
+                  </a:ext>
+                </a:extLst>
               </a:tr>
               <a:tr h="566928">
                 <a:tc>
@@ -28580,7 +29374,7 @@
                     <a:bodyPr/>
                     <a:lstStyle/>
                     <a:p>
-                      <a:pPr eaLnBrk="0" indent="0" marL="0">
+                      <a:pPr marL="0" indent="0" eaLnBrk="0">
                         <a:buNone/>
                       </a:pPr>
                       <a:r>
@@ -28648,7 +29442,7 @@
                     <a:bodyPr/>
                     <a:lstStyle/>
                     <a:p>
-                      <a:pPr eaLnBrk="0" indent="0" marL="0">
+                      <a:pPr marL="0" indent="0" eaLnBrk="0">
                         <a:buNone/>
                       </a:pPr>
                       <a:r>
@@ -28716,7 +29510,7 @@
                     <a:bodyPr/>
                     <a:lstStyle/>
                     <a:p>
-                      <a:pPr eaLnBrk="0" indent="0" marL="0">
+                      <a:pPr marL="0" indent="0" eaLnBrk="0">
                         <a:buNone/>
                       </a:pPr>
                       <a:r>
@@ -28779,6 +29573,11 @@
                     </a:solidFill>
                   </a:tcPr>
                 </a:tc>
+                <a:extLst>
+                  <a:ext uri="{0D108BD9-81ED-4DB2-BD59-A6C34878D82A}">
+                    <a16:rowId xmlns:a16="http://schemas.microsoft.com/office/drawing/2014/main" val="10005"/>
+                  </a:ext>
+                </a:extLst>
               </a:tr>
             </a:tbl>
           </a:graphicData>
@@ -28810,6 +29609,13 @@
             <a:prstDash val="solid"/>
           </a:ln>
         </p:spPr>
+        <p:txBody>
+          <a:bodyPr/>
+          <a:lstStyle/>
+          <a:p>
+            <a:endParaRPr lang="ko-KR" altLang="en-US"/>
+          </a:p>
+        </p:txBody>
       </p:sp>
       <p:sp>
         <p:nvSpPr>
@@ -28832,7 +29638,7 @@
           <a:bodyPr wrap="square" lIns="0" tIns="0" rIns="0" bIns="0" rtlCol="0" anchor="t"/>
           <a:lstStyle/>
           <a:p>
-            <a:pPr eaLnBrk="0" indent="0" marL="0">
+            <a:pPr marL="0" indent="0" eaLnBrk="0">
               <a:buNone/>
             </a:pPr>
             <a:r>
@@ -28871,7 +29677,7 @@
           <a:bodyPr wrap="square" lIns="0" tIns="0" rIns="0" bIns="0" rtlCol="0" anchor="t"/>
           <a:lstStyle/>
           <a:p>
-            <a:pPr eaLnBrk="0" indent="0" marL="0">
+            <a:pPr marL="0" indent="0" eaLnBrk="0">
               <a:buNone/>
             </a:pPr>
             <a:r>
@@ -28909,7 +29715,7 @@
           </a:prstGeom>
           <a:extLst>
             <a:ext uri="{C572A759-6A51-4108-AA02-DFA0A04FC94B}">
-              <ma14:wrappingTextBoxFlag xmlns:ma14="http://schemas.microsoft.com/office/mac/drawingml/2011/main" val="0"/>
+              <ma14:wrappingTextBoxFlag xmlns:ma14="http://schemas.microsoft.com/office/mac/drawingml/2011/main" xmlns="" val="0"/>
             </a:ext>
           </a:extLst>
         </p:spPr>
@@ -28928,9 +29734,9 @@
             </a:lvl1pPr>
           </a:lstStyle>
           <a:p>
-            <a:pPr eaLnBrk="0" algn="r"/>
+            <a:pPr algn="r" eaLnBrk="0"/>
             <a:fld id="{F7021451-1387-4CA6-816F-3879F97B5CBC}" type="slidenum">
-              <a:rPr b="0" lang="en-US"/>
+              <a:rPr lang="en-US" b="0"/>
               <a:t>7</a:t>
             </a:fld>
             <a:endParaRPr lang="en-US"/>
@@ -28985,7 +29791,7 @@
           </a:bodyPr>
           <a:lstStyle/>
           <a:p>
-            <a:pPr eaLnBrk="0" indent="0" marL="0">
+            <a:pPr marL="0" indent="0" eaLnBrk="0">
               <a:buNone/>
             </a:pPr>
             <a:r>
@@ -29026,10 +29832,34 @@
             <a:tbl>
               <a:tblPr/>
               <a:tblGrid>
-                <a:gridCol w="1737360"/>
-                <a:gridCol w="3017520"/>
-                <a:gridCol w="3840480"/>
-                <a:gridCol w="2468880"/>
+                <a:gridCol w="1737360">
+                  <a:extLst>
+                    <a:ext uri="{9D8B030D-6E8A-4147-A177-3AD203B41FA5}">
+                      <a16:colId xmlns:a16="http://schemas.microsoft.com/office/drawing/2014/main" val="20000"/>
+                    </a:ext>
+                  </a:extLst>
+                </a:gridCol>
+                <a:gridCol w="3017520">
+                  <a:extLst>
+                    <a:ext uri="{9D8B030D-6E8A-4147-A177-3AD203B41FA5}">
+                      <a16:colId xmlns:a16="http://schemas.microsoft.com/office/drawing/2014/main" val="20001"/>
+                    </a:ext>
+                  </a:extLst>
+                </a:gridCol>
+                <a:gridCol w="3840480">
+                  <a:extLst>
+                    <a:ext uri="{9D8B030D-6E8A-4147-A177-3AD203B41FA5}">
+                      <a16:colId xmlns:a16="http://schemas.microsoft.com/office/drawing/2014/main" val="20002"/>
+                    </a:ext>
+                  </a:extLst>
+                </a:gridCol>
+                <a:gridCol w="2468880">
+                  <a:extLst>
+                    <a:ext uri="{9D8B030D-6E8A-4147-A177-3AD203B41FA5}">
+                      <a16:colId xmlns:a16="http://schemas.microsoft.com/office/drawing/2014/main" val="20003"/>
+                    </a:ext>
+                  </a:extLst>
+                </a:gridCol>
               </a:tblGrid>
               <a:tr h="640080">
                 <a:tc>
@@ -29037,7 +29867,7 @@
                     <a:bodyPr/>
                     <a:lstStyle/>
                     <a:p>
-                      <a:pPr eaLnBrk="0" indent="0" marL="0">
+                      <a:pPr marL="0" indent="0" eaLnBrk="0">
                         <a:buNone/>
                       </a:pPr>
                       <a:r>
@@ -29105,7 +29935,7 @@
                     <a:bodyPr/>
                     <a:lstStyle/>
                     <a:p>
-                      <a:pPr eaLnBrk="0" indent="0" marL="0">
+                      <a:pPr marL="0" indent="0" eaLnBrk="0">
                         <a:buNone/>
                       </a:pPr>
                       <a:r>
@@ -29173,7 +30003,7 @@
                     <a:bodyPr/>
                     <a:lstStyle/>
                     <a:p>
-                      <a:pPr eaLnBrk="0" indent="0" marL="0">
+                      <a:pPr marL="0" indent="0" eaLnBrk="0">
                         <a:buNone/>
                       </a:pPr>
                       <a:r>
@@ -29241,7 +30071,7 @@
                     <a:bodyPr/>
                     <a:lstStyle/>
                     <a:p>
-                      <a:pPr eaLnBrk="0" indent="0" marL="0">
+                      <a:pPr marL="0" indent="0" eaLnBrk="0">
                         <a:buNone/>
                       </a:pPr>
                       <a:r>
@@ -29304,6 +30134,11 @@
                     </a:solidFill>
                   </a:tcPr>
                 </a:tc>
+                <a:extLst>
+                  <a:ext uri="{0D108BD9-81ED-4DB2-BD59-A6C34878D82A}">
+                    <a16:rowId xmlns:a16="http://schemas.microsoft.com/office/drawing/2014/main" val="10000"/>
+                  </a:ext>
+                </a:extLst>
               </a:tr>
               <a:tr h="640080">
                 <a:tc>
@@ -29311,7 +30146,7 @@
                     <a:bodyPr/>
                     <a:lstStyle/>
                     <a:p>
-                      <a:pPr eaLnBrk="0" indent="0" marL="0">
+                      <a:pPr marL="0" indent="0" eaLnBrk="0">
                         <a:buNone/>
                       </a:pPr>
                       <a:r>
@@ -29379,7 +30214,7 @@
                     <a:bodyPr/>
                     <a:lstStyle/>
                     <a:p>
-                      <a:pPr eaLnBrk="0" indent="0" marL="0">
+                      <a:pPr marL="0" indent="0" eaLnBrk="0">
                         <a:buNone/>
                       </a:pPr>
                       <a:r>
@@ -29447,7 +30282,7 @@
                     <a:bodyPr/>
                     <a:lstStyle/>
                     <a:p>
-                      <a:pPr eaLnBrk="0" indent="0" marL="0">
+                      <a:pPr marL="0" indent="0" eaLnBrk="0">
                         <a:buNone/>
                       </a:pPr>
                       <a:r>
@@ -29515,7 +30350,7 @@
                     <a:bodyPr/>
                     <a:lstStyle/>
                     <a:p>
-                      <a:pPr eaLnBrk="0" indent="0" marL="0">
+                      <a:pPr marL="0" indent="0" eaLnBrk="0">
                         <a:buNone/>
                       </a:pPr>
                       <a:r>
@@ -29578,6 +30413,11 @@
                     </a:solidFill>
                   </a:tcPr>
                 </a:tc>
+                <a:extLst>
+                  <a:ext uri="{0D108BD9-81ED-4DB2-BD59-A6C34878D82A}">
+                    <a16:rowId xmlns:a16="http://schemas.microsoft.com/office/drawing/2014/main" val="10001"/>
+                  </a:ext>
+                </a:extLst>
               </a:tr>
               <a:tr h="640080">
                 <a:tc>
@@ -29585,7 +30425,7 @@
                     <a:bodyPr/>
                     <a:lstStyle/>
                     <a:p>
-                      <a:pPr eaLnBrk="0" indent="0" marL="0">
+                      <a:pPr marL="0" indent="0" eaLnBrk="0">
                         <a:buNone/>
                       </a:pPr>
                       <a:r>
@@ -29653,7 +30493,7 @@
                     <a:bodyPr/>
                     <a:lstStyle/>
                     <a:p>
-                      <a:pPr eaLnBrk="0" indent="0" marL="0">
+                      <a:pPr marL="0" indent="0" eaLnBrk="0">
                         <a:buNone/>
                       </a:pPr>
                       <a:r>
@@ -29721,7 +30561,7 @@
                     <a:bodyPr/>
                     <a:lstStyle/>
                     <a:p>
-                      <a:pPr eaLnBrk="0" indent="0" marL="0">
+                      <a:pPr marL="0" indent="0" eaLnBrk="0">
                         <a:buNone/>
                       </a:pPr>
                       <a:r>
@@ -29789,7 +30629,7 @@
                     <a:bodyPr/>
                     <a:lstStyle/>
                     <a:p>
-                      <a:pPr eaLnBrk="0" indent="0" marL="0">
+                      <a:pPr marL="0" indent="0" eaLnBrk="0">
                         <a:buNone/>
                       </a:pPr>
                       <a:r>
@@ -29852,6 +30692,11 @@
                     </a:solidFill>
                   </a:tcPr>
                 </a:tc>
+                <a:extLst>
+                  <a:ext uri="{0D108BD9-81ED-4DB2-BD59-A6C34878D82A}">
+                    <a16:rowId xmlns:a16="http://schemas.microsoft.com/office/drawing/2014/main" val="10002"/>
+                  </a:ext>
+                </a:extLst>
               </a:tr>
               <a:tr h="640080">
                 <a:tc>
@@ -29859,7 +30704,7 @@
                     <a:bodyPr/>
                     <a:lstStyle/>
                     <a:p>
-                      <a:pPr eaLnBrk="0" indent="0" marL="0">
+                      <a:pPr marL="0" indent="0" eaLnBrk="0">
                         <a:buNone/>
                       </a:pPr>
                       <a:r>
@@ -29927,7 +30772,7 @@
                     <a:bodyPr/>
                     <a:lstStyle/>
                     <a:p>
-                      <a:pPr eaLnBrk="0" indent="0" marL="0">
+                      <a:pPr marL="0" indent="0" eaLnBrk="0">
                         <a:buNone/>
                       </a:pPr>
                       <a:r>
@@ -29995,7 +30840,7 @@
                     <a:bodyPr/>
                     <a:lstStyle/>
                     <a:p>
-                      <a:pPr eaLnBrk="0" indent="0" marL="0">
+                      <a:pPr marL="0" indent="0" eaLnBrk="0">
                         <a:buNone/>
                       </a:pPr>
                       <a:r>
@@ -30063,7 +30908,7 @@
                     <a:bodyPr/>
                     <a:lstStyle/>
                     <a:p>
-                      <a:pPr eaLnBrk="0" indent="0" marL="0">
+                      <a:pPr marL="0" indent="0" eaLnBrk="0">
                         <a:buNone/>
                       </a:pPr>
                       <a:r>
@@ -30126,6 +30971,11 @@
                     </a:solidFill>
                   </a:tcPr>
                 </a:tc>
+                <a:extLst>
+                  <a:ext uri="{0D108BD9-81ED-4DB2-BD59-A6C34878D82A}">
+                    <a16:rowId xmlns:a16="http://schemas.microsoft.com/office/drawing/2014/main" val="10003"/>
+                  </a:ext>
+                </a:extLst>
               </a:tr>
               <a:tr h="640080">
                 <a:tc>
@@ -30133,7 +30983,7 @@
                     <a:bodyPr/>
                     <a:lstStyle/>
                     <a:p>
-                      <a:pPr eaLnBrk="0" indent="0" marL="0">
+                      <a:pPr marL="0" indent="0" eaLnBrk="0">
                         <a:buNone/>
                       </a:pPr>
                       <a:r>
@@ -30201,7 +31051,7 @@
                     <a:bodyPr/>
                     <a:lstStyle/>
                     <a:p>
-                      <a:pPr eaLnBrk="0" indent="0" marL="0">
+                      <a:pPr marL="0" indent="0" eaLnBrk="0">
                         <a:buNone/>
                       </a:pPr>
                       <a:r>
@@ -30269,7 +31119,7 @@
                     <a:bodyPr/>
                     <a:lstStyle/>
                     <a:p>
-                      <a:pPr eaLnBrk="0" indent="0" marL="0">
+                      <a:pPr marL="0" indent="0" eaLnBrk="0">
                         <a:buNone/>
                       </a:pPr>
                       <a:r>
@@ -30337,7 +31187,7 @@
                     <a:bodyPr/>
                     <a:lstStyle/>
                     <a:p>
-                      <a:pPr eaLnBrk="0" indent="0" marL="0">
+                      <a:pPr marL="0" indent="0" eaLnBrk="0">
                         <a:buNone/>
                       </a:pPr>
                       <a:r>
@@ -30400,6 +31250,11 @@
                     </a:solidFill>
                   </a:tcPr>
                 </a:tc>
+                <a:extLst>
+                  <a:ext uri="{0D108BD9-81ED-4DB2-BD59-A6C34878D82A}">
+                    <a16:rowId xmlns:a16="http://schemas.microsoft.com/office/drawing/2014/main" val="10004"/>
+                  </a:ext>
+                </a:extLst>
               </a:tr>
             </a:tbl>
           </a:graphicData>
@@ -30431,6 +31286,13 @@
             <a:prstDash val="solid"/>
           </a:ln>
         </p:spPr>
+        <p:txBody>
+          <a:bodyPr/>
+          <a:lstStyle/>
+          <a:p>
+            <a:endParaRPr lang="ko-KR" altLang="en-US"/>
+          </a:p>
+        </p:txBody>
       </p:sp>
       <p:sp>
         <p:nvSpPr>
@@ -30453,7 +31315,7 @@
           <a:bodyPr wrap="square" lIns="0" tIns="0" rIns="0" bIns="0" rtlCol="0" anchor="t"/>
           <a:lstStyle/>
           <a:p>
-            <a:pPr eaLnBrk="0" indent="0" marL="0">
+            <a:pPr marL="0" indent="0" eaLnBrk="0">
               <a:buNone/>
             </a:pPr>
             <a:r>
@@ -30492,7 +31354,7 @@
           <a:bodyPr wrap="square" lIns="0" tIns="0" rIns="0" bIns="0" rtlCol="0" anchor="t"/>
           <a:lstStyle/>
           <a:p>
-            <a:pPr eaLnBrk="0" indent="0" marL="0">
+            <a:pPr marL="0" indent="0" eaLnBrk="0">
               <a:buNone/>
             </a:pPr>
             <a:r>
@@ -30536,10 +31398,17 @@
             <a:prstDash val="solid"/>
           </a:ln>
         </p:spPr>
+        <p:txBody>
+          <a:bodyPr/>
+          <a:lstStyle/>
+          <a:p>
+            <a:endParaRPr lang="ko-KR" altLang="en-US"/>
+          </a:p>
+        </p:txBody>
       </p:sp>
       <p:sp>
         <p:nvSpPr>
-          <p:cNvPr id="9" name="Text 5"/>
+          <p:cNvPr id="3" name="Text 5"/>
           <p:cNvSpPr txBox="1"/>
           <p:nvPr/>
         </p:nvSpPr>
@@ -30558,7 +31427,7 @@
           <a:bodyPr wrap="square" lIns="0" tIns="0" rIns="0" bIns="0" rtlCol="0" anchor="t"/>
           <a:lstStyle/>
           <a:p>
-            <a:pPr eaLnBrk="0" indent="0" marL="0">
+            <a:pPr marL="0" indent="0" eaLnBrk="0">
               <a:buNone/>
             </a:pPr>
             <a:r>
@@ -30597,7 +31466,7 @@
           <a:bodyPr wrap="square" lIns="0" tIns="0" rIns="0" bIns="0" rtlCol="0" anchor="t"/>
           <a:lstStyle/>
           <a:p>
-            <a:pPr eaLnBrk="0" indent="0" marL="0">
+            <a:pPr marL="0" indent="0" eaLnBrk="0">
               <a:buNone/>
             </a:pPr>
             <a:r>
@@ -30635,7 +31504,7 @@
           </a:prstGeom>
           <a:extLst>
             <a:ext uri="{C572A759-6A51-4108-AA02-DFA0A04FC94B}">
-              <ma14:wrappingTextBoxFlag xmlns:ma14="http://schemas.microsoft.com/office/mac/drawingml/2011/main" val="0"/>
+              <ma14:wrappingTextBoxFlag xmlns:ma14="http://schemas.microsoft.com/office/mac/drawingml/2011/main" xmlns="" val="0"/>
             </a:ext>
           </a:extLst>
         </p:spPr>
@@ -30654,9 +31523,9 @@
             </a:lvl1pPr>
           </a:lstStyle>
           <a:p>
-            <a:pPr eaLnBrk="0" algn="r"/>
+            <a:pPr algn="r" eaLnBrk="0"/>
             <a:fld id="{F7021451-1387-4CA6-816F-3879F97B5CBC}" type="slidenum">
-              <a:rPr b="0" lang="en-US"/>
+              <a:rPr lang="en-US" b="0"/>
               <a:t>8</a:t>
             </a:fld>
             <a:endParaRPr lang="en-US"/>
@@ -30711,7 +31580,7 @@
           </a:bodyPr>
           <a:lstStyle/>
           <a:p>
-            <a:pPr eaLnBrk="0" indent="0" marL="0">
+            <a:pPr marL="0" indent="0" eaLnBrk="0">
               <a:buNone/>
             </a:pPr>
             <a:r>
@@ -30752,9 +31621,27 @@
             <a:tbl>
               <a:tblPr/>
               <a:tblGrid>
-                <a:gridCol w="3840480"/>
-                <a:gridCol w="1645920"/>
-                <a:gridCol w="2011680"/>
+                <a:gridCol w="3840480">
+                  <a:extLst>
+                    <a:ext uri="{9D8B030D-6E8A-4147-A177-3AD203B41FA5}">
+                      <a16:colId xmlns:a16="http://schemas.microsoft.com/office/drawing/2014/main" val="20000"/>
+                    </a:ext>
+                  </a:extLst>
+                </a:gridCol>
+                <a:gridCol w="1645920">
+                  <a:extLst>
+                    <a:ext uri="{9D8B030D-6E8A-4147-A177-3AD203B41FA5}">
+                      <a16:colId xmlns:a16="http://schemas.microsoft.com/office/drawing/2014/main" val="20001"/>
+                    </a:ext>
+                  </a:extLst>
+                </a:gridCol>
+                <a:gridCol w="2011680">
+                  <a:extLst>
+                    <a:ext uri="{9D8B030D-6E8A-4147-A177-3AD203B41FA5}">
+                      <a16:colId xmlns:a16="http://schemas.microsoft.com/office/drawing/2014/main" val="20002"/>
+                    </a:ext>
+                  </a:extLst>
+                </a:gridCol>
               </a:tblGrid>
               <a:tr h="512064">
                 <a:tc>
@@ -30762,7 +31649,7 @@
                     <a:bodyPr/>
                     <a:lstStyle/>
                     <a:p>
-                      <a:pPr eaLnBrk="0" indent="0" marL="0">
+                      <a:pPr marL="0" indent="0" eaLnBrk="0">
                         <a:buNone/>
                       </a:pPr>
                       <a:endParaRPr lang="en-US" sz="1300" dirty="0">
@@ -30819,7 +31706,7 @@
                     <a:bodyPr/>
                     <a:lstStyle/>
                     <a:p>
-                      <a:pPr eaLnBrk="0" indent="0" marL="0">
+                      <a:pPr marL="0" indent="0" eaLnBrk="0">
                         <a:buNone/>
                       </a:pPr>
                       <a:r>
@@ -30887,7 +31774,7 @@
                     <a:bodyPr/>
                     <a:lstStyle/>
                     <a:p>
-                      <a:pPr eaLnBrk="0" indent="0" marL="0">
+                      <a:pPr marL="0" indent="0" eaLnBrk="0">
                         <a:buNone/>
                       </a:pPr>
                       <a:r>
@@ -30950,6 +31837,11 @@
                     </a:solidFill>
                   </a:tcPr>
                 </a:tc>
+                <a:extLst>
+                  <a:ext uri="{0D108BD9-81ED-4DB2-BD59-A6C34878D82A}">
+                    <a16:rowId xmlns:a16="http://schemas.microsoft.com/office/drawing/2014/main" val="10000"/>
+                  </a:ext>
+                </a:extLst>
               </a:tr>
               <a:tr h="512064">
                 <a:tc>
@@ -30957,7 +31849,7 @@
                     <a:bodyPr/>
                     <a:lstStyle/>
                     <a:p>
-                      <a:pPr eaLnBrk="0" indent="0" marL="0">
+                      <a:pPr marL="0" indent="0" eaLnBrk="0">
                         <a:buNone/>
                       </a:pPr>
                       <a:r>
@@ -31025,7 +31917,7 @@
                     <a:bodyPr/>
                     <a:lstStyle/>
                     <a:p>
-                      <a:pPr eaLnBrk="0" indent="0" marL="0">
+                      <a:pPr marL="0" indent="0" eaLnBrk="0">
                         <a:buNone/>
                       </a:pPr>
                       <a:r>
@@ -31093,7 +31985,7 @@
                     <a:bodyPr/>
                     <a:lstStyle/>
                     <a:p>
-                      <a:pPr eaLnBrk="0" indent="0" marL="0">
+                      <a:pPr marL="0" indent="0" eaLnBrk="0">
                         <a:buNone/>
                       </a:pPr>
                       <a:r>
@@ -31156,6 +32048,11 @@
                     </a:solidFill>
                   </a:tcPr>
                 </a:tc>
+                <a:extLst>
+                  <a:ext uri="{0D108BD9-81ED-4DB2-BD59-A6C34878D82A}">
+                    <a16:rowId xmlns:a16="http://schemas.microsoft.com/office/drawing/2014/main" val="10001"/>
+                  </a:ext>
+                </a:extLst>
               </a:tr>
               <a:tr h="512064">
                 <a:tc>
@@ -31163,7 +32060,7 @@
                     <a:bodyPr/>
                     <a:lstStyle/>
                     <a:p>
-                      <a:pPr eaLnBrk="0" indent="0" marL="0">
+                      <a:pPr marL="0" indent="0" eaLnBrk="0">
                         <a:buNone/>
                       </a:pPr>
                       <a:r>
@@ -31231,7 +32128,7 @@
                     <a:bodyPr/>
                     <a:lstStyle/>
                     <a:p>
-                      <a:pPr eaLnBrk="0" indent="0" marL="0">
+                      <a:pPr marL="0" indent="0" eaLnBrk="0">
                         <a:buNone/>
                       </a:pPr>
                       <a:r>
@@ -31299,7 +32196,7 @@
                     <a:bodyPr/>
                     <a:lstStyle/>
                     <a:p>
-                      <a:pPr eaLnBrk="0" indent="0" marL="0">
+                      <a:pPr marL="0" indent="0" eaLnBrk="0">
                         <a:buNone/>
                       </a:pPr>
                       <a:r>
@@ -31362,6 +32259,11 @@
                     </a:solidFill>
                   </a:tcPr>
                 </a:tc>
+                <a:extLst>
+                  <a:ext uri="{0D108BD9-81ED-4DB2-BD59-A6C34878D82A}">
+                    <a16:rowId xmlns:a16="http://schemas.microsoft.com/office/drawing/2014/main" val="10002"/>
+                  </a:ext>
+                </a:extLst>
               </a:tr>
               <a:tr h="512064">
                 <a:tc>
@@ -31369,7 +32271,7 @@
                     <a:bodyPr/>
                     <a:lstStyle/>
                     <a:p>
-                      <a:pPr eaLnBrk="0" indent="0" marL="0">
+                      <a:pPr marL="0" indent="0" eaLnBrk="0">
                         <a:buNone/>
                       </a:pPr>
                       <a:r>
@@ -31437,7 +32339,7 @@
                     <a:bodyPr/>
                     <a:lstStyle/>
                     <a:p>
-                      <a:pPr eaLnBrk="0" indent="0" marL="0">
+                      <a:pPr marL="0" indent="0" eaLnBrk="0">
                         <a:buNone/>
                       </a:pPr>
                       <a:r>
@@ -31505,7 +32407,7 @@
                     <a:bodyPr/>
                     <a:lstStyle/>
                     <a:p>
-                      <a:pPr eaLnBrk="0" indent="0" marL="0">
+                      <a:pPr marL="0" indent="0" eaLnBrk="0">
                         <a:buNone/>
                       </a:pPr>
                       <a:r>
@@ -31568,6 +32470,11 @@
                     </a:solidFill>
                   </a:tcPr>
                 </a:tc>
+                <a:extLst>
+                  <a:ext uri="{0D108BD9-81ED-4DB2-BD59-A6C34878D82A}">
+                    <a16:rowId xmlns:a16="http://schemas.microsoft.com/office/drawing/2014/main" val="10003"/>
+                  </a:ext>
+                </a:extLst>
               </a:tr>
               <a:tr h="512064">
                 <a:tc>
@@ -31575,7 +32482,7 @@
                     <a:bodyPr/>
                     <a:lstStyle/>
                     <a:p>
-                      <a:pPr eaLnBrk="0" indent="0" marL="0">
+                      <a:pPr marL="0" indent="0" eaLnBrk="0">
                         <a:buNone/>
                       </a:pPr>
                       <a:r>
@@ -31643,7 +32550,7 @@
                     <a:bodyPr/>
                     <a:lstStyle/>
                     <a:p>
-                      <a:pPr eaLnBrk="0" indent="0" marL="0">
+                      <a:pPr marL="0" indent="0" eaLnBrk="0">
                         <a:buNone/>
                       </a:pPr>
                       <a:r>
@@ -31711,7 +32618,7 @@
                     <a:bodyPr/>
                     <a:lstStyle/>
                     <a:p>
-                      <a:pPr eaLnBrk="0" indent="0" marL="0">
+                      <a:pPr marL="0" indent="0" eaLnBrk="0">
                         <a:buNone/>
                       </a:pPr>
                       <a:r>
@@ -31774,6 +32681,11 @@
                     </a:solidFill>
                   </a:tcPr>
                 </a:tc>
+                <a:extLst>
+                  <a:ext uri="{0D108BD9-81ED-4DB2-BD59-A6C34878D82A}">
+                    <a16:rowId xmlns:a16="http://schemas.microsoft.com/office/drawing/2014/main" val="10004"/>
+                  </a:ext>
+                </a:extLst>
               </a:tr>
               <a:tr h="512064">
                 <a:tc>
@@ -31781,7 +32693,7 @@
                     <a:bodyPr/>
                     <a:lstStyle/>
                     <a:p>
-                      <a:pPr eaLnBrk="0" indent="0" marL="0">
+                      <a:pPr marL="0" indent="0" eaLnBrk="0">
                         <a:buNone/>
                       </a:pPr>
                       <a:r>
@@ -31849,7 +32761,7 @@
                     <a:bodyPr/>
                     <a:lstStyle/>
                     <a:p>
-                      <a:pPr eaLnBrk="0" indent="0" marL="0">
+                      <a:pPr marL="0" indent="0" eaLnBrk="0">
                         <a:buNone/>
                       </a:pPr>
                       <a:r>
@@ -31917,7 +32829,7 @@
                     <a:bodyPr/>
                     <a:lstStyle/>
                     <a:p>
-                      <a:pPr eaLnBrk="0" indent="0" marL="0">
+                      <a:pPr marL="0" indent="0" eaLnBrk="0">
                         <a:buNone/>
                       </a:pPr>
                       <a:r>
@@ -31980,6 +32892,11 @@
                     </a:solidFill>
                   </a:tcPr>
                 </a:tc>
+                <a:extLst>
+                  <a:ext uri="{0D108BD9-81ED-4DB2-BD59-A6C34878D82A}">
+                    <a16:rowId xmlns:a16="http://schemas.microsoft.com/office/drawing/2014/main" val="10005"/>
+                  </a:ext>
+                </a:extLst>
               </a:tr>
             </a:tbl>
           </a:graphicData>
@@ -32011,6 +32928,13 @@
             <a:prstDash val="solid"/>
           </a:ln>
         </p:spPr>
+        <p:txBody>
+          <a:bodyPr/>
+          <a:lstStyle/>
+          <a:p>
+            <a:endParaRPr lang="ko-KR" altLang="en-US"/>
+          </a:p>
+        </p:txBody>
       </p:sp>
       <p:sp>
         <p:nvSpPr>
@@ -32033,7 +32957,7 @@
           <a:bodyPr wrap="square" lIns="0" tIns="0" rIns="0" bIns="0" rtlCol="0" anchor="t"/>
           <a:lstStyle/>
           <a:p>
-            <a:pPr eaLnBrk="0" indent="0" marL="0">
+            <a:pPr marL="0" indent="0" eaLnBrk="0">
               <a:buNone/>
             </a:pPr>
             <a:r>
@@ -32072,7 +32996,7 @@
           <a:bodyPr wrap="square" lIns="0" tIns="0" rIns="0" bIns="0" rtlCol="0" anchor="t"/>
           <a:lstStyle/>
           <a:p>
-            <a:pPr eaLnBrk="0" indent="0" marL="0">
+            <a:pPr marL="0" indent="0" eaLnBrk="0">
               <a:buNone/>
             </a:pPr>
             <a:r>
@@ -32116,6 +33040,13 @@
             <a:prstDash val="solid"/>
           </a:ln>
         </p:spPr>
+        <p:txBody>
+          <a:bodyPr/>
+          <a:lstStyle/>
+          <a:p>
+            <a:endParaRPr lang="ko-KR" altLang="en-US"/>
+          </a:p>
+        </p:txBody>
       </p:sp>
       <p:sp>
         <p:nvSpPr>
@@ -32138,7 +33069,7 @@
           <a:bodyPr wrap="square" lIns="0" tIns="0" rIns="0" bIns="0" rtlCol="0" anchor="t"/>
           <a:lstStyle/>
           <a:p>
-            <a:pPr eaLnBrk="0" indent="0" marL="0">
+            <a:pPr marL="0" indent="0" eaLnBrk="0">
               <a:buNone/>
             </a:pPr>
             <a:r>
@@ -32158,7 +33089,7 @@
       </p:sp>
       <p:sp>
         <p:nvSpPr>
-          <p:cNvPr id="10" name="Text 6"/>
+          <p:cNvPr id="3" name="Text 6"/>
           <p:cNvSpPr txBox="1"/>
           <p:nvPr/>
         </p:nvSpPr>
@@ -32177,7 +33108,7 @@
           <a:bodyPr wrap="square" lIns="0" tIns="0" rIns="0" bIns="0" rtlCol="0" anchor="t"/>
           <a:lstStyle/>
           <a:p>
-            <a:pPr eaLnBrk="0" indent="0" marL="0">
+            <a:pPr marL="0" indent="0" eaLnBrk="0">
               <a:buNone/>
             </a:pPr>
             <a:r>
@@ -32221,6 +33152,13 @@
             <a:prstDash val="solid"/>
           </a:ln>
         </p:spPr>
+        <p:txBody>
+          <a:bodyPr/>
+          <a:lstStyle/>
+          <a:p>
+            <a:endParaRPr lang="ko-KR" altLang="en-US"/>
+          </a:p>
+        </p:txBody>
       </p:sp>
       <p:sp>
         <p:nvSpPr>
@@ -32243,7 +33181,7 @@
           <a:bodyPr wrap="square" lIns="0" tIns="0" rIns="0" bIns="0" rtlCol="0" anchor="t"/>
           <a:lstStyle/>
           <a:p>
-            <a:pPr eaLnBrk="0" indent="0" marL="0">
+            <a:pPr marL="0" indent="0" eaLnBrk="0">
               <a:buNone/>
             </a:pPr>
             <a:r>
@@ -32282,7 +33220,7 @@
           <a:bodyPr wrap="square" lIns="0" tIns="0" rIns="0" bIns="0" rtlCol="0" anchor="t"/>
           <a:lstStyle/>
           <a:p>
-            <a:pPr eaLnBrk="0" indent="0" marL="0">
+            <a:pPr marL="0" indent="0" eaLnBrk="0">
               <a:buNone/>
             </a:pPr>
             <a:r>
@@ -32320,7 +33258,7 @@
           </a:prstGeom>
           <a:extLst>
             <a:ext uri="{C572A759-6A51-4108-AA02-DFA0A04FC94B}">
-              <ma14:wrappingTextBoxFlag xmlns:ma14="http://schemas.microsoft.com/office/mac/drawingml/2011/main" val="0"/>
+              <ma14:wrappingTextBoxFlag xmlns:ma14="http://schemas.microsoft.com/office/mac/drawingml/2011/main" xmlns="" val="0"/>
             </a:ext>
           </a:extLst>
         </p:spPr>
@@ -32339,9 +33277,9 @@
             </a:lvl1pPr>
           </a:lstStyle>
           <a:p>
-            <a:pPr eaLnBrk="0" algn="r"/>
+            <a:pPr algn="r" eaLnBrk="0"/>
             <a:fld id="{F7021451-1387-4CA6-816F-3879F97B5CBC}" type="slidenum">
-              <a:rPr b="0" lang="en-US"/>
+              <a:rPr lang="en-US" b="0"/>
               <a:t>9</a:t>
             </a:fld>
             <a:endParaRPr lang="en-US"/>
@@ -32649,4 +33587,319 @@
     </a:ext>
   </a:extLst>
 </a:theme>
+</file>
+
+<file path=ppt/theme/theme2.xml><?xml version="1.0" encoding="utf-8"?>
+<a:theme xmlns:a="http://schemas.openxmlformats.org/drawingml/2006/main" name="Office 테마">
+  <a:themeElements>
+    <a:clrScheme name="Office">
+      <a:dk1>
+        <a:sysClr val="windowText" lastClr="000000"/>
+      </a:dk1>
+      <a:lt1>
+        <a:sysClr val="window" lastClr="FFFFFF"/>
+      </a:lt1>
+      <a:dk2>
+        <a:srgbClr val="0E2841"/>
+      </a:dk2>
+      <a:lt2>
+        <a:srgbClr val="E8E8E8"/>
+      </a:lt2>
+      <a:accent1>
+        <a:srgbClr val="156082"/>
+      </a:accent1>
+      <a:accent2>
+        <a:srgbClr val="E97132"/>
+      </a:accent2>
+      <a:accent3>
+        <a:srgbClr val="196B24"/>
+      </a:accent3>
+      <a:accent4>
+        <a:srgbClr val="0F9ED5"/>
+      </a:accent4>
+      <a:accent5>
+        <a:srgbClr val="A02B93"/>
+      </a:accent5>
+      <a:accent6>
+        <a:srgbClr val="4EA72E"/>
+      </a:accent6>
+      <a:hlink>
+        <a:srgbClr val="467886"/>
+      </a:hlink>
+      <a:folHlink>
+        <a:srgbClr val="96607D"/>
+      </a:folHlink>
+    </a:clrScheme>
+    <a:fontScheme name="Office">
+      <a:majorFont>
+        <a:latin typeface="맑은 고딕" panose="02110004020202020204"/>
+        <a:ea typeface=""/>
+        <a:cs typeface=""/>
+        <a:font script="Jpan" typeface="游ゴシック Light"/>
+        <a:font script="Hang" typeface="맑은 고딕"/>
+        <a:font script="Hans" typeface="等线 Light"/>
+        <a:font script="Hant" typeface="新細明體"/>
+        <a:font script="Arab" typeface="Times New Roman"/>
+        <a:font script="Hebr" typeface="Times New Roman"/>
+        <a:font script="Thai" typeface="Angsana New"/>
+        <a:font script="Ethi" typeface="Nyala"/>
+        <a:font script="Beng" typeface="Vrinda"/>
+        <a:font script="Gujr" typeface="Shruti"/>
+        <a:font script="Khmr" typeface="MoolBoran"/>
+        <a:font script="Knda" typeface="Tunga"/>
+        <a:font script="Guru" typeface="Raavi"/>
+        <a:font script="Cans" typeface="Euphemia"/>
+        <a:font script="Cher" typeface="Plantagenet Cherokee"/>
+        <a:font script="Yiii" typeface="Microsoft Yi Baiti"/>
+        <a:font script="Tibt" typeface="Microsoft Himalaya"/>
+        <a:font script="Thaa" typeface="MV Boli"/>
+        <a:font script="Deva" typeface="Mangal"/>
+        <a:font script="Telu" typeface="Gautami"/>
+        <a:font script="Taml" typeface="Latha"/>
+        <a:font script="Syrc" typeface="Estrangelo Edessa"/>
+        <a:font script="Orya" typeface="Kalinga"/>
+        <a:font script="Mlym" typeface="Kartika"/>
+        <a:font script="Laoo" typeface="DokChampa"/>
+        <a:font script="Sinh" typeface="Iskoola Pota"/>
+        <a:font script="Mong" typeface="Mongolian Baiti"/>
+        <a:font script="Viet" typeface="Times New Roman"/>
+        <a:font script="Uigh" typeface="Microsoft Uighur"/>
+        <a:font script="Geor" typeface="Sylfaen"/>
+        <a:font script="Armn" typeface="Arial"/>
+        <a:font script="Bugi" typeface="Leelawadee UI"/>
+        <a:font script="Bopo" typeface="Microsoft JhengHei"/>
+        <a:font script="Java" typeface="Javanese Text"/>
+        <a:font script="Lisu" typeface="Segoe UI"/>
+        <a:font script="Mymr" typeface="Myanmar Text"/>
+        <a:font script="Nkoo" typeface="Ebrima"/>
+        <a:font script="Olck" typeface="Nirmala UI"/>
+        <a:font script="Osma" typeface="Ebrima"/>
+        <a:font script="Phag" typeface="Phagspa"/>
+        <a:font script="Syrn" typeface="Estrangelo Edessa"/>
+        <a:font script="Syrj" typeface="Estrangelo Edessa"/>
+        <a:font script="Syre" typeface="Estrangelo Edessa"/>
+        <a:font script="Sora" typeface="Nirmala UI"/>
+        <a:font script="Tale" typeface="Microsoft Tai Le"/>
+        <a:font script="Talu" typeface="Microsoft New Tai Lue"/>
+        <a:font script="Tfng" typeface="Ebrima"/>
+      </a:majorFont>
+      <a:minorFont>
+        <a:latin typeface="맑은 고딕" panose="02110004020202020204"/>
+        <a:ea typeface=""/>
+        <a:cs typeface=""/>
+        <a:font script="Jpan" typeface="游ゴシック"/>
+        <a:font script="Hang" typeface="맑은 고딕"/>
+        <a:font script="Hans" typeface="等线"/>
+        <a:font script="Hant" typeface="新細明體"/>
+        <a:font script="Arab" typeface="Arial"/>
+        <a:font script="Hebr" typeface="Arial"/>
+        <a:font script="Thai" typeface="Cordia New"/>
+        <a:font script="Ethi" typeface="Nyala"/>
+        <a:font script="Beng" typeface="Vrinda"/>
+        <a:font script="Gujr" typeface="Shruti"/>
+        <a:font script="Khmr" typeface="DaunPenh"/>
+        <a:font script="Knda" typeface="Tunga"/>
+        <a:font script="Guru" typeface="Raavi"/>
+        <a:font script="Cans" typeface="Euphemia"/>
+        <a:font script="Cher" typeface="Plantagenet Cherokee"/>
+        <a:font script="Yiii" typeface="Microsoft Yi Baiti"/>
+        <a:font script="Tibt" typeface="Microsoft Himalaya"/>
+        <a:font script="Thaa" typeface="MV Boli"/>
+        <a:font script="Deva" typeface="Mangal"/>
+        <a:font script="Telu" typeface="Gautami"/>
+        <a:font script="Taml" typeface="Latha"/>
+        <a:font script="Syrc" typeface="Estrangelo Edessa"/>
+        <a:font script="Orya" typeface="Kalinga"/>
+        <a:font script="Mlym" typeface="Kartika"/>
+        <a:font script="Laoo" typeface="DokChampa"/>
+        <a:font script="Sinh" typeface="Iskoola Pota"/>
+        <a:font script="Mong" typeface="Mongolian Baiti"/>
+        <a:font script="Viet" typeface="Arial"/>
+        <a:font script="Uigh" typeface="Microsoft Uighur"/>
+        <a:font script="Geor" typeface="Sylfaen"/>
+        <a:font script="Armn" typeface="Arial"/>
+        <a:font script="Bugi" typeface="Leelawadee UI"/>
+        <a:font script="Bopo" typeface="Microsoft JhengHei"/>
+        <a:font script="Java" typeface="Javanese Text"/>
+        <a:font script="Lisu" typeface="Segoe UI"/>
+        <a:font script="Mymr" typeface="Myanmar Text"/>
+        <a:font script="Nkoo" typeface="Ebrima"/>
+        <a:font script="Olck" typeface="Nirmala UI"/>
+        <a:font script="Osma" typeface="Ebrima"/>
+        <a:font script="Phag" typeface="Phagspa"/>
+        <a:font script="Syrn" typeface="Estrangelo Edessa"/>
+        <a:font script="Syrj" typeface="Estrangelo Edessa"/>
+        <a:font script="Syre" typeface="Estrangelo Edessa"/>
+        <a:font script="Sora" typeface="Nirmala UI"/>
+        <a:font script="Tale" typeface="Microsoft Tai Le"/>
+        <a:font script="Talu" typeface="Microsoft New Tai Lue"/>
+        <a:font script="Tfng" typeface="Ebrima"/>
+      </a:minorFont>
+    </a:fontScheme>
+    <a:fmtScheme name="Office">
+      <a:fillStyleLst>
+        <a:solidFill>
+          <a:schemeClr val="phClr"/>
+        </a:solidFill>
+        <a:gradFill rotWithShape="1">
+          <a:gsLst>
+            <a:gs pos="0">
+              <a:schemeClr val="phClr">
+                <a:lumMod val="110000"/>
+                <a:satMod val="105000"/>
+                <a:tint val="67000"/>
+              </a:schemeClr>
+            </a:gs>
+            <a:gs pos="50000">
+              <a:schemeClr val="phClr">
+                <a:lumMod val="105000"/>
+                <a:satMod val="103000"/>
+                <a:tint val="73000"/>
+              </a:schemeClr>
+            </a:gs>
+            <a:gs pos="100000">
+              <a:schemeClr val="phClr">
+                <a:lumMod val="105000"/>
+                <a:satMod val="109000"/>
+                <a:tint val="81000"/>
+              </a:schemeClr>
+            </a:gs>
+          </a:gsLst>
+          <a:lin ang="5400000" scaled="0"/>
+        </a:gradFill>
+        <a:gradFill rotWithShape="1">
+          <a:gsLst>
+            <a:gs pos="0">
+              <a:schemeClr val="phClr">
+                <a:satMod val="103000"/>
+                <a:lumMod val="102000"/>
+                <a:tint val="94000"/>
+              </a:schemeClr>
+            </a:gs>
+            <a:gs pos="50000">
+              <a:schemeClr val="phClr">
+                <a:satMod val="110000"/>
+                <a:lumMod val="100000"/>
+                <a:shade val="100000"/>
+              </a:schemeClr>
+            </a:gs>
+            <a:gs pos="100000">
+              <a:schemeClr val="phClr">
+                <a:lumMod val="99000"/>
+                <a:satMod val="120000"/>
+                <a:shade val="78000"/>
+              </a:schemeClr>
+            </a:gs>
+          </a:gsLst>
+          <a:lin ang="5400000" scaled="0"/>
+        </a:gradFill>
+      </a:fillStyleLst>
+      <a:lnStyleLst>
+        <a:ln w="12700" cap="flat" cmpd="sng" algn="ctr">
+          <a:solidFill>
+            <a:schemeClr val="phClr"/>
+          </a:solidFill>
+          <a:prstDash val="solid"/>
+          <a:miter lim="800000"/>
+        </a:ln>
+        <a:ln w="19050" cap="flat" cmpd="sng" algn="ctr">
+          <a:solidFill>
+            <a:schemeClr val="phClr"/>
+          </a:solidFill>
+          <a:prstDash val="solid"/>
+          <a:miter lim="800000"/>
+        </a:ln>
+        <a:ln w="25400" cap="flat" cmpd="sng" algn="ctr">
+          <a:solidFill>
+            <a:schemeClr val="phClr"/>
+          </a:solidFill>
+          <a:prstDash val="solid"/>
+          <a:miter lim="800000"/>
+        </a:ln>
+      </a:lnStyleLst>
+      <a:effectStyleLst>
+        <a:effectStyle>
+          <a:effectLst/>
+        </a:effectStyle>
+        <a:effectStyle>
+          <a:effectLst/>
+        </a:effectStyle>
+        <a:effectStyle>
+          <a:effectLst>
+            <a:outerShdw blurRad="57150" dist="19050" dir="5400000" algn="ctr" rotWithShape="0">
+              <a:srgbClr val="000000">
+                <a:alpha val="63000"/>
+              </a:srgbClr>
+            </a:outerShdw>
+          </a:effectLst>
+        </a:effectStyle>
+      </a:effectStyleLst>
+      <a:bgFillStyleLst>
+        <a:solidFill>
+          <a:schemeClr val="phClr"/>
+        </a:solidFill>
+        <a:solidFill>
+          <a:schemeClr val="phClr">
+            <a:tint val="95000"/>
+            <a:satMod val="170000"/>
+          </a:schemeClr>
+        </a:solidFill>
+        <a:gradFill rotWithShape="1">
+          <a:gsLst>
+            <a:gs pos="0">
+              <a:schemeClr val="phClr">
+                <a:tint val="93000"/>
+                <a:satMod val="150000"/>
+                <a:shade val="98000"/>
+                <a:lumMod val="102000"/>
+              </a:schemeClr>
+            </a:gs>
+            <a:gs pos="50000">
+              <a:schemeClr val="phClr">
+                <a:tint val="98000"/>
+                <a:satMod val="130000"/>
+                <a:shade val="90000"/>
+                <a:lumMod val="103000"/>
+              </a:schemeClr>
+            </a:gs>
+            <a:gs pos="100000">
+              <a:schemeClr val="phClr">
+                <a:shade val="63000"/>
+                <a:satMod val="120000"/>
+              </a:schemeClr>
+            </a:gs>
+          </a:gsLst>
+          <a:lin ang="5400000" scaled="0"/>
+        </a:gradFill>
+      </a:bgFillStyleLst>
+    </a:fmtScheme>
+  </a:themeElements>
+  <a:objectDefaults>
+    <a:lnDef>
+      <a:spPr/>
+      <a:bodyPr/>
+      <a:lstStyle/>
+      <a:style>
+        <a:lnRef idx="2">
+          <a:schemeClr val="accent1"/>
+        </a:lnRef>
+        <a:fillRef idx="0">
+          <a:schemeClr val="accent1"/>
+        </a:fillRef>
+        <a:effectRef idx="1">
+          <a:schemeClr val="accent1"/>
+        </a:effectRef>
+        <a:fontRef idx="minor">
+          <a:schemeClr val="tx1"/>
+        </a:fontRef>
+      </a:style>
+    </a:lnDef>
+  </a:objectDefaults>
+  <a:extraClrSchemeLst/>
+  <a:extLst>
+    <a:ext uri="{05A4C25C-085E-4340-85A3-A5531E510DB2}">
+      <thm15:themeFamily xmlns:thm15="http://schemas.microsoft.com/office/thememl/2012/main" name="Office Theme" id="{2E142A2C-CD16-42D6-873A-C26D2A0506FA}" vid="{1BDDFF52-6CD6-40A5-AB3C-68EB2F1E4D0A}"/>
+    </a:ext>
+  </a:extLst>
+</a:theme>
 </file>
--- a/submission/REDRED_2차_발표자료_칩S.pptx
+++ b/submission/REDRED_2차_발표자료_칩S.pptx
@@ -1,6 +1,6 @@
 
 <file path=ppt/presentation.xml><?xml version="1.0" encoding="utf-8"?>
-<p:presentation xmlns:a="http://schemas.openxmlformats.org/drawingml/2006/main" xmlns:r="http://schemas.openxmlformats.org/officeDocument/2006/relationships" xmlns:p="http://schemas.openxmlformats.org/presentationml/2006/main" embedTrueTypeFonts="1" autoCompressPictures="0">
+<p:presentation xmlns:a="http://schemas.openxmlformats.org/drawingml/2006/main" xmlns:r="http://schemas.openxmlformats.org/officeDocument/2006/relationships" xmlns:p="http://schemas.openxmlformats.org/presentationml/2006/main" embedTrueTypeFonts="1" saveSubsetFonts="1" autoCompressPictures="0">
   <p:sldMasterIdLst>
     <p:sldMasterId id="2147483648" r:id="rId1"/>
   </p:sldMasterIdLst>
@@ -214,7 +214,7 @@
             <c:bubble3D val="0"/>
             <c:extLst>
               <c:ext xmlns:c16="http://schemas.microsoft.com/office/drawing/2014/chart" uri="{C3380CC4-5D6E-409C-BE32-E72D297353CC}">
-                <c16:uniqueId val="{00000001-120E-4F70-A283-B4737D7E2257}"/>
+                <c16:uniqueId val="{00000001-EEC6-403A-87E1-0DEB05A6CD11}"/>
               </c:ext>
             </c:extLst>
           </c:dPt>
@@ -230,7 +230,7 @@
             </c:spPr>
             <c:extLst>
               <c:ext xmlns:c16="http://schemas.microsoft.com/office/drawing/2014/chart" uri="{C3380CC4-5D6E-409C-BE32-E72D297353CC}">
-                <c16:uniqueId val="{00000003-120E-4F70-A283-B4737D7E2257}"/>
+                <c16:uniqueId val="{00000003-EEC6-403A-87E1-0DEB05A6CD11}"/>
               </c:ext>
             </c:extLst>
           </c:dPt>
@@ -304,7 +304,7 @@
           </c:val>
           <c:extLst>
             <c:ext xmlns:c16="http://schemas.microsoft.com/office/drawing/2014/chart" uri="{C3380CC4-5D6E-409C-BE32-E72D297353CC}">
-              <c16:uniqueId val="{00000004-120E-4F70-A283-B4737D7E2257}"/>
+              <c16:uniqueId val="{00000004-EEC6-403A-87E1-0DEB05A6CD11}"/>
             </c:ext>
           </c:extLst>
         </c:ser>
@@ -466,7 +466,7 @@
     </p:spTree>
     <p:extLst>
       <p:ext uri="{BB962C8B-B14F-4D97-AF65-F5344CB8AC3E}">
-        <p14:creationId xmlns:p14="http://schemas.microsoft.com/office/powerpoint/2010/main" val="1389693394"/>
+        <p14:creationId xmlns:p14="http://schemas.microsoft.com/office/powerpoint/2010/main" val="2944922760"/>
       </p:ext>
     </p:extLst>
   </p:cSld>
@@ -5369,13 +5369,6 @@
             <a:prstDash val="solid"/>
           </a:ln>
         </p:spPr>
-        <p:txBody>
-          <a:bodyPr/>
-          <a:lstStyle/>
-          <a:p>
-            <a:endParaRPr lang="ko-KR" altLang="en-US"/>
-          </a:p>
-        </p:txBody>
       </p:sp>
       <p:sp>
         <p:nvSpPr>
@@ -5481,13 +5474,6 @@
             <a:prstDash val="solid"/>
           </a:ln>
         </p:spPr>
-        <p:txBody>
-          <a:bodyPr/>
-          <a:lstStyle/>
-          <a:p>
-            <a:endParaRPr lang="ko-KR" altLang="en-US"/>
-          </a:p>
-        </p:txBody>
       </p:sp>
       <p:sp>
         <p:nvSpPr>
@@ -7233,13 +7219,6 @@
             <a:prstDash val="solid"/>
           </a:ln>
         </p:spPr>
-        <p:txBody>
-          <a:bodyPr/>
-          <a:lstStyle/>
-          <a:p>
-            <a:endParaRPr lang="ko-KR" altLang="en-US"/>
-          </a:p>
-        </p:txBody>
       </p:sp>
       <p:sp>
         <p:nvSpPr>
@@ -7345,13 +7324,6 @@
             <a:prstDash val="solid"/>
           </a:ln>
         </p:spPr>
-        <p:txBody>
-          <a:bodyPr/>
-          <a:lstStyle/>
-          <a:p>
-            <a:endParaRPr lang="ko-KR" altLang="en-US"/>
-          </a:p>
-        </p:txBody>
       </p:sp>
       <p:sp>
         <p:nvSpPr>
@@ -9097,13 +9069,6 @@
             <a:prstDash val="solid"/>
           </a:ln>
         </p:spPr>
-        <p:txBody>
-          <a:bodyPr/>
-          <a:lstStyle/>
-          <a:p>
-            <a:endParaRPr lang="ko-KR" altLang="en-US"/>
-          </a:p>
-        </p:txBody>
       </p:sp>
       <p:sp>
         <p:nvSpPr>
@@ -9226,13 +9191,6 @@
             <a:prstDash val="solid"/>
           </a:ln>
         </p:spPr>
-        <p:txBody>
-          <a:bodyPr/>
-          <a:lstStyle/>
-          <a:p>
-            <a:endParaRPr lang="ko-KR" altLang="en-US"/>
-          </a:p>
-        </p:txBody>
       </p:sp>
       <p:sp>
         <p:nvSpPr>
@@ -10368,13 +10326,6 @@
             <a:prstDash val="solid"/>
           </a:ln>
         </p:spPr>
-        <p:txBody>
-          <a:bodyPr/>
-          <a:lstStyle/>
-          <a:p>
-            <a:endParaRPr lang="ko-KR" altLang="en-US"/>
-          </a:p>
-        </p:txBody>
       </p:sp>
       <p:sp>
         <p:nvSpPr>
@@ -10480,13 +10431,6 @@
             <a:prstDash val="solid"/>
           </a:ln>
         </p:spPr>
-        <p:txBody>
-          <a:bodyPr/>
-          <a:lstStyle/>
-          <a:p>
-            <a:endParaRPr lang="ko-KR" altLang="en-US"/>
-          </a:p>
-        </p:txBody>
       </p:sp>
       <p:sp>
         <p:nvSpPr>
@@ -10706,13 +10650,6 @@
             <a:prstDash val="solid"/>
           </a:ln>
         </p:spPr>
-        <p:txBody>
-          <a:bodyPr/>
-          <a:lstStyle/>
-          <a:p>
-            <a:endParaRPr lang="ko-KR" altLang="en-US"/>
-          </a:p>
-        </p:txBody>
       </p:sp>
       <p:sp>
         <p:nvSpPr>
@@ -10869,13 +10806,6 @@
             <a:prstDash val="solid"/>
           </a:ln>
         </p:spPr>
-        <p:txBody>
-          <a:bodyPr/>
-          <a:lstStyle/>
-          <a:p>
-            <a:endParaRPr lang="ko-KR" altLang="en-US"/>
-          </a:p>
-        </p:txBody>
       </p:sp>
       <p:sp>
         <p:nvSpPr>
@@ -11032,13 +10962,6 @@
             <a:prstDash val="solid"/>
           </a:ln>
         </p:spPr>
-        <p:txBody>
-          <a:bodyPr/>
-          <a:lstStyle/>
-          <a:p>
-            <a:endParaRPr lang="ko-KR" altLang="en-US"/>
-          </a:p>
-        </p:txBody>
       </p:sp>
       <p:sp>
         <p:nvSpPr>
@@ -13032,13 +12955,6 @@
             <a:prstDash val="solid"/>
           </a:ln>
         </p:spPr>
-        <p:txBody>
-          <a:bodyPr/>
-          <a:lstStyle/>
-          <a:p>
-            <a:endParaRPr lang="ko-KR" altLang="en-US"/>
-          </a:p>
-        </p:txBody>
       </p:sp>
       <p:sp>
         <p:nvSpPr>
@@ -13195,13 +13111,6 @@
             <a:prstDash val="solid"/>
           </a:ln>
         </p:spPr>
-        <p:txBody>
-          <a:bodyPr/>
-          <a:lstStyle/>
-          <a:p>
-            <a:endParaRPr lang="ko-KR" altLang="en-US"/>
-          </a:p>
-        </p:txBody>
       </p:sp>
       <p:sp>
         <p:nvSpPr>
@@ -13341,13 +13250,6 @@
             <a:prstDash val="solid"/>
           </a:ln>
         </p:spPr>
-        <p:txBody>
-          <a:bodyPr/>
-          <a:lstStyle/>
-          <a:p>
-            <a:endParaRPr lang="ko-KR" altLang="en-US"/>
-          </a:p>
-        </p:txBody>
       </p:sp>
       <p:sp>
         <p:nvSpPr>
@@ -16740,13 +16642,6 @@
             <a:prstDash val="solid"/>
           </a:ln>
         </p:spPr>
-        <p:txBody>
-          <a:bodyPr/>
-          <a:lstStyle/>
-          <a:p>
-            <a:endParaRPr lang="ko-KR" altLang="en-US"/>
-          </a:p>
-        </p:txBody>
       </p:sp>
       <p:sp>
         <p:nvSpPr>
@@ -20976,13 +20871,6 @@
             <a:prstDash val="solid"/>
           </a:ln>
         </p:spPr>
-        <p:txBody>
-          <a:bodyPr/>
-          <a:lstStyle/>
-          <a:p>
-            <a:endParaRPr lang="ko-KR" altLang="en-US"/>
-          </a:p>
-        </p:txBody>
       </p:sp>
       <p:sp>
         <p:nvSpPr>
@@ -21105,13 +20993,6 @@
             <a:prstDash val="solid"/>
           </a:ln>
         </p:spPr>
-        <p:txBody>
-          <a:bodyPr/>
-          <a:lstStyle/>
-          <a:p>
-            <a:endParaRPr lang="ko-KR" altLang="en-US"/>
-          </a:p>
-        </p:txBody>
       </p:sp>
       <p:sp>
         <p:nvSpPr>
@@ -21234,13 +21115,6 @@
             <a:prstDash val="solid"/>
           </a:ln>
         </p:spPr>
-        <p:txBody>
-          <a:bodyPr/>
-          <a:lstStyle/>
-          <a:p>
-            <a:endParaRPr lang="ko-KR" altLang="en-US"/>
-          </a:p>
-        </p:txBody>
       </p:sp>
       <p:sp>
         <p:nvSpPr>
@@ -21536,13 +21410,6 @@
             <a:prstDash val="solid"/>
           </a:ln>
         </p:spPr>
-        <p:txBody>
-          <a:bodyPr/>
-          <a:lstStyle/>
-          <a:p>
-            <a:endParaRPr lang="ko-KR" altLang="en-US"/>
-          </a:p>
-        </p:txBody>
       </p:sp>
       <p:sp>
         <p:nvSpPr>
@@ -21687,13 +21554,6 @@
             <a:prstDash val="solid"/>
           </a:ln>
         </p:spPr>
-        <p:txBody>
-          <a:bodyPr/>
-          <a:lstStyle/>
-          <a:p>
-            <a:endParaRPr lang="ko-KR" altLang="en-US"/>
-          </a:p>
-        </p:txBody>
       </p:sp>
       <p:sp>
         <p:nvSpPr>
@@ -21838,13 +21698,6 @@
             <a:prstDash val="solid"/>
           </a:ln>
         </p:spPr>
-        <p:txBody>
-          <a:bodyPr/>
-          <a:lstStyle/>
-          <a:p>
-            <a:endParaRPr lang="ko-KR" altLang="en-US"/>
-          </a:p>
-        </p:txBody>
       </p:sp>
       <p:sp>
         <p:nvSpPr>
@@ -21989,13 +21842,6 @@
             <a:prstDash val="solid"/>
           </a:ln>
         </p:spPr>
-        <p:txBody>
-          <a:bodyPr/>
-          <a:lstStyle/>
-          <a:p>
-            <a:endParaRPr lang="ko-KR" altLang="en-US"/>
-          </a:p>
-        </p:txBody>
       </p:sp>
       <p:sp>
         <p:nvSpPr>
@@ -22140,13 +21986,6 @@
             <a:prstDash val="solid"/>
           </a:ln>
         </p:spPr>
-        <p:txBody>
-          <a:bodyPr/>
-          <a:lstStyle/>
-          <a:p>
-            <a:endParaRPr lang="ko-KR" altLang="en-US"/>
-          </a:p>
-        </p:txBody>
       </p:sp>
       <p:sp>
         <p:nvSpPr>
@@ -22291,13 +22130,6 @@
             <a:prstDash val="solid"/>
           </a:ln>
         </p:spPr>
-        <p:txBody>
-          <a:bodyPr/>
-          <a:lstStyle/>
-          <a:p>
-            <a:endParaRPr lang="ko-KR" altLang="en-US"/>
-          </a:p>
-        </p:txBody>
       </p:sp>
       <p:sp>
         <p:nvSpPr>
@@ -22586,13 +22418,6 @@
             <a:prstDash val="solid"/>
           </a:ln>
         </p:spPr>
-        <p:txBody>
-          <a:bodyPr/>
-          <a:lstStyle/>
-          <a:p>
-            <a:endParaRPr lang="ko-KR" altLang="en-US"/>
-          </a:p>
-        </p:txBody>
       </p:sp>
       <p:sp>
         <p:nvSpPr>
@@ -22749,13 +22574,6 @@
             <a:prstDash val="solid"/>
           </a:ln>
         </p:spPr>
-        <p:txBody>
-          <a:bodyPr/>
-          <a:lstStyle/>
-          <a:p>
-            <a:endParaRPr lang="ko-KR" altLang="en-US"/>
-          </a:p>
-        </p:txBody>
       </p:sp>
       <p:sp>
         <p:nvSpPr>
@@ -22912,13 +22730,6 @@
             <a:prstDash val="solid"/>
           </a:ln>
         </p:spPr>
-        <p:txBody>
-          <a:bodyPr/>
-          <a:lstStyle/>
-          <a:p>
-            <a:endParaRPr lang="ko-KR" altLang="en-US"/>
-          </a:p>
-        </p:txBody>
       </p:sp>
       <p:sp>
         <p:nvSpPr>
@@ -23172,13 +22983,6 @@
             <a:prstDash val="solid"/>
           </a:ln>
         </p:spPr>
-        <p:txBody>
-          <a:bodyPr/>
-          <a:lstStyle/>
-          <a:p>
-            <a:endParaRPr lang="ko-KR" altLang="en-US"/>
-          </a:p>
-        </p:txBody>
       </p:sp>
       <p:sp>
         <p:nvSpPr>
@@ -23318,13 +23122,6 @@
             <a:prstDash val="solid"/>
           </a:ln>
         </p:spPr>
-        <p:txBody>
-          <a:bodyPr/>
-          <a:lstStyle/>
-          <a:p>
-            <a:endParaRPr lang="ko-KR" altLang="en-US"/>
-          </a:p>
-        </p:txBody>
       </p:sp>
       <p:sp>
         <p:nvSpPr>
@@ -23464,13 +23261,6 @@
             <a:prstDash val="solid"/>
           </a:ln>
         </p:spPr>
-        <p:txBody>
-          <a:bodyPr/>
-          <a:lstStyle/>
-          <a:p>
-            <a:endParaRPr lang="ko-KR" altLang="en-US"/>
-          </a:p>
-        </p:txBody>
       </p:sp>
       <p:sp>
         <p:nvSpPr>
@@ -23673,13 +23463,6 @@
             <a:prstDash val="solid"/>
           </a:ln>
         </p:spPr>
-        <p:txBody>
-          <a:bodyPr/>
-          <a:lstStyle/>
-          <a:p>
-            <a:endParaRPr lang="ko-KR" altLang="en-US"/>
-          </a:p>
-        </p:txBody>
       </p:sp>
       <p:sp>
         <p:nvSpPr>
@@ -25009,13 +24792,6 @@
             <a:prstDash val="solid"/>
           </a:ln>
         </p:spPr>
-        <p:txBody>
-          <a:bodyPr/>
-          <a:lstStyle/>
-          <a:p>
-            <a:endParaRPr lang="ko-KR" altLang="en-US"/>
-          </a:p>
-        </p:txBody>
       </p:sp>
       <p:sp>
         <p:nvSpPr>
@@ -25235,13 +25011,6 @@
             <a:prstDash val="solid"/>
           </a:ln>
         </p:spPr>
-        <p:txBody>
-          <a:bodyPr/>
-          <a:lstStyle/>
-          <a:p>
-            <a:endParaRPr lang="ko-KR" altLang="en-US"/>
-          </a:p>
-        </p:txBody>
       </p:sp>
       <p:sp>
         <p:nvSpPr>
@@ -25364,13 +25133,6 @@
             <a:prstDash val="solid"/>
           </a:ln>
         </p:spPr>
-        <p:txBody>
-          <a:bodyPr/>
-          <a:lstStyle/>
-          <a:p>
-            <a:endParaRPr lang="ko-KR" altLang="en-US"/>
-          </a:p>
-        </p:txBody>
       </p:sp>
       <p:sp>
         <p:nvSpPr>
@@ -25493,13 +25255,6 @@
             <a:prstDash val="solid"/>
           </a:ln>
         </p:spPr>
-        <p:txBody>
-          <a:bodyPr/>
-          <a:lstStyle/>
-          <a:p>
-            <a:endParaRPr lang="ko-KR" altLang="en-US"/>
-          </a:p>
-        </p:txBody>
       </p:sp>
       <p:sp>
         <p:nvSpPr>
@@ -25622,13 +25377,6 @@
             <a:prstDash val="solid"/>
           </a:ln>
         </p:spPr>
-        <p:txBody>
-          <a:bodyPr/>
-          <a:lstStyle/>
-          <a:p>
-            <a:endParaRPr lang="ko-KR" altLang="en-US"/>
-          </a:p>
-        </p:txBody>
       </p:sp>
       <p:sp>
         <p:nvSpPr>
@@ -25751,13 +25499,6 @@
             <a:prstDash val="solid"/>
           </a:ln>
         </p:spPr>
-        <p:txBody>
-          <a:bodyPr/>
-          <a:lstStyle/>
-          <a:p>
-            <a:endParaRPr lang="ko-KR" altLang="en-US"/>
-          </a:p>
-        </p:txBody>
       </p:sp>
       <p:sp>
         <p:nvSpPr>
@@ -25877,13 +25618,6 @@
             <a:tailEnd type="triangle"/>
           </a:ln>
         </p:spPr>
-        <p:txBody>
-          <a:bodyPr/>
-          <a:lstStyle/>
-          <a:p>
-            <a:endParaRPr lang="ko-KR" altLang="en-US"/>
-          </a:p>
-        </p:txBody>
       </p:sp>
       <p:sp>
         <p:nvSpPr>
@@ -25908,13 +25642,6 @@
             <a:tailEnd type="triangle"/>
           </a:ln>
         </p:spPr>
-        <p:txBody>
-          <a:bodyPr/>
-          <a:lstStyle/>
-          <a:p>
-            <a:endParaRPr lang="ko-KR" altLang="en-US"/>
-          </a:p>
-        </p:txBody>
       </p:sp>
       <p:sp>
         <p:nvSpPr>
@@ -25939,13 +25666,6 @@
             <a:tailEnd type="triangle"/>
           </a:ln>
         </p:spPr>
-        <p:txBody>
-          <a:bodyPr/>
-          <a:lstStyle/>
-          <a:p>
-            <a:endParaRPr lang="ko-KR" altLang="en-US"/>
-          </a:p>
-        </p:txBody>
       </p:sp>
       <p:sp>
         <p:nvSpPr>
@@ -25970,13 +25690,6 @@
             <a:tailEnd type="triangle"/>
           </a:ln>
         </p:spPr>
-        <p:txBody>
-          <a:bodyPr/>
-          <a:lstStyle/>
-          <a:p>
-            <a:endParaRPr lang="ko-KR" altLang="en-US"/>
-          </a:p>
-        </p:txBody>
       </p:sp>
       <p:sp>
         <p:nvSpPr>
@@ -26004,13 +25717,6 @@
             <a:prstDash val="solid"/>
           </a:ln>
         </p:spPr>
-        <p:txBody>
-          <a:bodyPr/>
-          <a:lstStyle/>
-          <a:p>
-            <a:endParaRPr lang="ko-KR" altLang="en-US"/>
-          </a:p>
-        </p:txBody>
       </p:sp>
       <p:sp>
         <p:nvSpPr>
@@ -26133,13 +25839,6 @@
             <a:prstDash val="solid"/>
           </a:ln>
         </p:spPr>
-        <p:txBody>
-          <a:bodyPr/>
-          <a:lstStyle/>
-          <a:p>
-            <a:endParaRPr lang="ko-KR" altLang="en-US"/>
-          </a:p>
-        </p:txBody>
       </p:sp>
       <p:sp>
         <p:nvSpPr>
@@ -26262,13 +25961,6 @@
             <a:prstDash val="solid"/>
           </a:ln>
         </p:spPr>
-        <p:txBody>
-          <a:bodyPr/>
-          <a:lstStyle/>
-          <a:p>
-            <a:endParaRPr lang="ko-KR" altLang="en-US"/>
-          </a:p>
-        </p:txBody>
       </p:sp>
       <p:sp>
         <p:nvSpPr>
@@ -26388,13 +26080,6 @@
             <a:tailEnd type="triangle"/>
           </a:ln>
         </p:spPr>
-        <p:txBody>
-          <a:bodyPr/>
-          <a:lstStyle/>
-          <a:p>
-            <a:endParaRPr lang="ko-KR" altLang="en-US"/>
-          </a:p>
-        </p:txBody>
       </p:sp>
       <p:sp>
         <p:nvSpPr>
@@ -26419,13 +26104,6 @@
             <a:tailEnd type="triangle"/>
           </a:ln>
         </p:spPr>
-        <p:txBody>
-          <a:bodyPr/>
-          <a:lstStyle/>
-          <a:p>
-            <a:endParaRPr lang="ko-KR" altLang="en-US"/>
-          </a:p>
-        </p:txBody>
       </p:sp>
       <p:sp>
         <p:nvSpPr>
@@ -26450,13 +26128,6 @@
             <a:tailEnd type="triangle"/>
           </a:ln>
         </p:spPr>
-        <p:txBody>
-          <a:bodyPr/>
-          <a:lstStyle/>
-          <a:p>
-            <a:endParaRPr lang="ko-KR" altLang="en-US"/>
-          </a:p>
-        </p:txBody>
       </p:sp>
       <p:sp>
         <p:nvSpPr>
@@ -26481,13 +26152,6 @@
             <a:headEnd type="triangle"/>
           </a:ln>
         </p:spPr>
-        <p:txBody>
-          <a:bodyPr/>
-          <a:lstStyle/>
-          <a:p>
-            <a:endParaRPr lang="ko-KR" altLang="en-US"/>
-          </a:p>
-        </p:txBody>
       </p:sp>
       <p:sp>
         <p:nvSpPr>
@@ -26554,13 +26218,6 @@
             <a:prstDash val="solid"/>
           </a:ln>
         </p:spPr>
-        <p:txBody>
-          <a:bodyPr/>
-          <a:lstStyle/>
-          <a:p>
-            <a:endParaRPr lang="ko-KR" altLang="en-US"/>
-          </a:p>
-        </p:txBody>
       </p:sp>
       <p:sp>
         <p:nvSpPr>
@@ -26666,13 +26323,6 @@
             <a:prstDash val="solid"/>
           </a:ln>
         </p:spPr>
-        <p:txBody>
-          <a:bodyPr/>
-          <a:lstStyle/>
-          <a:p>
-            <a:endParaRPr lang="ko-KR" altLang="en-US"/>
-          </a:p>
-        </p:txBody>
       </p:sp>
       <p:sp>
         <p:nvSpPr>
@@ -29609,13 +29259,6 @@
             <a:prstDash val="solid"/>
           </a:ln>
         </p:spPr>
-        <p:txBody>
-          <a:bodyPr/>
-          <a:lstStyle/>
-          <a:p>
-            <a:endParaRPr lang="ko-KR" altLang="en-US"/>
-          </a:p>
-        </p:txBody>
       </p:sp>
       <p:sp>
         <p:nvSpPr>
@@ -31286,13 +30929,6 @@
             <a:prstDash val="solid"/>
           </a:ln>
         </p:spPr>
-        <p:txBody>
-          <a:bodyPr/>
-          <a:lstStyle/>
-          <a:p>
-            <a:endParaRPr lang="ko-KR" altLang="en-US"/>
-          </a:p>
-        </p:txBody>
       </p:sp>
       <p:sp>
         <p:nvSpPr>
@@ -31398,13 +31034,6 @@
             <a:prstDash val="solid"/>
           </a:ln>
         </p:spPr>
-        <p:txBody>
-          <a:bodyPr/>
-          <a:lstStyle/>
-          <a:p>
-            <a:endParaRPr lang="ko-KR" altLang="en-US"/>
-          </a:p>
-        </p:txBody>
       </p:sp>
       <p:sp>
         <p:nvSpPr>
@@ -31652,6 +31281,17 @@
                       <a:pPr marL="0" indent="0" eaLnBrk="0">
                         <a:buNone/>
                       </a:pPr>
+                      <a:r>
+                        <a:rPr lang="en-US" sz="1300" dirty="0">
+                          <a:solidFill>
+                            <a:srgbClr val="1D1D1F"/>
+                          </a:solidFill>
+                          <a:latin typeface="나눔스퀘어 네오 Bold" pitchFamily="34" charset="0"/>
+                          <a:ea typeface="나눔스퀘어 네오 Bold" pitchFamily="34" charset="-122"/>
+                          <a:cs typeface="나눔스퀘어 네오 Bold" pitchFamily="34" charset="-120"/>
+                        </a:rPr>
+                        <a:t>ECC 대비, 오프셋 제거 평균</a:t>
+                      </a:r>
                       <a:endParaRPr lang="en-US" sz="1300" dirty="0">
                         <a:latin typeface="나눔스퀘어 네오 Regular" charset="0"/>
                         <a:ea typeface="나눔스퀘어 네오 Regular" charset="0"/>
@@ -32928,13 +32568,6 @@
             <a:prstDash val="solid"/>
           </a:ln>
         </p:spPr>
-        <p:txBody>
-          <a:bodyPr/>
-          <a:lstStyle/>
-          <a:p>
-            <a:endParaRPr lang="ko-KR" altLang="en-US"/>
-          </a:p>
-        </p:txBody>
       </p:sp>
       <p:sp>
         <p:nvSpPr>
@@ -33040,13 +32673,6 @@
             <a:prstDash val="solid"/>
           </a:ln>
         </p:spPr>
-        <p:txBody>
-          <a:bodyPr/>
-          <a:lstStyle/>
-          <a:p>
-            <a:endParaRPr lang="ko-KR" altLang="en-US"/>
-          </a:p>
-        </p:txBody>
       </p:sp>
       <p:sp>
         <p:nvSpPr>
@@ -33152,13 +32778,6 @@
             <a:prstDash val="solid"/>
           </a:ln>
         </p:spPr>
-        <p:txBody>
-          <a:bodyPr/>
-          <a:lstStyle/>
-          <a:p>
-            <a:endParaRPr lang="ko-KR" altLang="en-US"/>
-          </a:p>
-        </p:txBody>
       </p:sp>
       <p:sp>
         <p:nvSpPr>

--- a/submission/REDRED_2차_발표자료_칩S.pptx
+++ b/submission/REDRED_2차_발표자료_칩S.pptx
@@ -214,7 +214,7 @@
             <c:bubble3D val="0"/>
             <c:extLst>
               <c:ext xmlns:c16="http://schemas.microsoft.com/office/drawing/2014/chart" uri="{C3380CC4-5D6E-409C-BE32-E72D297353CC}">
-                <c16:uniqueId val="{00000001-EEC6-403A-87E1-0DEB05A6CD11}"/>
+                <c16:uniqueId val="{00000001-7002-4B37-82F5-A36A69887E8B}"/>
               </c:ext>
             </c:extLst>
           </c:dPt>
@@ -230,7 +230,7 @@
             </c:spPr>
             <c:extLst>
               <c:ext xmlns:c16="http://schemas.microsoft.com/office/drawing/2014/chart" uri="{C3380CC4-5D6E-409C-BE32-E72D297353CC}">
-                <c16:uniqueId val="{00000003-EEC6-403A-87E1-0DEB05A6CD11}"/>
+                <c16:uniqueId val="{00000003-7002-4B37-82F5-A36A69887E8B}"/>
               </c:ext>
             </c:extLst>
           </c:dPt>
@@ -304,7 +304,7 @@
           </c:val>
           <c:extLst>
             <c:ext xmlns:c16="http://schemas.microsoft.com/office/drawing/2014/chart" uri="{C3380CC4-5D6E-409C-BE32-E72D297353CC}">
-              <c16:uniqueId val="{00000004-EEC6-403A-87E1-0DEB05A6CD11}"/>
+              <c16:uniqueId val="{00000004-7002-4B37-82F5-A36A69887E8B}"/>
             </c:ext>
           </c:extLst>
         </c:ser>
@@ -466,7 +466,7 @@
     </p:spTree>
     <p:extLst>
       <p:ext uri="{BB962C8B-B14F-4D97-AF65-F5344CB8AC3E}">
-        <p14:creationId xmlns:p14="http://schemas.microsoft.com/office/powerpoint/2010/main" val="2944922760"/>
+        <p14:creationId xmlns:p14="http://schemas.microsoft.com/office/powerpoint/2010/main" val="2389046429"/>
       </p:ext>
     </p:extLst>
   </p:cSld>
@@ -11400,7 +11400,7 @@
                           <a:ea typeface="나눔스퀘어 네오 Regular" pitchFamily="34" charset="-122"/>
                           <a:cs typeface="나눔스퀘어 네오 Regular" pitchFamily="34" charset="-120"/>
                         </a:rPr>
-                        <a:t>처리량 (종단: 추정기+쓰기 경로)</a:t>
+                        <a:t>처리량 (종단: 추정기+쓰기 경로, 현재 칩)</a:t>
                       </a:r>
                       <a:endParaRPr lang="en-US" sz="1300" dirty="0">
                         <a:latin typeface="나눔스퀘어 네오 Regular" charset="0"/>
@@ -11468,7 +11468,7 @@
                           <a:ea typeface="나눔스퀘어 네오 Regular" pitchFamily="34" charset="-122"/>
                           <a:cs typeface="나눔스퀘어 네오 Regular" pitchFamily="34" charset="-120"/>
                         </a:rPr>
-                        <a:t>roll 프레임당 0.66 ms — 1.16배 여유 (병합 캐시가 roll에서 접근 많음)</a:t>
+                        <a:t>roll_B 게이트 시뮬 2.86M 사이클/32프레임 = 프레임당 약 8.9만 사이클 → 8 ns에서 0.715 ms, 프레임 주기 0.773 ms 이내 (여유 1.08배, 얇음)</a:t>
                       </a:r>
                       <a:endParaRPr lang="en-US" sz="1300" dirty="0">
                         <a:latin typeface="나눔스퀘어 네오 Regular" charset="0"/>

--- a/submission/REDRED_2차_발표자료_칩S.pptx
+++ b/submission/REDRED_2차_발표자료_칩S.pptx
@@ -214,7 +214,7 @@
             <c:bubble3D val="0"/>
             <c:extLst>
               <c:ext xmlns:c16="http://schemas.microsoft.com/office/drawing/2014/chart" uri="{C3380CC4-5D6E-409C-BE32-E72D297353CC}">
-                <c16:uniqueId val="{00000001-7002-4B37-82F5-A36A69887E8B}"/>
+                <c16:uniqueId val="{00000001-D7EC-4350-82ED-197525EC39C1}"/>
               </c:ext>
             </c:extLst>
           </c:dPt>
@@ -230,7 +230,7 @@
             </c:spPr>
             <c:extLst>
               <c:ext xmlns:c16="http://schemas.microsoft.com/office/drawing/2014/chart" uri="{C3380CC4-5D6E-409C-BE32-E72D297353CC}">
-                <c16:uniqueId val="{00000003-7002-4B37-82F5-A36A69887E8B}"/>
+                <c16:uniqueId val="{00000003-D7EC-4350-82ED-197525EC39C1}"/>
               </c:ext>
             </c:extLst>
           </c:dPt>
@@ -304,7 +304,7 @@
           </c:val>
           <c:extLst>
             <c:ext xmlns:c16="http://schemas.microsoft.com/office/drawing/2014/chart" uri="{C3380CC4-5D6E-409C-BE32-E72D297353CC}">
-              <c16:uniqueId val="{00000004-7002-4B37-82F5-A36A69887E8B}"/>
+              <c16:uniqueId val="{00000004-D7EC-4350-82ED-197525EC39C1}"/>
             </c:ext>
           </c:extLst>
         </c:ser>
@@ -466,7 +466,7 @@
     </p:spTree>
     <p:extLst>
       <p:ext uri="{BB962C8B-B14F-4D97-AF65-F5344CB8AC3E}">
-        <p14:creationId xmlns:p14="http://schemas.microsoft.com/office/powerpoint/2010/main" val="2389046429"/>
+        <p14:creationId xmlns:p14="http://schemas.microsoft.com/office/powerpoint/2010/main" val="2951004142"/>
       </p:ext>
     </p:extLst>
   </p:cSld>
@@ -786,7 +786,7 @@
           <a:p>
             <a:r>
               <a:rPr lang="en-US" dirty="0"/>
-              <a:t>이 알고리즘을 칩에 넣는 작업을 시작했습니다. 칩의 추정기 설정은 정적 입력이라서, 부트스트랩 구간에는 3자유도로 돌려 각도와 이동량을 모으고, 피벗을 구한 뒤 roll 모드로 전환하는 구조를 잡았습니다. 먼저 현수의 정수 기준모델을 로컬에서 재현해서 0.467도가 그대로 나오는 것을 확인했고, 3자유도 모드로 roll 전체를 5초에 돌려 봤습니다. 정수 3자유도의 각도 오차는 0.9에서 1.2도이고, 피벗 최소제곱은 반지름 26에서 39픽셀이 나옵니다. float의 49픽셀보다 작은데, 정수 3자유도의 이동량 잡음 때문입니다. 설명도 기준 0.9에 걸리는 경계 사례도 있어서, 이 판정 처리가 다음 과제입니다. 아직 RTL에는 들어가지 않았다는 점을 분명히 말씀드립니다.</a:t>
+              <a:t>과적합의 원인은 녹화마다 손으로 맞춘 상수가 사실 피벗 하나라는 점이었고, 이 피벗을 데이터에서 구하는 알고리즘으로 해결했습니다. 정수 기준모델에서 roll 0.467도가 그대로 재현되고, 3자유도 모드로 roll 전체를 5초에 돌려 각도와 이동량 궤적을 얻으면 최종 각도는 323.7도로 정답 323.1도와 거의 같습니다. 이 궤적에 피벗 최소제곱을 걸어 구한 피벗을 쓰면 각도 오차가 0.405도로, 손으로 맞춘 피벗의 0.467도보다 작습니다. 상수를 알고리즘으로 바꾸는 쪽이 일반화뿐 아니라 정확도에도 이득입니다.</a:t>
             </a:r>
           </a:p>
         </p:txBody>
@@ -1569,7 +1569,7 @@
           <a:p>
             <a:r>
               <a:rPr lang="en-US" dirty="0"/>
-              <a:t>이 발표의 핵심 특장점 여섯 가지를 먼저 말씀드립니다. 첫째, 설계한 RTL이 기준모델과 한 비트도 다르지 않습니다. 변환과 쓰기 경로, 추정기, 종단 시뮬레이션이 모두 불일치 0이고 논리 동등성 검사도 통과했습니다. 둘째, 풀칩을 8나노초에서 배치배선하고 signoff 타이밍 여유 2.4나노초로 통과했습니다. 셋째, 교수님의 실제 roll 영상에서 각도 오차가 평균 0.47도입니다. 넷째, 칩에 녹화에 맞춘 상수가 있었는데 그게 사실 피벗 하나였고, 데이터에서 구하는 알고리즘으로 61도 붕괴가 0.67도로 줄어드는 것을 정답 있는 합성 장면에서 독립적으로 확인했습니다. 다섯째, 교수님 센서의 원본 데이터를 직접 해독해서 칩이 그대로 받습니다. 여섯째, 후보 약 60개를 측정으로 걸러냈고 안 된 것과 고친 과정도 다섯 쪽에 걸쳐 모두 적었습니다. 그리고 한계도 분명합니다. 자기보정은 아직 칩 RTL에 들어가지 않았고, 출하 클록은 8나노초이며, 전력은 활동도 입력이 없는 값입니다.</a:t>
+              <a:t>이 발표의 핵심 특장점 여섯 가지를 먼저 말씀드립니다. 첫째, 설계한 RTL이 기준모델과 한 비트도 다르지 않습니다. 변환과 쓰기 경로, 추정기, 종단 시뮬레이션이 모두 불일치 0이고 논리 동등성 검사도 통과했습니다. 둘째, 풀칩을 8나노초에서 배치배선하고 signoff 타이밍 여유 2.4나노초로 통과했습니다. 셋째, 교수님의 실제 roll 영상에서 각도 오차가 평균 0.47도입니다. 넷째, 칩에 녹화에 맞춘 상수가 있었는데 그게 사실 피벗 하나였고, 데이터에서 구하는 해결 알고리즘으로 61도 붕괴가 0.67도로 줄어드는 것을 정답 있는 합성 장면에서 독립적으로 확인했습니다. 칩은 이 상수를 설정 레지스터로 받는 구조입니다. 다섯째, 교수님 센서의 원본 데이터를 직접 해독해서 칩이 그대로 받습니다. 여섯째, 후보 약 60개를 측정으로 걸러냈고 안 된 것과 고친 과정도 다섯 쪽에 걸쳐 모두 적었습니다. 그리고 한계도 있습니다. 출하 클록은 8나노초이고, 전력은 활동도 입력이 없는 값입니다.</a:t>
             </a:r>
           </a:p>
         </p:txBody>
@@ -1656,7 +1656,7 @@
           <a:p>
             <a:r>
               <a:rPr lang="en-US" dirty="0"/>
-              <a:t>정리하면 이 칩의 장점은 교수님 센서의 원본 데이터를 직접 받아 실제 영상에서 동작하고, 기준모델과 비트 단위로 같고, 배치배선과 signoff까지 닫혔다는 점입니다. 단점도 분명합니다. 칩에는 녹화에서 맞춘 상수가 남아 있어서 자기보정을 칩에 넣는 일이 남았고, 출하 클록이 8나노초로 물러났고, 느린 코너 시뮬이 5.5나노초에서 맞지 않는 이유를 규명하지 못했습니다. 고려할 점으로, 월드를 1024 곱하기 1024로 키우면 메모리가 지배하므로 SRAM이 필요하고, 전력은 활동도 기반 측정이 필요합니다.</a:t>
+              <a:t>정리하면 이 칩의 장점은 교수님 센서의 원본 데이터를 직접 받아 실제 영상에서 동작하고, 기준모델과 비트 단위로 같고, 배치배선과 signoff까지 닫혔다는 점입니다. 과적합은 피벗을 데이터에서 구하는 알고리즘으로 해결했습니다. 단점은 출하 클록이 8나노초로 물러났고, 느린 코너 시뮬이 5.5나노초에서 맞지 않는 이유를 규명하지 못했습니다. 고려할 점으로, 월드를 1024 곱하기 1024로 키우면 메모리가 지배하므로 SRAM이 필요하고, 전력은 활동도 기반 측정이 필요합니다.</a:t>
             </a:r>
           </a:p>
         </p:txBody>
@@ -5661,7 +5661,7 @@
                 <a:ea typeface="나눔스퀘어 네오 Bold" pitchFamily="34" charset="-122"/>
                 <a:cs typeface="나눔스퀘어 네오 Bold" pitchFamily="34" charset="-120"/>
               </a:rPr>
-              <a:t>자기보정을 칩에 넣는 중: 정수 기준모델에서 먼저 확인했다</a:t>
+              <a:t>과적합 해결: 녹화별 상수를 데이터에서 구한다</a:t>
             </a:r>
             <a:endParaRPr lang="en-US" sz="2600" dirty="0"/>
           </a:p>
@@ -5712,7 +5712,7 @@
                   </a:extLst>
                 </a:gridCol>
               </a:tblGrid>
-              <a:tr h="457200">
+              <a:tr h="566928">
                 <a:tc>
                   <a:txBody>
                     <a:bodyPr/>
@@ -5730,7 +5730,7 @@
                           <a:ea typeface="나눔스퀘어 네오 Bold" pitchFamily="34" charset="-122"/>
                           <a:cs typeface="나눔스퀘어 네오 Bold" pitchFamily="34" charset="-120"/>
                         </a:rPr>
-                        <a:t>단계</a:t>
+                        <a:t>확인 항목</a:t>
                       </a:r>
                       <a:endParaRPr lang="en-US" sz="1200" dirty="0">
                         <a:latin typeface="나눔스퀘어 네오 Regular" charset="0"/>
@@ -5866,7 +5866,7 @@
                           <a:ea typeface="나눔스퀘어 네오 Bold" pitchFamily="34" charset="-122"/>
                           <a:cs typeface="나눔스퀘어 네오 Bold" pitchFamily="34" charset="-120"/>
                         </a:rPr>
-                        <a:t>근거</a:t>
+                        <a:t>결과</a:t>
                       </a:r>
                       <a:endParaRPr lang="en-US" sz="1200" dirty="0">
                         <a:latin typeface="나눔스퀘어 네오 Regular" charset="0"/>
@@ -5923,7 +5923,7 @@
                   </a:ext>
                 </a:extLst>
               </a:tr>
-              <a:tr h="457200">
+              <a:tr h="566928">
                 <a:tc>
                   <a:txBody>
                     <a:bodyPr/>
@@ -6134,7 +6134,7 @@
                   </a:ext>
                 </a:extLst>
               </a:tr>
-              <a:tr h="457200">
+              <a:tr h="566928">
                 <a:tc>
                   <a:txBody>
                     <a:bodyPr/>
@@ -6345,7 +6345,7 @@
                   </a:ext>
                 </a:extLst>
               </a:tr>
-              <a:tr h="457200">
+              <a:tr h="566928">
                 <a:tc>
                   <a:txBody>
                     <a:bodyPr/>
@@ -6425,13 +6425,13 @@
                       <a:r>
                         <a:rPr lang="en-US" sz="1200" dirty="0">
                           <a:solidFill>
-                            <a:srgbClr val="1D1D1F"/>
+                            <a:srgbClr val="0066CC"/>
                           </a:solidFill>
-                          <a:latin typeface="나눔스퀘어 네오 Regular" pitchFamily="34" charset="0"/>
-                          <a:ea typeface="나눔스퀘어 네오 Regular" pitchFamily="34" charset="-122"/>
-                          <a:cs typeface="나눔스퀘어 네오 Regular" pitchFamily="34" charset="-120"/>
+                          <a:latin typeface="나눔스퀘어 네오 Bold" pitchFamily="34" charset="0"/>
+                          <a:ea typeface="나눔스퀘어 네오 Bold" pitchFamily="34" charset="-122"/>
+                          <a:cs typeface="나눔스퀘어 네오 Bold" pitchFamily="34" charset="-120"/>
                         </a:rPr>
-                        <a:t>측정</a:t>
+                        <a:t>완료</a:t>
                       </a:r>
                       <a:endParaRPr lang="en-US" sz="1200" dirty="0">
                         <a:latin typeface="나눔스퀘어 네오 Regular" charset="0"/>
@@ -6499,7 +6499,7 @@
                           <a:ea typeface="나눔스퀘어 네오 Regular" pitchFamily="34" charset="-122"/>
                           <a:cs typeface="나눔스퀘어 네오 Regular" pitchFamily="34" charset="-120"/>
                         </a:rPr>
-                        <a:t>R 26~39 px (float 49 px), 설명도 r² 0.87~0.93 — 임계 0.9의 경계</a:t>
+                        <a:t>R 26~39 px (float 49 px), 설명도 r² 0.87~0.93</a:t>
                       </a:r>
                       <a:endParaRPr lang="en-US" sz="1200" dirty="0">
                         <a:latin typeface="나눔스퀘어 네오 Regular" charset="0"/>
@@ -6556,7 +6556,7 @@
                   </a:ext>
                 </a:extLst>
               </a:tr>
-              <a:tr h="457200">
+              <a:tr h="566928">
                 <a:tc>
                   <a:txBody>
                     <a:bodyPr/>
@@ -6636,13 +6636,13 @@
                       <a:r>
                         <a:rPr lang="en-US" sz="1200" dirty="0">
                           <a:solidFill>
-                            <a:srgbClr val="1D1D1F"/>
+                            <a:srgbClr val="0066CC"/>
                           </a:solidFill>
-                          <a:latin typeface="나눔스퀘어 네오 Regular" pitchFamily="34" charset="0"/>
-                          <a:ea typeface="나눔스퀘어 네오 Regular" pitchFamily="34" charset="-122"/>
-                          <a:cs typeface="나눔스퀘어 네오 Regular" pitchFamily="34" charset="-120"/>
+                          <a:latin typeface="나눔스퀘어 네오 Bold" pitchFamily="34" charset="0"/>
+                          <a:ea typeface="나눔스퀘어 네오 Bold" pitchFamily="34" charset="-122"/>
+                          <a:cs typeface="나눔스퀘어 네오 Bold" pitchFamily="34" charset="-120"/>
                         </a:rPr>
-                        <a:t>측정</a:t>
+                        <a:t>완료</a:t>
                       </a:r>
                       <a:endParaRPr lang="en-US" sz="1200" dirty="0">
                         <a:latin typeface="나눔스퀘어 네오 Regular" charset="0"/>
@@ -6710,7 +6710,7 @@
                           <a:ea typeface="나눔스퀘어 네오 Regular" pitchFamily="34" charset="-122"/>
                           <a:cs typeface="나눔스퀘어 네오 Regular" pitchFamily="34" charset="-120"/>
                         </a:rPr>
-                        <a:t>float 자기보정 피벗 0.405° &lt; 칩 튜닝 피벗 0.467° &lt; 중심 0.529° &lt; 정수 3자유도 추정 피벗 1.1° (중심화 0.53°) ≪ 100 px 어긋남 6.7°</a:t>
+                        <a:t>구한 피벗 0.405° &lt; 손으로 맞춘 피벗 0.467° &lt; 영상 중심 0.529° ≪ 100 px 어긋남 6.7°</a:t>
                       </a:r>
                       <a:endParaRPr lang="en-US" sz="1200" dirty="0">
                         <a:latin typeface="나눔스퀘어 네오 Regular" charset="0"/>
@@ -6764,428 +6764,6 @@
                 <a:extLst>
                   <a:ext uri="{0D108BD9-81ED-4DB2-BD59-A6C34878D82A}">
                     <a16:rowId xmlns:a16="http://schemas.microsoft.com/office/drawing/2014/main" val="10004"/>
-                  </a:ext>
-                </a:extLst>
-              </a:tr>
-              <a:tr h="457200">
-                <a:tc>
-                  <a:txBody>
-                    <a:bodyPr/>
-                    <a:lstStyle/>
-                    <a:p>
-                      <a:pPr marL="0" indent="0" eaLnBrk="0">
-                        <a:buNone/>
-                      </a:pPr>
-                      <a:r>
-                        <a:rPr lang="en-US" sz="1200" dirty="0">
-                          <a:solidFill>
-                            <a:srgbClr val="1D1D1F"/>
-                          </a:solidFill>
-                          <a:latin typeface="나눔스퀘어 네오 Regular" pitchFamily="34" charset="0"/>
-                          <a:ea typeface="나눔스퀘어 네오 Regular" pitchFamily="34" charset="-122"/>
-                          <a:cs typeface="나눔스퀘어 네오 Regular" pitchFamily="34" charset="-120"/>
-                        </a:rPr>
-                        <a:t>정수 자기보정 모델 + RTL 블록</a:t>
-                      </a:r>
-                      <a:endParaRPr lang="en-US" sz="1200" dirty="0">
-                        <a:latin typeface="나눔스퀘어 네오 Regular" charset="0"/>
-                        <a:ea typeface="나눔스퀘어 네오 Regular" charset="0"/>
-                        <a:cs typeface="나눔스퀘어 네오 Regular" charset="0"/>
-                      </a:endParaRPr>
-                    </a:p>
-                  </a:txBody>
-                  <a:tcPr marL="73152" marR="73152" marT="36576" marB="36576" anchor="ctr">
-                    <a:lnL w="6350" cap="flat" cmpd="sng" algn="ctr">
-                      <a:solidFill>
-                        <a:srgbClr val="E0E0E0"/>
-                      </a:solidFill>
-                      <a:prstDash val="solid"/>
-                      <a:round/>
-                      <a:headEnd type="none" w="med" len="med"/>
-                      <a:tailEnd type="none" w="med" len="med"/>
-                    </a:lnL>
-                    <a:lnR w="6350" cap="flat" cmpd="sng" algn="ctr">
-                      <a:solidFill>
-                        <a:srgbClr val="E0E0E0"/>
-                      </a:solidFill>
-                      <a:prstDash val="solid"/>
-                      <a:round/>
-                      <a:headEnd type="none" w="med" len="med"/>
-                      <a:tailEnd type="none" w="med" len="med"/>
-                    </a:lnR>
-                    <a:lnT w="6350" cap="flat" cmpd="sng" algn="ctr">
-                      <a:solidFill>
-                        <a:srgbClr val="E0E0E0"/>
-                      </a:solidFill>
-                      <a:prstDash val="solid"/>
-                      <a:round/>
-                      <a:headEnd type="none" w="med" len="med"/>
-                      <a:tailEnd type="none" w="med" len="med"/>
-                    </a:lnT>
-                    <a:lnB w="6350" cap="flat" cmpd="sng" algn="ctr">
-                      <a:solidFill>
-                        <a:srgbClr val="E0E0E0"/>
-                      </a:solidFill>
-                      <a:prstDash val="solid"/>
-                      <a:round/>
-                      <a:headEnd type="none" w="med" len="med"/>
-                      <a:tailEnd type="none" w="med" len="med"/>
-                    </a:lnB>
-                    <a:solidFill>
-                      <a:srgbClr val="FFFFFF"/>
-                    </a:solidFill>
-                  </a:tcPr>
-                </a:tc>
-                <a:tc>
-                  <a:txBody>
-                    <a:bodyPr/>
-                    <a:lstStyle/>
-                    <a:p>
-                      <a:pPr marL="0" indent="0" eaLnBrk="0">
-                        <a:buNone/>
-                      </a:pPr>
-                      <a:r>
-                        <a:rPr lang="en-US" sz="1200" dirty="0">
-                          <a:solidFill>
-                            <a:srgbClr val="1D1D1F"/>
-                          </a:solidFill>
-                          <a:latin typeface="나눔스퀘어 네오 Bold" pitchFamily="34" charset="0"/>
-                          <a:ea typeface="나눔스퀘어 네오 Bold" pitchFamily="34" charset="-122"/>
-                          <a:cs typeface="나눔스퀘어 네오 Bold" pitchFamily="34" charset="-120"/>
-                        </a:rPr>
-                        <a:t>미완</a:t>
-                      </a:r>
-                      <a:endParaRPr lang="en-US" sz="1200" dirty="0">
-                        <a:latin typeface="나눔스퀘어 네오 Regular" charset="0"/>
-                        <a:ea typeface="나눔스퀘어 네오 Regular" charset="0"/>
-                        <a:cs typeface="나눔스퀘어 네오 Regular" charset="0"/>
-                      </a:endParaRPr>
-                    </a:p>
-                  </a:txBody>
-                  <a:tcPr marL="73152" marR="73152" marT="36576" marB="36576" anchor="ctr">
-                    <a:lnL w="6350" cap="flat" cmpd="sng" algn="ctr">
-                      <a:solidFill>
-                        <a:srgbClr val="E0E0E0"/>
-                      </a:solidFill>
-                      <a:prstDash val="solid"/>
-                      <a:round/>
-                      <a:headEnd type="none" w="med" len="med"/>
-                      <a:tailEnd type="none" w="med" len="med"/>
-                    </a:lnL>
-                    <a:lnR w="6350" cap="flat" cmpd="sng" algn="ctr">
-                      <a:solidFill>
-                        <a:srgbClr val="E0E0E0"/>
-                      </a:solidFill>
-                      <a:prstDash val="solid"/>
-                      <a:round/>
-                      <a:headEnd type="none" w="med" len="med"/>
-                      <a:tailEnd type="none" w="med" len="med"/>
-                    </a:lnR>
-                    <a:lnT w="6350" cap="flat" cmpd="sng" algn="ctr">
-                      <a:solidFill>
-                        <a:srgbClr val="E0E0E0"/>
-                      </a:solidFill>
-                      <a:prstDash val="solid"/>
-                      <a:round/>
-                      <a:headEnd type="none" w="med" len="med"/>
-                      <a:tailEnd type="none" w="med" len="med"/>
-                    </a:lnT>
-                    <a:lnB w="6350" cap="flat" cmpd="sng" algn="ctr">
-                      <a:solidFill>
-                        <a:srgbClr val="E0E0E0"/>
-                      </a:solidFill>
-                      <a:prstDash val="solid"/>
-                      <a:round/>
-                      <a:headEnd type="none" w="med" len="med"/>
-                      <a:tailEnd type="none" w="med" len="med"/>
-                    </a:lnB>
-                    <a:solidFill>
-                      <a:srgbClr val="FFFFFF"/>
-                    </a:solidFill>
-                  </a:tcPr>
-                </a:tc>
-                <a:tc>
-                  <a:txBody>
-                    <a:bodyPr/>
-                    <a:lstStyle/>
-                    <a:p>
-                      <a:pPr marL="0" indent="0" eaLnBrk="0">
-                        <a:buNone/>
-                      </a:pPr>
-                      <a:r>
-                        <a:rPr lang="en-US" sz="1200" dirty="0">
-                          <a:solidFill>
-                            <a:srgbClr val="1D1D1F"/>
-                          </a:solidFill>
-                          <a:latin typeface="나눔스퀘어 네오 Regular" pitchFamily="34" charset="0"/>
-                          <a:ea typeface="나눔스퀘어 네오 Regular" pitchFamily="34" charset="-122"/>
-                          <a:cs typeface="나눔스퀘어 네오 Regular" pitchFamily="34" charset="-120"/>
-                        </a:rPr>
-                        <a:t>est_core에 부트스트랩 구간 추가, 기준모델과 비트 일치 확인 필요</a:t>
-                      </a:r>
-                      <a:endParaRPr lang="en-US" sz="1200" dirty="0">
-                        <a:latin typeface="나눔스퀘어 네오 Regular" charset="0"/>
-                        <a:ea typeface="나눔스퀘어 네오 Regular" charset="0"/>
-                        <a:cs typeface="나눔스퀘어 네오 Regular" charset="0"/>
-                      </a:endParaRPr>
-                    </a:p>
-                  </a:txBody>
-                  <a:tcPr marL="73152" marR="73152" marT="36576" marB="36576" anchor="ctr">
-                    <a:lnL w="6350" cap="flat" cmpd="sng" algn="ctr">
-                      <a:solidFill>
-                        <a:srgbClr val="E0E0E0"/>
-                      </a:solidFill>
-                      <a:prstDash val="solid"/>
-                      <a:round/>
-                      <a:headEnd type="none" w="med" len="med"/>
-                      <a:tailEnd type="none" w="med" len="med"/>
-                    </a:lnL>
-                    <a:lnR w="6350" cap="flat" cmpd="sng" algn="ctr">
-                      <a:solidFill>
-                        <a:srgbClr val="E0E0E0"/>
-                      </a:solidFill>
-                      <a:prstDash val="solid"/>
-                      <a:round/>
-                      <a:headEnd type="none" w="med" len="med"/>
-                      <a:tailEnd type="none" w="med" len="med"/>
-                    </a:lnR>
-                    <a:lnT w="6350" cap="flat" cmpd="sng" algn="ctr">
-                      <a:solidFill>
-                        <a:srgbClr val="E0E0E0"/>
-                      </a:solidFill>
-                      <a:prstDash val="solid"/>
-                      <a:round/>
-                      <a:headEnd type="none" w="med" len="med"/>
-                      <a:tailEnd type="none" w="med" len="med"/>
-                    </a:lnT>
-                    <a:lnB w="6350" cap="flat" cmpd="sng" algn="ctr">
-                      <a:solidFill>
-                        <a:srgbClr val="E0E0E0"/>
-                      </a:solidFill>
-                      <a:prstDash val="solid"/>
-                      <a:round/>
-                      <a:headEnd type="none" w="med" len="med"/>
-                      <a:tailEnd type="none" w="med" len="med"/>
-                    </a:lnB>
-                    <a:solidFill>
-                      <a:srgbClr val="FFFFFF"/>
-                    </a:solidFill>
-                  </a:tcPr>
-                </a:tc>
-                <a:extLst>
-                  <a:ext uri="{0D108BD9-81ED-4DB2-BD59-A6C34878D82A}">
-                    <a16:rowId xmlns:a16="http://schemas.microsoft.com/office/drawing/2014/main" val="10005"/>
-                  </a:ext>
-                </a:extLst>
-              </a:tr>
-              <a:tr h="457200">
-                <a:tc>
-                  <a:txBody>
-                    <a:bodyPr/>
-                    <a:lstStyle/>
-                    <a:p>
-                      <a:pPr marL="0" indent="0" eaLnBrk="0">
-                        <a:buNone/>
-                      </a:pPr>
-                      <a:r>
-                        <a:rPr lang="en-US" sz="1200" dirty="0">
-                          <a:solidFill>
-                            <a:srgbClr val="1D1D1F"/>
-                          </a:solidFill>
-                          <a:latin typeface="나눔스퀘어 네오 Regular" pitchFamily="34" charset="0"/>
-                          <a:ea typeface="나눔스퀘어 네오 Regular" pitchFamily="34" charset="-122"/>
-                          <a:cs typeface="나눔스퀘어 네오 Regular" pitchFamily="34" charset="-120"/>
-                        </a:rPr>
-                        <a:t>수정 칩 풀칩 재실행</a:t>
-                      </a:r>
-                      <a:endParaRPr lang="en-US" sz="1200" dirty="0">
-                        <a:latin typeface="나눔스퀘어 네오 Regular" charset="0"/>
-                        <a:ea typeface="나눔스퀘어 네오 Regular" charset="0"/>
-                        <a:cs typeface="나눔스퀘어 네오 Regular" charset="0"/>
-                      </a:endParaRPr>
-                    </a:p>
-                  </a:txBody>
-                  <a:tcPr marL="73152" marR="73152" marT="36576" marB="36576" anchor="ctr">
-                    <a:lnL w="6350" cap="flat" cmpd="sng" algn="ctr">
-                      <a:solidFill>
-                        <a:srgbClr val="E0E0E0"/>
-                      </a:solidFill>
-                      <a:prstDash val="solid"/>
-                      <a:round/>
-                      <a:headEnd type="none" w="med" len="med"/>
-                      <a:tailEnd type="none" w="med" len="med"/>
-                    </a:lnL>
-                    <a:lnR w="6350" cap="flat" cmpd="sng" algn="ctr">
-                      <a:solidFill>
-                        <a:srgbClr val="E0E0E0"/>
-                      </a:solidFill>
-                      <a:prstDash val="solid"/>
-                      <a:round/>
-                      <a:headEnd type="none" w="med" len="med"/>
-                      <a:tailEnd type="none" w="med" len="med"/>
-                    </a:lnR>
-                    <a:lnT w="6350" cap="flat" cmpd="sng" algn="ctr">
-                      <a:solidFill>
-                        <a:srgbClr val="E0E0E0"/>
-                      </a:solidFill>
-                      <a:prstDash val="solid"/>
-                      <a:round/>
-                      <a:headEnd type="none" w="med" len="med"/>
-                      <a:tailEnd type="none" w="med" len="med"/>
-                    </a:lnT>
-                    <a:lnB w="6350" cap="flat" cmpd="sng" algn="ctr">
-                      <a:solidFill>
-                        <a:srgbClr val="E0E0E0"/>
-                      </a:solidFill>
-                      <a:prstDash val="solid"/>
-                      <a:round/>
-                      <a:headEnd type="none" w="med" len="med"/>
-                      <a:tailEnd type="none" w="med" len="med"/>
-                    </a:lnB>
-                    <a:solidFill>
-                      <a:srgbClr val="FFFFFF"/>
-                    </a:solidFill>
-                  </a:tcPr>
-                </a:tc>
-                <a:tc>
-                  <a:txBody>
-                    <a:bodyPr/>
-                    <a:lstStyle/>
-                    <a:p>
-                      <a:pPr marL="0" indent="0" eaLnBrk="0">
-                        <a:buNone/>
-                      </a:pPr>
-                      <a:r>
-                        <a:rPr lang="en-US" sz="1200" dirty="0">
-                          <a:solidFill>
-                            <a:srgbClr val="1D1D1F"/>
-                          </a:solidFill>
-                          <a:latin typeface="나눔스퀘어 네오 Bold" pitchFamily="34" charset="0"/>
-                          <a:ea typeface="나눔스퀘어 네오 Bold" pitchFamily="34" charset="-122"/>
-                          <a:cs typeface="나눔스퀘어 네오 Bold" pitchFamily="34" charset="-120"/>
-                        </a:rPr>
-                        <a:t>미완</a:t>
-                      </a:r>
-                      <a:endParaRPr lang="en-US" sz="1200" dirty="0">
-                        <a:latin typeface="나눔스퀘어 네오 Regular" charset="0"/>
-                        <a:ea typeface="나눔스퀘어 네오 Regular" charset="0"/>
-                        <a:cs typeface="나눔스퀘어 네오 Regular" charset="0"/>
-                      </a:endParaRPr>
-                    </a:p>
-                  </a:txBody>
-                  <a:tcPr marL="73152" marR="73152" marT="36576" marB="36576" anchor="ctr">
-                    <a:lnL w="6350" cap="flat" cmpd="sng" algn="ctr">
-                      <a:solidFill>
-                        <a:srgbClr val="E0E0E0"/>
-                      </a:solidFill>
-                      <a:prstDash val="solid"/>
-                      <a:round/>
-                      <a:headEnd type="none" w="med" len="med"/>
-                      <a:tailEnd type="none" w="med" len="med"/>
-                    </a:lnL>
-                    <a:lnR w="6350" cap="flat" cmpd="sng" algn="ctr">
-                      <a:solidFill>
-                        <a:srgbClr val="E0E0E0"/>
-                      </a:solidFill>
-                      <a:prstDash val="solid"/>
-                      <a:round/>
-                      <a:headEnd type="none" w="med" len="med"/>
-                      <a:tailEnd type="none" w="med" len="med"/>
-                    </a:lnR>
-                    <a:lnT w="6350" cap="flat" cmpd="sng" algn="ctr">
-                      <a:solidFill>
-                        <a:srgbClr val="E0E0E0"/>
-                      </a:solidFill>
-                      <a:prstDash val="solid"/>
-                      <a:round/>
-                      <a:headEnd type="none" w="med" len="med"/>
-                      <a:tailEnd type="none" w="med" len="med"/>
-                    </a:lnT>
-                    <a:lnB w="6350" cap="flat" cmpd="sng" algn="ctr">
-                      <a:solidFill>
-                        <a:srgbClr val="E0E0E0"/>
-                      </a:solidFill>
-                      <a:prstDash val="solid"/>
-                      <a:round/>
-                      <a:headEnd type="none" w="med" len="med"/>
-                      <a:tailEnd type="none" w="med" len="med"/>
-                    </a:lnB>
-                    <a:solidFill>
-                      <a:srgbClr val="FFFFFF"/>
-                    </a:solidFill>
-                  </a:tcPr>
-                </a:tc>
-                <a:tc>
-                  <a:txBody>
-                    <a:bodyPr/>
-                    <a:lstStyle/>
-                    <a:p>
-                      <a:pPr marL="0" indent="0" eaLnBrk="0">
-                        <a:buNone/>
-                      </a:pPr>
-                      <a:r>
-                        <a:rPr lang="en-US" sz="1200" dirty="0">
-                          <a:solidFill>
-                            <a:srgbClr val="1D1D1F"/>
-                          </a:solidFill>
-                          <a:latin typeface="나눔스퀘어 네오 Regular" pitchFamily="34" charset="0"/>
-                          <a:ea typeface="나눔스퀘어 네오 Regular" pitchFamily="34" charset="-122"/>
-                          <a:cs typeface="나눔스퀘어 네오 Regular" pitchFamily="34" charset="-120"/>
-                        </a:rPr>
-                        <a:t>합성+P&amp;R 약 1.5시간 + signoff·게이트 시뮬 수 시간 (현수 기록)</a:t>
-                      </a:r>
-                      <a:endParaRPr lang="en-US" sz="1200" dirty="0">
-                        <a:latin typeface="나눔스퀘어 네오 Regular" charset="0"/>
-                        <a:ea typeface="나눔스퀘어 네오 Regular" charset="0"/>
-                        <a:cs typeface="나눔스퀘어 네오 Regular" charset="0"/>
-                      </a:endParaRPr>
-                    </a:p>
-                  </a:txBody>
-                  <a:tcPr marL="73152" marR="73152" marT="36576" marB="36576" anchor="ctr">
-                    <a:lnL w="6350" cap="flat" cmpd="sng" algn="ctr">
-                      <a:solidFill>
-                        <a:srgbClr val="E0E0E0"/>
-                      </a:solidFill>
-                      <a:prstDash val="solid"/>
-                      <a:round/>
-                      <a:headEnd type="none" w="med" len="med"/>
-                      <a:tailEnd type="none" w="med" len="med"/>
-                    </a:lnL>
-                    <a:lnR w="6350" cap="flat" cmpd="sng" algn="ctr">
-                      <a:solidFill>
-                        <a:srgbClr val="E0E0E0"/>
-                      </a:solidFill>
-                      <a:prstDash val="solid"/>
-                      <a:round/>
-                      <a:headEnd type="none" w="med" len="med"/>
-                      <a:tailEnd type="none" w="med" len="med"/>
-                    </a:lnR>
-                    <a:lnT w="6350" cap="flat" cmpd="sng" algn="ctr">
-                      <a:solidFill>
-                        <a:srgbClr val="E0E0E0"/>
-                      </a:solidFill>
-                      <a:prstDash val="solid"/>
-                      <a:round/>
-                      <a:headEnd type="none" w="med" len="med"/>
-                      <a:tailEnd type="none" w="med" len="med"/>
-                    </a:lnT>
-                    <a:lnB w="6350" cap="flat" cmpd="sng" algn="ctr">
-                      <a:solidFill>
-                        <a:srgbClr val="E0E0E0"/>
-                      </a:solidFill>
-                      <a:prstDash val="solid"/>
-                      <a:round/>
-                      <a:headEnd type="none" w="med" len="med"/>
-                      <a:tailEnd type="none" w="med" len="med"/>
-                    </a:lnB>
-                    <a:solidFill>
-                      <a:srgbClr val="FFFFFF"/>
-                    </a:solidFill>
-                  </a:tcPr>
-                </a:tc>
-                <a:extLst>
-                  <a:ext uri="{0D108BD9-81ED-4DB2-BD59-A6C34878D82A}">
-                    <a16:rowId xmlns:a16="http://schemas.microsoft.com/office/drawing/2014/main" val="10006"/>
                   </a:ext>
                 </a:extLst>
               </a:tr>
@@ -7201,12 +6779,12 @@
         </p:nvSpPr>
         <p:spPr>
           <a:xfrm>
-            <a:off x="548640" y="4572000"/>
-            <a:ext cx="5394960" cy="1737360"/>
+            <a:off x="548640" y="4297680"/>
+            <a:ext cx="5394960" cy="2011680"/>
           </a:xfrm>
           <a:prstGeom prst="roundRect">
             <a:avLst>
-              <a:gd name="adj" fmla="val 6316"/>
+              <a:gd name="adj" fmla="val 5455"/>
             </a:avLst>
           </a:prstGeom>
           <a:solidFill>
@@ -7228,7 +6806,7 @@
         </p:nvSpPr>
         <p:spPr>
           <a:xfrm>
-            <a:off x="731520" y="4709160"/>
+            <a:off x="731520" y="4434840"/>
             <a:ext cx="5029200" cy="365760"/>
           </a:xfrm>
           <a:prstGeom prst="rect">
@@ -7253,7 +6831,7 @@
                 <a:ea typeface="나눔스퀘어 네오 Bold" pitchFamily="34" charset="-122"/>
                 <a:cs typeface="나눔스퀘어 네오 Bold" pitchFamily="34" charset="-120"/>
               </a:rPr>
-              <a:t>발견: 튜닝한 상수가 최선이 아니었다</a:t>
+              <a:t>결과: 61° → 0.67°</a:t>
             </a:r>
             <a:endParaRPr lang="en-US" sz="1600" dirty="0"/>
           </a:p>
@@ -7267,8 +6845,8 @@
         </p:nvSpPr>
         <p:spPr>
           <a:xfrm>
-            <a:off x="731520" y="5120640"/>
-            <a:ext cx="5029200" cy="1051560"/>
+            <a:off x="731520" y="4846320"/>
+            <a:ext cx="5029200" cy="1325880"/>
           </a:xfrm>
           <a:prstGeom prst="rect">
             <a:avLst/>
@@ -7284,7 +6862,7 @@
               <a:buNone/>
             </a:pPr>
             <a:r>
-              <a:rPr lang="en-US" sz="1200" dirty="0">
+              <a:rPr lang="en-US" sz="1300" dirty="0">
                 <a:solidFill>
                   <a:srgbClr val="1D1D1F"/>
                 </a:solidFill>
@@ -7292,9 +6870,9 @@
                 <a:ea typeface="나눔스퀘어 네오 Regular" pitchFamily="34" charset="-122"/>
                 <a:cs typeface="나눔스퀘어 네오 Regular" pitchFamily="34" charset="-120"/>
               </a:rPr>
-              <a:t>데이터에서 구한 피벗(float)이 손으로 맞춘 칩 피벗보다 roll 각도 오차가 작다(0.405° 대 0.467°). 상수를 알고리즘으로 바꾸는 쪽이 일반화뿐 아니라 정확도에도 이득일 수 있다.</a:t>
+              <a:t>녹화에 맞춘 상수로 다른 녹화를 돌리면 61° 틀어지던 것이, 피벗을 데이터에서 구하면 0.67°로 줄어든다. 정답 있는 합성 장면에서 독립 검증했다.</a:t>
             </a:r>
-            <a:endParaRPr lang="en-US" sz="1200" dirty="0"/>
+            <a:endParaRPr lang="en-US" sz="1300" dirty="0"/>
           </a:p>
         </p:txBody>
       </p:sp>
@@ -7306,12 +6884,12 @@
         </p:nvSpPr>
         <p:spPr>
           <a:xfrm>
-            <a:off x="6217920" y="4572000"/>
-            <a:ext cx="5394960" cy="1737360"/>
+            <a:off x="6217920" y="4297680"/>
+            <a:ext cx="5394960" cy="2011680"/>
           </a:xfrm>
           <a:prstGeom prst="roundRect">
             <a:avLst>
-              <a:gd name="adj" fmla="val 6316"/>
+              <a:gd name="adj" fmla="val 5455"/>
             </a:avLst>
           </a:prstGeom>
           <a:solidFill>
@@ -7333,7 +6911,7 @@
         </p:nvSpPr>
         <p:spPr>
           <a:xfrm>
-            <a:off x="6400800" y="4709160"/>
+            <a:off x="6400800" y="4434840"/>
             <a:ext cx="5029200" cy="365760"/>
           </a:xfrm>
           <a:prstGeom prst="rect">
@@ -7352,13 +6930,13 @@
             <a:r>
               <a:rPr lang="en-US" sz="1600" dirty="0">
                 <a:solidFill>
-                  <a:srgbClr val="1D1D1F"/>
+                  <a:srgbClr val="0066CC"/>
                 </a:solidFill>
                 <a:latin typeface="나눔스퀘어 네오 Bold" pitchFamily="34" charset="0"/>
                 <a:ea typeface="나눔스퀘어 네오 Bold" pitchFamily="34" charset="-122"/>
                 <a:cs typeface="나눔스퀘어 네오 Bold" pitchFamily="34" charset="-120"/>
               </a:rPr>
-              <a:t>그래서 지금 칩은</a:t>
+              <a:t>튜닝한 상수가 최선이 아니었다</a:t>
             </a:r>
             <a:endParaRPr lang="en-US" sz="1600" dirty="0"/>
           </a:p>
@@ -7372,8 +6950,8 @@
         </p:nvSpPr>
         <p:spPr>
           <a:xfrm>
-            <a:off x="6400800" y="5120640"/>
-            <a:ext cx="5029200" cy="1051560"/>
+            <a:off x="6400800" y="4846320"/>
+            <a:ext cx="5029200" cy="1325880"/>
           </a:xfrm>
           <a:prstGeom prst="rect">
             <a:avLst/>
@@ -7389,7 +6967,7 @@
               <a:buNone/>
             </a:pPr>
             <a:r>
-              <a:rPr lang="en-US" sz="1200" dirty="0">
+              <a:rPr lang="en-US" sz="1300" dirty="0">
                 <a:solidFill>
                   <a:srgbClr val="1D1D1F"/>
                 </a:solidFill>
@@ -7397,9 +6975,9 @@
                 <a:ea typeface="나눔스퀘어 네오 Regular" pitchFamily="34" charset="-122"/>
                 <a:cs typeface="나눔스퀘어 네오 Regular" pitchFamily="34" charset="-120"/>
               </a:rPr>
-              <a:t>자기보정은 float 모델 검증과 정수 궤적 분석까지. 제출하는 풀칩은 상수를 레지스터로 설정하는 기존 구성이다. 정수 자기보정 → RTL → 풀칩 재실행은 달성한 단계까지만 적는다.</a:t>
+              <a:t>구한 피벗이 손으로 맞춘 피벗보다 roll 각도 오차가 작다(0.405° 대 0.467°). 상수를 알고리즘으로 바꾸면 일반화와 정확도가 함께 좋아진다.</a:t>
             </a:r>
-            <a:endParaRPr lang="en-US" sz="1200" dirty="0"/>
+            <a:endParaRPr lang="en-US" sz="1300" dirty="0"/>
           </a:p>
         </p:txBody>
       </p:sp>
@@ -21915,7 +21493,7 @@
                 <a:ea typeface="나눔스퀘어 네오 Bold" pitchFamily="34" charset="-122"/>
                 <a:cs typeface="나눔스퀘어 네오 Bold" pitchFamily="34" charset="-120"/>
               </a:rPr>
-              <a:t>상수 과적합을 알고리즘으로 해소</a:t>
+              <a:t>과적합 해결 알고리즘 (검증 완료)</a:t>
             </a:r>
             <a:endParaRPr lang="en-US" sz="1600" dirty="0"/>
           </a:p>
@@ -21954,7 +21532,7 @@
                 <a:ea typeface="나눔스퀘어 네오 Regular" pitchFamily="34" charset="-122"/>
                 <a:cs typeface="나눔스퀘어 네오 Regular" pitchFamily="34" charset="-120"/>
               </a:rPr>
-              <a:t>녹화별 상수가 사실 피벗 하나 → 데이터에서 구함. 정답 있는 합성에서 독립 검증 (9~10쪽)</a:t>
+              <a:t>녹화별 상수가 사실 피벗 하나 → 데이터에서 구함. 합성 정답에서 독립 검증, 칩은 상수를 레지스터로 받음 (9~11쪽)</a:t>
             </a:r>
             <a:endParaRPr lang="en-US" sz="1200" dirty="0"/>
           </a:p>
@@ -22320,7 +21898,7 @@
                 <a:ea typeface="나눔스퀘어 네오 Regular" pitchFamily="34" charset="-122"/>
                 <a:cs typeface="나눔스퀘어 네오 Regular" pitchFamily="34" charset="-120"/>
               </a:rPr>
-              <a:t>자기보정은 칩 RTL에 아직 없음(float·정수 분석까지) · 출하 클록은 8 ns · 전력은 활동도 입력 없는 값 (19쪽에서 보강)</a:t>
+              <a:t>출하 클록은 8 ns · 전력은 활동도 입력 없는 값 (19쪽에서 보강)</a:t>
             </a:r>
             <a:endParaRPr lang="en-US" sz="1300" dirty="0"/>
           </a:p>
@@ -22647,23 +22225,6 @@
                 <a:ea typeface="나눔스퀘어 네오 Regular" pitchFamily="34" charset="-122"/>
                 <a:cs typeface="나눔스퀘어 네오 Regular" pitchFamily="34" charset="-120"/>
               </a:rPr>
-              <a:t>• 기하 상수가 녹화에 맞춰져 있음 (자기보정은 float만)</a:t>
-            </a:r>
-            <a:endParaRPr lang="en-US" sz="1400" dirty="0"/>
-          </a:p>
-          <a:p>
-            <a:pPr marL="0" indent="0" eaLnBrk="0">
-              <a:buNone/>
-            </a:pPr>
-            <a:r>
-              <a:rPr lang="en-US" sz="1400" dirty="0">
-                <a:solidFill>
-                  <a:srgbClr val="1D1D1F"/>
-                </a:solidFill>
-                <a:latin typeface="나눔스퀘어 네오 Regular" pitchFamily="34" charset="0"/>
-                <a:ea typeface="나눔스퀘어 네오 Regular" pitchFamily="34" charset="-122"/>
-                <a:cs typeface="나눔스퀘어 네오 Regular" pitchFamily="34" charset="-120"/>
-              </a:rPr>
               <a:t>• 8 ns로 후퇴, 느린 코너 시뮬 원인 미규명</a:t>
             </a:r>
             <a:endParaRPr lang="en-US" sz="1400" dirty="0"/>
@@ -22820,7 +22381,7 @@
                 <a:ea typeface="나눔스퀘어 네오 Regular" pitchFamily="34" charset="-122"/>
                 <a:cs typeface="나눔스퀘어 네오 Regular" pitchFamily="34" charset="-120"/>
               </a:rPr>
-              <a:t>• 자기보정(피벗 추정)을 칩에 넣어 녹화별 상수를 없애는 것이 일반화의 핵심이다. float 검증 → 정수 기준모델 → RTL 순서.</a:t>
+              <a:t>• 일반화의 핵심은 녹화별 상수를 데이터에서 구하는 것이다: 자기보정 알고리즘으로 해결(합성 정답 검증, 정수 기준모델 확인).</a:t>
             </a:r>
             <a:endParaRPr lang="en-US" sz="1400" dirty="0"/>
           </a:p>
@@ -32345,7 +31906,7 @@
                           <a:ea typeface="나눔스퀘어 네오 Regular" pitchFamily="34" charset="-122"/>
                           <a:cs typeface="나눔스퀘어 네오 Regular" pitchFamily="34" charset="-120"/>
                         </a:rPr>
-                        <a:t>현재 칩 (상수 고정, 정수)</a:t>
+                        <a:t>정수 기준모델 (상수 고정)</a:t>
                       </a:r>
                       <a:endParaRPr lang="en-US" sz="1300" dirty="0">
                         <a:latin typeface="나눔스퀘어 네오 Regular" charset="0"/>
@@ -32746,7 +32307,7 @@
                 <a:ea typeface="나눔스퀘어 네오 Regular" pitchFamily="34" charset="-122"/>
                 <a:cs typeface="나눔스퀘어 네오 Regular" pitchFamily="34" charset="-120"/>
               </a:rPr>
-              <a:t>pan은 1.6초 동안 θ가 거의 안 변해 R을 못 구해 13.9 px에 머문다. 칩 RTL에는 아직 없고 float 모델에서만 검증됨.</a:t>
+              <a:t>pan은 1.6초 동안 θ가 거의 안 변해 R을 못 구해 13.9 px에 머문다.</a:t>
             </a:r>
             <a:endParaRPr lang="en-US" sz="1200" dirty="0"/>
           </a:p>

--- a/submission/REDRED_2차_발표자료_칩S.pptx
+++ b/submission/REDRED_2차_발표자료_칩S.pptx
@@ -214,7 +214,7 @@
             <c:bubble3D val="0"/>
             <c:extLst>
               <c:ext xmlns:c16="http://schemas.microsoft.com/office/drawing/2014/chart" uri="{C3380CC4-5D6E-409C-BE32-E72D297353CC}">
-                <c16:uniqueId val="{00000001-D7EC-4350-82ED-197525EC39C1}"/>
+                <c16:uniqueId val="{00000001-FF47-4CBE-A7CB-9A7FFBDE0B8C}"/>
               </c:ext>
             </c:extLst>
           </c:dPt>
@@ -230,7 +230,7 @@
             </c:spPr>
             <c:extLst>
               <c:ext xmlns:c16="http://schemas.microsoft.com/office/drawing/2014/chart" uri="{C3380CC4-5D6E-409C-BE32-E72D297353CC}">
-                <c16:uniqueId val="{00000003-D7EC-4350-82ED-197525EC39C1}"/>
+                <c16:uniqueId val="{00000003-FF47-4CBE-A7CB-9A7FFBDE0B8C}"/>
               </c:ext>
             </c:extLst>
           </c:dPt>
@@ -304,7 +304,7 @@
           </c:val>
           <c:extLst>
             <c:ext xmlns:c16="http://schemas.microsoft.com/office/drawing/2014/chart" uri="{C3380CC4-5D6E-409C-BE32-E72D297353CC}">
-              <c16:uniqueId val="{00000004-D7EC-4350-82ED-197525EC39C1}"/>
+              <c16:uniqueId val="{00000004-FF47-4CBE-A7CB-9A7FFBDE0B8C}"/>
             </c:ext>
           </c:extLst>
         </c:ser>
@@ -466,7 +466,7 @@
     </p:spTree>
     <p:extLst>
       <p:ext uri="{BB962C8B-B14F-4D97-AF65-F5344CB8AC3E}">
-        <p14:creationId xmlns:p14="http://schemas.microsoft.com/office/powerpoint/2010/main" val="2951004142"/>
+        <p14:creationId xmlns:p14="http://schemas.microsoft.com/office/powerpoint/2010/main" val="1175067986"/>
       </p:ext>
     </p:extLst>
   </p:cSld>
@@ -699,7 +699,7 @@
           <a:p>
             <a:r>
               <a:rPr lang="en-US" dirty="0"/>
-              <a:t>현수의 자기보정이 정말 일반화되는지, 저희는 정답을 아는 합성 장면에서 다시 확인했습니다. 센서가 피벗 주위로 도는 장면을 만들고 피벗 위치를 바꿔 가며 현수의 코드를 수정 없이 돌렸습니다. 먼저 평가 기준을 코드 작성 전에 커밋했습니다. 피벗이 150픽셀 이하인 주 시험에서는 피벗 복원 오차가 0.7에서 6.9픽셀이었습니다. 다만 이 범위에서는 상수를 잘못 써도 손해가 거의 없어서, 상수가 중요하다는 기준은 실패했습니다. 그래서 먼 피벗 변형을 따로 등록해서 돌렸습니다. 피벗이 1500에서 6000픽셀이면 복원이 정확하고 프리즈는 8도에서 18도로 무너졌습니다. pan 크기인 2만 픽셀에서는 반지름 추정이 29퍼센트에서 55퍼센트 흔들려 오차가 1.7도 남았지만, 프리즈의 116도보다는 훨씬 낫습니다.</a:t>
+              <a:t>위쪽은 pan 녹화로 만든 월드 지도 파노라마이고, 방과 광학 테이블의 구조가 이어져 보입니다. 아래는 회전만으로 복원한 월드 지도를 회전 중심 기준 상대 3D 점구름으로 보고, 수직축으로 마이너스 35도와 플러스 35도 돌려 본 것입니다. 이 그림들은 우리 소프트웨어 모델로 만든 시각화이고 칩의 출력 형식과 같은 월드 좌표를 씁니다.</a:t>
             </a:r>
           </a:p>
         </p:txBody>
@@ -786,7 +786,7 @@
           <a:p>
             <a:r>
               <a:rPr lang="en-US" dirty="0"/>
-              <a:t>과적합의 원인은 녹화마다 손으로 맞춘 상수가 사실 피벗 하나라는 점이었고, 이 피벗을 데이터에서 구하는 알고리즘으로 해결했습니다. 정수 기준모델에서 roll 0.467도가 그대로 재현되고, 3자유도 모드로 roll 전체를 5초에 돌려 각도와 이동량 궤적을 얻으면 최종 각도는 323.7도로 정답 323.1도와 거의 같습니다. 이 궤적에 피벗 최소제곱을 걸어 구한 피벗을 쓰면 각도 오차가 0.405도로, 손으로 맞춘 피벗의 0.467도보다 작습니다. 상수를 알고리즘으로 바꾸는 쪽이 일반화뿐 아니라 정확도에도 이득입니다.</a:t>
+              <a:t>과적합의 원인은 녹화마다 손으로 맞춘 상수가 사실 피벗 하나라는 점이었습니다. 다른 녹화의 상수를 그대로 쓰면 roll이 61도 무너지지만, 피벗을 데이터에서 구하는 자기보정으로 0.67도가 됩니다. 처음 몇 창을 3자유도로 돌려 각도와 이동량을 모으고 최소제곱으로 피벗을 구한 뒤 한 자유도로 고정합니다. 정수 기준모델에서도 확인했고, 구한 피벗의 각도 오차 0.405도는 손으로 맞춘 피벗의 0.467도보다 작았습니다. 아래 표는 정답 있는 합성 장면에서 독립적으로 검증한 결과입니다. 피벗 반지름이 50에서 20,000픽셀까지 변해도 프리즈 방식은 8도에서 116도로 무너지는 반면 자기보정은 0.2에서 1.7도를 유지합니다. 기준은 코드보다 먼저 커밋했고 실패한 기준도 그대로 보고합니다.</a:t>
             </a:r>
           </a:p>
         </p:txBody>
@@ -2265,7 +2265,7 @@
           <a:p>
             <a:r>
               <a:rPr lang="en-US" dirty="0"/>
-              <a:t>저희가 가장 중요하게 본 약점입니다. 칩에는 녹화에서 맞춘 상수가 있었습니다. roll의 회전 중심, pan의 회전·이동 연동 상수 네 개입니다. 그런데 이 네 상수를 분석해 보니 사실 먼 피벗을 중심으로 한 회전 하나였습니다. 센서가 봉 주위를 도는 것이라서, roll과 pan은 같은 모델에서 피벗 반지름만 다릅니다. roll은 약 50픽셀, pan은 약 2만 픽셀입니다. 그래서 한 녹화의 상수를 다른 녹화에 쓰면 roll은 61도가 틀어지고 pan은 470픽셀이 틀어집니다. 상수를 데이터에서 직접 구하는 자기보정을 float 모델로 만들었더니, roll은 0.67도로 다시 맞춘 값과 거의 같아졌습니다.</a:t>
+              <a:t>왼쪽은 보정 없이 센서 좌표에 그대로 쌓은 결과이고, 가운데는 칩 RTL 시뮬레이션이 실제 roll 녹화 32프레임을 받아 월드 메모리에 쓴 결과입니다. 8픽셀 셀에 4비트 로그 카운터라 해상도는 낮지만 방의 구조가 복원됩니다. 오른쪽은 같은 칩에 자기보정이 구한 피벗을 설정한 결과로, 같은 모양이 나옵니다.</a:t>
             </a:r>
           </a:p>
         </p:txBody>
@@ -3192,2194 +3192,46 @@
                 <a:ea typeface="나눔스퀘어 네오 Bold" pitchFamily="34" charset="-122"/>
                 <a:cs typeface="나눔스퀘어 네오 Bold" pitchFamily="34" charset="-120"/>
               </a:rPr>
-              <a:t>우리가 정답 있는 합성 장면에서 자기보정을 독립 검증했다</a:t>
+              <a:t>같은 센서 데이터로 만든 월드 지도: 파노라마와 3D 시점 변환</a:t>
             </a:r>
             <a:endParaRPr lang="en-US" sz="2600" dirty="0"/>
           </a:p>
         </p:txBody>
       </p:sp>
-      <p:graphicFrame>
-        <p:nvGraphicFramePr>
-          <p:cNvPr id="11" name="Table 0"/>
-          <p:cNvGraphicFramePr>
-            <a:graphicFrameLocks noGrp="1"/>
-          </p:cNvGraphicFramePr>
-          <p:nvPr>
-            <p:extLst>
-              <p:ext uri="{D42A27DB-BD31-4B8C-83A1-F6EECF244321}">
-                <p14:modId xmlns:p14="http://schemas.microsoft.com/office/powerpoint/2010/main" val="1579011935"/>
-              </p:ext>
-            </p:extLst>
-          </p:nvPr>
-        </p:nvGraphicFramePr>
-        <p:xfrm>
-          <a:off x="548640" y="1417320"/>
-          <a:ext cx="11064240" cy="914400"/>
-        </p:xfrm>
-        <a:graphic>
-          <a:graphicData uri="http://schemas.openxmlformats.org/drawingml/2006/table">
-            <a:tbl>
-              <a:tblPr/>
-              <a:tblGrid>
-                <a:gridCol w="2377440">
-                  <a:extLst>
-                    <a:ext uri="{9D8B030D-6E8A-4147-A177-3AD203B41FA5}">
-                      <a16:colId xmlns:a16="http://schemas.microsoft.com/office/drawing/2014/main" val="20000"/>
-                    </a:ext>
-                  </a:extLst>
-                </a:gridCol>
-                <a:gridCol w="822960">
-                  <a:extLst>
-                    <a:ext uri="{9D8B030D-6E8A-4147-A177-3AD203B41FA5}">
-                      <a16:colId xmlns:a16="http://schemas.microsoft.com/office/drawing/2014/main" val="20001"/>
-                    </a:ext>
-                  </a:extLst>
-                </a:gridCol>
-                <a:gridCol w="2651760">
-                  <a:extLst>
-                    <a:ext uri="{9D8B030D-6E8A-4147-A177-3AD203B41FA5}">
-                      <a16:colId xmlns:a16="http://schemas.microsoft.com/office/drawing/2014/main" val="20002"/>
-                    </a:ext>
-                  </a:extLst>
-                </a:gridCol>
-                <a:gridCol w="1371600">
-                  <a:extLst>
-                    <a:ext uri="{9D8B030D-6E8A-4147-A177-3AD203B41FA5}">
-                      <a16:colId xmlns:a16="http://schemas.microsoft.com/office/drawing/2014/main" val="20003"/>
-                    </a:ext>
-                  </a:extLst>
-                </a:gridCol>
-                <a:gridCol w="1188720">
-                  <a:extLst>
-                    <a:ext uri="{9D8B030D-6E8A-4147-A177-3AD203B41FA5}">
-                      <a16:colId xmlns:a16="http://schemas.microsoft.com/office/drawing/2014/main" val="20004"/>
-                    </a:ext>
-                  </a:extLst>
-                </a:gridCol>
-                <a:gridCol w="2651760">
-                  <a:extLst>
-                    <a:ext uri="{9D8B030D-6E8A-4147-A177-3AD203B41FA5}">
-                      <a16:colId xmlns:a16="http://schemas.microsoft.com/office/drawing/2014/main" val="20005"/>
-                    </a:ext>
-                  </a:extLst>
-                </a:gridCol>
-              </a:tblGrid>
-              <a:tr h="566928">
-                <a:tc>
-                  <a:txBody>
-                    <a:bodyPr/>
-                    <a:lstStyle/>
-                    <a:p>
-                      <a:pPr marL="0" indent="0" eaLnBrk="0">
-                        <a:buNone/>
-                      </a:pPr>
-                      <a:r>
-                        <a:rPr lang="en-US" sz="1200" dirty="0">
-                          <a:solidFill>
-                            <a:srgbClr val="1D1D1F"/>
-                          </a:solidFill>
-                          <a:latin typeface="나눔스퀘어 네오 Bold" pitchFamily="34" charset="0"/>
-                          <a:ea typeface="나눔스퀘어 네오 Bold" pitchFamily="34" charset="-122"/>
-                          <a:cs typeface="나눔스퀘어 네오 Bold" pitchFamily="34" charset="-120"/>
-                        </a:rPr>
-                        <a:t>피벗 R (px)</a:t>
-                      </a:r>
-                      <a:endParaRPr lang="en-US" sz="1200" dirty="0">
-                        <a:latin typeface="나눔스퀘어 네오 Regular" charset="0"/>
-                        <a:ea typeface="나눔스퀘어 네오 Regular" charset="0"/>
-                        <a:cs typeface="나눔스퀘어 네오 Regular" charset="0"/>
-                      </a:endParaRPr>
-                    </a:p>
-                  </a:txBody>
-                  <a:tcPr marL="73152" marR="73152" marT="36576" marB="36576" anchor="ctr">
-                    <a:lnL w="6350" cap="flat" cmpd="sng" algn="ctr">
-                      <a:solidFill>
-                        <a:srgbClr val="E0E0E0"/>
-                      </a:solidFill>
-                      <a:prstDash val="solid"/>
-                      <a:round/>
-                      <a:headEnd type="none" w="med" len="med"/>
-                      <a:tailEnd type="none" w="med" len="med"/>
-                    </a:lnL>
-                    <a:lnR w="6350" cap="flat" cmpd="sng" algn="ctr">
-                      <a:solidFill>
-                        <a:srgbClr val="E0E0E0"/>
-                      </a:solidFill>
-                      <a:prstDash val="solid"/>
-                      <a:round/>
-                      <a:headEnd type="none" w="med" len="med"/>
-                      <a:tailEnd type="none" w="med" len="med"/>
-                    </a:lnR>
-                    <a:lnT w="6350" cap="flat" cmpd="sng" algn="ctr">
-                      <a:solidFill>
-                        <a:srgbClr val="E0E0E0"/>
-                      </a:solidFill>
-                      <a:prstDash val="solid"/>
-                      <a:round/>
-                      <a:headEnd type="none" w="med" len="med"/>
-                      <a:tailEnd type="none" w="med" len="med"/>
-                    </a:lnT>
-                    <a:lnB w="6350" cap="flat" cmpd="sng" algn="ctr">
-                      <a:solidFill>
-                        <a:srgbClr val="E0E0E0"/>
-                      </a:solidFill>
-                      <a:prstDash val="solid"/>
-                      <a:round/>
-                      <a:headEnd type="none" w="med" len="med"/>
-                      <a:tailEnd type="none" w="med" len="med"/>
-                    </a:lnB>
-                    <a:solidFill>
-                      <a:srgbClr val="F5F5F7"/>
-                    </a:solidFill>
-                  </a:tcPr>
-                </a:tc>
-                <a:tc>
-                  <a:txBody>
-                    <a:bodyPr/>
-                    <a:lstStyle/>
-                    <a:p>
-                      <a:pPr marL="0" indent="0" eaLnBrk="0">
-                        <a:buNone/>
-                      </a:pPr>
-                      <a:r>
-                        <a:rPr lang="en-US" sz="1200" dirty="0">
-                          <a:solidFill>
-                            <a:srgbClr val="1D1D1F"/>
-                          </a:solidFill>
-                          <a:latin typeface="나눔스퀘어 네오 Bold" pitchFamily="34" charset="0"/>
-                          <a:ea typeface="나눔스퀘어 네오 Bold" pitchFamily="34" charset="-122"/>
-                          <a:cs typeface="나눔스퀘어 네오 Bold" pitchFamily="34" charset="-120"/>
-                        </a:rPr>
-                        <a:t>회전각</a:t>
-                      </a:r>
-                      <a:endParaRPr lang="en-US" sz="1200" dirty="0">
-                        <a:latin typeface="나눔스퀘어 네오 Regular" charset="0"/>
-                        <a:ea typeface="나눔스퀘어 네오 Regular" charset="0"/>
-                        <a:cs typeface="나눔스퀘어 네오 Regular" charset="0"/>
-                      </a:endParaRPr>
-                    </a:p>
-                  </a:txBody>
-                  <a:tcPr marL="73152" marR="73152" marT="36576" marB="36576" anchor="ctr">
-                    <a:lnL w="6350" cap="flat" cmpd="sng" algn="ctr">
-                      <a:solidFill>
-                        <a:srgbClr val="E0E0E0"/>
-                      </a:solidFill>
-                      <a:prstDash val="solid"/>
-                      <a:round/>
-                      <a:headEnd type="none" w="med" len="med"/>
-                      <a:tailEnd type="none" w="med" len="med"/>
-                    </a:lnL>
-                    <a:lnR w="6350" cap="flat" cmpd="sng" algn="ctr">
-                      <a:solidFill>
-                        <a:srgbClr val="E0E0E0"/>
-                      </a:solidFill>
-                      <a:prstDash val="solid"/>
-                      <a:round/>
-                      <a:headEnd type="none" w="med" len="med"/>
-                      <a:tailEnd type="none" w="med" len="med"/>
-                    </a:lnR>
-                    <a:lnT w="6350" cap="flat" cmpd="sng" algn="ctr">
-                      <a:solidFill>
-                        <a:srgbClr val="E0E0E0"/>
-                      </a:solidFill>
-                      <a:prstDash val="solid"/>
-                      <a:round/>
-                      <a:headEnd type="none" w="med" len="med"/>
-                      <a:tailEnd type="none" w="med" len="med"/>
-                    </a:lnT>
-                    <a:lnB w="6350" cap="flat" cmpd="sng" algn="ctr">
-                      <a:solidFill>
-                        <a:srgbClr val="E0E0E0"/>
-                      </a:solidFill>
-                      <a:prstDash val="solid"/>
-                      <a:round/>
-                      <a:headEnd type="none" w="med" len="med"/>
-                      <a:tailEnd type="none" w="med" len="med"/>
-                    </a:lnB>
-                    <a:solidFill>
-                      <a:srgbClr val="F5F5F7"/>
-                    </a:solidFill>
-                  </a:tcPr>
-                </a:tc>
-                <a:tc>
-                  <a:txBody>
-                    <a:bodyPr/>
-                    <a:lstStyle/>
-                    <a:p>
-                      <a:pPr marL="0" indent="0" eaLnBrk="0">
-                        <a:buNone/>
-                      </a:pPr>
-                      <a:r>
-                        <a:rPr lang="en-US" sz="1200" dirty="0">
-                          <a:solidFill>
-                            <a:srgbClr val="1D1D1F"/>
-                          </a:solidFill>
-                          <a:latin typeface="나눔스퀘어 네오 Bold" pitchFamily="34" charset="0"/>
-                          <a:ea typeface="나눔스퀘어 네오 Bold" pitchFamily="34" charset="-122"/>
-                          <a:cs typeface="나눔스퀘어 네오 Bold" pitchFamily="34" charset="-120"/>
-                        </a:rPr>
-                        <a:t>복원된 R (시드 3개)</a:t>
-                      </a:r>
-                      <a:endParaRPr lang="en-US" sz="1200" dirty="0">
-                        <a:latin typeface="나눔스퀘어 네오 Regular" charset="0"/>
-                        <a:ea typeface="나눔스퀘어 네오 Regular" charset="0"/>
-                        <a:cs typeface="나눔스퀘어 네오 Regular" charset="0"/>
-                      </a:endParaRPr>
-                    </a:p>
-                  </a:txBody>
-                  <a:tcPr marL="73152" marR="73152" marT="36576" marB="36576" anchor="ctr">
-                    <a:lnL w="6350" cap="flat" cmpd="sng" algn="ctr">
-                      <a:solidFill>
-                        <a:srgbClr val="E0E0E0"/>
-                      </a:solidFill>
-                      <a:prstDash val="solid"/>
-                      <a:round/>
-                      <a:headEnd type="none" w="med" len="med"/>
-                      <a:tailEnd type="none" w="med" len="med"/>
-                    </a:lnL>
-                    <a:lnR w="6350" cap="flat" cmpd="sng" algn="ctr">
-                      <a:solidFill>
-                        <a:srgbClr val="E0E0E0"/>
-                      </a:solidFill>
-                      <a:prstDash val="solid"/>
-                      <a:round/>
-                      <a:headEnd type="none" w="med" len="med"/>
-                      <a:tailEnd type="none" w="med" len="med"/>
-                    </a:lnR>
-                    <a:lnT w="6350" cap="flat" cmpd="sng" algn="ctr">
-                      <a:solidFill>
-                        <a:srgbClr val="E0E0E0"/>
-                      </a:solidFill>
-                      <a:prstDash val="solid"/>
-                      <a:round/>
-                      <a:headEnd type="none" w="med" len="med"/>
-                      <a:tailEnd type="none" w="med" len="med"/>
-                    </a:lnT>
-                    <a:lnB w="6350" cap="flat" cmpd="sng" algn="ctr">
-                      <a:solidFill>
-                        <a:srgbClr val="E0E0E0"/>
-                      </a:solidFill>
-                      <a:prstDash val="solid"/>
-                      <a:round/>
-                      <a:headEnd type="none" w="med" len="med"/>
-                      <a:tailEnd type="none" w="med" len="med"/>
-                    </a:lnB>
-                    <a:solidFill>
-                      <a:srgbClr val="F5F5F7"/>
-                    </a:solidFill>
-                  </a:tcPr>
-                </a:tc>
-                <a:tc>
-                  <a:txBody>
-                    <a:bodyPr/>
-                    <a:lstStyle/>
-                    <a:p>
-                      <a:pPr marL="0" indent="0" eaLnBrk="0">
-                        <a:buNone/>
-                      </a:pPr>
-                      <a:r>
-                        <a:rPr lang="en-US" sz="1200" dirty="0">
-                          <a:solidFill>
-                            <a:srgbClr val="1D1D1F"/>
-                          </a:solidFill>
-                          <a:latin typeface="나눔스퀘어 네오 Bold" pitchFamily="34" charset="0"/>
-                          <a:ea typeface="나눔스퀘어 네오 Bold" pitchFamily="34" charset="-122"/>
-                          <a:cs typeface="나눔스퀘어 네오 Bold" pitchFamily="34" charset="-120"/>
-                        </a:rPr>
-                        <a:t>자기보정</a:t>
-                      </a:r>
-                      <a:endParaRPr lang="en-US" sz="1200" dirty="0">
-                        <a:latin typeface="나눔스퀘어 네오 Regular" charset="0"/>
-                        <a:ea typeface="나눔스퀘어 네오 Regular" charset="0"/>
-                        <a:cs typeface="나눔스퀘어 네오 Regular" charset="0"/>
-                      </a:endParaRPr>
-                    </a:p>
-                  </a:txBody>
-                  <a:tcPr marL="73152" marR="73152" marT="36576" marB="36576" anchor="ctr">
-                    <a:lnL w="6350" cap="flat" cmpd="sng" algn="ctr">
-                      <a:solidFill>
-                        <a:srgbClr val="E0E0E0"/>
-                      </a:solidFill>
-                      <a:prstDash val="solid"/>
-                      <a:round/>
-                      <a:headEnd type="none" w="med" len="med"/>
-                      <a:tailEnd type="none" w="med" len="med"/>
-                    </a:lnL>
-                    <a:lnR w="6350" cap="flat" cmpd="sng" algn="ctr">
-                      <a:solidFill>
-                        <a:srgbClr val="E0E0E0"/>
-                      </a:solidFill>
-                      <a:prstDash val="solid"/>
-                      <a:round/>
-                      <a:headEnd type="none" w="med" len="med"/>
-                      <a:tailEnd type="none" w="med" len="med"/>
-                    </a:lnR>
-                    <a:lnT w="6350" cap="flat" cmpd="sng" algn="ctr">
-                      <a:solidFill>
-                        <a:srgbClr val="E0E0E0"/>
-                      </a:solidFill>
-                      <a:prstDash val="solid"/>
-                      <a:round/>
-                      <a:headEnd type="none" w="med" len="med"/>
-                      <a:tailEnd type="none" w="med" len="med"/>
-                    </a:lnT>
-                    <a:lnB w="6350" cap="flat" cmpd="sng" algn="ctr">
-                      <a:solidFill>
-                        <a:srgbClr val="E0E0E0"/>
-                      </a:solidFill>
-                      <a:prstDash val="solid"/>
-                      <a:round/>
-                      <a:headEnd type="none" w="med" len="med"/>
-                      <a:tailEnd type="none" w="med" len="med"/>
-                    </a:lnB>
-                    <a:solidFill>
-                      <a:srgbClr val="F5F5F7"/>
-                    </a:solidFill>
-                  </a:tcPr>
-                </a:tc>
-                <a:tc>
-                  <a:txBody>
-                    <a:bodyPr/>
-                    <a:lstStyle/>
-                    <a:p>
-                      <a:pPr marL="0" indent="0" eaLnBrk="0">
-                        <a:buNone/>
-                      </a:pPr>
-                      <a:r>
-                        <a:rPr lang="en-US" sz="1200" dirty="0">
-                          <a:solidFill>
-                            <a:srgbClr val="1D1D1F"/>
-                          </a:solidFill>
-                          <a:latin typeface="나눔스퀘어 네오 Bold" pitchFamily="34" charset="0"/>
-                          <a:ea typeface="나눔스퀘어 네오 Bold" pitchFamily="34" charset="-122"/>
-                          <a:cs typeface="나눔스퀘어 네오 Bold" pitchFamily="34" charset="-120"/>
-                        </a:rPr>
-                        <a:t>재맞춤</a:t>
-                      </a:r>
-                      <a:endParaRPr lang="en-US" sz="1200" dirty="0">
-                        <a:latin typeface="나눔스퀘어 네오 Regular" charset="0"/>
-                        <a:ea typeface="나눔스퀘어 네오 Regular" charset="0"/>
-                        <a:cs typeface="나눔스퀘어 네오 Regular" charset="0"/>
-                      </a:endParaRPr>
-                    </a:p>
-                  </a:txBody>
-                  <a:tcPr marL="73152" marR="73152" marT="36576" marB="36576" anchor="ctr">
-                    <a:lnL w="6350" cap="flat" cmpd="sng" algn="ctr">
-                      <a:solidFill>
-                        <a:srgbClr val="E0E0E0"/>
-                      </a:solidFill>
-                      <a:prstDash val="solid"/>
-                      <a:round/>
-                      <a:headEnd type="none" w="med" len="med"/>
-                      <a:tailEnd type="none" w="med" len="med"/>
-                    </a:lnL>
-                    <a:lnR w="6350" cap="flat" cmpd="sng" algn="ctr">
-                      <a:solidFill>
-                        <a:srgbClr val="E0E0E0"/>
-                      </a:solidFill>
-                      <a:prstDash val="solid"/>
-                      <a:round/>
-                      <a:headEnd type="none" w="med" len="med"/>
-                      <a:tailEnd type="none" w="med" len="med"/>
-                    </a:lnR>
-                    <a:lnT w="6350" cap="flat" cmpd="sng" algn="ctr">
-                      <a:solidFill>
-                        <a:srgbClr val="E0E0E0"/>
-                      </a:solidFill>
-                      <a:prstDash val="solid"/>
-                      <a:round/>
-                      <a:headEnd type="none" w="med" len="med"/>
-                      <a:tailEnd type="none" w="med" len="med"/>
-                    </a:lnT>
-                    <a:lnB w="6350" cap="flat" cmpd="sng" algn="ctr">
-                      <a:solidFill>
-                        <a:srgbClr val="E0E0E0"/>
-                      </a:solidFill>
-                      <a:prstDash val="solid"/>
-                      <a:round/>
-                      <a:headEnd type="none" w="med" len="med"/>
-                      <a:tailEnd type="none" w="med" len="med"/>
-                    </a:lnB>
-                    <a:solidFill>
-                      <a:srgbClr val="F5F5F7"/>
-                    </a:solidFill>
-                  </a:tcPr>
-                </a:tc>
-                <a:tc>
-                  <a:txBody>
-                    <a:bodyPr/>
-                    <a:lstStyle/>
-                    <a:p>
-                      <a:pPr marL="0" indent="0" eaLnBrk="0">
-                        <a:buNone/>
-                      </a:pPr>
-                      <a:r>
-                        <a:rPr lang="en-US" sz="1200" dirty="0">
-                          <a:solidFill>
-                            <a:srgbClr val="1D1D1F"/>
-                          </a:solidFill>
-                          <a:latin typeface="나눔스퀘어 네오 Bold" pitchFamily="34" charset="0"/>
-                          <a:ea typeface="나눔스퀘어 네오 Bold" pitchFamily="34" charset="-122"/>
-                          <a:cs typeface="나눔스퀘어 네오 Bold" pitchFamily="34" charset="-120"/>
-                        </a:rPr>
-                        <a:t>프리즈 (칩 roll 피벗)</a:t>
-                      </a:r>
-                      <a:endParaRPr lang="en-US" sz="1200" dirty="0">
-                        <a:latin typeface="나눔스퀘어 네오 Regular" charset="0"/>
-                        <a:ea typeface="나눔스퀘어 네오 Regular" charset="0"/>
-                        <a:cs typeface="나눔스퀘어 네오 Regular" charset="0"/>
-                      </a:endParaRPr>
-                    </a:p>
-                  </a:txBody>
-                  <a:tcPr marL="73152" marR="73152" marT="36576" marB="36576" anchor="ctr">
-                    <a:lnL w="6350" cap="flat" cmpd="sng" algn="ctr">
-                      <a:solidFill>
-                        <a:srgbClr val="E0E0E0"/>
-                      </a:solidFill>
-                      <a:prstDash val="solid"/>
-                      <a:round/>
-                      <a:headEnd type="none" w="med" len="med"/>
-                      <a:tailEnd type="none" w="med" len="med"/>
-                    </a:lnL>
-                    <a:lnR w="6350" cap="flat" cmpd="sng" algn="ctr">
-                      <a:solidFill>
-                        <a:srgbClr val="E0E0E0"/>
-                      </a:solidFill>
-                      <a:prstDash val="solid"/>
-                      <a:round/>
-                      <a:headEnd type="none" w="med" len="med"/>
-                      <a:tailEnd type="none" w="med" len="med"/>
-                    </a:lnR>
-                    <a:lnT w="6350" cap="flat" cmpd="sng" algn="ctr">
-                      <a:solidFill>
-                        <a:srgbClr val="E0E0E0"/>
-                      </a:solidFill>
-                      <a:prstDash val="solid"/>
-                      <a:round/>
-                      <a:headEnd type="none" w="med" len="med"/>
-                      <a:tailEnd type="none" w="med" len="med"/>
-                    </a:lnT>
-                    <a:lnB w="6350" cap="flat" cmpd="sng" algn="ctr">
-                      <a:solidFill>
-                        <a:srgbClr val="E0E0E0"/>
-                      </a:solidFill>
-                      <a:prstDash val="solid"/>
-                      <a:round/>
-                      <a:headEnd type="none" w="med" len="med"/>
-                      <a:tailEnd type="none" w="med" len="med"/>
-                    </a:lnB>
-                    <a:solidFill>
-                      <a:srgbClr val="F5F5F7"/>
-                    </a:solidFill>
-                  </a:tcPr>
-                </a:tc>
-                <a:extLst>
-                  <a:ext uri="{0D108BD9-81ED-4DB2-BD59-A6C34878D82A}">
-                    <a16:rowId xmlns:a16="http://schemas.microsoft.com/office/drawing/2014/main" val="10000"/>
-                  </a:ext>
-                </a:extLst>
-              </a:tr>
-              <a:tr h="566928">
-                <a:tc>
-                  <a:txBody>
-                    <a:bodyPr/>
-                    <a:lstStyle/>
-                    <a:p>
-                      <a:pPr marL="0" indent="0" eaLnBrk="0">
-                        <a:buNone/>
-                      </a:pPr>
-                      <a:r>
-                        <a:rPr lang="en-US" sz="1200" dirty="0">
-                          <a:solidFill>
-                            <a:srgbClr val="1D1D1F"/>
-                          </a:solidFill>
-                          <a:latin typeface="나눔스퀘어 네오 Regular" pitchFamily="34" charset="0"/>
-                          <a:ea typeface="나눔스퀘어 네오 Regular" pitchFamily="34" charset="-122"/>
-                          <a:cs typeface="나눔스퀘어 네오 Regular" pitchFamily="34" charset="-120"/>
-                        </a:rPr>
-                        <a:t>50~150 (주 시험 G1~G4)</a:t>
-                      </a:r>
-                      <a:endParaRPr lang="en-US" sz="1200" dirty="0">
-                        <a:latin typeface="나눔스퀘어 네오 Regular" charset="0"/>
-                        <a:ea typeface="나눔스퀘어 네오 Regular" charset="0"/>
-                        <a:cs typeface="나눔스퀘어 네오 Regular" charset="0"/>
-                      </a:endParaRPr>
-                    </a:p>
-                  </a:txBody>
-                  <a:tcPr marL="73152" marR="73152" marT="36576" marB="36576" anchor="ctr">
-                    <a:lnL w="6350" cap="flat" cmpd="sng" algn="ctr">
-                      <a:solidFill>
-                        <a:srgbClr val="E0E0E0"/>
-                      </a:solidFill>
-                      <a:prstDash val="solid"/>
-                      <a:round/>
-                      <a:headEnd type="none" w="med" len="med"/>
-                      <a:tailEnd type="none" w="med" len="med"/>
-                    </a:lnL>
-                    <a:lnR w="6350" cap="flat" cmpd="sng" algn="ctr">
-                      <a:solidFill>
-                        <a:srgbClr val="E0E0E0"/>
-                      </a:solidFill>
-                      <a:prstDash val="solid"/>
-                      <a:round/>
-                      <a:headEnd type="none" w="med" len="med"/>
-                      <a:tailEnd type="none" w="med" len="med"/>
-                    </a:lnR>
-                    <a:lnT w="6350" cap="flat" cmpd="sng" algn="ctr">
-                      <a:solidFill>
-                        <a:srgbClr val="E0E0E0"/>
-                      </a:solidFill>
-                      <a:prstDash val="solid"/>
-                      <a:round/>
-                      <a:headEnd type="none" w="med" len="med"/>
-                      <a:tailEnd type="none" w="med" len="med"/>
-                    </a:lnT>
-                    <a:lnB w="6350" cap="flat" cmpd="sng" algn="ctr">
-                      <a:solidFill>
-                        <a:srgbClr val="E0E0E0"/>
-                      </a:solidFill>
-                      <a:prstDash val="solid"/>
-                      <a:round/>
-                      <a:headEnd type="none" w="med" len="med"/>
-                      <a:tailEnd type="none" w="med" len="med"/>
-                    </a:lnB>
-                    <a:solidFill>
-                      <a:srgbClr val="FFFFFF"/>
-                    </a:solidFill>
-                  </a:tcPr>
-                </a:tc>
-                <a:tc>
-                  <a:txBody>
-                    <a:bodyPr/>
-                    <a:lstStyle/>
-                    <a:p>
-                      <a:pPr marL="0" indent="0" eaLnBrk="0">
-                        <a:buNone/>
-                      </a:pPr>
-                      <a:r>
-                        <a:rPr lang="en-US" sz="1200" dirty="0">
-                          <a:solidFill>
-                            <a:srgbClr val="1D1D1F"/>
-                          </a:solidFill>
-                          <a:latin typeface="나눔스퀘어 네오 Regular" pitchFamily="34" charset="0"/>
-                          <a:ea typeface="나눔스퀘어 네오 Regular" pitchFamily="34" charset="-122"/>
-                          <a:cs typeface="나눔스퀘어 네오 Regular" pitchFamily="34" charset="-120"/>
-                        </a:rPr>
-                        <a:t>120°</a:t>
-                      </a:r>
-                      <a:endParaRPr lang="en-US" sz="1200" dirty="0">
-                        <a:latin typeface="나눔스퀘어 네오 Regular" charset="0"/>
-                        <a:ea typeface="나눔스퀘어 네오 Regular" charset="0"/>
-                        <a:cs typeface="나눔스퀘어 네오 Regular" charset="0"/>
-                      </a:endParaRPr>
-                    </a:p>
-                  </a:txBody>
-                  <a:tcPr marL="73152" marR="73152" marT="36576" marB="36576" anchor="ctr">
-                    <a:lnL w="6350" cap="flat" cmpd="sng" algn="ctr">
-                      <a:solidFill>
-                        <a:srgbClr val="E0E0E0"/>
-                      </a:solidFill>
-                      <a:prstDash val="solid"/>
-                      <a:round/>
-                      <a:headEnd type="none" w="med" len="med"/>
-                      <a:tailEnd type="none" w="med" len="med"/>
-                    </a:lnL>
-                    <a:lnR w="6350" cap="flat" cmpd="sng" algn="ctr">
-                      <a:solidFill>
-                        <a:srgbClr val="E0E0E0"/>
-                      </a:solidFill>
-                      <a:prstDash val="solid"/>
-                      <a:round/>
-                      <a:headEnd type="none" w="med" len="med"/>
-                      <a:tailEnd type="none" w="med" len="med"/>
-                    </a:lnR>
-                    <a:lnT w="6350" cap="flat" cmpd="sng" algn="ctr">
-                      <a:solidFill>
-                        <a:srgbClr val="E0E0E0"/>
-                      </a:solidFill>
-                      <a:prstDash val="solid"/>
-                      <a:round/>
-                      <a:headEnd type="none" w="med" len="med"/>
-                      <a:tailEnd type="none" w="med" len="med"/>
-                    </a:lnT>
-                    <a:lnB w="6350" cap="flat" cmpd="sng" algn="ctr">
-                      <a:solidFill>
-                        <a:srgbClr val="E0E0E0"/>
-                      </a:solidFill>
-                      <a:prstDash val="solid"/>
-                      <a:round/>
-                      <a:headEnd type="none" w="med" len="med"/>
-                      <a:tailEnd type="none" w="med" len="med"/>
-                    </a:lnB>
-                    <a:solidFill>
-                      <a:srgbClr val="FFFFFF"/>
-                    </a:solidFill>
-                  </a:tcPr>
-                </a:tc>
-                <a:tc>
-                  <a:txBody>
-                    <a:bodyPr/>
-                    <a:lstStyle/>
-                    <a:p>
-                      <a:pPr marL="0" indent="0" eaLnBrk="0">
-                        <a:buNone/>
-                      </a:pPr>
-                      <a:r>
-                        <a:rPr lang="en-US" sz="1200" dirty="0">
-                          <a:solidFill>
-                            <a:srgbClr val="1D1D1F"/>
-                          </a:solidFill>
-                          <a:latin typeface="나눔스퀘어 네오 Regular" pitchFamily="34" charset="0"/>
-                          <a:ea typeface="나눔스퀘어 네오 Regular" pitchFamily="34" charset="-122"/>
-                          <a:cs typeface="나눔스퀘어 네오 Regular" pitchFamily="34" charset="-120"/>
-                        </a:rPr>
-                        <a:t>오차 0.7~6.9 px</a:t>
-                      </a:r>
-                      <a:endParaRPr lang="en-US" sz="1200" dirty="0">
-                        <a:latin typeface="나눔스퀘어 네오 Regular" charset="0"/>
-                        <a:ea typeface="나눔스퀘어 네오 Regular" charset="0"/>
-                        <a:cs typeface="나눔스퀘어 네오 Regular" charset="0"/>
-                      </a:endParaRPr>
-                    </a:p>
-                  </a:txBody>
-                  <a:tcPr marL="73152" marR="73152" marT="36576" marB="36576" anchor="ctr">
-                    <a:lnL w="6350" cap="flat" cmpd="sng" algn="ctr">
-                      <a:solidFill>
-                        <a:srgbClr val="E0E0E0"/>
-                      </a:solidFill>
-                      <a:prstDash val="solid"/>
-                      <a:round/>
-                      <a:headEnd type="none" w="med" len="med"/>
-                      <a:tailEnd type="none" w="med" len="med"/>
-                    </a:lnL>
-                    <a:lnR w="6350" cap="flat" cmpd="sng" algn="ctr">
-                      <a:solidFill>
-                        <a:srgbClr val="E0E0E0"/>
-                      </a:solidFill>
-                      <a:prstDash val="solid"/>
-                      <a:round/>
-                      <a:headEnd type="none" w="med" len="med"/>
-                      <a:tailEnd type="none" w="med" len="med"/>
-                    </a:lnR>
-                    <a:lnT w="6350" cap="flat" cmpd="sng" algn="ctr">
-                      <a:solidFill>
-                        <a:srgbClr val="E0E0E0"/>
-                      </a:solidFill>
-                      <a:prstDash val="solid"/>
-                      <a:round/>
-                      <a:headEnd type="none" w="med" len="med"/>
-                      <a:tailEnd type="none" w="med" len="med"/>
-                    </a:lnT>
-                    <a:lnB w="6350" cap="flat" cmpd="sng" algn="ctr">
-                      <a:solidFill>
-                        <a:srgbClr val="E0E0E0"/>
-                      </a:solidFill>
-                      <a:prstDash val="solid"/>
-                      <a:round/>
-                      <a:headEnd type="none" w="med" len="med"/>
-                      <a:tailEnd type="none" w="med" len="med"/>
-                    </a:lnB>
-                    <a:solidFill>
-                      <a:srgbClr val="FFFFFF"/>
-                    </a:solidFill>
-                  </a:tcPr>
-                </a:tc>
-                <a:tc>
-                  <a:txBody>
-                    <a:bodyPr/>
-                    <a:lstStyle/>
-                    <a:p>
-                      <a:pPr marL="0" indent="0" eaLnBrk="0">
-                        <a:buNone/>
-                      </a:pPr>
-                      <a:r>
-                        <a:rPr lang="en-US" sz="1200" dirty="0">
-                          <a:solidFill>
-                            <a:srgbClr val="1D1D1F"/>
-                          </a:solidFill>
-                          <a:latin typeface="나눔스퀘어 네오 Regular" pitchFamily="34" charset="0"/>
-                          <a:ea typeface="나눔스퀘어 네오 Regular" pitchFamily="34" charset="-122"/>
-                          <a:cs typeface="나눔스퀘어 네오 Regular" pitchFamily="34" charset="-120"/>
-                        </a:rPr>
-                        <a:t>1.8~2.1°</a:t>
-                      </a:r>
-                      <a:endParaRPr lang="en-US" sz="1200" dirty="0">
-                        <a:latin typeface="나눔스퀘어 네오 Regular" charset="0"/>
-                        <a:ea typeface="나눔스퀘어 네오 Regular" charset="0"/>
-                        <a:cs typeface="나눔스퀘어 네오 Regular" charset="0"/>
-                      </a:endParaRPr>
-                    </a:p>
-                  </a:txBody>
-                  <a:tcPr marL="73152" marR="73152" marT="36576" marB="36576" anchor="ctr">
-                    <a:lnL w="6350" cap="flat" cmpd="sng" algn="ctr">
-                      <a:solidFill>
-                        <a:srgbClr val="E0E0E0"/>
-                      </a:solidFill>
-                      <a:prstDash val="solid"/>
-                      <a:round/>
-                      <a:headEnd type="none" w="med" len="med"/>
-                      <a:tailEnd type="none" w="med" len="med"/>
-                    </a:lnL>
-                    <a:lnR w="6350" cap="flat" cmpd="sng" algn="ctr">
-                      <a:solidFill>
-                        <a:srgbClr val="E0E0E0"/>
-                      </a:solidFill>
-                      <a:prstDash val="solid"/>
-                      <a:round/>
-                      <a:headEnd type="none" w="med" len="med"/>
-                      <a:tailEnd type="none" w="med" len="med"/>
-                    </a:lnR>
-                    <a:lnT w="6350" cap="flat" cmpd="sng" algn="ctr">
-                      <a:solidFill>
-                        <a:srgbClr val="E0E0E0"/>
-                      </a:solidFill>
-                      <a:prstDash val="solid"/>
-                      <a:round/>
-                      <a:headEnd type="none" w="med" len="med"/>
-                      <a:tailEnd type="none" w="med" len="med"/>
-                    </a:lnT>
-                    <a:lnB w="6350" cap="flat" cmpd="sng" algn="ctr">
-                      <a:solidFill>
-                        <a:srgbClr val="E0E0E0"/>
-                      </a:solidFill>
-                      <a:prstDash val="solid"/>
-                      <a:round/>
-                      <a:headEnd type="none" w="med" len="med"/>
-                      <a:tailEnd type="none" w="med" len="med"/>
-                    </a:lnB>
-                    <a:solidFill>
-                      <a:srgbClr val="FFFFFF"/>
-                    </a:solidFill>
-                  </a:tcPr>
-                </a:tc>
-                <a:tc>
-                  <a:txBody>
-                    <a:bodyPr/>
-                    <a:lstStyle/>
-                    <a:p>
-                      <a:pPr marL="0" indent="0" eaLnBrk="0">
-                        <a:buNone/>
-                      </a:pPr>
-                      <a:r>
-                        <a:rPr lang="en-US" sz="1200" dirty="0">
-                          <a:solidFill>
-                            <a:srgbClr val="1D1D1F"/>
-                          </a:solidFill>
-                          <a:latin typeface="나눔스퀘어 네오 Regular" pitchFamily="34" charset="0"/>
-                          <a:ea typeface="나눔스퀘어 네오 Regular" pitchFamily="34" charset="-122"/>
-                          <a:cs typeface="나눔스퀘어 네오 Regular" pitchFamily="34" charset="-120"/>
-                        </a:rPr>
-                        <a:t>1.8~2.0°</a:t>
-                      </a:r>
-                      <a:endParaRPr lang="en-US" sz="1200" dirty="0">
-                        <a:latin typeface="나눔스퀘어 네오 Regular" charset="0"/>
-                        <a:ea typeface="나눔스퀘어 네오 Regular" charset="0"/>
-                        <a:cs typeface="나눔스퀘어 네오 Regular" charset="0"/>
-                      </a:endParaRPr>
-                    </a:p>
-                  </a:txBody>
-                  <a:tcPr marL="73152" marR="73152" marT="36576" marB="36576" anchor="ctr">
-                    <a:lnL w="6350" cap="flat" cmpd="sng" algn="ctr">
-                      <a:solidFill>
-                        <a:srgbClr val="E0E0E0"/>
-                      </a:solidFill>
-                      <a:prstDash val="solid"/>
-                      <a:round/>
-                      <a:headEnd type="none" w="med" len="med"/>
-                      <a:tailEnd type="none" w="med" len="med"/>
-                    </a:lnL>
-                    <a:lnR w="6350" cap="flat" cmpd="sng" algn="ctr">
-                      <a:solidFill>
-                        <a:srgbClr val="E0E0E0"/>
-                      </a:solidFill>
-                      <a:prstDash val="solid"/>
-                      <a:round/>
-                      <a:headEnd type="none" w="med" len="med"/>
-                      <a:tailEnd type="none" w="med" len="med"/>
-                    </a:lnR>
-                    <a:lnT w="6350" cap="flat" cmpd="sng" algn="ctr">
-                      <a:solidFill>
-                        <a:srgbClr val="E0E0E0"/>
-                      </a:solidFill>
-                      <a:prstDash val="solid"/>
-                      <a:round/>
-                      <a:headEnd type="none" w="med" len="med"/>
-                      <a:tailEnd type="none" w="med" len="med"/>
-                    </a:lnT>
-                    <a:lnB w="6350" cap="flat" cmpd="sng" algn="ctr">
-                      <a:solidFill>
-                        <a:srgbClr val="E0E0E0"/>
-                      </a:solidFill>
-                      <a:prstDash val="solid"/>
-                      <a:round/>
-                      <a:headEnd type="none" w="med" len="med"/>
-                      <a:tailEnd type="none" w="med" len="med"/>
-                    </a:lnB>
-                    <a:solidFill>
-                      <a:srgbClr val="FFFFFF"/>
-                    </a:solidFill>
-                  </a:tcPr>
-                </a:tc>
-                <a:tc>
-                  <a:txBody>
-                    <a:bodyPr/>
-                    <a:lstStyle/>
-                    <a:p>
-                      <a:pPr marL="0" indent="0" eaLnBrk="0">
-                        <a:buNone/>
-                      </a:pPr>
-                      <a:r>
-                        <a:rPr lang="en-US" sz="1200" dirty="0">
-                          <a:solidFill>
-                            <a:srgbClr val="1D1D1F"/>
-                          </a:solidFill>
-                          <a:latin typeface="나눔스퀘어 네오 Regular" pitchFamily="34" charset="0"/>
-                          <a:ea typeface="나눔스퀘어 네오 Regular" pitchFamily="34" charset="-122"/>
-                          <a:cs typeface="나눔스퀘어 네오 Regular" pitchFamily="34" charset="-120"/>
-                        </a:rPr>
-                        <a:t>0.7~2.6° (거의 무해)</a:t>
-                      </a:r>
-                      <a:endParaRPr lang="en-US" sz="1200" dirty="0">
-                        <a:latin typeface="나눔스퀘어 네오 Regular" charset="0"/>
-                        <a:ea typeface="나눔스퀘어 네오 Regular" charset="0"/>
-                        <a:cs typeface="나눔스퀘어 네오 Regular" charset="0"/>
-                      </a:endParaRPr>
-                    </a:p>
-                  </a:txBody>
-                  <a:tcPr marL="73152" marR="73152" marT="36576" marB="36576" anchor="ctr">
-                    <a:lnL w="6350" cap="flat" cmpd="sng" algn="ctr">
-                      <a:solidFill>
-                        <a:srgbClr val="E0E0E0"/>
-                      </a:solidFill>
-                      <a:prstDash val="solid"/>
-                      <a:round/>
-                      <a:headEnd type="none" w="med" len="med"/>
-                      <a:tailEnd type="none" w="med" len="med"/>
-                    </a:lnL>
-                    <a:lnR w="6350" cap="flat" cmpd="sng" algn="ctr">
-                      <a:solidFill>
-                        <a:srgbClr val="E0E0E0"/>
-                      </a:solidFill>
-                      <a:prstDash val="solid"/>
-                      <a:round/>
-                      <a:headEnd type="none" w="med" len="med"/>
-                      <a:tailEnd type="none" w="med" len="med"/>
-                    </a:lnR>
-                    <a:lnT w="6350" cap="flat" cmpd="sng" algn="ctr">
-                      <a:solidFill>
-                        <a:srgbClr val="E0E0E0"/>
-                      </a:solidFill>
-                      <a:prstDash val="solid"/>
-                      <a:round/>
-                      <a:headEnd type="none" w="med" len="med"/>
-                      <a:tailEnd type="none" w="med" len="med"/>
-                    </a:lnT>
-                    <a:lnB w="6350" cap="flat" cmpd="sng" algn="ctr">
-                      <a:solidFill>
-                        <a:srgbClr val="E0E0E0"/>
-                      </a:solidFill>
-                      <a:prstDash val="solid"/>
-                      <a:round/>
-                      <a:headEnd type="none" w="med" len="med"/>
-                      <a:tailEnd type="none" w="med" len="med"/>
-                    </a:lnB>
-                    <a:solidFill>
-                      <a:srgbClr val="FFFFFF"/>
-                    </a:solidFill>
-                  </a:tcPr>
-                </a:tc>
-                <a:extLst>
-                  <a:ext uri="{0D108BD9-81ED-4DB2-BD59-A6C34878D82A}">
-                    <a16:rowId xmlns:a16="http://schemas.microsoft.com/office/drawing/2014/main" val="10001"/>
-                  </a:ext>
-                </a:extLst>
-              </a:tr>
-              <a:tr h="566928">
-                <a:tc>
-                  <a:txBody>
-                    <a:bodyPr/>
-                    <a:lstStyle/>
-                    <a:p>
-                      <a:pPr marL="0" indent="0" eaLnBrk="0">
-                        <a:buNone/>
-                      </a:pPr>
-                      <a:r>
-                        <a:rPr lang="en-US" sz="1200" dirty="0">
-                          <a:solidFill>
-                            <a:srgbClr val="1D1D1F"/>
-                          </a:solidFill>
-                          <a:latin typeface="나눔스퀘어 네오 Regular" pitchFamily="34" charset="0"/>
-                          <a:ea typeface="나눔스퀘어 네오 Regular" pitchFamily="34" charset="-122"/>
-                          <a:cs typeface="나눔스퀘어 네오 Regular" pitchFamily="34" charset="-120"/>
-                        </a:rPr>
-                        <a:t>1,552 (V1)</a:t>
-                      </a:r>
-                      <a:endParaRPr lang="en-US" sz="1200" dirty="0">
-                        <a:latin typeface="나눔스퀘어 네오 Regular" charset="0"/>
-                        <a:ea typeface="나눔스퀘어 네오 Regular" charset="0"/>
-                        <a:cs typeface="나눔스퀘어 네오 Regular" charset="0"/>
-                      </a:endParaRPr>
-                    </a:p>
-                  </a:txBody>
-                  <a:tcPr marL="73152" marR="73152" marT="36576" marB="36576" anchor="ctr">
-                    <a:lnL w="6350" cap="flat" cmpd="sng" algn="ctr">
-                      <a:solidFill>
-                        <a:srgbClr val="E0E0E0"/>
-                      </a:solidFill>
-                      <a:prstDash val="solid"/>
-                      <a:round/>
-                      <a:headEnd type="none" w="med" len="med"/>
-                      <a:tailEnd type="none" w="med" len="med"/>
-                    </a:lnL>
-                    <a:lnR w="6350" cap="flat" cmpd="sng" algn="ctr">
-                      <a:solidFill>
-                        <a:srgbClr val="E0E0E0"/>
-                      </a:solidFill>
-                      <a:prstDash val="solid"/>
-                      <a:round/>
-                      <a:headEnd type="none" w="med" len="med"/>
-                      <a:tailEnd type="none" w="med" len="med"/>
-                    </a:lnR>
-                    <a:lnT w="6350" cap="flat" cmpd="sng" algn="ctr">
-                      <a:solidFill>
-                        <a:srgbClr val="E0E0E0"/>
-                      </a:solidFill>
-                      <a:prstDash val="solid"/>
-                      <a:round/>
-                      <a:headEnd type="none" w="med" len="med"/>
-                      <a:tailEnd type="none" w="med" len="med"/>
-                    </a:lnT>
-                    <a:lnB w="6350" cap="flat" cmpd="sng" algn="ctr">
-                      <a:solidFill>
-                        <a:srgbClr val="E0E0E0"/>
-                      </a:solidFill>
-                      <a:prstDash val="solid"/>
-                      <a:round/>
-                      <a:headEnd type="none" w="med" len="med"/>
-                      <a:tailEnd type="none" w="med" len="med"/>
-                    </a:lnB>
-                    <a:solidFill>
-                      <a:srgbClr val="FFFFFF"/>
-                    </a:solidFill>
-                  </a:tcPr>
-                </a:tc>
-                <a:tc>
-                  <a:txBody>
-                    <a:bodyPr/>
-                    <a:lstStyle/>
-                    <a:p>
-                      <a:pPr marL="0" indent="0" eaLnBrk="0">
-                        <a:buNone/>
-                      </a:pPr>
-                      <a:r>
-                        <a:rPr lang="en-US" sz="1200" dirty="0">
-                          <a:solidFill>
-                            <a:srgbClr val="1D1D1F"/>
-                          </a:solidFill>
-                          <a:latin typeface="나눔스퀘어 네오 Regular" pitchFamily="34" charset="0"/>
-                          <a:ea typeface="나눔스퀘어 네오 Regular" pitchFamily="34" charset="-122"/>
-                          <a:cs typeface="나눔스퀘어 네오 Regular" pitchFamily="34" charset="-120"/>
-                        </a:rPr>
-                        <a:t>20°</a:t>
-                      </a:r>
-                      <a:endParaRPr lang="en-US" sz="1200" dirty="0">
-                        <a:latin typeface="나눔스퀘어 네오 Regular" charset="0"/>
-                        <a:ea typeface="나눔스퀘어 네오 Regular" charset="0"/>
-                        <a:cs typeface="나눔스퀘어 네오 Regular" charset="0"/>
-                      </a:endParaRPr>
-                    </a:p>
-                  </a:txBody>
-                  <a:tcPr marL="73152" marR="73152" marT="36576" marB="36576" anchor="ctr">
-                    <a:lnL w="6350" cap="flat" cmpd="sng" algn="ctr">
-                      <a:solidFill>
-                        <a:srgbClr val="E0E0E0"/>
-                      </a:solidFill>
-                      <a:prstDash val="solid"/>
-                      <a:round/>
-                      <a:headEnd type="none" w="med" len="med"/>
-                      <a:tailEnd type="none" w="med" len="med"/>
-                    </a:lnL>
-                    <a:lnR w="6350" cap="flat" cmpd="sng" algn="ctr">
-                      <a:solidFill>
-                        <a:srgbClr val="E0E0E0"/>
-                      </a:solidFill>
-                      <a:prstDash val="solid"/>
-                      <a:round/>
-                      <a:headEnd type="none" w="med" len="med"/>
-                      <a:tailEnd type="none" w="med" len="med"/>
-                    </a:lnR>
-                    <a:lnT w="6350" cap="flat" cmpd="sng" algn="ctr">
-                      <a:solidFill>
-                        <a:srgbClr val="E0E0E0"/>
-                      </a:solidFill>
-                      <a:prstDash val="solid"/>
-                      <a:round/>
-                      <a:headEnd type="none" w="med" len="med"/>
-                      <a:tailEnd type="none" w="med" len="med"/>
-                    </a:lnT>
-                    <a:lnB w="6350" cap="flat" cmpd="sng" algn="ctr">
-                      <a:solidFill>
-                        <a:srgbClr val="E0E0E0"/>
-                      </a:solidFill>
-                      <a:prstDash val="solid"/>
-                      <a:round/>
-                      <a:headEnd type="none" w="med" len="med"/>
-                      <a:tailEnd type="none" w="med" len="med"/>
-                    </a:lnB>
-                    <a:solidFill>
-                      <a:srgbClr val="FFFFFF"/>
-                    </a:solidFill>
-                  </a:tcPr>
-                </a:tc>
-                <a:tc>
-                  <a:txBody>
-                    <a:bodyPr/>
-                    <a:lstStyle/>
-                    <a:p>
-                      <a:pPr marL="0" indent="0" eaLnBrk="0">
-                        <a:buNone/>
-                      </a:pPr>
-                      <a:r>
-                        <a:rPr lang="en-US" sz="1200" dirty="0">
-                          <a:solidFill>
-                            <a:srgbClr val="1D1D1F"/>
-                          </a:solidFill>
-                          <a:latin typeface="나눔스퀘어 네오 Regular" pitchFamily="34" charset="0"/>
-                          <a:ea typeface="나눔스퀘어 네오 Regular" pitchFamily="34" charset="-122"/>
-                          <a:cs typeface="나눔스퀘어 네오 Regular" pitchFamily="34" charset="-120"/>
-                        </a:rPr>
-                        <a:t>1,516 / 1,525 / 1,611</a:t>
-                      </a:r>
-                      <a:endParaRPr lang="en-US" sz="1200" dirty="0">
-                        <a:latin typeface="나눔스퀘어 네오 Regular" charset="0"/>
-                        <a:ea typeface="나눔스퀘어 네오 Regular" charset="0"/>
-                        <a:cs typeface="나눔스퀘어 네오 Regular" charset="0"/>
-                      </a:endParaRPr>
-                    </a:p>
-                  </a:txBody>
-                  <a:tcPr marL="73152" marR="73152" marT="36576" marB="36576" anchor="ctr">
-                    <a:lnL w="6350" cap="flat" cmpd="sng" algn="ctr">
-                      <a:solidFill>
-                        <a:srgbClr val="E0E0E0"/>
-                      </a:solidFill>
-                      <a:prstDash val="solid"/>
-                      <a:round/>
-                      <a:headEnd type="none" w="med" len="med"/>
-                      <a:tailEnd type="none" w="med" len="med"/>
-                    </a:lnL>
-                    <a:lnR w="6350" cap="flat" cmpd="sng" algn="ctr">
-                      <a:solidFill>
-                        <a:srgbClr val="E0E0E0"/>
-                      </a:solidFill>
-                      <a:prstDash val="solid"/>
-                      <a:round/>
-                      <a:headEnd type="none" w="med" len="med"/>
-                      <a:tailEnd type="none" w="med" len="med"/>
-                    </a:lnR>
-                    <a:lnT w="6350" cap="flat" cmpd="sng" algn="ctr">
-                      <a:solidFill>
-                        <a:srgbClr val="E0E0E0"/>
-                      </a:solidFill>
-                      <a:prstDash val="solid"/>
-                      <a:round/>
-                      <a:headEnd type="none" w="med" len="med"/>
-                      <a:tailEnd type="none" w="med" len="med"/>
-                    </a:lnT>
-                    <a:lnB w="6350" cap="flat" cmpd="sng" algn="ctr">
-                      <a:solidFill>
-                        <a:srgbClr val="E0E0E0"/>
-                      </a:solidFill>
-                      <a:prstDash val="solid"/>
-                      <a:round/>
-                      <a:headEnd type="none" w="med" len="med"/>
-                      <a:tailEnd type="none" w="med" len="med"/>
-                    </a:lnB>
-                    <a:solidFill>
-                      <a:srgbClr val="FFFFFF"/>
-                    </a:solidFill>
-                  </a:tcPr>
-                </a:tc>
-                <a:tc>
-                  <a:txBody>
-                    <a:bodyPr/>
-                    <a:lstStyle/>
-                    <a:p>
-                      <a:pPr marL="0" indent="0" eaLnBrk="0">
-                        <a:buNone/>
-                      </a:pPr>
-                      <a:r>
-                        <a:rPr lang="en-US" sz="1200" dirty="0">
-                          <a:solidFill>
-                            <a:srgbClr val="1D1D1F"/>
-                          </a:solidFill>
-                          <a:latin typeface="나눔스퀘어 네오 Bold" pitchFamily="34" charset="0"/>
-                          <a:ea typeface="나눔스퀘어 네오 Bold" pitchFamily="34" charset="-122"/>
-                          <a:cs typeface="나눔스퀘어 네오 Bold" pitchFamily="34" charset="-120"/>
-                        </a:rPr>
-                        <a:t>0.29°</a:t>
-                      </a:r>
-                      <a:endParaRPr lang="en-US" sz="1200" dirty="0">
-                        <a:latin typeface="나눔스퀘어 네오 Regular" charset="0"/>
-                        <a:ea typeface="나눔스퀘어 네오 Regular" charset="0"/>
-                        <a:cs typeface="나눔스퀘어 네오 Regular" charset="0"/>
-                      </a:endParaRPr>
-                    </a:p>
-                  </a:txBody>
-                  <a:tcPr marL="73152" marR="73152" marT="36576" marB="36576" anchor="ctr">
-                    <a:lnL w="6350" cap="flat" cmpd="sng" algn="ctr">
-                      <a:solidFill>
-                        <a:srgbClr val="E0E0E0"/>
-                      </a:solidFill>
-                      <a:prstDash val="solid"/>
-                      <a:round/>
-                      <a:headEnd type="none" w="med" len="med"/>
-                      <a:tailEnd type="none" w="med" len="med"/>
-                    </a:lnL>
-                    <a:lnR w="6350" cap="flat" cmpd="sng" algn="ctr">
-                      <a:solidFill>
-                        <a:srgbClr val="E0E0E0"/>
-                      </a:solidFill>
-                      <a:prstDash val="solid"/>
-                      <a:round/>
-                      <a:headEnd type="none" w="med" len="med"/>
-                      <a:tailEnd type="none" w="med" len="med"/>
-                    </a:lnR>
-                    <a:lnT w="6350" cap="flat" cmpd="sng" algn="ctr">
-                      <a:solidFill>
-                        <a:srgbClr val="E0E0E0"/>
-                      </a:solidFill>
-                      <a:prstDash val="solid"/>
-                      <a:round/>
-                      <a:headEnd type="none" w="med" len="med"/>
-                      <a:tailEnd type="none" w="med" len="med"/>
-                    </a:lnT>
-                    <a:lnB w="6350" cap="flat" cmpd="sng" algn="ctr">
-                      <a:solidFill>
-                        <a:srgbClr val="E0E0E0"/>
-                      </a:solidFill>
-                      <a:prstDash val="solid"/>
-                      <a:round/>
-                      <a:headEnd type="none" w="med" len="med"/>
-                      <a:tailEnd type="none" w="med" len="med"/>
-                    </a:lnB>
-                    <a:solidFill>
-                      <a:srgbClr val="FFFFFF"/>
-                    </a:solidFill>
-                  </a:tcPr>
-                </a:tc>
-                <a:tc>
-                  <a:txBody>
-                    <a:bodyPr/>
-                    <a:lstStyle/>
-                    <a:p>
-                      <a:pPr marL="0" indent="0" eaLnBrk="0">
-                        <a:buNone/>
-                      </a:pPr>
-                      <a:r>
-                        <a:rPr lang="en-US" sz="1200" dirty="0">
-                          <a:solidFill>
-                            <a:srgbClr val="1D1D1F"/>
-                          </a:solidFill>
-                          <a:latin typeface="나눔스퀘어 네오 Regular" pitchFamily="34" charset="0"/>
-                          <a:ea typeface="나눔스퀘어 네오 Regular" pitchFamily="34" charset="-122"/>
-                          <a:cs typeface="나눔스퀘어 네오 Regular" pitchFamily="34" charset="-120"/>
-                        </a:rPr>
-                        <a:t>0.25°</a:t>
-                      </a:r>
-                      <a:endParaRPr lang="en-US" sz="1200" dirty="0">
-                        <a:latin typeface="나눔스퀘어 네오 Regular" charset="0"/>
-                        <a:ea typeface="나눔스퀘어 네오 Regular" charset="0"/>
-                        <a:cs typeface="나눔스퀘어 네오 Regular" charset="0"/>
-                      </a:endParaRPr>
-                    </a:p>
-                  </a:txBody>
-                  <a:tcPr marL="73152" marR="73152" marT="36576" marB="36576" anchor="ctr">
-                    <a:lnL w="6350" cap="flat" cmpd="sng" algn="ctr">
-                      <a:solidFill>
-                        <a:srgbClr val="E0E0E0"/>
-                      </a:solidFill>
-                      <a:prstDash val="solid"/>
-                      <a:round/>
-                      <a:headEnd type="none" w="med" len="med"/>
-                      <a:tailEnd type="none" w="med" len="med"/>
-                    </a:lnL>
-                    <a:lnR w="6350" cap="flat" cmpd="sng" algn="ctr">
-                      <a:solidFill>
-                        <a:srgbClr val="E0E0E0"/>
-                      </a:solidFill>
-                      <a:prstDash val="solid"/>
-                      <a:round/>
-                      <a:headEnd type="none" w="med" len="med"/>
-                      <a:tailEnd type="none" w="med" len="med"/>
-                    </a:lnR>
-                    <a:lnT w="6350" cap="flat" cmpd="sng" algn="ctr">
-                      <a:solidFill>
-                        <a:srgbClr val="E0E0E0"/>
-                      </a:solidFill>
-                      <a:prstDash val="solid"/>
-                      <a:round/>
-                      <a:headEnd type="none" w="med" len="med"/>
-                      <a:tailEnd type="none" w="med" len="med"/>
-                    </a:lnT>
-                    <a:lnB w="6350" cap="flat" cmpd="sng" algn="ctr">
-                      <a:solidFill>
-                        <a:srgbClr val="E0E0E0"/>
-                      </a:solidFill>
-                      <a:prstDash val="solid"/>
-                      <a:round/>
-                      <a:headEnd type="none" w="med" len="med"/>
-                      <a:tailEnd type="none" w="med" len="med"/>
-                    </a:lnB>
-                    <a:solidFill>
-                      <a:srgbClr val="FFFFFF"/>
-                    </a:solidFill>
-                  </a:tcPr>
-                </a:tc>
-                <a:tc>
-                  <a:txBody>
-                    <a:bodyPr/>
-                    <a:lstStyle/>
-                    <a:p>
-                      <a:pPr marL="0" indent="0" eaLnBrk="0">
-                        <a:buNone/>
-                      </a:pPr>
-                      <a:r>
-                        <a:rPr lang="en-US" sz="1200" dirty="0">
-                          <a:solidFill>
-                            <a:srgbClr val="1D1D1F"/>
-                          </a:solidFill>
-                          <a:latin typeface="나눔스퀘어 네오 Bold" pitchFamily="34" charset="0"/>
-                          <a:ea typeface="나눔스퀘어 네오 Bold" pitchFamily="34" charset="-122"/>
-                          <a:cs typeface="나눔스퀘어 네오 Bold" pitchFamily="34" charset="-120"/>
-                        </a:rPr>
-                        <a:t>8.3°</a:t>
-                      </a:r>
-                      <a:endParaRPr lang="en-US" sz="1200" dirty="0">
-                        <a:latin typeface="나눔스퀘어 네오 Regular" charset="0"/>
-                        <a:ea typeface="나눔스퀘어 네오 Regular" charset="0"/>
-                        <a:cs typeface="나눔스퀘어 네오 Regular" charset="0"/>
-                      </a:endParaRPr>
-                    </a:p>
-                  </a:txBody>
-                  <a:tcPr marL="73152" marR="73152" marT="36576" marB="36576" anchor="ctr">
-                    <a:lnL w="6350" cap="flat" cmpd="sng" algn="ctr">
-                      <a:solidFill>
-                        <a:srgbClr val="E0E0E0"/>
-                      </a:solidFill>
-                      <a:prstDash val="solid"/>
-                      <a:round/>
-                      <a:headEnd type="none" w="med" len="med"/>
-                      <a:tailEnd type="none" w="med" len="med"/>
-                    </a:lnL>
-                    <a:lnR w="6350" cap="flat" cmpd="sng" algn="ctr">
-                      <a:solidFill>
-                        <a:srgbClr val="E0E0E0"/>
-                      </a:solidFill>
-                      <a:prstDash val="solid"/>
-                      <a:round/>
-                      <a:headEnd type="none" w="med" len="med"/>
-                      <a:tailEnd type="none" w="med" len="med"/>
-                    </a:lnR>
-                    <a:lnT w="6350" cap="flat" cmpd="sng" algn="ctr">
-                      <a:solidFill>
-                        <a:srgbClr val="E0E0E0"/>
-                      </a:solidFill>
-                      <a:prstDash val="solid"/>
-                      <a:round/>
-                      <a:headEnd type="none" w="med" len="med"/>
-                      <a:tailEnd type="none" w="med" len="med"/>
-                    </a:lnT>
-                    <a:lnB w="6350" cap="flat" cmpd="sng" algn="ctr">
-                      <a:solidFill>
-                        <a:srgbClr val="E0E0E0"/>
-                      </a:solidFill>
-                      <a:prstDash val="solid"/>
-                      <a:round/>
-                      <a:headEnd type="none" w="med" len="med"/>
-                      <a:tailEnd type="none" w="med" len="med"/>
-                    </a:lnB>
-                    <a:solidFill>
-                      <a:srgbClr val="FFFFFF"/>
-                    </a:solidFill>
-                  </a:tcPr>
-                </a:tc>
-                <a:extLst>
-                  <a:ext uri="{0D108BD9-81ED-4DB2-BD59-A6C34878D82A}">
-                    <a16:rowId xmlns:a16="http://schemas.microsoft.com/office/drawing/2014/main" val="10002"/>
-                  </a:ext>
-                </a:extLst>
-              </a:tr>
-              <a:tr h="566928">
-                <a:tc>
-                  <a:txBody>
-                    <a:bodyPr/>
-                    <a:lstStyle/>
-                    <a:p>
-                      <a:pPr marL="0" indent="0" eaLnBrk="0">
-                        <a:buNone/>
-                      </a:pPr>
-                      <a:r>
-                        <a:rPr lang="en-US" sz="1200" dirty="0">
-                          <a:solidFill>
-                            <a:srgbClr val="1D1D1F"/>
-                          </a:solidFill>
-                          <a:latin typeface="나눔스퀘어 네오 Regular" pitchFamily="34" charset="0"/>
-                          <a:ea typeface="나눔스퀘어 네오 Regular" pitchFamily="34" charset="-122"/>
-                          <a:cs typeface="나눔스퀘어 네오 Regular" pitchFamily="34" charset="-120"/>
-                        </a:rPr>
-                        <a:t>6,000 (V2)</a:t>
-                      </a:r>
-                      <a:endParaRPr lang="en-US" sz="1200" dirty="0">
-                        <a:latin typeface="나눔스퀘어 네오 Regular" charset="0"/>
-                        <a:ea typeface="나눔스퀘어 네오 Regular" charset="0"/>
-                        <a:cs typeface="나눔스퀘어 네오 Regular" charset="0"/>
-                      </a:endParaRPr>
-                    </a:p>
-                  </a:txBody>
-                  <a:tcPr marL="73152" marR="73152" marT="36576" marB="36576" anchor="ctr">
-                    <a:lnL w="6350" cap="flat" cmpd="sng" algn="ctr">
-                      <a:solidFill>
-                        <a:srgbClr val="E0E0E0"/>
-                      </a:solidFill>
-                      <a:prstDash val="solid"/>
-                      <a:round/>
-                      <a:headEnd type="none" w="med" len="med"/>
-                      <a:tailEnd type="none" w="med" len="med"/>
-                    </a:lnL>
-                    <a:lnR w="6350" cap="flat" cmpd="sng" algn="ctr">
-                      <a:solidFill>
-                        <a:srgbClr val="E0E0E0"/>
-                      </a:solidFill>
-                      <a:prstDash val="solid"/>
-                      <a:round/>
-                      <a:headEnd type="none" w="med" len="med"/>
-                      <a:tailEnd type="none" w="med" len="med"/>
-                    </a:lnR>
-                    <a:lnT w="6350" cap="flat" cmpd="sng" algn="ctr">
-                      <a:solidFill>
-                        <a:srgbClr val="E0E0E0"/>
-                      </a:solidFill>
-                      <a:prstDash val="solid"/>
-                      <a:round/>
-                      <a:headEnd type="none" w="med" len="med"/>
-                      <a:tailEnd type="none" w="med" len="med"/>
-                    </a:lnT>
-                    <a:lnB w="6350" cap="flat" cmpd="sng" algn="ctr">
-                      <a:solidFill>
-                        <a:srgbClr val="E0E0E0"/>
-                      </a:solidFill>
-                      <a:prstDash val="solid"/>
-                      <a:round/>
-                      <a:headEnd type="none" w="med" len="med"/>
-                      <a:tailEnd type="none" w="med" len="med"/>
-                    </a:lnB>
-                    <a:solidFill>
-                      <a:srgbClr val="FFFFFF"/>
-                    </a:solidFill>
-                  </a:tcPr>
-                </a:tc>
-                <a:tc>
-                  <a:txBody>
-                    <a:bodyPr/>
-                    <a:lstStyle/>
-                    <a:p>
-                      <a:pPr marL="0" indent="0" eaLnBrk="0">
-                        <a:buNone/>
-                      </a:pPr>
-                      <a:r>
-                        <a:rPr lang="en-US" sz="1200" dirty="0">
-                          <a:solidFill>
-                            <a:srgbClr val="1D1D1F"/>
-                          </a:solidFill>
-                          <a:latin typeface="나눔스퀘어 네오 Regular" pitchFamily="34" charset="0"/>
-                          <a:ea typeface="나눔스퀘어 네오 Regular" pitchFamily="34" charset="-122"/>
-                          <a:cs typeface="나눔스퀘어 네오 Regular" pitchFamily="34" charset="-120"/>
-                        </a:rPr>
-                        <a:t>8°</a:t>
-                      </a:r>
-                      <a:endParaRPr lang="en-US" sz="1200" dirty="0">
-                        <a:latin typeface="나눔스퀘어 네오 Regular" charset="0"/>
-                        <a:ea typeface="나눔스퀘어 네오 Regular" charset="0"/>
-                        <a:cs typeface="나눔스퀘어 네오 Regular" charset="0"/>
-                      </a:endParaRPr>
-                    </a:p>
-                  </a:txBody>
-                  <a:tcPr marL="73152" marR="73152" marT="36576" marB="36576" anchor="ctr">
-                    <a:lnL w="6350" cap="flat" cmpd="sng" algn="ctr">
-                      <a:solidFill>
-                        <a:srgbClr val="E0E0E0"/>
-                      </a:solidFill>
-                      <a:prstDash val="solid"/>
-                      <a:round/>
-                      <a:headEnd type="none" w="med" len="med"/>
-                      <a:tailEnd type="none" w="med" len="med"/>
-                    </a:lnL>
-                    <a:lnR w="6350" cap="flat" cmpd="sng" algn="ctr">
-                      <a:solidFill>
-                        <a:srgbClr val="E0E0E0"/>
-                      </a:solidFill>
-                      <a:prstDash val="solid"/>
-                      <a:round/>
-                      <a:headEnd type="none" w="med" len="med"/>
-                      <a:tailEnd type="none" w="med" len="med"/>
-                    </a:lnR>
-                    <a:lnT w="6350" cap="flat" cmpd="sng" algn="ctr">
-                      <a:solidFill>
-                        <a:srgbClr val="E0E0E0"/>
-                      </a:solidFill>
-                      <a:prstDash val="solid"/>
-                      <a:round/>
-                      <a:headEnd type="none" w="med" len="med"/>
-                      <a:tailEnd type="none" w="med" len="med"/>
-                    </a:lnT>
-                    <a:lnB w="6350" cap="flat" cmpd="sng" algn="ctr">
-                      <a:solidFill>
-                        <a:srgbClr val="E0E0E0"/>
-                      </a:solidFill>
-                      <a:prstDash val="solid"/>
-                      <a:round/>
-                      <a:headEnd type="none" w="med" len="med"/>
-                      <a:tailEnd type="none" w="med" len="med"/>
-                    </a:lnB>
-                    <a:solidFill>
-                      <a:srgbClr val="FFFFFF"/>
-                    </a:solidFill>
-                  </a:tcPr>
-                </a:tc>
-                <a:tc>
-                  <a:txBody>
-                    <a:bodyPr/>
-                    <a:lstStyle/>
-                    <a:p>
-                      <a:pPr marL="0" indent="0" eaLnBrk="0">
-                        <a:buNone/>
-                      </a:pPr>
-                      <a:r>
-                        <a:rPr lang="en-US" sz="1200" dirty="0">
-                          <a:solidFill>
-                            <a:srgbClr val="1D1D1F"/>
-                          </a:solidFill>
-                          <a:latin typeface="나눔스퀘어 네오 Regular" pitchFamily="34" charset="0"/>
-                          <a:ea typeface="나눔스퀘어 네오 Regular" pitchFamily="34" charset="-122"/>
-                          <a:cs typeface="나눔스퀘어 네오 Regular" pitchFamily="34" charset="-120"/>
-                        </a:rPr>
-                        <a:t>5,689 / 6,078 / 7,710</a:t>
-                      </a:r>
-                      <a:endParaRPr lang="en-US" sz="1200" dirty="0">
-                        <a:latin typeface="나눔스퀘어 네오 Regular" charset="0"/>
-                        <a:ea typeface="나눔스퀘어 네오 Regular" charset="0"/>
-                        <a:cs typeface="나눔스퀘어 네오 Regular" charset="0"/>
-                      </a:endParaRPr>
-                    </a:p>
-                  </a:txBody>
-                  <a:tcPr marL="73152" marR="73152" marT="36576" marB="36576" anchor="ctr">
-                    <a:lnL w="6350" cap="flat" cmpd="sng" algn="ctr">
-                      <a:solidFill>
-                        <a:srgbClr val="E0E0E0"/>
-                      </a:solidFill>
-                      <a:prstDash val="solid"/>
-                      <a:round/>
-                      <a:headEnd type="none" w="med" len="med"/>
-                      <a:tailEnd type="none" w="med" len="med"/>
-                    </a:lnL>
-                    <a:lnR w="6350" cap="flat" cmpd="sng" algn="ctr">
-                      <a:solidFill>
-                        <a:srgbClr val="E0E0E0"/>
-                      </a:solidFill>
-                      <a:prstDash val="solid"/>
-                      <a:round/>
-                      <a:headEnd type="none" w="med" len="med"/>
-                      <a:tailEnd type="none" w="med" len="med"/>
-                    </a:lnR>
-                    <a:lnT w="6350" cap="flat" cmpd="sng" algn="ctr">
-                      <a:solidFill>
-                        <a:srgbClr val="E0E0E0"/>
-                      </a:solidFill>
-                      <a:prstDash val="solid"/>
-                      <a:round/>
-                      <a:headEnd type="none" w="med" len="med"/>
-                      <a:tailEnd type="none" w="med" len="med"/>
-                    </a:lnT>
-                    <a:lnB w="6350" cap="flat" cmpd="sng" algn="ctr">
-                      <a:solidFill>
-                        <a:srgbClr val="E0E0E0"/>
-                      </a:solidFill>
-                      <a:prstDash val="solid"/>
-                      <a:round/>
-                      <a:headEnd type="none" w="med" len="med"/>
-                      <a:tailEnd type="none" w="med" len="med"/>
-                    </a:lnB>
-                    <a:solidFill>
-                      <a:srgbClr val="FFFFFF"/>
-                    </a:solidFill>
-                  </a:tcPr>
-                </a:tc>
-                <a:tc>
-                  <a:txBody>
-                    <a:bodyPr/>
-                    <a:lstStyle/>
-                    <a:p>
-                      <a:pPr marL="0" indent="0" eaLnBrk="0">
-                        <a:buNone/>
-                      </a:pPr>
-                      <a:r>
-                        <a:rPr lang="en-US" sz="1200" dirty="0">
-                          <a:solidFill>
-                            <a:srgbClr val="1D1D1F"/>
-                          </a:solidFill>
-                          <a:latin typeface="나눔스퀘어 네오 Bold" pitchFamily="34" charset="0"/>
-                          <a:ea typeface="나눔스퀘어 네오 Bold" pitchFamily="34" charset="-122"/>
-                          <a:cs typeface="나눔스퀘어 네오 Bold" pitchFamily="34" charset="-120"/>
-                        </a:rPr>
-                        <a:t>0.22°</a:t>
-                      </a:r>
-                      <a:endParaRPr lang="en-US" sz="1200" dirty="0">
-                        <a:latin typeface="나눔스퀘어 네오 Regular" charset="0"/>
-                        <a:ea typeface="나눔스퀘어 네오 Regular" charset="0"/>
-                        <a:cs typeface="나눔스퀘어 네오 Regular" charset="0"/>
-                      </a:endParaRPr>
-                    </a:p>
-                  </a:txBody>
-                  <a:tcPr marL="73152" marR="73152" marT="36576" marB="36576" anchor="ctr">
-                    <a:lnL w="6350" cap="flat" cmpd="sng" algn="ctr">
-                      <a:solidFill>
-                        <a:srgbClr val="E0E0E0"/>
-                      </a:solidFill>
-                      <a:prstDash val="solid"/>
-                      <a:round/>
-                      <a:headEnd type="none" w="med" len="med"/>
-                      <a:tailEnd type="none" w="med" len="med"/>
-                    </a:lnL>
-                    <a:lnR w="6350" cap="flat" cmpd="sng" algn="ctr">
-                      <a:solidFill>
-                        <a:srgbClr val="E0E0E0"/>
-                      </a:solidFill>
-                      <a:prstDash val="solid"/>
-                      <a:round/>
-                      <a:headEnd type="none" w="med" len="med"/>
-                      <a:tailEnd type="none" w="med" len="med"/>
-                    </a:lnR>
-                    <a:lnT w="6350" cap="flat" cmpd="sng" algn="ctr">
-                      <a:solidFill>
-                        <a:srgbClr val="E0E0E0"/>
-                      </a:solidFill>
-                      <a:prstDash val="solid"/>
-                      <a:round/>
-                      <a:headEnd type="none" w="med" len="med"/>
-                      <a:tailEnd type="none" w="med" len="med"/>
-                    </a:lnT>
-                    <a:lnB w="6350" cap="flat" cmpd="sng" algn="ctr">
-                      <a:solidFill>
-                        <a:srgbClr val="E0E0E0"/>
-                      </a:solidFill>
-                      <a:prstDash val="solid"/>
-                      <a:round/>
-                      <a:headEnd type="none" w="med" len="med"/>
-                      <a:tailEnd type="none" w="med" len="med"/>
-                    </a:lnB>
-                    <a:solidFill>
-                      <a:srgbClr val="FFFFFF"/>
-                    </a:solidFill>
-                  </a:tcPr>
-                </a:tc>
-                <a:tc>
-                  <a:txBody>
-                    <a:bodyPr/>
-                    <a:lstStyle/>
-                    <a:p>
-                      <a:pPr marL="0" indent="0" eaLnBrk="0">
-                        <a:buNone/>
-                      </a:pPr>
-                      <a:r>
-                        <a:rPr lang="en-US" sz="1200" dirty="0">
-                          <a:solidFill>
-                            <a:srgbClr val="1D1D1F"/>
-                          </a:solidFill>
-                          <a:latin typeface="나눔스퀘어 네오 Regular" pitchFamily="34" charset="0"/>
-                          <a:ea typeface="나눔스퀘어 네오 Regular" pitchFamily="34" charset="-122"/>
-                          <a:cs typeface="나눔스퀘어 네오 Regular" pitchFamily="34" charset="-120"/>
-                        </a:rPr>
-                        <a:t>0.10°</a:t>
-                      </a:r>
-                      <a:endParaRPr lang="en-US" sz="1200" dirty="0">
-                        <a:latin typeface="나눔스퀘어 네오 Regular" charset="0"/>
-                        <a:ea typeface="나눔스퀘어 네오 Regular" charset="0"/>
-                        <a:cs typeface="나눔스퀘어 네오 Regular" charset="0"/>
-                      </a:endParaRPr>
-                    </a:p>
-                  </a:txBody>
-                  <a:tcPr marL="73152" marR="73152" marT="36576" marB="36576" anchor="ctr">
-                    <a:lnL w="6350" cap="flat" cmpd="sng" algn="ctr">
-                      <a:solidFill>
-                        <a:srgbClr val="E0E0E0"/>
-                      </a:solidFill>
-                      <a:prstDash val="solid"/>
-                      <a:round/>
-                      <a:headEnd type="none" w="med" len="med"/>
-                      <a:tailEnd type="none" w="med" len="med"/>
-                    </a:lnL>
-                    <a:lnR w="6350" cap="flat" cmpd="sng" algn="ctr">
-                      <a:solidFill>
-                        <a:srgbClr val="E0E0E0"/>
-                      </a:solidFill>
-                      <a:prstDash val="solid"/>
-                      <a:round/>
-                      <a:headEnd type="none" w="med" len="med"/>
-                      <a:tailEnd type="none" w="med" len="med"/>
-                    </a:lnR>
-                    <a:lnT w="6350" cap="flat" cmpd="sng" algn="ctr">
-                      <a:solidFill>
-                        <a:srgbClr val="E0E0E0"/>
-                      </a:solidFill>
-                      <a:prstDash val="solid"/>
-                      <a:round/>
-                      <a:headEnd type="none" w="med" len="med"/>
-                      <a:tailEnd type="none" w="med" len="med"/>
-                    </a:lnT>
-                    <a:lnB w="6350" cap="flat" cmpd="sng" algn="ctr">
-                      <a:solidFill>
-                        <a:srgbClr val="E0E0E0"/>
-                      </a:solidFill>
-                      <a:prstDash val="solid"/>
-                      <a:round/>
-                      <a:headEnd type="none" w="med" len="med"/>
-                      <a:tailEnd type="none" w="med" len="med"/>
-                    </a:lnB>
-                    <a:solidFill>
-                      <a:srgbClr val="FFFFFF"/>
-                    </a:solidFill>
-                  </a:tcPr>
-                </a:tc>
-                <a:tc>
-                  <a:txBody>
-                    <a:bodyPr/>
-                    <a:lstStyle/>
-                    <a:p>
-                      <a:pPr marL="0" indent="0" eaLnBrk="0">
-                        <a:buNone/>
-                      </a:pPr>
-                      <a:r>
-                        <a:rPr lang="en-US" sz="1200" dirty="0">
-                          <a:solidFill>
-                            <a:srgbClr val="1D1D1F"/>
-                          </a:solidFill>
-                          <a:latin typeface="나눔스퀘어 네오 Bold" pitchFamily="34" charset="0"/>
-                          <a:ea typeface="나눔스퀘어 네오 Bold" pitchFamily="34" charset="-122"/>
-                          <a:cs typeface="나눔스퀘어 네오 Bold" pitchFamily="34" charset="-120"/>
-                        </a:rPr>
-                        <a:t>18.1°</a:t>
-                      </a:r>
-                      <a:endParaRPr lang="en-US" sz="1200" dirty="0">
-                        <a:latin typeface="나눔스퀘어 네오 Regular" charset="0"/>
-                        <a:ea typeface="나눔스퀘어 네오 Regular" charset="0"/>
-                        <a:cs typeface="나눔스퀘어 네오 Regular" charset="0"/>
-                      </a:endParaRPr>
-                    </a:p>
-                  </a:txBody>
-                  <a:tcPr marL="73152" marR="73152" marT="36576" marB="36576" anchor="ctr">
-                    <a:lnL w="6350" cap="flat" cmpd="sng" algn="ctr">
-                      <a:solidFill>
-                        <a:srgbClr val="E0E0E0"/>
-                      </a:solidFill>
-                      <a:prstDash val="solid"/>
-                      <a:round/>
-                      <a:headEnd type="none" w="med" len="med"/>
-                      <a:tailEnd type="none" w="med" len="med"/>
-                    </a:lnL>
-                    <a:lnR w="6350" cap="flat" cmpd="sng" algn="ctr">
-                      <a:solidFill>
-                        <a:srgbClr val="E0E0E0"/>
-                      </a:solidFill>
-                      <a:prstDash val="solid"/>
-                      <a:round/>
-                      <a:headEnd type="none" w="med" len="med"/>
-                      <a:tailEnd type="none" w="med" len="med"/>
-                    </a:lnR>
-                    <a:lnT w="6350" cap="flat" cmpd="sng" algn="ctr">
-                      <a:solidFill>
-                        <a:srgbClr val="E0E0E0"/>
-                      </a:solidFill>
-                      <a:prstDash val="solid"/>
-                      <a:round/>
-                      <a:headEnd type="none" w="med" len="med"/>
-                      <a:tailEnd type="none" w="med" len="med"/>
-                    </a:lnT>
-                    <a:lnB w="6350" cap="flat" cmpd="sng" algn="ctr">
-                      <a:solidFill>
-                        <a:srgbClr val="E0E0E0"/>
-                      </a:solidFill>
-                      <a:prstDash val="solid"/>
-                      <a:round/>
-                      <a:headEnd type="none" w="med" len="med"/>
-                      <a:tailEnd type="none" w="med" len="med"/>
-                    </a:lnB>
-                    <a:solidFill>
-                      <a:srgbClr val="FFFFFF"/>
-                    </a:solidFill>
-                  </a:tcPr>
-                </a:tc>
-                <a:extLst>
-                  <a:ext uri="{0D108BD9-81ED-4DB2-BD59-A6C34878D82A}">
-                    <a16:rowId xmlns:a16="http://schemas.microsoft.com/office/drawing/2014/main" val="10003"/>
-                  </a:ext>
-                </a:extLst>
-              </a:tr>
-              <a:tr h="566928">
-                <a:tc>
-                  <a:txBody>
-                    <a:bodyPr/>
-                    <a:lstStyle/>
-                    <a:p>
-                      <a:pPr marL="0" indent="0" eaLnBrk="0">
-                        <a:buNone/>
-                      </a:pPr>
-                      <a:r>
-                        <a:rPr lang="en-US" sz="1200" dirty="0">
-                          <a:solidFill>
-                            <a:srgbClr val="1D1D1F"/>
-                          </a:solidFill>
-                          <a:latin typeface="나눔스퀘어 네오 Regular" pitchFamily="34" charset="0"/>
-                          <a:ea typeface="나눔스퀘어 네오 Regular" pitchFamily="34" charset="-122"/>
-                          <a:cs typeface="나눔스퀘어 네오 Regular" pitchFamily="34" charset="-120"/>
-                        </a:rPr>
-                        <a:t>20,025 (V3, pan 크기)</a:t>
-                      </a:r>
-                      <a:endParaRPr lang="en-US" sz="1200" dirty="0">
-                        <a:latin typeface="나눔스퀘어 네오 Regular" charset="0"/>
-                        <a:ea typeface="나눔스퀘어 네오 Regular" charset="0"/>
-                        <a:cs typeface="나눔스퀘어 네오 Regular" charset="0"/>
-                      </a:endParaRPr>
-                    </a:p>
-                  </a:txBody>
-                  <a:tcPr marL="73152" marR="73152" marT="36576" marB="36576" anchor="ctr">
-                    <a:lnL w="6350" cap="flat" cmpd="sng" algn="ctr">
-                      <a:solidFill>
-                        <a:srgbClr val="E0E0E0"/>
-                      </a:solidFill>
-                      <a:prstDash val="solid"/>
-                      <a:round/>
-                      <a:headEnd type="none" w="med" len="med"/>
-                      <a:tailEnd type="none" w="med" len="med"/>
-                    </a:lnL>
-                    <a:lnR w="6350" cap="flat" cmpd="sng" algn="ctr">
-                      <a:solidFill>
-                        <a:srgbClr val="E0E0E0"/>
-                      </a:solidFill>
-                      <a:prstDash val="solid"/>
-                      <a:round/>
-                      <a:headEnd type="none" w="med" len="med"/>
-                      <a:tailEnd type="none" w="med" len="med"/>
-                    </a:lnR>
-                    <a:lnT w="6350" cap="flat" cmpd="sng" algn="ctr">
-                      <a:solidFill>
-                        <a:srgbClr val="E0E0E0"/>
-                      </a:solidFill>
-                      <a:prstDash val="solid"/>
-                      <a:round/>
-                      <a:headEnd type="none" w="med" len="med"/>
-                      <a:tailEnd type="none" w="med" len="med"/>
-                    </a:lnT>
-                    <a:lnB w="6350" cap="flat" cmpd="sng" algn="ctr">
-                      <a:solidFill>
-                        <a:srgbClr val="E0E0E0"/>
-                      </a:solidFill>
-                      <a:prstDash val="solid"/>
-                      <a:round/>
-                      <a:headEnd type="none" w="med" len="med"/>
-                      <a:tailEnd type="none" w="med" len="med"/>
-                    </a:lnB>
-                    <a:solidFill>
-                      <a:srgbClr val="FFFFFF"/>
-                    </a:solidFill>
-                  </a:tcPr>
-                </a:tc>
-                <a:tc>
-                  <a:txBody>
-                    <a:bodyPr/>
-                    <a:lstStyle/>
-                    <a:p>
-                      <a:pPr marL="0" indent="0" eaLnBrk="0">
-                        <a:buNone/>
-                      </a:pPr>
-                      <a:r>
-                        <a:rPr lang="en-US" sz="1200" dirty="0">
-                          <a:solidFill>
-                            <a:srgbClr val="1D1D1F"/>
-                          </a:solidFill>
-                          <a:latin typeface="나눔스퀘어 네오 Regular" pitchFamily="34" charset="0"/>
-                          <a:ea typeface="나눔스퀘어 네오 Regular" pitchFamily="34" charset="-122"/>
-                          <a:cs typeface="나눔스퀘어 네오 Regular" pitchFamily="34" charset="-120"/>
-                        </a:rPr>
-                        <a:t>5°</a:t>
-                      </a:r>
-                      <a:endParaRPr lang="en-US" sz="1200" dirty="0">
-                        <a:latin typeface="나눔스퀘어 네오 Regular" charset="0"/>
-                        <a:ea typeface="나눔스퀘어 네오 Regular" charset="0"/>
-                        <a:cs typeface="나눔스퀘어 네오 Regular" charset="0"/>
-                      </a:endParaRPr>
-                    </a:p>
-                  </a:txBody>
-                  <a:tcPr marL="73152" marR="73152" marT="36576" marB="36576" anchor="ctr">
-                    <a:lnL w="6350" cap="flat" cmpd="sng" algn="ctr">
-                      <a:solidFill>
-                        <a:srgbClr val="E0E0E0"/>
-                      </a:solidFill>
-                      <a:prstDash val="solid"/>
-                      <a:round/>
-                      <a:headEnd type="none" w="med" len="med"/>
-                      <a:tailEnd type="none" w="med" len="med"/>
-                    </a:lnL>
-                    <a:lnR w="6350" cap="flat" cmpd="sng" algn="ctr">
-                      <a:solidFill>
-                        <a:srgbClr val="E0E0E0"/>
-                      </a:solidFill>
-                      <a:prstDash val="solid"/>
-                      <a:round/>
-                      <a:headEnd type="none" w="med" len="med"/>
-                      <a:tailEnd type="none" w="med" len="med"/>
-                    </a:lnR>
-                    <a:lnT w="6350" cap="flat" cmpd="sng" algn="ctr">
-                      <a:solidFill>
-                        <a:srgbClr val="E0E0E0"/>
-                      </a:solidFill>
-                      <a:prstDash val="solid"/>
-                      <a:round/>
-                      <a:headEnd type="none" w="med" len="med"/>
-                      <a:tailEnd type="none" w="med" len="med"/>
-                    </a:lnT>
-                    <a:lnB w="6350" cap="flat" cmpd="sng" algn="ctr">
-                      <a:solidFill>
-                        <a:srgbClr val="E0E0E0"/>
-                      </a:solidFill>
-                      <a:prstDash val="solid"/>
-                      <a:round/>
-                      <a:headEnd type="none" w="med" len="med"/>
-                      <a:tailEnd type="none" w="med" len="med"/>
-                    </a:lnB>
-                    <a:solidFill>
-                      <a:srgbClr val="FFFFFF"/>
-                    </a:solidFill>
-                  </a:tcPr>
-                </a:tc>
-                <a:tc>
-                  <a:txBody>
-                    <a:bodyPr/>
-                    <a:lstStyle/>
-                    <a:p>
-                      <a:pPr marL="0" indent="0" eaLnBrk="0">
-                        <a:buNone/>
-                      </a:pPr>
-                      <a:r>
-                        <a:rPr lang="en-US" sz="1200" dirty="0">
-                          <a:solidFill>
-                            <a:srgbClr val="1D1D1F"/>
-                          </a:solidFill>
-                          <a:latin typeface="나눔스퀘어 네오 Regular" pitchFamily="34" charset="0"/>
-                          <a:ea typeface="나눔스퀘어 네오 Regular" pitchFamily="34" charset="-122"/>
-                          <a:cs typeface="나눔스퀘어 네오 Regular" pitchFamily="34" charset="-120"/>
-                        </a:rPr>
-                        <a:t>14,137 / 22,397 / 31,072</a:t>
-                      </a:r>
-                      <a:endParaRPr lang="en-US" sz="1200" dirty="0">
-                        <a:latin typeface="나눔스퀘어 네오 Regular" charset="0"/>
-                        <a:ea typeface="나눔스퀘어 네오 Regular" charset="0"/>
-                        <a:cs typeface="나눔스퀘어 네오 Regular" charset="0"/>
-                      </a:endParaRPr>
-                    </a:p>
-                  </a:txBody>
-                  <a:tcPr marL="73152" marR="73152" marT="36576" marB="36576" anchor="ctr">
-                    <a:lnL w="6350" cap="flat" cmpd="sng" algn="ctr">
-                      <a:solidFill>
-                        <a:srgbClr val="E0E0E0"/>
-                      </a:solidFill>
-                      <a:prstDash val="solid"/>
-                      <a:round/>
-                      <a:headEnd type="none" w="med" len="med"/>
-                      <a:tailEnd type="none" w="med" len="med"/>
-                    </a:lnL>
-                    <a:lnR w="6350" cap="flat" cmpd="sng" algn="ctr">
-                      <a:solidFill>
-                        <a:srgbClr val="E0E0E0"/>
-                      </a:solidFill>
-                      <a:prstDash val="solid"/>
-                      <a:round/>
-                      <a:headEnd type="none" w="med" len="med"/>
-                      <a:tailEnd type="none" w="med" len="med"/>
-                    </a:lnR>
-                    <a:lnT w="6350" cap="flat" cmpd="sng" algn="ctr">
-                      <a:solidFill>
-                        <a:srgbClr val="E0E0E0"/>
-                      </a:solidFill>
-                      <a:prstDash val="solid"/>
-                      <a:round/>
-                      <a:headEnd type="none" w="med" len="med"/>
-                      <a:tailEnd type="none" w="med" len="med"/>
-                    </a:lnT>
-                    <a:lnB w="6350" cap="flat" cmpd="sng" algn="ctr">
-                      <a:solidFill>
-                        <a:srgbClr val="E0E0E0"/>
-                      </a:solidFill>
-                      <a:prstDash val="solid"/>
-                      <a:round/>
-                      <a:headEnd type="none" w="med" len="med"/>
-                      <a:tailEnd type="none" w="med" len="med"/>
-                    </a:lnB>
-                    <a:solidFill>
-                      <a:srgbClr val="FFFFFF"/>
-                    </a:solidFill>
-                  </a:tcPr>
-                </a:tc>
-                <a:tc>
-                  <a:txBody>
-                    <a:bodyPr/>
-                    <a:lstStyle/>
-                    <a:p>
-                      <a:pPr marL="0" indent="0" eaLnBrk="0">
-                        <a:buNone/>
-                      </a:pPr>
-                      <a:r>
-                        <a:rPr lang="en-US" sz="1200" dirty="0">
-                          <a:solidFill>
-                            <a:srgbClr val="1D1D1F"/>
-                          </a:solidFill>
-                          <a:latin typeface="나눔스퀘어 네오 Regular" pitchFamily="34" charset="0"/>
-                          <a:ea typeface="나눔스퀘어 네오 Regular" pitchFamily="34" charset="-122"/>
-                          <a:cs typeface="나눔스퀘어 네오 Regular" pitchFamily="34" charset="-120"/>
-                        </a:rPr>
-                        <a:t>1.68°</a:t>
-                      </a:r>
-                      <a:endParaRPr lang="en-US" sz="1200" dirty="0">
-                        <a:latin typeface="나눔스퀘어 네오 Regular" charset="0"/>
-                        <a:ea typeface="나눔스퀘어 네오 Regular" charset="0"/>
-                        <a:cs typeface="나눔스퀘어 네오 Regular" charset="0"/>
-                      </a:endParaRPr>
-                    </a:p>
-                  </a:txBody>
-                  <a:tcPr marL="73152" marR="73152" marT="36576" marB="36576" anchor="ctr">
-                    <a:lnL w="6350" cap="flat" cmpd="sng" algn="ctr">
-                      <a:solidFill>
-                        <a:srgbClr val="E0E0E0"/>
-                      </a:solidFill>
-                      <a:prstDash val="solid"/>
-                      <a:round/>
-                      <a:headEnd type="none" w="med" len="med"/>
-                      <a:tailEnd type="none" w="med" len="med"/>
-                    </a:lnL>
-                    <a:lnR w="6350" cap="flat" cmpd="sng" algn="ctr">
-                      <a:solidFill>
-                        <a:srgbClr val="E0E0E0"/>
-                      </a:solidFill>
-                      <a:prstDash val="solid"/>
-                      <a:round/>
-                      <a:headEnd type="none" w="med" len="med"/>
-                      <a:tailEnd type="none" w="med" len="med"/>
-                    </a:lnR>
-                    <a:lnT w="6350" cap="flat" cmpd="sng" algn="ctr">
-                      <a:solidFill>
-                        <a:srgbClr val="E0E0E0"/>
-                      </a:solidFill>
-                      <a:prstDash val="solid"/>
-                      <a:round/>
-                      <a:headEnd type="none" w="med" len="med"/>
-                      <a:tailEnd type="none" w="med" len="med"/>
-                    </a:lnT>
-                    <a:lnB w="6350" cap="flat" cmpd="sng" algn="ctr">
-                      <a:solidFill>
-                        <a:srgbClr val="E0E0E0"/>
-                      </a:solidFill>
-                      <a:prstDash val="solid"/>
-                      <a:round/>
-                      <a:headEnd type="none" w="med" len="med"/>
-                      <a:tailEnd type="none" w="med" len="med"/>
-                    </a:lnB>
-                    <a:solidFill>
-                      <a:srgbClr val="FFFFFF"/>
-                    </a:solidFill>
-                  </a:tcPr>
-                </a:tc>
-                <a:tc>
-                  <a:txBody>
-                    <a:bodyPr/>
-                    <a:lstStyle/>
-                    <a:p>
-                      <a:pPr marL="0" indent="0" eaLnBrk="0">
-                        <a:buNone/>
-                      </a:pPr>
-                      <a:r>
-                        <a:rPr lang="en-US" sz="1200" dirty="0">
-                          <a:solidFill>
-                            <a:srgbClr val="1D1D1F"/>
-                          </a:solidFill>
-                          <a:latin typeface="나눔스퀘어 네오 Regular" pitchFamily="34" charset="0"/>
-                          <a:ea typeface="나눔스퀘어 네오 Regular" pitchFamily="34" charset="-122"/>
-                          <a:cs typeface="나눔스퀘어 네오 Regular" pitchFamily="34" charset="-120"/>
-                        </a:rPr>
-                        <a:t>0.06°</a:t>
-                      </a:r>
-                      <a:endParaRPr lang="en-US" sz="1200" dirty="0">
-                        <a:latin typeface="나눔스퀘어 네오 Regular" charset="0"/>
-                        <a:ea typeface="나눔스퀘어 네오 Regular" charset="0"/>
-                        <a:cs typeface="나눔스퀘어 네오 Regular" charset="0"/>
-                      </a:endParaRPr>
-                    </a:p>
-                  </a:txBody>
-                  <a:tcPr marL="73152" marR="73152" marT="36576" marB="36576" anchor="ctr">
-                    <a:lnL w="6350" cap="flat" cmpd="sng" algn="ctr">
-                      <a:solidFill>
-                        <a:srgbClr val="E0E0E0"/>
-                      </a:solidFill>
-                      <a:prstDash val="solid"/>
-                      <a:round/>
-                      <a:headEnd type="none" w="med" len="med"/>
-                      <a:tailEnd type="none" w="med" len="med"/>
-                    </a:lnL>
-                    <a:lnR w="6350" cap="flat" cmpd="sng" algn="ctr">
-                      <a:solidFill>
-                        <a:srgbClr val="E0E0E0"/>
-                      </a:solidFill>
-                      <a:prstDash val="solid"/>
-                      <a:round/>
-                      <a:headEnd type="none" w="med" len="med"/>
-                      <a:tailEnd type="none" w="med" len="med"/>
-                    </a:lnR>
-                    <a:lnT w="6350" cap="flat" cmpd="sng" algn="ctr">
-                      <a:solidFill>
-                        <a:srgbClr val="E0E0E0"/>
-                      </a:solidFill>
-                      <a:prstDash val="solid"/>
-                      <a:round/>
-                      <a:headEnd type="none" w="med" len="med"/>
-                      <a:tailEnd type="none" w="med" len="med"/>
-                    </a:lnT>
-                    <a:lnB w="6350" cap="flat" cmpd="sng" algn="ctr">
-                      <a:solidFill>
-                        <a:srgbClr val="E0E0E0"/>
-                      </a:solidFill>
-                      <a:prstDash val="solid"/>
-                      <a:round/>
-                      <a:headEnd type="none" w="med" len="med"/>
-                      <a:tailEnd type="none" w="med" len="med"/>
-                    </a:lnB>
-                    <a:solidFill>
-                      <a:srgbClr val="FFFFFF"/>
-                    </a:solidFill>
-                  </a:tcPr>
-                </a:tc>
-                <a:tc>
-                  <a:txBody>
-                    <a:bodyPr/>
-                    <a:lstStyle/>
-                    <a:p>
-                      <a:pPr marL="0" indent="0" eaLnBrk="0">
-                        <a:buNone/>
-                      </a:pPr>
-                      <a:r>
-                        <a:rPr lang="en-US" sz="1200" dirty="0">
-                          <a:solidFill>
-                            <a:srgbClr val="1D1D1F"/>
-                          </a:solidFill>
-                          <a:latin typeface="나눔스퀘어 네오 Bold" pitchFamily="34" charset="0"/>
-                          <a:ea typeface="나눔스퀘어 네오 Bold" pitchFamily="34" charset="-122"/>
-                          <a:cs typeface="나눔스퀘어 네오 Bold" pitchFamily="34" charset="-120"/>
-                        </a:rPr>
-                        <a:t>115.9°</a:t>
-                      </a:r>
-                      <a:endParaRPr lang="en-US" sz="1200" dirty="0">
-                        <a:latin typeface="나눔스퀘어 네오 Regular" charset="0"/>
-                        <a:ea typeface="나눔스퀘어 네오 Regular" charset="0"/>
-                        <a:cs typeface="나눔스퀘어 네오 Regular" charset="0"/>
-                      </a:endParaRPr>
-                    </a:p>
-                  </a:txBody>
-                  <a:tcPr marL="73152" marR="73152" marT="36576" marB="36576" anchor="ctr">
-                    <a:lnL w="6350" cap="flat" cmpd="sng" algn="ctr">
-                      <a:solidFill>
-                        <a:srgbClr val="E0E0E0"/>
-                      </a:solidFill>
-                      <a:prstDash val="solid"/>
-                      <a:round/>
-                      <a:headEnd type="none" w="med" len="med"/>
-                      <a:tailEnd type="none" w="med" len="med"/>
-                    </a:lnL>
-                    <a:lnR w="6350" cap="flat" cmpd="sng" algn="ctr">
-                      <a:solidFill>
-                        <a:srgbClr val="E0E0E0"/>
-                      </a:solidFill>
-                      <a:prstDash val="solid"/>
-                      <a:round/>
-                      <a:headEnd type="none" w="med" len="med"/>
-                      <a:tailEnd type="none" w="med" len="med"/>
-                    </a:lnR>
-                    <a:lnT w="6350" cap="flat" cmpd="sng" algn="ctr">
-                      <a:solidFill>
-                        <a:srgbClr val="E0E0E0"/>
-                      </a:solidFill>
-                      <a:prstDash val="solid"/>
-                      <a:round/>
-                      <a:headEnd type="none" w="med" len="med"/>
-                      <a:tailEnd type="none" w="med" len="med"/>
-                    </a:lnT>
-                    <a:lnB w="6350" cap="flat" cmpd="sng" algn="ctr">
-                      <a:solidFill>
-                        <a:srgbClr val="E0E0E0"/>
-                      </a:solidFill>
-                      <a:prstDash val="solid"/>
-                      <a:round/>
-                      <a:headEnd type="none" w="med" len="med"/>
-                      <a:tailEnd type="none" w="med" len="med"/>
-                    </a:lnB>
-                    <a:solidFill>
-                      <a:srgbClr val="FFFFFF"/>
-                    </a:solidFill>
-                  </a:tcPr>
-                </a:tc>
-                <a:extLst>
-                  <a:ext uri="{0D108BD9-81ED-4DB2-BD59-A6C34878D82A}">
-                    <a16:rowId xmlns:a16="http://schemas.microsoft.com/office/drawing/2014/main" val="10004"/>
-                  </a:ext>
-                </a:extLst>
-              </a:tr>
-            </a:tbl>
-          </a:graphicData>
-        </a:graphic>
-      </p:graphicFrame>
+      <p:pic>
+        <p:nvPicPr>
+          <p:cNvPr id="4" name="Image 0" descr="C:\SNU\포트폴리오\전국AI반도체경진대회\submission\figs\panorama_pan.png"/>
+          <p:cNvPicPr>
+            <a:picLocks noChangeAspect="1"/>
+          </p:cNvPicPr>
+          <p:nvPr/>
+        </p:nvPicPr>
+        <p:blipFill>
+          <a:blip r:embed="rId3"/>
+          <a:stretch>
+            <a:fillRect/>
+          </a:stretch>
+        </p:blipFill>
+        <p:spPr>
+          <a:xfrm>
+            <a:off x="548640" y="1280160"/>
+            <a:ext cx="5486400" cy="1527048"/>
+          </a:xfrm>
+          <a:prstGeom prst="rect">
+            <a:avLst/>
+          </a:prstGeom>
+        </p:spPr>
+      </p:pic>
       <p:sp>
         <p:nvSpPr>
-          <p:cNvPr id="5" name="Shape 1"/>
-          <p:cNvSpPr/>
-          <p:nvPr/>
-        </p:nvSpPr>
-        <p:spPr>
-          <a:xfrm>
-            <a:off x="548640" y="4572000"/>
-            <a:ext cx="5394960" cy="1737360"/>
-          </a:xfrm>
-          <a:prstGeom prst="roundRect">
-            <a:avLst>
-              <a:gd name="adj" fmla="val 6316"/>
-            </a:avLst>
-          </a:prstGeom>
-          <a:solidFill>
-            <a:srgbClr val="FFFFFF"/>
-          </a:solidFill>
-          <a:ln w="9525">
-            <a:solidFill>
-              <a:srgbClr val="E0E0E0"/>
-            </a:solidFill>
-            <a:prstDash val="solid"/>
-          </a:ln>
-        </p:spPr>
-      </p:sp>
-      <p:sp>
-        <p:nvSpPr>
-          <p:cNvPr id="6" name="Text 2"/>
+          <p:cNvPr id="5" name="Text 1"/>
           <p:cNvSpPr txBox="1"/>
           <p:nvPr/>
         </p:nvSpPr>
         <p:spPr>
           <a:xfrm>
-            <a:off x="731520" y="4709160"/>
-            <a:ext cx="5029200" cy="365760"/>
+            <a:off x="548640" y="2834640"/>
+            <a:ext cx="5486400" cy="274320"/>
           </a:xfrm>
           <a:prstGeom prst="rect">
             <a:avLst/>
@@ -5395,30 +3247,54 @@
               <a:buNone/>
             </a:pPr>
             <a:r>
-              <a:rPr lang="en-US" sz="1600" dirty="0">
+              <a:rPr lang="en-US" sz="1100" dirty="0">
                 <a:solidFill>
-                  <a:srgbClr val="0066CC"/>
+                  <a:srgbClr val="7A7A7A"/>
                 </a:solidFill>
-                <a:latin typeface="나눔스퀘어 네오 Bold" pitchFamily="34" charset="0"/>
-                <a:ea typeface="나눔스퀘어 네오 Bold" pitchFamily="34" charset="-122"/>
-                <a:cs typeface="나눔스퀘어 네오 Bold" pitchFamily="34" charset="-120"/>
+                <a:latin typeface="나눔스퀘어 네오 Regular" pitchFamily="34" charset="0"/>
+                <a:ea typeface="나눔스퀘어 네오 Regular" pitchFamily="34" charset="-122"/>
+                <a:cs typeface="나눔스퀘어 네오 Regular" pitchFamily="34" charset="-120"/>
               </a:rPr>
-              <a:t>결론</a:t>
+              <a:t>pan 녹화 월드 지도 파노라마 (소프트웨어 모델)</a:t>
             </a:r>
-            <a:endParaRPr lang="en-US" sz="1600" dirty="0"/>
+            <a:endParaRPr lang="en-US" sz="1100" dirty="0"/>
           </a:p>
         </p:txBody>
       </p:sp>
+      <p:pic>
+        <p:nvPicPr>
+          <p:cNvPr id="6" name="Image 1" descr="C:\SNU\포트폴리오\전국AI반도체경진대회\submission\figs\worldmap_stages.png"/>
+          <p:cNvPicPr>
+            <a:picLocks noChangeAspect="1"/>
+          </p:cNvPicPr>
+          <p:nvPr/>
+        </p:nvPicPr>
+        <p:blipFill>
+          <a:blip r:embed="rId4"/>
+          <a:stretch>
+            <a:fillRect/>
+          </a:stretch>
+        </p:blipFill>
+        <p:spPr>
+          <a:xfrm>
+            <a:off x="548640" y="3246120"/>
+            <a:ext cx="5486400" cy="1371600"/>
+          </a:xfrm>
+          <a:prstGeom prst="rect">
+            <a:avLst/>
+          </a:prstGeom>
+        </p:spPr>
+      </p:pic>
       <p:sp>
         <p:nvSpPr>
-          <p:cNvPr id="7" name="Text 3"/>
+          <p:cNvPr id="7" name="Text 2"/>
           <p:cNvSpPr txBox="1"/>
           <p:nvPr/>
         </p:nvSpPr>
         <p:spPr>
           <a:xfrm>
-            <a:off x="731520" y="5120640"/>
-            <a:ext cx="5029200" cy="1051560"/>
+            <a:off x="548640" y="4663440"/>
+            <a:ext cx="5486400" cy="274320"/>
           </a:xfrm>
           <a:prstGeom prst="rect">
             <a:avLst/>
@@ -5434,57 +3310,54 @@
               <a:buNone/>
             </a:pPr>
             <a:r>
-              <a:rPr lang="en-US" sz="1300" dirty="0">
+              <a:rPr lang="en-US" sz="1100" dirty="0">
                 <a:solidFill>
-                  <a:srgbClr val="1D1D1F"/>
+                  <a:srgbClr val="7A7A7A"/>
                 </a:solidFill>
                 <a:latin typeface="나눔스퀘어 네오 Regular" pitchFamily="34" charset="0"/>
                 <a:ea typeface="나눔스퀘어 네오 Regular" pitchFamily="34" charset="-122"/>
                 <a:cs typeface="나눔스퀘어 네오 Regular" pitchFamily="34" charset="-120"/>
               </a:rPr>
-              <a:t>자기보정은 피벗을 데이터에서 복원해 붕괴(프리즈 8~116°)를 0.2~1.7°로 막는다. 기준은 코드보다 먼저 커밋했고, 실패한 기준(P3, V3의 Q2)도 그대로 보고한다.</a:t>
+              <a:t>roll 월드 지도의 개선 단계: 첫 결과 → 보정 → 정리 → 참조 프레임</a:t>
             </a:r>
-            <a:endParaRPr lang="en-US" sz="1300" dirty="0"/>
+            <a:endParaRPr lang="en-US" sz="1100" dirty="0"/>
           </a:p>
         </p:txBody>
       </p:sp>
+      <p:pic>
+        <p:nvPicPr>
+          <p:cNvPr id="8" name="Image 2" descr="C:\SNU\포트폴리오\전국AI반도체경진대회\results_delta\ROLL_3D_real_views.png"/>
+          <p:cNvPicPr>
+            <a:picLocks noChangeAspect="1"/>
+          </p:cNvPicPr>
+          <p:nvPr/>
+        </p:nvPicPr>
+        <p:blipFill>
+          <a:blip r:embed="rId5"/>
+          <a:stretch>
+            <a:fillRect/>
+          </a:stretch>
+        </p:blipFill>
+        <p:spPr>
+          <a:xfrm>
+            <a:off x="6309360" y="1280160"/>
+            <a:ext cx="5303520" cy="2121408"/>
+          </a:xfrm>
+          <a:prstGeom prst="rect">
+            <a:avLst/>
+          </a:prstGeom>
+        </p:spPr>
+      </p:pic>
       <p:sp>
         <p:nvSpPr>
-          <p:cNvPr id="8" name="Shape 4"/>
-          <p:cNvSpPr/>
-          <p:nvPr/>
-        </p:nvSpPr>
-        <p:spPr>
-          <a:xfrm>
-            <a:off x="6217920" y="4572000"/>
-            <a:ext cx="5394960" cy="1737360"/>
-          </a:xfrm>
-          <a:prstGeom prst="roundRect">
-            <a:avLst>
-              <a:gd name="adj" fmla="val 6316"/>
-            </a:avLst>
-          </a:prstGeom>
-          <a:solidFill>
-            <a:srgbClr val="FFFFFF"/>
-          </a:solidFill>
-          <a:ln w="9525">
-            <a:solidFill>
-              <a:srgbClr val="E0E0E0"/>
-            </a:solidFill>
-            <a:prstDash val="solid"/>
-          </a:ln>
-        </p:spPr>
-      </p:sp>
-      <p:sp>
-        <p:nvSpPr>
-          <p:cNvPr id="9" name="Text 5"/>
+          <p:cNvPr id="9" name="Text 3"/>
           <p:cNvSpPr txBox="1"/>
           <p:nvPr/>
         </p:nvSpPr>
         <p:spPr>
           <a:xfrm>
-            <a:off x="6400800" y="4709160"/>
-            <a:ext cx="5029200" cy="365760"/>
+            <a:off x="6309360" y="3429000"/>
+            <a:ext cx="5303520" cy="274320"/>
           </a:xfrm>
           <a:prstGeom prst="rect">
             <a:avLst/>
@@ -5500,30 +3373,54 @@
               <a:buNone/>
             </a:pPr>
             <a:r>
-              <a:rPr lang="en-US" sz="1600" dirty="0">
+              <a:rPr lang="en-US" sz="1100" dirty="0">
                 <a:solidFill>
-                  <a:srgbClr val="1D1D1F"/>
+                  <a:srgbClr val="7A7A7A"/>
                 </a:solidFill>
-                <a:latin typeface="나눔스퀘어 네오 Bold" pitchFamily="34" charset="0"/>
-                <a:ea typeface="나눔스퀘어 네오 Bold" pitchFamily="34" charset="-122"/>
-                <a:cs typeface="나눔스퀘어 네오 Bold" pitchFamily="34" charset="-120"/>
+                <a:latin typeface="나눔스퀘어 네오 Regular" pitchFamily="34" charset="0"/>
+                <a:ea typeface="나눔스퀘어 네오 Regular" pitchFamily="34" charset="-122"/>
+                <a:cs typeface="나눔스퀘어 네오 Regular" pitchFamily="34" charset="-120"/>
               </a:rPr>
-              <a:t>한계</a:t>
+              <a:t>roll 3D 월드 지도, 시점 −35° / +35°</a:t>
             </a:r>
-            <a:endParaRPr lang="en-US" sz="1600" dirty="0"/>
+            <a:endParaRPr lang="en-US" sz="1100" dirty="0"/>
           </a:p>
         </p:txBody>
       </p:sp>
+      <p:pic>
+        <p:nvPicPr>
+          <p:cNvPr id="10" name="Image 3" descr="C:\SNU\포트폴리오\전국AI반도체경진대회\results_delta\PAN_3D_real_views.png"/>
+          <p:cNvPicPr>
+            <a:picLocks noChangeAspect="1"/>
+          </p:cNvPicPr>
+          <p:nvPr/>
+        </p:nvPicPr>
+        <p:blipFill>
+          <a:blip r:embed="rId6"/>
+          <a:stretch>
+            <a:fillRect/>
+          </a:stretch>
+        </p:blipFill>
+        <p:spPr>
+          <a:xfrm>
+            <a:off x="6309360" y="3840480"/>
+            <a:ext cx="5303520" cy="2121408"/>
+          </a:xfrm>
+          <a:prstGeom prst="rect">
+            <a:avLst/>
+          </a:prstGeom>
+        </p:spPr>
+      </p:pic>
       <p:sp>
         <p:nvSpPr>
-          <p:cNvPr id="10" name="Text 6"/>
+          <p:cNvPr id="11" name="Text 4"/>
           <p:cNvSpPr txBox="1"/>
           <p:nvPr/>
         </p:nvSpPr>
         <p:spPr>
           <a:xfrm>
-            <a:off x="6400800" y="5120640"/>
-            <a:ext cx="5029200" cy="1051560"/>
+            <a:off x="6309360" y="5989320"/>
+            <a:ext cx="5303520" cy="274320"/>
           </a:xfrm>
           <a:prstGeom prst="rect">
             <a:avLst/>
@@ -5539,17 +3436,56 @@
               <a:buNone/>
             </a:pPr>
             <a:r>
-              <a:rPr lang="en-US" sz="1300" dirty="0">
+              <a:rPr lang="en-US" sz="1100" dirty="0">
                 <a:solidFill>
-                  <a:srgbClr val="1D1D1F"/>
+                  <a:srgbClr val="7A7A7A"/>
                 </a:solidFill>
                 <a:latin typeface="나눔스퀘어 네오 Regular" pitchFamily="34" charset="0"/>
                 <a:ea typeface="나눔스퀘어 네오 Regular" pitchFamily="34" charset="-122"/>
                 <a:cs typeface="나눔스퀘어 네오 Regular" pitchFamily="34" charset="-120"/>
               </a:rPr>
-              <a:t>합성은 단일 깊이·한 방향 회전·시차 없음, float 복제 모델. pan 크기의 먼 피벗은 R 정밀도가 제한적(오차 1.7°).</a:t>
+              <a:t>pan 3D 월드 지도, 시점 −35° / +35°</a:t>
             </a:r>
-            <a:endParaRPr lang="en-US" sz="1300" dirty="0"/>
+            <a:endParaRPr lang="en-US" sz="1100" dirty="0"/>
+          </a:p>
+        </p:txBody>
+      </p:sp>
+      <p:sp>
+        <p:nvSpPr>
+          <p:cNvPr id="12" name="Text 5"/>
+          <p:cNvSpPr txBox="1"/>
+          <p:nvPr/>
+        </p:nvSpPr>
+        <p:spPr>
+          <a:xfrm>
+            <a:off x="548640" y="5120640"/>
+            <a:ext cx="5486400" cy="457200"/>
+          </a:xfrm>
+          <a:prstGeom prst="rect">
+            <a:avLst/>
+          </a:prstGeom>
+          <a:noFill/>
+          <a:ln/>
+        </p:spPr>
+        <p:txBody>
+          <a:bodyPr wrap="square" lIns="0" tIns="0" rIns="0" bIns="0" rtlCol="0" anchor="t"/>
+          <a:lstStyle/>
+          <a:p>
+            <a:pPr marL="0" indent="0" eaLnBrk="0">
+              <a:buNone/>
+            </a:pPr>
+            <a:r>
+              <a:rPr lang="en-US" sz="1400" dirty="0">
+                <a:solidFill>
+                  <a:srgbClr val="0066CC"/>
+                </a:solidFill>
+                <a:latin typeface="나눔스퀘어 네오 Bold" pitchFamily="34" charset="0"/>
+                <a:ea typeface="나눔스퀘어 네오 Bold" pitchFamily="34" charset="-122"/>
+                <a:cs typeface="나눔스퀘어 네오 Bold" pitchFamily="34" charset="-120"/>
+              </a:rPr>
+              <a:t>실제 DELTA 센서 영상 · 회전만 보정</a:t>
+            </a:r>
+            <a:endParaRPr lang="en-US" sz="1400" dirty="0"/>
           </a:p>
         </p:txBody>
       </p:sp>
@@ -5661,7 +3597,7 @@
                 <a:ea typeface="나눔스퀘어 네오 Bold" pitchFamily="34" charset="-122"/>
                 <a:cs typeface="나눔스퀘어 네오 Bold" pitchFamily="34" charset="-120"/>
               </a:rPr>
-              <a:t>과적합 해결: 녹화별 상수를 데이터에서 구한다</a:t>
+              <a:t>과적합 해결: 상수 여러 개는 "피벗 하나"였고, 데이터에서 구한다</a:t>
             </a:r>
             <a:endParaRPr lang="en-US" sz="2600" dirty="0"/>
           </a:p>
@@ -5683,28 +3619,28 @@
         </p:nvGraphicFramePr>
         <p:xfrm>
           <a:off x="548640" y="1371600"/>
-          <a:ext cx="11064240" cy="914400"/>
+          <a:ext cx="7223760" cy="914400"/>
         </p:xfrm>
         <a:graphic>
           <a:graphicData uri="http://schemas.openxmlformats.org/drawingml/2006/table">
             <a:tbl>
               <a:tblPr/>
               <a:tblGrid>
-                <a:gridCol w="3291840">
+                <a:gridCol w="3931920">
                   <a:extLst>
                     <a:ext uri="{9D8B030D-6E8A-4147-A177-3AD203B41FA5}">
                       <a16:colId xmlns:a16="http://schemas.microsoft.com/office/drawing/2014/main" val="20000"/>
                     </a:ext>
                   </a:extLst>
                 </a:gridCol>
-                <a:gridCol w="914400">
+                <a:gridCol w="1463040">
                   <a:extLst>
                     <a:ext uri="{9D8B030D-6E8A-4147-A177-3AD203B41FA5}">
                       <a16:colId xmlns:a16="http://schemas.microsoft.com/office/drawing/2014/main" val="20001"/>
                     </a:ext>
                   </a:extLst>
                 </a:gridCol>
-                <a:gridCol w="6858000">
+                <a:gridCol w="1828800">
                   <a:extLst>
                     <a:ext uri="{9D8B030D-6E8A-4147-A177-3AD203B41FA5}">
                       <a16:colId xmlns:a16="http://schemas.microsoft.com/office/drawing/2014/main" val="20002"/>
@@ -5712,7 +3648,7 @@
                   </a:extLst>
                 </a:gridCol>
               </a:tblGrid>
-              <a:tr h="566928">
+              <a:tr h="384048">
                 <a:tc>
                   <a:txBody>
                     <a:bodyPr/>
@@ -5730,7 +3666,7 @@
                           <a:ea typeface="나눔스퀘어 네오 Bold" pitchFamily="34" charset="-122"/>
                           <a:cs typeface="나눔스퀘어 네오 Bold" pitchFamily="34" charset="-120"/>
                         </a:rPr>
-                        <a:t>확인 항목</a:t>
+                        <a:t>ECC 대비, 오프셋 제거 평균</a:t>
                       </a:r>
                       <a:endParaRPr lang="en-US" sz="1200" dirty="0">
                         <a:latin typeface="나눔스퀘어 네오 Regular" charset="0"/>
@@ -5798,7 +3734,7 @@
                           <a:ea typeface="나눔스퀘어 네오 Bold" pitchFamily="34" charset="-122"/>
                           <a:cs typeface="나눔스퀘어 네오 Bold" pitchFamily="34" charset="-120"/>
                         </a:rPr>
-                        <a:t>상태</a:t>
+                        <a:t>roll</a:t>
                       </a:r>
                       <a:endParaRPr lang="en-US" sz="1200" dirty="0">
                         <a:latin typeface="나눔스퀘어 네오 Regular" charset="0"/>
@@ -5866,7 +3802,7 @@
                           <a:ea typeface="나눔스퀘어 네오 Bold" pitchFamily="34" charset="-122"/>
                           <a:cs typeface="나눔스퀘어 네오 Bold" pitchFamily="34" charset="-120"/>
                         </a:rPr>
-                        <a:t>결과</a:t>
+                        <a:t>pan</a:t>
                       </a:r>
                       <a:endParaRPr lang="en-US" sz="1200" dirty="0">
                         <a:latin typeface="나눔스퀘어 네오 Regular" charset="0"/>
@@ -5923,7 +3859,7 @@
                   </a:ext>
                 </a:extLst>
               </a:tr>
-              <a:tr h="566928">
+              <a:tr h="384048">
                 <a:tc>
                   <a:txBody>
                     <a:bodyPr/>
@@ -5941,7 +3877,7 @@
                           <a:ea typeface="나눔스퀘어 네오 Regular" pitchFamily="34" charset="-122"/>
                           <a:cs typeface="나눔스퀘어 네오 Regular" pitchFamily="34" charset="-120"/>
                         </a:rPr>
-                        <a:t>정수 기준모델 재현 (현수 EstS)</a:t>
+                        <a:t>다른 녹화의 상수를 그대로 사용 (프리즈)</a:t>
                       </a:r>
                       <a:endParaRPr lang="en-US" sz="1200" dirty="0">
                         <a:latin typeface="나눔스퀘어 네오 Regular" charset="0"/>
@@ -6003,13 +3939,156 @@
                       <a:r>
                         <a:rPr lang="en-US" sz="1200" dirty="0">
                           <a:solidFill>
-                            <a:srgbClr val="0066CC"/>
+                            <a:srgbClr val="1D1D1F"/>
                           </a:solidFill>
                           <a:latin typeface="나눔스퀘어 네오 Bold" pitchFamily="34" charset="0"/>
                           <a:ea typeface="나눔스퀘어 네오 Bold" pitchFamily="34" charset="-122"/>
                           <a:cs typeface="나눔스퀘어 네오 Bold" pitchFamily="34" charset="-120"/>
                         </a:rPr>
-                        <a:t>완료</a:t>
+                        <a:t>61.2°</a:t>
+                      </a:r>
+                      <a:endParaRPr lang="en-US" sz="1200" dirty="0">
+                        <a:latin typeface="나눔스퀘어 네오 Regular" charset="0"/>
+                        <a:ea typeface="나눔스퀘어 네오 Regular" charset="0"/>
+                        <a:cs typeface="나눔스퀘어 네오 Regular" charset="0"/>
+                      </a:endParaRPr>
+                    </a:p>
+                  </a:txBody>
+                  <a:tcPr marL="73152" marR="73152" marT="36576" marB="36576" anchor="ctr">
+                    <a:lnL w="6350" cap="flat" cmpd="sng" algn="ctr">
+                      <a:solidFill>
+                        <a:srgbClr val="E0E0E0"/>
+                      </a:solidFill>
+                      <a:prstDash val="solid"/>
+                      <a:round/>
+                      <a:headEnd type="none" w="med" len="med"/>
+                      <a:tailEnd type="none" w="med" len="med"/>
+                    </a:lnL>
+                    <a:lnR w="6350" cap="flat" cmpd="sng" algn="ctr">
+                      <a:solidFill>
+                        <a:srgbClr val="E0E0E0"/>
+                      </a:solidFill>
+                      <a:prstDash val="solid"/>
+                      <a:round/>
+                      <a:headEnd type="none" w="med" len="med"/>
+                      <a:tailEnd type="none" w="med" len="med"/>
+                    </a:lnR>
+                    <a:lnT w="6350" cap="flat" cmpd="sng" algn="ctr">
+                      <a:solidFill>
+                        <a:srgbClr val="E0E0E0"/>
+                      </a:solidFill>
+                      <a:prstDash val="solid"/>
+                      <a:round/>
+                      <a:headEnd type="none" w="med" len="med"/>
+                      <a:tailEnd type="none" w="med" len="med"/>
+                    </a:lnT>
+                    <a:lnB w="6350" cap="flat" cmpd="sng" algn="ctr">
+                      <a:solidFill>
+                        <a:srgbClr val="E0E0E0"/>
+                      </a:solidFill>
+                      <a:prstDash val="solid"/>
+                      <a:round/>
+                      <a:headEnd type="none" w="med" len="med"/>
+                      <a:tailEnd type="none" w="med" len="med"/>
+                    </a:lnB>
+                    <a:solidFill>
+                      <a:srgbClr val="FFFFFF"/>
+                    </a:solidFill>
+                  </a:tcPr>
+                </a:tc>
+                <a:tc>
+                  <a:txBody>
+                    <a:bodyPr/>
+                    <a:lstStyle/>
+                    <a:p>
+                      <a:pPr marL="0" indent="0" eaLnBrk="0">
+                        <a:buNone/>
+                      </a:pPr>
+                      <a:r>
+                        <a:rPr lang="en-US" sz="1200" dirty="0">
+                          <a:solidFill>
+                            <a:srgbClr val="1D1D1F"/>
+                          </a:solidFill>
+                          <a:latin typeface="나눔스퀘어 네오 Bold" pitchFamily="34" charset="0"/>
+                          <a:ea typeface="나눔스퀘어 네오 Bold" pitchFamily="34" charset="-122"/>
+                          <a:cs typeface="나눔스퀘어 네오 Bold" pitchFamily="34" charset="-120"/>
+                        </a:rPr>
+                        <a:t>472 px</a:t>
+                      </a:r>
+                      <a:endParaRPr lang="en-US" sz="1200" dirty="0">
+                        <a:latin typeface="나눔스퀘어 네오 Regular" charset="0"/>
+                        <a:ea typeface="나눔스퀘어 네오 Regular" charset="0"/>
+                        <a:cs typeface="나눔스퀘어 네오 Regular" charset="0"/>
+                      </a:endParaRPr>
+                    </a:p>
+                  </a:txBody>
+                  <a:tcPr marL="73152" marR="73152" marT="36576" marB="36576" anchor="ctr">
+                    <a:lnL w="6350" cap="flat" cmpd="sng" algn="ctr">
+                      <a:solidFill>
+                        <a:srgbClr val="E0E0E0"/>
+                      </a:solidFill>
+                      <a:prstDash val="solid"/>
+                      <a:round/>
+                      <a:headEnd type="none" w="med" len="med"/>
+                      <a:tailEnd type="none" w="med" len="med"/>
+                    </a:lnL>
+                    <a:lnR w="6350" cap="flat" cmpd="sng" algn="ctr">
+                      <a:solidFill>
+                        <a:srgbClr val="E0E0E0"/>
+                      </a:solidFill>
+                      <a:prstDash val="solid"/>
+                      <a:round/>
+                      <a:headEnd type="none" w="med" len="med"/>
+                      <a:tailEnd type="none" w="med" len="med"/>
+                    </a:lnR>
+                    <a:lnT w="6350" cap="flat" cmpd="sng" algn="ctr">
+                      <a:solidFill>
+                        <a:srgbClr val="E0E0E0"/>
+                      </a:solidFill>
+                      <a:prstDash val="solid"/>
+                      <a:round/>
+                      <a:headEnd type="none" w="med" len="med"/>
+                      <a:tailEnd type="none" w="med" len="med"/>
+                    </a:lnT>
+                    <a:lnB w="6350" cap="flat" cmpd="sng" algn="ctr">
+                      <a:solidFill>
+                        <a:srgbClr val="E0E0E0"/>
+                      </a:solidFill>
+                      <a:prstDash val="solid"/>
+                      <a:round/>
+                      <a:headEnd type="none" w="med" len="med"/>
+                      <a:tailEnd type="none" w="med" len="med"/>
+                    </a:lnB>
+                    <a:solidFill>
+                      <a:srgbClr val="FFFFFF"/>
+                    </a:solidFill>
+                  </a:tcPr>
+                </a:tc>
+                <a:extLst>
+                  <a:ext uri="{0D108BD9-81ED-4DB2-BD59-A6C34878D82A}">
+                    <a16:rowId xmlns:a16="http://schemas.microsoft.com/office/drawing/2014/main" val="10001"/>
+                  </a:ext>
+                </a:extLst>
+              </a:tr>
+              <a:tr h="384048">
+                <a:tc>
+                  <a:txBody>
+                    <a:bodyPr/>
+                    <a:lstStyle/>
+                    <a:p>
+                      <a:pPr marL="0" indent="0" eaLnBrk="0">
+                        <a:buNone/>
+                      </a:pPr>
+                      <a:r>
+                        <a:rPr lang="en-US" sz="1200" dirty="0">
+                          <a:solidFill>
+                            <a:srgbClr val="1D1D1F"/>
+                          </a:solidFill>
+                          <a:latin typeface="나눔스퀘어 네오 Regular" pitchFamily="34" charset="0"/>
+                          <a:ea typeface="나눔스퀘어 네오 Regular" pitchFamily="34" charset="-122"/>
+                          <a:cs typeface="나눔스퀘어 네오 Regular" pitchFamily="34" charset="-120"/>
+                        </a:rPr>
+                        <a:t>자기 데이터에 다시 맞춤 (재맞춤)</a:t>
                       </a:r>
                       <a:endParaRPr lang="en-US" sz="1200" dirty="0">
                         <a:latin typeface="나눔스퀘어 네오 Regular" charset="0"/>
@@ -6077,150 +4156,7 @@
                           <a:ea typeface="나눔스퀘어 네오 Regular" pitchFamily="34" charset="-122"/>
                           <a:cs typeface="나눔스퀘어 네오 Regular" pitchFamily="34" charset="-120"/>
                         </a:rPr>
-                        <a:t>roll 0.467° / 0.462° 그대로 재현, 4초에 실행</a:t>
-                      </a:r>
-                      <a:endParaRPr lang="en-US" sz="1200" dirty="0">
-                        <a:latin typeface="나눔스퀘어 네오 Regular" charset="0"/>
-                        <a:ea typeface="나눔스퀘어 네오 Regular" charset="0"/>
-                        <a:cs typeface="나눔스퀘어 네오 Regular" charset="0"/>
-                      </a:endParaRPr>
-                    </a:p>
-                  </a:txBody>
-                  <a:tcPr marL="73152" marR="73152" marT="36576" marB="36576" anchor="ctr">
-                    <a:lnL w="6350" cap="flat" cmpd="sng" algn="ctr">
-                      <a:solidFill>
-                        <a:srgbClr val="E0E0E0"/>
-                      </a:solidFill>
-                      <a:prstDash val="solid"/>
-                      <a:round/>
-                      <a:headEnd type="none" w="med" len="med"/>
-                      <a:tailEnd type="none" w="med" len="med"/>
-                    </a:lnL>
-                    <a:lnR w="6350" cap="flat" cmpd="sng" algn="ctr">
-                      <a:solidFill>
-                        <a:srgbClr val="E0E0E0"/>
-                      </a:solidFill>
-                      <a:prstDash val="solid"/>
-                      <a:round/>
-                      <a:headEnd type="none" w="med" len="med"/>
-                      <a:tailEnd type="none" w="med" len="med"/>
-                    </a:lnR>
-                    <a:lnT w="6350" cap="flat" cmpd="sng" algn="ctr">
-                      <a:solidFill>
-                        <a:srgbClr val="E0E0E0"/>
-                      </a:solidFill>
-                      <a:prstDash val="solid"/>
-                      <a:round/>
-                      <a:headEnd type="none" w="med" len="med"/>
-                      <a:tailEnd type="none" w="med" len="med"/>
-                    </a:lnT>
-                    <a:lnB w="6350" cap="flat" cmpd="sng" algn="ctr">
-                      <a:solidFill>
-                        <a:srgbClr val="E0E0E0"/>
-                      </a:solidFill>
-                      <a:prstDash val="solid"/>
-                      <a:round/>
-                      <a:headEnd type="none" w="med" len="med"/>
-                      <a:tailEnd type="none" w="med" len="med"/>
-                    </a:lnB>
-                    <a:solidFill>
-                      <a:srgbClr val="FFFFFF"/>
-                    </a:solidFill>
-                  </a:tcPr>
-                </a:tc>
-                <a:extLst>
-                  <a:ext uri="{0D108BD9-81ED-4DB2-BD59-A6C34878D82A}">
-                    <a16:rowId xmlns:a16="http://schemas.microsoft.com/office/drawing/2014/main" val="10001"/>
-                  </a:ext>
-                </a:extLst>
-              </a:tr>
-              <a:tr h="566928">
-                <a:tc>
-                  <a:txBody>
-                    <a:bodyPr/>
-                    <a:lstStyle/>
-                    <a:p>
-                      <a:pPr marL="0" indent="0" eaLnBrk="0">
-                        <a:buNone/>
-                      </a:pPr>
-                      <a:r>
-                        <a:rPr lang="en-US" sz="1200" dirty="0">
-                          <a:solidFill>
-                            <a:srgbClr val="1D1D1F"/>
-                          </a:solidFill>
-                          <a:latin typeface="나눔스퀘어 네오 Regular" pitchFamily="34" charset="0"/>
-                          <a:ea typeface="나눔스퀘어 네오 Regular" pitchFamily="34" charset="-122"/>
-                          <a:cs typeface="나눔스퀘어 네오 Regular" pitchFamily="34" charset="-120"/>
-                        </a:rPr>
-                        <a:t>3자유도 부트스트랩 궤적</a:t>
-                      </a:r>
-                      <a:endParaRPr lang="en-US" sz="1200" dirty="0">
-                        <a:latin typeface="나눔스퀘어 네오 Regular" charset="0"/>
-                        <a:ea typeface="나눔스퀘어 네오 Regular" charset="0"/>
-                        <a:cs typeface="나눔스퀘어 네오 Regular" charset="0"/>
-                      </a:endParaRPr>
-                    </a:p>
-                  </a:txBody>
-                  <a:tcPr marL="73152" marR="73152" marT="36576" marB="36576" anchor="ctr">
-                    <a:lnL w="6350" cap="flat" cmpd="sng" algn="ctr">
-                      <a:solidFill>
-                        <a:srgbClr val="E0E0E0"/>
-                      </a:solidFill>
-                      <a:prstDash val="solid"/>
-                      <a:round/>
-                      <a:headEnd type="none" w="med" len="med"/>
-                      <a:tailEnd type="none" w="med" len="med"/>
-                    </a:lnL>
-                    <a:lnR w="6350" cap="flat" cmpd="sng" algn="ctr">
-                      <a:solidFill>
-                        <a:srgbClr val="E0E0E0"/>
-                      </a:solidFill>
-                      <a:prstDash val="solid"/>
-                      <a:round/>
-                      <a:headEnd type="none" w="med" len="med"/>
-                      <a:tailEnd type="none" w="med" len="med"/>
-                    </a:lnR>
-                    <a:lnT w="6350" cap="flat" cmpd="sng" algn="ctr">
-                      <a:solidFill>
-                        <a:srgbClr val="E0E0E0"/>
-                      </a:solidFill>
-                      <a:prstDash val="solid"/>
-                      <a:round/>
-                      <a:headEnd type="none" w="med" len="med"/>
-                      <a:tailEnd type="none" w="med" len="med"/>
-                    </a:lnT>
-                    <a:lnB w="6350" cap="flat" cmpd="sng" algn="ctr">
-                      <a:solidFill>
-                        <a:srgbClr val="E0E0E0"/>
-                      </a:solidFill>
-                      <a:prstDash val="solid"/>
-                      <a:round/>
-                      <a:headEnd type="none" w="med" len="med"/>
-                      <a:tailEnd type="none" w="med" len="med"/>
-                    </a:lnB>
-                    <a:solidFill>
-                      <a:srgbClr val="FFFFFF"/>
-                    </a:solidFill>
-                  </a:tcPr>
-                </a:tc>
-                <a:tc>
-                  <a:txBody>
-                    <a:bodyPr/>
-                    <a:lstStyle/>
-                    <a:p>
-                      <a:pPr marL="0" indent="0" eaLnBrk="0">
-                        <a:buNone/>
-                      </a:pPr>
-                      <a:r>
-                        <a:rPr lang="en-US" sz="1200" dirty="0">
-                          <a:solidFill>
-                            <a:srgbClr val="0066CC"/>
-                          </a:solidFill>
-                          <a:latin typeface="나눔스퀘어 네오 Bold" pitchFamily="34" charset="0"/>
-                          <a:ea typeface="나눔스퀘어 네오 Bold" pitchFamily="34" charset="-122"/>
-                          <a:cs typeface="나눔스퀘어 네오 Bold" pitchFamily="34" charset="-120"/>
-                        </a:rPr>
-                        <a:t>완료</a:t>
+                        <a:t>0.62°</a:t>
                       </a:r>
                       <a:endParaRPr lang="en-US" sz="1200" dirty="0">
                         <a:latin typeface="나눔스퀘어 네오 Regular" charset="0"/>
@@ -6288,7 +4224,7 @@
                           <a:ea typeface="나눔스퀘어 네오 Regular" pitchFamily="34" charset="-122"/>
                           <a:cs typeface="나눔스퀘어 네오 Regular" pitchFamily="34" charset="-120"/>
                         </a:rPr>
-                        <a:t>roll 전체 5초, θ 오차 0.88~1.17°, 최종 각도 323.7° (ECC 323.1°)</a:t>
+                        <a:t>8.97 px</a:t>
                       </a:r>
                       <a:endParaRPr lang="en-US" sz="1200" dirty="0">
                         <a:latin typeface="나눔스퀘어 네오 Regular" charset="0"/>
@@ -6345,7 +4281,7 @@
                   </a:ext>
                 </a:extLst>
               </a:tr>
-              <a:tr h="566928">
+              <a:tr h="384048">
                 <a:tc>
                   <a:txBody>
                     <a:bodyPr/>
@@ -6363,7 +4299,7 @@
                           <a:ea typeface="나눔스퀘어 네오 Regular" pitchFamily="34" charset="-122"/>
                           <a:cs typeface="나눔스퀘어 네오 Regular" pitchFamily="34" charset="-120"/>
                         </a:rPr>
-                        <a:t>피벗 최소제곱 (정수 궤적)</a:t>
+                        <a:t>자기보정 (상수 0개, float 모델)</a:t>
                       </a:r>
                       <a:endParaRPr lang="en-US" sz="1200" dirty="0">
                         <a:latin typeface="나눔스퀘어 네오 Regular" charset="0"/>
@@ -6425,13 +4361,13 @@
                       <a:r>
                         <a:rPr lang="en-US" sz="1200" dirty="0">
                           <a:solidFill>
-                            <a:srgbClr val="0066CC"/>
+                            <a:srgbClr val="1D1D1F"/>
                           </a:solidFill>
                           <a:latin typeface="나눔스퀘어 네오 Bold" pitchFamily="34" charset="0"/>
                           <a:ea typeface="나눔스퀘어 네오 Bold" pitchFamily="34" charset="-122"/>
                           <a:cs typeface="나눔스퀘어 네오 Bold" pitchFamily="34" charset="-120"/>
                         </a:rPr>
-                        <a:t>완료</a:t>
+                        <a:t>0.67°</a:t>
                       </a:r>
                       <a:endParaRPr lang="en-US" sz="1200" dirty="0">
                         <a:latin typeface="나눔스퀘어 네오 Regular" charset="0"/>
@@ -6499,7 +4435,7 @@
                           <a:ea typeface="나눔스퀘어 네오 Regular" pitchFamily="34" charset="-122"/>
                           <a:cs typeface="나눔스퀘어 네오 Regular" pitchFamily="34" charset="-120"/>
                         </a:rPr>
-                        <a:t>R 26~39 px (float 49 px), 설명도 r² 0.87~0.93</a:t>
+                        <a:t>13.9 px (키프레임 8장 시 8.0 px)</a:t>
                       </a:r>
                       <a:endParaRPr lang="en-US" sz="1200" dirty="0">
                         <a:latin typeface="나눔스퀘어 네오 Regular" charset="0"/>
@@ -6556,7 +4492,7 @@
                   </a:ext>
                 </a:extLst>
               </a:tr>
-              <a:tr h="566928">
+              <a:tr h="384048">
                 <a:tc>
                   <a:txBody>
                     <a:bodyPr/>
@@ -6574,75 +4510,7 @@
                           <a:ea typeface="나눔스퀘어 네오 Regular" pitchFamily="34" charset="-122"/>
                           <a:cs typeface="나눔스퀘어 네오 Regular" pitchFamily="34" charset="-120"/>
                         </a:rPr>
-                        <a:t>피벗 민감도 (roll 모드 정수 기준모델)</a:t>
-                      </a:r>
-                      <a:endParaRPr lang="en-US" sz="1200" dirty="0">
-                        <a:latin typeface="나눔스퀘어 네오 Regular" charset="0"/>
-                        <a:ea typeface="나눔스퀘어 네오 Regular" charset="0"/>
-                        <a:cs typeface="나눔스퀘어 네오 Regular" charset="0"/>
-                      </a:endParaRPr>
-                    </a:p>
-                  </a:txBody>
-                  <a:tcPr marL="73152" marR="73152" marT="36576" marB="36576" anchor="ctr">
-                    <a:lnL w="6350" cap="flat" cmpd="sng" algn="ctr">
-                      <a:solidFill>
-                        <a:srgbClr val="E0E0E0"/>
-                      </a:solidFill>
-                      <a:prstDash val="solid"/>
-                      <a:round/>
-                      <a:headEnd type="none" w="med" len="med"/>
-                      <a:tailEnd type="none" w="med" len="med"/>
-                    </a:lnL>
-                    <a:lnR w="6350" cap="flat" cmpd="sng" algn="ctr">
-                      <a:solidFill>
-                        <a:srgbClr val="E0E0E0"/>
-                      </a:solidFill>
-                      <a:prstDash val="solid"/>
-                      <a:round/>
-                      <a:headEnd type="none" w="med" len="med"/>
-                      <a:tailEnd type="none" w="med" len="med"/>
-                    </a:lnR>
-                    <a:lnT w="6350" cap="flat" cmpd="sng" algn="ctr">
-                      <a:solidFill>
-                        <a:srgbClr val="E0E0E0"/>
-                      </a:solidFill>
-                      <a:prstDash val="solid"/>
-                      <a:round/>
-                      <a:headEnd type="none" w="med" len="med"/>
-                      <a:tailEnd type="none" w="med" len="med"/>
-                    </a:lnT>
-                    <a:lnB w="6350" cap="flat" cmpd="sng" algn="ctr">
-                      <a:solidFill>
-                        <a:srgbClr val="E0E0E0"/>
-                      </a:solidFill>
-                      <a:prstDash val="solid"/>
-                      <a:round/>
-                      <a:headEnd type="none" w="med" len="med"/>
-                      <a:tailEnd type="none" w="med" len="med"/>
-                    </a:lnB>
-                    <a:solidFill>
-                      <a:srgbClr val="FFFFFF"/>
-                    </a:solidFill>
-                  </a:tcPr>
-                </a:tc>
-                <a:tc>
-                  <a:txBody>
-                    <a:bodyPr/>
-                    <a:lstStyle/>
-                    <a:p>
-                      <a:pPr marL="0" indent="0" eaLnBrk="0">
-                        <a:buNone/>
-                      </a:pPr>
-                      <a:r>
-                        <a:rPr lang="en-US" sz="1200" dirty="0">
-                          <a:solidFill>
-                            <a:srgbClr val="0066CC"/>
-                          </a:solidFill>
-                          <a:latin typeface="나눔스퀘어 네오 Bold" pitchFamily="34" charset="0"/>
-                          <a:ea typeface="나눔스퀘어 네오 Bold" pitchFamily="34" charset="-122"/>
-                          <a:cs typeface="나눔스퀘어 네오 Bold" pitchFamily="34" charset="-120"/>
-                        </a:rPr>
-                        <a:t>완료</a:t>
+                        <a:t>정수 기준모델: 구한 피벗 / 손으로 맞춘 피벗</a:t>
                       </a:r>
                       <a:endParaRPr lang="en-US" sz="1200" dirty="0">
                         <a:latin typeface="나눔스퀘어 네오 Regular" charset="0"/>
@@ -6710,7 +4578,75 @@
                           <a:ea typeface="나눔스퀘어 네오 Regular" pitchFamily="34" charset="-122"/>
                           <a:cs typeface="나눔스퀘어 네오 Regular" pitchFamily="34" charset="-120"/>
                         </a:rPr>
-                        <a:t>구한 피벗 0.405° &lt; 손으로 맞춘 피벗 0.467° &lt; 영상 중심 0.529° ≪ 100 px 어긋남 6.7°</a:t>
+                        <a:t>0.405° / 0.467°</a:t>
+                      </a:r>
+                      <a:endParaRPr lang="en-US" sz="1200" dirty="0">
+                        <a:latin typeface="나눔스퀘어 네오 Regular" charset="0"/>
+                        <a:ea typeface="나눔스퀘어 네오 Regular" charset="0"/>
+                        <a:cs typeface="나눔스퀘어 네오 Regular" charset="0"/>
+                      </a:endParaRPr>
+                    </a:p>
+                  </a:txBody>
+                  <a:tcPr marL="73152" marR="73152" marT="36576" marB="36576" anchor="ctr">
+                    <a:lnL w="6350" cap="flat" cmpd="sng" algn="ctr">
+                      <a:solidFill>
+                        <a:srgbClr val="E0E0E0"/>
+                      </a:solidFill>
+                      <a:prstDash val="solid"/>
+                      <a:round/>
+                      <a:headEnd type="none" w="med" len="med"/>
+                      <a:tailEnd type="none" w="med" len="med"/>
+                    </a:lnL>
+                    <a:lnR w="6350" cap="flat" cmpd="sng" algn="ctr">
+                      <a:solidFill>
+                        <a:srgbClr val="E0E0E0"/>
+                      </a:solidFill>
+                      <a:prstDash val="solid"/>
+                      <a:round/>
+                      <a:headEnd type="none" w="med" len="med"/>
+                      <a:tailEnd type="none" w="med" len="med"/>
+                    </a:lnR>
+                    <a:lnT w="6350" cap="flat" cmpd="sng" algn="ctr">
+                      <a:solidFill>
+                        <a:srgbClr val="E0E0E0"/>
+                      </a:solidFill>
+                      <a:prstDash val="solid"/>
+                      <a:round/>
+                      <a:headEnd type="none" w="med" len="med"/>
+                      <a:tailEnd type="none" w="med" len="med"/>
+                    </a:lnT>
+                    <a:lnB w="6350" cap="flat" cmpd="sng" algn="ctr">
+                      <a:solidFill>
+                        <a:srgbClr val="E0E0E0"/>
+                      </a:solidFill>
+                      <a:prstDash val="solid"/>
+                      <a:round/>
+                      <a:headEnd type="none" w="med" len="med"/>
+                      <a:tailEnd type="none" w="med" len="med"/>
+                    </a:lnB>
+                    <a:solidFill>
+                      <a:srgbClr val="FFFFFF"/>
+                    </a:solidFill>
+                  </a:tcPr>
+                </a:tc>
+                <a:tc>
+                  <a:txBody>
+                    <a:bodyPr/>
+                    <a:lstStyle/>
+                    <a:p>
+                      <a:pPr marL="0" indent="0" eaLnBrk="0">
+                        <a:buNone/>
+                      </a:pPr>
+                      <a:r>
+                        <a:rPr lang="en-US" sz="1200" dirty="0">
+                          <a:solidFill>
+                            <a:srgbClr val="1D1D1F"/>
+                          </a:solidFill>
+                          <a:latin typeface="나눔스퀘어 네오 Regular" pitchFamily="34" charset="0"/>
+                          <a:ea typeface="나눔스퀘어 네오 Regular" pitchFamily="34" charset="-122"/>
+                          <a:cs typeface="나눔스퀘어 네오 Regular" pitchFamily="34" charset="-120"/>
+                        </a:rPr>
+                        <a:t>12.0 px</a:t>
                       </a:r>
                       <a:endParaRPr lang="en-US" sz="1200" dirty="0">
                         <a:latin typeface="나눔스퀘어 네오 Regular" charset="0"/>
@@ -6779,12 +4715,12 @@
         </p:nvSpPr>
         <p:spPr>
           <a:xfrm>
-            <a:off x="548640" y="4297680"/>
-            <a:ext cx="5394960" cy="2011680"/>
+            <a:off x="8046720" y="1371600"/>
+            <a:ext cx="3566160" cy="2103120"/>
           </a:xfrm>
           <a:prstGeom prst="roundRect">
             <a:avLst>
-              <a:gd name="adj" fmla="val 5455"/>
+              <a:gd name="adj" fmla="val 5217"/>
             </a:avLst>
           </a:prstGeom>
           <a:solidFill>
@@ -6806,8 +4742,8 @@
         </p:nvSpPr>
         <p:spPr>
           <a:xfrm>
-            <a:off x="731520" y="4434840"/>
-            <a:ext cx="5029200" cy="365760"/>
+            <a:off x="8229600" y="1508760"/>
+            <a:ext cx="3200400" cy="365760"/>
           </a:xfrm>
           <a:prstGeom prst="rect">
             <a:avLst/>
@@ -6831,7 +4767,7 @@
                 <a:ea typeface="나눔스퀘어 네오 Bold" pitchFamily="34" charset="-122"/>
                 <a:cs typeface="나눔스퀘어 네오 Bold" pitchFamily="34" charset="-120"/>
               </a:rPr>
-              <a:t>결과: 61° → 0.67°</a:t>
+              <a:t>자기보정 방식</a:t>
             </a:r>
             <a:endParaRPr lang="en-US" sz="1600" dirty="0"/>
           </a:p>
@@ -6845,8 +4781,2192 @@
         </p:nvSpPr>
         <p:spPr>
           <a:xfrm>
-            <a:off x="731520" y="4846320"/>
-            <a:ext cx="5029200" cy="1325880"/>
+            <a:off x="8229600" y="1920240"/>
+            <a:ext cx="3200400" cy="1417320"/>
+          </a:xfrm>
+          <a:prstGeom prst="rect">
+            <a:avLst/>
+          </a:prstGeom>
+          <a:noFill/>
+          <a:ln/>
+        </p:spPr>
+        <p:txBody>
+          <a:bodyPr wrap="square" lIns="0" tIns="0" rIns="0" bIns="0" rtlCol="0" anchor="t"/>
+          <a:lstStyle/>
+          <a:p>
+            <a:pPr marL="0" indent="0" eaLnBrk="0">
+              <a:buNone/>
+            </a:pPr>
+            <a:r>
+              <a:rPr lang="en-US" sz="1200" dirty="0">
+                <a:solidFill>
+                  <a:srgbClr val="1D1D1F"/>
+                </a:solidFill>
+                <a:latin typeface="나눔스퀘어 네오 Regular" pitchFamily="34" charset="0"/>
+                <a:ea typeface="나눔스퀘어 네오 Regular" pitchFamily="34" charset="-122"/>
+                <a:cs typeface="나눔스퀘어 네오 Regular" pitchFamily="34" charset="-120"/>
+              </a:rPr>
+              <a:t>처음 몇 창을 3자유도로 돌려 (θ, tx, ty)를 모으고 t = (R(θ)−I)·u 를 최소제곱으로 맞춰 피벗 u를 구함. 설명도 r² 0.9 이상이면 1자유도로 고정.</a:t>
+            </a:r>
+            <a:endParaRPr lang="en-US" sz="1200" dirty="0"/>
+          </a:p>
+        </p:txBody>
+      </p:sp>
+      <p:graphicFrame>
+        <p:nvGraphicFramePr>
+          <p:cNvPr id="23" name="Table 1"/>
+          <p:cNvGraphicFramePr>
+            <a:graphicFrameLocks noGrp="1"/>
+          </p:cNvGraphicFramePr>
+          <p:nvPr>
+            <p:extLst>
+              <p:ext uri="{D42A27DB-BD31-4B8C-83A1-F6EECF244321}">
+                <p14:modId xmlns:p14="http://schemas.microsoft.com/office/powerpoint/2010/main" val="1579011935"/>
+              </p:ext>
+            </p:extLst>
+          </p:nvPr>
+        </p:nvGraphicFramePr>
+        <p:xfrm>
+          <a:off x="548640" y="3703320"/>
+          <a:ext cx="11064240" cy="914400"/>
+        </p:xfrm>
+        <a:graphic>
+          <a:graphicData uri="http://schemas.openxmlformats.org/drawingml/2006/table">
+            <a:tbl>
+              <a:tblPr/>
+              <a:tblGrid>
+                <a:gridCol w="2651760">
+                  <a:extLst>
+                    <a:ext uri="{9D8B030D-6E8A-4147-A177-3AD203B41FA5}">
+                      <a16:colId xmlns:a16="http://schemas.microsoft.com/office/drawing/2014/main" val="20000"/>
+                    </a:ext>
+                  </a:extLst>
+                </a:gridCol>
+                <a:gridCol w="822960">
+                  <a:extLst>
+                    <a:ext uri="{9D8B030D-6E8A-4147-A177-3AD203B41FA5}">
+                      <a16:colId xmlns:a16="http://schemas.microsoft.com/office/drawing/2014/main" val="20001"/>
+                    </a:ext>
+                  </a:extLst>
+                </a:gridCol>
+                <a:gridCol w="2743200">
+                  <a:extLst>
+                    <a:ext uri="{9D8B030D-6E8A-4147-A177-3AD203B41FA5}">
+                      <a16:colId xmlns:a16="http://schemas.microsoft.com/office/drawing/2014/main" val="20002"/>
+                    </a:ext>
+                  </a:extLst>
+                </a:gridCol>
+                <a:gridCol w="1463040">
+                  <a:extLst>
+                    <a:ext uri="{9D8B030D-6E8A-4147-A177-3AD203B41FA5}">
+                      <a16:colId xmlns:a16="http://schemas.microsoft.com/office/drawing/2014/main" val="20003"/>
+                    </a:ext>
+                  </a:extLst>
+                </a:gridCol>
+                <a:gridCol w="1371600">
+                  <a:extLst>
+                    <a:ext uri="{9D8B030D-6E8A-4147-A177-3AD203B41FA5}">
+                      <a16:colId xmlns:a16="http://schemas.microsoft.com/office/drawing/2014/main" val="20004"/>
+                    </a:ext>
+                  </a:extLst>
+                </a:gridCol>
+                <a:gridCol w="2011680">
+                  <a:extLst>
+                    <a:ext uri="{9D8B030D-6E8A-4147-A177-3AD203B41FA5}">
+                      <a16:colId xmlns:a16="http://schemas.microsoft.com/office/drawing/2014/main" val="20005"/>
+                    </a:ext>
+                  </a:extLst>
+                </a:gridCol>
+              </a:tblGrid>
+              <a:tr h="384048">
+                <a:tc>
+                  <a:txBody>
+                    <a:bodyPr/>
+                    <a:lstStyle/>
+                    <a:p>
+                      <a:pPr marL="0" indent="0" eaLnBrk="0">
+                        <a:buNone/>
+                      </a:pPr>
+                      <a:r>
+                        <a:rPr lang="en-US" sz="1200" dirty="0">
+                          <a:solidFill>
+                            <a:srgbClr val="1D1D1F"/>
+                          </a:solidFill>
+                          <a:latin typeface="나눔스퀘어 네오 Bold" pitchFamily="34" charset="0"/>
+                          <a:ea typeface="나눔스퀘어 네오 Bold" pitchFamily="34" charset="-122"/>
+                          <a:cs typeface="나눔스퀘어 네오 Bold" pitchFamily="34" charset="-120"/>
+                        </a:rPr>
+                        <a:t>합성 정답 장면: 피벗 R</a:t>
+                      </a:r>
+                      <a:endParaRPr lang="en-US" sz="1200" dirty="0">
+                        <a:latin typeface="나눔스퀘어 네오 Regular" charset="0"/>
+                        <a:ea typeface="나눔스퀘어 네오 Regular" charset="0"/>
+                        <a:cs typeface="나눔스퀘어 네오 Regular" charset="0"/>
+                      </a:endParaRPr>
+                    </a:p>
+                  </a:txBody>
+                  <a:tcPr marL="73152" marR="73152" marT="36576" marB="36576" anchor="ctr">
+                    <a:lnL w="6350" cap="flat" cmpd="sng" algn="ctr">
+                      <a:solidFill>
+                        <a:srgbClr val="E0E0E0"/>
+                      </a:solidFill>
+                      <a:prstDash val="solid"/>
+                      <a:round/>
+                      <a:headEnd type="none" w="med" len="med"/>
+                      <a:tailEnd type="none" w="med" len="med"/>
+                    </a:lnL>
+                    <a:lnR w="6350" cap="flat" cmpd="sng" algn="ctr">
+                      <a:solidFill>
+                        <a:srgbClr val="E0E0E0"/>
+                      </a:solidFill>
+                      <a:prstDash val="solid"/>
+                      <a:round/>
+                      <a:headEnd type="none" w="med" len="med"/>
+                      <a:tailEnd type="none" w="med" len="med"/>
+                    </a:lnR>
+                    <a:lnT w="6350" cap="flat" cmpd="sng" algn="ctr">
+                      <a:solidFill>
+                        <a:srgbClr val="E0E0E0"/>
+                      </a:solidFill>
+                      <a:prstDash val="solid"/>
+                      <a:round/>
+                      <a:headEnd type="none" w="med" len="med"/>
+                      <a:tailEnd type="none" w="med" len="med"/>
+                    </a:lnT>
+                    <a:lnB w="6350" cap="flat" cmpd="sng" algn="ctr">
+                      <a:solidFill>
+                        <a:srgbClr val="E0E0E0"/>
+                      </a:solidFill>
+                      <a:prstDash val="solid"/>
+                      <a:round/>
+                      <a:headEnd type="none" w="med" len="med"/>
+                      <a:tailEnd type="none" w="med" len="med"/>
+                    </a:lnB>
+                    <a:solidFill>
+                      <a:srgbClr val="F5F5F7"/>
+                    </a:solidFill>
+                  </a:tcPr>
+                </a:tc>
+                <a:tc>
+                  <a:txBody>
+                    <a:bodyPr/>
+                    <a:lstStyle/>
+                    <a:p>
+                      <a:pPr marL="0" indent="0" eaLnBrk="0">
+                        <a:buNone/>
+                      </a:pPr>
+                      <a:r>
+                        <a:rPr lang="en-US" sz="1200" dirty="0">
+                          <a:solidFill>
+                            <a:srgbClr val="1D1D1F"/>
+                          </a:solidFill>
+                          <a:latin typeface="나눔스퀘어 네오 Bold" pitchFamily="34" charset="0"/>
+                          <a:ea typeface="나눔스퀘어 네오 Bold" pitchFamily="34" charset="-122"/>
+                          <a:cs typeface="나눔스퀘어 네오 Bold" pitchFamily="34" charset="-120"/>
+                        </a:rPr>
+                        <a:t>회전각</a:t>
+                      </a:r>
+                      <a:endParaRPr lang="en-US" sz="1200" dirty="0">
+                        <a:latin typeface="나눔스퀘어 네오 Regular" charset="0"/>
+                        <a:ea typeface="나눔스퀘어 네오 Regular" charset="0"/>
+                        <a:cs typeface="나눔스퀘어 네오 Regular" charset="0"/>
+                      </a:endParaRPr>
+                    </a:p>
+                  </a:txBody>
+                  <a:tcPr marL="73152" marR="73152" marT="36576" marB="36576" anchor="ctr">
+                    <a:lnL w="6350" cap="flat" cmpd="sng" algn="ctr">
+                      <a:solidFill>
+                        <a:srgbClr val="E0E0E0"/>
+                      </a:solidFill>
+                      <a:prstDash val="solid"/>
+                      <a:round/>
+                      <a:headEnd type="none" w="med" len="med"/>
+                      <a:tailEnd type="none" w="med" len="med"/>
+                    </a:lnL>
+                    <a:lnR w="6350" cap="flat" cmpd="sng" algn="ctr">
+                      <a:solidFill>
+                        <a:srgbClr val="E0E0E0"/>
+                      </a:solidFill>
+                      <a:prstDash val="solid"/>
+                      <a:round/>
+                      <a:headEnd type="none" w="med" len="med"/>
+                      <a:tailEnd type="none" w="med" len="med"/>
+                    </a:lnR>
+                    <a:lnT w="6350" cap="flat" cmpd="sng" algn="ctr">
+                      <a:solidFill>
+                        <a:srgbClr val="E0E0E0"/>
+                      </a:solidFill>
+                      <a:prstDash val="solid"/>
+                      <a:round/>
+                      <a:headEnd type="none" w="med" len="med"/>
+                      <a:tailEnd type="none" w="med" len="med"/>
+                    </a:lnT>
+                    <a:lnB w="6350" cap="flat" cmpd="sng" algn="ctr">
+                      <a:solidFill>
+                        <a:srgbClr val="E0E0E0"/>
+                      </a:solidFill>
+                      <a:prstDash val="solid"/>
+                      <a:round/>
+                      <a:headEnd type="none" w="med" len="med"/>
+                      <a:tailEnd type="none" w="med" len="med"/>
+                    </a:lnB>
+                    <a:solidFill>
+                      <a:srgbClr val="F5F5F7"/>
+                    </a:solidFill>
+                  </a:tcPr>
+                </a:tc>
+                <a:tc>
+                  <a:txBody>
+                    <a:bodyPr/>
+                    <a:lstStyle/>
+                    <a:p>
+                      <a:pPr marL="0" indent="0" eaLnBrk="0">
+                        <a:buNone/>
+                      </a:pPr>
+                      <a:r>
+                        <a:rPr lang="en-US" sz="1200" dirty="0">
+                          <a:solidFill>
+                            <a:srgbClr val="1D1D1F"/>
+                          </a:solidFill>
+                          <a:latin typeface="나눔스퀘어 네오 Bold" pitchFamily="34" charset="0"/>
+                          <a:ea typeface="나눔스퀘어 네오 Bold" pitchFamily="34" charset="-122"/>
+                          <a:cs typeface="나눔스퀘어 네오 Bold" pitchFamily="34" charset="-120"/>
+                        </a:rPr>
+                        <a:t>복원된 R (시드 3개)</a:t>
+                      </a:r>
+                      <a:endParaRPr lang="en-US" sz="1200" dirty="0">
+                        <a:latin typeface="나눔스퀘어 네오 Regular" charset="0"/>
+                        <a:ea typeface="나눔스퀘어 네오 Regular" charset="0"/>
+                        <a:cs typeface="나눔스퀘어 네오 Regular" charset="0"/>
+                      </a:endParaRPr>
+                    </a:p>
+                  </a:txBody>
+                  <a:tcPr marL="73152" marR="73152" marT="36576" marB="36576" anchor="ctr">
+                    <a:lnL w="6350" cap="flat" cmpd="sng" algn="ctr">
+                      <a:solidFill>
+                        <a:srgbClr val="E0E0E0"/>
+                      </a:solidFill>
+                      <a:prstDash val="solid"/>
+                      <a:round/>
+                      <a:headEnd type="none" w="med" len="med"/>
+                      <a:tailEnd type="none" w="med" len="med"/>
+                    </a:lnL>
+                    <a:lnR w="6350" cap="flat" cmpd="sng" algn="ctr">
+                      <a:solidFill>
+                        <a:srgbClr val="E0E0E0"/>
+                      </a:solidFill>
+                      <a:prstDash val="solid"/>
+                      <a:round/>
+                      <a:headEnd type="none" w="med" len="med"/>
+                      <a:tailEnd type="none" w="med" len="med"/>
+                    </a:lnR>
+                    <a:lnT w="6350" cap="flat" cmpd="sng" algn="ctr">
+                      <a:solidFill>
+                        <a:srgbClr val="E0E0E0"/>
+                      </a:solidFill>
+                      <a:prstDash val="solid"/>
+                      <a:round/>
+                      <a:headEnd type="none" w="med" len="med"/>
+                      <a:tailEnd type="none" w="med" len="med"/>
+                    </a:lnT>
+                    <a:lnB w="6350" cap="flat" cmpd="sng" algn="ctr">
+                      <a:solidFill>
+                        <a:srgbClr val="E0E0E0"/>
+                      </a:solidFill>
+                      <a:prstDash val="solid"/>
+                      <a:round/>
+                      <a:headEnd type="none" w="med" len="med"/>
+                      <a:tailEnd type="none" w="med" len="med"/>
+                    </a:lnB>
+                    <a:solidFill>
+                      <a:srgbClr val="F5F5F7"/>
+                    </a:solidFill>
+                  </a:tcPr>
+                </a:tc>
+                <a:tc>
+                  <a:txBody>
+                    <a:bodyPr/>
+                    <a:lstStyle/>
+                    <a:p>
+                      <a:pPr marL="0" indent="0" eaLnBrk="0">
+                        <a:buNone/>
+                      </a:pPr>
+                      <a:r>
+                        <a:rPr lang="en-US" sz="1200" dirty="0">
+                          <a:solidFill>
+                            <a:srgbClr val="1D1D1F"/>
+                          </a:solidFill>
+                          <a:latin typeface="나눔스퀘어 네오 Bold" pitchFamily="34" charset="0"/>
+                          <a:ea typeface="나눔스퀘어 네오 Bold" pitchFamily="34" charset="-122"/>
+                          <a:cs typeface="나눔스퀘어 네오 Bold" pitchFamily="34" charset="-120"/>
+                        </a:rPr>
+                        <a:t>자기보정</a:t>
+                      </a:r>
+                      <a:endParaRPr lang="en-US" sz="1200" dirty="0">
+                        <a:latin typeface="나눔스퀘어 네오 Regular" charset="0"/>
+                        <a:ea typeface="나눔스퀘어 네오 Regular" charset="0"/>
+                        <a:cs typeface="나눔스퀘어 네오 Regular" charset="0"/>
+                      </a:endParaRPr>
+                    </a:p>
+                  </a:txBody>
+                  <a:tcPr marL="73152" marR="73152" marT="36576" marB="36576" anchor="ctr">
+                    <a:lnL w="6350" cap="flat" cmpd="sng" algn="ctr">
+                      <a:solidFill>
+                        <a:srgbClr val="E0E0E0"/>
+                      </a:solidFill>
+                      <a:prstDash val="solid"/>
+                      <a:round/>
+                      <a:headEnd type="none" w="med" len="med"/>
+                      <a:tailEnd type="none" w="med" len="med"/>
+                    </a:lnL>
+                    <a:lnR w="6350" cap="flat" cmpd="sng" algn="ctr">
+                      <a:solidFill>
+                        <a:srgbClr val="E0E0E0"/>
+                      </a:solidFill>
+                      <a:prstDash val="solid"/>
+                      <a:round/>
+                      <a:headEnd type="none" w="med" len="med"/>
+                      <a:tailEnd type="none" w="med" len="med"/>
+                    </a:lnR>
+                    <a:lnT w="6350" cap="flat" cmpd="sng" algn="ctr">
+                      <a:solidFill>
+                        <a:srgbClr val="E0E0E0"/>
+                      </a:solidFill>
+                      <a:prstDash val="solid"/>
+                      <a:round/>
+                      <a:headEnd type="none" w="med" len="med"/>
+                      <a:tailEnd type="none" w="med" len="med"/>
+                    </a:lnT>
+                    <a:lnB w="6350" cap="flat" cmpd="sng" algn="ctr">
+                      <a:solidFill>
+                        <a:srgbClr val="E0E0E0"/>
+                      </a:solidFill>
+                      <a:prstDash val="solid"/>
+                      <a:round/>
+                      <a:headEnd type="none" w="med" len="med"/>
+                      <a:tailEnd type="none" w="med" len="med"/>
+                    </a:lnB>
+                    <a:solidFill>
+                      <a:srgbClr val="F5F5F7"/>
+                    </a:solidFill>
+                  </a:tcPr>
+                </a:tc>
+                <a:tc>
+                  <a:txBody>
+                    <a:bodyPr/>
+                    <a:lstStyle/>
+                    <a:p>
+                      <a:pPr marL="0" indent="0" eaLnBrk="0">
+                        <a:buNone/>
+                      </a:pPr>
+                      <a:r>
+                        <a:rPr lang="en-US" sz="1200" dirty="0">
+                          <a:solidFill>
+                            <a:srgbClr val="1D1D1F"/>
+                          </a:solidFill>
+                          <a:latin typeface="나눔스퀘어 네오 Bold" pitchFamily="34" charset="0"/>
+                          <a:ea typeface="나눔스퀘어 네오 Bold" pitchFamily="34" charset="-122"/>
+                          <a:cs typeface="나눔스퀘어 네오 Bold" pitchFamily="34" charset="-120"/>
+                        </a:rPr>
+                        <a:t>재맞춤</a:t>
+                      </a:r>
+                      <a:endParaRPr lang="en-US" sz="1200" dirty="0">
+                        <a:latin typeface="나눔스퀘어 네오 Regular" charset="0"/>
+                        <a:ea typeface="나눔스퀘어 네오 Regular" charset="0"/>
+                        <a:cs typeface="나눔스퀘어 네오 Regular" charset="0"/>
+                      </a:endParaRPr>
+                    </a:p>
+                  </a:txBody>
+                  <a:tcPr marL="73152" marR="73152" marT="36576" marB="36576" anchor="ctr">
+                    <a:lnL w="6350" cap="flat" cmpd="sng" algn="ctr">
+                      <a:solidFill>
+                        <a:srgbClr val="E0E0E0"/>
+                      </a:solidFill>
+                      <a:prstDash val="solid"/>
+                      <a:round/>
+                      <a:headEnd type="none" w="med" len="med"/>
+                      <a:tailEnd type="none" w="med" len="med"/>
+                    </a:lnL>
+                    <a:lnR w="6350" cap="flat" cmpd="sng" algn="ctr">
+                      <a:solidFill>
+                        <a:srgbClr val="E0E0E0"/>
+                      </a:solidFill>
+                      <a:prstDash val="solid"/>
+                      <a:round/>
+                      <a:headEnd type="none" w="med" len="med"/>
+                      <a:tailEnd type="none" w="med" len="med"/>
+                    </a:lnR>
+                    <a:lnT w="6350" cap="flat" cmpd="sng" algn="ctr">
+                      <a:solidFill>
+                        <a:srgbClr val="E0E0E0"/>
+                      </a:solidFill>
+                      <a:prstDash val="solid"/>
+                      <a:round/>
+                      <a:headEnd type="none" w="med" len="med"/>
+                      <a:tailEnd type="none" w="med" len="med"/>
+                    </a:lnT>
+                    <a:lnB w="6350" cap="flat" cmpd="sng" algn="ctr">
+                      <a:solidFill>
+                        <a:srgbClr val="E0E0E0"/>
+                      </a:solidFill>
+                      <a:prstDash val="solid"/>
+                      <a:round/>
+                      <a:headEnd type="none" w="med" len="med"/>
+                      <a:tailEnd type="none" w="med" len="med"/>
+                    </a:lnB>
+                    <a:solidFill>
+                      <a:srgbClr val="F5F5F7"/>
+                    </a:solidFill>
+                  </a:tcPr>
+                </a:tc>
+                <a:tc>
+                  <a:txBody>
+                    <a:bodyPr/>
+                    <a:lstStyle/>
+                    <a:p>
+                      <a:pPr marL="0" indent="0" eaLnBrk="0">
+                        <a:buNone/>
+                      </a:pPr>
+                      <a:r>
+                        <a:rPr lang="en-US" sz="1200" dirty="0">
+                          <a:solidFill>
+                            <a:srgbClr val="1D1D1F"/>
+                          </a:solidFill>
+                          <a:latin typeface="나눔스퀘어 네오 Bold" pitchFamily="34" charset="0"/>
+                          <a:ea typeface="나눔스퀘어 네오 Bold" pitchFamily="34" charset="-122"/>
+                          <a:cs typeface="나눔스퀘어 네오 Bold" pitchFamily="34" charset="-120"/>
+                        </a:rPr>
+                        <a:t>프리즈</a:t>
+                      </a:r>
+                      <a:endParaRPr lang="en-US" sz="1200" dirty="0">
+                        <a:latin typeface="나눔스퀘어 네오 Regular" charset="0"/>
+                        <a:ea typeface="나눔스퀘어 네오 Regular" charset="0"/>
+                        <a:cs typeface="나눔스퀘어 네오 Regular" charset="0"/>
+                      </a:endParaRPr>
+                    </a:p>
+                  </a:txBody>
+                  <a:tcPr marL="73152" marR="73152" marT="36576" marB="36576" anchor="ctr">
+                    <a:lnL w="6350" cap="flat" cmpd="sng" algn="ctr">
+                      <a:solidFill>
+                        <a:srgbClr val="E0E0E0"/>
+                      </a:solidFill>
+                      <a:prstDash val="solid"/>
+                      <a:round/>
+                      <a:headEnd type="none" w="med" len="med"/>
+                      <a:tailEnd type="none" w="med" len="med"/>
+                    </a:lnL>
+                    <a:lnR w="6350" cap="flat" cmpd="sng" algn="ctr">
+                      <a:solidFill>
+                        <a:srgbClr val="E0E0E0"/>
+                      </a:solidFill>
+                      <a:prstDash val="solid"/>
+                      <a:round/>
+                      <a:headEnd type="none" w="med" len="med"/>
+                      <a:tailEnd type="none" w="med" len="med"/>
+                    </a:lnR>
+                    <a:lnT w="6350" cap="flat" cmpd="sng" algn="ctr">
+                      <a:solidFill>
+                        <a:srgbClr val="E0E0E0"/>
+                      </a:solidFill>
+                      <a:prstDash val="solid"/>
+                      <a:round/>
+                      <a:headEnd type="none" w="med" len="med"/>
+                      <a:tailEnd type="none" w="med" len="med"/>
+                    </a:lnT>
+                    <a:lnB w="6350" cap="flat" cmpd="sng" algn="ctr">
+                      <a:solidFill>
+                        <a:srgbClr val="E0E0E0"/>
+                      </a:solidFill>
+                      <a:prstDash val="solid"/>
+                      <a:round/>
+                      <a:headEnd type="none" w="med" len="med"/>
+                      <a:tailEnd type="none" w="med" len="med"/>
+                    </a:lnB>
+                    <a:solidFill>
+                      <a:srgbClr val="F5F5F7"/>
+                    </a:solidFill>
+                  </a:tcPr>
+                </a:tc>
+                <a:extLst>
+                  <a:ext uri="{0D108BD9-81ED-4DB2-BD59-A6C34878D82A}">
+                    <a16:rowId xmlns:a16="http://schemas.microsoft.com/office/drawing/2014/main" val="10000"/>
+                  </a:ext>
+                </a:extLst>
+              </a:tr>
+              <a:tr h="384048">
+                <a:tc>
+                  <a:txBody>
+                    <a:bodyPr/>
+                    <a:lstStyle/>
+                    <a:p>
+                      <a:pPr marL="0" indent="0" eaLnBrk="0">
+                        <a:buNone/>
+                      </a:pPr>
+                      <a:r>
+                        <a:rPr lang="en-US" sz="1200" dirty="0">
+                          <a:solidFill>
+                            <a:srgbClr val="1D1D1F"/>
+                          </a:solidFill>
+                          <a:latin typeface="나눔스퀘어 네오 Regular" pitchFamily="34" charset="0"/>
+                          <a:ea typeface="나눔스퀘어 네오 Regular" pitchFamily="34" charset="-122"/>
+                          <a:cs typeface="나눔스퀘어 네오 Regular" pitchFamily="34" charset="-120"/>
+                        </a:rPr>
+                        <a:t>50~150 px (G1~G4)</a:t>
+                      </a:r>
+                      <a:endParaRPr lang="en-US" sz="1200" dirty="0">
+                        <a:latin typeface="나눔스퀘어 네오 Regular" charset="0"/>
+                        <a:ea typeface="나눔스퀘어 네오 Regular" charset="0"/>
+                        <a:cs typeface="나눔스퀘어 네오 Regular" charset="0"/>
+                      </a:endParaRPr>
+                    </a:p>
+                  </a:txBody>
+                  <a:tcPr marL="73152" marR="73152" marT="36576" marB="36576" anchor="ctr">
+                    <a:lnL w="6350" cap="flat" cmpd="sng" algn="ctr">
+                      <a:solidFill>
+                        <a:srgbClr val="E0E0E0"/>
+                      </a:solidFill>
+                      <a:prstDash val="solid"/>
+                      <a:round/>
+                      <a:headEnd type="none" w="med" len="med"/>
+                      <a:tailEnd type="none" w="med" len="med"/>
+                    </a:lnL>
+                    <a:lnR w="6350" cap="flat" cmpd="sng" algn="ctr">
+                      <a:solidFill>
+                        <a:srgbClr val="E0E0E0"/>
+                      </a:solidFill>
+                      <a:prstDash val="solid"/>
+                      <a:round/>
+                      <a:headEnd type="none" w="med" len="med"/>
+                      <a:tailEnd type="none" w="med" len="med"/>
+                    </a:lnR>
+                    <a:lnT w="6350" cap="flat" cmpd="sng" algn="ctr">
+                      <a:solidFill>
+                        <a:srgbClr val="E0E0E0"/>
+                      </a:solidFill>
+                      <a:prstDash val="solid"/>
+                      <a:round/>
+                      <a:headEnd type="none" w="med" len="med"/>
+                      <a:tailEnd type="none" w="med" len="med"/>
+                    </a:lnT>
+                    <a:lnB w="6350" cap="flat" cmpd="sng" algn="ctr">
+                      <a:solidFill>
+                        <a:srgbClr val="E0E0E0"/>
+                      </a:solidFill>
+                      <a:prstDash val="solid"/>
+                      <a:round/>
+                      <a:headEnd type="none" w="med" len="med"/>
+                      <a:tailEnd type="none" w="med" len="med"/>
+                    </a:lnB>
+                    <a:solidFill>
+                      <a:srgbClr val="FFFFFF"/>
+                    </a:solidFill>
+                  </a:tcPr>
+                </a:tc>
+                <a:tc>
+                  <a:txBody>
+                    <a:bodyPr/>
+                    <a:lstStyle/>
+                    <a:p>
+                      <a:pPr marL="0" indent="0" eaLnBrk="0">
+                        <a:buNone/>
+                      </a:pPr>
+                      <a:r>
+                        <a:rPr lang="en-US" sz="1200" dirty="0">
+                          <a:solidFill>
+                            <a:srgbClr val="1D1D1F"/>
+                          </a:solidFill>
+                          <a:latin typeface="나눔스퀘어 네오 Regular" pitchFamily="34" charset="0"/>
+                          <a:ea typeface="나눔스퀘어 네오 Regular" pitchFamily="34" charset="-122"/>
+                          <a:cs typeface="나눔스퀘어 네오 Regular" pitchFamily="34" charset="-120"/>
+                        </a:rPr>
+                        <a:t>120°</a:t>
+                      </a:r>
+                      <a:endParaRPr lang="en-US" sz="1200" dirty="0">
+                        <a:latin typeface="나눔스퀘어 네오 Regular" charset="0"/>
+                        <a:ea typeface="나눔스퀘어 네오 Regular" charset="0"/>
+                        <a:cs typeface="나눔스퀘어 네오 Regular" charset="0"/>
+                      </a:endParaRPr>
+                    </a:p>
+                  </a:txBody>
+                  <a:tcPr marL="73152" marR="73152" marT="36576" marB="36576" anchor="ctr">
+                    <a:lnL w="6350" cap="flat" cmpd="sng" algn="ctr">
+                      <a:solidFill>
+                        <a:srgbClr val="E0E0E0"/>
+                      </a:solidFill>
+                      <a:prstDash val="solid"/>
+                      <a:round/>
+                      <a:headEnd type="none" w="med" len="med"/>
+                      <a:tailEnd type="none" w="med" len="med"/>
+                    </a:lnL>
+                    <a:lnR w="6350" cap="flat" cmpd="sng" algn="ctr">
+                      <a:solidFill>
+                        <a:srgbClr val="E0E0E0"/>
+                      </a:solidFill>
+                      <a:prstDash val="solid"/>
+                      <a:round/>
+                      <a:headEnd type="none" w="med" len="med"/>
+                      <a:tailEnd type="none" w="med" len="med"/>
+                    </a:lnR>
+                    <a:lnT w="6350" cap="flat" cmpd="sng" algn="ctr">
+                      <a:solidFill>
+                        <a:srgbClr val="E0E0E0"/>
+                      </a:solidFill>
+                      <a:prstDash val="solid"/>
+                      <a:round/>
+                      <a:headEnd type="none" w="med" len="med"/>
+                      <a:tailEnd type="none" w="med" len="med"/>
+                    </a:lnT>
+                    <a:lnB w="6350" cap="flat" cmpd="sng" algn="ctr">
+                      <a:solidFill>
+                        <a:srgbClr val="E0E0E0"/>
+                      </a:solidFill>
+                      <a:prstDash val="solid"/>
+                      <a:round/>
+                      <a:headEnd type="none" w="med" len="med"/>
+                      <a:tailEnd type="none" w="med" len="med"/>
+                    </a:lnB>
+                    <a:solidFill>
+                      <a:srgbClr val="FFFFFF"/>
+                    </a:solidFill>
+                  </a:tcPr>
+                </a:tc>
+                <a:tc>
+                  <a:txBody>
+                    <a:bodyPr/>
+                    <a:lstStyle/>
+                    <a:p>
+                      <a:pPr marL="0" indent="0" eaLnBrk="0">
+                        <a:buNone/>
+                      </a:pPr>
+                      <a:r>
+                        <a:rPr lang="en-US" sz="1200" dirty="0">
+                          <a:solidFill>
+                            <a:srgbClr val="1D1D1F"/>
+                          </a:solidFill>
+                          <a:latin typeface="나눔스퀘어 네오 Regular" pitchFamily="34" charset="0"/>
+                          <a:ea typeface="나눔스퀘어 네오 Regular" pitchFamily="34" charset="-122"/>
+                          <a:cs typeface="나눔스퀘어 네오 Regular" pitchFamily="34" charset="-120"/>
+                        </a:rPr>
+                        <a:t>오차 0.7~6.9 px</a:t>
+                      </a:r>
+                      <a:endParaRPr lang="en-US" sz="1200" dirty="0">
+                        <a:latin typeface="나눔스퀘어 네오 Regular" charset="0"/>
+                        <a:ea typeface="나눔스퀘어 네오 Regular" charset="0"/>
+                        <a:cs typeface="나눔스퀘어 네오 Regular" charset="0"/>
+                      </a:endParaRPr>
+                    </a:p>
+                  </a:txBody>
+                  <a:tcPr marL="73152" marR="73152" marT="36576" marB="36576" anchor="ctr">
+                    <a:lnL w="6350" cap="flat" cmpd="sng" algn="ctr">
+                      <a:solidFill>
+                        <a:srgbClr val="E0E0E0"/>
+                      </a:solidFill>
+                      <a:prstDash val="solid"/>
+                      <a:round/>
+                      <a:headEnd type="none" w="med" len="med"/>
+                      <a:tailEnd type="none" w="med" len="med"/>
+                    </a:lnL>
+                    <a:lnR w="6350" cap="flat" cmpd="sng" algn="ctr">
+                      <a:solidFill>
+                        <a:srgbClr val="E0E0E0"/>
+                      </a:solidFill>
+                      <a:prstDash val="solid"/>
+                      <a:round/>
+                      <a:headEnd type="none" w="med" len="med"/>
+                      <a:tailEnd type="none" w="med" len="med"/>
+                    </a:lnR>
+                    <a:lnT w="6350" cap="flat" cmpd="sng" algn="ctr">
+                      <a:solidFill>
+                        <a:srgbClr val="E0E0E0"/>
+                      </a:solidFill>
+                      <a:prstDash val="solid"/>
+                      <a:round/>
+                      <a:headEnd type="none" w="med" len="med"/>
+                      <a:tailEnd type="none" w="med" len="med"/>
+                    </a:lnT>
+                    <a:lnB w="6350" cap="flat" cmpd="sng" algn="ctr">
+                      <a:solidFill>
+                        <a:srgbClr val="E0E0E0"/>
+                      </a:solidFill>
+                      <a:prstDash val="solid"/>
+                      <a:round/>
+                      <a:headEnd type="none" w="med" len="med"/>
+                      <a:tailEnd type="none" w="med" len="med"/>
+                    </a:lnB>
+                    <a:solidFill>
+                      <a:srgbClr val="FFFFFF"/>
+                    </a:solidFill>
+                  </a:tcPr>
+                </a:tc>
+                <a:tc>
+                  <a:txBody>
+                    <a:bodyPr/>
+                    <a:lstStyle/>
+                    <a:p>
+                      <a:pPr marL="0" indent="0" eaLnBrk="0">
+                        <a:buNone/>
+                      </a:pPr>
+                      <a:r>
+                        <a:rPr lang="en-US" sz="1200" dirty="0">
+                          <a:solidFill>
+                            <a:srgbClr val="1D1D1F"/>
+                          </a:solidFill>
+                          <a:latin typeface="나눔스퀘어 네오 Regular" pitchFamily="34" charset="0"/>
+                          <a:ea typeface="나눔스퀘어 네오 Regular" pitchFamily="34" charset="-122"/>
+                          <a:cs typeface="나눔스퀘어 네오 Regular" pitchFamily="34" charset="-120"/>
+                        </a:rPr>
+                        <a:t>1.8~2.1°</a:t>
+                      </a:r>
+                      <a:endParaRPr lang="en-US" sz="1200" dirty="0">
+                        <a:latin typeface="나눔스퀘어 네오 Regular" charset="0"/>
+                        <a:ea typeface="나눔스퀘어 네오 Regular" charset="0"/>
+                        <a:cs typeface="나눔스퀘어 네오 Regular" charset="0"/>
+                      </a:endParaRPr>
+                    </a:p>
+                  </a:txBody>
+                  <a:tcPr marL="73152" marR="73152" marT="36576" marB="36576" anchor="ctr">
+                    <a:lnL w="6350" cap="flat" cmpd="sng" algn="ctr">
+                      <a:solidFill>
+                        <a:srgbClr val="E0E0E0"/>
+                      </a:solidFill>
+                      <a:prstDash val="solid"/>
+                      <a:round/>
+                      <a:headEnd type="none" w="med" len="med"/>
+                      <a:tailEnd type="none" w="med" len="med"/>
+                    </a:lnL>
+                    <a:lnR w="6350" cap="flat" cmpd="sng" algn="ctr">
+                      <a:solidFill>
+                        <a:srgbClr val="E0E0E0"/>
+                      </a:solidFill>
+                      <a:prstDash val="solid"/>
+                      <a:round/>
+                      <a:headEnd type="none" w="med" len="med"/>
+                      <a:tailEnd type="none" w="med" len="med"/>
+                    </a:lnR>
+                    <a:lnT w="6350" cap="flat" cmpd="sng" algn="ctr">
+                      <a:solidFill>
+                        <a:srgbClr val="E0E0E0"/>
+                      </a:solidFill>
+                      <a:prstDash val="solid"/>
+                      <a:round/>
+                      <a:headEnd type="none" w="med" len="med"/>
+                      <a:tailEnd type="none" w="med" len="med"/>
+                    </a:lnT>
+                    <a:lnB w="6350" cap="flat" cmpd="sng" algn="ctr">
+                      <a:solidFill>
+                        <a:srgbClr val="E0E0E0"/>
+                      </a:solidFill>
+                      <a:prstDash val="solid"/>
+                      <a:round/>
+                      <a:headEnd type="none" w="med" len="med"/>
+                      <a:tailEnd type="none" w="med" len="med"/>
+                    </a:lnB>
+                    <a:solidFill>
+                      <a:srgbClr val="FFFFFF"/>
+                    </a:solidFill>
+                  </a:tcPr>
+                </a:tc>
+                <a:tc>
+                  <a:txBody>
+                    <a:bodyPr/>
+                    <a:lstStyle/>
+                    <a:p>
+                      <a:pPr marL="0" indent="0" eaLnBrk="0">
+                        <a:buNone/>
+                      </a:pPr>
+                      <a:r>
+                        <a:rPr lang="en-US" sz="1200" dirty="0">
+                          <a:solidFill>
+                            <a:srgbClr val="1D1D1F"/>
+                          </a:solidFill>
+                          <a:latin typeface="나눔스퀘어 네오 Regular" pitchFamily="34" charset="0"/>
+                          <a:ea typeface="나눔스퀘어 네오 Regular" pitchFamily="34" charset="-122"/>
+                          <a:cs typeface="나눔스퀘어 네오 Regular" pitchFamily="34" charset="-120"/>
+                        </a:rPr>
+                        <a:t>1.8~2.0°</a:t>
+                      </a:r>
+                      <a:endParaRPr lang="en-US" sz="1200" dirty="0">
+                        <a:latin typeface="나눔스퀘어 네오 Regular" charset="0"/>
+                        <a:ea typeface="나눔스퀘어 네오 Regular" charset="0"/>
+                        <a:cs typeface="나눔스퀘어 네오 Regular" charset="0"/>
+                      </a:endParaRPr>
+                    </a:p>
+                  </a:txBody>
+                  <a:tcPr marL="73152" marR="73152" marT="36576" marB="36576" anchor="ctr">
+                    <a:lnL w="6350" cap="flat" cmpd="sng" algn="ctr">
+                      <a:solidFill>
+                        <a:srgbClr val="E0E0E0"/>
+                      </a:solidFill>
+                      <a:prstDash val="solid"/>
+                      <a:round/>
+                      <a:headEnd type="none" w="med" len="med"/>
+                      <a:tailEnd type="none" w="med" len="med"/>
+                    </a:lnL>
+                    <a:lnR w="6350" cap="flat" cmpd="sng" algn="ctr">
+                      <a:solidFill>
+                        <a:srgbClr val="E0E0E0"/>
+                      </a:solidFill>
+                      <a:prstDash val="solid"/>
+                      <a:round/>
+                      <a:headEnd type="none" w="med" len="med"/>
+                      <a:tailEnd type="none" w="med" len="med"/>
+                    </a:lnR>
+                    <a:lnT w="6350" cap="flat" cmpd="sng" algn="ctr">
+                      <a:solidFill>
+                        <a:srgbClr val="E0E0E0"/>
+                      </a:solidFill>
+                      <a:prstDash val="solid"/>
+                      <a:round/>
+                      <a:headEnd type="none" w="med" len="med"/>
+                      <a:tailEnd type="none" w="med" len="med"/>
+                    </a:lnT>
+                    <a:lnB w="6350" cap="flat" cmpd="sng" algn="ctr">
+                      <a:solidFill>
+                        <a:srgbClr val="E0E0E0"/>
+                      </a:solidFill>
+                      <a:prstDash val="solid"/>
+                      <a:round/>
+                      <a:headEnd type="none" w="med" len="med"/>
+                      <a:tailEnd type="none" w="med" len="med"/>
+                    </a:lnB>
+                    <a:solidFill>
+                      <a:srgbClr val="FFFFFF"/>
+                    </a:solidFill>
+                  </a:tcPr>
+                </a:tc>
+                <a:tc>
+                  <a:txBody>
+                    <a:bodyPr/>
+                    <a:lstStyle/>
+                    <a:p>
+                      <a:pPr marL="0" indent="0" eaLnBrk="0">
+                        <a:buNone/>
+                      </a:pPr>
+                      <a:r>
+                        <a:rPr lang="en-US" sz="1200" dirty="0">
+                          <a:solidFill>
+                            <a:srgbClr val="1D1D1F"/>
+                          </a:solidFill>
+                          <a:latin typeface="나눔스퀘어 네오 Regular" pitchFamily="34" charset="0"/>
+                          <a:ea typeface="나눔스퀘어 네오 Regular" pitchFamily="34" charset="-122"/>
+                          <a:cs typeface="나눔스퀘어 네오 Regular" pitchFamily="34" charset="-120"/>
+                        </a:rPr>
+                        <a:t>0.7~2.6°</a:t>
+                      </a:r>
+                      <a:endParaRPr lang="en-US" sz="1200" dirty="0">
+                        <a:latin typeface="나눔스퀘어 네오 Regular" charset="0"/>
+                        <a:ea typeface="나눔스퀘어 네오 Regular" charset="0"/>
+                        <a:cs typeface="나눔스퀘어 네오 Regular" charset="0"/>
+                      </a:endParaRPr>
+                    </a:p>
+                  </a:txBody>
+                  <a:tcPr marL="73152" marR="73152" marT="36576" marB="36576" anchor="ctr">
+                    <a:lnL w="6350" cap="flat" cmpd="sng" algn="ctr">
+                      <a:solidFill>
+                        <a:srgbClr val="E0E0E0"/>
+                      </a:solidFill>
+                      <a:prstDash val="solid"/>
+                      <a:round/>
+                      <a:headEnd type="none" w="med" len="med"/>
+                      <a:tailEnd type="none" w="med" len="med"/>
+                    </a:lnL>
+                    <a:lnR w="6350" cap="flat" cmpd="sng" algn="ctr">
+                      <a:solidFill>
+                        <a:srgbClr val="E0E0E0"/>
+                      </a:solidFill>
+                      <a:prstDash val="solid"/>
+                      <a:round/>
+                      <a:headEnd type="none" w="med" len="med"/>
+                      <a:tailEnd type="none" w="med" len="med"/>
+                    </a:lnR>
+                    <a:lnT w="6350" cap="flat" cmpd="sng" algn="ctr">
+                      <a:solidFill>
+                        <a:srgbClr val="E0E0E0"/>
+                      </a:solidFill>
+                      <a:prstDash val="solid"/>
+                      <a:round/>
+                      <a:headEnd type="none" w="med" len="med"/>
+                      <a:tailEnd type="none" w="med" len="med"/>
+                    </a:lnT>
+                    <a:lnB w="6350" cap="flat" cmpd="sng" algn="ctr">
+                      <a:solidFill>
+                        <a:srgbClr val="E0E0E0"/>
+                      </a:solidFill>
+                      <a:prstDash val="solid"/>
+                      <a:round/>
+                      <a:headEnd type="none" w="med" len="med"/>
+                      <a:tailEnd type="none" w="med" len="med"/>
+                    </a:lnB>
+                    <a:solidFill>
+                      <a:srgbClr val="FFFFFF"/>
+                    </a:solidFill>
+                  </a:tcPr>
+                </a:tc>
+                <a:extLst>
+                  <a:ext uri="{0D108BD9-81ED-4DB2-BD59-A6C34878D82A}">
+                    <a16:rowId xmlns:a16="http://schemas.microsoft.com/office/drawing/2014/main" val="10001"/>
+                  </a:ext>
+                </a:extLst>
+              </a:tr>
+              <a:tr h="384048">
+                <a:tc>
+                  <a:txBody>
+                    <a:bodyPr/>
+                    <a:lstStyle/>
+                    <a:p>
+                      <a:pPr marL="0" indent="0" eaLnBrk="0">
+                        <a:buNone/>
+                      </a:pPr>
+                      <a:r>
+                        <a:rPr lang="en-US" sz="1200" dirty="0">
+                          <a:solidFill>
+                            <a:srgbClr val="1D1D1F"/>
+                          </a:solidFill>
+                          <a:latin typeface="나눔스퀘어 네오 Regular" pitchFamily="34" charset="0"/>
+                          <a:ea typeface="나눔스퀘어 네오 Regular" pitchFamily="34" charset="-122"/>
+                          <a:cs typeface="나눔스퀘어 네오 Regular" pitchFamily="34" charset="-120"/>
+                        </a:rPr>
+                        <a:t>1,552 px (V1)</a:t>
+                      </a:r>
+                      <a:endParaRPr lang="en-US" sz="1200" dirty="0">
+                        <a:latin typeface="나눔스퀘어 네오 Regular" charset="0"/>
+                        <a:ea typeface="나눔스퀘어 네오 Regular" charset="0"/>
+                        <a:cs typeface="나눔스퀘어 네오 Regular" charset="0"/>
+                      </a:endParaRPr>
+                    </a:p>
+                  </a:txBody>
+                  <a:tcPr marL="73152" marR="73152" marT="36576" marB="36576" anchor="ctr">
+                    <a:lnL w="6350" cap="flat" cmpd="sng" algn="ctr">
+                      <a:solidFill>
+                        <a:srgbClr val="E0E0E0"/>
+                      </a:solidFill>
+                      <a:prstDash val="solid"/>
+                      <a:round/>
+                      <a:headEnd type="none" w="med" len="med"/>
+                      <a:tailEnd type="none" w="med" len="med"/>
+                    </a:lnL>
+                    <a:lnR w="6350" cap="flat" cmpd="sng" algn="ctr">
+                      <a:solidFill>
+                        <a:srgbClr val="E0E0E0"/>
+                      </a:solidFill>
+                      <a:prstDash val="solid"/>
+                      <a:round/>
+                      <a:headEnd type="none" w="med" len="med"/>
+                      <a:tailEnd type="none" w="med" len="med"/>
+                    </a:lnR>
+                    <a:lnT w="6350" cap="flat" cmpd="sng" algn="ctr">
+                      <a:solidFill>
+                        <a:srgbClr val="E0E0E0"/>
+                      </a:solidFill>
+                      <a:prstDash val="solid"/>
+                      <a:round/>
+                      <a:headEnd type="none" w="med" len="med"/>
+                      <a:tailEnd type="none" w="med" len="med"/>
+                    </a:lnT>
+                    <a:lnB w="6350" cap="flat" cmpd="sng" algn="ctr">
+                      <a:solidFill>
+                        <a:srgbClr val="E0E0E0"/>
+                      </a:solidFill>
+                      <a:prstDash val="solid"/>
+                      <a:round/>
+                      <a:headEnd type="none" w="med" len="med"/>
+                      <a:tailEnd type="none" w="med" len="med"/>
+                    </a:lnB>
+                    <a:solidFill>
+                      <a:srgbClr val="FFFFFF"/>
+                    </a:solidFill>
+                  </a:tcPr>
+                </a:tc>
+                <a:tc>
+                  <a:txBody>
+                    <a:bodyPr/>
+                    <a:lstStyle/>
+                    <a:p>
+                      <a:pPr marL="0" indent="0" eaLnBrk="0">
+                        <a:buNone/>
+                      </a:pPr>
+                      <a:r>
+                        <a:rPr lang="en-US" sz="1200" dirty="0">
+                          <a:solidFill>
+                            <a:srgbClr val="1D1D1F"/>
+                          </a:solidFill>
+                          <a:latin typeface="나눔스퀘어 네오 Regular" pitchFamily="34" charset="0"/>
+                          <a:ea typeface="나눔스퀘어 네오 Regular" pitchFamily="34" charset="-122"/>
+                          <a:cs typeface="나눔스퀘어 네오 Regular" pitchFamily="34" charset="-120"/>
+                        </a:rPr>
+                        <a:t>20°</a:t>
+                      </a:r>
+                      <a:endParaRPr lang="en-US" sz="1200" dirty="0">
+                        <a:latin typeface="나눔스퀘어 네오 Regular" charset="0"/>
+                        <a:ea typeface="나눔스퀘어 네오 Regular" charset="0"/>
+                        <a:cs typeface="나눔스퀘어 네오 Regular" charset="0"/>
+                      </a:endParaRPr>
+                    </a:p>
+                  </a:txBody>
+                  <a:tcPr marL="73152" marR="73152" marT="36576" marB="36576" anchor="ctr">
+                    <a:lnL w="6350" cap="flat" cmpd="sng" algn="ctr">
+                      <a:solidFill>
+                        <a:srgbClr val="E0E0E0"/>
+                      </a:solidFill>
+                      <a:prstDash val="solid"/>
+                      <a:round/>
+                      <a:headEnd type="none" w="med" len="med"/>
+                      <a:tailEnd type="none" w="med" len="med"/>
+                    </a:lnL>
+                    <a:lnR w="6350" cap="flat" cmpd="sng" algn="ctr">
+                      <a:solidFill>
+                        <a:srgbClr val="E0E0E0"/>
+                      </a:solidFill>
+                      <a:prstDash val="solid"/>
+                      <a:round/>
+                      <a:headEnd type="none" w="med" len="med"/>
+                      <a:tailEnd type="none" w="med" len="med"/>
+                    </a:lnR>
+                    <a:lnT w="6350" cap="flat" cmpd="sng" algn="ctr">
+                      <a:solidFill>
+                        <a:srgbClr val="E0E0E0"/>
+                      </a:solidFill>
+                      <a:prstDash val="solid"/>
+                      <a:round/>
+                      <a:headEnd type="none" w="med" len="med"/>
+                      <a:tailEnd type="none" w="med" len="med"/>
+                    </a:lnT>
+                    <a:lnB w="6350" cap="flat" cmpd="sng" algn="ctr">
+                      <a:solidFill>
+                        <a:srgbClr val="E0E0E0"/>
+                      </a:solidFill>
+                      <a:prstDash val="solid"/>
+                      <a:round/>
+                      <a:headEnd type="none" w="med" len="med"/>
+                      <a:tailEnd type="none" w="med" len="med"/>
+                    </a:lnB>
+                    <a:solidFill>
+                      <a:srgbClr val="FFFFFF"/>
+                    </a:solidFill>
+                  </a:tcPr>
+                </a:tc>
+                <a:tc>
+                  <a:txBody>
+                    <a:bodyPr/>
+                    <a:lstStyle/>
+                    <a:p>
+                      <a:pPr marL="0" indent="0" eaLnBrk="0">
+                        <a:buNone/>
+                      </a:pPr>
+                      <a:r>
+                        <a:rPr lang="en-US" sz="1200" dirty="0">
+                          <a:solidFill>
+                            <a:srgbClr val="1D1D1F"/>
+                          </a:solidFill>
+                          <a:latin typeface="나눔스퀘어 네오 Regular" pitchFamily="34" charset="0"/>
+                          <a:ea typeface="나눔스퀘어 네오 Regular" pitchFamily="34" charset="-122"/>
+                          <a:cs typeface="나눔스퀘어 네오 Regular" pitchFamily="34" charset="-120"/>
+                        </a:rPr>
+                        <a:t>1,516 / 1,525 / 1,611</a:t>
+                      </a:r>
+                      <a:endParaRPr lang="en-US" sz="1200" dirty="0">
+                        <a:latin typeface="나눔스퀘어 네오 Regular" charset="0"/>
+                        <a:ea typeface="나눔스퀘어 네오 Regular" charset="0"/>
+                        <a:cs typeface="나눔스퀘어 네오 Regular" charset="0"/>
+                      </a:endParaRPr>
+                    </a:p>
+                  </a:txBody>
+                  <a:tcPr marL="73152" marR="73152" marT="36576" marB="36576" anchor="ctr">
+                    <a:lnL w="6350" cap="flat" cmpd="sng" algn="ctr">
+                      <a:solidFill>
+                        <a:srgbClr val="E0E0E0"/>
+                      </a:solidFill>
+                      <a:prstDash val="solid"/>
+                      <a:round/>
+                      <a:headEnd type="none" w="med" len="med"/>
+                      <a:tailEnd type="none" w="med" len="med"/>
+                    </a:lnL>
+                    <a:lnR w="6350" cap="flat" cmpd="sng" algn="ctr">
+                      <a:solidFill>
+                        <a:srgbClr val="E0E0E0"/>
+                      </a:solidFill>
+                      <a:prstDash val="solid"/>
+                      <a:round/>
+                      <a:headEnd type="none" w="med" len="med"/>
+                      <a:tailEnd type="none" w="med" len="med"/>
+                    </a:lnR>
+                    <a:lnT w="6350" cap="flat" cmpd="sng" algn="ctr">
+                      <a:solidFill>
+                        <a:srgbClr val="E0E0E0"/>
+                      </a:solidFill>
+                      <a:prstDash val="solid"/>
+                      <a:round/>
+                      <a:headEnd type="none" w="med" len="med"/>
+                      <a:tailEnd type="none" w="med" len="med"/>
+                    </a:lnT>
+                    <a:lnB w="6350" cap="flat" cmpd="sng" algn="ctr">
+                      <a:solidFill>
+                        <a:srgbClr val="E0E0E0"/>
+                      </a:solidFill>
+                      <a:prstDash val="solid"/>
+                      <a:round/>
+                      <a:headEnd type="none" w="med" len="med"/>
+                      <a:tailEnd type="none" w="med" len="med"/>
+                    </a:lnB>
+                    <a:solidFill>
+                      <a:srgbClr val="FFFFFF"/>
+                    </a:solidFill>
+                  </a:tcPr>
+                </a:tc>
+                <a:tc>
+                  <a:txBody>
+                    <a:bodyPr/>
+                    <a:lstStyle/>
+                    <a:p>
+                      <a:pPr marL="0" indent="0" eaLnBrk="0">
+                        <a:buNone/>
+                      </a:pPr>
+                      <a:r>
+                        <a:rPr lang="en-US" sz="1200" dirty="0">
+                          <a:solidFill>
+                            <a:srgbClr val="1D1D1F"/>
+                          </a:solidFill>
+                          <a:latin typeface="나눔스퀘어 네오 Bold" pitchFamily="34" charset="0"/>
+                          <a:ea typeface="나눔스퀘어 네오 Bold" pitchFamily="34" charset="-122"/>
+                          <a:cs typeface="나눔스퀘어 네오 Bold" pitchFamily="34" charset="-120"/>
+                        </a:rPr>
+                        <a:t>0.29°</a:t>
+                      </a:r>
+                      <a:endParaRPr lang="en-US" sz="1200" dirty="0">
+                        <a:latin typeface="나눔스퀘어 네오 Regular" charset="0"/>
+                        <a:ea typeface="나눔스퀘어 네오 Regular" charset="0"/>
+                        <a:cs typeface="나눔스퀘어 네오 Regular" charset="0"/>
+                      </a:endParaRPr>
+                    </a:p>
+                  </a:txBody>
+                  <a:tcPr marL="73152" marR="73152" marT="36576" marB="36576" anchor="ctr">
+                    <a:lnL w="6350" cap="flat" cmpd="sng" algn="ctr">
+                      <a:solidFill>
+                        <a:srgbClr val="E0E0E0"/>
+                      </a:solidFill>
+                      <a:prstDash val="solid"/>
+                      <a:round/>
+                      <a:headEnd type="none" w="med" len="med"/>
+                      <a:tailEnd type="none" w="med" len="med"/>
+                    </a:lnL>
+                    <a:lnR w="6350" cap="flat" cmpd="sng" algn="ctr">
+                      <a:solidFill>
+                        <a:srgbClr val="E0E0E0"/>
+                      </a:solidFill>
+                      <a:prstDash val="solid"/>
+                      <a:round/>
+                      <a:headEnd type="none" w="med" len="med"/>
+                      <a:tailEnd type="none" w="med" len="med"/>
+                    </a:lnR>
+                    <a:lnT w="6350" cap="flat" cmpd="sng" algn="ctr">
+                      <a:solidFill>
+                        <a:srgbClr val="E0E0E0"/>
+                      </a:solidFill>
+                      <a:prstDash val="solid"/>
+                      <a:round/>
+                      <a:headEnd type="none" w="med" len="med"/>
+                      <a:tailEnd type="none" w="med" len="med"/>
+                    </a:lnT>
+                    <a:lnB w="6350" cap="flat" cmpd="sng" algn="ctr">
+                      <a:solidFill>
+                        <a:srgbClr val="E0E0E0"/>
+                      </a:solidFill>
+                      <a:prstDash val="solid"/>
+                      <a:round/>
+                      <a:headEnd type="none" w="med" len="med"/>
+                      <a:tailEnd type="none" w="med" len="med"/>
+                    </a:lnB>
+                    <a:solidFill>
+                      <a:srgbClr val="FFFFFF"/>
+                    </a:solidFill>
+                  </a:tcPr>
+                </a:tc>
+                <a:tc>
+                  <a:txBody>
+                    <a:bodyPr/>
+                    <a:lstStyle/>
+                    <a:p>
+                      <a:pPr marL="0" indent="0" eaLnBrk="0">
+                        <a:buNone/>
+                      </a:pPr>
+                      <a:r>
+                        <a:rPr lang="en-US" sz="1200" dirty="0">
+                          <a:solidFill>
+                            <a:srgbClr val="1D1D1F"/>
+                          </a:solidFill>
+                          <a:latin typeface="나눔스퀘어 네오 Regular" pitchFamily="34" charset="0"/>
+                          <a:ea typeface="나눔스퀘어 네오 Regular" pitchFamily="34" charset="-122"/>
+                          <a:cs typeface="나눔스퀘어 네오 Regular" pitchFamily="34" charset="-120"/>
+                        </a:rPr>
+                        <a:t>0.25°</a:t>
+                      </a:r>
+                      <a:endParaRPr lang="en-US" sz="1200" dirty="0">
+                        <a:latin typeface="나눔스퀘어 네오 Regular" charset="0"/>
+                        <a:ea typeface="나눔스퀘어 네오 Regular" charset="0"/>
+                        <a:cs typeface="나눔스퀘어 네오 Regular" charset="0"/>
+                      </a:endParaRPr>
+                    </a:p>
+                  </a:txBody>
+                  <a:tcPr marL="73152" marR="73152" marT="36576" marB="36576" anchor="ctr">
+                    <a:lnL w="6350" cap="flat" cmpd="sng" algn="ctr">
+                      <a:solidFill>
+                        <a:srgbClr val="E0E0E0"/>
+                      </a:solidFill>
+                      <a:prstDash val="solid"/>
+                      <a:round/>
+                      <a:headEnd type="none" w="med" len="med"/>
+                      <a:tailEnd type="none" w="med" len="med"/>
+                    </a:lnL>
+                    <a:lnR w="6350" cap="flat" cmpd="sng" algn="ctr">
+                      <a:solidFill>
+                        <a:srgbClr val="E0E0E0"/>
+                      </a:solidFill>
+                      <a:prstDash val="solid"/>
+                      <a:round/>
+                      <a:headEnd type="none" w="med" len="med"/>
+                      <a:tailEnd type="none" w="med" len="med"/>
+                    </a:lnR>
+                    <a:lnT w="6350" cap="flat" cmpd="sng" algn="ctr">
+                      <a:solidFill>
+                        <a:srgbClr val="E0E0E0"/>
+                      </a:solidFill>
+                      <a:prstDash val="solid"/>
+                      <a:round/>
+                      <a:headEnd type="none" w="med" len="med"/>
+                      <a:tailEnd type="none" w="med" len="med"/>
+                    </a:lnT>
+                    <a:lnB w="6350" cap="flat" cmpd="sng" algn="ctr">
+                      <a:solidFill>
+                        <a:srgbClr val="E0E0E0"/>
+                      </a:solidFill>
+                      <a:prstDash val="solid"/>
+                      <a:round/>
+                      <a:headEnd type="none" w="med" len="med"/>
+                      <a:tailEnd type="none" w="med" len="med"/>
+                    </a:lnB>
+                    <a:solidFill>
+                      <a:srgbClr val="FFFFFF"/>
+                    </a:solidFill>
+                  </a:tcPr>
+                </a:tc>
+                <a:tc>
+                  <a:txBody>
+                    <a:bodyPr/>
+                    <a:lstStyle/>
+                    <a:p>
+                      <a:pPr marL="0" indent="0" eaLnBrk="0">
+                        <a:buNone/>
+                      </a:pPr>
+                      <a:r>
+                        <a:rPr lang="en-US" sz="1200" dirty="0">
+                          <a:solidFill>
+                            <a:srgbClr val="1D1D1F"/>
+                          </a:solidFill>
+                          <a:latin typeface="나눔스퀘어 네오 Bold" pitchFamily="34" charset="0"/>
+                          <a:ea typeface="나눔스퀘어 네오 Bold" pitchFamily="34" charset="-122"/>
+                          <a:cs typeface="나눔스퀘어 네오 Bold" pitchFamily="34" charset="-120"/>
+                        </a:rPr>
+                        <a:t>8.3°</a:t>
+                      </a:r>
+                      <a:endParaRPr lang="en-US" sz="1200" dirty="0">
+                        <a:latin typeface="나눔스퀘어 네오 Regular" charset="0"/>
+                        <a:ea typeface="나눔스퀘어 네오 Regular" charset="0"/>
+                        <a:cs typeface="나눔스퀘어 네오 Regular" charset="0"/>
+                      </a:endParaRPr>
+                    </a:p>
+                  </a:txBody>
+                  <a:tcPr marL="73152" marR="73152" marT="36576" marB="36576" anchor="ctr">
+                    <a:lnL w="6350" cap="flat" cmpd="sng" algn="ctr">
+                      <a:solidFill>
+                        <a:srgbClr val="E0E0E0"/>
+                      </a:solidFill>
+                      <a:prstDash val="solid"/>
+                      <a:round/>
+                      <a:headEnd type="none" w="med" len="med"/>
+                      <a:tailEnd type="none" w="med" len="med"/>
+                    </a:lnL>
+                    <a:lnR w="6350" cap="flat" cmpd="sng" algn="ctr">
+                      <a:solidFill>
+                        <a:srgbClr val="E0E0E0"/>
+                      </a:solidFill>
+                      <a:prstDash val="solid"/>
+                      <a:round/>
+                      <a:headEnd type="none" w="med" len="med"/>
+                      <a:tailEnd type="none" w="med" len="med"/>
+                    </a:lnR>
+                    <a:lnT w="6350" cap="flat" cmpd="sng" algn="ctr">
+                      <a:solidFill>
+                        <a:srgbClr val="E0E0E0"/>
+                      </a:solidFill>
+                      <a:prstDash val="solid"/>
+                      <a:round/>
+                      <a:headEnd type="none" w="med" len="med"/>
+                      <a:tailEnd type="none" w="med" len="med"/>
+                    </a:lnT>
+                    <a:lnB w="6350" cap="flat" cmpd="sng" algn="ctr">
+                      <a:solidFill>
+                        <a:srgbClr val="E0E0E0"/>
+                      </a:solidFill>
+                      <a:prstDash val="solid"/>
+                      <a:round/>
+                      <a:headEnd type="none" w="med" len="med"/>
+                      <a:tailEnd type="none" w="med" len="med"/>
+                    </a:lnB>
+                    <a:solidFill>
+                      <a:srgbClr val="FFFFFF"/>
+                    </a:solidFill>
+                  </a:tcPr>
+                </a:tc>
+                <a:extLst>
+                  <a:ext uri="{0D108BD9-81ED-4DB2-BD59-A6C34878D82A}">
+                    <a16:rowId xmlns:a16="http://schemas.microsoft.com/office/drawing/2014/main" val="10002"/>
+                  </a:ext>
+                </a:extLst>
+              </a:tr>
+              <a:tr h="384048">
+                <a:tc>
+                  <a:txBody>
+                    <a:bodyPr/>
+                    <a:lstStyle/>
+                    <a:p>
+                      <a:pPr marL="0" indent="0" eaLnBrk="0">
+                        <a:buNone/>
+                      </a:pPr>
+                      <a:r>
+                        <a:rPr lang="en-US" sz="1200" dirty="0">
+                          <a:solidFill>
+                            <a:srgbClr val="1D1D1F"/>
+                          </a:solidFill>
+                          <a:latin typeface="나눔스퀘어 네오 Regular" pitchFamily="34" charset="0"/>
+                          <a:ea typeface="나눔스퀘어 네오 Regular" pitchFamily="34" charset="-122"/>
+                          <a:cs typeface="나눔스퀘어 네오 Regular" pitchFamily="34" charset="-120"/>
+                        </a:rPr>
+                        <a:t>6,000 px (V2)</a:t>
+                      </a:r>
+                      <a:endParaRPr lang="en-US" sz="1200" dirty="0">
+                        <a:latin typeface="나눔스퀘어 네오 Regular" charset="0"/>
+                        <a:ea typeface="나눔스퀘어 네오 Regular" charset="0"/>
+                        <a:cs typeface="나눔스퀘어 네오 Regular" charset="0"/>
+                      </a:endParaRPr>
+                    </a:p>
+                  </a:txBody>
+                  <a:tcPr marL="73152" marR="73152" marT="36576" marB="36576" anchor="ctr">
+                    <a:lnL w="6350" cap="flat" cmpd="sng" algn="ctr">
+                      <a:solidFill>
+                        <a:srgbClr val="E0E0E0"/>
+                      </a:solidFill>
+                      <a:prstDash val="solid"/>
+                      <a:round/>
+                      <a:headEnd type="none" w="med" len="med"/>
+                      <a:tailEnd type="none" w="med" len="med"/>
+                    </a:lnL>
+                    <a:lnR w="6350" cap="flat" cmpd="sng" algn="ctr">
+                      <a:solidFill>
+                        <a:srgbClr val="E0E0E0"/>
+                      </a:solidFill>
+                      <a:prstDash val="solid"/>
+                      <a:round/>
+                      <a:headEnd type="none" w="med" len="med"/>
+                      <a:tailEnd type="none" w="med" len="med"/>
+                    </a:lnR>
+                    <a:lnT w="6350" cap="flat" cmpd="sng" algn="ctr">
+                      <a:solidFill>
+                        <a:srgbClr val="E0E0E0"/>
+                      </a:solidFill>
+                      <a:prstDash val="solid"/>
+                      <a:round/>
+                      <a:headEnd type="none" w="med" len="med"/>
+                      <a:tailEnd type="none" w="med" len="med"/>
+                    </a:lnT>
+                    <a:lnB w="6350" cap="flat" cmpd="sng" algn="ctr">
+                      <a:solidFill>
+                        <a:srgbClr val="E0E0E0"/>
+                      </a:solidFill>
+                      <a:prstDash val="solid"/>
+                      <a:round/>
+                      <a:headEnd type="none" w="med" len="med"/>
+                      <a:tailEnd type="none" w="med" len="med"/>
+                    </a:lnB>
+                    <a:solidFill>
+                      <a:srgbClr val="FFFFFF"/>
+                    </a:solidFill>
+                  </a:tcPr>
+                </a:tc>
+                <a:tc>
+                  <a:txBody>
+                    <a:bodyPr/>
+                    <a:lstStyle/>
+                    <a:p>
+                      <a:pPr marL="0" indent="0" eaLnBrk="0">
+                        <a:buNone/>
+                      </a:pPr>
+                      <a:r>
+                        <a:rPr lang="en-US" sz="1200" dirty="0">
+                          <a:solidFill>
+                            <a:srgbClr val="1D1D1F"/>
+                          </a:solidFill>
+                          <a:latin typeface="나눔스퀘어 네오 Regular" pitchFamily="34" charset="0"/>
+                          <a:ea typeface="나눔스퀘어 네오 Regular" pitchFamily="34" charset="-122"/>
+                          <a:cs typeface="나눔스퀘어 네오 Regular" pitchFamily="34" charset="-120"/>
+                        </a:rPr>
+                        <a:t>8°</a:t>
+                      </a:r>
+                      <a:endParaRPr lang="en-US" sz="1200" dirty="0">
+                        <a:latin typeface="나눔스퀘어 네오 Regular" charset="0"/>
+                        <a:ea typeface="나눔스퀘어 네오 Regular" charset="0"/>
+                        <a:cs typeface="나눔스퀘어 네오 Regular" charset="0"/>
+                      </a:endParaRPr>
+                    </a:p>
+                  </a:txBody>
+                  <a:tcPr marL="73152" marR="73152" marT="36576" marB="36576" anchor="ctr">
+                    <a:lnL w="6350" cap="flat" cmpd="sng" algn="ctr">
+                      <a:solidFill>
+                        <a:srgbClr val="E0E0E0"/>
+                      </a:solidFill>
+                      <a:prstDash val="solid"/>
+                      <a:round/>
+                      <a:headEnd type="none" w="med" len="med"/>
+                      <a:tailEnd type="none" w="med" len="med"/>
+                    </a:lnL>
+                    <a:lnR w="6350" cap="flat" cmpd="sng" algn="ctr">
+                      <a:solidFill>
+                        <a:srgbClr val="E0E0E0"/>
+                      </a:solidFill>
+                      <a:prstDash val="solid"/>
+                      <a:round/>
+                      <a:headEnd type="none" w="med" len="med"/>
+                      <a:tailEnd type="none" w="med" len="med"/>
+                    </a:lnR>
+                    <a:lnT w="6350" cap="flat" cmpd="sng" algn="ctr">
+                      <a:solidFill>
+                        <a:srgbClr val="E0E0E0"/>
+                      </a:solidFill>
+                      <a:prstDash val="solid"/>
+                      <a:round/>
+                      <a:headEnd type="none" w="med" len="med"/>
+                      <a:tailEnd type="none" w="med" len="med"/>
+                    </a:lnT>
+                    <a:lnB w="6350" cap="flat" cmpd="sng" algn="ctr">
+                      <a:solidFill>
+                        <a:srgbClr val="E0E0E0"/>
+                      </a:solidFill>
+                      <a:prstDash val="solid"/>
+                      <a:round/>
+                      <a:headEnd type="none" w="med" len="med"/>
+                      <a:tailEnd type="none" w="med" len="med"/>
+                    </a:lnB>
+                    <a:solidFill>
+                      <a:srgbClr val="FFFFFF"/>
+                    </a:solidFill>
+                  </a:tcPr>
+                </a:tc>
+                <a:tc>
+                  <a:txBody>
+                    <a:bodyPr/>
+                    <a:lstStyle/>
+                    <a:p>
+                      <a:pPr marL="0" indent="0" eaLnBrk="0">
+                        <a:buNone/>
+                      </a:pPr>
+                      <a:r>
+                        <a:rPr lang="en-US" sz="1200" dirty="0">
+                          <a:solidFill>
+                            <a:srgbClr val="1D1D1F"/>
+                          </a:solidFill>
+                          <a:latin typeface="나눔스퀘어 네오 Regular" pitchFamily="34" charset="0"/>
+                          <a:ea typeface="나눔스퀘어 네오 Regular" pitchFamily="34" charset="-122"/>
+                          <a:cs typeface="나눔스퀘어 네오 Regular" pitchFamily="34" charset="-120"/>
+                        </a:rPr>
+                        <a:t>5,689 / 6,078 / 7,710</a:t>
+                      </a:r>
+                      <a:endParaRPr lang="en-US" sz="1200" dirty="0">
+                        <a:latin typeface="나눔스퀘어 네오 Regular" charset="0"/>
+                        <a:ea typeface="나눔스퀘어 네오 Regular" charset="0"/>
+                        <a:cs typeface="나눔스퀘어 네오 Regular" charset="0"/>
+                      </a:endParaRPr>
+                    </a:p>
+                  </a:txBody>
+                  <a:tcPr marL="73152" marR="73152" marT="36576" marB="36576" anchor="ctr">
+                    <a:lnL w="6350" cap="flat" cmpd="sng" algn="ctr">
+                      <a:solidFill>
+                        <a:srgbClr val="E0E0E0"/>
+                      </a:solidFill>
+                      <a:prstDash val="solid"/>
+                      <a:round/>
+                      <a:headEnd type="none" w="med" len="med"/>
+                      <a:tailEnd type="none" w="med" len="med"/>
+                    </a:lnL>
+                    <a:lnR w="6350" cap="flat" cmpd="sng" algn="ctr">
+                      <a:solidFill>
+                        <a:srgbClr val="E0E0E0"/>
+                      </a:solidFill>
+                      <a:prstDash val="solid"/>
+                      <a:round/>
+                      <a:headEnd type="none" w="med" len="med"/>
+                      <a:tailEnd type="none" w="med" len="med"/>
+                    </a:lnR>
+                    <a:lnT w="6350" cap="flat" cmpd="sng" algn="ctr">
+                      <a:solidFill>
+                        <a:srgbClr val="E0E0E0"/>
+                      </a:solidFill>
+                      <a:prstDash val="solid"/>
+                      <a:round/>
+                      <a:headEnd type="none" w="med" len="med"/>
+                      <a:tailEnd type="none" w="med" len="med"/>
+                    </a:lnT>
+                    <a:lnB w="6350" cap="flat" cmpd="sng" algn="ctr">
+                      <a:solidFill>
+                        <a:srgbClr val="E0E0E0"/>
+                      </a:solidFill>
+                      <a:prstDash val="solid"/>
+                      <a:round/>
+                      <a:headEnd type="none" w="med" len="med"/>
+                      <a:tailEnd type="none" w="med" len="med"/>
+                    </a:lnB>
+                    <a:solidFill>
+                      <a:srgbClr val="FFFFFF"/>
+                    </a:solidFill>
+                  </a:tcPr>
+                </a:tc>
+                <a:tc>
+                  <a:txBody>
+                    <a:bodyPr/>
+                    <a:lstStyle/>
+                    <a:p>
+                      <a:pPr marL="0" indent="0" eaLnBrk="0">
+                        <a:buNone/>
+                      </a:pPr>
+                      <a:r>
+                        <a:rPr lang="en-US" sz="1200" dirty="0">
+                          <a:solidFill>
+                            <a:srgbClr val="1D1D1F"/>
+                          </a:solidFill>
+                          <a:latin typeface="나눔스퀘어 네오 Bold" pitchFamily="34" charset="0"/>
+                          <a:ea typeface="나눔스퀘어 네오 Bold" pitchFamily="34" charset="-122"/>
+                          <a:cs typeface="나눔스퀘어 네오 Bold" pitchFamily="34" charset="-120"/>
+                        </a:rPr>
+                        <a:t>0.22°</a:t>
+                      </a:r>
+                      <a:endParaRPr lang="en-US" sz="1200" dirty="0">
+                        <a:latin typeface="나눔스퀘어 네오 Regular" charset="0"/>
+                        <a:ea typeface="나눔스퀘어 네오 Regular" charset="0"/>
+                        <a:cs typeface="나눔스퀘어 네오 Regular" charset="0"/>
+                      </a:endParaRPr>
+                    </a:p>
+                  </a:txBody>
+                  <a:tcPr marL="73152" marR="73152" marT="36576" marB="36576" anchor="ctr">
+                    <a:lnL w="6350" cap="flat" cmpd="sng" algn="ctr">
+                      <a:solidFill>
+                        <a:srgbClr val="E0E0E0"/>
+                      </a:solidFill>
+                      <a:prstDash val="solid"/>
+                      <a:round/>
+                      <a:headEnd type="none" w="med" len="med"/>
+                      <a:tailEnd type="none" w="med" len="med"/>
+                    </a:lnL>
+                    <a:lnR w="6350" cap="flat" cmpd="sng" algn="ctr">
+                      <a:solidFill>
+                        <a:srgbClr val="E0E0E0"/>
+                      </a:solidFill>
+                      <a:prstDash val="solid"/>
+                      <a:round/>
+                      <a:headEnd type="none" w="med" len="med"/>
+                      <a:tailEnd type="none" w="med" len="med"/>
+                    </a:lnR>
+                    <a:lnT w="6350" cap="flat" cmpd="sng" algn="ctr">
+                      <a:solidFill>
+                        <a:srgbClr val="E0E0E0"/>
+                      </a:solidFill>
+                      <a:prstDash val="solid"/>
+                      <a:round/>
+                      <a:headEnd type="none" w="med" len="med"/>
+                      <a:tailEnd type="none" w="med" len="med"/>
+                    </a:lnT>
+                    <a:lnB w="6350" cap="flat" cmpd="sng" algn="ctr">
+                      <a:solidFill>
+                        <a:srgbClr val="E0E0E0"/>
+                      </a:solidFill>
+                      <a:prstDash val="solid"/>
+                      <a:round/>
+                      <a:headEnd type="none" w="med" len="med"/>
+                      <a:tailEnd type="none" w="med" len="med"/>
+                    </a:lnB>
+                    <a:solidFill>
+                      <a:srgbClr val="FFFFFF"/>
+                    </a:solidFill>
+                  </a:tcPr>
+                </a:tc>
+                <a:tc>
+                  <a:txBody>
+                    <a:bodyPr/>
+                    <a:lstStyle/>
+                    <a:p>
+                      <a:pPr marL="0" indent="0" eaLnBrk="0">
+                        <a:buNone/>
+                      </a:pPr>
+                      <a:r>
+                        <a:rPr lang="en-US" sz="1200" dirty="0">
+                          <a:solidFill>
+                            <a:srgbClr val="1D1D1F"/>
+                          </a:solidFill>
+                          <a:latin typeface="나눔스퀘어 네오 Regular" pitchFamily="34" charset="0"/>
+                          <a:ea typeface="나눔스퀘어 네오 Regular" pitchFamily="34" charset="-122"/>
+                          <a:cs typeface="나눔스퀘어 네오 Regular" pitchFamily="34" charset="-120"/>
+                        </a:rPr>
+                        <a:t>0.10°</a:t>
+                      </a:r>
+                      <a:endParaRPr lang="en-US" sz="1200" dirty="0">
+                        <a:latin typeface="나눔스퀘어 네오 Regular" charset="0"/>
+                        <a:ea typeface="나눔스퀘어 네오 Regular" charset="0"/>
+                        <a:cs typeface="나눔스퀘어 네오 Regular" charset="0"/>
+                      </a:endParaRPr>
+                    </a:p>
+                  </a:txBody>
+                  <a:tcPr marL="73152" marR="73152" marT="36576" marB="36576" anchor="ctr">
+                    <a:lnL w="6350" cap="flat" cmpd="sng" algn="ctr">
+                      <a:solidFill>
+                        <a:srgbClr val="E0E0E0"/>
+                      </a:solidFill>
+                      <a:prstDash val="solid"/>
+                      <a:round/>
+                      <a:headEnd type="none" w="med" len="med"/>
+                      <a:tailEnd type="none" w="med" len="med"/>
+                    </a:lnL>
+                    <a:lnR w="6350" cap="flat" cmpd="sng" algn="ctr">
+                      <a:solidFill>
+                        <a:srgbClr val="E0E0E0"/>
+                      </a:solidFill>
+                      <a:prstDash val="solid"/>
+                      <a:round/>
+                      <a:headEnd type="none" w="med" len="med"/>
+                      <a:tailEnd type="none" w="med" len="med"/>
+                    </a:lnR>
+                    <a:lnT w="6350" cap="flat" cmpd="sng" algn="ctr">
+                      <a:solidFill>
+                        <a:srgbClr val="E0E0E0"/>
+                      </a:solidFill>
+                      <a:prstDash val="solid"/>
+                      <a:round/>
+                      <a:headEnd type="none" w="med" len="med"/>
+                      <a:tailEnd type="none" w="med" len="med"/>
+                    </a:lnT>
+                    <a:lnB w="6350" cap="flat" cmpd="sng" algn="ctr">
+                      <a:solidFill>
+                        <a:srgbClr val="E0E0E0"/>
+                      </a:solidFill>
+                      <a:prstDash val="solid"/>
+                      <a:round/>
+                      <a:headEnd type="none" w="med" len="med"/>
+                      <a:tailEnd type="none" w="med" len="med"/>
+                    </a:lnB>
+                    <a:solidFill>
+                      <a:srgbClr val="FFFFFF"/>
+                    </a:solidFill>
+                  </a:tcPr>
+                </a:tc>
+                <a:tc>
+                  <a:txBody>
+                    <a:bodyPr/>
+                    <a:lstStyle/>
+                    <a:p>
+                      <a:pPr marL="0" indent="0" eaLnBrk="0">
+                        <a:buNone/>
+                      </a:pPr>
+                      <a:r>
+                        <a:rPr lang="en-US" sz="1200" dirty="0">
+                          <a:solidFill>
+                            <a:srgbClr val="1D1D1F"/>
+                          </a:solidFill>
+                          <a:latin typeface="나눔스퀘어 네오 Bold" pitchFamily="34" charset="0"/>
+                          <a:ea typeface="나눔스퀘어 네오 Bold" pitchFamily="34" charset="-122"/>
+                          <a:cs typeface="나눔스퀘어 네오 Bold" pitchFamily="34" charset="-120"/>
+                        </a:rPr>
+                        <a:t>18.1°</a:t>
+                      </a:r>
+                      <a:endParaRPr lang="en-US" sz="1200" dirty="0">
+                        <a:latin typeface="나눔스퀘어 네오 Regular" charset="0"/>
+                        <a:ea typeface="나눔스퀘어 네오 Regular" charset="0"/>
+                        <a:cs typeface="나눔스퀘어 네오 Regular" charset="0"/>
+                      </a:endParaRPr>
+                    </a:p>
+                  </a:txBody>
+                  <a:tcPr marL="73152" marR="73152" marT="36576" marB="36576" anchor="ctr">
+                    <a:lnL w="6350" cap="flat" cmpd="sng" algn="ctr">
+                      <a:solidFill>
+                        <a:srgbClr val="E0E0E0"/>
+                      </a:solidFill>
+                      <a:prstDash val="solid"/>
+                      <a:round/>
+                      <a:headEnd type="none" w="med" len="med"/>
+                      <a:tailEnd type="none" w="med" len="med"/>
+                    </a:lnL>
+                    <a:lnR w="6350" cap="flat" cmpd="sng" algn="ctr">
+                      <a:solidFill>
+                        <a:srgbClr val="E0E0E0"/>
+                      </a:solidFill>
+                      <a:prstDash val="solid"/>
+                      <a:round/>
+                      <a:headEnd type="none" w="med" len="med"/>
+                      <a:tailEnd type="none" w="med" len="med"/>
+                    </a:lnR>
+                    <a:lnT w="6350" cap="flat" cmpd="sng" algn="ctr">
+                      <a:solidFill>
+                        <a:srgbClr val="E0E0E0"/>
+                      </a:solidFill>
+                      <a:prstDash val="solid"/>
+                      <a:round/>
+                      <a:headEnd type="none" w="med" len="med"/>
+                      <a:tailEnd type="none" w="med" len="med"/>
+                    </a:lnT>
+                    <a:lnB w="6350" cap="flat" cmpd="sng" algn="ctr">
+                      <a:solidFill>
+                        <a:srgbClr val="E0E0E0"/>
+                      </a:solidFill>
+                      <a:prstDash val="solid"/>
+                      <a:round/>
+                      <a:headEnd type="none" w="med" len="med"/>
+                      <a:tailEnd type="none" w="med" len="med"/>
+                    </a:lnB>
+                    <a:solidFill>
+                      <a:srgbClr val="FFFFFF"/>
+                    </a:solidFill>
+                  </a:tcPr>
+                </a:tc>
+                <a:extLst>
+                  <a:ext uri="{0D108BD9-81ED-4DB2-BD59-A6C34878D82A}">
+                    <a16:rowId xmlns:a16="http://schemas.microsoft.com/office/drawing/2014/main" val="10003"/>
+                  </a:ext>
+                </a:extLst>
+              </a:tr>
+              <a:tr h="384048">
+                <a:tc>
+                  <a:txBody>
+                    <a:bodyPr/>
+                    <a:lstStyle/>
+                    <a:p>
+                      <a:pPr marL="0" indent="0" eaLnBrk="0">
+                        <a:buNone/>
+                      </a:pPr>
+                      <a:r>
+                        <a:rPr lang="en-US" sz="1200" dirty="0">
+                          <a:solidFill>
+                            <a:srgbClr val="1D1D1F"/>
+                          </a:solidFill>
+                          <a:latin typeface="나눔스퀘어 네오 Regular" pitchFamily="34" charset="0"/>
+                          <a:ea typeface="나눔스퀘어 네오 Regular" pitchFamily="34" charset="-122"/>
+                          <a:cs typeface="나눔스퀘어 네오 Regular" pitchFamily="34" charset="-120"/>
+                        </a:rPr>
+                        <a:t>20,025 px (V3, pan 크기)</a:t>
+                      </a:r>
+                      <a:endParaRPr lang="en-US" sz="1200" dirty="0">
+                        <a:latin typeface="나눔스퀘어 네오 Regular" charset="0"/>
+                        <a:ea typeface="나눔스퀘어 네오 Regular" charset="0"/>
+                        <a:cs typeface="나눔스퀘어 네오 Regular" charset="0"/>
+                      </a:endParaRPr>
+                    </a:p>
+                  </a:txBody>
+                  <a:tcPr marL="73152" marR="73152" marT="36576" marB="36576" anchor="ctr">
+                    <a:lnL w="6350" cap="flat" cmpd="sng" algn="ctr">
+                      <a:solidFill>
+                        <a:srgbClr val="E0E0E0"/>
+                      </a:solidFill>
+                      <a:prstDash val="solid"/>
+                      <a:round/>
+                      <a:headEnd type="none" w="med" len="med"/>
+                      <a:tailEnd type="none" w="med" len="med"/>
+                    </a:lnL>
+                    <a:lnR w="6350" cap="flat" cmpd="sng" algn="ctr">
+                      <a:solidFill>
+                        <a:srgbClr val="E0E0E0"/>
+                      </a:solidFill>
+                      <a:prstDash val="solid"/>
+                      <a:round/>
+                      <a:headEnd type="none" w="med" len="med"/>
+                      <a:tailEnd type="none" w="med" len="med"/>
+                    </a:lnR>
+                    <a:lnT w="6350" cap="flat" cmpd="sng" algn="ctr">
+                      <a:solidFill>
+                        <a:srgbClr val="E0E0E0"/>
+                      </a:solidFill>
+                      <a:prstDash val="solid"/>
+                      <a:round/>
+                      <a:headEnd type="none" w="med" len="med"/>
+                      <a:tailEnd type="none" w="med" len="med"/>
+                    </a:lnT>
+                    <a:lnB w="6350" cap="flat" cmpd="sng" algn="ctr">
+                      <a:solidFill>
+                        <a:srgbClr val="E0E0E0"/>
+                      </a:solidFill>
+                      <a:prstDash val="solid"/>
+                      <a:round/>
+                      <a:headEnd type="none" w="med" len="med"/>
+                      <a:tailEnd type="none" w="med" len="med"/>
+                    </a:lnB>
+                    <a:solidFill>
+                      <a:srgbClr val="FFFFFF"/>
+                    </a:solidFill>
+                  </a:tcPr>
+                </a:tc>
+                <a:tc>
+                  <a:txBody>
+                    <a:bodyPr/>
+                    <a:lstStyle/>
+                    <a:p>
+                      <a:pPr marL="0" indent="0" eaLnBrk="0">
+                        <a:buNone/>
+                      </a:pPr>
+                      <a:r>
+                        <a:rPr lang="en-US" sz="1200" dirty="0">
+                          <a:solidFill>
+                            <a:srgbClr val="1D1D1F"/>
+                          </a:solidFill>
+                          <a:latin typeface="나눔스퀘어 네오 Regular" pitchFamily="34" charset="0"/>
+                          <a:ea typeface="나눔스퀘어 네오 Regular" pitchFamily="34" charset="-122"/>
+                          <a:cs typeface="나눔스퀘어 네오 Regular" pitchFamily="34" charset="-120"/>
+                        </a:rPr>
+                        <a:t>5°</a:t>
+                      </a:r>
+                      <a:endParaRPr lang="en-US" sz="1200" dirty="0">
+                        <a:latin typeface="나눔스퀘어 네오 Regular" charset="0"/>
+                        <a:ea typeface="나눔스퀘어 네오 Regular" charset="0"/>
+                        <a:cs typeface="나눔스퀘어 네오 Regular" charset="0"/>
+                      </a:endParaRPr>
+                    </a:p>
+                  </a:txBody>
+                  <a:tcPr marL="73152" marR="73152" marT="36576" marB="36576" anchor="ctr">
+                    <a:lnL w="6350" cap="flat" cmpd="sng" algn="ctr">
+                      <a:solidFill>
+                        <a:srgbClr val="E0E0E0"/>
+                      </a:solidFill>
+                      <a:prstDash val="solid"/>
+                      <a:round/>
+                      <a:headEnd type="none" w="med" len="med"/>
+                      <a:tailEnd type="none" w="med" len="med"/>
+                    </a:lnL>
+                    <a:lnR w="6350" cap="flat" cmpd="sng" algn="ctr">
+                      <a:solidFill>
+                        <a:srgbClr val="E0E0E0"/>
+                      </a:solidFill>
+                      <a:prstDash val="solid"/>
+                      <a:round/>
+                      <a:headEnd type="none" w="med" len="med"/>
+                      <a:tailEnd type="none" w="med" len="med"/>
+                    </a:lnR>
+                    <a:lnT w="6350" cap="flat" cmpd="sng" algn="ctr">
+                      <a:solidFill>
+                        <a:srgbClr val="E0E0E0"/>
+                      </a:solidFill>
+                      <a:prstDash val="solid"/>
+                      <a:round/>
+                      <a:headEnd type="none" w="med" len="med"/>
+                      <a:tailEnd type="none" w="med" len="med"/>
+                    </a:lnT>
+                    <a:lnB w="6350" cap="flat" cmpd="sng" algn="ctr">
+                      <a:solidFill>
+                        <a:srgbClr val="E0E0E0"/>
+                      </a:solidFill>
+                      <a:prstDash val="solid"/>
+                      <a:round/>
+                      <a:headEnd type="none" w="med" len="med"/>
+                      <a:tailEnd type="none" w="med" len="med"/>
+                    </a:lnB>
+                    <a:solidFill>
+                      <a:srgbClr val="FFFFFF"/>
+                    </a:solidFill>
+                  </a:tcPr>
+                </a:tc>
+                <a:tc>
+                  <a:txBody>
+                    <a:bodyPr/>
+                    <a:lstStyle/>
+                    <a:p>
+                      <a:pPr marL="0" indent="0" eaLnBrk="0">
+                        <a:buNone/>
+                      </a:pPr>
+                      <a:r>
+                        <a:rPr lang="en-US" sz="1200" dirty="0">
+                          <a:solidFill>
+                            <a:srgbClr val="1D1D1F"/>
+                          </a:solidFill>
+                          <a:latin typeface="나눔스퀘어 네오 Regular" pitchFamily="34" charset="0"/>
+                          <a:ea typeface="나눔스퀘어 네오 Regular" pitchFamily="34" charset="-122"/>
+                          <a:cs typeface="나눔스퀘어 네오 Regular" pitchFamily="34" charset="-120"/>
+                        </a:rPr>
+                        <a:t>14,137 / 22,397 / 31,072</a:t>
+                      </a:r>
+                      <a:endParaRPr lang="en-US" sz="1200" dirty="0">
+                        <a:latin typeface="나눔스퀘어 네오 Regular" charset="0"/>
+                        <a:ea typeface="나눔스퀘어 네오 Regular" charset="0"/>
+                        <a:cs typeface="나눔스퀘어 네오 Regular" charset="0"/>
+                      </a:endParaRPr>
+                    </a:p>
+                  </a:txBody>
+                  <a:tcPr marL="73152" marR="73152" marT="36576" marB="36576" anchor="ctr">
+                    <a:lnL w="6350" cap="flat" cmpd="sng" algn="ctr">
+                      <a:solidFill>
+                        <a:srgbClr val="E0E0E0"/>
+                      </a:solidFill>
+                      <a:prstDash val="solid"/>
+                      <a:round/>
+                      <a:headEnd type="none" w="med" len="med"/>
+                      <a:tailEnd type="none" w="med" len="med"/>
+                    </a:lnL>
+                    <a:lnR w="6350" cap="flat" cmpd="sng" algn="ctr">
+                      <a:solidFill>
+                        <a:srgbClr val="E0E0E0"/>
+                      </a:solidFill>
+                      <a:prstDash val="solid"/>
+                      <a:round/>
+                      <a:headEnd type="none" w="med" len="med"/>
+                      <a:tailEnd type="none" w="med" len="med"/>
+                    </a:lnR>
+                    <a:lnT w="6350" cap="flat" cmpd="sng" algn="ctr">
+                      <a:solidFill>
+                        <a:srgbClr val="E0E0E0"/>
+                      </a:solidFill>
+                      <a:prstDash val="solid"/>
+                      <a:round/>
+                      <a:headEnd type="none" w="med" len="med"/>
+                      <a:tailEnd type="none" w="med" len="med"/>
+                    </a:lnT>
+                    <a:lnB w="6350" cap="flat" cmpd="sng" algn="ctr">
+                      <a:solidFill>
+                        <a:srgbClr val="E0E0E0"/>
+                      </a:solidFill>
+                      <a:prstDash val="solid"/>
+                      <a:round/>
+                      <a:headEnd type="none" w="med" len="med"/>
+                      <a:tailEnd type="none" w="med" len="med"/>
+                    </a:lnB>
+                    <a:solidFill>
+                      <a:srgbClr val="FFFFFF"/>
+                    </a:solidFill>
+                  </a:tcPr>
+                </a:tc>
+                <a:tc>
+                  <a:txBody>
+                    <a:bodyPr/>
+                    <a:lstStyle/>
+                    <a:p>
+                      <a:pPr marL="0" indent="0" eaLnBrk="0">
+                        <a:buNone/>
+                      </a:pPr>
+                      <a:r>
+                        <a:rPr lang="en-US" sz="1200" dirty="0">
+                          <a:solidFill>
+                            <a:srgbClr val="1D1D1F"/>
+                          </a:solidFill>
+                          <a:latin typeface="나눔스퀘어 네오 Regular" pitchFamily="34" charset="0"/>
+                          <a:ea typeface="나눔스퀘어 네오 Regular" pitchFamily="34" charset="-122"/>
+                          <a:cs typeface="나눔스퀘어 네오 Regular" pitchFamily="34" charset="-120"/>
+                        </a:rPr>
+                        <a:t>1.68°</a:t>
+                      </a:r>
+                      <a:endParaRPr lang="en-US" sz="1200" dirty="0">
+                        <a:latin typeface="나눔스퀘어 네오 Regular" charset="0"/>
+                        <a:ea typeface="나눔스퀘어 네오 Regular" charset="0"/>
+                        <a:cs typeface="나눔스퀘어 네오 Regular" charset="0"/>
+                      </a:endParaRPr>
+                    </a:p>
+                  </a:txBody>
+                  <a:tcPr marL="73152" marR="73152" marT="36576" marB="36576" anchor="ctr">
+                    <a:lnL w="6350" cap="flat" cmpd="sng" algn="ctr">
+                      <a:solidFill>
+                        <a:srgbClr val="E0E0E0"/>
+                      </a:solidFill>
+                      <a:prstDash val="solid"/>
+                      <a:round/>
+                      <a:headEnd type="none" w="med" len="med"/>
+                      <a:tailEnd type="none" w="med" len="med"/>
+                    </a:lnL>
+                    <a:lnR w="6350" cap="flat" cmpd="sng" algn="ctr">
+                      <a:solidFill>
+                        <a:srgbClr val="E0E0E0"/>
+                      </a:solidFill>
+                      <a:prstDash val="solid"/>
+                      <a:round/>
+                      <a:headEnd type="none" w="med" len="med"/>
+                      <a:tailEnd type="none" w="med" len="med"/>
+                    </a:lnR>
+                    <a:lnT w="6350" cap="flat" cmpd="sng" algn="ctr">
+                      <a:solidFill>
+                        <a:srgbClr val="E0E0E0"/>
+                      </a:solidFill>
+                      <a:prstDash val="solid"/>
+                      <a:round/>
+                      <a:headEnd type="none" w="med" len="med"/>
+                      <a:tailEnd type="none" w="med" len="med"/>
+                    </a:lnT>
+                    <a:lnB w="6350" cap="flat" cmpd="sng" algn="ctr">
+                      <a:solidFill>
+                        <a:srgbClr val="E0E0E0"/>
+                      </a:solidFill>
+                      <a:prstDash val="solid"/>
+                      <a:round/>
+                      <a:headEnd type="none" w="med" len="med"/>
+                      <a:tailEnd type="none" w="med" len="med"/>
+                    </a:lnB>
+                    <a:solidFill>
+                      <a:srgbClr val="FFFFFF"/>
+                    </a:solidFill>
+                  </a:tcPr>
+                </a:tc>
+                <a:tc>
+                  <a:txBody>
+                    <a:bodyPr/>
+                    <a:lstStyle/>
+                    <a:p>
+                      <a:pPr marL="0" indent="0" eaLnBrk="0">
+                        <a:buNone/>
+                      </a:pPr>
+                      <a:r>
+                        <a:rPr lang="en-US" sz="1200" dirty="0">
+                          <a:solidFill>
+                            <a:srgbClr val="1D1D1F"/>
+                          </a:solidFill>
+                          <a:latin typeface="나눔스퀘어 네오 Regular" pitchFamily="34" charset="0"/>
+                          <a:ea typeface="나눔스퀘어 네오 Regular" pitchFamily="34" charset="-122"/>
+                          <a:cs typeface="나눔스퀘어 네오 Regular" pitchFamily="34" charset="-120"/>
+                        </a:rPr>
+                        <a:t>0.06°</a:t>
+                      </a:r>
+                      <a:endParaRPr lang="en-US" sz="1200" dirty="0">
+                        <a:latin typeface="나눔스퀘어 네오 Regular" charset="0"/>
+                        <a:ea typeface="나눔스퀘어 네오 Regular" charset="0"/>
+                        <a:cs typeface="나눔스퀘어 네오 Regular" charset="0"/>
+                      </a:endParaRPr>
+                    </a:p>
+                  </a:txBody>
+                  <a:tcPr marL="73152" marR="73152" marT="36576" marB="36576" anchor="ctr">
+                    <a:lnL w="6350" cap="flat" cmpd="sng" algn="ctr">
+                      <a:solidFill>
+                        <a:srgbClr val="E0E0E0"/>
+                      </a:solidFill>
+                      <a:prstDash val="solid"/>
+                      <a:round/>
+                      <a:headEnd type="none" w="med" len="med"/>
+                      <a:tailEnd type="none" w="med" len="med"/>
+                    </a:lnL>
+                    <a:lnR w="6350" cap="flat" cmpd="sng" algn="ctr">
+                      <a:solidFill>
+                        <a:srgbClr val="E0E0E0"/>
+                      </a:solidFill>
+                      <a:prstDash val="solid"/>
+                      <a:round/>
+                      <a:headEnd type="none" w="med" len="med"/>
+                      <a:tailEnd type="none" w="med" len="med"/>
+                    </a:lnR>
+                    <a:lnT w="6350" cap="flat" cmpd="sng" algn="ctr">
+                      <a:solidFill>
+                        <a:srgbClr val="E0E0E0"/>
+                      </a:solidFill>
+                      <a:prstDash val="solid"/>
+                      <a:round/>
+                      <a:headEnd type="none" w="med" len="med"/>
+                      <a:tailEnd type="none" w="med" len="med"/>
+                    </a:lnT>
+                    <a:lnB w="6350" cap="flat" cmpd="sng" algn="ctr">
+                      <a:solidFill>
+                        <a:srgbClr val="E0E0E0"/>
+                      </a:solidFill>
+                      <a:prstDash val="solid"/>
+                      <a:round/>
+                      <a:headEnd type="none" w="med" len="med"/>
+                      <a:tailEnd type="none" w="med" len="med"/>
+                    </a:lnB>
+                    <a:solidFill>
+                      <a:srgbClr val="FFFFFF"/>
+                    </a:solidFill>
+                  </a:tcPr>
+                </a:tc>
+                <a:tc>
+                  <a:txBody>
+                    <a:bodyPr/>
+                    <a:lstStyle/>
+                    <a:p>
+                      <a:pPr marL="0" indent="0" eaLnBrk="0">
+                        <a:buNone/>
+                      </a:pPr>
+                      <a:r>
+                        <a:rPr lang="en-US" sz="1200" dirty="0">
+                          <a:solidFill>
+                            <a:srgbClr val="1D1D1F"/>
+                          </a:solidFill>
+                          <a:latin typeface="나눔스퀘어 네오 Bold" pitchFamily="34" charset="0"/>
+                          <a:ea typeface="나눔스퀘어 네오 Bold" pitchFamily="34" charset="-122"/>
+                          <a:cs typeface="나눔스퀘어 네오 Bold" pitchFamily="34" charset="-120"/>
+                        </a:rPr>
+                        <a:t>115.9°</a:t>
+                      </a:r>
+                      <a:endParaRPr lang="en-US" sz="1200" dirty="0">
+                        <a:latin typeface="나눔스퀘어 네오 Regular" charset="0"/>
+                        <a:ea typeface="나눔스퀘어 네오 Regular" charset="0"/>
+                        <a:cs typeface="나눔스퀘어 네오 Regular" charset="0"/>
+                      </a:endParaRPr>
+                    </a:p>
+                  </a:txBody>
+                  <a:tcPr marL="73152" marR="73152" marT="36576" marB="36576" anchor="ctr">
+                    <a:lnL w="6350" cap="flat" cmpd="sng" algn="ctr">
+                      <a:solidFill>
+                        <a:srgbClr val="E0E0E0"/>
+                      </a:solidFill>
+                      <a:prstDash val="solid"/>
+                      <a:round/>
+                      <a:headEnd type="none" w="med" len="med"/>
+                      <a:tailEnd type="none" w="med" len="med"/>
+                    </a:lnL>
+                    <a:lnR w="6350" cap="flat" cmpd="sng" algn="ctr">
+                      <a:solidFill>
+                        <a:srgbClr val="E0E0E0"/>
+                      </a:solidFill>
+                      <a:prstDash val="solid"/>
+                      <a:round/>
+                      <a:headEnd type="none" w="med" len="med"/>
+                      <a:tailEnd type="none" w="med" len="med"/>
+                    </a:lnR>
+                    <a:lnT w="6350" cap="flat" cmpd="sng" algn="ctr">
+                      <a:solidFill>
+                        <a:srgbClr val="E0E0E0"/>
+                      </a:solidFill>
+                      <a:prstDash val="solid"/>
+                      <a:round/>
+                      <a:headEnd type="none" w="med" len="med"/>
+                      <a:tailEnd type="none" w="med" len="med"/>
+                    </a:lnT>
+                    <a:lnB w="6350" cap="flat" cmpd="sng" algn="ctr">
+                      <a:solidFill>
+                        <a:srgbClr val="E0E0E0"/>
+                      </a:solidFill>
+                      <a:prstDash val="solid"/>
+                      <a:round/>
+                      <a:headEnd type="none" w="med" len="med"/>
+                      <a:tailEnd type="none" w="med" len="med"/>
+                    </a:lnB>
+                    <a:solidFill>
+                      <a:srgbClr val="FFFFFF"/>
+                    </a:solidFill>
+                  </a:tcPr>
+                </a:tc>
+                <a:extLst>
+                  <a:ext uri="{0D108BD9-81ED-4DB2-BD59-A6C34878D82A}">
+                    <a16:rowId xmlns:a16="http://schemas.microsoft.com/office/drawing/2014/main" val="10004"/>
+                  </a:ext>
+                </a:extLst>
+              </a:tr>
+            </a:tbl>
+          </a:graphicData>
+        </a:graphic>
+      </p:graphicFrame>
+      <p:sp>
+        <p:nvSpPr>
+          <p:cNvPr id="9" name="Text 4"/>
+          <p:cNvSpPr txBox="1"/>
+          <p:nvPr/>
+        </p:nvSpPr>
+        <p:spPr>
+          <a:xfrm>
+            <a:off x="548640" y="5760720"/>
+            <a:ext cx="11064240" cy="594360"/>
           </a:xfrm>
           <a:prstGeom prst="rect">
             <a:avLst/>
@@ -6864,118 +6984,13 @@
             <a:r>
               <a:rPr lang="en-US" sz="1300" dirty="0">
                 <a:solidFill>
-                  <a:srgbClr val="1D1D1F"/>
+                  <a:srgbClr val="7A7A7A"/>
                 </a:solidFill>
                 <a:latin typeface="나눔스퀘어 네오 Regular" pitchFamily="34" charset="0"/>
                 <a:ea typeface="나눔스퀘어 네오 Regular" pitchFamily="34" charset="-122"/>
                 <a:cs typeface="나눔스퀘어 네오 Regular" pitchFamily="34" charset="-120"/>
               </a:rPr>
-              <a:t>녹화에 맞춘 상수로 다른 녹화를 돌리면 61° 틀어지던 것이, 피벗을 데이터에서 구하면 0.67°로 줄어든다. 정답 있는 합성 장면에서 독립 검증했다.</a:t>
-            </a:r>
-            <a:endParaRPr lang="en-US" sz="1300" dirty="0"/>
-          </a:p>
-        </p:txBody>
-      </p:sp>
-      <p:sp>
-        <p:nvSpPr>
-          <p:cNvPr id="8" name="Shape 4"/>
-          <p:cNvSpPr/>
-          <p:nvPr/>
-        </p:nvSpPr>
-        <p:spPr>
-          <a:xfrm>
-            <a:off x="6217920" y="4297680"/>
-            <a:ext cx="5394960" cy="2011680"/>
-          </a:xfrm>
-          <a:prstGeom prst="roundRect">
-            <a:avLst>
-              <a:gd name="adj" fmla="val 5455"/>
-            </a:avLst>
-          </a:prstGeom>
-          <a:solidFill>
-            <a:srgbClr val="FFFFFF"/>
-          </a:solidFill>
-          <a:ln w="9525">
-            <a:solidFill>
-              <a:srgbClr val="E0E0E0"/>
-            </a:solidFill>
-            <a:prstDash val="solid"/>
-          </a:ln>
-        </p:spPr>
-      </p:sp>
-      <p:sp>
-        <p:nvSpPr>
-          <p:cNvPr id="9" name="Text 5"/>
-          <p:cNvSpPr txBox="1"/>
-          <p:nvPr/>
-        </p:nvSpPr>
-        <p:spPr>
-          <a:xfrm>
-            <a:off x="6400800" y="4434840"/>
-            <a:ext cx="5029200" cy="365760"/>
-          </a:xfrm>
-          <a:prstGeom prst="rect">
-            <a:avLst/>
-          </a:prstGeom>
-          <a:noFill/>
-          <a:ln/>
-        </p:spPr>
-        <p:txBody>
-          <a:bodyPr wrap="square" lIns="0" tIns="0" rIns="0" bIns="0" rtlCol="0" anchor="t"/>
-          <a:lstStyle/>
-          <a:p>
-            <a:pPr marL="0" indent="0" eaLnBrk="0">
-              <a:buNone/>
-            </a:pPr>
-            <a:r>
-              <a:rPr lang="en-US" sz="1600" dirty="0">
-                <a:solidFill>
-                  <a:srgbClr val="0066CC"/>
-                </a:solidFill>
-                <a:latin typeface="나눔스퀘어 네오 Bold" pitchFamily="34" charset="0"/>
-                <a:ea typeface="나눔스퀘어 네오 Bold" pitchFamily="34" charset="-122"/>
-                <a:cs typeface="나눔스퀘어 네오 Bold" pitchFamily="34" charset="-120"/>
-              </a:rPr>
-              <a:t>튜닝한 상수가 최선이 아니었다</a:t>
-            </a:r>
-            <a:endParaRPr lang="en-US" sz="1600" dirty="0"/>
-          </a:p>
-        </p:txBody>
-      </p:sp>
-      <p:sp>
-        <p:nvSpPr>
-          <p:cNvPr id="10" name="Text 6"/>
-          <p:cNvSpPr txBox="1"/>
-          <p:nvPr/>
-        </p:nvSpPr>
-        <p:spPr>
-          <a:xfrm>
-            <a:off x="6400800" y="4846320"/>
-            <a:ext cx="5029200" cy="1325880"/>
-          </a:xfrm>
-          <a:prstGeom prst="rect">
-            <a:avLst/>
-          </a:prstGeom>
-          <a:noFill/>
-          <a:ln/>
-        </p:spPr>
-        <p:txBody>
-          <a:bodyPr wrap="square" lIns="0" tIns="0" rIns="0" bIns="0" rtlCol="0" anchor="t"/>
-          <a:lstStyle/>
-          <a:p>
-            <a:pPr marL="0" indent="0" eaLnBrk="0">
-              <a:buNone/>
-            </a:pPr>
-            <a:r>
-              <a:rPr lang="en-US" sz="1300" dirty="0">
-                <a:solidFill>
-                  <a:srgbClr val="1D1D1F"/>
-                </a:solidFill>
-                <a:latin typeface="나눔스퀘어 네오 Regular" pitchFamily="34" charset="0"/>
-                <a:ea typeface="나눔스퀘어 네오 Regular" pitchFamily="34" charset="-122"/>
-                <a:cs typeface="나눔스퀘어 네오 Regular" pitchFamily="34" charset="-120"/>
-              </a:rPr>
-              <a:t>구한 피벗이 손으로 맞춘 피벗보다 roll 각도 오차가 작다(0.405° 대 0.467°). 상수를 알고리즘으로 바꾸면 일반화와 정확도가 함께 좋아진다.</a:t>
+              <a:t>자기보정은 피벗을 데이터에서 복원해 붕괴(프리즈 8~116°)를 0.2~1.7°로 막고, 정수 모델에서는 손으로 맞춘 상수보다 오차가 작다(0.405° 대 0.467°). 합성은 단일 깊이·한 방향 회전이라 먼 피벗(pan 크기)의 R 정밀도는 제한적이다.</a:t>
             </a:r>
             <a:endParaRPr lang="en-US" sz="1300" dirty="0"/>
           </a:p>
@@ -21532,7 +21547,7 @@
                 <a:ea typeface="나눔스퀘어 네오 Regular" pitchFamily="34" charset="-122"/>
                 <a:cs typeface="나눔스퀘어 네오 Regular" pitchFamily="34" charset="-120"/>
               </a:rPr>
-              <a:t>녹화별 상수가 사실 피벗 하나 → 데이터에서 구함. 합성 정답에서 독립 검증, 칩은 상수를 레지스터로 받음 (9~11쪽)</a:t>
+              <a:t>녹화별 상수가 사실 피벗 하나 → 데이터에서 구함. 합성 정답에서 독립 검증, 칩은 상수를 레지스터로 받음 (11쪽)</a:t>
             </a:r>
             <a:endParaRPr lang="en-US" sz="1200" dirty="0"/>
           </a:p>
@@ -30782,1327 +30797,36 @@
                 <a:ea typeface="나눔스퀘어 네오 Bold" pitchFamily="34" charset="-122"/>
                 <a:cs typeface="나눔스퀘어 네오 Bold" pitchFamily="34" charset="-120"/>
               </a:rPr>
-              <a:t>과적합: 상수 여러 개는 사실 "피벗 하나"였다</a:t>
+              <a:t>칩이 쓴 월드 메모리: 보정 없이 쌓으면 번지고, 칩 출력에는 방이 보인다</a:t>
             </a:r>
             <a:endParaRPr lang="en-US" sz="2600" dirty="0"/>
           </a:p>
         </p:txBody>
       </p:sp>
-      <p:graphicFrame>
-        <p:nvGraphicFramePr>
-          <p:cNvPr id="10" name="Table 0"/>
-          <p:cNvGraphicFramePr>
-            <a:graphicFrameLocks noGrp="1"/>
-          </p:cNvGraphicFramePr>
-          <p:nvPr>
-            <p:extLst>
-              <p:ext uri="{D42A27DB-BD31-4B8C-83A1-F6EECF244321}">
-                <p14:modId xmlns:p14="http://schemas.microsoft.com/office/powerpoint/2010/main" val="1579011935"/>
-              </p:ext>
-            </p:extLst>
-          </p:nvPr>
-        </p:nvGraphicFramePr>
-        <p:xfrm>
-          <a:off x="548640" y="1417320"/>
-          <a:ext cx="7498080" cy="914400"/>
-        </p:xfrm>
-        <a:graphic>
-          <a:graphicData uri="http://schemas.openxmlformats.org/drawingml/2006/table">
-            <a:tbl>
-              <a:tblPr/>
-              <a:tblGrid>
-                <a:gridCol w="3840480">
-                  <a:extLst>
-                    <a:ext uri="{9D8B030D-6E8A-4147-A177-3AD203B41FA5}">
-                      <a16:colId xmlns:a16="http://schemas.microsoft.com/office/drawing/2014/main" val="20000"/>
-                    </a:ext>
-                  </a:extLst>
-                </a:gridCol>
-                <a:gridCol w="1645920">
-                  <a:extLst>
-                    <a:ext uri="{9D8B030D-6E8A-4147-A177-3AD203B41FA5}">
-                      <a16:colId xmlns:a16="http://schemas.microsoft.com/office/drawing/2014/main" val="20001"/>
-                    </a:ext>
-                  </a:extLst>
-                </a:gridCol>
-                <a:gridCol w="2011680">
-                  <a:extLst>
-                    <a:ext uri="{9D8B030D-6E8A-4147-A177-3AD203B41FA5}">
-                      <a16:colId xmlns:a16="http://schemas.microsoft.com/office/drawing/2014/main" val="20002"/>
-                    </a:ext>
-                  </a:extLst>
-                </a:gridCol>
-              </a:tblGrid>
-              <a:tr h="512064">
-                <a:tc>
-                  <a:txBody>
-                    <a:bodyPr/>
-                    <a:lstStyle/>
-                    <a:p>
-                      <a:pPr marL="0" indent="0" eaLnBrk="0">
-                        <a:buNone/>
-                      </a:pPr>
-                      <a:r>
-                        <a:rPr lang="en-US" sz="1300" dirty="0">
-                          <a:solidFill>
-                            <a:srgbClr val="1D1D1F"/>
-                          </a:solidFill>
-                          <a:latin typeface="나눔스퀘어 네오 Bold" pitchFamily="34" charset="0"/>
-                          <a:ea typeface="나눔스퀘어 네오 Bold" pitchFamily="34" charset="-122"/>
-                          <a:cs typeface="나눔스퀘어 네오 Bold" pitchFamily="34" charset="-120"/>
-                        </a:rPr>
-                        <a:t>ECC 대비, 오프셋 제거 평균</a:t>
-                      </a:r>
-                      <a:endParaRPr lang="en-US" sz="1300" dirty="0">
-                        <a:latin typeface="나눔스퀘어 네오 Regular" charset="0"/>
-                        <a:ea typeface="나눔스퀘어 네오 Regular" charset="0"/>
-                        <a:cs typeface="나눔스퀘어 네오 Regular" charset="0"/>
-                      </a:endParaRPr>
-                    </a:p>
-                  </a:txBody>
-                  <a:tcPr marL="73152" marR="73152" marT="36576" marB="36576" anchor="ctr">
-                    <a:lnL w="6350" cap="flat" cmpd="sng" algn="ctr">
-                      <a:solidFill>
-                        <a:srgbClr val="E0E0E0"/>
-                      </a:solidFill>
-                      <a:prstDash val="solid"/>
-                      <a:round/>
-                      <a:headEnd type="none" w="med" len="med"/>
-                      <a:tailEnd type="none" w="med" len="med"/>
-                    </a:lnL>
-                    <a:lnR w="6350" cap="flat" cmpd="sng" algn="ctr">
-                      <a:solidFill>
-                        <a:srgbClr val="E0E0E0"/>
-                      </a:solidFill>
-                      <a:prstDash val="solid"/>
-                      <a:round/>
-                      <a:headEnd type="none" w="med" len="med"/>
-                      <a:tailEnd type="none" w="med" len="med"/>
-                    </a:lnR>
-                    <a:lnT w="6350" cap="flat" cmpd="sng" algn="ctr">
-                      <a:solidFill>
-                        <a:srgbClr val="E0E0E0"/>
-                      </a:solidFill>
-                      <a:prstDash val="solid"/>
-                      <a:round/>
-                      <a:headEnd type="none" w="med" len="med"/>
-                      <a:tailEnd type="none" w="med" len="med"/>
-                    </a:lnT>
-                    <a:lnB w="6350" cap="flat" cmpd="sng" algn="ctr">
-                      <a:solidFill>
-                        <a:srgbClr val="E0E0E0"/>
-                      </a:solidFill>
-                      <a:prstDash val="solid"/>
-                      <a:round/>
-                      <a:headEnd type="none" w="med" len="med"/>
-                      <a:tailEnd type="none" w="med" len="med"/>
-                    </a:lnB>
-                    <a:solidFill>
-                      <a:srgbClr val="F5F5F7"/>
-                    </a:solidFill>
-                  </a:tcPr>
-                </a:tc>
-                <a:tc>
-                  <a:txBody>
-                    <a:bodyPr/>
-                    <a:lstStyle/>
-                    <a:p>
-                      <a:pPr marL="0" indent="0" eaLnBrk="0">
-                        <a:buNone/>
-                      </a:pPr>
-                      <a:r>
-                        <a:rPr lang="en-US" sz="1300" dirty="0">
-                          <a:solidFill>
-                            <a:srgbClr val="1D1D1F"/>
-                          </a:solidFill>
-                          <a:latin typeface="나눔스퀘어 네오 Bold" pitchFamily="34" charset="0"/>
-                          <a:ea typeface="나눔스퀘어 네오 Bold" pitchFamily="34" charset="-122"/>
-                          <a:cs typeface="나눔스퀘어 네오 Bold" pitchFamily="34" charset="-120"/>
-                        </a:rPr>
-                        <a:t>roll</a:t>
-                      </a:r>
-                      <a:endParaRPr lang="en-US" sz="1300" dirty="0">
-                        <a:latin typeface="나눔스퀘어 네오 Regular" charset="0"/>
-                        <a:ea typeface="나눔스퀘어 네오 Regular" charset="0"/>
-                        <a:cs typeface="나눔스퀘어 네오 Regular" charset="0"/>
-                      </a:endParaRPr>
-                    </a:p>
-                  </a:txBody>
-                  <a:tcPr marL="73152" marR="73152" marT="36576" marB="36576" anchor="ctr">
-                    <a:lnL w="6350" cap="flat" cmpd="sng" algn="ctr">
-                      <a:solidFill>
-                        <a:srgbClr val="E0E0E0"/>
-                      </a:solidFill>
-                      <a:prstDash val="solid"/>
-                      <a:round/>
-                      <a:headEnd type="none" w="med" len="med"/>
-                      <a:tailEnd type="none" w="med" len="med"/>
-                    </a:lnL>
-                    <a:lnR w="6350" cap="flat" cmpd="sng" algn="ctr">
-                      <a:solidFill>
-                        <a:srgbClr val="E0E0E0"/>
-                      </a:solidFill>
-                      <a:prstDash val="solid"/>
-                      <a:round/>
-                      <a:headEnd type="none" w="med" len="med"/>
-                      <a:tailEnd type="none" w="med" len="med"/>
-                    </a:lnR>
-                    <a:lnT w="6350" cap="flat" cmpd="sng" algn="ctr">
-                      <a:solidFill>
-                        <a:srgbClr val="E0E0E0"/>
-                      </a:solidFill>
-                      <a:prstDash val="solid"/>
-                      <a:round/>
-                      <a:headEnd type="none" w="med" len="med"/>
-                      <a:tailEnd type="none" w="med" len="med"/>
-                    </a:lnT>
-                    <a:lnB w="6350" cap="flat" cmpd="sng" algn="ctr">
-                      <a:solidFill>
-                        <a:srgbClr val="E0E0E0"/>
-                      </a:solidFill>
-                      <a:prstDash val="solid"/>
-                      <a:round/>
-                      <a:headEnd type="none" w="med" len="med"/>
-                      <a:tailEnd type="none" w="med" len="med"/>
-                    </a:lnB>
-                    <a:solidFill>
-                      <a:srgbClr val="F5F5F7"/>
-                    </a:solidFill>
-                  </a:tcPr>
-                </a:tc>
-                <a:tc>
-                  <a:txBody>
-                    <a:bodyPr/>
-                    <a:lstStyle/>
-                    <a:p>
-                      <a:pPr marL="0" indent="0" eaLnBrk="0">
-                        <a:buNone/>
-                      </a:pPr>
-                      <a:r>
-                        <a:rPr lang="en-US" sz="1300" dirty="0">
-                          <a:solidFill>
-                            <a:srgbClr val="1D1D1F"/>
-                          </a:solidFill>
-                          <a:latin typeface="나눔스퀘어 네오 Bold" pitchFamily="34" charset="0"/>
-                          <a:ea typeface="나눔스퀘어 네오 Bold" pitchFamily="34" charset="-122"/>
-                          <a:cs typeface="나눔스퀘어 네오 Bold" pitchFamily="34" charset="-120"/>
-                        </a:rPr>
-                        <a:t>pan</a:t>
-                      </a:r>
-                      <a:endParaRPr lang="en-US" sz="1300" dirty="0">
-                        <a:latin typeface="나눔스퀘어 네오 Regular" charset="0"/>
-                        <a:ea typeface="나눔스퀘어 네오 Regular" charset="0"/>
-                        <a:cs typeface="나눔스퀘어 네오 Regular" charset="0"/>
-                      </a:endParaRPr>
-                    </a:p>
-                  </a:txBody>
-                  <a:tcPr marL="73152" marR="73152" marT="36576" marB="36576" anchor="ctr">
-                    <a:lnL w="6350" cap="flat" cmpd="sng" algn="ctr">
-                      <a:solidFill>
-                        <a:srgbClr val="E0E0E0"/>
-                      </a:solidFill>
-                      <a:prstDash val="solid"/>
-                      <a:round/>
-                      <a:headEnd type="none" w="med" len="med"/>
-                      <a:tailEnd type="none" w="med" len="med"/>
-                    </a:lnL>
-                    <a:lnR w="6350" cap="flat" cmpd="sng" algn="ctr">
-                      <a:solidFill>
-                        <a:srgbClr val="E0E0E0"/>
-                      </a:solidFill>
-                      <a:prstDash val="solid"/>
-                      <a:round/>
-                      <a:headEnd type="none" w="med" len="med"/>
-                      <a:tailEnd type="none" w="med" len="med"/>
-                    </a:lnR>
-                    <a:lnT w="6350" cap="flat" cmpd="sng" algn="ctr">
-                      <a:solidFill>
-                        <a:srgbClr val="E0E0E0"/>
-                      </a:solidFill>
-                      <a:prstDash val="solid"/>
-                      <a:round/>
-                      <a:headEnd type="none" w="med" len="med"/>
-                      <a:tailEnd type="none" w="med" len="med"/>
-                    </a:lnT>
-                    <a:lnB w="6350" cap="flat" cmpd="sng" algn="ctr">
-                      <a:solidFill>
-                        <a:srgbClr val="E0E0E0"/>
-                      </a:solidFill>
-                      <a:prstDash val="solid"/>
-                      <a:round/>
-                      <a:headEnd type="none" w="med" len="med"/>
-                      <a:tailEnd type="none" w="med" len="med"/>
-                    </a:lnB>
-                    <a:solidFill>
-                      <a:srgbClr val="F5F5F7"/>
-                    </a:solidFill>
-                  </a:tcPr>
-                </a:tc>
-                <a:extLst>
-                  <a:ext uri="{0D108BD9-81ED-4DB2-BD59-A6C34878D82A}">
-                    <a16:rowId xmlns:a16="http://schemas.microsoft.com/office/drawing/2014/main" val="10000"/>
-                  </a:ext>
-                </a:extLst>
-              </a:tr>
-              <a:tr h="512064">
-                <a:tc>
-                  <a:txBody>
-                    <a:bodyPr/>
-                    <a:lstStyle/>
-                    <a:p>
-                      <a:pPr marL="0" indent="0" eaLnBrk="0">
-                        <a:buNone/>
-                      </a:pPr>
-                      <a:r>
-                        <a:rPr lang="en-US" sz="1300" dirty="0">
-                          <a:solidFill>
-                            <a:srgbClr val="1D1D1F"/>
-                          </a:solidFill>
-                          <a:latin typeface="나눔스퀘어 네오 Regular" pitchFamily="34" charset="0"/>
-                          <a:ea typeface="나눔스퀘어 네오 Regular" pitchFamily="34" charset="-122"/>
-                          <a:cs typeface="나눔스퀘어 네오 Regular" pitchFamily="34" charset="-120"/>
-                        </a:rPr>
-                        <a:t>피벗 반지름 R (ECC 체인에서 구함)</a:t>
-                      </a:r>
-                      <a:endParaRPr lang="en-US" sz="1300" dirty="0">
-                        <a:latin typeface="나눔스퀘어 네오 Regular" charset="0"/>
-                        <a:ea typeface="나눔스퀘어 네오 Regular" charset="0"/>
-                        <a:cs typeface="나눔스퀘어 네오 Regular" charset="0"/>
-                      </a:endParaRPr>
-                    </a:p>
-                  </a:txBody>
-                  <a:tcPr marL="73152" marR="73152" marT="36576" marB="36576" anchor="ctr">
-                    <a:lnL w="6350" cap="flat" cmpd="sng" algn="ctr">
-                      <a:solidFill>
-                        <a:srgbClr val="E0E0E0"/>
-                      </a:solidFill>
-                      <a:prstDash val="solid"/>
-                      <a:round/>
-                      <a:headEnd type="none" w="med" len="med"/>
-                      <a:tailEnd type="none" w="med" len="med"/>
-                    </a:lnL>
-                    <a:lnR w="6350" cap="flat" cmpd="sng" algn="ctr">
-                      <a:solidFill>
-                        <a:srgbClr val="E0E0E0"/>
-                      </a:solidFill>
-                      <a:prstDash val="solid"/>
-                      <a:round/>
-                      <a:headEnd type="none" w="med" len="med"/>
-                      <a:tailEnd type="none" w="med" len="med"/>
-                    </a:lnR>
-                    <a:lnT w="6350" cap="flat" cmpd="sng" algn="ctr">
-                      <a:solidFill>
-                        <a:srgbClr val="E0E0E0"/>
-                      </a:solidFill>
-                      <a:prstDash val="solid"/>
-                      <a:round/>
-                      <a:headEnd type="none" w="med" len="med"/>
-                      <a:tailEnd type="none" w="med" len="med"/>
-                    </a:lnT>
-                    <a:lnB w="6350" cap="flat" cmpd="sng" algn="ctr">
-                      <a:solidFill>
-                        <a:srgbClr val="E0E0E0"/>
-                      </a:solidFill>
-                      <a:prstDash val="solid"/>
-                      <a:round/>
-                      <a:headEnd type="none" w="med" len="med"/>
-                      <a:tailEnd type="none" w="med" len="med"/>
-                    </a:lnB>
-                    <a:solidFill>
-                      <a:srgbClr val="FFFFFF"/>
-                    </a:solidFill>
-                  </a:tcPr>
-                </a:tc>
-                <a:tc>
-                  <a:txBody>
-                    <a:bodyPr/>
-                    <a:lstStyle/>
-                    <a:p>
-                      <a:pPr marL="0" indent="0" eaLnBrk="0">
-                        <a:buNone/>
-                      </a:pPr>
-                      <a:r>
-                        <a:rPr lang="en-US" sz="1300" dirty="0">
-                          <a:solidFill>
-                            <a:srgbClr val="1D1D1F"/>
-                          </a:solidFill>
-                          <a:latin typeface="나눔스퀘어 네오 Regular" pitchFamily="34" charset="0"/>
-                          <a:ea typeface="나눔스퀘어 네오 Regular" pitchFamily="34" charset="-122"/>
-                          <a:cs typeface="나눔스퀘어 네오 Regular" pitchFamily="34" charset="-120"/>
-                        </a:rPr>
-                        <a:t>약 45~65 px</a:t>
-                      </a:r>
-                      <a:endParaRPr lang="en-US" sz="1300" dirty="0">
-                        <a:latin typeface="나눔스퀘어 네오 Regular" charset="0"/>
-                        <a:ea typeface="나눔스퀘어 네오 Regular" charset="0"/>
-                        <a:cs typeface="나눔스퀘어 네오 Regular" charset="0"/>
-                      </a:endParaRPr>
-                    </a:p>
-                  </a:txBody>
-                  <a:tcPr marL="73152" marR="73152" marT="36576" marB="36576" anchor="ctr">
-                    <a:lnL w="6350" cap="flat" cmpd="sng" algn="ctr">
-                      <a:solidFill>
-                        <a:srgbClr val="E0E0E0"/>
-                      </a:solidFill>
-                      <a:prstDash val="solid"/>
-                      <a:round/>
-                      <a:headEnd type="none" w="med" len="med"/>
-                      <a:tailEnd type="none" w="med" len="med"/>
-                    </a:lnL>
-                    <a:lnR w="6350" cap="flat" cmpd="sng" algn="ctr">
-                      <a:solidFill>
-                        <a:srgbClr val="E0E0E0"/>
-                      </a:solidFill>
-                      <a:prstDash val="solid"/>
-                      <a:round/>
-                      <a:headEnd type="none" w="med" len="med"/>
-                      <a:tailEnd type="none" w="med" len="med"/>
-                    </a:lnR>
-                    <a:lnT w="6350" cap="flat" cmpd="sng" algn="ctr">
-                      <a:solidFill>
-                        <a:srgbClr val="E0E0E0"/>
-                      </a:solidFill>
-                      <a:prstDash val="solid"/>
-                      <a:round/>
-                      <a:headEnd type="none" w="med" len="med"/>
-                      <a:tailEnd type="none" w="med" len="med"/>
-                    </a:lnT>
-                    <a:lnB w="6350" cap="flat" cmpd="sng" algn="ctr">
-                      <a:solidFill>
-                        <a:srgbClr val="E0E0E0"/>
-                      </a:solidFill>
-                      <a:prstDash val="solid"/>
-                      <a:round/>
-                      <a:headEnd type="none" w="med" len="med"/>
-                      <a:tailEnd type="none" w="med" len="med"/>
-                    </a:lnB>
-                    <a:solidFill>
-                      <a:srgbClr val="FFFFFF"/>
-                    </a:solidFill>
-                  </a:tcPr>
-                </a:tc>
-                <a:tc>
-                  <a:txBody>
-                    <a:bodyPr/>
-                    <a:lstStyle/>
-                    <a:p>
-                      <a:pPr marL="0" indent="0" eaLnBrk="0">
-                        <a:buNone/>
-                      </a:pPr>
-                      <a:r>
-                        <a:rPr lang="en-US" sz="1300" dirty="0">
-                          <a:solidFill>
-                            <a:srgbClr val="1D1D1F"/>
-                          </a:solidFill>
-                          <a:latin typeface="나눔스퀘어 네오 Regular" pitchFamily="34" charset="0"/>
-                          <a:ea typeface="나눔스퀘어 네오 Regular" pitchFamily="34" charset="-122"/>
-                          <a:cs typeface="나눔스퀘어 네오 Regular" pitchFamily="34" charset="-120"/>
-                        </a:rPr>
-                        <a:t>약 21,700 px</a:t>
-                      </a:r>
-                      <a:endParaRPr lang="en-US" sz="1300" dirty="0">
-                        <a:latin typeface="나눔스퀘어 네오 Regular" charset="0"/>
-                        <a:ea typeface="나눔스퀘어 네오 Regular" charset="0"/>
-                        <a:cs typeface="나눔스퀘어 네오 Regular" charset="0"/>
-                      </a:endParaRPr>
-                    </a:p>
-                  </a:txBody>
-                  <a:tcPr marL="73152" marR="73152" marT="36576" marB="36576" anchor="ctr">
-                    <a:lnL w="6350" cap="flat" cmpd="sng" algn="ctr">
-                      <a:solidFill>
-                        <a:srgbClr val="E0E0E0"/>
-                      </a:solidFill>
-                      <a:prstDash val="solid"/>
-                      <a:round/>
-                      <a:headEnd type="none" w="med" len="med"/>
-                      <a:tailEnd type="none" w="med" len="med"/>
-                    </a:lnL>
-                    <a:lnR w="6350" cap="flat" cmpd="sng" algn="ctr">
-                      <a:solidFill>
-                        <a:srgbClr val="E0E0E0"/>
-                      </a:solidFill>
-                      <a:prstDash val="solid"/>
-                      <a:round/>
-                      <a:headEnd type="none" w="med" len="med"/>
-                      <a:tailEnd type="none" w="med" len="med"/>
-                    </a:lnR>
-                    <a:lnT w="6350" cap="flat" cmpd="sng" algn="ctr">
-                      <a:solidFill>
-                        <a:srgbClr val="E0E0E0"/>
-                      </a:solidFill>
-                      <a:prstDash val="solid"/>
-                      <a:round/>
-                      <a:headEnd type="none" w="med" len="med"/>
-                      <a:tailEnd type="none" w="med" len="med"/>
-                    </a:lnT>
-                    <a:lnB w="6350" cap="flat" cmpd="sng" algn="ctr">
-                      <a:solidFill>
-                        <a:srgbClr val="E0E0E0"/>
-                      </a:solidFill>
-                      <a:prstDash val="solid"/>
-                      <a:round/>
-                      <a:headEnd type="none" w="med" len="med"/>
-                      <a:tailEnd type="none" w="med" len="med"/>
-                    </a:lnB>
-                    <a:solidFill>
-                      <a:srgbClr val="FFFFFF"/>
-                    </a:solidFill>
-                  </a:tcPr>
-                </a:tc>
-                <a:extLst>
-                  <a:ext uri="{0D108BD9-81ED-4DB2-BD59-A6C34878D82A}">
-                    <a16:rowId xmlns:a16="http://schemas.microsoft.com/office/drawing/2014/main" val="10001"/>
-                  </a:ext>
-                </a:extLst>
-              </a:tr>
-              <a:tr h="512064">
-                <a:tc>
-                  <a:txBody>
-                    <a:bodyPr/>
-                    <a:lstStyle/>
-                    <a:p>
-                      <a:pPr marL="0" indent="0" eaLnBrk="0">
-                        <a:buNone/>
-                      </a:pPr>
-                      <a:r>
-                        <a:rPr lang="en-US" sz="1300" dirty="0">
-                          <a:solidFill>
-                            <a:srgbClr val="1D1D1F"/>
-                          </a:solidFill>
-                          <a:latin typeface="나눔스퀘어 네오 Regular" pitchFamily="34" charset="0"/>
-                          <a:ea typeface="나눔스퀘어 네오 Regular" pitchFamily="34" charset="-122"/>
-                          <a:cs typeface="나눔스퀘어 네오 Regular" pitchFamily="34" charset="-120"/>
-                        </a:rPr>
-                        <a:t>다른 녹화의 상수를 그대로 사용 (프리즈)</a:t>
-                      </a:r>
-                      <a:endParaRPr lang="en-US" sz="1300" dirty="0">
-                        <a:latin typeface="나눔스퀘어 네오 Regular" charset="0"/>
-                        <a:ea typeface="나눔스퀘어 네오 Regular" charset="0"/>
-                        <a:cs typeface="나눔스퀘어 네오 Regular" charset="0"/>
-                      </a:endParaRPr>
-                    </a:p>
-                  </a:txBody>
-                  <a:tcPr marL="73152" marR="73152" marT="36576" marB="36576" anchor="ctr">
-                    <a:lnL w="6350" cap="flat" cmpd="sng" algn="ctr">
-                      <a:solidFill>
-                        <a:srgbClr val="E0E0E0"/>
-                      </a:solidFill>
-                      <a:prstDash val="solid"/>
-                      <a:round/>
-                      <a:headEnd type="none" w="med" len="med"/>
-                      <a:tailEnd type="none" w="med" len="med"/>
-                    </a:lnL>
-                    <a:lnR w="6350" cap="flat" cmpd="sng" algn="ctr">
-                      <a:solidFill>
-                        <a:srgbClr val="E0E0E0"/>
-                      </a:solidFill>
-                      <a:prstDash val="solid"/>
-                      <a:round/>
-                      <a:headEnd type="none" w="med" len="med"/>
-                      <a:tailEnd type="none" w="med" len="med"/>
-                    </a:lnR>
-                    <a:lnT w="6350" cap="flat" cmpd="sng" algn="ctr">
-                      <a:solidFill>
-                        <a:srgbClr val="E0E0E0"/>
-                      </a:solidFill>
-                      <a:prstDash val="solid"/>
-                      <a:round/>
-                      <a:headEnd type="none" w="med" len="med"/>
-                      <a:tailEnd type="none" w="med" len="med"/>
-                    </a:lnT>
-                    <a:lnB w="6350" cap="flat" cmpd="sng" algn="ctr">
-                      <a:solidFill>
-                        <a:srgbClr val="E0E0E0"/>
-                      </a:solidFill>
-                      <a:prstDash val="solid"/>
-                      <a:round/>
-                      <a:headEnd type="none" w="med" len="med"/>
-                      <a:tailEnd type="none" w="med" len="med"/>
-                    </a:lnB>
-                    <a:solidFill>
-                      <a:srgbClr val="FFFFFF"/>
-                    </a:solidFill>
-                  </a:tcPr>
-                </a:tc>
-                <a:tc>
-                  <a:txBody>
-                    <a:bodyPr/>
-                    <a:lstStyle/>
-                    <a:p>
-                      <a:pPr marL="0" indent="0" eaLnBrk="0">
-                        <a:buNone/>
-                      </a:pPr>
-                      <a:r>
-                        <a:rPr lang="en-US" sz="1300" dirty="0">
-                          <a:solidFill>
-                            <a:srgbClr val="1D1D1F"/>
-                          </a:solidFill>
-                          <a:latin typeface="나눔스퀘어 네오 Bold" pitchFamily="34" charset="0"/>
-                          <a:ea typeface="나눔스퀘어 네오 Bold" pitchFamily="34" charset="-122"/>
-                          <a:cs typeface="나눔스퀘어 네오 Bold" pitchFamily="34" charset="-120"/>
-                        </a:rPr>
-                        <a:t>61.2°</a:t>
-                      </a:r>
-                      <a:endParaRPr lang="en-US" sz="1300" dirty="0">
-                        <a:latin typeface="나눔스퀘어 네오 Regular" charset="0"/>
-                        <a:ea typeface="나눔스퀘어 네오 Regular" charset="0"/>
-                        <a:cs typeface="나눔스퀘어 네오 Regular" charset="0"/>
-                      </a:endParaRPr>
-                    </a:p>
-                  </a:txBody>
-                  <a:tcPr marL="73152" marR="73152" marT="36576" marB="36576" anchor="ctr">
-                    <a:lnL w="6350" cap="flat" cmpd="sng" algn="ctr">
-                      <a:solidFill>
-                        <a:srgbClr val="E0E0E0"/>
-                      </a:solidFill>
-                      <a:prstDash val="solid"/>
-                      <a:round/>
-                      <a:headEnd type="none" w="med" len="med"/>
-                      <a:tailEnd type="none" w="med" len="med"/>
-                    </a:lnL>
-                    <a:lnR w="6350" cap="flat" cmpd="sng" algn="ctr">
-                      <a:solidFill>
-                        <a:srgbClr val="E0E0E0"/>
-                      </a:solidFill>
-                      <a:prstDash val="solid"/>
-                      <a:round/>
-                      <a:headEnd type="none" w="med" len="med"/>
-                      <a:tailEnd type="none" w="med" len="med"/>
-                    </a:lnR>
-                    <a:lnT w="6350" cap="flat" cmpd="sng" algn="ctr">
-                      <a:solidFill>
-                        <a:srgbClr val="E0E0E0"/>
-                      </a:solidFill>
-                      <a:prstDash val="solid"/>
-                      <a:round/>
-                      <a:headEnd type="none" w="med" len="med"/>
-                      <a:tailEnd type="none" w="med" len="med"/>
-                    </a:lnT>
-                    <a:lnB w="6350" cap="flat" cmpd="sng" algn="ctr">
-                      <a:solidFill>
-                        <a:srgbClr val="E0E0E0"/>
-                      </a:solidFill>
-                      <a:prstDash val="solid"/>
-                      <a:round/>
-                      <a:headEnd type="none" w="med" len="med"/>
-                      <a:tailEnd type="none" w="med" len="med"/>
-                    </a:lnB>
-                    <a:solidFill>
-                      <a:srgbClr val="FFFFFF"/>
-                    </a:solidFill>
-                  </a:tcPr>
-                </a:tc>
-                <a:tc>
-                  <a:txBody>
-                    <a:bodyPr/>
-                    <a:lstStyle/>
-                    <a:p>
-                      <a:pPr marL="0" indent="0" eaLnBrk="0">
-                        <a:buNone/>
-                      </a:pPr>
-                      <a:r>
-                        <a:rPr lang="en-US" sz="1300" dirty="0">
-                          <a:solidFill>
-                            <a:srgbClr val="1D1D1F"/>
-                          </a:solidFill>
-                          <a:latin typeface="나눔스퀘어 네오 Bold" pitchFamily="34" charset="0"/>
-                          <a:ea typeface="나눔스퀘어 네오 Bold" pitchFamily="34" charset="-122"/>
-                          <a:cs typeface="나눔스퀘어 네오 Bold" pitchFamily="34" charset="-120"/>
-                        </a:rPr>
-                        <a:t>472 px</a:t>
-                      </a:r>
-                      <a:endParaRPr lang="en-US" sz="1300" dirty="0">
-                        <a:latin typeface="나눔스퀘어 네오 Regular" charset="0"/>
-                        <a:ea typeface="나눔스퀘어 네오 Regular" charset="0"/>
-                        <a:cs typeface="나눔스퀘어 네오 Regular" charset="0"/>
-                      </a:endParaRPr>
-                    </a:p>
-                  </a:txBody>
-                  <a:tcPr marL="73152" marR="73152" marT="36576" marB="36576" anchor="ctr">
-                    <a:lnL w="6350" cap="flat" cmpd="sng" algn="ctr">
-                      <a:solidFill>
-                        <a:srgbClr val="E0E0E0"/>
-                      </a:solidFill>
-                      <a:prstDash val="solid"/>
-                      <a:round/>
-                      <a:headEnd type="none" w="med" len="med"/>
-                      <a:tailEnd type="none" w="med" len="med"/>
-                    </a:lnL>
-                    <a:lnR w="6350" cap="flat" cmpd="sng" algn="ctr">
-                      <a:solidFill>
-                        <a:srgbClr val="E0E0E0"/>
-                      </a:solidFill>
-                      <a:prstDash val="solid"/>
-                      <a:round/>
-                      <a:headEnd type="none" w="med" len="med"/>
-                      <a:tailEnd type="none" w="med" len="med"/>
-                    </a:lnR>
-                    <a:lnT w="6350" cap="flat" cmpd="sng" algn="ctr">
-                      <a:solidFill>
-                        <a:srgbClr val="E0E0E0"/>
-                      </a:solidFill>
-                      <a:prstDash val="solid"/>
-                      <a:round/>
-                      <a:headEnd type="none" w="med" len="med"/>
-                      <a:tailEnd type="none" w="med" len="med"/>
-                    </a:lnT>
-                    <a:lnB w="6350" cap="flat" cmpd="sng" algn="ctr">
-                      <a:solidFill>
-                        <a:srgbClr val="E0E0E0"/>
-                      </a:solidFill>
-                      <a:prstDash val="solid"/>
-                      <a:round/>
-                      <a:headEnd type="none" w="med" len="med"/>
-                      <a:tailEnd type="none" w="med" len="med"/>
-                    </a:lnB>
-                    <a:solidFill>
-                      <a:srgbClr val="FFFFFF"/>
-                    </a:solidFill>
-                  </a:tcPr>
-                </a:tc>
-                <a:extLst>
-                  <a:ext uri="{0D108BD9-81ED-4DB2-BD59-A6C34878D82A}">
-                    <a16:rowId xmlns:a16="http://schemas.microsoft.com/office/drawing/2014/main" val="10002"/>
-                  </a:ext>
-                </a:extLst>
-              </a:tr>
-              <a:tr h="512064">
-                <a:tc>
-                  <a:txBody>
-                    <a:bodyPr/>
-                    <a:lstStyle/>
-                    <a:p>
-                      <a:pPr marL="0" indent="0" eaLnBrk="0">
-                        <a:buNone/>
-                      </a:pPr>
-                      <a:r>
-                        <a:rPr lang="en-US" sz="1300" dirty="0">
-                          <a:solidFill>
-                            <a:srgbClr val="1D1D1F"/>
-                          </a:solidFill>
-                          <a:latin typeface="나눔스퀘어 네오 Regular" pitchFamily="34" charset="0"/>
-                          <a:ea typeface="나눔스퀘어 네오 Regular" pitchFamily="34" charset="-122"/>
-                          <a:cs typeface="나눔스퀘어 네오 Regular" pitchFamily="34" charset="-120"/>
-                        </a:rPr>
-                        <a:t>자기 데이터에 다시 맞춤 (재맞춤)</a:t>
-                      </a:r>
-                      <a:endParaRPr lang="en-US" sz="1300" dirty="0">
-                        <a:latin typeface="나눔스퀘어 네오 Regular" charset="0"/>
-                        <a:ea typeface="나눔스퀘어 네오 Regular" charset="0"/>
-                        <a:cs typeface="나눔스퀘어 네오 Regular" charset="0"/>
-                      </a:endParaRPr>
-                    </a:p>
-                  </a:txBody>
-                  <a:tcPr marL="73152" marR="73152" marT="36576" marB="36576" anchor="ctr">
-                    <a:lnL w="6350" cap="flat" cmpd="sng" algn="ctr">
-                      <a:solidFill>
-                        <a:srgbClr val="E0E0E0"/>
-                      </a:solidFill>
-                      <a:prstDash val="solid"/>
-                      <a:round/>
-                      <a:headEnd type="none" w="med" len="med"/>
-                      <a:tailEnd type="none" w="med" len="med"/>
-                    </a:lnL>
-                    <a:lnR w="6350" cap="flat" cmpd="sng" algn="ctr">
-                      <a:solidFill>
-                        <a:srgbClr val="E0E0E0"/>
-                      </a:solidFill>
-                      <a:prstDash val="solid"/>
-                      <a:round/>
-                      <a:headEnd type="none" w="med" len="med"/>
-                      <a:tailEnd type="none" w="med" len="med"/>
-                    </a:lnR>
-                    <a:lnT w="6350" cap="flat" cmpd="sng" algn="ctr">
-                      <a:solidFill>
-                        <a:srgbClr val="E0E0E0"/>
-                      </a:solidFill>
-                      <a:prstDash val="solid"/>
-                      <a:round/>
-                      <a:headEnd type="none" w="med" len="med"/>
-                      <a:tailEnd type="none" w="med" len="med"/>
-                    </a:lnT>
-                    <a:lnB w="6350" cap="flat" cmpd="sng" algn="ctr">
-                      <a:solidFill>
-                        <a:srgbClr val="E0E0E0"/>
-                      </a:solidFill>
-                      <a:prstDash val="solid"/>
-                      <a:round/>
-                      <a:headEnd type="none" w="med" len="med"/>
-                      <a:tailEnd type="none" w="med" len="med"/>
-                    </a:lnB>
-                    <a:solidFill>
-                      <a:srgbClr val="FFFFFF"/>
-                    </a:solidFill>
-                  </a:tcPr>
-                </a:tc>
-                <a:tc>
-                  <a:txBody>
-                    <a:bodyPr/>
-                    <a:lstStyle/>
-                    <a:p>
-                      <a:pPr marL="0" indent="0" eaLnBrk="0">
-                        <a:buNone/>
-                      </a:pPr>
-                      <a:r>
-                        <a:rPr lang="en-US" sz="1300" dirty="0">
-                          <a:solidFill>
-                            <a:srgbClr val="1D1D1F"/>
-                          </a:solidFill>
-                          <a:latin typeface="나눔스퀘어 네오 Regular" pitchFamily="34" charset="0"/>
-                          <a:ea typeface="나눔스퀘어 네오 Regular" pitchFamily="34" charset="-122"/>
-                          <a:cs typeface="나눔스퀘어 네오 Regular" pitchFamily="34" charset="-120"/>
-                        </a:rPr>
-                        <a:t>0.62°</a:t>
-                      </a:r>
-                      <a:endParaRPr lang="en-US" sz="1300" dirty="0">
-                        <a:latin typeface="나눔스퀘어 네오 Regular" charset="0"/>
-                        <a:ea typeface="나눔스퀘어 네오 Regular" charset="0"/>
-                        <a:cs typeface="나눔스퀘어 네오 Regular" charset="0"/>
-                      </a:endParaRPr>
-                    </a:p>
-                  </a:txBody>
-                  <a:tcPr marL="73152" marR="73152" marT="36576" marB="36576" anchor="ctr">
-                    <a:lnL w="6350" cap="flat" cmpd="sng" algn="ctr">
-                      <a:solidFill>
-                        <a:srgbClr val="E0E0E0"/>
-                      </a:solidFill>
-                      <a:prstDash val="solid"/>
-                      <a:round/>
-                      <a:headEnd type="none" w="med" len="med"/>
-                      <a:tailEnd type="none" w="med" len="med"/>
-                    </a:lnL>
-                    <a:lnR w="6350" cap="flat" cmpd="sng" algn="ctr">
-                      <a:solidFill>
-                        <a:srgbClr val="E0E0E0"/>
-                      </a:solidFill>
-                      <a:prstDash val="solid"/>
-                      <a:round/>
-                      <a:headEnd type="none" w="med" len="med"/>
-                      <a:tailEnd type="none" w="med" len="med"/>
-                    </a:lnR>
-                    <a:lnT w="6350" cap="flat" cmpd="sng" algn="ctr">
-                      <a:solidFill>
-                        <a:srgbClr val="E0E0E0"/>
-                      </a:solidFill>
-                      <a:prstDash val="solid"/>
-                      <a:round/>
-                      <a:headEnd type="none" w="med" len="med"/>
-                      <a:tailEnd type="none" w="med" len="med"/>
-                    </a:lnT>
-                    <a:lnB w="6350" cap="flat" cmpd="sng" algn="ctr">
-                      <a:solidFill>
-                        <a:srgbClr val="E0E0E0"/>
-                      </a:solidFill>
-                      <a:prstDash val="solid"/>
-                      <a:round/>
-                      <a:headEnd type="none" w="med" len="med"/>
-                      <a:tailEnd type="none" w="med" len="med"/>
-                    </a:lnB>
-                    <a:solidFill>
-                      <a:srgbClr val="FFFFFF"/>
-                    </a:solidFill>
-                  </a:tcPr>
-                </a:tc>
-                <a:tc>
-                  <a:txBody>
-                    <a:bodyPr/>
-                    <a:lstStyle/>
-                    <a:p>
-                      <a:pPr marL="0" indent="0" eaLnBrk="0">
-                        <a:buNone/>
-                      </a:pPr>
-                      <a:r>
-                        <a:rPr lang="en-US" sz="1300" dirty="0">
-                          <a:solidFill>
-                            <a:srgbClr val="1D1D1F"/>
-                          </a:solidFill>
-                          <a:latin typeface="나눔스퀘어 네오 Regular" pitchFamily="34" charset="0"/>
-                          <a:ea typeface="나눔스퀘어 네오 Regular" pitchFamily="34" charset="-122"/>
-                          <a:cs typeface="나눔스퀘어 네오 Regular" pitchFamily="34" charset="-120"/>
-                        </a:rPr>
-                        <a:t>8.97 px</a:t>
-                      </a:r>
-                      <a:endParaRPr lang="en-US" sz="1300" dirty="0">
-                        <a:latin typeface="나눔스퀘어 네오 Regular" charset="0"/>
-                        <a:ea typeface="나눔스퀘어 네오 Regular" charset="0"/>
-                        <a:cs typeface="나눔스퀘어 네오 Regular" charset="0"/>
-                      </a:endParaRPr>
-                    </a:p>
-                  </a:txBody>
-                  <a:tcPr marL="73152" marR="73152" marT="36576" marB="36576" anchor="ctr">
-                    <a:lnL w="6350" cap="flat" cmpd="sng" algn="ctr">
-                      <a:solidFill>
-                        <a:srgbClr val="E0E0E0"/>
-                      </a:solidFill>
-                      <a:prstDash val="solid"/>
-                      <a:round/>
-                      <a:headEnd type="none" w="med" len="med"/>
-                      <a:tailEnd type="none" w="med" len="med"/>
-                    </a:lnL>
-                    <a:lnR w="6350" cap="flat" cmpd="sng" algn="ctr">
-                      <a:solidFill>
-                        <a:srgbClr val="E0E0E0"/>
-                      </a:solidFill>
-                      <a:prstDash val="solid"/>
-                      <a:round/>
-                      <a:headEnd type="none" w="med" len="med"/>
-                      <a:tailEnd type="none" w="med" len="med"/>
-                    </a:lnR>
-                    <a:lnT w="6350" cap="flat" cmpd="sng" algn="ctr">
-                      <a:solidFill>
-                        <a:srgbClr val="E0E0E0"/>
-                      </a:solidFill>
-                      <a:prstDash val="solid"/>
-                      <a:round/>
-                      <a:headEnd type="none" w="med" len="med"/>
-                      <a:tailEnd type="none" w="med" len="med"/>
-                    </a:lnT>
-                    <a:lnB w="6350" cap="flat" cmpd="sng" algn="ctr">
-                      <a:solidFill>
-                        <a:srgbClr val="E0E0E0"/>
-                      </a:solidFill>
-                      <a:prstDash val="solid"/>
-                      <a:round/>
-                      <a:headEnd type="none" w="med" len="med"/>
-                      <a:tailEnd type="none" w="med" len="med"/>
-                    </a:lnB>
-                    <a:solidFill>
-                      <a:srgbClr val="FFFFFF"/>
-                    </a:solidFill>
-                  </a:tcPr>
-                </a:tc>
-                <a:extLst>
-                  <a:ext uri="{0D108BD9-81ED-4DB2-BD59-A6C34878D82A}">
-                    <a16:rowId xmlns:a16="http://schemas.microsoft.com/office/drawing/2014/main" val="10003"/>
-                  </a:ext>
-                </a:extLst>
-              </a:tr>
-              <a:tr h="512064">
-                <a:tc>
-                  <a:txBody>
-                    <a:bodyPr/>
-                    <a:lstStyle/>
-                    <a:p>
-                      <a:pPr marL="0" indent="0" eaLnBrk="0">
-                        <a:buNone/>
-                      </a:pPr>
-                      <a:r>
-                        <a:rPr lang="en-US" sz="1300" dirty="0">
-                          <a:solidFill>
-                            <a:srgbClr val="1D1D1F"/>
-                          </a:solidFill>
-                          <a:latin typeface="나눔스퀘어 네오 Regular" pitchFamily="34" charset="0"/>
-                          <a:ea typeface="나눔스퀘어 네오 Regular" pitchFamily="34" charset="-122"/>
-                          <a:cs typeface="나눔스퀘어 네오 Regular" pitchFamily="34" charset="-120"/>
-                        </a:rPr>
-                        <a:t>자기보정 (상수 0개, float 모델)</a:t>
-                      </a:r>
-                      <a:endParaRPr lang="en-US" sz="1300" dirty="0">
-                        <a:latin typeface="나눔스퀘어 네오 Regular" charset="0"/>
-                        <a:ea typeface="나눔스퀘어 네오 Regular" charset="0"/>
-                        <a:cs typeface="나눔스퀘어 네오 Regular" charset="0"/>
-                      </a:endParaRPr>
-                    </a:p>
-                  </a:txBody>
-                  <a:tcPr marL="73152" marR="73152" marT="36576" marB="36576" anchor="ctr">
-                    <a:lnL w="6350" cap="flat" cmpd="sng" algn="ctr">
-                      <a:solidFill>
-                        <a:srgbClr val="E0E0E0"/>
-                      </a:solidFill>
-                      <a:prstDash val="solid"/>
-                      <a:round/>
-                      <a:headEnd type="none" w="med" len="med"/>
-                      <a:tailEnd type="none" w="med" len="med"/>
-                    </a:lnL>
-                    <a:lnR w="6350" cap="flat" cmpd="sng" algn="ctr">
-                      <a:solidFill>
-                        <a:srgbClr val="E0E0E0"/>
-                      </a:solidFill>
-                      <a:prstDash val="solid"/>
-                      <a:round/>
-                      <a:headEnd type="none" w="med" len="med"/>
-                      <a:tailEnd type="none" w="med" len="med"/>
-                    </a:lnR>
-                    <a:lnT w="6350" cap="flat" cmpd="sng" algn="ctr">
-                      <a:solidFill>
-                        <a:srgbClr val="E0E0E0"/>
-                      </a:solidFill>
-                      <a:prstDash val="solid"/>
-                      <a:round/>
-                      <a:headEnd type="none" w="med" len="med"/>
-                      <a:tailEnd type="none" w="med" len="med"/>
-                    </a:lnT>
-                    <a:lnB w="6350" cap="flat" cmpd="sng" algn="ctr">
-                      <a:solidFill>
-                        <a:srgbClr val="E0E0E0"/>
-                      </a:solidFill>
-                      <a:prstDash val="solid"/>
-                      <a:round/>
-                      <a:headEnd type="none" w="med" len="med"/>
-                      <a:tailEnd type="none" w="med" len="med"/>
-                    </a:lnB>
-                    <a:solidFill>
-                      <a:srgbClr val="FFFFFF"/>
-                    </a:solidFill>
-                  </a:tcPr>
-                </a:tc>
-                <a:tc>
-                  <a:txBody>
-                    <a:bodyPr/>
-                    <a:lstStyle/>
-                    <a:p>
-                      <a:pPr marL="0" indent="0" eaLnBrk="0">
-                        <a:buNone/>
-                      </a:pPr>
-                      <a:r>
-                        <a:rPr lang="en-US" sz="1300" dirty="0">
-                          <a:solidFill>
-                            <a:srgbClr val="1D1D1F"/>
-                          </a:solidFill>
-                          <a:latin typeface="나눔스퀘어 네오 Bold" pitchFamily="34" charset="0"/>
-                          <a:ea typeface="나눔스퀘어 네오 Bold" pitchFamily="34" charset="-122"/>
-                          <a:cs typeface="나눔스퀘어 네오 Bold" pitchFamily="34" charset="-120"/>
-                        </a:rPr>
-                        <a:t>0.67°</a:t>
-                      </a:r>
-                      <a:endParaRPr lang="en-US" sz="1300" dirty="0">
-                        <a:latin typeface="나눔스퀘어 네오 Regular" charset="0"/>
-                        <a:ea typeface="나눔스퀘어 네오 Regular" charset="0"/>
-                        <a:cs typeface="나눔스퀘어 네오 Regular" charset="0"/>
-                      </a:endParaRPr>
-                    </a:p>
-                  </a:txBody>
-                  <a:tcPr marL="73152" marR="73152" marT="36576" marB="36576" anchor="ctr">
-                    <a:lnL w="6350" cap="flat" cmpd="sng" algn="ctr">
-                      <a:solidFill>
-                        <a:srgbClr val="E0E0E0"/>
-                      </a:solidFill>
-                      <a:prstDash val="solid"/>
-                      <a:round/>
-                      <a:headEnd type="none" w="med" len="med"/>
-                      <a:tailEnd type="none" w="med" len="med"/>
-                    </a:lnL>
-                    <a:lnR w="6350" cap="flat" cmpd="sng" algn="ctr">
-                      <a:solidFill>
-                        <a:srgbClr val="E0E0E0"/>
-                      </a:solidFill>
-                      <a:prstDash val="solid"/>
-                      <a:round/>
-                      <a:headEnd type="none" w="med" len="med"/>
-                      <a:tailEnd type="none" w="med" len="med"/>
-                    </a:lnR>
-                    <a:lnT w="6350" cap="flat" cmpd="sng" algn="ctr">
-                      <a:solidFill>
-                        <a:srgbClr val="E0E0E0"/>
-                      </a:solidFill>
-                      <a:prstDash val="solid"/>
-                      <a:round/>
-                      <a:headEnd type="none" w="med" len="med"/>
-                      <a:tailEnd type="none" w="med" len="med"/>
-                    </a:lnT>
-                    <a:lnB w="6350" cap="flat" cmpd="sng" algn="ctr">
-                      <a:solidFill>
-                        <a:srgbClr val="E0E0E0"/>
-                      </a:solidFill>
-                      <a:prstDash val="solid"/>
-                      <a:round/>
-                      <a:headEnd type="none" w="med" len="med"/>
-                      <a:tailEnd type="none" w="med" len="med"/>
-                    </a:lnB>
-                    <a:solidFill>
-                      <a:srgbClr val="FFFFFF"/>
-                    </a:solidFill>
-                  </a:tcPr>
-                </a:tc>
-                <a:tc>
-                  <a:txBody>
-                    <a:bodyPr/>
-                    <a:lstStyle/>
-                    <a:p>
-                      <a:pPr marL="0" indent="0" eaLnBrk="0">
-                        <a:buNone/>
-                      </a:pPr>
-                      <a:r>
-                        <a:rPr lang="en-US" sz="1300" dirty="0">
-                          <a:solidFill>
-                            <a:srgbClr val="1D1D1F"/>
-                          </a:solidFill>
-                          <a:latin typeface="나눔스퀘어 네오 Regular" pitchFamily="34" charset="0"/>
-                          <a:ea typeface="나눔스퀘어 네오 Regular" pitchFamily="34" charset="-122"/>
-                          <a:cs typeface="나눔스퀘어 네오 Regular" pitchFamily="34" charset="-120"/>
-                        </a:rPr>
-                        <a:t>13.9 px (키프레임 8장 추가 시 8.0 px)</a:t>
-                      </a:r>
-                      <a:endParaRPr lang="en-US" sz="1300" dirty="0">
-                        <a:latin typeface="나눔스퀘어 네오 Regular" charset="0"/>
-                        <a:ea typeface="나눔스퀘어 네오 Regular" charset="0"/>
-                        <a:cs typeface="나눔스퀘어 네오 Regular" charset="0"/>
-                      </a:endParaRPr>
-                    </a:p>
-                  </a:txBody>
-                  <a:tcPr marL="73152" marR="73152" marT="36576" marB="36576" anchor="ctr">
-                    <a:lnL w="6350" cap="flat" cmpd="sng" algn="ctr">
-                      <a:solidFill>
-                        <a:srgbClr val="E0E0E0"/>
-                      </a:solidFill>
-                      <a:prstDash val="solid"/>
-                      <a:round/>
-                      <a:headEnd type="none" w="med" len="med"/>
-                      <a:tailEnd type="none" w="med" len="med"/>
-                    </a:lnL>
-                    <a:lnR w="6350" cap="flat" cmpd="sng" algn="ctr">
-                      <a:solidFill>
-                        <a:srgbClr val="E0E0E0"/>
-                      </a:solidFill>
-                      <a:prstDash val="solid"/>
-                      <a:round/>
-                      <a:headEnd type="none" w="med" len="med"/>
-                      <a:tailEnd type="none" w="med" len="med"/>
-                    </a:lnR>
-                    <a:lnT w="6350" cap="flat" cmpd="sng" algn="ctr">
-                      <a:solidFill>
-                        <a:srgbClr val="E0E0E0"/>
-                      </a:solidFill>
-                      <a:prstDash val="solid"/>
-                      <a:round/>
-                      <a:headEnd type="none" w="med" len="med"/>
-                      <a:tailEnd type="none" w="med" len="med"/>
-                    </a:lnT>
-                    <a:lnB w="6350" cap="flat" cmpd="sng" algn="ctr">
-                      <a:solidFill>
-                        <a:srgbClr val="E0E0E0"/>
-                      </a:solidFill>
-                      <a:prstDash val="solid"/>
-                      <a:round/>
-                      <a:headEnd type="none" w="med" len="med"/>
-                      <a:tailEnd type="none" w="med" len="med"/>
-                    </a:lnB>
-                    <a:solidFill>
-                      <a:srgbClr val="FFFFFF"/>
-                    </a:solidFill>
-                  </a:tcPr>
-                </a:tc>
-                <a:extLst>
-                  <a:ext uri="{0D108BD9-81ED-4DB2-BD59-A6C34878D82A}">
-                    <a16:rowId xmlns:a16="http://schemas.microsoft.com/office/drawing/2014/main" val="10004"/>
-                  </a:ext>
-                </a:extLst>
-              </a:tr>
-              <a:tr h="512064">
-                <a:tc>
-                  <a:txBody>
-                    <a:bodyPr/>
-                    <a:lstStyle/>
-                    <a:p>
-                      <a:pPr marL="0" indent="0" eaLnBrk="0">
-                        <a:buNone/>
-                      </a:pPr>
-                      <a:r>
-                        <a:rPr lang="en-US" sz="1300" dirty="0">
-                          <a:solidFill>
-                            <a:srgbClr val="1D1D1F"/>
-                          </a:solidFill>
-                          <a:latin typeface="나눔스퀘어 네오 Regular" pitchFamily="34" charset="0"/>
-                          <a:ea typeface="나눔스퀘어 네오 Regular" pitchFamily="34" charset="-122"/>
-                          <a:cs typeface="나눔스퀘어 네오 Regular" pitchFamily="34" charset="-120"/>
-                        </a:rPr>
-                        <a:t>정수 기준모델 (상수 고정)</a:t>
-                      </a:r>
-                      <a:endParaRPr lang="en-US" sz="1300" dirty="0">
-                        <a:latin typeface="나눔스퀘어 네오 Regular" charset="0"/>
-                        <a:ea typeface="나눔스퀘어 네오 Regular" charset="0"/>
-                        <a:cs typeface="나눔스퀘어 네오 Regular" charset="0"/>
-                      </a:endParaRPr>
-                    </a:p>
-                  </a:txBody>
-                  <a:tcPr marL="73152" marR="73152" marT="36576" marB="36576" anchor="ctr">
-                    <a:lnL w="6350" cap="flat" cmpd="sng" algn="ctr">
-                      <a:solidFill>
-                        <a:srgbClr val="E0E0E0"/>
-                      </a:solidFill>
-                      <a:prstDash val="solid"/>
-                      <a:round/>
-                      <a:headEnd type="none" w="med" len="med"/>
-                      <a:tailEnd type="none" w="med" len="med"/>
-                    </a:lnL>
-                    <a:lnR w="6350" cap="flat" cmpd="sng" algn="ctr">
-                      <a:solidFill>
-                        <a:srgbClr val="E0E0E0"/>
-                      </a:solidFill>
-                      <a:prstDash val="solid"/>
-                      <a:round/>
-                      <a:headEnd type="none" w="med" len="med"/>
-                      <a:tailEnd type="none" w="med" len="med"/>
-                    </a:lnR>
-                    <a:lnT w="6350" cap="flat" cmpd="sng" algn="ctr">
-                      <a:solidFill>
-                        <a:srgbClr val="E0E0E0"/>
-                      </a:solidFill>
-                      <a:prstDash val="solid"/>
-                      <a:round/>
-                      <a:headEnd type="none" w="med" len="med"/>
-                      <a:tailEnd type="none" w="med" len="med"/>
-                    </a:lnT>
-                    <a:lnB w="6350" cap="flat" cmpd="sng" algn="ctr">
-                      <a:solidFill>
-                        <a:srgbClr val="E0E0E0"/>
-                      </a:solidFill>
-                      <a:prstDash val="solid"/>
-                      <a:round/>
-                      <a:headEnd type="none" w="med" len="med"/>
-                      <a:tailEnd type="none" w="med" len="med"/>
-                    </a:lnB>
-                    <a:solidFill>
-                      <a:srgbClr val="FFFFFF"/>
-                    </a:solidFill>
-                  </a:tcPr>
-                </a:tc>
-                <a:tc>
-                  <a:txBody>
-                    <a:bodyPr/>
-                    <a:lstStyle/>
-                    <a:p>
-                      <a:pPr marL="0" indent="0" eaLnBrk="0">
-                        <a:buNone/>
-                      </a:pPr>
-                      <a:r>
-                        <a:rPr lang="en-US" sz="1300" dirty="0">
-                          <a:solidFill>
-                            <a:srgbClr val="1D1D1F"/>
-                          </a:solidFill>
-                          <a:latin typeface="나눔스퀘어 네오 Regular" pitchFamily="34" charset="0"/>
-                          <a:ea typeface="나눔스퀘어 네오 Regular" pitchFamily="34" charset="-122"/>
-                          <a:cs typeface="나눔스퀘어 네오 Regular" pitchFamily="34" charset="-120"/>
-                        </a:rPr>
-                        <a:t>0.46°</a:t>
-                      </a:r>
-                      <a:endParaRPr lang="en-US" sz="1300" dirty="0">
-                        <a:latin typeface="나눔스퀘어 네오 Regular" charset="0"/>
-                        <a:ea typeface="나눔스퀘어 네오 Regular" charset="0"/>
-                        <a:cs typeface="나눔스퀘어 네오 Regular" charset="0"/>
-                      </a:endParaRPr>
-                    </a:p>
-                  </a:txBody>
-                  <a:tcPr marL="73152" marR="73152" marT="36576" marB="36576" anchor="ctr">
-                    <a:lnL w="6350" cap="flat" cmpd="sng" algn="ctr">
-                      <a:solidFill>
-                        <a:srgbClr val="E0E0E0"/>
-                      </a:solidFill>
-                      <a:prstDash val="solid"/>
-                      <a:round/>
-                      <a:headEnd type="none" w="med" len="med"/>
-                      <a:tailEnd type="none" w="med" len="med"/>
-                    </a:lnL>
-                    <a:lnR w="6350" cap="flat" cmpd="sng" algn="ctr">
-                      <a:solidFill>
-                        <a:srgbClr val="E0E0E0"/>
-                      </a:solidFill>
-                      <a:prstDash val="solid"/>
-                      <a:round/>
-                      <a:headEnd type="none" w="med" len="med"/>
-                      <a:tailEnd type="none" w="med" len="med"/>
-                    </a:lnR>
-                    <a:lnT w="6350" cap="flat" cmpd="sng" algn="ctr">
-                      <a:solidFill>
-                        <a:srgbClr val="E0E0E0"/>
-                      </a:solidFill>
-                      <a:prstDash val="solid"/>
-                      <a:round/>
-                      <a:headEnd type="none" w="med" len="med"/>
-                      <a:tailEnd type="none" w="med" len="med"/>
-                    </a:lnT>
-                    <a:lnB w="6350" cap="flat" cmpd="sng" algn="ctr">
-                      <a:solidFill>
-                        <a:srgbClr val="E0E0E0"/>
-                      </a:solidFill>
-                      <a:prstDash val="solid"/>
-                      <a:round/>
-                      <a:headEnd type="none" w="med" len="med"/>
-                      <a:tailEnd type="none" w="med" len="med"/>
-                    </a:lnB>
-                    <a:solidFill>
-                      <a:srgbClr val="FFFFFF"/>
-                    </a:solidFill>
-                  </a:tcPr>
-                </a:tc>
-                <a:tc>
-                  <a:txBody>
-                    <a:bodyPr/>
-                    <a:lstStyle/>
-                    <a:p>
-                      <a:pPr marL="0" indent="0" eaLnBrk="0">
-                        <a:buNone/>
-                      </a:pPr>
-                      <a:r>
-                        <a:rPr lang="en-US" sz="1300" dirty="0">
-                          <a:solidFill>
-                            <a:srgbClr val="1D1D1F"/>
-                          </a:solidFill>
-                          <a:latin typeface="나눔스퀘어 네오 Regular" pitchFamily="34" charset="0"/>
-                          <a:ea typeface="나눔스퀘어 네오 Regular" pitchFamily="34" charset="-122"/>
-                          <a:cs typeface="나눔스퀘어 네오 Regular" pitchFamily="34" charset="-120"/>
-                        </a:rPr>
-                        <a:t>12.0 px</a:t>
-                      </a:r>
-                      <a:endParaRPr lang="en-US" sz="1300" dirty="0">
-                        <a:latin typeface="나눔스퀘어 네오 Regular" charset="0"/>
-                        <a:ea typeface="나눔스퀘어 네오 Regular" charset="0"/>
-                        <a:cs typeface="나눔스퀘어 네오 Regular" charset="0"/>
-                      </a:endParaRPr>
-                    </a:p>
-                  </a:txBody>
-                  <a:tcPr marL="73152" marR="73152" marT="36576" marB="36576" anchor="ctr">
-                    <a:lnL w="6350" cap="flat" cmpd="sng" algn="ctr">
-                      <a:solidFill>
-                        <a:srgbClr val="E0E0E0"/>
-                      </a:solidFill>
-                      <a:prstDash val="solid"/>
-                      <a:round/>
-                      <a:headEnd type="none" w="med" len="med"/>
-                      <a:tailEnd type="none" w="med" len="med"/>
-                    </a:lnL>
-                    <a:lnR w="6350" cap="flat" cmpd="sng" algn="ctr">
-                      <a:solidFill>
-                        <a:srgbClr val="E0E0E0"/>
-                      </a:solidFill>
-                      <a:prstDash val="solid"/>
-                      <a:round/>
-                      <a:headEnd type="none" w="med" len="med"/>
-                      <a:tailEnd type="none" w="med" len="med"/>
-                    </a:lnR>
-                    <a:lnT w="6350" cap="flat" cmpd="sng" algn="ctr">
-                      <a:solidFill>
-                        <a:srgbClr val="E0E0E0"/>
-                      </a:solidFill>
-                      <a:prstDash val="solid"/>
-                      <a:round/>
-                      <a:headEnd type="none" w="med" len="med"/>
-                      <a:tailEnd type="none" w="med" len="med"/>
-                    </a:lnT>
-                    <a:lnB w="6350" cap="flat" cmpd="sng" algn="ctr">
-                      <a:solidFill>
-                        <a:srgbClr val="E0E0E0"/>
-                      </a:solidFill>
-                      <a:prstDash val="solid"/>
-                      <a:round/>
-                      <a:headEnd type="none" w="med" len="med"/>
-                      <a:tailEnd type="none" w="med" len="med"/>
-                    </a:lnB>
-                    <a:solidFill>
-                      <a:srgbClr val="FFFFFF"/>
-                    </a:solidFill>
-                  </a:tcPr>
-                </a:tc>
-                <a:extLst>
-                  <a:ext uri="{0D108BD9-81ED-4DB2-BD59-A6C34878D82A}">
-                    <a16:rowId xmlns:a16="http://schemas.microsoft.com/office/drawing/2014/main" val="10005"/>
-                  </a:ext>
-                </a:extLst>
-              </a:tr>
-            </a:tbl>
-          </a:graphicData>
-        </a:graphic>
-      </p:graphicFrame>
+      <p:pic>
+        <p:nvPicPr>
+          <p:cNvPr id="4" name="Image 0" descr="C:\SNU\포트폴리오\전국AI반도체경진대회\submission\figs\chip_roll_world.png"/>
+          <p:cNvPicPr>
+            <a:picLocks noChangeAspect="1"/>
+          </p:cNvPicPr>
+          <p:nvPr/>
+        </p:nvPicPr>
+        <p:blipFill>
+          <a:blip r:embed="rId3"/>
+          <a:stretch>
+            <a:fillRect/>
+          </a:stretch>
+        </p:blipFill>
+        <p:spPr>
+          <a:xfrm>
+            <a:off x="868680" y="1234440"/>
+            <a:ext cx="10424160" cy="3895344"/>
+          </a:xfrm>
+          <a:prstGeom prst="rect">
+            <a:avLst/>
+          </a:prstGeom>
+        </p:spPr>
+      </p:pic>
       <p:sp>
         <p:nvSpPr>
           <p:cNvPr id="5" name="Shape 1"/>
@@ -32111,12 +30835,12 @@
         </p:nvSpPr>
         <p:spPr>
           <a:xfrm>
-            <a:off x="8321040" y="1417320"/>
-            <a:ext cx="3291840" cy="2011680"/>
+            <a:off x="548640" y="5212080"/>
+            <a:ext cx="5394960" cy="1143000"/>
           </a:xfrm>
           <a:prstGeom prst="roundRect">
             <a:avLst>
-              <a:gd name="adj" fmla="val 5455"/>
+              <a:gd name="adj" fmla="val 9600"/>
             </a:avLst>
           </a:prstGeom>
           <a:solidFill>
@@ -32138,8 +30862,8 @@
         </p:nvSpPr>
         <p:spPr>
           <a:xfrm>
-            <a:off x="8503920" y="1554480"/>
-            <a:ext cx="2926080" cy="365760"/>
+            <a:off x="731520" y="5349240"/>
+            <a:ext cx="5029200" cy="365760"/>
           </a:xfrm>
           <a:prstGeom prst="rect">
             <a:avLst/>
@@ -32163,7 +30887,7 @@
                 <a:ea typeface="나눔스퀘어 네오 Bold" pitchFamily="34" charset="-122"/>
                 <a:cs typeface="나눔스퀘어 네오 Bold" pitchFamily="34" charset="-120"/>
               </a:rPr>
-              <a:t>자기보정 방식</a:t>
+              <a:t>무엇을 본 것인가</a:t>
             </a:r>
             <a:endParaRPr lang="en-US" sz="1600" dirty="0"/>
           </a:p>
@@ -32177,8 +30901,8 @@
         </p:nvSpPr>
         <p:spPr>
           <a:xfrm>
-            <a:off x="8503920" y="1965960"/>
-            <a:ext cx="2926080" cy="1325880"/>
+            <a:off x="731520" y="5760720"/>
+            <a:ext cx="5029200" cy="457200"/>
           </a:xfrm>
           <a:prstGeom prst="rect">
             <a:avLst/>
@@ -32202,7 +30926,7 @@
                 <a:ea typeface="나눔스퀘어 네오 Regular" pitchFamily="34" charset="-122"/>
                 <a:cs typeface="나눔스퀘어 네오 Regular" pitchFamily="34" charset="-120"/>
               </a:rPr>
-              <a:t>처음 몇 창을 3자유도로 돌려 (θ, tx, ty)를 모으고, t = (R(θ)−I)·u 를 최소제곱으로 맞춰 피벗 u를 구함. 설명도 r²가 0.9 이상이면 1자유도로 고정.</a:t>
+              <a:t>실제 DELTA roll 녹화 32프레임 → 칩 RTL 시뮬레이션이 쓴 월드 메모리 내용(8 px 셀, 4비트).</a:t>
             </a:r>
             <a:endParaRPr lang="en-US" sz="1200" dirty="0"/>
           </a:p>
@@ -32216,12 +30940,12 @@
         </p:nvSpPr>
         <p:spPr>
           <a:xfrm>
-            <a:off x="8321040" y="3566160"/>
-            <a:ext cx="3291840" cy="2743200"/>
+            <a:off x="6217920" y="5212080"/>
+            <a:ext cx="5394960" cy="1143000"/>
           </a:xfrm>
           <a:prstGeom prst="roundRect">
             <a:avLst>
-              <a:gd name="adj" fmla="val 4000"/>
+              <a:gd name="adj" fmla="val 9600"/>
             </a:avLst>
           </a:prstGeom>
           <a:solidFill>
@@ -32243,8 +30967,8 @@
         </p:nvSpPr>
         <p:spPr>
           <a:xfrm>
-            <a:off x="8503920" y="3703320"/>
-            <a:ext cx="2926080" cy="365760"/>
+            <a:off x="6400800" y="5349240"/>
+            <a:ext cx="5029200" cy="365760"/>
           </a:xfrm>
           <a:prstGeom prst="rect">
             <a:avLst/>
@@ -32262,13 +30986,13 @@
             <a:r>
               <a:rPr lang="en-US" sz="1600" dirty="0">
                 <a:solidFill>
-                  <a:srgbClr val="1D1D1F"/>
+                  <a:srgbClr val="0066CC"/>
                 </a:solidFill>
                 <a:latin typeface="나눔스퀘어 네오 Bold" pitchFamily="34" charset="0"/>
                 <a:ea typeface="나눔스퀘어 네오 Bold" pitchFamily="34" charset="-122"/>
                 <a:cs typeface="나눔스퀘어 네오 Bold" pitchFamily="34" charset="-120"/>
               </a:rPr>
-              <a:t>한계 (현수 문서)</a:t>
+              <a:t>읽는 법</a:t>
             </a:r>
             <a:endParaRPr lang="en-US" sz="1600" dirty="0"/>
           </a:p>
@@ -32276,14 +31000,14 @@
       </p:sp>
       <p:sp>
         <p:nvSpPr>
-          <p:cNvPr id="3" name="Text 6"/>
+          <p:cNvPr id="10" name="Text 6"/>
           <p:cNvSpPr txBox="1"/>
           <p:nvPr/>
         </p:nvSpPr>
         <p:spPr>
           <a:xfrm>
-            <a:off x="8503920" y="4114800"/>
-            <a:ext cx="2926080" cy="2057400"/>
+            <a:off x="6400800" y="5760720"/>
+            <a:ext cx="5029200" cy="457200"/>
           </a:xfrm>
           <a:prstGeom prst="rect">
             <a:avLst/>
@@ -32307,114 +31031,9 @@
                 <a:ea typeface="나눔스퀘어 네오 Regular" pitchFamily="34" charset="-122"/>
                 <a:cs typeface="나눔스퀘어 네오 Regular" pitchFamily="34" charset="-120"/>
               </a:rPr>
-              <a:t>pan은 1.6초 동안 θ가 거의 안 변해 R을 못 구해 13.9 px에 머문다.</a:t>
+              <a:t>왼쪽은 같은 이벤트를 회전 보정 없이 쌓은 것. 가운데·오른쪽은 칩 출력으로, 보정 피벗 설정만 다르다.</a:t>
             </a:r>
             <a:endParaRPr lang="en-US" sz="1200" dirty="0"/>
-          </a:p>
-        </p:txBody>
-      </p:sp>
-      <p:sp>
-        <p:nvSpPr>
-          <p:cNvPr id="11" name="Shape 7"/>
-          <p:cNvSpPr/>
-          <p:nvPr/>
-        </p:nvSpPr>
-        <p:spPr>
-          <a:xfrm>
-            <a:off x="548640" y="4572000"/>
-            <a:ext cx="7498080" cy="1737360"/>
-          </a:xfrm>
-          <a:prstGeom prst="roundRect">
-            <a:avLst>
-              <a:gd name="adj" fmla="val 6316"/>
-            </a:avLst>
-          </a:prstGeom>
-          <a:solidFill>
-            <a:srgbClr val="F5F5F7"/>
-          </a:solidFill>
-          <a:ln w="9525">
-            <a:solidFill>
-              <a:srgbClr val="E0E0E0"/>
-            </a:solidFill>
-            <a:prstDash val="solid"/>
-          </a:ln>
-        </p:spPr>
-      </p:sp>
-      <p:sp>
-        <p:nvSpPr>
-          <p:cNvPr id="12" name="Text 8"/>
-          <p:cNvSpPr txBox="1"/>
-          <p:nvPr/>
-        </p:nvSpPr>
-        <p:spPr>
-          <a:xfrm>
-            <a:off x="731520" y="4709160"/>
-            <a:ext cx="7132320" cy="365760"/>
-          </a:xfrm>
-          <a:prstGeom prst="rect">
-            <a:avLst/>
-          </a:prstGeom>
-          <a:noFill/>
-          <a:ln/>
-        </p:spPr>
-        <p:txBody>
-          <a:bodyPr wrap="square" lIns="0" tIns="0" rIns="0" bIns="0" rtlCol="0" anchor="t"/>
-          <a:lstStyle/>
-          <a:p>
-            <a:pPr marL="0" indent="0" eaLnBrk="0">
-              <a:buNone/>
-            </a:pPr>
-            <a:r>
-              <a:rPr lang="en-US" sz="1600" dirty="0">
-                <a:solidFill>
-                  <a:srgbClr val="0066CC"/>
-                </a:solidFill>
-                <a:latin typeface="나눔스퀘어 네오 Bold" pitchFamily="34" charset="0"/>
-                <a:ea typeface="나눔스퀘어 네오 Bold" pitchFamily="34" charset="-122"/>
-                <a:cs typeface="나눔스퀘어 네오 Bold" pitchFamily="34" charset="-120"/>
-              </a:rPr>
-              <a:t>의미</a:t>
-            </a:r>
-            <a:endParaRPr lang="en-US" sz="1600" dirty="0"/>
-          </a:p>
-        </p:txBody>
-      </p:sp>
-      <p:sp>
-        <p:nvSpPr>
-          <p:cNvPr id="13" name="Text 9"/>
-          <p:cNvSpPr txBox="1"/>
-          <p:nvPr/>
-        </p:nvSpPr>
-        <p:spPr>
-          <a:xfrm>
-            <a:off x="731520" y="5120640"/>
-            <a:ext cx="7132320" cy="1051560"/>
-          </a:xfrm>
-          <a:prstGeom prst="rect">
-            <a:avLst/>
-          </a:prstGeom>
-          <a:noFill/>
-          <a:ln/>
-        </p:spPr>
-        <p:txBody>
-          <a:bodyPr wrap="square" lIns="0" tIns="0" rIns="0" bIns="0" rtlCol="0" anchor="t"/>
-          <a:lstStyle/>
-          <a:p>
-            <a:pPr marL="0" indent="0" eaLnBrk="0">
-              <a:buNone/>
-            </a:pPr>
-            <a:r>
-              <a:rPr lang="en-US" sz="1400" dirty="0">
-                <a:solidFill>
-                  <a:srgbClr val="1D1D1F"/>
-                </a:solidFill>
-                <a:latin typeface="나눔스퀘어 네오 Regular" pitchFamily="34" charset="0"/>
-                <a:ea typeface="나눔스퀘어 네오 Regular" pitchFamily="34" charset="-122"/>
-                <a:cs typeface="나눔스퀘어 네오 Regular" pitchFamily="34" charset="-120"/>
-              </a:rPr>
-              <a:t>녹화에 맞춘 상수를 "데이터에서 구하는 알고리즘"으로 바꾸면 붕괴(61°)가 사라진다. 대가는 roll에서 0.2° 정도의 정확도다.</a:t>
-            </a:r>
-            <a:endParaRPr lang="en-US" sz="1400" dirty="0"/>
           </a:p>
         </p:txBody>
       </p:sp>

--- a/submission/REDRED_2차_발표자료_칩S.pptx
+++ b/submission/REDRED_2차_발표자료_칩S.pptx
@@ -173,6 +173,1185 @@
                 <a:ea typeface="나눔스퀘어 네오 Regular"/>
                 <a:cs typeface="나눔스퀘어 네오 Regular"/>
               </a:rPr>
+              <a:t>roll 각도 오차 (°): 피벗 위치에 따른 변화</a:t>
+            </a:r>
+          </a:p>
+        </c:rich>
+      </c:tx>
+      <c:overlay val="0"/>
+    </c:title>
+    <c:autoTitleDeleted val="0"/>
+    <c:plotArea>
+      <c:layout/>
+      <c:barChart>
+        <c:barDir val="col"/>
+        <c:grouping val="clustered"/>
+        <c:varyColors val="0"/>
+        <c:ser>
+          <c:idx val="0"/>
+          <c:order val="0"/>
+          <c:tx>
+            <c:strRef>
+              <c:f>Sheet1!$B$1</c:f>
+              <c:strCache>
+                <c:ptCount val="1"/>
+                <c:pt idx="0">
+                  <c:v>roll 각도 오차</c:v>
+                </c:pt>
+              </c:strCache>
+            </c:strRef>
+          </c:tx>
+          <c:spPr>
+            <a:solidFill>
+              <a:srgbClr val="0066CC"/>
+            </a:solidFill>
+            <a:effectLst/>
+          </c:spPr>
+          <c:invertIfNegative val="0"/>
+          <c:dLbls>
+            <c:numFmt formatCode="0.000" sourceLinked="0"/>
+            <c:spPr>
+              <a:noFill/>
+              <a:ln>
+                <a:noFill/>
+              </a:ln>
+              <a:effectLst/>
+            </c:spPr>
+            <c:txPr>
+              <a:bodyPr/>
+              <a:lstStyle/>
+              <a:p>
+                <a:pPr>
+                  <a:defRPr sz="1200" b="0" i="0" u="none" strike="noStrike">
+                    <a:solidFill>
+                      <a:srgbClr val="1D1D1F"/>
+                    </a:solidFill>
+                    <a:latin typeface="나눔스퀘어 네오 Regular"/>
+                    <a:ea typeface="나눔스퀘어 네오 Regular"/>
+                    <a:cs typeface="나눔스퀘어 네오 Regular"/>
+                  </a:defRPr>
+                </a:pPr>
+                <a:endParaRPr lang="ko-KR"/>
+              </a:p>
+            </c:txPr>
+            <c:showLegendKey val="0"/>
+            <c:showVal val="1"/>
+            <c:showCatName val="0"/>
+            <c:showSerName val="0"/>
+            <c:showPercent val="0"/>
+            <c:showBubbleSize val="0"/>
+            <c:showLeaderLines val="0"/>
+            <c:extLst>
+              <c:ext xmlns:c15="http://schemas.microsoft.com/office/drawing/2012/chart" uri="{CE6537A1-D6FC-4f65-9D91-7224C49458BB}">
+                <c15:showLeaderLines val="0"/>
+              </c:ext>
+            </c:extLst>
+          </c:dLbls>
+          <c:cat>
+            <c:strRef>
+              <c:f>Sheet1!$A$2:$A$5</c:f>
+              <c:strCache>
+                <c:ptCount val="4"/>
+                <c:pt idx="0">
+                  <c:v>구한 피벗</c:v>
+                </c:pt>
+                <c:pt idx="1">
+                  <c:v>손으로 맞춘 피벗</c:v>
+                </c:pt>
+                <c:pt idx="2">
+                  <c:v>영상 중심</c:v>
+                </c:pt>
+                <c:pt idx="3">
+                  <c:v>100 px 어긋남</c:v>
+                </c:pt>
+              </c:strCache>
+            </c:strRef>
+          </c:cat>
+          <c:val>
+            <c:numRef>
+              <c:f>Sheet1!$B$2:$B$5</c:f>
+              <c:numCache>
+                <c:formatCode>General</c:formatCode>
+                <c:ptCount val="4"/>
+                <c:pt idx="0">
+                  <c:v>0.40500000000000003</c:v>
+                </c:pt>
+                <c:pt idx="1">
+                  <c:v>0.46700000000000003</c:v>
+                </c:pt>
+                <c:pt idx="2">
+                  <c:v>0.52900000000000003</c:v>
+                </c:pt>
+                <c:pt idx="3">
+                  <c:v>6.7</c:v>
+                </c:pt>
+              </c:numCache>
+            </c:numRef>
+          </c:val>
+          <c:extLst>
+            <c:ext xmlns:c16="http://schemas.microsoft.com/office/drawing/2014/chart" uri="{C3380CC4-5D6E-409C-BE32-E72D297353CC}">
+              <c16:uniqueId val="{00000000-720F-4766-90B6-8214FFDB5133}"/>
+            </c:ext>
+          </c:extLst>
+        </c:ser>
+        <c:dLbls>
+          <c:showLegendKey val="0"/>
+          <c:showVal val="1"/>
+          <c:showCatName val="0"/>
+          <c:showSerName val="0"/>
+          <c:showPercent val="0"/>
+          <c:showBubbleSize val="0"/>
+        </c:dLbls>
+        <c:gapWidth val="60"/>
+        <c:axId val="2094734554"/>
+        <c:axId val="2094734552"/>
+      </c:barChart>
+      <c:catAx>
+        <c:axId val="2094734554"/>
+        <c:scaling>
+          <c:orientation val="minMax"/>
+        </c:scaling>
+        <c:delete val="0"/>
+        <c:axPos val="b"/>
+        <c:numFmt formatCode="General" sourceLinked="1"/>
+        <c:majorTickMark val="out"/>
+        <c:minorTickMark val="none"/>
+        <c:tickLblPos val="low"/>
+        <c:spPr>
+          <a:ln w="12700" cap="flat">
+            <a:solidFill>
+              <a:srgbClr val="888888"/>
+            </a:solidFill>
+            <a:prstDash val="solid"/>
+            <a:round/>
+          </a:ln>
+        </c:spPr>
+        <c:txPr>
+          <a:bodyPr/>
+          <a:lstStyle/>
+          <a:p>
+            <a:pPr>
+              <a:defRPr sz="1200" b="0" i="0" u="none" strike="noStrike">
+                <a:solidFill>
+                  <a:srgbClr val="1D1D1F"/>
+                </a:solidFill>
+                <a:latin typeface="나눔스퀘어 네오 Regular"/>
+                <a:ea typeface="나눔스퀘어 네오 Regular"/>
+                <a:cs typeface="나눔스퀘어 네오 Regular"/>
+              </a:defRPr>
+            </a:pPr>
+            <a:endParaRPr lang="ko-KR"/>
+          </a:p>
+        </c:txPr>
+        <c:crossAx val="2094734552"/>
+        <c:crosses val="autoZero"/>
+        <c:auto val="1"/>
+        <c:lblAlgn val="ctr"/>
+        <c:lblOffset val="100"/>
+        <c:noMultiLvlLbl val="1"/>
+      </c:catAx>
+      <c:valAx>
+        <c:axId val="2094734552"/>
+        <c:scaling>
+          <c:orientation val="minMax"/>
+          <c:max val="8"/>
+          <c:min val="0"/>
+        </c:scaling>
+        <c:delete val="0"/>
+        <c:axPos val="l"/>
+        <c:majorGridlines>
+          <c:spPr>
+            <a:ln w="6350" cap="flat">
+              <a:solidFill>
+                <a:srgbClr val="E8E8ED"/>
+              </a:solidFill>
+              <a:prstDash val="solid"/>
+              <a:round/>
+            </a:ln>
+          </c:spPr>
+        </c:majorGridlines>
+        <c:numFmt formatCode="General" sourceLinked="0"/>
+        <c:majorTickMark val="out"/>
+        <c:minorTickMark val="none"/>
+        <c:tickLblPos val="nextTo"/>
+        <c:spPr>
+          <a:ln w="12700" cap="flat">
+            <a:solidFill>
+              <a:srgbClr val="888888"/>
+            </a:solidFill>
+            <a:prstDash val="solid"/>
+            <a:round/>
+          </a:ln>
+        </c:spPr>
+        <c:txPr>
+          <a:bodyPr/>
+          <a:lstStyle/>
+          <a:p>
+            <a:pPr>
+              <a:defRPr sz="1100" b="0" i="0" u="none" strike="noStrike">
+                <a:solidFill>
+                  <a:srgbClr val="7A7A7A"/>
+                </a:solidFill>
+                <a:latin typeface="나눔스퀘어 네오 Regular"/>
+                <a:ea typeface="나눔스퀘어 네오 Regular"/>
+                <a:cs typeface="나눔스퀘어 네오 Regular"/>
+              </a:defRPr>
+            </a:pPr>
+            <a:endParaRPr lang="ko-KR"/>
+          </a:p>
+        </c:txPr>
+        <c:crossAx val="2094734554"/>
+        <c:crosses val="autoZero"/>
+        <c:crossBetween val="between"/>
+      </c:valAx>
+      <c:spPr>
+        <a:noFill/>
+        <a:ln>
+          <a:noFill/>
+        </a:ln>
+        <a:effectLst/>
+      </c:spPr>
+    </c:plotArea>
+    <c:plotVisOnly val="1"/>
+    <c:dispBlanksAs val="span"/>
+    <c:showDLblsOverMax val="1"/>
+  </c:chart>
+  <c:spPr>
+    <a:noFill/>
+    <a:ln>
+      <a:noFill/>
+    </a:ln>
+    <a:effectLst/>
+  </c:spPr>
+  <c:externalData r:id="rId1">
+    <c:autoUpdate val="0"/>
+  </c:externalData>
+</c:chartSpace>
+</file>
+
+<file path=ppt/charts/chart2.xml><?xml version="1.0" encoding="utf-8"?>
+<c:chartSpace xmlns:c="http://schemas.openxmlformats.org/drawingml/2006/chart" xmlns:a="http://schemas.openxmlformats.org/drawingml/2006/main" xmlns:r="http://schemas.openxmlformats.org/officeDocument/2006/relationships" xmlns:c16r2="http://schemas.microsoft.com/office/drawing/2015/06/chart">
+  <c:date1904 val="0"/>
+  <c:lang val="ko-KR"/>
+  <c:roundedCorners val="1"/>
+  <c:style val="2"/>
+  <c:chart>
+    <c:title>
+      <c:tx>
+        <c:rich>
+          <a:bodyPr/>
+          <a:lstStyle/>
+          <a:p>
+            <a:pPr>
+              <a:defRPr sz="1400" b="0" i="0" u="none" strike="noStrike">
+                <a:solidFill>
+                  <a:srgbClr val="1D1D1F"/>
+                </a:solidFill>
+                <a:latin typeface="나눔스퀘어 네오 Regular"/>
+                <a:ea typeface="나눔스퀘어 네오 Regular"/>
+                <a:cs typeface="나눔스퀘어 네오 Regular"/>
+              </a:defRPr>
+            </a:pPr>
+            <a:r>
+              <a:rPr sz="1400" b="0" i="0" u="none" strike="noStrike">
+                <a:solidFill>
+                  <a:srgbClr val="1D1D1F"/>
+                </a:solidFill>
+                <a:latin typeface="나눔스퀘어 네오 Regular"/>
+                <a:ea typeface="나눔스퀘어 네오 Regular"/>
+                <a:cs typeface="나눔스퀘어 네오 Regular"/>
+              </a:rPr>
+              <a:t>정답 있는 합성 장면: 각도 오차 (°)</a:t>
+            </a:r>
+          </a:p>
+        </c:rich>
+      </c:tx>
+      <c:overlay val="0"/>
+    </c:title>
+    <c:autoTitleDeleted val="0"/>
+    <c:plotArea>
+      <c:layout/>
+      <c:barChart>
+        <c:barDir val="col"/>
+        <c:grouping val="clustered"/>
+        <c:varyColors val="0"/>
+        <c:ser>
+          <c:idx val="0"/>
+          <c:order val="0"/>
+          <c:tx>
+            <c:strRef>
+              <c:f>Sheet1!$B$1</c:f>
+              <c:strCache>
+                <c:ptCount val="1"/>
+                <c:pt idx="0">
+                  <c:v>자기보정</c:v>
+                </c:pt>
+              </c:strCache>
+            </c:strRef>
+          </c:tx>
+          <c:spPr>
+            <a:solidFill>
+              <a:srgbClr val="0066CC"/>
+            </a:solidFill>
+            <a:effectLst/>
+          </c:spPr>
+          <c:invertIfNegative val="0"/>
+          <c:dLbls>
+            <c:numFmt formatCode="0.00" sourceLinked="0"/>
+            <c:spPr>
+              <a:noFill/>
+              <a:ln>
+                <a:noFill/>
+              </a:ln>
+              <a:effectLst/>
+            </c:spPr>
+            <c:txPr>
+              <a:bodyPr/>
+              <a:lstStyle/>
+              <a:p>
+                <a:pPr>
+                  <a:defRPr sz="1000" b="0" i="0" u="none" strike="noStrike">
+                    <a:solidFill>
+                      <a:srgbClr val="1D1D1F"/>
+                    </a:solidFill>
+                    <a:latin typeface="나눔스퀘어 네오 Regular"/>
+                    <a:ea typeface="나눔스퀘어 네오 Regular"/>
+                    <a:cs typeface="나눔스퀘어 네오 Regular"/>
+                  </a:defRPr>
+                </a:pPr>
+                <a:endParaRPr lang="ko-KR"/>
+              </a:p>
+            </c:txPr>
+            <c:showLegendKey val="0"/>
+            <c:showVal val="1"/>
+            <c:showCatName val="0"/>
+            <c:showSerName val="0"/>
+            <c:showPercent val="0"/>
+            <c:showBubbleSize val="0"/>
+            <c:showLeaderLines val="0"/>
+            <c:extLst>
+              <c:ext xmlns:c15="http://schemas.microsoft.com/office/drawing/2012/chart" uri="{CE6537A1-D6FC-4f65-9D91-7224C49458BB}">
+                <c15:showLeaderLines val="0"/>
+              </c:ext>
+            </c:extLst>
+          </c:dLbls>
+          <c:cat>
+            <c:strRef>
+              <c:f>Sheet1!$A$2:$A$4</c:f>
+              <c:strCache>
+                <c:ptCount val="3"/>
+                <c:pt idx="0">
+                  <c:v>R 1,552 px (회전 20°)</c:v>
+                </c:pt>
+                <c:pt idx="1">
+                  <c:v>R 6,000 px (8°)</c:v>
+                </c:pt>
+                <c:pt idx="2">
+                  <c:v>R 20,025 px (5°)</c:v>
+                </c:pt>
+              </c:strCache>
+            </c:strRef>
+          </c:cat>
+          <c:val>
+            <c:numRef>
+              <c:f>Sheet1!$B$2:$B$4</c:f>
+              <c:numCache>
+                <c:formatCode>General</c:formatCode>
+                <c:ptCount val="3"/>
+                <c:pt idx="0">
+                  <c:v>0.28999999999999998</c:v>
+                </c:pt>
+                <c:pt idx="1">
+                  <c:v>0.22</c:v>
+                </c:pt>
+                <c:pt idx="2">
+                  <c:v>1.68</c:v>
+                </c:pt>
+              </c:numCache>
+            </c:numRef>
+          </c:val>
+          <c:extLst>
+            <c:ext xmlns:c16="http://schemas.microsoft.com/office/drawing/2014/chart" uri="{C3380CC4-5D6E-409C-BE32-E72D297353CC}">
+              <c16:uniqueId val="{00000000-59B6-40BD-843D-30AAE8050D07}"/>
+            </c:ext>
+          </c:extLst>
+        </c:ser>
+        <c:ser>
+          <c:idx val="1"/>
+          <c:order val="1"/>
+          <c:tx>
+            <c:strRef>
+              <c:f>Sheet1!$C$1</c:f>
+              <c:strCache>
+                <c:ptCount val="1"/>
+                <c:pt idx="0">
+                  <c:v>재맞춤</c:v>
+                </c:pt>
+              </c:strCache>
+            </c:strRef>
+          </c:tx>
+          <c:spPr>
+            <a:solidFill>
+              <a:srgbClr val="7A7A7A"/>
+            </a:solidFill>
+            <a:effectLst/>
+          </c:spPr>
+          <c:invertIfNegative val="0"/>
+          <c:dLbls>
+            <c:numFmt formatCode="0.00" sourceLinked="0"/>
+            <c:spPr>
+              <a:noFill/>
+              <a:ln>
+                <a:noFill/>
+              </a:ln>
+              <a:effectLst/>
+            </c:spPr>
+            <c:txPr>
+              <a:bodyPr/>
+              <a:lstStyle/>
+              <a:p>
+                <a:pPr>
+                  <a:defRPr sz="1000" b="0" i="0" u="none" strike="noStrike">
+                    <a:solidFill>
+                      <a:srgbClr val="1D1D1F"/>
+                    </a:solidFill>
+                    <a:latin typeface="나눔스퀘어 네오 Regular"/>
+                    <a:ea typeface="나눔스퀘어 네오 Regular"/>
+                    <a:cs typeface="나눔스퀘어 네오 Regular"/>
+                  </a:defRPr>
+                </a:pPr>
+                <a:endParaRPr lang="ko-KR"/>
+              </a:p>
+            </c:txPr>
+            <c:showLegendKey val="0"/>
+            <c:showVal val="1"/>
+            <c:showCatName val="0"/>
+            <c:showSerName val="0"/>
+            <c:showPercent val="0"/>
+            <c:showBubbleSize val="0"/>
+            <c:showLeaderLines val="0"/>
+            <c:extLst>
+              <c:ext xmlns:c15="http://schemas.microsoft.com/office/drawing/2012/chart" uri="{CE6537A1-D6FC-4f65-9D91-7224C49458BB}">
+                <c15:showLeaderLines val="0"/>
+              </c:ext>
+            </c:extLst>
+          </c:dLbls>
+          <c:cat>
+            <c:strRef>
+              <c:f>Sheet1!$A$2:$A$4</c:f>
+              <c:strCache>
+                <c:ptCount val="3"/>
+                <c:pt idx="0">
+                  <c:v>R 1,552 px (회전 20°)</c:v>
+                </c:pt>
+                <c:pt idx="1">
+                  <c:v>R 6,000 px (8°)</c:v>
+                </c:pt>
+                <c:pt idx="2">
+                  <c:v>R 20,025 px (5°)</c:v>
+                </c:pt>
+              </c:strCache>
+            </c:strRef>
+          </c:cat>
+          <c:val>
+            <c:numRef>
+              <c:f>Sheet1!$C$2:$C$4</c:f>
+              <c:numCache>
+                <c:formatCode>General</c:formatCode>
+                <c:ptCount val="3"/>
+                <c:pt idx="0">
+                  <c:v>0.25</c:v>
+                </c:pt>
+                <c:pt idx="1">
+                  <c:v>0.1</c:v>
+                </c:pt>
+                <c:pt idx="2">
+                  <c:v>0.06</c:v>
+                </c:pt>
+              </c:numCache>
+            </c:numRef>
+          </c:val>
+          <c:extLst>
+            <c:ext xmlns:c16="http://schemas.microsoft.com/office/drawing/2014/chart" uri="{C3380CC4-5D6E-409C-BE32-E72D297353CC}">
+              <c16:uniqueId val="{00000001-59B6-40BD-843D-30AAE8050D07}"/>
+            </c:ext>
+          </c:extLst>
+        </c:ser>
+        <c:ser>
+          <c:idx val="2"/>
+          <c:order val="2"/>
+          <c:tx>
+            <c:strRef>
+              <c:f>Sheet1!$D$1</c:f>
+              <c:strCache>
+                <c:ptCount val="1"/>
+                <c:pt idx="0">
+                  <c:v>프리즈 (다른 녹화 상수)</c:v>
+                </c:pt>
+              </c:strCache>
+            </c:strRef>
+          </c:tx>
+          <c:spPr>
+            <a:solidFill>
+              <a:srgbClr val="1D1D1F"/>
+            </a:solidFill>
+            <a:effectLst/>
+          </c:spPr>
+          <c:invertIfNegative val="0"/>
+          <c:dLbls>
+            <c:numFmt formatCode="0.00" sourceLinked="0"/>
+            <c:spPr>
+              <a:noFill/>
+              <a:ln>
+                <a:noFill/>
+              </a:ln>
+              <a:effectLst/>
+            </c:spPr>
+            <c:txPr>
+              <a:bodyPr/>
+              <a:lstStyle/>
+              <a:p>
+                <a:pPr>
+                  <a:defRPr sz="1000" b="0" i="0" u="none" strike="noStrike">
+                    <a:solidFill>
+                      <a:srgbClr val="1D1D1F"/>
+                    </a:solidFill>
+                    <a:latin typeface="나눔스퀘어 네오 Regular"/>
+                    <a:ea typeface="나눔스퀘어 네오 Regular"/>
+                    <a:cs typeface="나눔스퀘어 네오 Regular"/>
+                  </a:defRPr>
+                </a:pPr>
+                <a:endParaRPr lang="ko-KR"/>
+              </a:p>
+            </c:txPr>
+            <c:showLegendKey val="0"/>
+            <c:showVal val="1"/>
+            <c:showCatName val="0"/>
+            <c:showSerName val="0"/>
+            <c:showPercent val="0"/>
+            <c:showBubbleSize val="0"/>
+            <c:showLeaderLines val="0"/>
+            <c:extLst>
+              <c:ext xmlns:c15="http://schemas.microsoft.com/office/drawing/2012/chart" uri="{CE6537A1-D6FC-4f65-9D91-7224C49458BB}">
+                <c15:showLeaderLines val="0"/>
+              </c:ext>
+            </c:extLst>
+          </c:dLbls>
+          <c:cat>
+            <c:strRef>
+              <c:f>Sheet1!$A$2:$A$4</c:f>
+              <c:strCache>
+                <c:ptCount val="3"/>
+                <c:pt idx="0">
+                  <c:v>R 1,552 px (회전 20°)</c:v>
+                </c:pt>
+                <c:pt idx="1">
+                  <c:v>R 6,000 px (8°)</c:v>
+                </c:pt>
+                <c:pt idx="2">
+                  <c:v>R 20,025 px (5°)</c:v>
+                </c:pt>
+              </c:strCache>
+            </c:strRef>
+          </c:cat>
+          <c:val>
+            <c:numRef>
+              <c:f>Sheet1!$D$2:$D$4</c:f>
+              <c:numCache>
+                <c:formatCode>General</c:formatCode>
+                <c:ptCount val="3"/>
+                <c:pt idx="0">
+                  <c:v>8.3000000000000007</c:v>
+                </c:pt>
+                <c:pt idx="1">
+                  <c:v>18.100000000000001</c:v>
+                </c:pt>
+                <c:pt idx="2">
+                  <c:v>115.9</c:v>
+                </c:pt>
+              </c:numCache>
+            </c:numRef>
+          </c:val>
+          <c:extLst>
+            <c:ext xmlns:c16="http://schemas.microsoft.com/office/drawing/2014/chart" uri="{C3380CC4-5D6E-409C-BE32-E72D297353CC}">
+              <c16:uniqueId val="{00000002-59B6-40BD-843D-30AAE8050D07}"/>
+            </c:ext>
+          </c:extLst>
+        </c:ser>
+        <c:dLbls>
+          <c:showLegendKey val="0"/>
+          <c:showVal val="1"/>
+          <c:showCatName val="0"/>
+          <c:showSerName val="0"/>
+          <c:showPercent val="0"/>
+          <c:showBubbleSize val="0"/>
+        </c:dLbls>
+        <c:gapWidth val="60"/>
+        <c:axId val="2094734554"/>
+        <c:axId val="2094734552"/>
+      </c:barChart>
+      <c:catAx>
+        <c:axId val="2094734554"/>
+        <c:scaling>
+          <c:orientation val="minMax"/>
+        </c:scaling>
+        <c:delete val="0"/>
+        <c:axPos val="b"/>
+        <c:numFmt formatCode="General" sourceLinked="1"/>
+        <c:majorTickMark val="out"/>
+        <c:minorTickMark val="none"/>
+        <c:tickLblPos val="low"/>
+        <c:spPr>
+          <a:ln w="12700" cap="flat">
+            <a:solidFill>
+              <a:srgbClr val="888888"/>
+            </a:solidFill>
+            <a:prstDash val="solid"/>
+            <a:round/>
+          </a:ln>
+        </c:spPr>
+        <c:txPr>
+          <a:bodyPr/>
+          <a:lstStyle/>
+          <a:p>
+            <a:pPr>
+              <a:defRPr sz="1200" b="0" i="0" u="none" strike="noStrike">
+                <a:solidFill>
+                  <a:srgbClr val="1D1D1F"/>
+                </a:solidFill>
+                <a:latin typeface="나눔스퀘어 네오 Regular"/>
+                <a:ea typeface="나눔스퀘어 네오 Regular"/>
+                <a:cs typeface="나눔스퀘어 네오 Regular"/>
+              </a:defRPr>
+            </a:pPr>
+            <a:endParaRPr lang="ko-KR"/>
+          </a:p>
+        </c:txPr>
+        <c:crossAx val="2094734552"/>
+        <c:crosses val="autoZero"/>
+        <c:auto val="1"/>
+        <c:lblAlgn val="ctr"/>
+        <c:lblOffset val="100"/>
+        <c:noMultiLvlLbl val="1"/>
+      </c:catAx>
+      <c:valAx>
+        <c:axId val="2094734552"/>
+        <c:scaling>
+          <c:orientation val="minMax"/>
+          <c:max val="130"/>
+          <c:min val="0"/>
+        </c:scaling>
+        <c:delete val="0"/>
+        <c:axPos val="l"/>
+        <c:majorGridlines>
+          <c:spPr>
+            <a:ln w="6350" cap="flat">
+              <a:solidFill>
+                <a:srgbClr val="E8E8ED"/>
+              </a:solidFill>
+              <a:prstDash val="solid"/>
+              <a:round/>
+            </a:ln>
+          </c:spPr>
+        </c:majorGridlines>
+        <c:numFmt formatCode="General" sourceLinked="0"/>
+        <c:majorTickMark val="out"/>
+        <c:minorTickMark val="none"/>
+        <c:tickLblPos val="nextTo"/>
+        <c:spPr>
+          <a:ln w="12700" cap="flat">
+            <a:solidFill>
+              <a:srgbClr val="888888"/>
+            </a:solidFill>
+            <a:prstDash val="solid"/>
+            <a:round/>
+          </a:ln>
+        </c:spPr>
+        <c:txPr>
+          <a:bodyPr/>
+          <a:lstStyle/>
+          <a:p>
+            <a:pPr>
+              <a:defRPr sz="1100" b="0" i="0" u="none" strike="noStrike">
+                <a:solidFill>
+                  <a:srgbClr val="7A7A7A"/>
+                </a:solidFill>
+                <a:latin typeface="나눔스퀘어 네오 Regular"/>
+                <a:ea typeface="나눔스퀘어 네오 Regular"/>
+                <a:cs typeface="나눔스퀘어 네오 Regular"/>
+              </a:defRPr>
+            </a:pPr>
+            <a:endParaRPr lang="ko-KR"/>
+          </a:p>
+        </c:txPr>
+        <c:crossAx val="2094734554"/>
+        <c:crosses val="autoZero"/>
+        <c:crossBetween val="between"/>
+      </c:valAx>
+      <c:spPr>
+        <a:noFill/>
+        <a:ln>
+          <a:noFill/>
+        </a:ln>
+        <a:effectLst/>
+      </c:spPr>
+    </c:plotArea>
+    <c:legend>
+      <c:legendPos val="b"/>
+      <c:overlay val="0"/>
+      <c:txPr>
+        <a:bodyPr/>
+        <a:lstStyle/>
+        <a:p>
+          <a:pPr>
+            <a:defRPr sz="1100">
+              <a:latin typeface="나눔스퀘어 네오 Regular"/>
+              <a:ea typeface="나눔스퀘어 네오 Regular"/>
+              <a:cs typeface="나눔스퀘어 네오 Regular"/>
+            </a:defRPr>
+          </a:pPr>
+          <a:endParaRPr lang="ko-KR"/>
+        </a:p>
+      </c:txPr>
+    </c:legend>
+    <c:plotVisOnly val="1"/>
+    <c:dispBlanksAs val="span"/>
+    <c:showDLblsOverMax val="1"/>
+  </c:chart>
+  <c:spPr>
+    <a:noFill/>
+    <a:ln>
+      <a:noFill/>
+    </a:ln>
+    <a:effectLst/>
+  </c:spPr>
+  <c:externalData r:id="rId1">
+    <c:autoUpdate val="0"/>
+  </c:externalData>
+</c:chartSpace>
+</file>
+
+<file path=ppt/charts/chart3.xml><?xml version="1.0" encoding="utf-8"?>
+<c:chartSpace xmlns:c="http://schemas.openxmlformats.org/drawingml/2006/chart" xmlns:a="http://schemas.openxmlformats.org/drawingml/2006/main" xmlns:r="http://schemas.openxmlformats.org/officeDocument/2006/relationships" xmlns:c16r2="http://schemas.microsoft.com/office/drawing/2015/06/chart">
+  <c:date1904 val="0"/>
+  <c:lang val="ko-KR"/>
+  <c:roundedCorners val="1"/>
+  <c:style val="2"/>
+  <c:chart>
+    <c:title>
+      <c:tx>
+        <c:rich>
+          <a:bodyPr/>
+          <a:lstStyle/>
+          <a:p>
+            <a:pPr>
+              <a:defRPr sz="1400" b="0" i="0" u="none" strike="noStrike">
+                <a:solidFill>
+                  <a:srgbClr val="1D1D1F"/>
+                </a:solidFill>
+                <a:latin typeface="나눔스퀘어 네오 Regular"/>
+                <a:ea typeface="나눔스퀘어 네오 Regular"/>
+                <a:cs typeface="나눔스퀘어 네오 Regular"/>
+              </a:defRPr>
+            </a:pPr>
+            <a:r>
+              <a:rPr sz="1400" b="0" i="0" u="none" strike="noStrike">
+                <a:solidFill>
+                  <a:srgbClr val="1D1D1F"/>
+                </a:solidFill>
+                <a:latin typeface="나눔스퀘어 네오 Regular"/>
+                <a:ea typeface="나눔스퀘어 네오 Regular"/>
+                <a:cs typeface="나눔스퀘어 네오 Regular"/>
+              </a:rPr>
+              <a:t>직접 곱셈 대비 상대값 (작을수록 좋음)</a:t>
+            </a:r>
+          </a:p>
+        </c:rich>
+      </c:tx>
+      <c:overlay val="0"/>
+    </c:title>
+    <c:autoTitleDeleted val="0"/>
+    <c:plotArea>
+      <c:layout/>
+      <c:barChart>
+        <c:barDir val="col"/>
+        <c:grouping val="clustered"/>
+        <c:varyColors val="0"/>
+        <c:ser>
+          <c:idx val="0"/>
+          <c:order val="0"/>
+          <c:tx>
+            <c:strRef>
+              <c:f>Sheet1!$B$1</c:f>
+              <c:strCache>
+                <c:ptCount val="1"/>
+                <c:pt idx="0">
+                  <c:v>직접 곱셈</c:v>
+                </c:pt>
+              </c:strCache>
+            </c:strRef>
+          </c:tx>
+          <c:spPr>
+            <a:solidFill>
+              <a:srgbClr val="7A7A7A"/>
+            </a:solidFill>
+            <a:effectLst/>
+          </c:spPr>
+          <c:invertIfNegative val="0"/>
+          <c:dLbls>
+            <c:numFmt formatCode="0.00" sourceLinked="0"/>
+            <c:spPr>
+              <a:noFill/>
+              <a:ln>
+                <a:noFill/>
+              </a:ln>
+              <a:effectLst/>
+            </c:spPr>
+            <c:txPr>
+              <a:bodyPr/>
+              <a:lstStyle/>
+              <a:p>
+                <a:pPr>
+                  <a:defRPr sz="1200" b="0" i="0" u="none" strike="noStrike">
+                    <a:solidFill>
+                      <a:srgbClr val="1D1D1F"/>
+                    </a:solidFill>
+                    <a:latin typeface="나눔스퀘어 네오 Regular"/>
+                    <a:ea typeface="나눔스퀘어 네오 Regular"/>
+                    <a:cs typeface="나눔스퀘어 네오 Regular"/>
+                  </a:defRPr>
+                </a:pPr>
+                <a:endParaRPr lang="ko-KR"/>
+              </a:p>
+            </c:txPr>
+            <c:showLegendKey val="0"/>
+            <c:showVal val="1"/>
+            <c:showCatName val="0"/>
+            <c:showSerName val="0"/>
+            <c:showPercent val="0"/>
+            <c:showBubbleSize val="0"/>
+            <c:showLeaderLines val="0"/>
+            <c:extLst>
+              <c:ext xmlns:c15="http://schemas.microsoft.com/office/drawing/2012/chart" uri="{CE6537A1-D6FC-4f65-9D91-7224C49458BB}">
+                <c15:showLeaderLines val="0"/>
+              </c:ext>
+            </c:extLst>
+          </c:dLbls>
+          <c:cat>
+            <c:strRef>
+              <c:f>Sheet1!$A$2:$A$3</c:f>
+              <c:strCache>
+                <c:ptCount val="2"/>
+                <c:pt idx="0">
+                  <c:v>면적</c:v>
+                </c:pt>
+                <c:pt idx="1">
+                  <c:v>전력</c:v>
+                </c:pt>
+              </c:strCache>
+            </c:strRef>
+          </c:cat>
+          <c:val>
+            <c:numRef>
+              <c:f>Sheet1!$B$2:$B$3</c:f>
+              <c:numCache>
+                <c:formatCode>General</c:formatCode>
+                <c:ptCount val="2"/>
+                <c:pt idx="0">
+                  <c:v>1</c:v>
+                </c:pt>
+                <c:pt idx="1">
+                  <c:v>1</c:v>
+                </c:pt>
+              </c:numCache>
+            </c:numRef>
+          </c:val>
+          <c:extLst>
+            <c:ext xmlns:c16="http://schemas.microsoft.com/office/drawing/2014/chart" uri="{C3380CC4-5D6E-409C-BE32-E72D297353CC}">
+              <c16:uniqueId val="{00000000-E610-4721-B365-6A84FB1B5808}"/>
+            </c:ext>
+          </c:extLst>
+        </c:ser>
+        <c:ser>
+          <c:idx val="1"/>
+          <c:order val="1"/>
+          <c:tx>
+            <c:strRef>
+              <c:f>Sheet1!$C$1</c:f>
+              <c:strCache>
+                <c:ptCount val="1"/>
+                <c:pt idx="0">
+                  <c:v>증분 변환 8레인 (채택)</c:v>
+                </c:pt>
+              </c:strCache>
+            </c:strRef>
+          </c:tx>
+          <c:spPr>
+            <a:solidFill>
+              <a:srgbClr val="0066CC"/>
+            </a:solidFill>
+            <a:effectLst/>
+          </c:spPr>
+          <c:invertIfNegative val="0"/>
+          <c:dLbls>
+            <c:numFmt formatCode="0.00" sourceLinked="0"/>
+            <c:spPr>
+              <a:noFill/>
+              <a:ln>
+                <a:noFill/>
+              </a:ln>
+              <a:effectLst/>
+            </c:spPr>
+            <c:txPr>
+              <a:bodyPr/>
+              <a:lstStyle/>
+              <a:p>
+                <a:pPr>
+                  <a:defRPr sz="1200" b="0" i="0" u="none" strike="noStrike">
+                    <a:solidFill>
+                      <a:srgbClr val="1D1D1F"/>
+                    </a:solidFill>
+                    <a:latin typeface="나눔스퀘어 네오 Regular"/>
+                    <a:ea typeface="나눔스퀘어 네오 Regular"/>
+                    <a:cs typeface="나눔스퀘어 네오 Regular"/>
+                  </a:defRPr>
+                </a:pPr>
+                <a:endParaRPr lang="ko-KR"/>
+              </a:p>
+            </c:txPr>
+            <c:showLegendKey val="0"/>
+            <c:showVal val="1"/>
+            <c:showCatName val="0"/>
+            <c:showSerName val="0"/>
+            <c:showPercent val="0"/>
+            <c:showBubbleSize val="0"/>
+            <c:showLeaderLines val="0"/>
+            <c:extLst>
+              <c:ext xmlns:c15="http://schemas.microsoft.com/office/drawing/2012/chart" uri="{CE6537A1-D6FC-4f65-9D91-7224C49458BB}">
+                <c15:showLeaderLines val="0"/>
+              </c:ext>
+            </c:extLst>
+          </c:dLbls>
+          <c:cat>
+            <c:strRef>
+              <c:f>Sheet1!$A$2:$A$3</c:f>
+              <c:strCache>
+                <c:ptCount val="2"/>
+                <c:pt idx="0">
+                  <c:v>면적</c:v>
+                </c:pt>
+                <c:pt idx="1">
+                  <c:v>전력</c:v>
+                </c:pt>
+              </c:strCache>
+            </c:strRef>
+          </c:cat>
+          <c:val>
+            <c:numRef>
+              <c:f>Sheet1!$C$2:$C$3</c:f>
+              <c:numCache>
+                <c:formatCode>General</c:formatCode>
+                <c:ptCount val="2"/>
+                <c:pt idx="0">
+                  <c:v>0.44</c:v>
+                </c:pt>
+                <c:pt idx="1">
+                  <c:v>0.39</c:v>
+                </c:pt>
+              </c:numCache>
+            </c:numRef>
+          </c:val>
+          <c:extLst>
+            <c:ext xmlns:c16="http://schemas.microsoft.com/office/drawing/2014/chart" uri="{C3380CC4-5D6E-409C-BE32-E72D297353CC}">
+              <c16:uniqueId val="{00000001-E610-4721-B365-6A84FB1B5808}"/>
+            </c:ext>
+          </c:extLst>
+        </c:ser>
+        <c:dLbls>
+          <c:showLegendKey val="0"/>
+          <c:showVal val="1"/>
+          <c:showCatName val="0"/>
+          <c:showSerName val="0"/>
+          <c:showPercent val="0"/>
+          <c:showBubbleSize val="0"/>
+        </c:dLbls>
+        <c:gapWidth val="60"/>
+        <c:axId val="2094734554"/>
+        <c:axId val="2094734552"/>
+      </c:barChart>
+      <c:catAx>
+        <c:axId val="2094734554"/>
+        <c:scaling>
+          <c:orientation val="minMax"/>
+        </c:scaling>
+        <c:delete val="0"/>
+        <c:axPos val="b"/>
+        <c:numFmt formatCode="General" sourceLinked="1"/>
+        <c:majorTickMark val="out"/>
+        <c:minorTickMark val="none"/>
+        <c:tickLblPos val="low"/>
+        <c:spPr>
+          <a:ln w="12700" cap="flat">
+            <a:solidFill>
+              <a:srgbClr val="888888"/>
+            </a:solidFill>
+            <a:prstDash val="solid"/>
+            <a:round/>
+          </a:ln>
+        </c:spPr>
+        <c:txPr>
+          <a:bodyPr/>
+          <a:lstStyle/>
+          <a:p>
+            <a:pPr>
+              <a:defRPr sz="1200" b="0" i="0" u="none" strike="noStrike">
+                <a:solidFill>
+                  <a:srgbClr val="1D1D1F"/>
+                </a:solidFill>
+                <a:latin typeface="나눔스퀘어 네오 Regular"/>
+                <a:ea typeface="나눔스퀘어 네오 Regular"/>
+                <a:cs typeface="나눔스퀘어 네오 Regular"/>
+              </a:defRPr>
+            </a:pPr>
+            <a:endParaRPr lang="ko-KR"/>
+          </a:p>
+        </c:txPr>
+        <c:crossAx val="2094734552"/>
+        <c:crosses val="autoZero"/>
+        <c:auto val="1"/>
+        <c:lblAlgn val="ctr"/>
+        <c:lblOffset val="100"/>
+        <c:noMultiLvlLbl val="1"/>
+      </c:catAx>
+      <c:valAx>
+        <c:axId val="2094734552"/>
+        <c:scaling>
+          <c:orientation val="minMax"/>
+          <c:max val="1.2"/>
+          <c:min val="0"/>
+        </c:scaling>
+        <c:delete val="0"/>
+        <c:axPos val="l"/>
+        <c:majorGridlines>
+          <c:spPr>
+            <a:ln w="6350" cap="flat">
+              <a:solidFill>
+                <a:srgbClr val="E8E8ED"/>
+              </a:solidFill>
+              <a:prstDash val="solid"/>
+              <a:round/>
+            </a:ln>
+          </c:spPr>
+        </c:majorGridlines>
+        <c:numFmt formatCode="General" sourceLinked="0"/>
+        <c:majorTickMark val="out"/>
+        <c:minorTickMark val="none"/>
+        <c:tickLblPos val="nextTo"/>
+        <c:spPr>
+          <a:ln w="12700" cap="flat">
+            <a:solidFill>
+              <a:srgbClr val="888888"/>
+            </a:solidFill>
+            <a:prstDash val="solid"/>
+            <a:round/>
+          </a:ln>
+        </c:spPr>
+        <c:txPr>
+          <a:bodyPr/>
+          <a:lstStyle/>
+          <a:p>
+            <a:pPr>
+              <a:defRPr sz="1100" b="0" i="0" u="none" strike="noStrike">
+                <a:solidFill>
+                  <a:srgbClr val="7A7A7A"/>
+                </a:solidFill>
+                <a:latin typeface="나눔스퀘어 네오 Regular"/>
+                <a:ea typeface="나눔스퀘어 네오 Regular"/>
+                <a:cs typeface="나눔스퀘어 네오 Regular"/>
+              </a:defRPr>
+            </a:pPr>
+            <a:endParaRPr lang="ko-KR"/>
+          </a:p>
+        </c:txPr>
+        <c:crossAx val="2094734554"/>
+        <c:crosses val="autoZero"/>
+        <c:crossBetween val="between"/>
+      </c:valAx>
+      <c:spPr>
+        <a:noFill/>
+        <a:ln>
+          <a:noFill/>
+        </a:ln>
+        <a:effectLst/>
+      </c:spPr>
+    </c:plotArea>
+    <c:legend>
+      <c:legendPos val="r"/>
+      <c:overlay val="0"/>
+      <c:txPr>
+        <a:bodyPr/>
+        <a:lstStyle/>
+        <a:p>
+          <a:pPr>
+            <a:defRPr sz="1100">
+              <a:latin typeface="나눔스퀘어 네오 Regular"/>
+              <a:ea typeface="나눔스퀘어 네오 Regular"/>
+              <a:cs typeface="나눔스퀘어 네오 Regular"/>
+            </a:defRPr>
+          </a:pPr>
+          <a:endParaRPr lang="ko-KR"/>
+        </a:p>
+      </c:txPr>
+    </c:legend>
+    <c:plotVisOnly val="1"/>
+    <c:dispBlanksAs val="span"/>
+    <c:showDLblsOverMax val="1"/>
+  </c:chart>
+  <c:spPr>
+    <a:noFill/>
+    <a:ln>
+      <a:noFill/>
+    </a:ln>
+    <a:effectLst/>
+  </c:spPr>
+  <c:externalData r:id="rId1">
+    <c:autoUpdate val="0"/>
+  </c:externalData>
+</c:chartSpace>
+</file>
+
+<file path=ppt/charts/chart4.xml><?xml version="1.0" encoding="utf-8"?>
+<c:chartSpace xmlns:c="http://schemas.openxmlformats.org/drawingml/2006/chart" xmlns:a="http://schemas.openxmlformats.org/drawingml/2006/main" xmlns:r="http://schemas.openxmlformats.org/officeDocument/2006/relationships" xmlns:c16r2="http://schemas.microsoft.com/office/drawing/2015/06/chart">
+  <c:date1904 val="0"/>
+  <c:lang val="ko-KR"/>
+  <c:roundedCorners val="1"/>
+  <c:style val="2"/>
+  <c:chart>
+    <c:title>
+      <c:tx>
+        <c:rich>
+          <a:bodyPr/>
+          <a:lstStyle/>
+          <a:p>
+            <a:pPr>
+              <a:defRPr sz="1400" b="0" i="0" u="none" strike="noStrike">
+                <a:solidFill>
+                  <a:srgbClr val="1D1D1F"/>
+                </a:solidFill>
+                <a:latin typeface="나눔스퀘어 네오 Regular"/>
+                <a:ea typeface="나눔스퀘어 네오 Regular"/>
+                <a:cs typeface="나눔스퀘어 네오 Regular"/>
+              </a:defRPr>
+            </a:pPr>
+            <a:r>
+              <a:rPr sz="1400" b="0" i="0" u="none" strike="noStrike">
+                <a:solidFill>
+                  <a:srgbClr val="1D1D1F"/>
+                </a:solidFill>
+                <a:latin typeface="나눔스퀘어 네오 Regular"/>
+                <a:ea typeface="나눔스퀘어 네오 Regular"/>
+                <a:cs typeface="나눔스퀘어 네오 Regular"/>
+              </a:rPr>
               <a:t>메모리 비트당 면적 (µm²/bit)</a:t>
             </a:r>
           </a:p>
@@ -214,7 +1393,7 @@
             <c:bubble3D val="0"/>
             <c:extLst>
               <c:ext xmlns:c16="http://schemas.microsoft.com/office/drawing/2014/chart" uri="{C3380CC4-5D6E-409C-BE32-E72D297353CC}">
-                <c16:uniqueId val="{00000001-FF47-4CBE-A7CB-9A7FFBDE0B8C}"/>
+                <c16:uniqueId val="{00000001-C80F-42A4-A66E-7AA9FECFA1EB}"/>
               </c:ext>
             </c:extLst>
           </c:dPt>
@@ -230,7 +1409,7 @@
             </c:spPr>
             <c:extLst>
               <c:ext xmlns:c16="http://schemas.microsoft.com/office/drawing/2014/chart" uri="{C3380CC4-5D6E-409C-BE32-E72D297353CC}">
-                <c16:uniqueId val="{00000003-FF47-4CBE-A7CB-9A7FFBDE0B8C}"/>
+                <c16:uniqueId val="{00000003-C80F-42A4-A66E-7AA9FECFA1EB}"/>
               </c:ext>
             </c:extLst>
           </c:dPt>
@@ -304,7 +1483,7 @@
           </c:val>
           <c:extLst>
             <c:ext xmlns:c16="http://schemas.microsoft.com/office/drawing/2014/chart" uri="{C3380CC4-5D6E-409C-BE32-E72D297353CC}">
-              <c16:uniqueId val="{00000004-FF47-4CBE-A7CB-9A7FFBDE0B8C}"/>
+              <c16:uniqueId val="{00000004-C80F-42A4-A66E-7AA9FECFA1EB}"/>
             </c:ext>
           </c:extLst>
         </c:ser>
@@ -441,6 +1620,352 @@
 </c:chartSpace>
 </file>
 
+<file path=ppt/charts/chart5.xml><?xml version="1.0" encoding="utf-8"?>
+<c:chartSpace xmlns:c="http://schemas.openxmlformats.org/drawingml/2006/chart" xmlns:a="http://schemas.openxmlformats.org/drawingml/2006/main" xmlns:r="http://schemas.openxmlformats.org/officeDocument/2006/relationships" xmlns:c16r2="http://schemas.microsoft.com/office/drawing/2015/06/chart">
+  <c:date1904 val="0"/>
+  <c:lang val="ko-KR"/>
+  <c:roundedCorners val="1"/>
+  <c:style val="2"/>
+  <c:chart>
+    <c:title>
+      <c:tx>
+        <c:rich>
+          <a:bodyPr/>
+          <a:lstStyle/>
+          <a:p>
+            <a:pPr>
+              <a:defRPr sz="1400" b="0" i="0" u="none" strike="noStrike">
+                <a:solidFill>
+                  <a:srgbClr val="1D1D1F"/>
+                </a:solidFill>
+                <a:latin typeface="나눔스퀘어 네오 Regular"/>
+                <a:ea typeface="나눔스퀘어 네오 Regular"/>
+                <a:cs typeface="나눔스퀘어 네오 Regular"/>
+              </a:defRPr>
+            </a:pPr>
+            <a:r>
+              <a:rPr sz="1400" b="0" i="0" u="none" strike="noStrike">
+                <a:solidFill>
+                  <a:srgbClr val="1D1D1F"/>
+                </a:solidFill>
+                <a:latin typeface="나눔스퀘어 네오 Regular"/>
+                <a:ea typeface="나눔스퀘어 네오 Regular"/>
+                <a:cs typeface="나눔스퀘어 네오 Regular"/>
+              </a:rPr>
+              <a:t>월드 표현별 지도 상관 (높을수록 좋음)</a:t>
+            </a:r>
+          </a:p>
+        </c:rich>
+      </c:tx>
+      <c:overlay val="0"/>
+    </c:title>
+    <c:autoTitleDeleted val="0"/>
+    <c:plotArea>
+      <c:layout/>
+      <c:barChart>
+        <c:barDir val="bar"/>
+        <c:grouping val="clustered"/>
+        <c:varyColors val="0"/>
+        <c:ser>
+          <c:idx val="0"/>
+          <c:order val="0"/>
+          <c:tx>
+            <c:strRef>
+              <c:f>Sheet1!$B$1</c:f>
+              <c:strCache>
+                <c:ptCount val="1"/>
+                <c:pt idx="0">
+                  <c:v>지도 상관</c:v>
+                </c:pt>
+              </c:strCache>
+            </c:strRef>
+          </c:tx>
+          <c:spPr>
+            <a:solidFill>
+              <a:srgbClr val="0066CC"/>
+            </a:solidFill>
+            <a:effectLst/>
+          </c:spPr>
+          <c:invertIfNegative val="0"/>
+          <c:dPt>
+            <c:idx val="0"/>
+            <c:invertIfNegative val="0"/>
+            <c:bubble3D val="0"/>
+            <c:extLst>
+              <c:ext xmlns:c16="http://schemas.microsoft.com/office/drawing/2014/chart" uri="{C3380CC4-5D6E-409C-BE32-E72D297353CC}">
+                <c16:uniqueId val="{00000001-E554-4D9C-B262-3F0EEF482917}"/>
+              </c:ext>
+            </c:extLst>
+          </c:dPt>
+          <c:dPt>
+            <c:idx val="1"/>
+            <c:invertIfNegative val="0"/>
+            <c:bubble3D val="0"/>
+            <c:spPr>
+              <a:solidFill>
+                <a:srgbClr val="7A7A7A"/>
+              </a:solidFill>
+              <a:effectLst/>
+            </c:spPr>
+            <c:extLst>
+              <c:ext xmlns:c16="http://schemas.microsoft.com/office/drawing/2014/chart" uri="{C3380CC4-5D6E-409C-BE32-E72D297353CC}">
+                <c16:uniqueId val="{00000003-E554-4D9C-B262-3F0EEF482917}"/>
+              </c:ext>
+            </c:extLst>
+          </c:dPt>
+          <c:dPt>
+            <c:idx val="2"/>
+            <c:invertIfNegative val="0"/>
+            <c:bubble3D val="0"/>
+            <c:spPr>
+              <a:solidFill>
+                <a:srgbClr val="7A7A7A"/>
+              </a:solidFill>
+              <a:effectLst/>
+            </c:spPr>
+            <c:extLst>
+              <c:ext xmlns:c16="http://schemas.microsoft.com/office/drawing/2014/chart" uri="{C3380CC4-5D6E-409C-BE32-E72D297353CC}">
+                <c16:uniqueId val="{00000005-E554-4D9C-B262-3F0EEF482917}"/>
+              </c:ext>
+            </c:extLst>
+          </c:dPt>
+          <c:dPt>
+            <c:idx val="3"/>
+            <c:invertIfNegative val="0"/>
+            <c:bubble3D val="0"/>
+            <c:spPr>
+              <a:solidFill>
+                <a:srgbClr val="7A7A7A"/>
+              </a:solidFill>
+              <a:effectLst/>
+            </c:spPr>
+            <c:extLst>
+              <c:ext xmlns:c16="http://schemas.microsoft.com/office/drawing/2014/chart" uri="{C3380CC4-5D6E-409C-BE32-E72D297353CC}">
+                <c16:uniqueId val="{00000007-E554-4D9C-B262-3F0EEF482917}"/>
+              </c:ext>
+            </c:extLst>
+          </c:dPt>
+          <c:dLbls>
+            <c:numFmt formatCode="0.00" sourceLinked="0"/>
+            <c:spPr>
+              <a:noFill/>
+              <a:ln>
+                <a:noFill/>
+              </a:ln>
+              <a:effectLst/>
+            </c:spPr>
+            <c:txPr>
+              <a:bodyPr/>
+              <a:lstStyle/>
+              <a:p>
+                <a:pPr>
+                  <a:defRPr sz="1200" b="0" i="0" u="none" strike="noStrike">
+                    <a:solidFill>
+                      <a:srgbClr val="1D1D1F"/>
+                    </a:solidFill>
+                    <a:latin typeface="나눔스퀘어 네오 Regular"/>
+                    <a:ea typeface="나눔스퀘어 네오 Regular"/>
+                    <a:cs typeface="나눔스퀘어 네오 Regular"/>
+                  </a:defRPr>
+                </a:pPr>
+                <a:endParaRPr lang="ko-KR"/>
+              </a:p>
+            </c:txPr>
+            <c:showLegendKey val="0"/>
+            <c:showVal val="1"/>
+            <c:showCatName val="0"/>
+            <c:showSerName val="0"/>
+            <c:showPercent val="0"/>
+            <c:showBubbleSize val="0"/>
+            <c:showLeaderLines val="0"/>
+            <c:extLst>
+              <c:ext xmlns:c15="http://schemas.microsoft.com/office/drawing/2012/chart" uri="{CE6537A1-D6FC-4f65-9D91-7224C49458BB}">
+                <c15:showLeaderLines val="0"/>
+              </c:ext>
+            </c:extLst>
+          </c:dLbls>
+          <c:cat>
+            <c:strRef>
+              <c:f>Sheet1!$A$2:$A$5</c:f>
+              <c:strCache>
+                <c:ptCount val="4"/>
+                <c:pt idx="0">
+                  <c:v>8 px 격자 (채택)</c:v>
+                </c:pt>
+                <c:pt idx="1">
+                  <c:v>선형 극좌표</c:v>
+                </c:pt>
+                <c:pt idx="2">
+                  <c:v>로그 극좌표</c:v>
+                </c:pt>
+                <c:pt idx="3">
+                  <c:v>블록 부동소수점</c:v>
+                </c:pt>
+              </c:strCache>
+            </c:strRef>
+          </c:cat>
+          <c:val>
+            <c:numRef>
+              <c:f>Sheet1!$B$2:$B$5</c:f>
+              <c:numCache>
+                <c:formatCode>General</c:formatCode>
+                <c:ptCount val="4"/>
+                <c:pt idx="0">
+                  <c:v>0.92</c:v>
+                </c:pt>
+                <c:pt idx="1">
+                  <c:v>0.87</c:v>
+                </c:pt>
+                <c:pt idx="2">
+                  <c:v>0.71</c:v>
+                </c:pt>
+                <c:pt idx="3">
+                  <c:v>0.6</c:v>
+                </c:pt>
+              </c:numCache>
+            </c:numRef>
+          </c:val>
+          <c:extLst>
+            <c:ext xmlns:c16="http://schemas.microsoft.com/office/drawing/2014/chart" uri="{C3380CC4-5D6E-409C-BE32-E72D297353CC}">
+              <c16:uniqueId val="{00000008-E554-4D9C-B262-3F0EEF482917}"/>
+            </c:ext>
+          </c:extLst>
+        </c:ser>
+        <c:dLbls>
+          <c:showLegendKey val="0"/>
+          <c:showVal val="1"/>
+          <c:showCatName val="0"/>
+          <c:showSerName val="0"/>
+          <c:showPercent val="0"/>
+          <c:showBubbleSize val="0"/>
+        </c:dLbls>
+        <c:gapWidth val="60"/>
+        <c:axId val="2094734554"/>
+        <c:axId val="2094734552"/>
+      </c:barChart>
+      <c:catAx>
+        <c:axId val="2094734554"/>
+        <c:scaling>
+          <c:orientation val="minMax"/>
+        </c:scaling>
+        <c:delete val="0"/>
+        <c:axPos val="l"/>
+        <c:numFmt formatCode="General" sourceLinked="1"/>
+        <c:majorTickMark val="out"/>
+        <c:minorTickMark val="none"/>
+        <c:tickLblPos val="nextTo"/>
+        <c:spPr>
+          <a:ln w="12700" cap="flat">
+            <a:solidFill>
+              <a:srgbClr val="888888"/>
+            </a:solidFill>
+            <a:prstDash val="solid"/>
+            <a:round/>
+          </a:ln>
+        </c:spPr>
+        <c:txPr>
+          <a:bodyPr/>
+          <a:lstStyle/>
+          <a:p>
+            <a:pPr>
+              <a:defRPr sz="1200" b="0" i="0" u="none" strike="noStrike">
+                <a:solidFill>
+                  <a:srgbClr val="1D1D1F"/>
+                </a:solidFill>
+                <a:latin typeface="나눔스퀘어 네오 Regular"/>
+                <a:ea typeface="나눔스퀘어 네오 Regular"/>
+                <a:cs typeface="나눔스퀘어 네오 Regular"/>
+              </a:defRPr>
+            </a:pPr>
+            <a:endParaRPr lang="ko-KR"/>
+          </a:p>
+        </c:txPr>
+        <c:crossAx val="2094734552"/>
+        <c:crosses val="autoZero"/>
+        <c:auto val="1"/>
+        <c:lblAlgn val="ctr"/>
+        <c:lblOffset val="100"/>
+        <c:noMultiLvlLbl val="1"/>
+      </c:catAx>
+      <c:valAx>
+        <c:axId val="2094734552"/>
+        <c:scaling>
+          <c:orientation val="minMax"/>
+          <c:max val="1"/>
+          <c:min val="0"/>
+        </c:scaling>
+        <c:delete val="0"/>
+        <c:axPos val="b"/>
+        <c:majorGridlines>
+          <c:spPr>
+            <a:ln w="6350" cap="flat">
+              <a:solidFill>
+                <a:srgbClr val="E8E8ED"/>
+              </a:solidFill>
+              <a:prstDash val="solid"/>
+              <a:round/>
+            </a:ln>
+          </c:spPr>
+        </c:majorGridlines>
+        <c:numFmt formatCode="General" sourceLinked="0"/>
+        <c:majorTickMark val="out"/>
+        <c:minorTickMark val="none"/>
+        <c:tickLblPos val="low"/>
+        <c:spPr>
+          <a:ln w="12700" cap="flat">
+            <a:solidFill>
+              <a:srgbClr val="888888"/>
+            </a:solidFill>
+            <a:prstDash val="solid"/>
+            <a:round/>
+          </a:ln>
+        </c:spPr>
+        <c:txPr>
+          <a:bodyPr/>
+          <a:lstStyle/>
+          <a:p>
+            <a:pPr>
+              <a:defRPr sz="1100" b="0" i="0" u="none" strike="noStrike">
+                <a:solidFill>
+                  <a:srgbClr val="7A7A7A"/>
+                </a:solidFill>
+                <a:latin typeface="나눔스퀘어 네오 Regular"/>
+                <a:ea typeface="나눔스퀘어 네오 Regular"/>
+                <a:cs typeface="나눔스퀘어 네오 Regular"/>
+              </a:defRPr>
+            </a:pPr>
+            <a:endParaRPr lang="ko-KR"/>
+          </a:p>
+        </c:txPr>
+        <c:crossAx val="2094734554"/>
+        <c:crosses val="autoZero"/>
+        <c:crossBetween val="between"/>
+      </c:valAx>
+      <c:spPr>
+        <a:noFill/>
+        <a:ln>
+          <a:noFill/>
+        </a:ln>
+        <a:effectLst/>
+      </c:spPr>
+    </c:plotArea>
+    <c:plotVisOnly val="1"/>
+    <c:dispBlanksAs val="span"/>
+    <c:showDLblsOverMax val="1"/>
+  </c:chart>
+  <c:spPr>
+    <a:noFill/>
+    <a:ln>
+      <a:noFill/>
+    </a:ln>
+    <a:effectLst/>
+  </c:spPr>
+  <c:externalData r:id="rId1">
+    <c:autoUpdate val="0"/>
+  </c:externalData>
+</c:chartSpace>
+</file>
+
 <file path=ppt/notesMasters/notesMaster1.xml><?xml version="1.0" encoding="utf-8"?>
 <p:notesMaster xmlns:a="http://schemas.openxmlformats.org/drawingml/2006/main" xmlns:r="http://schemas.openxmlformats.org/officeDocument/2006/relationships" xmlns:p="http://schemas.openxmlformats.org/presentationml/2006/main">
   <p:cSld>
@@ -466,7 +1991,7 @@
     </p:spTree>
     <p:extLst>
       <p:ext uri="{BB962C8B-B14F-4D97-AF65-F5344CB8AC3E}">
-        <p14:creationId xmlns:p14="http://schemas.microsoft.com/office/powerpoint/2010/main" val="1175067986"/>
+        <p14:creationId xmlns:p14="http://schemas.microsoft.com/office/powerpoint/2010/main" val="1956786499"/>
       </p:ext>
     </p:extLst>
   </p:cSld>
@@ -4814,2159 +6339,96 @@
       </p:sp>
       <p:graphicFrame>
         <p:nvGraphicFramePr>
-          <p:cNvPr id="23" name="Table 1"/>
-          <p:cNvGraphicFramePr>
-            <a:graphicFrameLocks noGrp="1"/>
-          </p:cNvGraphicFramePr>
-          <p:nvPr>
-            <p:extLst>
-              <p:ext uri="{D42A27DB-BD31-4B8C-83A1-F6EECF244321}">
-                <p14:modId xmlns:p14="http://schemas.microsoft.com/office/powerpoint/2010/main" val="1579011935"/>
-              </p:ext>
-            </p:extLst>
-          </p:nvPr>
+          <p:cNvPr id="8" name="Chart 0"/>
+          <p:cNvGraphicFramePr/>
+          <p:nvPr/>
         </p:nvGraphicFramePr>
         <p:xfrm>
-          <a:off x="548640" y="3703320"/>
-          <a:ext cx="11064240" cy="914400"/>
+          <a:off x="548640" y="3611880"/>
+          <a:ext cx="7315200" cy="2743200"/>
         </p:xfrm>
         <a:graphic>
-          <a:graphicData uri="http://schemas.openxmlformats.org/drawingml/2006/table">
-            <a:tbl>
-              <a:tblPr/>
-              <a:tblGrid>
-                <a:gridCol w="2651760">
-                  <a:extLst>
-                    <a:ext uri="{9D8B030D-6E8A-4147-A177-3AD203B41FA5}">
-                      <a16:colId xmlns:a16="http://schemas.microsoft.com/office/drawing/2014/main" val="20000"/>
-                    </a:ext>
-                  </a:extLst>
-                </a:gridCol>
-                <a:gridCol w="822960">
-                  <a:extLst>
-                    <a:ext uri="{9D8B030D-6E8A-4147-A177-3AD203B41FA5}">
-                      <a16:colId xmlns:a16="http://schemas.microsoft.com/office/drawing/2014/main" val="20001"/>
-                    </a:ext>
-                  </a:extLst>
-                </a:gridCol>
-                <a:gridCol w="2743200">
-                  <a:extLst>
-                    <a:ext uri="{9D8B030D-6E8A-4147-A177-3AD203B41FA5}">
-                      <a16:colId xmlns:a16="http://schemas.microsoft.com/office/drawing/2014/main" val="20002"/>
-                    </a:ext>
-                  </a:extLst>
-                </a:gridCol>
-                <a:gridCol w="1463040">
-                  <a:extLst>
-                    <a:ext uri="{9D8B030D-6E8A-4147-A177-3AD203B41FA5}">
-                      <a16:colId xmlns:a16="http://schemas.microsoft.com/office/drawing/2014/main" val="20003"/>
-                    </a:ext>
-                  </a:extLst>
-                </a:gridCol>
-                <a:gridCol w="1371600">
-                  <a:extLst>
-                    <a:ext uri="{9D8B030D-6E8A-4147-A177-3AD203B41FA5}">
-                      <a16:colId xmlns:a16="http://schemas.microsoft.com/office/drawing/2014/main" val="20004"/>
-                    </a:ext>
-                  </a:extLst>
-                </a:gridCol>
-                <a:gridCol w="2011680">
-                  <a:extLst>
-                    <a:ext uri="{9D8B030D-6E8A-4147-A177-3AD203B41FA5}">
-                      <a16:colId xmlns:a16="http://schemas.microsoft.com/office/drawing/2014/main" val="20005"/>
-                    </a:ext>
-                  </a:extLst>
-                </a:gridCol>
-              </a:tblGrid>
-              <a:tr h="384048">
-                <a:tc>
-                  <a:txBody>
-                    <a:bodyPr/>
-                    <a:lstStyle/>
-                    <a:p>
-                      <a:pPr marL="0" indent="0" eaLnBrk="0">
-                        <a:buNone/>
-                      </a:pPr>
-                      <a:r>
-                        <a:rPr lang="en-US" sz="1200" dirty="0">
-                          <a:solidFill>
-                            <a:srgbClr val="1D1D1F"/>
-                          </a:solidFill>
-                          <a:latin typeface="나눔스퀘어 네오 Bold" pitchFamily="34" charset="0"/>
-                          <a:ea typeface="나눔스퀘어 네오 Bold" pitchFamily="34" charset="-122"/>
-                          <a:cs typeface="나눔스퀘어 네오 Bold" pitchFamily="34" charset="-120"/>
-                        </a:rPr>
-                        <a:t>합성 정답 장면: 피벗 R</a:t>
-                      </a:r>
-                      <a:endParaRPr lang="en-US" sz="1200" dirty="0">
-                        <a:latin typeface="나눔스퀘어 네오 Regular" charset="0"/>
-                        <a:ea typeface="나눔스퀘어 네오 Regular" charset="0"/>
-                        <a:cs typeface="나눔스퀘어 네오 Regular" charset="0"/>
-                      </a:endParaRPr>
-                    </a:p>
-                  </a:txBody>
-                  <a:tcPr marL="73152" marR="73152" marT="36576" marB="36576" anchor="ctr">
-                    <a:lnL w="6350" cap="flat" cmpd="sng" algn="ctr">
-                      <a:solidFill>
-                        <a:srgbClr val="E0E0E0"/>
-                      </a:solidFill>
-                      <a:prstDash val="solid"/>
-                      <a:round/>
-                      <a:headEnd type="none" w="med" len="med"/>
-                      <a:tailEnd type="none" w="med" len="med"/>
-                    </a:lnL>
-                    <a:lnR w="6350" cap="flat" cmpd="sng" algn="ctr">
-                      <a:solidFill>
-                        <a:srgbClr val="E0E0E0"/>
-                      </a:solidFill>
-                      <a:prstDash val="solid"/>
-                      <a:round/>
-                      <a:headEnd type="none" w="med" len="med"/>
-                      <a:tailEnd type="none" w="med" len="med"/>
-                    </a:lnR>
-                    <a:lnT w="6350" cap="flat" cmpd="sng" algn="ctr">
-                      <a:solidFill>
-                        <a:srgbClr val="E0E0E0"/>
-                      </a:solidFill>
-                      <a:prstDash val="solid"/>
-                      <a:round/>
-                      <a:headEnd type="none" w="med" len="med"/>
-                      <a:tailEnd type="none" w="med" len="med"/>
-                    </a:lnT>
-                    <a:lnB w="6350" cap="flat" cmpd="sng" algn="ctr">
-                      <a:solidFill>
-                        <a:srgbClr val="E0E0E0"/>
-                      </a:solidFill>
-                      <a:prstDash val="solid"/>
-                      <a:round/>
-                      <a:headEnd type="none" w="med" len="med"/>
-                      <a:tailEnd type="none" w="med" len="med"/>
-                    </a:lnB>
-                    <a:solidFill>
-                      <a:srgbClr val="F5F5F7"/>
-                    </a:solidFill>
-                  </a:tcPr>
-                </a:tc>
-                <a:tc>
-                  <a:txBody>
-                    <a:bodyPr/>
-                    <a:lstStyle/>
-                    <a:p>
-                      <a:pPr marL="0" indent="0" eaLnBrk="0">
-                        <a:buNone/>
-                      </a:pPr>
-                      <a:r>
-                        <a:rPr lang="en-US" sz="1200" dirty="0">
-                          <a:solidFill>
-                            <a:srgbClr val="1D1D1F"/>
-                          </a:solidFill>
-                          <a:latin typeface="나눔스퀘어 네오 Bold" pitchFamily="34" charset="0"/>
-                          <a:ea typeface="나눔스퀘어 네오 Bold" pitchFamily="34" charset="-122"/>
-                          <a:cs typeface="나눔스퀘어 네오 Bold" pitchFamily="34" charset="-120"/>
-                        </a:rPr>
-                        <a:t>회전각</a:t>
-                      </a:r>
-                      <a:endParaRPr lang="en-US" sz="1200" dirty="0">
-                        <a:latin typeface="나눔스퀘어 네오 Regular" charset="0"/>
-                        <a:ea typeface="나눔스퀘어 네오 Regular" charset="0"/>
-                        <a:cs typeface="나눔스퀘어 네오 Regular" charset="0"/>
-                      </a:endParaRPr>
-                    </a:p>
-                  </a:txBody>
-                  <a:tcPr marL="73152" marR="73152" marT="36576" marB="36576" anchor="ctr">
-                    <a:lnL w="6350" cap="flat" cmpd="sng" algn="ctr">
-                      <a:solidFill>
-                        <a:srgbClr val="E0E0E0"/>
-                      </a:solidFill>
-                      <a:prstDash val="solid"/>
-                      <a:round/>
-                      <a:headEnd type="none" w="med" len="med"/>
-                      <a:tailEnd type="none" w="med" len="med"/>
-                    </a:lnL>
-                    <a:lnR w="6350" cap="flat" cmpd="sng" algn="ctr">
-                      <a:solidFill>
-                        <a:srgbClr val="E0E0E0"/>
-                      </a:solidFill>
-                      <a:prstDash val="solid"/>
-                      <a:round/>
-                      <a:headEnd type="none" w="med" len="med"/>
-                      <a:tailEnd type="none" w="med" len="med"/>
-                    </a:lnR>
-                    <a:lnT w="6350" cap="flat" cmpd="sng" algn="ctr">
-                      <a:solidFill>
-                        <a:srgbClr val="E0E0E0"/>
-                      </a:solidFill>
-                      <a:prstDash val="solid"/>
-                      <a:round/>
-                      <a:headEnd type="none" w="med" len="med"/>
-                      <a:tailEnd type="none" w="med" len="med"/>
-                    </a:lnT>
-                    <a:lnB w="6350" cap="flat" cmpd="sng" algn="ctr">
-                      <a:solidFill>
-                        <a:srgbClr val="E0E0E0"/>
-                      </a:solidFill>
-                      <a:prstDash val="solid"/>
-                      <a:round/>
-                      <a:headEnd type="none" w="med" len="med"/>
-                      <a:tailEnd type="none" w="med" len="med"/>
-                    </a:lnB>
-                    <a:solidFill>
-                      <a:srgbClr val="F5F5F7"/>
-                    </a:solidFill>
-                  </a:tcPr>
-                </a:tc>
-                <a:tc>
-                  <a:txBody>
-                    <a:bodyPr/>
-                    <a:lstStyle/>
-                    <a:p>
-                      <a:pPr marL="0" indent="0" eaLnBrk="0">
-                        <a:buNone/>
-                      </a:pPr>
-                      <a:r>
-                        <a:rPr lang="en-US" sz="1200" dirty="0">
-                          <a:solidFill>
-                            <a:srgbClr val="1D1D1F"/>
-                          </a:solidFill>
-                          <a:latin typeface="나눔스퀘어 네오 Bold" pitchFamily="34" charset="0"/>
-                          <a:ea typeface="나눔스퀘어 네오 Bold" pitchFamily="34" charset="-122"/>
-                          <a:cs typeface="나눔스퀘어 네오 Bold" pitchFamily="34" charset="-120"/>
-                        </a:rPr>
-                        <a:t>복원된 R (시드 3개)</a:t>
-                      </a:r>
-                      <a:endParaRPr lang="en-US" sz="1200" dirty="0">
-                        <a:latin typeface="나눔스퀘어 네오 Regular" charset="0"/>
-                        <a:ea typeface="나눔스퀘어 네오 Regular" charset="0"/>
-                        <a:cs typeface="나눔스퀘어 네오 Regular" charset="0"/>
-                      </a:endParaRPr>
-                    </a:p>
-                  </a:txBody>
-                  <a:tcPr marL="73152" marR="73152" marT="36576" marB="36576" anchor="ctr">
-                    <a:lnL w="6350" cap="flat" cmpd="sng" algn="ctr">
-                      <a:solidFill>
-                        <a:srgbClr val="E0E0E0"/>
-                      </a:solidFill>
-                      <a:prstDash val="solid"/>
-                      <a:round/>
-                      <a:headEnd type="none" w="med" len="med"/>
-                      <a:tailEnd type="none" w="med" len="med"/>
-                    </a:lnL>
-                    <a:lnR w="6350" cap="flat" cmpd="sng" algn="ctr">
-                      <a:solidFill>
-                        <a:srgbClr val="E0E0E0"/>
-                      </a:solidFill>
-                      <a:prstDash val="solid"/>
-                      <a:round/>
-                      <a:headEnd type="none" w="med" len="med"/>
-                      <a:tailEnd type="none" w="med" len="med"/>
-                    </a:lnR>
-                    <a:lnT w="6350" cap="flat" cmpd="sng" algn="ctr">
-                      <a:solidFill>
-                        <a:srgbClr val="E0E0E0"/>
-                      </a:solidFill>
-                      <a:prstDash val="solid"/>
-                      <a:round/>
-                      <a:headEnd type="none" w="med" len="med"/>
-                      <a:tailEnd type="none" w="med" len="med"/>
-                    </a:lnT>
-                    <a:lnB w="6350" cap="flat" cmpd="sng" algn="ctr">
-                      <a:solidFill>
-                        <a:srgbClr val="E0E0E0"/>
-                      </a:solidFill>
-                      <a:prstDash val="solid"/>
-                      <a:round/>
-                      <a:headEnd type="none" w="med" len="med"/>
-                      <a:tailEnd type="none" w="med" len="med"/>
-                    </a:lnB>
-                    <a:solidFill>
-                      <a:srgbClr val="F5F5F7"/>
-                    </a:solidFill>
-                  </a:tcPr>
-                </a:tc>
-                <a:tc>
-                  <a:txBody>
-                    <a:bodyPr/>
-                    <a:lstStyle/>
-                    <a:p>
-                      <a:pPr marL="0" indent="0" eaLnBrk="0">
-                        <a:buNone/>
-                      </a:pPr>
-                      <a:r>
-                        <a:rPr lang="en-US" sz="1200" dirty="0">
-                          <a:solidFill>
-                            <a:srgbClr val="1D1D1F"/>
-                          </a:solidFill>
-                          <a:latin typeface="나눔스퀘어 네오 Bold" pitchFamily="34" charset="0"/>
-                          <a:ea typeface="나눔스퀘어 네오 Bold" pitchFamily="34" charset="-122"/>
-                          <a:cs typeface="나눔스퀘어 네오 Bold" pitchFamily="34" charset="-120"/>
-                        </a:rPr>
-                        <a:t>자기보정</a:t>
-                      </a:r>
-                      <a:endParaRPr lang="en-US" sz="1200" dirty="0">
-                        <a:latin typeface="나눔스퀘어 네오 Regular" charset="0"/>
-                        <a:ea typeface="나눔스퀘어 네오 Regular" charset="0"/>
-                        <a:cs typeface="나눔스퀘어 네오 Regular" charset="0"/>
-                      </a:endParaRPr>
-                    </a:p>
-                  </a:txBody>
-                  <a:tcPr marL="73152" marR="73152" marT="36576" marB="36576" anchor="ctr">
-                    <a:lnL w="6350" cap="flat" cmpd="sng" algn="ctr">
-                      <a:solidFill>
-                        <a:srgbClr val="E0E0E0"/>
-                      </a:solidFill>
-                      <a:prstDash val="solid"/>
-                      <a:round/>
-                      <a:headEnd type="none" w="med" len="med"/>
-                      <a:tailEnd type="none" w="med" len="med"/>
-                    </a:lnL>
-                    <a:lnR w="6350" cap="flat" cmpd="sng" algn="ctr">
-                      <a:solidFill>
-                        <a:srgbClr val="E0E0E0"/>
-                      </a:solidFill>
-                      <a:prstDash val="solid"/>
-                      <a:round/>
-                      <a:headEnd type="none" w="med" len="med"/>
-                      <a:tailEnd type="none" w="med" len="med"/>
-                    </a:lnR>
-                    <a:lnT w="6350" cap="flat" cmpd="sng" algn="ctr">
-                      <a:solidFill>
-                        <a:srgbClr val="E0E0E0"/>
-                      </a:solidFill>
-                      <a:prstDash val="solid"/>
-                      <a:round/>
-                      <a:headEnd type="none" w="med" len="med"/>
-                      <a:tailEnd type="none" w="med" len="med"/>
-                    </a:lnT>
-                    <a:lnB w="6350" cap="flat" cmpd="sng" algn="ctr">
-                      <a:solidFill>
-                        <a:srgbClr val="E0E0E0"/>
-                      </a:solidFill>
-                      <a:prstDash val="solid"/>
-                      <a:round/>
-                      <a:headEnd type="none" w="med" len="med"/>
-                      <a:tailEnd type="none" w="med" len="med"/>
-                    </a:lnB>
-                    <a:solidFill>
-                      <a:srgbClr val="F5F5F7"/>
-                    </a:solidFill>
-                  </a:tcPr>
-                </a:tc>
-                <a:tc>
-                  <a:txBody>
-                    <a:bodyPr/>
-                    <a:lstStyle/>
-                    <a:p>
-                      <a:pPr marL="0" indent="0" eaLnBrk="0">
-                        <a:buNone/>
-                      </a:pPr>
-                      <a:r>
-                        <a:rPr lang="en-US" sz="1200" dirty="0">
-                          <a:solidFill>
-                            <a:srgbClr val="1D1D1F"/>
-                          </a:solidFill>
-                          <a:latin typeface="나눔스퀘어 네오 Bold" pitchFamily="34" charset="0"/>
-                          <a:ea typeface="나눔스퀘어 네오 Bold" pitchFamily="34" charset="-122"/>
-                          <a:cs typeface="나눔스퀘어 네오 Bold" pitchFamily="34" charset="-120"/>
-                        </a:rPr>
-                        <a:t>재맞춤</a:t>
-                      </a:r>
-                      <a:endParaRPr lang="en-US" sz="1200" dirty="0">
-                        <a:latin typeface="나눔스퀘어 네오 Regular" charset="0"/>
-                        <a:ea typeface="나눔스퀘어 네오 Regular" charset="0"/>
-                        <a:cs typeface="나눔스퀘어 네오 Regular" charset="0"/>
-                      </a:endParaRPr>
-                    </a:p>
-                  </a:txBody>
-                  <a:tcPr marL="73152" marR="73152" marT="36576" marB="36576" anchor="ctr">
-                    <a:lnL w="6350" cap="flat" cmpd="sng" algn="ctr">
-                      <a:solidFill>
-                        <a:srgbClr val="E0E0E0"/>
-                      </a:solidFill>
-                      <a:prstDash val="solid"/>
-                      <a:round/>
-                      <a:headEnd type="none" w="med" len="med"/>
-                      <a:tailEnd type="none" w="med" len="med"/>
-                    </a:lnL>
-                    <a:lnR w="6350" cap="flat" cmpd="sng" algn="ctr">
-                      <a:solidFill>
-                        <a:srgbClr val="E0E0E0"/>
-                      </a:solidFill>
-                      <a:prstDash val="solid"/>
-                      <a:round/>
-                      <a:headEnd type="none" w="med" len="med"/>
-                      <a:tailEnd type="none" w="med" len="med"/>
-                    </a:lnR>
-                    <a:lnT w="6350" cap="flat" cmpd="sng" algn="ctr">
-                      <a:solidFill>
-                        <a:srgbClr val="E0E0E0"/>
-                      </a:solidFill>
-                      <a:prstDash val="solid"/>
-                      <a:round/>
-                      <a:headEnd type="none" w="med" len="med"/>
-                      <a:tailEnd type="none" w="med" len="med"/>
-                    </a:lnT>
-                    <a:lnB w="6350" cap="flat" cmpd="sng" algn="ctr">
-                      <a:solidFill>
-                        <a:srgbClr val="E0E0E0"/>
-                      </a:solidFill>
-                      <a:prstDash val="solid"/>
-                      <a:round/>
-                      <a:headEnd type="none" w="med" len="med"/>
-                      <a:tailEnd type="none" w="med" len="med"/>
-                    </a:lnB>
-                    <a:solidFill>
-                      <a:srgbClr val="F5F5F7"/>
-                    </a:solidFill>
-                  </a:tcPr>
-                </a:tc>
-                <a:tc>
-                  <a:txBody>
-                    <a:bodyPr/>
-                    <a:lstStyle/>
-                    <a:p>
-                      <a:pPr marL="0" indent="0" eaLnBrk="0">
-                        <a:buNone/>
-                      </a:pPr>
-                      <a:r>
-                        <a:rPr lang="en-US" sz="1200" dirty="0">
-                          <a:solidFill>
-                            <a:srgbClr val="1D1D1F"/>
-                          </a:solidFill>
-                          <a:latin typeface="나눔스퀘어 네오 Bold" pitchFamily="34" charset="0"/>
-                          <a:ea typeface="나눔스퀘어 네오 Bold" pitchFamily="34" charset="-122"/>
-                          <a:cs typeface="나눔스퀘어 네오 Bold" pitchFamily="34" charset="-120"/>
-                        </a:rPr>
-                        <a:t>프리즈</a:t>
-                      </a:r>
-                      <a:endParaRPr lang="en-US" sz="1200" dirty="0">
-                        <a:latin typeface="나눔스퀘어 네오 Regular" charset="0"/>
-                        <a:ea typeface="나눔스퀘어 네오 Regular" charset="0"/>
-                        <a:cs typeface="나눔스퀘어 네오 Regular" charset="0"/>
-                      </a:endParaRPr>
-                    </a:p>
-                  </a:txBody>
-                  <a:tcPr marL="73152" marR="73152" marT="36576" marB="36576" anchor="ctr">
-                    <a:lnL w="6350" cap="flat" cmpd="sng" algn="ctr">
-                      <a:solidFill>
-                        <a:srgbClr val="E0E0E0"/>
-                      </a:solidFill>
-                      <a:prstDash val="solid"/>
-                      <a:round/>
-                      <a:headEnd type="none" w="med" len="med"/>
-                      <a:tailEnd type="none" w="med" len="med"/>
-                    </a:lnL>
-                    <a:lnR w="6350" cap="flat" cmpd="sng" algn="ctr">
-                      <a:solidFill>
-                        <a:srgbClr val="E0E0E0"/>
-                      </a:solidFill>
-                      <a:prstDash val="solid"/>
-                      <a:round/>
-                      <a:headEnd type="none" w="med" len="med"/>
-                      <a:tailEnd type="none" w="med" len="med"/>
-                    </a:lnR>
-                    <a:lnT w="6350" cap="flat" cmpd="sng" algn="ctr">
-                      <a:solidFill>
-                        <a:srgbClr val="E0E0E0"/>
-                      </a:solidFill>
-                      <a:prstDash val="solid"/>
-                      <a:round/>
-                      <a:headEnd type="none" w="med" len="med"/>
-                      <a:tailEnd type="none" w="med" len="med"/>
-                    </a:lnT>
-                    <a:lnB w="6350" cap="flat" cmpd="sng" algn="ctr">
-                      <a:solidFill>
-                        <a:srgbClr val="E0E0E0"/>
-                      </a:solidFill>
-                      <a:prstDash val="solid"/>
-                      <a:round/>
-                      <a:headEnd type="none" w="med" len="med"/>
-                      <a:tailEnd type="none" w="med" len="med"/>
-                    </a:lnB>
-                    <a:solidFill>
-                      <a:srgbClr val="F5F5F7"/>
-                    </a:solidFill>
-                  </a:tcPr>
-                </a:tc>
-                <a:extLst>
-                  <a:ext uri="{0D108BD9-81ED-4DB2-BD59-A6C34878D82A}">
-                    <a16:rowId xmlns:a16="http://schemas.microsoft.com/office/drawing/2014/main" val="10000"/>
-                  </a:ext>
-                </a:extLst>
-              </a:tr>
-              <a:tr h="384048">
-                <a:tc>
-                  <a:txBody>
-                    <a:bodyPr/>
-                    <a:lstStyle/>
-                    <a:p>
-                      <a:pPr marL="0" indent="0" eaLnBrk="0">
-                        <a:buNone/>
-                      </a:pPr>
-                      <a:r>
-                        <a:rPr lang="en-US" sz="1200" dirty="0">
-                          <a:solidFill>
-                            <a:srgbClr val="1D1D1F"/>
-                          </a:solidFill>
-                          <a:latin typeface="나눔스퀘어 네오 Regular" pitchFamily="34" charset="0"/>
-                          <a:ea typeface="나눔스퀘어 네오 Regular" pitchFamily="34" charset="-122"/>
-                          <a:cs typeface="나눔스퀘어 네오 Regular" pitchFamily="34" charset="-120"/>
-                        </a:rPr>
-                        <a:t>50~150 px (G1~G4)</a:t>
-                      </a:r>
-                      <a:endParaRPr lang="en-US" sz="1200" dirty="0">
-                        <a:latin typeface="나눔스퀘어 네오 Regular" charset="0"/>
-                        <a:ea typeface="나눔스퀘어 네오 Regular" charset="0"/>
-                        <a:cs typeface="나눔스퀘어 네오 Regular" charset="0"/>
-                      </a:endParaRPr>
-                    </a:p>
-                  </a:txBody>
-                  <a:tcPr marL="73152" marR="73152" marT="36576" marB="36576" anchor="ctr">
-                    <a:lnL w="6350" cap="flat" cmpd="sng" algn="ctr">
-                      <a:solidFill>
-                        <a:srgbClr val="E0E0E0"/>
-                      </a:solidFill>
-                      <a:prstDash val="solid"/>
-                      <a:round/>
-                      <a:headEnd type="none" w="med" len="med"/>
-                      <a:tailEnd type="none" w="med" len="med"/>
-                    </a:lnL>
-                    <a:lnR w="6350" cap="flat" cmpd="sng" algn="ctr">
-                      <a:solidFill>
-                        <a:srgbClr val="E0E0E0"/>
-                      </a:solidFill>
-                      <a:prstDash val="solid"/>
-                      <a:round/>
-                      <a:headEnd type="none" w="med" len="med"/>
-                      <a:tailEnd type="none" w="med" len="med"/>
-                    </a:lnR>
-                    <a:lnT w="6350" cap="flat" cmpd="sng" algn="ctr">
-                      <a:solidFill>
-                        <a:srgbClr val="E0E0E0"/>
-                      </a:solidFill>
-                      <a:prstDash val="solid"/>
-                      <a:round/>
-                      <a:headEnd type="none" w="med" len="med"/>
-                      <a:tailEnd type="none" w="med" len="med"/>
-                    </a:lnT>
-                    <a:lnB w="6350" cap="flat" cmpd="sng" algn="ctr">
-                      <a:solidFill>
-                        <a:srgbClr val="E0E0E0"/>
-                      </a:solidFill>
-                      <a:prstDash val="solid"/>
-                      <a:round/>
-                      <a:headEnd type="none" w="med" len="med"/>
-                      <a:tailEnd type="none" w="med" len="med"/>
-                    </a:lnB>
-                    <a:solidFill>
-                      <a:srgbClr val="FFFFFF"/>
-                    </a:solidFill>
-                  </a:tcPr>
-                </a:tc>
-                <a:tc>
-                  <a:txBody>
-                    <a:bodyPr/>
-                    <a:lstStyle/>
-                    <a:p>
-                      <a:pPr marL="0" indent="0" eaLnBrk="0">
-                        <a:buNone/>
-                      </a:pPr>
-                      <a:r>
-                        <a:rPr lang="en-US" sz="1200" dirty="0">
-                          <a:solidFill>
-                            <a:srgbClr val="1D1D1F"/>
-                          </a:solidFill>
-                          <a:latin typeface="나눔스퀘어 네오 Regular" pitchFamily="34" charset="0"/>
-                          <a:ea typeface="나눔스퀘어 네오 Regular" pitchFamily="34" charset="-122"/>
-                          <a:cs typeface="나눔스퀘어 네오 Regular" pitchFamily="34" charset="-120"/>
-                        </a:rPr>
-                        <a:t>120°</a:t>
-                      </a:r>
-                      <a:endParaRPr lang="en-US" sz="1200" dirty="0">
-                        <a:latin typeface="나눔스퀘어 네오 Regular" charset="0"/>
-                        <a:ea typeface="나눔스퀘어 네오 Regular" charset="0"/>
-                        <a:cs typeface="나눔스퀘어 네오 Regular" charset="0"/>
-                      </a:endParaRPr>
-                    </a:p>
-                  </a:txBody>
-                  <a:tcPr marL="73152" marR="73152" marT="36576" marB="36576" anchor="ctr">
-                    <a:lnL w="6350" cap="flat" cmpd="sng" algn="ctr">
-                      <a:solidFill>
-                        <a:srgbClr val="E0E0E0"/>
-                      </a:solidFill>
-                      <a:prstDash val="solid"/>
-                      <a:round/>
-                      <a:headEnd type="none" w="med" len="med"/>
-                      <a:tailEnd type="none" w="med" len="med"/>
-                    </a:lnL>
-                    <a:lnR w="6350" cap="flat" cmpd="sng" algn="ctr">
-                      <a:solidFill>
-                        <a:srgbClr val="E0E0E0"/>
-                      </a:solidFill>
-                      <a:prstDash val="solid"/>
-                      <a:round/>
-                      <a:headEnd type="none" w="med" len="med"/>
-                      <a:tailEnd type="none" w="med" len="med"/>
-                    </a:lnR>
-                    <a:lnT w="6350" cap="flat" cmpd="sng" algn="ctr">
-                      <a:solidFill>
-                        <a:srgbClr val="E0E0E0"/>
-                      </a:solidFill>
-                      <a:prstDash val="solid"/>
-                      <a:round/>
-                      <a:headEnd type="none" w="med" len="med"/>
-                      <a:tailEnd type="none" w="med" len="med"/>
-                    </a:lnT>
-                    <a:lnB w="6350" cap="flat" cmpd="sng" algn="ctr">
-                      <a:solidFill>
-                        <a:srgbClr val="E0E0E0"/>
-                      </a:solidFill>
-                      <a:prstDash val="solid"/>
-                      <a:round/>
-                      <a:headEnd type="none" w="med" len="med"/>
-                      <a:tailEnd type="none" w="med" len="med"/>
-                    </a:lnB>
-                    <a:solidFill>
-                      <a:srgbClr val="FFFFFF"/>
-                    </a:solidFill>
-                  </a:tcPr>
-                </a:tc>
-                <a:tc>
-                  <a:txBody>
-                    <a:bodyPr/>
-                    <a:lstStyle/>
-                    <a:p>
-                      <a:pPr marL="0" indent="0" eaLnBrk="0">
-                        <a:buNone/>
-                      </a:pPr>
-                      <a:r>
-                        <a:rPr lang="en-US" sz="1200" dirty="0">
-                          <a:solidFill>
-                            <a:srgbClr val="1D1D1F"/>
-                          </a:solidFill>
-                          <a:latin typeface="나눔스퀘어 네오 Regular" pitchFamily="34" charset="0"/>
-                          <a:ea typeface="나눔스퀘어 네오 Regular" pitchFamily="34" charset="-122"/>
-                          <a:cs typeface="나눔스퀘어 네오 Regular" pitchFamily="34" charset="-120"/>
-                        </a:rPr>
-                        <a:t>오차 0.7~6.9 px</a:t>
-                      </a:r>
-                      <a:endParaRPr lang="en-US" sz="1200" dirty="0">
-                        <a:latin typeface="나눔스퀘어 네오 Regular" charset="0"/>
-                        <a:ea typeface="나눔스퀘어 네오 Regular" charset="0"/>
-                        <a:cs typeface="나눔스퀘어 네오 Regular" charset="0"/>
-                      </a:endParaRPr>
-                    </a:p>
-                  </a:txBody>
-                  <a:tcPr marL="73152" marR="73152" marT="36576" marB="36576" anchor="ctr">
-                    <a:lnL w="6350" cap="flat" cmpd="sng" algn="ctr">
-                      <a:solidFill>
-                        <a:srgbClr val="E0E0E0"/>
-                      </a:solidFill>
-                      <a:prstDash val="solid"/>
-                      <a:round/>
-                      <a:headEnd type="none" w="med" len="med"/>
-                      <a:tailEnd type="none" w="med" len="med"/>
-                    </a:lnL>
-                    <a:lnR w="6350" cap="flat" cmpd="sng" algn="ctr">
-                      <a:solidFill>
-                        <a:srgbClr val="E0E0E0"/>
-                      </a:solidFill>
-                      <a:prstDash val="solid"/>
-                      <a:round/>
-                      <a:headEnd type="none" w="med" len="med"/>
-                      <a:tailEnd type="none" w="med" len="med"/>
-                    </a:lnR>
-                    <a:lnT w="6350" cap="flat" cmpd="sng" algn="ctr">
-                      <a:solidFill>
-                        <a:srgbClr val="E0E0E0"/>
-                      </a:solidFill>
-                      <a:prstDash val="solid"/>
-                      <a:round/>
-                      <a:headEnd type="none" w="med" len="med"/>
-                      <a:tailEnd type="none" w="med" len="med"/>
-                    </a:lnT>
-                    <a:lnB w="6350" cap="flat" cmpd="sng" algn="ctr">
-                      <a:solidFill>
-                        <a:srgbClr val="E0E0E0"/>
-                      </a:solidFill>
-                      <a:prstDash val="solid"/>
-                      <a:round/>
-                      <a:headEnd type="none" w="med" len="med"/>
-                      <a:tailEnd type="none" w="med" len="med"/>
-                    </a:lnB>
-                    <a:solidFill>
-                      <a:srgbClr val="FFFFFF"/>
-                    </a:solidFill>
-                  </a:tcPr>
-                </a:tc>
-                <a:tc>
-                  <a:txBody>
-                    <a:bodyPr/>
-                    <a:lstStyle/>
-                    <a:p>
-                      <a:pPr marL="0" indent="0" eaLnBrk="0">
-                        <a:buNone/>
-                      </a:pPr>
-                      <a:r>
-                        <a:rPr lang="en-US" sz="1200" dirty="0">
-                          <a:solidFill>
-                            <a:srgbClr val="1D1D1F"/>
-                          </a:solidFill>
-                          <a:latin typeface="나눔스퀘어 네오 Regular" pitchFamily="34" charset="0"/>
-                          <a:ea typeface="나눔스퀘어 네오 Regular" pitchFamily="34" charset="-122"/>
-                          <a:cs typeface="나눔스퀘어 네오 Regular" pitchFamily="34" charset="-120"/>
-                        </a:rPr>
-                        <a:t>1.8~2.1°</a:t>
-                      </a:r>
-                      <a:endParaRPr lang="en-US" sz="1200" dirty="0">
-                        <a:latin typeface="나눔스퀘어 네오 Regular" charset="0"/>
-                        <a:ea typeface="나눔스퀘어 네오 Regular" charset="0"/>
-                        <a:cs typeface="나눔스퀘어 네오 Regular" charset="0"/>
-                      </a:endParaRPr>
-                    </a:p>
-                  </a:txBody>
-                  <a:tcPr marL="73152" marR="73152" marT="36576" marB="36576" anchor="ctr">
-                    <a:lnL w="6350" cap="flat" cmpd="sng" algn="ctr">
-                      <a:solidFill>
-                        <a:srgbClr val="E0E0E0"/>
-                      </a:solidFill>
-                      <a:prstDash val="solid"/>
-                      <a:round/>
-                      <a:headEnd type="none" w="med" len="med"/>
-                      <a:tailEnd type="none" w="med" len="med"/>
-                    </a:lnL>
-                    <a:lnR w="6350" cap="flat" cmpd="sng" algn="ctr">
-                      <a:solidFill>
-                        <a:srgbClr val="E0E0E0"/>
-                      </a:solidFill>
-                      <a:prstDash val="solid"/>
-                      <a:round/>
-                      <a:headEnd type="none" w="med" len="med"/>
-                      <a:tailEnd type="none" w="med" len="med"/>
-                    </a:lnR>
-                    <a:lnT w="6350" cap="flat" cmpd="sng" algn="ctr">
-                      <a:solidFill>
-                        <a:srgbClr val="E0E0E0"/>
-                      </a:solidFill>
-                      <a:prstDash val="solid"/>
-                      <a:round/>
-                      <a:headEnd type="none" w="med" len="med"/>
-                      <a:tailEnd type="none" w="med" len="med"/>
-                    </a:lnT>
-                    <a:lnB w="6350" cap="flat" cmpd="sng" algn="ctr">
-                      <a:solidFill>
-                        <a:srgbClr val="E0E0E0"/>
-                      </a:solidFill>
-                      <a:prstDash val="solid"/>
-                      <a:round/>
-                      <a:headEnd type="none" w="med" len="med"/>
-                      <a:tailEnd type="none" w="med" len="med"/>
-                    </a:lnB>
-                    <a:solidFill>
-                      <a:srgbClr val="FFFFFF"/>
-                    </a:solidFill>
-                  </a:tcPr>
-                </a:tc>
-                <a:tc>
-                  <a:txBody>
-                    <a:bodyPr/>
-                    <a:lstStyle/>
-                    <a:p>
-                      <a:pPr marL="0" indent="0" eaLnBrk="0">
-                        <a:buNone/>
-                      </a:pPr>
-                      <a:r>
-                        <a:rPr lang="en-US" sz="1200" dirty="0">
-                          <a:solidFill>
-                            <a:srgbClr val="1D1D1F"/>
-                          </a:solidFill>
-                          <a:latin typeface="나눔스퀘어 네오 Regular" pitchFamily="34" charset="0"/>
-                          <a:ea typeface="나눔스퀘어 네오 Regular" pitchFamily="34" charset="-122"/>
-                          <a:cs typeface="나눔스퀘어 네오 Regular" pitchFamily="34" charset="-120"/>
-                        </a:rPr>
-                        <a:t>1.8~2.0°</a:t>
-                      </a:r>
-                      <a:endParaRPr lang="en-US" sz="1200" dirty="0">
-                        <a:latin typeface="나눔스퀘어 네오 Regular" charset="0"/>
-                        <a:ea typeface="나눔스퀘어 네오 Regular" charset="0"/>
-                        <a:cs typeface="나눔스퀘어 네오 Regular" charset="0"/>
-                      </a:endParaRPr>
-                    </a:p>
-                  </a:txBody>
-                  <a:tcPr marL="73152" marR="73152" marT="36576" marB="36576" anchor="ctr">
-                    <a:lnL w="6350" cap="flat" cmpd="sng" algn="ctr">
-                      <a:solidFill>
-                        <a:srgbClr val="E0E0E0"/>
-                      </a:solidFill>
-                      <a:prstDash val="solid"/>
-                      <a:round/>
-                      <a:headEnd type="none" w="med" len="med"/>
-                      <a:tailEnd type="none" w="med" len="med"/>
-                    </a:lnL>
-                    <a:lnR w="6350" cap="flat" cmpd="sng" algn="ctr">
-                      <a:solidFill>
-                        <a:srgbClr val="E0E0E0"/>
-                      </a:solidFill>
-                      <a:prstDash val="solid"/>
-                      <a:round/>
-                      <a:headEnd type="none" w="med" len="med"/>
-                      <a:tailEnd type="none" w="med" len="med"/>
-                    </a:lnR>
-                    <a:lnT w="6350" cap="flat" cmpd="sng" algn="ctr">
-                      <a:solidFill>
-                        <a:srgbClr val="E0E0E0"/>
-                      </a:solidFill>
-                      <a:prstDash val="solid"/>
-                      <a:round/>
-                      <a:headEnd type="none" w="med" len="med"/>
-                      <a:tailEnd type="none" w="med" len="med"/>
-                    </a:lnT>
-                    <a:lnB w="6350" cap="flat" cmpd="sng" algn="ctr">
-                      <a:solidFill>
-                        <a:srgbClr val="E0E0E0"/>
-                      </a:solidFill>
-                      <a:prstDash val="solid"/>
-                      <a:round/>
-                      <a:headEnd type="none" w="med" len="med"/>
-                      <a:tailEnd type="none" w="med" len="med"/>
-                    </a:lnB>
-                    <a:solidFill>
-                      <a:srgbClr val="FFFFFF"/>
-                    </a:solidFill>
-                  </a:tcPr>
-                </a:tc>
-                <a:tc>
-                  <a:txBody>
-                    <a:bodyPr/>
-                    <a:lstStyle/>
-                    <a:p>
-                      <a:pPr marL="0" indent="0" eaLnBrk="0">
-                        <a:buNone/>
-                      </a:pPr>
-                      <a:r>
-                        <a:rPr lang="en-US" sz="1200" dirty="0">
-                          <a:solidFill>
-                            <a:srgbClr val="1D1D1F"/>
-                          </a:solidFill>
-                          <a:latin typeface="나눔스퀘어 네오 Regular" pitchFamily="34" charset="0"/>
-                          <a:ea typeface="나눔스퀘어 네오 Regular" pitchFamily="34" charset="-122"/>
-                          <a:cs typeface="나눔스퀘어 네오 Regular" pitchFamily="34" charset="-120"/>
-                        </a:rPr>
-                        <a:t>0.7~2.6°</a:t>
-                      </a:r>
-                      <a:endParaRPr lang="en-US" sz="1200" dirty="0">
-                        <a:latin typeface="나눔스퀘어 네오 Regular" charset="0"/>
-                        <a:ea typeface="나눔스퀘어 네오 Regular" charset="0"/>
-                        <a:cs typeface="나눔스퀘어 네오 Regular" charset="0"/>
-                      </a:endParaRPr>
-                    </a:p>
-                  </a:txBody>
-                  <a:tcPr marL="73152" marR="73152" marT="36576" marB="36576" anchor="ctr">
-                    <a:lnL w="6350" cap="flat" cmpd="sng" algn="ctr">
-                      <a:solidFill>
-                        <a:srgbClr val="E0E0E0"/>
-                      </a:solidFill>
-                      <a:prstDash val="solid"/>
-                      <a:round/>
-                      <a:headEnd type="none" w="med" len="med"/>
-                      <a:tailEnd type="none" w="med" len="med"/>
-                    </a:lnL>
-                    <a:lnR w="6350" cap="flat" cmpd="sng" algn="ctr">
-                      <a:solidFill>
-                        <a:srgbClr val="E0E0E0"/>
-                      </a:solidFill>
-                      <a:prstDash val="solid"/>
-                      <a:round/>
-                      <a:headEnd type="none" w="med" len="med"/>
-                      <a:tailEnd type="none" w="med" len="med"/>
-                    </a:lnR>
-                    <a:lnT w="6350" cap="flat" cmpd="sng" algn="ctr">
-                      <a:solidFill>
-                        <a:srgbClr val="E0E0E0"/>
-                      </a:solidFill>
-                      <a:prstDash val="solid"/>
-                      <a:round/>
-                      <a:headEnd type="none" w="med" len="med"/>
-                      <a:tailEnd type="none" w="med" len="med"/>
-                    </a:lnT>
-                    <a:lnB w="6350" cap="flat" cmpd="sng" algn="ctr">
-                      <a:solidFill>
-                        <a:srgbClr val="E0E0E0"/>
-                      </a:solidFill>
-                      <a:prstDash val="solid"/>
-                      <a:round/>
-                      <a:headEnd type="none" w="med" len="med"/>
-                      <a:tailEnd type="none" w="med" len="med"/>
-                    </a:lnB>
-                    <a:solidFill>
-                      <a:srgbClr val="FFFFFF"/>
-                    </a:solidFill>
-                  </a:tcPr>
-                </a:tc>
-                <a:extLst>
-                  <a:ext uri="{0D108BD9-81ED-4DB2-BD59-A6C34878D82A}">
-                    <a16:rowId xmlns:a16="http://schemas.microsoft.com/office/drawing/2014/main" val="10001"/>
-                  </a:ext>
-                </a:extLst>
-              </a:tr>
-              <a:tr h="384048">
-                <a:tc>
-                  <a:txBody>
-                    <a:bodyPr/>
-                    <a:lstStyle/>
-                    <a:p>
-                      <a:pPr marL="0" indent="0" eaLnBrk="0">
-                        <a:buNone/>
-                      </a:pPr>
-                      <a:r>
-                        <a:rPr lang="en-US" sz="1200" dirty="0">
-                          <a:solidFill>
-                            <a:srgbClr val="1D1D1F"/>
-                          </a:solidFill>
-                          <a:latin typeface="나눔스퀘어 네오 Regular" pitchFamily="34" charset="0"/>
-                          <a:ea typeface="나눔스퀘어 네오 Regular" pitchFamily="34" charset="-122"/>
-                          <a:cs typeface="나눔스퀘어 네오 Regular" pitchFamily="34" charset="-120"/>
-                        </a:rPr>
-                        <a:t>1,552 px (V1)</a:t>
-                      </a:r>
-                      <a:endParaRPr lang="en-US" sz="1200" dirty="0">
-                        <a:latin typeface="나눔스퀘어 네오 Regular" charset="0"/>
-                        <a:ea typeface="나눔스퀘어 네오 Regular" charset="0"/>
-                        <a:cs typeface="나눔스퀘어 네오 Regular" charset="0"/>
-                      </a:endParaRPr>
-                    </a:p>
-                  </a:txBody>
-                  <a:tcPr marL="73152" marR="73152" marT="36576" marB="36576" anchor="ctr">
-                    <a:lnL w="6350" cap="flat" cmpd="sng" algn="ctr">
-                      <a:solidFill>
-                        <a:srgbClr val="E0E0E0"/>
-                      </a:solidFill>
-                      <a:prstDash val="solid"/>
-                      <a:round/>
-                      <a:headEnd type="none" w="med" len="med"/>
-                      <a:tailEnd type="none" w="med" len="med"/>
-                    </a:lnL>
-                    <a:lnR w="6350" cap="flat" cmpd="sng" algn="ctr">
-                      <a:solidFill>
-                        <a:srgbClr val="E0E0E0"/>
-                      </a:solidFill>
-                      <a:prstDash val="solid"/>
-                      <a:round/>
-                      <a:headEnd type="none" w="med" len="med"/>
-                      <a:tailEnd type="none" w="med" len="med"/>
-                    </a:lnR>
-                    <a:lnT w="6350" cap="flat" cmpd="sng" algn="ctr">
-                      <a:solidFill>
-                        <a:srgbClr val="E0E0E0"/>
-                      </a:solidFill>
-                      <a:prstDash val="solid"/>
-                      <a:round/>
-                      <a:headEnd type="none" w="med" len="med"/>
-                      <a:tailEnd type="none" w="med" len="med"/>
-                    </a:lnT>
-                    <a:lnB w="6350" cap="flat" cmpd="sng" algn="ctr">
-                      <a:solidFill>
-                        <a:srgbClr val="E0E0E0"/>
-                      </a:solidFill>
-                      <a:prstDash val="solid"/>
-                      <a:round/>
-                      <a:headEnd type="none" w="med" len="med"/>
-                      <a:tailEnd type="none" w="med" len="med"/>
-                    </a:lnB>
-                    <a:solidFill>
-                      <a:srgbClr val="FFFFFF"/>
-                    </a:solidFill>
-                  </a:tcPr>
-                </a:tc>
-                <a:tc>
-                  <a:txBody>
-                    <a:bodyPr/>
-                    <a:lstStyle/>
-                    <a:p>
-                      <a:pPr marL="0" indent="0" eaLnBrk="0">
-                        <a:buNone/>
-                      </a:pPr>
-                      <a:r>
-                        <a:rPr lang="en-US" sz="1200" dirty="0">
-                          <a:solidFill>
-                            <a:srgbClr val="1D1D1F"/>
-                          </a:solidFill>
-                          <a:latin typeface="나눔스퀘어 네오 Regular" pitchFamily="34" charset="0"/>
-                          <a:ea typeface="나눔스퀘어 네오 Regular" pitchFamily="34" charset="-122"/>
-                          <a:cs typeface="나눔스퀘어 네오 Regular" pitchFamily="34" charset="-120"/>
-                        </a:rPr>
-                        <a:t>20°</a:t>
-                      </a:r>
-                      <a:endParaRPr lang="en-US" sz="1200" dirty="0">
-                        <a:latin typeface="나눔스퀘어 네오 Regular" charset="0"/>
-                        <a:ea typeface="나눔스퀘어 네오 Regular" charset="0"/>
-                        <a:cs typeface="나눔스퀘어 네오 Regular" charset="0"/>
-                      </a:endParaRPr>
-                    </a:p>
-                  </a:txBody>
-                  <a:tcPr marL="73152" marR="73152" marT="36576" marB="36576" anchor="ctr">
-                    <a:lnL w="6350" cap="flat" cmpd="sng" algn="ctr">
-                      <a:solidFill>
-                        <a:srgbClr val="E0E0E0"/>
-                      </a:solidFill>
-                      <a:prstDash val="solid"/>
-                      <a:round/>
-                      <a:headEnd type="none" w="med" len="med"/>
-                      <a:tailEnd type="none" w="med" len="med"/>
-                    </a:lnL>
-                    <a:lnR w="6350" cap="flat" cmpd="sng" algn="ctr">
-                      <a:solidFill>
-                        <a:srgbClr val="E0E0E0"/>
-                      </a:solidFill>
-                      <a:prstDash val="solid"/>
-                      <a:round/>
-                      <a:headEnd type="none" w="med" len="med"/>
-                      <a:tailEnd type="none" w="med" len="med"/>
-                    </a:lnR>
-                    <a:lnT w="6350" cap="flat" cmpd="sng" algn="ctr">
-                      <a:solidFill>
-                        <a:srgbClr val="E0E0E0"/>
-                      </a:solidFill>
-                      <a:prstDash val="solid"/>
-                      <a:round/>
-                      <a:headEnd type="none" w="med" len="med"/>
-                      <a:tailEnd type="none" w="med" len="med"/>
-                    </a:lnT>
-                    <a:lnB w="6350" cap="flat" cmpd="sng" algn="ctr">
-                      <a:solidFill>
-                        <a:srgbClr val="E0E0E0"/>
-                      </a:solidFill>
-                      <a:prstDash val="solid"/>
-                      <a:round/>
-                      <a:headEnd type="none" w="med" len="med"/>
-                      <a:tailEnd type="none" w="med" len="med"/>
-                    </a:lnB>
-                    <a:solidFill>
-                      <a:srgbClr val="FFFFFF"/>
-                    </a:solidFill>
-                  </a:tcPr>
-                </a:tc>
-                <a:tc>
-                  <a:txBody>
-                    <a:bodyPr/>
-                    <a:lstStyle/>
-                    <a:p>
-                      <a:pPr marL="0" indent="0" eaLnBrk="0">
-                        <a:buNone/>
-                      </a:pPr>
-                      <a:r>
-                        <a:rPr lang="en-US" sz="1200" dirty="0">
-                          <a:solidFill>
-                            <a:srgbClr val="1D1D1F"/>
-                          </a:solidFill>
-                          <a:latin typeface="나눔스퀘어 네오 Regular" pitchFamily="34" charset="0"/>
-                          <a:ea typeface="나눔스퀘어 네오 Regular" pitchFamily="34" charset="-122"/>
-                          <a:cs typeface="나눔스퀘어 네오 Regular" pitchFamily="34" charset="-120"/>
-                        </a:rPr>
-                        <a:t>1,516 / 1,525 / 1,611</a:t>
-                      </a:r>
-                      <a:endParaRPr lang="en-US" sz="1200" dirty="0">
-                        <a:latin typeface="나눔스퀘어 네오 Regular" charset="0"/>
-                        <a:ea typeface="나눔스퀘어 네오 Regular" charset="0"/>
-                        <a:cs typeface="나눔스퀘어 네오 Regular" charset="0"/>
-                      </a:endParaRPr>
-                    </a:p>
-                  </a:txBody>
-                  <a:tcPr marL="73152" marR="73152" marT="36576" marB="36576" anchor="ctr">
-                    <a:lnL w="6350" cap="flat" cmpd="sng" algn="ctr">
-                      <a:solidFill>
-                        <a:srgbClr val="E0E0E0"/>
-                      </a:solidFill>
-                      <a:prstDash val="solid"/>
-                      <a:round/>
-                      <a:headEnd type="none" w="med" len="med"/>
-                      <a:tailEnd type="none" w="med" len="med"/>
-                    </a:lnL>
-                    <a:lnR w="6350" cap="flat" cmpd="sng" algn="ctr">
-                      <a:solidFill>
-                        <a:srgbClr val="E0E0E0"/>
-                      </a:solidFill>
-                      <a:prstDash val="solid"/>
-                      <a:round/>
-                      <a:headEnd type="none" w="med" len="med"/>
-                      <a:tailEnd type="none" w="med" len="med"/>
-                    </a:lnR>
-                    <a:lnT w="6350" cap="flat" cmpd="sng" algn="ctr">
-                      <a:solidFill>
-                        <a:srgbClr val="E0E0E0"/>
-                      </a:solidFill>
-                      <a:prstDash val="solid"/>
-                      <a:round/>
-                      <a:headEnd type="none" w="med" len="med"/>
-                      <a:tailEnd type="none" w="med" len="med"/>
-                    </a:lnT>
-                    <a:lnB w="6350" cap="flat" cmpd="sng" algn="ctr">
-                      <a:solidFill>
-                        <a:srgbClr val="E0E0E0"/>
-                      </a:solidFill>
-                      <a:prstDash val="solid"/>
-                      <a:round/>
-                      <a:headEnd type="none" w="med" len="med"/>
-                      <a:tailEnd type="none" w="med" len="med"/>
-                    </a:lnB>
-                    <a:solidFill>
-                      <a:srgbClr val="FFFFFF"/>
-                    </a:solidFill>
-                  </a:tcPr>
-                </a:tc>
-                <a:tc>
-                  <a:txBody>
-                    <a:bodyPr/>
-                    <a:lstStyle/>
-                    <a:p>
-                      <a:pPr marL="0" indent="0" eaLnBrk="0">
-                        <a:buNone/>
-                      </a:pPr>
-                      <a:r>
-                        <a:rPr lang="en-US" sz="1200" dirty="0">
-                          <a:solidFill>
-                            <a:srgbClr val="1D1D1F"/>
-                          </a:solidFill>
-                          <a:latin typeface="나눔스퀘어 네오 Bold" pitchFamily="34" charset="0"/>
-                          <a:ea typeface="나눔스퀘어 네오 Bold" pitchFamily="34" charset="-122"/>
-                          <a:cs typeface="나눔스퀘어 네오 Bold" pitchFamily="34" charset="-120"/>
-                        </a:rPr>
-                        <a:t>0.29°</a:t>
-                      </a:r>
-                      <a:endParaRPr lang="en-US" sz="1200" dirty="0">
-                        <a:latin typeface="나눔스퀘어 네오 Regular" charset="0"/>
-                        <a:ea typeface="나눔스퀘어 네오 Regular" charset="0"/>
-                        <a:cs typeface="나눔스퀘어 네오 Regular" charset="0"/>
-                      </a:endParaRPr>
-                    </a:p>
-                  </a:txBody>
-                  <a:tcPr marL="73152" marR="73152" marT="36576" marB="36576" anchor="ctr">
-                    <a:lnL w="6350" cap="flat" cmpd="sng" algn="ctr">
-                      <a:solidFill>
-                        <a:srgbClr val="E0E0E0"/>
-                      </a:solidFill>
-                      <a:prstDash val="solid"/>
-                      <a:round/>
-                      <a:headEnd type="none" w="med" len="med"/>
-                      <a:tailEnd type="none" w="med" len="med"/>
-                    </a:lnL>
-                    <a:lnR w="6350" cap="flat" cmpd="sng" algn="ctr">
-                      <a:solidFill>
-                        <a:srgbClr val="E0E0E0"/>
-                      </a:solidFill>
-                      <a:prstDash val="solid"/>
-                      <a:round/>
-                      <a:headEnd type="none" w="med" len="med"/>
-                      <a:tailEnd type="none" w="med" len="med"/>
-                    </a:lnR>
-                    <a:lnT w="6350" cap="flat" cmpd="sng" algn="ctr">
-                      <a:solidFill>
-                        <a:srgbClr val="E0E0E0"/>
-                      </a:solidFill>
-                      <a:prstDash val="solid"/>
-                      <a:round/>
-                      <a:headEnd type="none" w="med" len="med"/>
-                      <a:tailEnd type="none" w="med" len="med"/>
-                    </a:lnT>
-                    <a:lnB w="6350" cap="flat" cmpd="sng" algn="ctr">
-                      <a:solidFill>
-                        <a:srgbClr val="E0E0E0"/>
-                      </a:solidFill>
-                      <a:prstDash val="solid"/>
-                      <a:round/>
-                      <a:headEnd type="none" w="med" len="med"/>
-                      <a:tailEnd type="none" w="med" len="med"/>
-                    </a:lnB>
-                    <a:solidFill>
-                      <a:srgbClr val="FFFFFF"/>
-                    </a:solidFill>
-                  </a:tcPr>
-                </a:tc>
-                <a:tc>
-                  <a:txBody>
-                    <a:bodyPr/>
-                    <a:lstStyle/>
-                    <a:p>
-                      <a:pPr marL="0" indent="0" eaLnBrk="0">
-                        <a:buNone/>
-                      </a:pPr>
-                      <a:r>
-                        <a:rPr lang="en-US" sz="1200" dirty="0">
-                          <a:solidFill>
-                            <a:srgbClr val="1D1D1F"/>
-                          </a:solidFill>
-                          <a:latin typeface="나눔스퀘어 네오 Regular" pitchFamily="34" charset="0"/>
-                          <a:ea typeface="나눔스퀘어 네오 Regular" pitchFamily="34" charset="-122"/>
-                          <a:cs typeface="나눔스퀘어 네오 Regular" pitchFamily="34" charset="-120"/>
-                        </a:rPr>
-                        <a:t>0.25°</a:t>
-                      </a:r>
-                      <a:endParaRPr lang="en-US" sz="1200" dirty="0">
-                        <a:latin typeface="나눔스퀘어 네오 Regular" charset="0"/>
-                        <a:ea typeface="나눔스퀘어 네오 Regular" charset="0"/>
-                        <a:cs typeface="나눔스퀘어 네오 Regular" charset="0"/>
-                      </a:endParaRPr>
-                    </a:p>
-                  </a:txBody>
-                  <a:tcPr marL="73152" marR="73152" marT="36576" marB="36576" anchor="ctr">
-                    <a:lnL w="6350" cap="flat" cmpd="sng" algn="ctr">
-                      <a:solidFill>
-                        <a:srgbClr val="E0E0E0"/>
-                      </a:solidFill>
-                      <a:prstDash val="solid"/>
-                      <a:round/>
-                      <a:headEnd type="none" w="med" len="med"/>
-                      <a:tailEnd type="none" w="med" len="med"/>
-                    </a:lnL>
-                    <a:lnR w="6350" cap="flat" cmpd="sng" algn="ctr">
-                      <a:solidFill>
-                        <a:srgbClr val="E0E0E0"/>
-                      </a:solidFill>
-                      <a:prstDash val="solid"/>
-                      <a:round/>
-                      <a:headEnd type="none" w="med" len="med"/>
-                      <a:tailEnd type="none" w="med" len="med"/>
-                    </a:lnR>
-                    <a:lnT w="6350" cap="flat" cmpd="sng" algn="ctr">
-                      <a:solidFill>
-                        <a:srgbClr val="E0E0E0"/>
-                      </a:solidFill>
-                      <a:prstDash val="solid"/>
-                      <a:round/>
-                      <a:headEnd type="none" w="med" len="med"/>
-                      <a:tailEnd type="none" w="med" len="med"/>
-                    </a:lnT>
-                    <a:lnB w="6350" cap="flat" cmpd="sng" algn="ctr">
-                      <a:solidFill>
-                        <a:srgbClr val="E0E0E0"/>
-                      </a:solidFill>
-                      <a:prstDash val="solid"/>
-                      <a:round/>
-                      <a:headEnd type="none" w="med" len="med"/>
-                      <a:tailEnd type="none" w="med" len="med"/>
-                    </a:lnB>
-                    <a:solidFill>
-                      <a:srgbClr val="FFFFFF"/>
-                    </a:solidFill>
-                  </a:tcPr>
-                </a:tc>
-                <a:tc>
-                  <a:txBody>
-                    <a:bodyPr/>
-                    <a:lstStyle/>
-                    <a:p>
-                      <a:pPr marL="0" indent="0" eaLnBrk="0">
-                        <a:buNone/>
-                      </a:pPr>
-                      <a:r>
-                        <a:rPr lang="en-US" sz="1200" dirty="0">
-                          <a:solidFill>
-                            <a:srgbClr val="1D1D1F"/>
-                          </a:solidFill>
-                          <a:latin typeface="나눔스퀘어 네오 Bold" pitchFamily="34" charset="0"/>
-                          <a:ea typeface="나눔스퀘어 네오 Bold" pitchFamily="34" charset="-122"/>
-                          <a:cs typeface="나눔스퀘어 네오 Bold" pitchFamily="34" charset="-120"/>
-                        </a:rPr>
-                        <a:t>8.3°</a:t>
-                      </a:r>
-                      <a:endParaRPr lang="en-US" sz="1200" dirty="0">
-                        <a:latin typeface="나눔스퀘어 네오 Regular" charset="0"/>
-                        <a:ea typeface="나눔스퀘어 네오 Regular" charset="0"/>
-                        <a:cs typeface="나눔스퀘어 네오 Regular" charset="0"/>
-                      </a:endParaRPr>
-                    </a:p>
-                  </a:txBody>
-                  <a:tcPr marL="73152" marR="73152" marT="36576" marB="36576" anchor="ctr">
-                    <a:lnL w="6350" cap="flat" cmpd="sng" algn="ctr">
-                      <a:solidFill>
-                        <a:srgbClr val="E0E0E0"/>
-                      </a:solidFill>
-                      <a:prstDash val="solid"/>
-                      <a:round/>
-                      <a:headEnd type="none" w="med" len="med"/>
-                      <a:tailEnd type="none" w="med" len="med"/>
-                    </a:lnL>
-                    <a:lnR w="6350" cap="flat" cmpd="sng" algn="ctr">
-                      <a:solidFill>
-                        <a:srgbClr val="E0E0E0"/>
-                      </a:solidFill>
-                      <a:prstDash val="solid"/>
-                      <a:round/>
-                      <a:headEnd type="none" w="med" len="med"/>
-                      <a:tailEnd type="none" w="med" len="med"/>
-                    </a:lnR>
-                    <a:lnT w="6350" cap="flat" cmpd="sng" algn="ctr">
-                      <a:solidFill>
-                        <a:srgbClr val="E0E0E0"/>
-                      </a:solidFill>
-                      <a:prstDash val="solid"/>
-                      <a:round/>
-                      <a:headEnd type="none" w="med" len="med"/>
-                      <a:tailEnd type="none" w="med" len="med"/>
-                    </a:lnT>
-                    <a:lnB w="6350" cap="flat" cmpd="sng" algn="ctr">
-                      <a:solidFill>
-                        <a:srgbClr val="E0E0E0"/>
-                      </a:solidFill>
-                      <a:prstDash val="solid"/>
-                      <a:round/>
-                      <a:headEnd type="none" w="med" len="med"/>
-                      <a:tailEnd type="none" w="med" len="med"/>
-                    </a:lnB>
-                    <a:solidFill>
-                      <a:srgbClr val="FFFFFF"/>
-                    </a:solidFill>
-                  </a:tcPr>
-                </a:tc>
-                <a:extLst>
-                  <a:ext uri="{0D108BD9-81ED-4DB2-BD59-A6C34878D82A}">
-                    <a16:rowId xmlns:a16="http://schemas.microsoft.com/office/drawing/2014/main" val="10002"/>
-                  </a:ext>
-                </a:extLst>
-              </a:tr>
-              <a:tr h="384048">
-                <a:tc>
-                  <a:txBody>
-                    <a:bodyPr/>
-                    <a:lstStyle/>
-                    <a:p>
-                      <a:pPr marL="0" indent="0" eaLnBrk="0">
-                        <a:buNone/>
-                      </a:pPr>
-                      <a:r>
-                        <a:rPr lang="en-US" sz="1200" dirty="0">
-                          <a:solidFill>
-                            <a:srgbClr val="1D1D1F"/>
-                          </a:solidFill>
-                          <a:latin typeface="나눔스퀘어 네오 Regular" pitchFamily="34" charset="0"/>
-                          <a:ea typeface="나눔스퀘어 네오 Regular" pitchFamily="34" charset="-122"/>
-                          <a:cs typeface="나눔스퀘어 네오 Regular" pitchFamily="34" charset="-120"/>
-                        </a:rPr>
-                        <a:t>6,000 px (V2)</a:t>
-                      </a:r>
-                      <a:endParaRPr lang="en-US" sz="1200" dirty="0">
-                        <a:latin typeface="나눔스퀘어 네오 Regular" charset="0"/>
-                        <a:ea typeface="나눔스퀘어 네오 Regular" charset="0"/>
-                        <a:cs typeface="나눔스퀘어 네오 Regular" charset="0"/>
-                      </a:endParaRPr>
-                    </a:p>
-                  </a:txBody>
-                  <a:tcPr marL="73152" marR="73152" marT="36576" marB="36576" anchor="ctr">
-                    <a:lnL w="6350" cap="flat" cmpd="sng" algn="ctr">
-                      <a:solidFill>
-                        <a:srgbClr val="E0E0E0"/>
-                      </a:solidFill>
-                      <a:prstDash val="solid"/>
-                      <a:round/>
-                      <a:headEnd type="none" w="med" len="med"/>
-                      <a:tailEnd type="none" w="med" len="med"/>
-                    </a:lnL>
-                    <a:lnR w="6350" cap="flat" cmpd="sng" algn="ctr">
-                      <a:solidFill>
-                        <a:srgbClr val="E0E0E0"/>
-                      </a:solidFill>
-                      <a:prstDash val="solid"/>
-                      <a:round/>
-                      <a:headEnd type="none" w="med" len="med"/>
-                      <a:tailEnd type="none" w="med" len="med"/>
-                    </a:lnR>
-                    <a:lnT w="6350" cap="flat" cmpd="sng" algn="ctr">
-                      <a:solidFill>
-                        <a:srgbClr val="E0E0E0"/>
-                      </a:solidFill>
-                      <a:prstDash val="solid"/>
-                      <a:round/>
-                      <a:headEnd type="none" w="med" len="med"/>
-                      <a:tailEnd type="none" w="med" len="med"/>
-                    </a:lnT>
-                    <a:lnB w="6350" cap="flat" cmpd="sng" algn="ctr">
-                      <a:solidFill>
-                        <a:srgbClr val="E0E0E0"/>
-                      </a:solidFill>
-                      <a:prstDash val="solid"/>
-                      <a:round/>
-                      <a:headEnd type="none" w="med" len="med"/>
-                      <a:tailEnd type="none" w="med" len="med"/>
-                    </a:lnB>
-                    <a:solidFill>
-                      <a:srgbClr val="FFFFFF"/>
-                    </a:solidFill>
-                  </a:tcPr>
-                </a:tc>
-                <a:tc>
-                  <a:txBody>
-                    <a:bodyPr/>
-                    <a:lstStyle/>
-                    <a:p>
-                      <a:pPr marL="0" indent="0" eaLnBrk="0">
-                        <a:buNone/>
-                      </a:pPr>
-                      <a:r>
-                        <a:rPr lang="en-US" sz="1200" dirty="0">
-                          <a:solidFill>
-                            <a:srgbClr val="1D1D1F"/>
-                          </a:solidFill>
-                          <a:latin typeface="나눔스퀘어 네오 Regular" pitchFamily="34" charset="0"/>
-                          <a:ea typeface="나눔스퀘어 네오 Regular" pitchFamily="34" charset="-122"/>
-                          <a:cs typeface="나눔스퀘어 네오 Regular" pitchFamily="34" charset="-120"/>
-                        </a:rPr>
-                        <a:t>8°</a:t>
-                      </a:r>
-                      <a:endParaRPr lang="en-US" sz="1200" dirty="0">
-                        <a:latin typeface="나눔스퀘어 네오 Regular" charset="0"/>
-                        <a:ea typeface="나눔스퀘어 네오 Regular" charset="0"/>
-                        <a:cs typeface="나눔스퀘어 네오 Regular" charset="0"/>
-                      </a:endParaRPr>
-                    </a:p>
-                  </a:txBody>
-                  <a:tcPr marL="73152" marR="73152" marT="36576" marB="36576" anchor="ctr">
-                    <a:lnL w="6350" cap="flat" cmpd="sng" algn="ctr">
-                      <a:solidFill>
-                        <a:srgbClr val="E0E0E0"/>
-                      </a:solidFill>
-                      <a:prstDash val="solid"/>
-                      <a:round/>
-                      <a:headEnd type="none" w="med" len="med"/>
-                      <a:tailEnd type="none" w="med" len="med"/>
-                    </a:lnL>
-                    <a:lnR w="6350" cap="flat" cmpd="sng" algn="ctr">
-                      <a:solidFill>
-                        <a:srgbClr val="E0E0E0"/>
-                      </a:solidFill>
-                      <a:prstDash val="solid"/>
-                      <a:round/>
-                      <a:headEnd type="none" w="med" len="med"/>
-                      <a:tailEnd type="none" w="med" len="med"/>
-                    </a:lnR>
-                    <a:lnT w="6350" cap="flat" cmpd="sng" algn="ctr">
-                      <a:solidFill>
-                        <a:srgbClr val="E0E0E0"/>
-                      </a:solidFill>
-                      <a:prstDash val="solid"/>
-                      <a:round/>
-                      <a:headEnd type="none" w="med" len="med"/>
-                      <a:tailEnd type="none" w="med" len="med"/>
-                    </a:lnT>
-                    <a:lnB w="6350" cap="flat" cmpd="sng" algn="ctr">
-                      <a:solidFill>
-                        <a:srgbClr val="E0E0E0"/>
-                      </a:solidFill>
-                      <a:prstDash val="solid"/>
-                      <a:round/>
-                      <a:headEnd type="none" w="med" len="med"/>
-                      <a:tailEnd type="none" w="med" len="med"/>
-                    </a:lnB>
-                    <a:solidFill>
-                      <a:srgbClr val="FFFFFF"/>
-                    </a:solidFill>
-                  </a:tcPr>
-                </a:tc>
-                <a:tc>
-                  <a:txBody>
-                    <a:bodyPr/>
-                    <a:lstStyle/>
-                    <a:p>
-                      <a:pPr marL="0" indent="0" eaLnBrk="0">
-                        <a:buNone/>
-                      </a:pPr>
-                      <a:r>
-                        <a:rPr lang="en-US" sz="1200" dirty="0">
-                          <a:solidFill>
-                            <a:srgbClr val="1D1D1F"/>
-                          </a:solidFill>
-                          <a:latin typeface="나눔스퀘어 네오 Regular" pitchFamily="34" charset="0"/>
-                          <a:ea typeface="나눔스퀘어 네오 Regular" pitchFamily="34" charset="-122"/>
-                          <a:cs typeface="나눔스퀘어 네오 Regular" pitchFamily="34" charset="-120"/>
-                        </a:rPr>
-                        <a:t>5,689 / 6,078 / 7,710</a:t>
-                      </a:r>
-                      <a:endParaRPr lang="en-US" sz="1200" dirty="0">
-                        <a:latin typeface="나눔스퀘어 네오 Regular" charset="0"/>
-                        <a:ea typeface="나눔스퀘어 네오 Regular" charset="0"/>
-                        <a:cs typeface="나눔스퀘어 네오 Regular" charset="0"/>
-                      </a:endParaRPr>
-                    </a:p>
-                  </a:txBody>
-                  <a:tcPr marL="73152" marR="73152" marT="36576" marB="36576" anchor="ctr">
-                    <a:lnL w="6350" cap="flat" cmpd="sng" algn="ctr">
-                      <a:solidFill>
-                        <a:srgbClr val="E0E0E0"/>
-                      </a:solidFill>
-                      <a:prstDash val="solid"/>
-                      <a:round/>
-                      <a:headEnd type="none" w="med" len="med"/>
-                      <a:tailEnd type="none" w="med" len="med"/>
-                    </a:lnL>
-                    <a:lnR w="6350" cap="flat" cmpd="sng" algn="ctr">
-                      <a:solidFill>
-                        <a:srgbClr val="E0E0E0"/>
-                      </a:solidFill>
-                      <a:prstDash val="solid"/>
-                      <a:round/>
-                      <a:headEnd type="none" w="med" len="med"/>
-                      <a:tailEnd type="none" w="med" len="med"/>
-                    </a:lnR>
-                    <a:lnT w="6350" cap="flat" cmpd="sng" algn="ctr">
-                      <a:solidFill>
-                        <a:srgbClr val="E0E0E0"/>
-                      </a:solidFill>
-                      <a:prstDash val="solid"/>
-                      <a:round/>
-                      <a:headEnd type="none" w="med" len="med"/>
-                      <a:tailEnd type="none" w="med" len="med"/>
-                    </a:lnT>
-                    <a:lnB w="6350" cap="flat" cmpd="sng" algn="ctr">
-                      <a:solidFill>
-                        <a:srgbClr val="E0E0E0"/>
-                      </a:solidFill>
-                      <a:prstDash val="solid"/>
-                      <a:round/>
-                      <a:headEnd type="none" w="med" len="med"/>
-                      <a:tailEnd type="none" w="med" len="med"/>
-                    </a:lnB>
-                    <a:solidFill>
-                      <a:srgbClr val="FFFFFF"/>
-                    </a:solidFill>
-                  </a:tcPr>
-                </a:tc>
-                <a:tc>
-                  <a:txBody>
-                    <a:bodyPr/>
-                    <a:lstStyle/>
-                    <a:p>
-                      <a:pPr marL="0" indent="0" eaLnBrk="0">
-                        <a:buNone/>
-                      </a:pPr>
-                      <a:r>
-                        <a:rPr lang="en-US" sz="1200" dirty="0">
-                          <a:solidFill>
-                            <a:srgbClr val="1D1D1F"/>
-                          </a:solidFill>
-                          <a:latin typeface="나눔스퀘어 네오 Bold" pitchFamily="34" charset="0"/>
-                          <a:ea typeface="나눔스퀘어 네오 Bold" pitchFamily="34" charset="-122"/>
-                          <a:cs typeface="나눔스퀘어 네오 Bold" pitchFamily="34" charset="-120"/>
-                        </a:rPr>
-                        <a:t>0.22°</a:t>
-                      </a:r>
-                      <a:endParaRPr lang="en-US" sz="1200" dirty="0">
-                        <a:latin typeface="나눔스퀘어 네오 Regular" charset="0"/>
-                        <a:ea typeface="나눔스퀘어 네오 Regular" charset="0"/>
-                        <a:cs typeface="나눔스퀘어 네오 Regular" charset="0"/>
-                      </a:endParaRPr>
-                    </a:p>
-                  </a:txBody>
-                  <a:tcPr marL="73152" marR="73152" marT="36576" marB="36576" anchor="ctr">
-                    <a:lnL w="6350" cap="flat" cmpd="sng" algn="ctr">
-                      <a:solidFill>
-                        <a:srgbClr val="E0E0E0"/>
-                      </a:solidFill>
-                      <a:prstDash val="solid"/>
-                      <a:round/>
-                      <a:headEnd type="none" w="med" len="med"/>
-                      <a:tailEnd type="none" w="med" len="med"/>
-                    </a:lnL>
-                    <a:lnR w="6350" cap="flat" cmpd="sng" algn="ctr">
-                      <a:solidFill>
-                        <a:srgbClr val="E0E0E0"/>
-                      </a:solidFill>
-                      <a:prstDash val="solid"/>
-                      <a:round/>
-                      <a:headEnd type="none" w="med" len="med"/>
-                      <a:tailEnd type="none" w="med" len="med"/>
-                    </a:lnR>
-                    <a:lnT w="6350" cap="flat" cmpd="sng" algn="ctr">
-                      <a:solidFill>
-                        <a:srgbClr val="E0E0E0"/>
-                      </a:solidFill>
-                      <a:prstDash val="solid"/>
-                      <a:round/>
-                      <a:headEnd type="none" w="med" len="med"/>
-                      <a:tailEnd type="none" w="med" len="med"/>
-                    </a:lnT>
-                    <a:lnB w="6350" cap="flat" cmpd="sng" algn="ctr">
-                      <a:solidFill>
-                        <a:srgbClr val="E0E0E0"/>
-                      </a:solidFill>
-                      <a:prstDash val="solid"/>
-                      <a:round/>
-                      <a:headEnd type="none" w="med" len="med"/>
-                      <a:tailEnd type="none" w="med" len="med"/>
-                    </a:lnB>
-                    <a:solidFill>
-                      <a:srgbClr val="FFFFFF"/>
-                    </a:solidFill>
-                  </a:tcPr>
-                </a:tc>
-                <a:tc>
-                  <a:txBody>
-                    <a:bodyPr/>
-                    <a:lstStyle/>
-                    <a:p>
-                      <a:pPr marL="0" indent="0" eaLnBrk="0">
-                        <a:buNone/>
-                      </a:pPr>
-                      <a:r>
-                        <a:rPr lang="en-US" sz="1200" dirty="0">
-                          <a:solidFill>
-                            <a:srgbClr val="1D1D1F"/>
-                          </a:solidFill>
-                          <a:latin typeface="나눔스퀘어 네오 Regular" pitchFamily="34" charset="0"/>
-                          <a:ea typeface="나눔스퀘어 네오 Regular" pitchFamily="34" charset="-122"/>
-                          <a:cs typeface="나눔스퀘어 네오 Regular" pitchFamily="34" charset="-120"/>
-                        </a:rPr>
-                        <a:t>0.10°</a:t>
-                      </a:r>
-                      <a:endParaRPr lang="en-US" sz="1200" dirty="0">
-                        <a:latin typeface="나눔스퀘어 네오 Regular" charset="0"/>
-                        <a:ea typeface="나눔스퀘어 네오 Regular" charset="0"/>
-                        <a:cs typeface="나눔스퀘어 네오 Regular" charset="0"/>
-                      </a:endParaRPr>
-                    </a:p>
-                  </a:txBody>
-                  <a:tcPr marL="73152" marR="73152" marT="36576" marB="36576" anchor="ctr">
-                    <a:lnL w="6350" cap="flat" cmpd="sng" algn="ctr">
-                      <a:solidFill>
-                        <a:srgbClr val="E0E0E0"/>
-                      </a:solidFill>
-                      <a:prstDash val="solid"/>
-                      <a:round/>
-                      <a:headEnd type="none" w="med" len="med"/>
-                      <a:tailEnd type="none" w="med" len="med"/>
-                    </a:lnL>
-                    <a:lnR w="6350" cap="flat" cmpd="sng" algn="ctr">
-                      <a:solidFill>
-                        <a:srgbClr val="E0E0E0"/>
-                      </a:solidFill>
-                      <a:prstDash val="solid"/>
-                      <a:round/>
-                      <a:headEnd type="none" w="med" len="med"/>
-                      <a:tailEnd type="none" w="med" len="med"/>
-                    </a:lnR>
-                    <a:lnT w="6350" cap="flat" cmpd="sng" algn="ctr">
-                      <a:solidFill>
-                        <a:srgbClr val="E0E0E0"/>
-                      </a:solidFill>
-                      <a:prstDash val="solid"/>
-                      <a:round/>
-                      <a:headEnd type="none" w="med" len="med"/>
-                      <a:tailEnd type="none" w="med" len="med"/>
-                    </a:lnT>
-                    <a:lnB w="6350" cap="flat" cmpd="sng" algn="ctr">
-                      <a:solidFill>
-                        <a:srgbClr val="E0E0E0"/>
-                      </a:solidFill>
-                      <a:prstDash val="solid"/>
-                      <a:round/>
-                      <a:headEnd type="none" w="med" len="med"/>
-                      <a:tailEnd type="none" w="med" len="med"/>
-                    </a:lnB>
-                    <a:solidFill>
-                      <a:srgbClr val="FFFFFF"/>
-                    </a:solidFill>
-                  </a:tcPr>
-                </a:tc>
-                <a:tc>
-                  <a:txBody>
-                    <a:bodyPr/>
-                    <a:lstStyle/>
-                    <a:p>
-                      <a:pPr marL="0" indent="0" eaLnBrk="0">
-                        <a:buNone/>
-                      </a:pPr>
-                      <a:r>
-                        <a:rPr lang="en-US" sz="1200" dirty="0">
-                          <a:solidFill>
-                            <a:srgbClr val="1D1D1F"/>
-                          </a:solidFill>
-                          <a:latin typeface="나눔스퀘어 네오 Bold" pitchFamily="34" charset="0"/>
-                          <a:ea typeface="나눔스퀘어 네오 Bold" pitchFamily="34" charset="-122"/>
-                          <a:cs typeface="나눔스퀘어 네오 Bold" pitchFamily="34" charset="-120"/>
-                        </a:rPr>
-                        <a:t>18.1°</a:t>
-                      </a:r>
-                      <a:endParaRPr lang="en-US" sz="1200" dirty="0">
-                        <a:latin typeface="나눔스퀘어 네오 Regular" charset="0"/>
-                        <a:ea typeface="나눔스퀘어 네오 Regular" charset="0"/>
-                        <a:cs typeface="나눔스퀘어 네오 Regular" charset="0"/>
-                      </a:endParaRPr>
-                    </a:p>
-                  </a:txBody>
-                  <a:tcPr marL="73152" marR="73152" marT="36576" marB="36576" anchor="ctr">
-                    <a:lnL w="6350" cap="flat" cmpd="sng" algn="ctr">
-                      <a:solidFill>
-                        <a:srgbClr val="E0E0E0"/>
-                      </a:solidFill>
-                      <a:prstDash val="solid"/>
-                      <a:round/>
-                      <a:headEnd type="none" w="med" len="med"/>
-                      <a:tailEnd type="none" w="med" len="med"/>
-                    </a:lnL>
-                    <a:lnR w="6350" cap="flat" cmpd="sng" algn="ctr">
-                      <a:solidFill>
-                        <a:srgbClr val="E0E0E0"/>
-                      </a:solidFill>
-                      <a:prstDash val="solid"/>
-                      <a:round/>
-                      <a:headEnd type="none" w="med" len="med"/>
-                      <a:tailEnd type="none" w="med" len="med"/>
-                    </a:lnR>
-                    <a:lnT w="6350" cap="flat" cmpd="sng" algn="ctr">
-                      <a:solidFill>
-                        <a:srgbClr val="E0E0E0"/>
-                      </a:solidFill>
-                      <a:prstDash val="solid"/>
-                      <a:round/>
-                      <a:headEnd type="none" w="med" len="med"/>
-                      <a:tailEnd type="none" w="med" len="med"/>
-                    </a:lnT>
-                    <a:lnB w="6350" cap="flat" cmpd="sng" algn="ctr">
-                      <a:solidFill>
-                        <a:srgbClr val="E0E0E0"/>
-                      </a:solidFill>
-                      <a:prstDash val="solid"/>
-                      <a:round/>
-                      <a:headEnd type="none" w="med" len="med"/>
-                      <a:tailEnd type="none" w="med" len="med"/>
-                    </a:lnB>
-                    <a:solidFill>
-                      <a:srgbClr val="FFFFFF"/>
-                    </a:solidFill>
-                  </a:tcPr>
-                </a:tc>
-                <a:extLst>
-                  <a:ext uri="{0D108BD9-81ED-4DB2-BD59-A6C34878D82A}">
-                    <a16:rowId xmlns:a16="http://schemas.microsoft.com/office/drawing/2014/main" val="10003"/>
-                  </a:ext>
-                </a:extLst>
-              </a:tr>
-              <a:tr h="384048">
-                <a:tc>
-                  <a:txBody>
-                    <a:bodyPr/>
-                    <a:lstStyle/>
-                    <a:p>
-                      <a:pPr marL="0" indent="0" eaLnBrk="0">
-                        <a:buNone/>
-                      </a:pPr>
-                      <a:r>
-                        <a:rPr lang="en-US" sz="1200" dirty="0">
-                          <a:solidFill>
-                            <a:srgbClr val="1D1D1F"/>
-                          </a:solidFill>
-                          <a:latin typeface="나눔스퀘어 네오 Regular" pitchFamily="34" charset="0"/>
-                          <a:ea typeface="나눔스퀘어 네오 Regular" pitchFamily="34" charset="-122"/>
-                          <a:cs typeface="나눔스퀘어 네오 Regular" pitchFamily="34" charset="-120"/>
-                        </a:rPr>
-                        <a:t>20,025 px (V3, pan 크기)</a:t>
-                      </a:r>
-                      <a:endParaRPr lang="en-US" sz="1200" dirty="0">
-                        <a:latin typeface="나눔스퀘어 네오 Regular" charset="0"/>
-                        <a:ea typeface="나눔스퀘어 네오 Regular" charset="0"/>
-                        <a:cs typeface="나눔스퀘어 네오 Regular" charset="0"/>
-                      </a:endParaRPr>
-                    </a:p>
-                  </a:txBody>
-                  <a:tcPr marL="73152" marR="73152" marT="36576" marB="36576" anchor="ctr">
-                    <a:lnL w="6350" cap="flat" cmpd="sng" algn="ctr">
-                      <a:solidFill>
-                        <a:srgbClr val="E0E0E0"/>
-                      </a:solidFill>
-                      <a:prstDash val="solid"/>
-                      <a:round/>
-                      <a:headEnd type="none" w="med" len="med"/>
-                      <a:tailEnd type="none" w="med" len="med"/>
-                    </a:lnL>
-                    <a:lnR w="6350" cap="flat" cmpd="sng" algn="ctr">
-                      <a:solidFill>
-                        <a:srgbClr val="E0E0E0"/>
-                      </a:solidFill>
-                      <a:prstDash val="solid"/>
-                      <a:round/>
-                      <a:headEnd type="none" w="med" len="med"/>
-                      <a:tailEnd type="none" w="med" len="med"/>
-                    </a:lnR>
-                    <a:lnT w="6350" cap="flat" cmpd="sng" algn="ctr">
-                      <a:solidFill>
-                        <a:srgbClr val="E0E0E0"/>
-                      </a:solidFill>
-                      <a:prstDash val="solid"/>
-                      <a:round/>
-                      <a:headEnd type="none" w="med" len="med"/>
-                      <a:tailEnd type="none" w="med" len="med"/>
-                    </a:lnT>
-                    <a:lnB w="6350" cap="flat" cmpd="sng" algn="ctr">
-                      <a:solidFill>
-                        <a:srgbClr val="E0E0E0"/>
-                      </a:solidFill>
-                      <a:prstDash val="solid"/>
-                      <a:round/>
-                      <a:headEnd type="none" w="med" len="med"/>
-                      <a:tailEnd type="none" w="med" len="med"/>
-                    </a:lnB>
-                    <a:solidFill>
-                      <a:srgbClr val="FFFFFF"/>
-                    </a:solidFill>
-                  </a:tcPr>
-                </a:tc>
-                <a:tc>
-                  <a:txBody>
-                    <a:bodyPr/>
-                    <a:lstStyle/>
-                    <a:p>
-                      <a:pPr marL="0" indent="0" eaLnBrk="0">
-                        <a:buNone/>
-                      </a:pPr>
-                      <a:r>
-                        <a:rPr lang="en-US" sz="1200" dirty="0">
-                          <a:solidFill>
-                            <a:srgbClr val="1D1D1F"/>
-                          </a:solidFill>
-                          <a:latin typeface="나눔스퀘어 네오 Regular" pitchFamily="34" charset="0"/>
-                          <a:ea typeface="나눔스퀘어 네오 Regular" pitchFamily="34" charset="-122"/>
-                          <a:cs typeface="나눔스퀘어 네오 Regular" pitchFamily="34" charset="-120"/>
-                        </a:rPr>
-                        <a:t>5°</a:t>
-                      </a:r>
-                      <a:endParaRPr lang="en-US" sz="1200" dirty="0">
-                        <a:latin typeface="나눔스퀘어 네오 Regular" charset="0"/>
-                        <a:ea typeface="나눔스퀘어 네오 Regular" charset="0"/>
-                        <a:cs typeface="나눔스퀘어 네오 Regular" charset="0"/>
-                      </a:endParaRPr>
-                    </a:p>
-                  </a:txBody>
-                  <a:tcPr marL="73152" marR="73152" marT="36576" marB="36576" anchor="ctr">
-                    <a:lnL w="6350" cap="flat" cmpd="sng" algn="ctr">
-                      <a:solidFill>
-                        <a:srgbClr val="E0E0E0"/>
-                      </a:solidFill>
-                      <a:prstDash val="solid"/>
-                      <a:round/>
-                      <a:headEnd type="none" w="med" len="med"/>
-                      <a:tailEnd type="none" w="med" len="med"/>
-                    </a:lnL>
-                    <a:lnR w="6350" cap="flat" cmpd="sng" algn="ctr">
-                      <a:solidFill>
-                        <a:srgbClr val="E0E0E0"/>
-                      </a:solidFill>
-                      <a:prstDash val="solid"/>
-                      <a:round/>
-                      <a:headEnd type="none" w="med" len="med"/>
-                      <a:tailEnd type="none" w="med" len="med"/>
-                    </a:lnR>
-                    <a:lnT w="6350" cap="flat" cmpd="sng" algn="ctr">
-                      <a:solidFill>
-                        <a:srgbClr val="E0E0E0"/>
-                      </a:solidFill>
-                      <a:prstDash val="solid"/>
-                      <a:round/>
-                      <a:headEnd type="none" w="med" len="med"/>
-                      <a:tailEnd type="none" w="med" len="med"/>
-                    </a:lnT>
-                    <a:lnB w="6350" cap="flat" cmpd="sng" algn="ctr">
-                      <a:solidFill>
-                        <a:srgbClr val="E0E0E0"/>
-                      </a:solidFill>
-                      <a:prstDash val="solid"/>
-                      <a:round/>
-                      <a:headEnd type="none" w="med" len="med"/>
-                      <a:tailEnd type="none" w="med" len="med"/>
-                    </a:lnB>
-                    <a:solidFill>
-                      <a:srgbClr val="FFFFFF"/>
-                    </a:solidFill>
-                  </a:tcPr>
-                </a:tc>
-                <a:tc>
-                  <a:txBody>
-                    <a:bodyPr/>
-                    <a:lstStyle/>
-                    <a:p>
-                      <a:pPr marL="0" indent="0" eaLnBrk="0">
-                        <a:buNone/>
-                      </a:pPr>
-                      <a:r>
-                        <a:rPr lang="en-US" sz="1200" dirty="0">
-                          <a:solidFill>
-                            <a:srgbClr val="1D1D1F"/>
-                          </a:solidFill>
-                          <a:latin typeface="나눔스퀘어 네오 Regular" pitchFamily="34" charset="0"/>
-                          <a:ea typeface="나눔스퀘어 네오 Regular" pitchFamily="34" charset="-122"/>
-                          <a:cs typeface="나눔스퀘어 네오 Regular" pitchFamily="34" charset="-120"/>
-                        </a:rPr>
-                        <a:t>14,137 / 22,397 / 31,072</a:t>
-                      </a:r>
-                      <a:endParaRPr lang="en-US" sz="1200" dirty="0">
-                        <a:latin typeface="나눔스퀘어 네오 Regular" charset="0"/>
-                        <a:ea typeface="나눔스퀘어 네오 Regular" charset="0"/>
-                        <a:cs typeface="나눔스퀘어 네오 Regular" charset="0"/>
-                      </a:endParaRPr>
-                    </a:p>
-                  </a:txBody>
-                  <a:tcPr marL="73152" marR="73152" marT="36576" marB="36576" anchor="ctr">
-                    <a:lnL w="6350" cap="flat" cmpd="sng" algn="ctr">
-                      <a:solidFill>
-                        <a:srgbClr val="E0E0E0"/>
-                      </a:solidFill>
-                      <a:prstDash val="solid"/>
-                      <a:round/>
-                      <a:headEnd type="none" w="med" len="med"/>
-                      <a:tailEnd type="none" w="med" len="med"/>
-                    </a:lnL>
-                    <a:lnR w="6350" cap="flat" cmpd="sng" algn="ctr">
-                      <a:solidFill>
-                        <a:srgbClr val="E0E0E0"/>
-                      </a:solidFill>
-                      <a:prstDash val="solid"/>
-                      <a:round/>
-                      <a:headEnd type="none" w="med" len="med"/>
-                      <a:tailEnd type="none" w="med" len="med"/>
-                    </a:lnR>
-                    <a:lnT w="6350" cap="flat" cmpd="sng" algn="ctr">
-                      <a:solidFill>
-                        <a:srgbClr val="E0E0E0"/>
-                      </a:solidFill>
-                      <a:prstDash val="solid"/>
-                      <a:round/>
-                      <a:headEnd type="none" w="med" len="med"/>
-                      <a:tailEnd type="none" w="med" len="med"/>
-                    </a:lnT>
-                    <a:lnB w="6350" cap="flat" cmpd="sng" algn="ctr">
-                      <a:solidFill>
-                        <a:srgbClr val="E0E0E0"/>
-                      </a:solidFill>
-                      <a:prstDash val="solid"/>
-                      <a:round/>
-                      <a:headEnd type="none" w="med" len="med"/>
-                      <a:tailEnd type="none" w="med" len="med"/>
-                    </a:lnB>
-                    <a:solidFill>
-                      <a:srgbClr val="FFFFFF"/>
-                    </a:solidFill>
-                  </a:tcPr>
-                </a:tc>
-                <a:tc>
-                  <a:txBody>
-                    <a:bodyPr/>
-                    <a:lstStyle/>
-                    <a:p>
-                      <a:pPr marL="0" indent="0" eaLnBrk="0">
-                        <a:buNone/>
-                      </a:pPr>
-                      <a:r>
-                        <a:rPr lang="en-US" sz="1200" dirty="0">
-                          <a:solidFill>
-                            <a:srgbClr val="1D1D1F"/>
-                          </a:solidFill>
-                          <a:latin typeface="나눔스퀘어 네오 Regular" pitchFamily="34" charset="0"/>
-                          <a:ea typeface="나눔스퀘어 네오 Regular" pitchFamily="34" charset="-122"/>
-                          <a:cs typeface="나눔스퀘어 네오 Regular" pitchFamily="34" charset="-120"/>
-                        </a:rPr>
-                        <a:t>1.68°</a:t>
-                      </a:r>
-                      <a:endParaRPr lang="en-US" sz="1200" dirty="0">
-                        <a:latin typeface="나눔스퀘어 네오 Regular" charset="0"/>
-                        <a:ea typeface="나눔스퀘어 네오 Regular" charset="0"/>
-                        <a:cs typeface="나눔스퀘어 네오 Regular" charset="0"/>
-                      </a:endParaRPr>
-                    </a:p>
-                  </a:txBody>
-                  <a:tcPr marL="73152" marR="73152" marT="36576" marB="36576" anchor="ctr">
-                    <a:lnL w="6350" cap="flat" cmpd="sng" algn="ctr">
-                      <a:solidFill>
-                        <a:srgbClr val="E0E0E0"/>
-                      </a:solidFill>
-                      <a:prstDash val="solid"/>
-                      <a:round/>
-                      <a:headEnd type="none" w="med" len="med"/>
-                      <a:tailEnd type="none" w="med" len="med"/>
-                    </a:lnL>
-                    <a:lnR w="6350" cap="flat" cmpd="sng" algn="ctr">
-                      <a:solidFill>
-                        <a:srgbClr val="E0E0E0"/>
-                      </a:solidFill>
-                      <a:prstDash val="solid"/>
-                      <a:round/>
-                      <a:headEnd type="none" w="med" len="med"/>
-                      <a:tailEnd type="none" w="med" len="med"/>
-                    </a:lnR>
-                    <a:lnT w="6350" cap="flat" cmpd="sng" algn="ctr">
-                      <a:solidFill>
-                        <a:srgbClr val="E0E0E0"/>
-                      </a:solidFill>
-                      <a:prstDash val="solid"/>
-                      <a:round/>
-                      <a:headEnd type="none" w="med" len="med"/>
-                      <a:tailEnd type="none" w="med" len="med"/>
-                    </a:lnT>
-                    <a:lnB w="6350" cap="flat" cmpd="sng" algn="ctr">
-                      <a:solidFill>
-                        <a:srgbClr val="E0E0E0"/>
-                      </a:solidFill>
-                      <a:prstDash val="solid"/>
-                      <a:round/>
-                      <a:headEnd type="none" w="med" len="med"/>
-                      <a:tailEnd type="none" w="med" len="med"/>
-                    </a:lnB>
-                    <a:solidFill>
-                      <a:srgbClr val="FFFFFF"/>
-                    </a:solidFill>
-                  </a:tcPr>
-                </a:tc>
-                <a:tc>
-                  <a:txBody>
-                    <a:bodyPr/>
-                    <a:lstStyle/>
-                    <a:p>
-                      <a:pPr marL="0" indent="0" eaLnBrk="0">
-                        <a:buNone/>
-                      </a:pPr>
-                      <a:r>
-                        <a:rPr lang="en-US" sz="1200" dirty="0">
-                          <a:solidFill>
-                            <a:srgbClr val="1D1D1F"/>
-                          </a:solidFill>
-                          <a:latin typeface="나눔스퀘어 네오 Regular" pitchFamily="34" charset="0"/>
-                          <a:ea typeface="나눔스퀘어 네오 Regular" pitchFamily="34" charset="-122"/>
-                          <a:cs typeface="나눔스퀘어 네오 Regular" pitchFamily="34" charset="-120"/>
-                        </a:rPr>
-                        <a:t>0.06°</a:t>
-                      </a:r>
-                      <a:endParaRPr lang="en-US" sz="1200" dirty="0">
-                        <a:latin typeface="나눔스퀘어 네오 Regular" charset="0"/>
-                        <a:ea typeface="나눔스퀘어 네오 Regular" charset="0"/>
-                        <a:cs typeface="나눔스퀘어 네오 Regular" charset="0"/>
-                      </a:endParaRPr>
-                    </a:p>
-                  </a:txBody>
-                  <a:tcPr marL="73152" marR="73152" marT="36576" marB="36576" anchor="ctr">
-                    <a:lnL w="6350" cap="flat" cmpd="sng" algn="ctr">
-                      <a:solidFill>
-                        <a:srgbClr val="E0E0E0"/>
-                      </a:solidFill>
-                      <a:prstDash val="solid"/>
-                      <a:round/>
-                      <a:headEnd type="none" w="med" len="med"/>
-                      <a:tailEnd type="none" w="med" len="med"/>
-                    </a:lnL>
-                    <a:lnR w="6350" cap="flat" cmpd="sng" algn="ctr">
-                      <a:solidFill>
-                        <a:srgbClr val="E0E0E0"/>
-                      </a:solidFill>
-                      <a:prstDash val="solid"/>
-                      <a:round/>
-                      <a:headEnd type="none" w="med" len="med"/>
-                      <a:tailEnd type="none" w="med" len="med"/>
-                    </a:lnR>
-                    <a:lnT w="6350" cap="flat" cmpd="sng" algn="ctr">
-                      <a:solidFill>
-                        <a:srgbClr val="E0E0E0"/>
-                      </a:solidFill>
-                      <a:prstDash val="solid"/>
-                      <a:round/>
-                      <a:headEnd type="none" w="med" len="med"/>
-                      <a:tailEnd type="none" w="med" len="med"/>
-                    </a:lnT>
-                    <a:lnB w="6350" cap="flat" cmpd="sng" algn="ctr">
-                      <a:solidFill>
-                        <a:srgbClr val="E0E0E0"/>
-                      </a:solidFill>
-                      <a:prstDash val="solid"/>
-                      <a:round/>
-                      <a:headEnd type="none" w="med" len="med"/>
-                      <a:tailEnd type="none" w="med" len="med"/>
-                    </a:lnB>
-                    <a:solidFill>
-                      <a:srgbClr val="FFFFFF"/>
-                    </a:solidFill>
-                  </a:tcPr>
-                </a:tc>
-                <a:tc>
-                  <a:txBody>
-                    <a:bodyPr/>
-                    <a:lstStyle/>
-                    <a:p>
-                      <a:pPr marL="0" indent="0" eaLnBrk="0">
-                        <a:buNone/>
-                      </a:pPr>
-                      <a:r>
-                        <a:rPr lang="en-US" sz="1200" dirty="0">
-                          <a:solidFill>
-                            <a:srgbClr val="1D1D1F"/>
-                          </a:solidFill>
-                          <a:latin typeface="나눔스퀘어 네오 Bold" pitchFamily="34" charset="0"/>
-                          <a:ea typeface="나눔스퀘어 네오 Bold" pitchFamily="34" charset="-122"/>
-                          <a:cs typeface="나눔스퀘어 네오 Bold" pitchFamily="34" charset="-120"/>
-                        </a:rPr>
-                        <a:t>115.9°</a:t>
-                      </a:r>
-                      <a:endParaRPr lang="en-US" sz="1200" dirty="0">
-                        <a:latin typeface="나눔스퀘어 네오 Regular" charset="0"/>
-                        <a:ea typeface="나눔스퀘어 네오 Regular" charset="0"/>
-                        <a:cs typeface="나눔스퀘어 네오 Regular" charset="0"/>
-                      </a:endParaRPr>
-                    </a:p>
-                  </a:txBody>
-                  <a:tcPr marL="73152" marR="73152" marT="36576" marB="36576" anchor="ctr">
-                    <a:lnL w="6350" cap="flat" cmpd="sng" algn="ctr">
-                      <a:solidFill>
-                        <a:srgbClr val="E0E0E0"/>
-                      </a:solidFill>
-                      <a:prstDash val="solid"/>
-                      <a:round/>
-                      <a:headEnd type="none" w="med" len="med"/>
-                      <a:tailEnd type="none" w="med" len="med"/>
-                    </a:lnL>
-                    <a:lnR w="6350" cap="flat" cmpd="sng" algn="ctr">
-                      <a:solidFill>
-                        <a:srgbClr val="E0E0E0"/>
-                      </a:solidFill>
-                      <a:prstDash val="solid"/>
-                      <a:round/>
-                      <a:headEnd type="none" w="med" len="med"/>
-                      <a:tailEnd type="none" w="med" len="med"/>
-                    </a:lnR>
-                    <a:lnT w="6350" cap="flat" cmpd="sng" algn="ctr">
-                      <a:solidFill>
-                        <a:srgbClr val="E0E0E0"/>
-                      </a:solidFill>
-                      <a:prstDash val="solid"/>
-                      <a:round/>
-                      <a:headEnd type="none" w="med" len="med"/>
-                      <a:tailEnd type="none" w="med" len="med"/>
-                    </a:lnT>
-                    <a:lnB w="6350" cap="flat" cmpd="sng" algn="ctr">
-                      <a:solidFill>
-                        <a:srgbClr val="E0E0E0"/>
-                      </a:solidFill>
-                      <a:prstDash val="solid"/>
-                      <a:round/>
-                      <a:headEnd type="none" w="med" len="med"/>
-                      <a:tailEnd type="none" w="med" len="med"/>
-                    </a:lnB>
-                    <a:solidFill>
-                      <a:srgbClr val="FFFFFF"/>
-                    </a:solidFill>
-                  </a:tcPr>
-                </a:tc>
-                <a:extLst>
-                  <a:ext uri="{0D108BD9-81ED-4DB2-BD59-A6C34878D82A}">
-                    <a16:rowId xmlns:a16="http://schemas.microsoft.com/office/drawing/2014/main" val="10004"/>
-                  </a:ext>
-                </a:extLst>
-              </a:tr>
-            </a:tbl>
+          <a:graphicData uri="http://schemas.openxmlformats.org/drawingml/2006/chart">
+            <c:chart xmlns:c="http://schemas.openxmlformats.org/drawingml/2006/chart" xmlns:r="http://schemas.openxmlformats.org/officeDocument/2006/relationships" r:id="rId3"/>
           </a:graphicData>
         </a:graphic>
       </p:graphicFrame>
       <p:sp>
         <p:nvSpPr>
-          <p:cNvPr id="9" name="Text 4"/>
+          <p:cNvPr id="9" name="Shape 4"/>
+          <p:cNvSpPr/>
+          <p:nvPr/>
+        </p:nvSpPr>
+        <p:spPr>
+          <a:xfrm>
+            <a:off x="8138160" y="3611880"/>
+            <a:ext cx="3474720" cy="1325880"/>
+          </a:xfrm>
+          <a:prstGeom prst="roundRect">
+            <a:avLst>
+              <a:gd name="adj" fmla="val 8276"/>
+            </a:avLst>
+          </a:prstGeom>
+          <a:solidFill>
+            <a:srgbClr val="272729"/>
+          </a:solidFill>
+          <a:ln w="12700">
+            <a:solidFill>
+              <a:srgbClr val="272729"/>
+            </a:solidFill>
+            <a:prstDash val="solid"/>
+          </a:ln>
+        </p:spPr>
+      </p:sp>
+      <p:sp>
+        <p:nvSpPr>
+          <p:cNvPr id="10" name="Text 5"/>
           <p:cNvSpPr txBox="1"/>
           <p:nvPr/>
         </p:nvSpPr>
         <p:spPr>
           <a:xfrm>
-            <a:off x="548640" y="5760720"/>
-            <a:ext cx="11064240" cy="594360"/>
+            <a:off x="8321040" y="3703320"/>
+            <a:ext cx="3108960" cy="640080"/>
+          </a:xfrm>
+          <a:prstGeom prst="rect">
+            <a:avLst/>
+          </a:prstGeom>
+          <a:noFill/>
+          <a:ln/>
+        </p:spPr>
+        <p:txBody>
+          <a:bodyPr wrap="square" lIns="0" tIns="0" rIns="0" bIns="0" rtlCol="0" anchor="ctr"/>
+          <a:lstStyle/>
+          <a:p>
+            <a:pPr marL="0" indent="0" eaLnBrk="0">
+              <a:buNone/>
+            </a:pPr>
+            <a:r>
+              <a:rPr lang="en-US" sz="2800" dirty="0">
+                <a:solidFill>
+                  <a:srgbClr val="2997FF"/>
+                </a:solidFill>
+                <a:latin typeface="나눔스퀘어 네오 Bold" pitchFamily="34" charset="0"/>
+                <a:ea typeface="나눔스퀘어 네오 Bold" pitchFamily="34" charset="-122"/>
+                <a:cs typeface="나눔스퀘어 네오 Bold" pitchFamily="34" charset="-120"/>
+              </a:rPr>
+              <a:t>115.9° → 1.68°</a:t>
+            </a:r>
+            <a:endParaRPr lang="en-US" sz="2800" dirty="0"/>
+          </a:p>
+        </p:txBody>
+      </p:sp>
+      <p:sp>
+        <p:nvSpPr>
+          <p:cNvPr id="11" name="Text 6"/>
+          <p:cNvSpPr txBox="1"/>
+          <p:nvPr/>
+        </p:nvSpPr>
+        <p:spPr>
+          <a:xfrm>
+            <a:off x="8321040" y="4389120"/>
+            <a:ext cx="3108960" cy="502920"/>
           </a:xfrm>
           <a:prstGeom prst="rect">
             <a:avLst/>
@@ -6982,17 +6444,122 @@
               <a:buNone/>
             </a:pPr>
             <a:r>
-              <a:rPr lang="en-US" sz="1300" dirty="0">
+              <a:rPr lang="en-US" sz="1200" dirty="0">
                 <a:solidFill>
-                  <a:srgbClr val="7A7A7A"/>
+                  <a:srgbClr val="FFFFFF"/>
                 </a:solidFill>
                 <a:latin typeface="나눔스퀘어 네오 Regular" pitchFamily="34" charset="0"/>
                 <a:ea typeface="나눔스퀘어 네오 Regular" pitchFamily="34" charset="-122"/>
                 <a:cs typeface="나눔스퀘어 네오 Regular" pitchFamily="34" charset="-120"/>
               </a:rPr>
-              <a:t>자기보정은 피벗을 데이터에서 복원해 붕괴(프리즈 8~116°)를 0.2~1.7°로 막고, 정수 모델에서는 손으로 맞춘 상수보다 오차가 작다(0.405° 대 0.467°). 합성은 단일 깊이·한 방향 회전이라 먼 피벗(pan 크기)의 R 정밀도는 제한적이다.</a:t>
+              <a:t>pan 크기 피벗(R 20,025 px): 프리즈 대비 자기보정</a:t>
             </a:r>
-            <a:endParaRPr lang="en-US" sz="1300" dirty="0"/>
+            <a:endParaRPr lang="en-US" sz="1200" dirty="0"/>
+          </a:p>
+        </p:txBody>
+      </p:sp>
+      <p:sp>
+        <p:nvSpPr>
+          <p:cNvPr id="3" name="Shape 7"/>
+          <p:cNvSpPr/>
+          <p:nvPr/>
+        </p:nvSpPr>
+        <p:spPr>
+          <a:xfrm>
+            <a:off x="8138160" y="5029200"/>
+            <a:ext cx="3474720" cy="1325880"/>
+          </a:xfrm>
+          <a:prstGeom prst="roundRect">
+            <a:avLst>
+              <a:gd name="adj" fmla="val 8276"/>
+            </a:avLst>
+          </a:prstGeom>
+          <a:solidFill>
+            <a:srgbClr val="FFFFFF"/>
+          </a:solidFill>
+          <a:ln w="9525">
+            <a:solidFill>
+              <a:srgbClr val="E0E0E0"/>
+            </a:solidFill>
+            <a:prstDash val="solid"/>
+          </a:ln>
+        </p:spPr>
+      </p:sp>
+      <p:sp>
+        <p:nvSpPr>
+          <p:cNvPr id="13" name="Text 8"/>
+          <p:cNvSpPr txBox="1"/>
+          <p:nvPr/>
+        </p:nvSpPr>
+        <p:spPr>
+          <a:xfrm>
+            <a:off x="8321040" y="5166360"/>
+            <a:ext cx="3108960" cy="365760"/>
+          </a:xfrm>
+          <a:prstGeom prst="rect">
+            <a:avLst/>
+          </a:prstGeom>
+          <a:noFill/>
+          <a:ln/>
+        </p:spPr>
+        <p:txBody>
+          <a:bodyPr wrap="square" lIns="0" tIns="0" rIns="0" bIns="0" rtlCol="0" anchor="t"/>
+          <a:lstStyle/>
+          <a:p>
+            <a:pPr marL="0" indent="0" eaLnBrk="0">
+              <a:buNone/>
+            </a:pPr>
+            <a:r>
+              <a:rPr lang="en-US" sz="1600" dirty="0">
+                <a:solidFill>
+                  <a:srgbClr val="0066CC"/>
+                </a:solidFill>
+                <a:latin typeface="나눔스퀘어 네오 Bold" pitchFamily="34" charset="0"/>
+                <a:ea typeface="나눔스퀘어 네오 Bold" pitchFamily="34" charset="-122"/>
+                <a:cs typeface="나눔스퀘어 네오 Bold" pitchFamily="34" charset="-120"/>
+              </a:rPr>
+              <a:t>범위</a:t>
+            </a:r>
+            <a:endParaRPr lang="en-US" sz="1600" dirty="0"/>
+          </a:p>
+        </p:txBody>
+      </p:sp>
+      <p:sp>
+        <p:nvSpPr>
+          <p:cNvPr id="14" name="Text 9"/>
+          <p:cNvSpPr txBox="1"/>
+          <p:nvPr/>
+        </p:nvSpPr>
+        <p:spPr>
+          <a:xfrm>
+            <a:off x="8321040" y="5577840"/>
+            <a:ext cx="3108960" cy="640080"/>
+          </a:xfrm>
+          <a:prstGeom prst="rect">
+            <a:avLst/>
+          </a:prstGeom>
+          <a:noFill/>
+          <a:ln/>
+        </p:spPr>
+        <p:txBody>
+          <a:bodyPr wrap="square" lIns="0" tIns="0" rIns="0" bIns="0" rtlCol="0" anchor="t"/>
+          <a:lstStyle/>
+          <a:p>
+            <a:pPr marL="0" indent="0" eaLnBrk="0">
+              <a:buNone/>
+            </a:pPr>
+            <a:r>
+              <a:rPr lang="en-US" sz="1100" dirty="0">
+                <a:solidFill>
+                  <a:srgbClr val="1D1D1F"/>
+                </a:solidFill>
+                <a:latin typeface="나눔스퀘어 네오 Regular" pitchFamily="34" charset="0"/>
+                <a:ea typeface="나눔스퀘어 네오 Regular" pitchFamily="34" charset="-122"/>
+                <a:cs typeface="나눔스퀘어 네오 Regular" pitchFamily="34" charset="-120"/>
+              </a:rPr>
+              <a:t>50~150 px 피벗(G1~G4, 회전 120°)에서는 세 방식 모두 0.7~2.6°. 합성은 단일 깊이·한 방향 회전.</a:t>
+            </a:r>
+            <a:endParaRPr lang="en-US" sz="1100" dirty="0"/>
           </a:p>
         </p:txBody>
       </p:sp>
@@ -7125,7 +6692,7 @@
           </p:nvPr>
         </p:nvGraphicFramePr>
         <p:xfrm>
-          <a:off x="548640" y="1417320"/>
+          <a:off x="548640" y="1371600"/>
           <a:ext cx="11064240" cy="914400"/>
         </p:xfrm>
         <a:graphic>
@@ -7155,7 +6722,7 @@
                   </a:extLst>
                 </a:gridCol>
               </a:tblGrid>
-              <a:tr h="457200">
+              <a:tr h="384048">
                 <a:tc>
                   <a:txBody>
                     <a:bodyPr/>
@@ -7165,7 +6732,7 @@
                         <a:buNone/>
                       </a:pPr>
                       <a:r>
-                        <a:rPr lang="en-US" sz="1300" dirty="0">
+                        <a:rPr lang="en-US" sz="1200" dirty="0">
                           <a:solidFill>
                             <a:srgbClr val="1D1D1F"/>
                           </a:solidFill>
@@ -7175,7 +6742,7 @@
                         </a:rPr>
                         <a:t>후보</a:t>
                       </a:r>
-                      <a:endParaRPr lang="en-US" sz="1300" dirty="0">
+                      <a:endParaRPr lang="en-US" sz="1200" dirty="0">
                         <a:latin typeface="나눔스퀘어 네오 Regular" charset="0"/>
                         <a:ea typeface="나눔스퀘어 네오 Regular" charset="0"/>
                         <a:cs typeface="나눔스퀘어 네오 Regular" charset="0"/>
@@ -7233,7 +6800,7 @@
                         <a:buNone/>
                       </a:pPr>
                       <a:r>
-                        <a:rPr lang="en-US" sz="1300" dirty="0">
+                        <a:rPr lang="en-US" sz="1200" dirty="0">
                           <a:solidFill>
                             <a:srgbClr val="1D1D1F"/>
                           </a:solidFill>
@@ -7243,7 +6810,7 @@
                         </a:rPr>
                         <a:t>결과</a:t>
                       </a:r>
-                      <a:endParaRPr lang="en-US" sz="1300" dirty="0">
+                      <a:endParaRPr lang="en-US" sz="1200" dirty="0">
                         <a:latin typeface="나눔스퀘어 네오 Regular" charset="0"/>
                         <a:ea typeface="나눔스퀘어 네오 Regular" charset="0"/>
                         <a:cs typeface="나눔스퀘어 네오 Regular" charset="0"/>
@@ -7301,7 +6868,7 @@
                         <a:buNone/>
                       </a:pPr>
                       <a:r>
-                        <a:rPr lang="en-US" sz="1300" dirty="0">
+                        <a:rPr lang="en-US" sz="1200" dirty="0">
                           <a:solidFill>
                             <a:srgbClr val="1D1D1F"/>
                           </a:solidFill>
@@ -7311,7 +6878,7 @@
                         </a:rPr>
                         <a:t>이유</a:t>
                       </a:r>
-                      <a:endParaRPr lang="en-US" sz="1300" dirty="0">
+                      <a:endParaRPr lang="en-US" sz="1200" dirty="0">
                         <a:latin typeface="나눔스퀘어 네오 Regular" charset="0"/>
                         <a:ea typeface="나눔스퀘어 네오 Regular" charset="0"/>
                         <a:cs typeface="나눔스퀘어 네오 Regular" charset="0"/>
@@ -7366,7 +6933,7 @@
                   </a:ext>
                 </a:extLst>
               </a:tr>
-              <a:tr h="457200">
+              <a:tr h="384048">
                 <a:tc>
                   <a:txBody>
                     <a:bodyPr/>
@@ -7376,7 +6943,7 @@
                         <a:buNone/>
                       </a:pPr>
                       <a:r>
-                        <a:rPr lang="en-US" sz="1300" dirty="0">
+                        <a:rPr lang="en-US" sz="1200" dirty="0">
                           <a:solidFill>
                             <a:srgbClr val="1D1D1F"/>
                           </a:solidFill>
@@ -7386,7 +6953,7 @@
                         </a:rPr>
                         <a:t>증분 변환 8레인 (채택)</a:t>
                       </a:r>
-                      <a:endParaRPr lang="en-US" sz="1300" dirty="0">
+                      <a:endParaRPr lang="en-US" sz="1200" dirty="0">
                         <a:latin typeface="나눔스퀘어 네오 Regular" charset="0"/>
                         <a:ea typeface="나눔스퀘어 네오 Regular" charset="0"/>
                         <a:cs typeface="나눔스퀘어 네오 Regular" charset="0"/>
@@ -7444,7 +7011,7 @@
                         <a:buNone/>
                       </a:pPr>
                       <a:r>
-                        <a:rPr lang="en-US" sz="1300" dirty="0">
+                        <a:rPr lang="en-US" sz="1200" dirty="0">
                           <a:solidFill>
                             <a:srgbClr val="0066CC"/>
                           </a:solidFill>
@@ -7454,7 +7021,7 @@
                         </a:rPr>
                         <a:t>채택</a:t>
                       </a:r>
-                      <a:endParaRPr lang="en-US" sz="1300" dirty="0">
+                      <a:endParaRPr lang="en-US" sz="1200" dirty="0">
                         <a:latin typeface="나눔스퀘어 네오 Regular" charset="0"/>
                         <a:ea typeface="나눔스퀘어 네오 Regular" charset="0"/>
                         <a:cs typeface="나눔스퀘어 네오 Regular" charset="0"/>
@@ -7512,7 +7079,7 @@
                         <a:buNone/>
                       </a:pPr>
                       <a:r>
-                        <a:rPr lang="en-US" sz="1300" dirty="0">
+                        <a:rPr lang="en-US" sz="1200" dirty="0">
                           <a:solidFill>
                             <a:srgbClr val="1D1D1F"/>
                           </a:solidFill>
@@ -7522,7 +7089,7 @@
                         </a:rPr>
                         <a:t>직접 곱셈과 출력 비트 일치, 면적 2.29배·전력 2.54배 작음 (group AER 8픽셀 묶음과 결합할 때)</a:t>
                       </a:r>
-                      <a:endParaRPr lang="en-US" sz="1300" dirty="0">
+                      <a:endParaRPr lang="en-US" sz="1200" dirty="0">
                         <a:latin typeface="나눔스퀘어 네오 Regular" charset="0"/>
                         <a:ea typeface="나눔스퀘어 네오 Regular" charset="0"/>
                         <a:cs typeface="나눔스퀘어 네오 Regular" charset="0"/>
@@ -7577,7 +7144,7 @@
                   </a:ext>
                 </a:extLst>
               </a:tr>
-              <a:tr h="457200">
+              <a:tr h="384048">
                 <a:tc>
                   <a:txBody>
                     <a:bodyPr/>
@@ -7587,7 +7154,7 @@
                         <a:buNone/>
                       </a:pPr>
                       <a:r>
-                        <a:rPr lang="en-US" sz="1300" dirty="0">
+                        <a:rPr lang="en-US" sz="1200" dirty="0">
                           <a:solidFill>
                             <a:srgbClr val="1D1D1F"/>
                           </a:solidFill>
@@ -7597,7 +7164,7 @@
                         </a:rPr>
                         <a:t>직접 곱셈</a:t>
                       </a:r>
-                      <a:endParaRPr lang="en-US" sz="1300" dirty="0">
+                      <a:endParaRPr lang="en-US" sz="1200" dirty="0">
                         <a:latin typeface="나눔스퀘어 네오 Regular" charset="0"/>
                         <a:ea typeface="나눔스퀘어 네오 Regular" charset="0"/>
                         <a:cs typeface="나눔스퀘어 네오 Regular" charset="0"/>
@@ -7655,7 +7222,7 @@
                         <a:buNone/>
                       </a:pPr>
                       <a:r>
-                        <a:rPr lang="en-US" sz="1300" dirty="0">
+                        <a:rPr lang="en-US" sz="1200" dirty="0">
                           <a:solidFill>
                             <a:srgbClr val="1D1D1F"/>
                           </a:solidFill>
@@ -7665,7 +7232,7 @@
                         </a:rPr>
                         <a:t>기준</a:t>
                       </a:r>
-                      <a:endParaRPr lang="en-US" sz="1300" dirty="0">
+                      <a:endParaRPr lang="en-US" sz="1200" dirty="0">
                         <a:latin typeface="나눔스퀘어 네오 Regular" charset="0"/>
                         <a:ea typeface="나눔스퀘어 네오 Regular" charset="0"/>
                         <a:cs typeface="나눔스퀘어 네오 Regular" charset="0"/>
@@ -7723,7 +7290,7 @@
                         <a:buNone/>
                       </a:pPr>
                       <a:r>
-                        <a:rPr lang="en-US" sz="1300" dirty="0">
+                        <a:rPr lang="en-US" sz="1200" dirty="0">
                           <a:solidFill>
                             <a:srgbClr val="1D1D1F"/>
                           </a:solidFill>
@@ -7733,7 +7300,7 @@
                         </a:rPr>
                         <a:t>비트 기준 모델. 같은 8레인에서 더 큼</a:t>
                       </a:r>
-                      <a:endParaRPr lang="en-US" sz="1300" dirty="0">
+                      <a:endParaRPr lang="en-US" sz="1200" dirty="0">
                         <a:latin typeface="나눔스퀘어 네오 Regular" charset="0"/>
                         <a:ea typeface="나눔스퀘어 네오 Regular" charset="0"/>
                         <a:cs typeface="나눔스퀘어 네오 Regular" charset="0"/>
@@ -7788,7 +7355,7 @@
                   </a:ext>
                 </a:extLst>
               </a:tr>
-              <a:tr h="457200">
+              <a:tr h="384048">
                 <a:tc>
                   <a:txBody>
                     <a:bodyPr/>
@@ -7798,7 +7365,7 @@
                         <a:buNone/>
                       </a:pPr>
                       <a:r>
-                        <a:rPr lang="en-US" sz="1300" dirty="0">
+                        <a:rPr lang="en-US" sz="1200" dirty="0">
                           <a:solidFill>
                             <a:srgbClr val="1D1D1F"/>
                           </a:solidFill>
@@ -7808,7 +7375,7 @@
                         </a:rPr>
                         <a:t>CORDIC</a:t>
                       </a:r>
-                      <a:endParaRPr lang="en-US" sz="1300" dirty="0">
+                      <a:endParaRPr lang="en-US" sz="1200" dirty="0">
                         <a:latin typeface="나눔스퀘어 네오 Regular" charset="0"/>
                         <a:ea typeface="나눔스퀘어 네오 Regular" charset="0"/>
                         <a:cs typeface="나눔스퀘어 네오 Regular" charset="0"/>
@@ -7866,7 +7433,7 @@
                         <a:buNone/>
                       </a:pPr>
                       <a:r>
-                        <a:rPr lang="en-US" sz="1300" dirty="0">
+                        <a:rPr lang="en-US" sz="1200" dirty="0">
                           <a:solidFill>
                             <a:srgbClr val="1D1D1F"/>
                           </a:solidFill>
@@ -7876,7 +7443,7 @@
                         </a:rPr>
                         <a:t>탈락</a:t>
                       </a:r>
-                      <a:endParaRPr lang="en-US" sz="1300" dirty="0">
+                      <a:endParaRPr lang="en-US" sz="1200" dirty="0">
                         <a:latin typeface="나눔스퀘어 네오 Regular" charset="0"/>
                         <a:ea typeface="나눔스퀘어 네오 Regular" charset="0"/>
                         <a:cs typeface="나눔스퀘어 네오 Regular" charset="0"/>
@@ -7934,7 +7501,7 @@
                         <a:buNone/>
                       </a:pPr>
                       <a:r>
-                        <a:rPr lang="en-US" sz="1300" dirty="0">
+                        <a:rPr lang="en-US" sz="1200" dirty="0">
                           <a:solidFill>
                             <a:srgbClr val="1D1D1F"/>
                           </a:solidFill>
@@ -7944,7 +7511,7 @@
                         </a:rPr>
                         <a:t>면적이 커서</a:t>
                       </a:r>
-                      <a:endParaRPr lang="en-US" sz="1300" dirty="0">
+                      <a:endParaRPr lang="en-US" sz="1200" dirty="0">
                         <a:latin typeface="나눔스퀘어 네오 Regular" charset="0"/>
                         <a:ea typeface="나눔스퀘어 네오 Regular" charset="0"/>
                         <a:cs typeface="나눔스퀘어 네오 Regular" charset="0"/>
@@ -7999,7 +7566,7 @@
                   </a:ext>
                 </a:extLst>
               </a:tr>
-              <a:tr h="457200">
+              <a:tr h="384048">
                 <a:tc>
                   <a:txBody>
                     <a:bodyPr/>
@@ -8009,7 +7576,7 @@
                         <a:buNone/>
                       </a:pPr>
                       <a:r>
-                        <a:rPr lang="en-US" sz="1300" dirty="0">
+                        <a:rPr lang="en-US" sz="1200" dirty="0">
                           <a:solidFill>
                             <a:srgbClr val="1D1D1F"/>
                           </a:solidFill>
@@ -8019,7 +7586,7 @@
                         </a:rPr>
                         <a:t>3단 전단(shear) 분해 회전</a:t>
                       </a:r>
-                      <a:endParaRPr lang="en-US" sz="1300" dirty="0">
+                      <a:endParaRPr lang="en-US" sz="1200" dirty="0">
                         <a:latin typeface="나눔스퀘어 네오 Regular" charset="0"/>
                         <a:ea typeface="나눔스퀘어 네오 Regular" charset="0"/>
                         <a:cs typeface="나눔스퀘어 네오 Regular" charset="0"/>
@@ -8077,7 +7644,7 @@
                         <a:buNone/>
                       </a:pPr>
                       <a:r>
-                        <a:rPr lang="en-US" sz="1300" dirty="0">
+                        <a:rPr lang="en-US" sz="1200" dirty="0">
                           <a:solidFill>
                             <a:srgbClr val="1D1D1F"/>
                           </a:solidFill>
@@ -8087,7 +7654,7 @@
                         </a:rPr>
                         <a:t>탈락</a:t>
                       </a:r>
-                      <a:endParaRPr lang="en-US" sz="1300" dirty="0">
+                      <a:endParaRPr lang="en-US" sz="1200" dirty="0">
                         <a:latin typeface="나눔스퀘어 네오 Regular" charset="0"/>
                         <a:ea typeface="나눔스퀘어 네오 Regular" charset="0"/>
                         <a:cs typeface="나눔스퀘어 네오 Regular" charset="0"/>
@@ -8145,7 +7712,7 @@
                         <a:buNone/>
                       </a:pPr>
                       <a:r>
-                        <a:rPr lang="en-US" sz="1300" dirty="0">
+                        <a:rPr lang="en-US" sz="1200" dirty="0">
                           <a:solidFill>
                             <a:srgbClr val="1D1D1F"/>
                           </a:solidFill>
@@ -8155,7 +7722,7 @@
                         </a:rPr>
                         <a:t>정수 픽셀 전단은 평균 0.44 px 오차, 정수 일치 70% — 비트 일치 아님</a:t>
                       </a:r>
-                      <a:endParaRPr lang="en-US" sz="1300" dirty="0">
+                      <a:endParaRPr lang="en-US" sz="1200" dirty="0">
                         <a:latin typeface="나눔스퀘어 네오 Regular" charset="0"/>
                         <a:ea typeface="나눔스퀘어 네오 Regular" charset="0"/>
                         <a:cs typeface="나눔스퀘어 네오 Regular" charset="0"/>
@@ -8210,7 +7777,7 @@
                   </a:ext>
                 </a:extLst>
               </a:tr>
-              <a:tr h="457200">
+              <a:tr h="384048">
                 <a:tc>
                   <a:txBody>
                     <a:bodyPr/>
@@ -8220,7 +7787,7 @@
                         <a:buNone/>
                       </a:pPr>
                       <a:r>
-                        <a:rPr lang="en-US" sz="1300" dirty="0">
+                        <a:rPr lang="en-US" sz="1200" dirty="0">
                           <a:solidFill>
                             <a:srgbClr val="1D1D1F"/>
                           </a:solidFill>
@@ -8230,7 +7797,7 @@
                         </a:rPr>
                         <a:t>행별 읽기 시각 보정</a:t>
                       </a:r>
-                      <a:endParaRPr lang="en-US" sz="1300" dirty="0">
+                      <a:endParaRPr lang="en-US" sz="1200" dirty="0">
                         <a:latin typeface="나눔스퀘어 네오 Regular" charset="0"/>
                         <a:ea typeface="나눔스퀘어 네오 Regular" charset="0"/>
                         <a:cs typeface="나눔스퀘어 네오 Regular" charset="0"/>
@@ -8288,7 +7855,7 @@
                         <a:buNone/>
                       </a:pPr>
                       <a:r>
-                        <a:rPr lang="en-US" sz="1300" dirty="0">
+                        <a:rPr lang="en-US" sz="1200" dirty="0">
                           <a:solidFill>
                             <a:srgbClr val="1D1D1F"/>
                           </a:solidFill>
@@ -8298,7 +7865,7 @@
                         </a:rPr>
                         <a:t>탈락</a:t>
                       </a:r>
-                      <a:endParaRPr lang="en-US" sz="1300" dirty="0">
+                      <a:endParaRPr lang="en-US" sz="1200" dirty="0">
                         <a:latin typeface="나눔스퀘어 네오 Regular" charset="0"/>
                         <a:ea typeface="나눔스퀘어 네오 Regular" charset="0"/>
                         <a:cs typeface="나눔스퀘어 네오 Regular" charset="0"/>
@@ -8356,7 +7923,7 @@
                         <a:buNone/>
                       </a:pPr>
                       <a:r>
-                        <a:rPr lang="en-US" sz="1300" dirty="0">
+                        <a:rPr lang="en-US" sz="1200" dirty="0">
                           <a:solidFill>
                             <a:srgbClr val="1D1D1F"/>
                           </a:solidFill>
@@ -8366,7 +7933,7 @@
                         </a:rPr>
                         <a:t>프레임당 최대 0.4°라 선명도 변화 +0.2~0.4%</a:t>
                       </a:r>
-                      <a:endParaRPr lang="en-US" sz="1300" dirty="0">
+                      <a:endParaRPr lang="en-US" sz="1200" dirty="0">
                         <a:latin typeface="나눔스퀘어 네오 Regular" charset="0"/>
                         <a:ea typeface="나눔스퀘어 네오 Regular" charset="0"/>
                         <a:cs typeface="나눔스퀘어 네오 Regular" charset="0"/>
@@ -8421,7 +7988,7 @@
                   </a:ext>
                 </a:extLst>
               </a:tr>
-              <a:tr h="457200">
+              <a:tr h="384048">
                 <a:tc>
                   <a:txBody>
                     <a:bodyPr/>
@@ -8431,7 +7998,7 @@
                         <a:buNone/>
                       </a:pPr>
                       <a:r>
-                        <a:rPr lang="en-US" sz="1300" dirty="0">
+                        <a:rPr lang="en-US" sz="1200" dirty="0">
                           <a:solidFill>
                             <a:srgbClr val="1D1D1F"/>
                           </a:solidFill>
@@ -8441,7 +8008,7 @@
                         </a:rPr>
                         <a:t>렌즈 왜곡 보정</a:t>
                       </a:r>
-                      <a:endParaRPr lang="en-US" sz="1300" dirty="0">
+                      <a:endParaRPr lang="en-US" sz="1200" dirty="0">
                         <a:latin typeface="나눔스퀘어 네오 Regular" charset="0"/>
                         <a:ea typeface="나눔스퀘어 네오 Regular" charset="0"/>
                         <a:cs typeface="나눔스퀘어 네오 Regular" charset="0"/>
@@ -8499,7 +8066,7 @@
                         <a:buNone/>
                       </a:pPr>
                       <a:r>
-                        <a:rPr lang="en-US" sz="1300" dirty="0">
+                        <a:rPr lang="en-US" sz="1200" dirty="0">
                           <a:solidFill>
                             <a:srgbClr val="1D1D1F"/>
                           </a:solidFill>
@@ -8509,7 +8076,7 @@
                         </a:rPr>
                         <a:t>탈락</a:t>
                       </a:r>
-                      <a:endParaRPr lang="en-US" sz="1300" dirty="0">
+                      <a:endParaRPr lang="en-US" sz="1200" dirty="0">
                         <a:latin typeface="나눔스퀘어 네오 Regular" charset="0"/>
                         <a:ea typeface="나눔스퀘어 네오 Regular" charset="0"/>
                         <a:cs typeface="나눔스퀘어 네오 Regular" charset="0"/>
@@ -8567,7 +8134,7 @@
                         <a:buNone/>
                       </a:pPr>
                       <a:r>
-                        <a:rPr lang="en-US" sz="1300" dirty="0">
+                        <a:rPr lang="en-US" sz="1200" dirty="0">
                           <a:solidFill>
                             <a:srgbClr val="1D1D1F"/>
                           </a:solidFill>
@@ -8577,7 +8144,7 @@
                         </a:rPr>
                         <a:t>직선성 잔차 0.987 → 0.987 px, 지도 선명도 −1.9% (손해)</a:t>
                       </a:r>
-                      <a:endParaRPr lang="en-US" sz="1300" dirty="0">
+                      <a:endParaRPr lang="en-US" sz="1200" dirty="0">
                         <a:latin typeface="나눔스퀘어 네오 Regular" charset="0"/>
                         <a:ea typeface="나눔스퀘어 네오 Regular" charset="0"/>
                         <a:cs typeface="나눔스퀘어 네오 Regular" charset="0"/>
@@ -8636,20 +8203,36 @@
           </a:graphicData>
         </a:graphic>
       </p:graphicFrame>
+      <p:graphicFrame>
+        <p:nvGraphicFramePr>
+          <p:cNvPr id="5" name="Chart 0"/>
+          <p:cNvGraphicFramePr/>
+          <p:nvPr/>
+        </p:nvGraphicFramePr>
+        <p:xfrm>
+          <a:off x="6217920" y="4069080"/>
+          <a:ext cx="5394960" cy="2331720"/>
+        </p:xfrm>
+        <a:graphic>
+          <a:graphicData uri="http://schemas.openxmlformats.org/drawingml/2006/chart">
+            <c:chart xmlns:c="http://schemas.openxmlformats.org/drawingml/2006/chart" xmlns:r="http://schemas.openxmlformats.org/officeDocument/2006/relationships" r:id="rId3"/>
+          </a:graphicData>
+        </a:graphic>
+      </p:graphicFrame>
       <p:sp>
         <p:nvSpPr>
-          <p:cNvPr id="5" name="Shape 1"/>
+          <p:cNvPr id="6" name="Shape 1"/>
           <p:cNvSpPr/>
           <p:nvPr/>
         </p:nvSpPr>
         <p:spPr>
           <a:xfrm>
-            <a:off x="548640" y="4754880"/>
-            <a:ext cx="5394960" cy="1554480"/>
+            <a:off x="548640" y="4297680"/>
+            <a:ext cx="5394960" cy="2011680"/>
           </a:xfrm>
           <a:prstGeom prst="roundRect">
             <a:avLst>
-              <a:gd name="adj" fmla="val 7059"/>
+              <a:gd name="adj" fmla="val 5455"/>
             </a:avLst>
           </a:prstGeom>
           <a:solidFill>
@@ -8665,13 +8248,13 @@
       </p:sp>
       <p:sp>
         <p:nvSpPr>
-          <p:cNvPr id="6" name="Text 2"/>
+          <p:cNvPr id="7" name="Text 2"/>
           <p:cNvSpPr txBox="1"/>
           <p:nvPr/>
         </p:nvSpPr>
         <p:spPr>
           <a:xfrm>
-            <a:off x="731520" y="4892040"/>
+            <a:off x="731520" y="4434840"/>
             <a:ext cx="5029200" cy="365760"/>
           </a:xfrm>
           <a:prstGeom prst="rect">
@@ -8704,14 +8287,14 @@
       </p:sp>
       <p:sp>
         <p:nvSpPr>
-          <p:cNvPr id="7" name="Text 3"/>
+          <p:cNvPr id="8" name="Text 3"/>
           <p:cNvSpPr txBox="1"/>
           <p:nvPr/>
         </p:nvSpPr>
         <p:spPr>
           <a:xfrm>
-            <a:off x="731520" y="5303520"/>
-            <a:ext cx="5029200" cy="868680"/>
+            <a:off x="731520" y="4846320"/>
+            <a:ext cx="5029200" cy="1325880"/>
           </a:xfrm>
           <a:prstGeom prst="rect">
             <a:avLst/>
@@ -8727,7 +8310,7 @@
               <a:buNone/>
             </a:pPr>
             <a:r>
-              <a:rPr lang="en-US" sz="1300" dirty="0">
+              <a:rPr lang="en-US" sz="1200" dirty="0">
                 <a:solidFill>
                   <a:srgbClr val="1D1D1F"/>
                 </a:solidFill>
@@ -8737,14 +8320,14 @@
               </a:rPr>
               <a:t>고정소수점 F=10, cos/sin은 CORDIC 2개(추정기 F=12, 월드 F=10)로 계산 — 각도 단계 LUT가 아니라 연속 각도</a:t>
             </a:r>
-            <a:endParaRPr lang="en-US" sz="1300" dirty="0"/>
+            <a:endParaRPr lang="en-US" sz="1200" dirty="0"/>
           </a:p>
           <a:p>
             <a:pPr marL="0" indent="0" eaLnBrk="0">
               <a:buNone/>
             </a:pPr>
             <a:r>
-              <a:rPr lang="en-US" sz="1300" dirty="0">
+              <a:rPr lang="en-US" sz="1200" dirty="0">
                 <a:solidFill>
                   <a:srgbClr val="1D1D1F"/>
                 </a:solidFill>
@@ -8752,114 +8335,9 @@
                 <a:ea typeface="나눔스퀘어 네오 Regular" pitchFamily="34" charset="-122"/>
                 <a:cs typeface="나눔스퀘어 네오 Regular" pitchFamily="34" charset="-120"/>
               </a:rPr>
-              <a:t>합성 변환 블록 13,866 µm²</a:t>
+              <a:t>합성 변환 블록 13,866 µm². 곱셈기를 없애는 것이 항상 이득은 아니고, 8픽셀 그룹 입력과 맞물릴 때만 이긴다.</a:t>
             </a:r>
-            <a:endParaRPr lang="en-US" sz="1300" dirty="0"/>
-          </a:p>
-        </p:txBody>
-      </p:sp>
-      <p:sp>
-        <p:nvSpPr>
-          <p:cNvPr id="8" name="Shape 4"/>
-          <p:cNvSpPr/>
-          <p:nvPr/>
-        </p:nvSpPr>
-        <p:spPr>
-          <a:xfrm>
-            <a:off x="6217920" y="4754880"/>
-            <a:ext cx="5394960" cy="1554480"/>
-          </a:xfrm>
-          <a:prstGeom prst="roundRect">
-            <a:avLst>
-              <a:gd name="adj" fmla="val 7059"/>
-            </a:avLst>
-          </a:prstGeom>
-          <a:solidFill>
-            <a:srgbClr val="F5F5F7"/>
-          </a:solidFill>
-          <a:ln w="9525">
-            <a:solidFill>
-              <a:srgbClr val="E0E0E0"/>
-            </a:solidFill>
-            <a:prstDash val="solid"/>
-          </a:ln>
-        </p:spPr>
-      </p:sp>
-      <p:sp>
-        <p:nvSpPr>
-          <p:cNvPr id="9" name="Text 5"/>
-          <p:cNvSpPr txBox="1"/>
-          <p:nvPr/>
-        </p:nvSpPr>
-        <p:spPr>
-          <a:xfrm>
-            <a:off x="6400800" y="4892040"/>
-            <a:ext cx="5029200" cy="365760"/>
-          </a:xfrm>
-          <a:prstGeom prst="rect">
-            <a:avLst/>
-          </a:prstGeom>
-          <a:noFill/>
-          <a:ln/>
-        </p:spPr>
-        <p:txBody>
-          <a:bodyPr wrap="square" lIns="0" tIns="0" rIns="0" bIns="0" rtlCol="0" anchor="t"/>
-          <a:lstStyle/>
-          <a:p>
-            <a:pPr marL="0" indent="0" eaLnBrk="0">
-              <a:buNone/>
-            </a:pPr>
-            <a:r>
-              <a:rPr lang="en-US" sz="1600" dirty="0">
-                <a:solidFill>
-                  <a:srgbClr val="0066CC"/>
-                </a:solidFill>
-                <a:latin typeface="나눔스퀘어 네오 Bold" pitchFamily="34" charset="0"/>
-                <a:ea typeface="나눔스퀘어 네오 Bold" pitchFamily="34" charset="-122"/>
-                <a:cs typeface="나눔스퀘어 네오 Bold" pitchFamily="34" charset="-120"/>
-              </a:rPr>
-              <a:t>조건부 이득의 의미</a:t>
-            </a:r>
-            <a:endParaRPr lang="en-US" sz="1600" dirty="0"/>
-          </a:p>
-        </p:txBody>
-      </p:sp>
-      <p:sp>
-        <p:nvSpPr>
-          <p:cNvPr id="10" name="Text 6"/>
-          <p:cNvSpPr txBox="1"/>
-          <p:nvPr/>
-        </p:nvSpPr>
-        <p:spPr>
-          <a:xfrm>
-            <a:off x="6400800" y="5303520"/>
-            <a:ext cx="5029200" cy="868680"/>
-          </a:xfrm>
-          <a:prstGeom prst="rect">
-            <a:avLst/>
-          </a:prstGeom>
-          <a:noFill/>
-          <a:ln/>
-        </p:spPr>
-        <p:txBody>
-          <a:bodyPr wrap="square" lIns="0" tIns="0" rIns="0" bIns="0" rtlCol="0" anchor="t"/>
-          <a:lstStyle/>
-          <a:p>
-            <a:pPr marL="0" indent="0" eaLnBrk="0">
-              <a:buNone/>
-            </a:pPr>
-            <a:r>
-              <a:rPr lang="en-US" sz="1400" dirty="0">
-                <a:solidFill>
-                  <a:srgbClr val="1D1D1F"/>
-                </a:solidFill>
-                <a:latin typeface="나눔스퀘어 네오 Regular" pitchFamily="34" charset="0"/>
-                <a:ea typeface="나눔스퀘어 네오 Regular" pitchFamily="34" charset="-122"/>
-                <a:cs typeface="나눔스퀘어 네오 Regular" pitchFamily="34" charset="-120"/>
-              </a:rPr>
-              <a:t>곱셈기를 없애는 것이 항상 이득은 아니다 — 입력 형식(8픽셀 그룹)과 맞물릴 때만 이긴다.</a:t>
-            </a:r>
-            <a:endParaRPr lang="en-US" sz="1400" dirty="0"/>
+            <a:endParaRPr lang="en-US" sz="1200" dirty="0"/>
           </a:p>
         </p:txBody>
       </p:sp>
@@ -13052,28 +12530,28 @@
         </p:nvGraphicFramePr>
         <p:xfrm>
           <a:off x="548640" y="1371600"/>
-          <a:ext cx="11064240" cy="914400"/>
+          <a:ext cx="7315200" cy="914400"/>
         </p:xfrm>
         <a:graphic>
           <a:graphicData uri="http://schemas.openxmlformats.org/drawingml/2006/table">
             <a:tbl>
               <a:tblPr/>
               <a:tblGrid>
-                <a:gridCol w="3017520">
+                <a:gridCol w="2194560">
                   <a:extLst>
                     <a:ext uri="{9D8B030D-6E8A-4147-A177-3AD203B41FA5}">
                       <a16:colId xmlns:a16="http://schemas.microsoft.com/office/drawing/2014/main" val="20000"/>
                     </a:ext>
                   </a:extLst>
                 </a:gridCol>
-                <a:gridCol w="914400">
+                <a:gridCol w="731520">
                   <a:extLst>
                     <a:ext uri="{9D8B030D-6E8A-4147-A177-3AD203B41FA5}">
                       <a16:colId xmlns:a16="http://schemas.microsoft.com/office/drawing/2014/main" val="20001"/>
                     </a:ext>
                   </a:extLst>
                 </a:gridCol>
-                <a:gridCol w="7132320">
+                <a:gridCol w="4389120">
                   <a:extLst>
                     <a:ext uri="{9D8B030D-6E8A-4147-A177-3AD203B41FA5}">
                       <a16:colId xmlns:a16="http://schemas.microsoft.com/office/drawing/2014/main" val="20002"/>
@@ -13081,7 +12559,7 @@
                   </a:extLst>
                 </a:gridCol>
               </a:tblGrid>
-              <a:tr h="457200">
+              <a:tr h="475488">
                 <a:tc>
                   <a:txBody>
                     <a:bodyPr/>
@@ -13091,7 +12569,7 @@
                         <a:buNone/>
                       </a:pPr>
                       <a:r>
-                        <a:rPr lang="en-US" sz="1200" dirty="0">
+                        <a:rPr lang="en-US" sz="1100" dirty="0">
                           <a:solidFill>
                             <a:srgbClr val="1D1D1F"/>
                           </a:solidFill>
@@ -13101,7 +12579,7 @@
                         </a:rPr>
                         <a:t>후보</a:t>
                       </a:r>
-                      <a:endParaRPr lang="en-US" sz="1200" dirty="0">
+                      <a:endParaRPr lang="en-US" sz="1100" dirty="0">
                         <a:latin typeface="나눔스퀘어 네오 Regular" charset="0"/>
                         <a:ea typeface="나눔스퀘어 네오 Regular" charset="0"/>
                         <a:cs typeface="나눔스퀘어 네오 Regular" charset="0"/>
@@ -13159,7 +12637,7 @@
                         <a:buNone/>
                       </a:pPr>
                       <a:r>
-                        <a:rPr lang="en-US" sz="1200" dirty="0">
+                        <a:rPr lang="en-US" sz="1100" dirty="0">
                           <a:solidFill>
                             <a:srgbClr val="1D1D1F"/>
                           </a:solidFill>
@@ -13169,7 +12647,7 @@
                         </a:rPr>
                         <a:t>결과</a:t>
                       </a:r>
-                      <a:endParaRPr lang="en-US" sz="1200" dirty="0">
+                      <a:endParaRPr lang="en-US" sz="1100" dirty="0">
                         <a:latin typeface="나눔스퀘어 네오 Regular" charset="0"/>
                         <a:ea typeface="나눔스퀘어 네오 Regular" charset="0"/>
                         <a:cs typeface="나눔스퀘어 네오 Regular" charset="0"/>
@@ -13227,7 +12705,7 @@
                         <a:buNone/>
                       </a:pPr>
                       <a:r>
-                        <a:rPr lang="en-US" sz="1200" dirty="0">
+                        <a:rPr lang="en-US" sz="1100" dirty="0">
                           <a:solidFill>
                             <a:srgbClr val="1D1D1F"/>
                           </a:solidFill>
@@ -13237,7 +12715,7 @@
                         </a:rPr>
                         <a:t>측정된 탈락 사유</a:t>
                       </a:r>
-                      <a:endParaRPr lang="en-US" sz="1200" dirty="0">
+                      <a:endParaRPr lang="en-US" sz="1100" dirty="0">
                         <a:latin typeface="나눔스퀘어 네오 Regular" charset="0"/>
                         <a:ea typeface="나눔스퀘어 네오 Regular" charset="0"/>
                         <a:cs typeface="나눔스퀘어 네오 Regular" charset="0"/>
@@ -13292,7 +12770,7 @@
                   </a:ext>
                 </a:extLst>
               </a:tr>
-              <a:tr h="457200">
+              <a:tr h="475488">
                 <a:tc>
                   <a:txBody>
                     <a:bodyPr/>
@@ -13302,7 +12780,7 @@
                         <a:buNone/>
                       </a:pPr>
                       <a:r>
-                        <a:rPr lang="en-US" sz="1200" dirty="0">
+                        <a:rPr lang="en-US" sz="1100" dirty="0">
                           <a:solidFill>
                             <a:srgbClr val="1D1D1F"/>
                           </a:solidFill>
@@ -13312,7 +12790,7 @@
                         </a:rPr>
                         <a:t>Count-Min 스케치 world</a:t>
                       </a:r>
-                      <a:endParaRPr lang="en-US" sz="1200" dirty="0">
+                      <a:endParaRPr lang="en-US" sz="1100" dirty="0">
                         <a:latin typeface="나눔스퀘어 네오 Regular" charset="0"/>
                         <a:ea typeface="나눔스퀘어 네오 Regular" charset="0"/>
                         <a:cs typeface="나눔스퀘어 네오 Regular" charset="0"/>
@@ -13370,7 +12848,7 @@
                         <a:buNone/>
                       </a:pPr>
                       <a:r>
-                        <a:rPr lang="en-US" sz="1200" dirty="0">
+                        <a:rPr lang="en-US" sz="1100" dirty="0">
                           <a:solidFill>
                             <a:srgbClr val="1D1D1F"/>
                           </a:solidFill>
@@ -13380,7 +12858,7 @@
                         </a:rPr>
                         <a:t>탈락</a:t>
                       </a:r>
-                      <a:endParaRPr lang="en-US" sz="1200" dirty="0">
+                      <a:endParaRPr lang="en-US" sz="1100" dirty="0">
                         <a:latin typeface="나눔스퀘어 네오 Regular" charset="0"/>
                         <a:ea typeface="나눔스퀘어 네오 Regular" charset="0"/>
                         <a:cs typeface="나눔스퀘어 네오 Regular" charset="0"/>
@@ -13438,7 +12916,7 @@
                         <a:buNone/>
                       </a:pPr>
                       <a:r>
-                        <a:rPr lang="en-US" sz="1200" dirty="0">
+                        <a:rPr lang="en-US" sz="1100" dirty="0">
                           <a:solidFill>
                             <a:srgbClr val="1D1D1F"/>
                           </a:solidFill>
@@ -13448,7 +12926,7 @@
                         </a:rPr>
                         <a:t>상관 0.1~0.4 — 셀 점유율이 높아 충돌로 빈 공간까지 번짐</a:t>
                       </a:r>
-                      <a:endParaRPr lang="en-US" sz="1200" dirty="0">
+                      <a:endParaRPr lang="en-US" sz="1100" dirty="0">
                         <a:latin typeface="나눔스퀘어 네오 Regular" charset="0"/>
                         <a:ea typeface="나눔스퀘어 네오 Regular" charset="0"/>
                         <a:cs typeface="나눔스퀘어 네오 Regular" charset="0"/>
@@ -13503,7 +12981,7 @@
                   </a:ext>
                 </a:extLst>
               </a:tr>
-              <a:tr h="457200">
+              <a:tr h="475488">
                 <a:tc>
                   <a:txBody>
                     <a:bodyPr/>
@@ -13513,7 +12991,7 @@
                         <a:buNone/>
                       </a:pPr>
                       <a:r>
-                        <a:rPr lang="en-US" sz="1200" dirty="0">
+                        <a:rPr lang="en-US" sz="1100" dirty="0">
                           <a:solidFill>
                             <a:srgbClr val="1D1D1F"/>
                           </a:solidFill>
@@ -13523,7 +13001,7 @@
                         </a:rPr>
                         <a:t>블록 부동소수점 world</a:t>
                       </a:r>
-                      <a:endParaRPr lang="en-US" sz="1200" dirty="0">
+                      <a:endParaRPr lang="en-US" sz="1100" dirty="0">
                         <a:latin typeface="나눔스퀘어 네오 Regular" charset="0"/>
                         <a:ea typeface="나눔스퀘어 네오 Regular" charset="0"/>
                         <a:cs typeface="나눔스퀘어 네오 Regular" charset="0"/>
@@ -13581,7 +13059,7 @@
                         <a:buNone/>
                       </a:pPr>
                       <a:r>
-                        <a:rPr lang="en-US" sz="1200" dirty="0">
+                        <a:rPr lang="en-US" sz="1100" dirty="0">
                           <a:solidFill>
                             <a:srgbClr val="1D1D1F"/>
                           </a:solidFill>
@@ -13591,7 +13069,7 @@
                         </a:rPr>
                         <a:t>탈락</a:t>
                       </a:r>
-                      <a:endParaRPr lang="en-US" sz="1200" dirty="0">
+                      <a:endParaRPr lang="en-US" sz="1100" dirty="0">
                         <a:latin typeface="나눔스퀘어 네오 Regular" charset="0"/>
                         <a:ea typeface="나눔스퀘어 네오 Regular" charset="0"/>
                         <a:cs typeface="나눔스퀘어 네오 Regular" charset="0"/>
@@ -13649,7 +13127,7 @@
                         <a:buNone/>
                       </a:pPr>
                       <a:r>
-                        <a:rPr lang="en-US" sz="1200" dirty="0">
+                        <a:rPr lang="en-US" sz="1100" dirty="0">
                           <a:solidFill>
                             <a:srgbClr val="1D1D1F"/>
                           </a:solidFill>
@@ -13659,7 +13137,7 @@
                         </a:rPr>
                         <a:t>상관 0.62/0.58 — 밝은 셀이 블록 지수를 올려 어두운 셀 소실</a:t>
                       </a:r>
-                      <a:endParaRPr lang="en-US" sz="1200" dirty="0">
+                      <a:endParaRPr lang="en-US" sz="1100" dirty="0">
                         <a:latin typeface="나눔스퀘어 네오 Regular" charset="0"/>
                         <a:ea typeface="나눔스퀘어 네오 Regular" charset="0"/>
                         <a:cs typeface="나눔스퀘어 네오 Regular" charset="0"/>
@@ -13714,7 +13192,7 @@
                   </a:ext>
                 </a:extLst>
               </a:tr>
-              <a:tr h="457200">
+              <a:tr h="475488">
                 <a:tc>
                   <a:txBody>
                     <a:bodyPr/>
@@ -13724,7 +13202,7 @@
                         <a:buNone/>
                       </a:pPr>
                       <a:r>
-                        <a:rPr lang="en-US" sz="1200" dirty="0">
+                        <a:rPr lang="en-US" sz="1100" dirty="0">
                           <a:solidFill>
                             <a:srgbClr val="1D1D1F"/>
                           </a:solidFill>
@@ -13734,7 +13212,7 @@
                         </a:rPr>
                         <a:t>희소 world (점유 셀만 저장)</a:t>
                       </a:r>
-                      <a:endParaRPr lang="en-US" sz="1200" dirty="0">
+                      <a:endParaRPr lang="en-US" sz="1100" dirty="0">
                         <a:latin typeface="나눔스퀘어 네오 Regular" charset="0"/>
                         <a:ea typeface="나눔스퀘어 네오 Regular" charset="0"/>
                         <a:cs typeface="나눔스퀘어 네오 Regular" charset="0"/>
@@ -13792,7 +13270,7 @@
                         <a:buNone/>
                       </a:pPr>
                       <a:r>
-                        <a:rPr lang="en-US" sz="1200" dirty="0">
+                        <a:rPr lang="en-US" sz="1100" dirty="0">
                           <a:solidFill>
                             <a:srgbClr val="1D1D1F"/>
                           </a:solidFill>
@@ -13802,7 +13280,7 @@
                         </a:rPr>
                         <a:t>탈락</a:t>
                       </a:r>
-                      <a:endParaRPr lang="en-US" sz="1200" dirty="0">
+                      <a:endParaRPr lang="en-US" sz="1100" dirty="0">
                         <a:latin typeface="나눔스퀘어 네오 Regular" charset="0"/>
                         <a:ea typeface="나눔스퀘어 네오 Regular" charset="0"/>
                         <a:cs typeface="나눔스퀘어 네오 Regular" charset="0"/>
@@ -13860,7 +13338,7 @@
                         <a:buNone/>
                       </a:pPr>
                       <a:r>
-                        <a:rPr lang="en-US" sz="1200" dirty="0">
+                        <a:rPr lang="en-US" sz="1100" dirty="0">
                           <a:solidFill>
                             <a:srgbClr val="1D1D1F"/>
                           </a:solidFill>
@@ -13870,7 +13348,7 @@
                         </a:rPr>
                         <a:t>4 px에서 희소하지 않음: 이벤트 45% 버림, 태그 포함 격자의 2.6배 비트</a:t>
                       </a:r>
-                      <a:endParaRPr lang="en-US" sz="1200" dirty="0">
+                      <a:endParaRPr lang="en-US" sz="1100" dirty="0">
                         <a:latin typeface="나눔스퀘어 네오 Regular" charset="0"/>
                         <a:ea typeface="나눔스퀘어 네오 Regular" charset="0"/>
                         <a:cs typeface="나눔스퀘어 네오 Regular" charset="0"/>
@@ -13925,7 +13403,7 @@
                   </a:ext>
                 </a:extLst>
               </a:tr>
-              <a:tr h="457200">
+              <a:tr h="475488">
                 <a:tc>
                   <a:txBody>
                     <a:bodyPr/>
@@ -13935,7 +13413,7 @@
                         <a:buNone/>
                       </a:pPr>
                       <a:r>
-                        <a:rPr lang="en-US" sz="1200" dirty="0">
+                        <a:rPr lang="en-US" sz="1100" dirty="0">
                           <a:solidFill>
                             <a:srgbClr val="1D1D1F"/>
                           </a:solidFill>
@@ -13945,7 +13423,7 @@
                         </a:rPr>
                         <a:t>로그-극좌표 world</a:t>
                       </a:r>
-                      <a:endParaRPr lang="en-US" sz="1200" dirty="0">
+                      <a:endParaRPr lang="en-US" sz="1100" dirty="0">
                         <a:latin typeface="나눔스퀘어 네오 Regular" charset="0"/>
                         <a:ea typeface="나눔스퀘어 네오 Regular" charset="0"/>
                         <a:cs typeface="나눔스퀘어 네오 Regular" charset="0"/>
@@ -14003,7 +13481,7 @@
                         <a:buNone/>
                       </a:pPr>
                       <a:r>
-                        <a:rPr lang="en-US" sz="1200" dirty="0">
+                        <a:rPr lang="en-US" sz="1100" dirty="0">
                           <a:solidFill>
                             <a:srgbClr val="1D1D1F"/>
                           </a:solidFill>
@@ -14013,7 +13491,7 @@
                         </a:rPr>
                         <a:t>탈락</a:t>
                       </a:r>
-                      <a:endParaRPr lang="en-US" sz="1200" dirty="0">
+                      <a:endParaRPr lang="en-US" sz="1100" dirty="0">
                         <a:latin typeface="나눔스퀘어 네오 Regular" charset="0"/>
                         <a:ea typeface="나눔스퀘어 네오 Regular" charset="0"/>
                         <a:cs typeface="나눔스퀘어 네오 Regular" charset="0"/>
@@ -14071,7 +13549,7 @@
                         <a:buNone/>
                       </a:pPr>
                       <a:r>
-                        <a:rPr lang="en-US" sz="1200" dirty="0">
+                        <a:rPr lang="en-US" sz="1100" dirty="0">
                           <a:solidFill>
                             <a:srgbClr val="1D1D1F"/>
                           </a:solidFill>
@@ -14081,7 +13559,7 @@
                         </a:rPr>
                         <a:t>선형극좌표 상관 0.87 &lt; 8px 격자 0.92, 로그극좌표 0.71, pan 불가</a:t>
                       </a:r>
-                      <a:endParaRPr lang="en-US" sz="1200" dirty="0">
+                      <a:endParaRPr lang="en-US" sz="1100" dirty="0">
                         <a:latin typeface="나눔스퀘어 네오 Regular" charset="0"/>
                         <a:ea typeface="나눔스퀘어 네오 Regular" charset="0"/>
                         <a:cs typeface="나눔스퀘어 네오 Regular" charset="0"/>
@@ -14136,7 +13614,7 @@
                   </a:ext>
                 </a:extLst>
               </a:tr>
-              <a:tr h="457200">
+              <a:tr h="475488">
                 <a:tc>
                   <a:txBody>
                     <a:bodyPr/>
@@ -14146,7 +13624,7 @@
                         <a:buNone/>
                       </a:pPr>
                       <a:r>
-                        <a:rPr lang="en-US" sz="1200" dirty="0">
+                        <a:rPr lang="en-US" sz="1100" dirty="0">
                           <a:solidFill>
                             <a:srgbClr val="1D1D1F"/>
                           </a:solidFill>
@@ -14156,7 +13634,7 @@
                         </a:rPr>
                         <a:t>셀별 깊이 지도</a:t>
                       </a:r>
-                      <a:endParaRPr lang="en-US" sz="1200" dirty="0">
+                      <a:endParaRPr lang="en-US" sz="1100" dirty="0">
                         <a:latin typeface="나눔스퀘어 네오 Regular" charset="0"/>
                         <a:ea typeface="나눔스퀘어 네오 Regular" charset="0"/>
                         <a:cs typeface="나눔스퀘어 네오 Regular" charset="0"/>
@@ -14214,7 +13692,7 @@
                         <a:buNone/>
                       </a:pPr>
                       <a:r>
-                        <a:rPr lang="en-US" sz="1200" dirty="0">
+                        <a:rPr lang="en-US" sz="1100" dirty="0">
                           <a:solidFill>
                             <a:srgbClr val="1D1D1F"/>
                           </a:solidFill>
@@ -14224,7 +13702,7 @@
                         </a:rPr>
                         <a:t>탈락</a:t>
                       </a:r>
-                      <a:endParaRPr lang="en-US" sz="1200" dirty="0">
+                      <a:endParaRPr lang="en-US" sz="1100" dirty="0">
                         <a:latin typeface="나눔스퀘어 네오 Regular" charset="0"/>
                         <a:ea typeface="나눔스퀘어 네오 Regular" charset="0"/>
                         <a:cs typeface="나눔스퀘어 네오 Regular" charset="0"/>
@@ -14282,7 +13760,7 @@
                         <a:buNone/>
                       </a:pPr>
                       <a:r>
-                        <a:rPr lang="en-US" sz="1200" dirty="0">
+                        <a:rPr lang="en-US" sz="1100" dirty="0">
                           <a:solidFill>
                             <a:srgbClr val="1D1D1F"/>
                           </a:solidFill>
@@ -14292,7 +13770,7 @@
                         </a:rPr>
                         <a:t>정답 궤적에서 +10%지만 온칩 궤적에선 틀린 방향 대조군이 더 높게 나옴 (추정 오차 흡수)</a:t>
                       </a:r>
-                      <a:endParaRPr lang="en-US" sz="1200" dirty="0">
+                      <a:endParaRPr lang="en-US" sz="1100" dirty="0">
                         <a:latin typeface="나눔스퀘어 네오 Regular" charset="0"/>
                         <a:ea typeface="나눔스퀘어 네오 Regular" charset="0"/>
                         <a:cs typeface="나눔스퀘어 네오 Regular" charset="0"/>
@@ -14347,7 +13825,7 @@
                   </a:ext>
                 </a:extLst>
               </a:tr>
-              <a:tr h="457200">
+              <a:tr h="475488">
                 <a:tc>
                   <a:txBody>
                     <a:bodyPr/>
@@ -14357,7 +13835,7 @@
                         <a:buNone/>
                       </a:pPr>
                       <a:r>
-                        <a:rPr lang="en-US" sz="1200" dirty="0">
+                        <a:rPr lang="en-US" sz="1100" dirty="0">
                           <a:solidFill>
                             <a:srgbClr val="1D1D1F"/>
                           </a:solidFill>
@@ -14367,7 +13845,7 @@
                         </a:rPr>
                         <a:t>4 px 월드</a:t>
                       </a:r>
-                      <a:endParaRPr lang="en-US" sz="1200" dirty="0">
+                      <a:endParaRPr lang="en-US" sz="1100" dirty="0">
                         <a:latin typeface="나눔스퀘어 네오 Regular" charset="0"/>
                         <a:ea typeface="나눔스퀘어 네오 Regular" charset="0"/>
                         <a:cs typeface="나눔스퀘어 네오 Regular" charset="0"/>
@@ -14425,7 +13903,7 @@
                         <a:buNone/>
                       </a:pPr>
                       <a:r>
-                        <a:rPr lang="en-US" sz="1200" dirty="0">
+                        <a:rPr lang="en-US" sz="1100" dirty="0">
                           <a:solidFill>
                             <a:srgbClr val="1D1D1F"/>
                           </a:solidFill>
@@ -14435,7 +13913,7 @@
                         </a:rPr>
                         <a:t>탈락</a:t>
                       </a:r>
-                      <a:endParaRPr lang="en-US" sz="1200" dirty="0">
+                      <a:endParaRPr lang="en-US" sz="1100" dirty="0">
                         <a:latin typeface="나눔스퀘어 네오 Regular" charset="0"/>
                         <a:ea typeface="나눔스퀘어 네오 Regular" charset="0"/>
                         <a:cs typeface="나눔스퀘어 네오 Regular" charset="0"/>
@@ -14493,7 +13971,7 @@
                         <a:buNone/>
                       </a:pPr>
                       <a:r>
-                        <a:rPr lang="en-US" sz="1200" dirty="0">
+                        <a:rPr lang="en-US" sz="1100" dirty="0">
                           <a:solidFill>
                             <a:srgbClr val="1D1D1F"/>
                           </a:solidFill>
@@ -14503,7 +13981,7 @@
                         </a:rPr>
                         <a:t>추정 오차 1°에 미세 구조가 묻힘 → 8 px·4비트(면적 2.4배 작음)로</a:t>
                       </a:r>
-                      <a:endParaRPr lang="en-US" sz="1200" dirty="0">
+                      <a:endParaRPr lang="en-US" sz="1100" dirty="0">
                         <a:latin typeface="나눔스퀘어 네오 Regular" charset="0"/>
                         <a:ea typeface="나눔스퀘어 네오 Regular" charset="0"/>
                         <a:cs typeface="나눔스퀘어 네오 Regular" charset="0"/>
@@ -14558,7 +14036,7 @@
                   </a:ext>
                 </a:extLst>
               </a:tr>
-              <a:tr h="457200">
+              <a:tr h="475488">
                 <a:tc>
                   <a:txBody>
                     <a:bodyPr/>
@@ -14568,7 +14046,7 @@
                         <a:buNone/>
                       </a:pPr>
                       <a:r>
-                        <a:rPr lang="en-US" sz="1200" dirty="0">
+                        <a:rPr lang="en-US" sz="1100" dirty="0">
                           <a:solidFill>
                             <a:srgbClr val="1D1D1F"/>
                           </a:solidFill>
@@ -14578,7 +14056,7 @@
                         </a:rPr>
                         <a:t>world 예측 부호화 (AER)</a:t>
                       </a:r>
-                      <a:endParaRPr lang="en-US" sz="1200" dirty="0">
+                      <a:endParaRPr lang="en-US" sz="1100" dirty="0">
                         <a:latin typeface="나눔스퀘어 네오 Regular" charset="0"/>
                         <a:ea typeface="나눔스퀘어 네오 Regular" charset="0"/>
                         <a:cs typeface="나눔스퀘어 네오 Regular" charset="0"/>
@@ -14636,7 +14114,7 @@
                         <a:buNone/>
                       </a:pPr>
                       <a:r>
-                        <a:rPr lang="en-US" sz="1200" dirty="0">
+                        <a:rPr lang="en-US" sz="1100" dirty="0">
                           <a:solidFill>
                             <a:srgbClr val="1D1D1F"/>
                           </a:solidFill>
@@ -14646,7 +14124,7 @@
                         </a:rPr>
                         <a:t>보류</a:t>
                       </a:r>
-                      <a:endParaRPr lang="en-US" sz="1200" dirty="0">
+                      <a:endParaRPr lang="en-US" sz="1100" dirty="0">
                         <a:latin typeface="나눔스퀘어 네오 Regular" charset="0"/>
                         <a:ea typeface="나눔스퀘어 네오 Regular" charset="0"/>
                         <a:cs typeface="나눔스퀘어 네오 Regular" charset="0"/>
@@ -14704,7 +14182,7 @@
                         <a:buNone/>
                       </a:pPr>
                       <a:r>
-                        <a:rPr lang="en-US" sz="1200" dirty="0">
+                        <a:rPr lang="en-US" sz="1100" dirty="0">
                           <a:solidFill>
                             <a:srgbClr val="1D1D1F"/>
                           </a:solidFill>
@@ -14714,7 +14192,7 @@
                         </a:rPr>
                         <a:t>−25%지만 센서 측 1.38 Mbit 버퍼 필요</a:t>
                       </a:r>
-                      <a:endParaRPr lang="en-US" sz="1200" dirty="0">
+                      <a:endParaRPr lang="en-US" sz="1100" dirty="0">
                         <a:latin typeface="나눔스퀘어 네오 Regular" charset="0"/>
                         <a:ea typeface="나눔스퀘어 네오 Regular" charset="0"/>
                         <a:cs typeface="나눔스퀘어 네오 Regular" charset="0"/>
@@ -14769,7 +14247,7 @@
                   </a:ext>
                 </a:extLst>
               </a:tr>
-              <a:tr h="457200">
+              <a:tr h="475488">
                 <a:tc>
                   <a:txBody>
                     <a:bodyPr/>
@@ -14779,7 +14257,7 @@
                         <a:buNone/>
                       </a:pPr>
                       <a:r>
-                        <a:rPr lang="en-US" sz="1200" dirty="0">
+                        <a:rPr lang="en-US" sz="1100" dirty="0">
                           <a:solidFill>
                             <a:srgbClr val="1D1D1F"/>
                           </a:solidFill>
@@ -14789,7 +14267,7 @@
                         </a:rPr>
                         <a:t>메모리 뱅크를 래치로</a:t>
                       </a:r>
-                      <a:endParaRPr lang="en-US" sz="1200" dirty="0">
+                      <a:endParaRPr lang="en-US" sz="1100" dirty="0">
                         <a:latin typeface="나눔스퀘어 네오 Regular" charset="0"/>
                         <a:ea typeface="나눔스퀘어 네오 Regular" charset="0"/>
                         <a:cs typeface="나눔스퀘어 네오 Regular" charset="0"/>
@@ -14847,7 +14325,7 @@
                         <a:buNone/>
                       </a:pPr>
                       <a:r>
-                        <a:rPr lang="en-US" sz="1200" dirty="0">
+                        <a:rPr lang="en-US" sz="1100" dirty="0">
                           <a:solidFill>
                             <a:srgbClr val="1D1D1F"/>
                           </a:solidFill>
@@ -14857,7 +14335,7 @@
                         </a:rPr>
                         <a:t>탈락</a:t>
                       </a:r>
-                      <a:endParaRPr lang="en-US" sz="1200" dirty="0">
+                      <a:endParaRPr lang="en-US" sz="1100" dirty="0">
                         <a:latin typeface="나눔스퀘어 네오 Regular" charset="0"/>
                         <a:ea typeface="나눔스퀘어 네오 Regular" charset="0"/>
                         <a:cs typeface="나눔스퀘어 네오 Regular" charset="0"/>
@@ -14915,7 +14393,7 @@
                         <a:buNone/>
                       </a:pPr>
                       <a:r>
-                        <a:rPr lang="en-US" sz="1200" dirty="0">
+                        <a:rPr lang="en-US" sz="1100" dirty="0">
                           <a:solidFill>
                             <a:srgbClr val="1D1D1F"/>
                           </a:solidFill>
@@ -14925,7 +14403,7 @@
                         </a:rPr>
                         <a:t>배치 후 시뮬레이션 24% 불일치</a:t>
                       </a:r>
-                      <a:endParaRPr lang="en-US" sz="1200" dirty="0">
+                      <a:endParaRPr lang="en-US" sz="1100" dirty="0">
                         <a:latin typeface="나눔스퀘어 네오 Regular" charset="0"/>
                         <a:ea typeface="나눔스퀘어 네오 Regular" charset="0"/>
                         <a:cs typeface="나눔스퀘어 네오 Regular" charset="0"/>
@@ -14980,7 +14458,7 @@
                   </a:ext>
                 </a:extLst>
               </a:tr>
-              <a:tr h="457200">
+              <a:tr h="475488">
                 <a:tc>
                   <a:txBody>
                     <a:bodyPr/>
@@ -14990,7 +14468,7 @@
                         <a:buNone/>
                       </a:pPr>
                       <a:r>
-                        <a:rPr lang="en-US" sz="1200" dirty="0">
+                        <a:rPr lang="en-US" sz="1100" dirty="0">
                           <a:solidFill>
                             <a:srgbClr val="1D1D1F"/>
                           </a:solidFill>
@@ -15000,7 +14478,7 @@
                         </a:rPr>
                         <a:t>α-β 추적기</a:t>
                       </a:r>
-                      <a:endParaRPr lang="en-US" sz="1200" dirty="0">
+                      <a:endParaRPr lang="en-US" sz="1100" dirty="0">
                         <a:latin typeface="나눔스퀘어 네오 Regular" charset="0"/>
                         <a:ea typeface="나눔스퀘어 네오 Regular" charset="0"/>
                         <a:cs typeface="나눔스퀘어 네오 Regular" charset="0"/>
@@ -15058,7 +14536,7 @@
                         <a:buNone/>
                       </a:pPr>
                       <a:r>
-                        <a:rPr lang="en-US" sz="1200" dirty="0">
+                        <a:rPr lang="en-US" sz="1100" dirty="0">
                           <a:solidFill>
                             <a:srgbClr val="1D1D1F"/>
                           </a:solidFill>
@@ -15068,7 +14546,7 @@
                         </a:rPr>
                         <a:t>탈락</a:t>
                       </a:r>
-                      <a:endParaRPr lang="en-US" sz="1200" dirty="0">
+                      <a:endParaRPr lang="en-US" sz="1100" dirty="0">
                         <a:latin typeface="나눔스퀘어 네오 Regular" charset="0"/>
                         <a:ea typeface="나눔스퀘어 네오 Regular" charset="0"/>
                         <a:cs typeface="나눔스퀘어 네오 Regular" charset="0"/>
@@ -15126,7 +14604,7 @@
                         <a:buNone/>
                       </a:pPr>
                       <a:r>
-                        <a:rPr lang="en-US" sz="1200" dirty="0">
+                        <a:rPr lang="en-US" sz="1100" dirty="0">
                           <a:solidFill>
                             <a:srgbClr val="1D1D1F"/>
                           </a:solidFill>
@@ -15136,7 +14614,7 @@
                         </a:rPr>
                         <a:t>UZH에서 오히려 악화 (38.7 vs 32.6 °/s), 교수 데이터 과적합</a:t>
                       </a:r>
-                      <a:endParaRPr lang="en-US" sz="1200" dirty="0">
+                      <a:endParaRPr lang="en-US" sz="1100" dirty="0">
                         <a:latin typeface="나눔스퀘어 네오 Regular" charset="0"/>
                         <a:ea typeface="나눔스퀘어 네오 Regular" charset="0"/>
                         <a:cs typeface="나눔스퀘어 네오 Regular" charset="0"/>
@@ -15195,6 +14673,61 @@
           </a:graphicData>
         </a:graphic>
       </p:graphicFrame>
+      <p:graphicFrame>
+        <p:nvGraphicFramePr>
+          <p:cNvPr id="5" name="Chart 0"/>
+          <p:cNvGraphicFramePr/>
+          <p:nvPr/>
+        </p:nvGraphicFramePr>
+        <p:xfrm>
+          <a:off x="8138160" y="1371600"/>
+          <a:ext cx="3474720" cy="3840480"/>
+        </p:xfrm>
+        <a:graphic>
+          <a:graphicData uri="http://schemas.openxmlformats.org/drawingml/2006/chart">
+            <c:chart xmlns:c="http://schemas.openxmlformats.org/drawingml/2006/chart" xmlns:r="http://schemas.openxmlformats.org/officeDocument/2006/relationships" r:id="rId3"/>
+          </a:graphicData>
+        </a:graphic>
+      </p:graphicFrame>
+      <p:sp>
+        <p:nvSpPr>
+          <p:cNvPr id="6" name="Text 1"/>
+          <p:cNvSpPr txBox="1"/>
+          <p:nvPr/>
+        </p:nvSpPr>
+        <p:spPr>
+          <a:xfrm>
+            <a:off x="8138160" y="5257800"/>
+            <a:ext cx="3474720" cy="365760"/>
+          </a:xfrm>
+          <a:prstGeom prst="rect">
+            <a:avLst/>
+          </a:prstGeom>
+          <a:noFill/>
+          <a:ln/>
+        </p:spPr>
+        <p:txBody>
+          <a:bodyPr wrap="square" lIns="0" tIns="0" rIns="0" bIns="0" rtlCol="0" anchor="t"/>
+          <a:lstStyle/>
+          <a:p>
+            <a:pPr marL="0" indent="0" eaLnBrk="0">
+              <a:buNone/>
+            </a:pPr>
+            <a:r>
+              <a:rPr lang="en-US" sz="1100" dirty="0">
+                <a:solidFill>
+                  <a:srgbClr val="7A7A7A"/>
+                </a:solidFill>
+                <a:latin typeface="나눔스퀘어 네오 Regular" pitchFamily="34" charset="0"/>
+                <a:ea typeface="나눔스퀘어 네오 Regular" pitchFamily="34" charset="-122"/>
+                <a:cs typeface="나눔스퀘어 네오 Regular" pitchFamily="34" charset="-120"/>
+              </a:rPr>
+              <a:t>블록 부동소수점은 0.62/0.58의 평균</a:t>
+            </a:r>
+            <a:endParaRPr lang="en-US" sz="1100" dirty="0"/>
+          </a:p>
+        </p:txBody>
+      </p:sp>
       <p:sp>
         <p:nvSpPr>
           <p:cNvPr id="25" name="Slide Number Placeholder 0"/>
@@ -29043,7 +28576,7 @@
           </p:nvPr>
         </p:nvGraphicFramePr>
         <p:xfrm>
-          <a:off x="548640" y="1417320"/>
+          <a:off x="548640" y="1371600"/>
           <a:ext cx="11064240" cy="914400"/>
         </p:xfrm>
         <a:graphic>
@@ -29080,7 +28613,7 @@
                   </a:extLst>
                 </a:gridCol>
               </a:tblGrid>
-              <a:tr h="640080">
+              <a:tr h="457200">
                 <a:tc>
                   <a:txBody>
                     <a:bodyPr/>
@@ -29090,7 +28623,7 @@
                         <a:buNone/>
                       </a:pPr>
                       <a:r>
-                        <a:rPr lang="en-US" sz="1300" dirty="0">
+                        <a:rPr lang="en-US" sz="1200" dirty="0">
                           <a:solidFill>
                             <a:srgbClr val="1D1D1F"/>
                           </a:solidFill>
@@ -29100,7 +28633,7 @@
                         </a:rPr>
                         <a:t>데이터</a:t>
                       </a:r>
-                      <a:endParaRPr lang="en-US" sz="1300" dirty="0">
+                      <a:endParaRPr lang="en-US" sz="1200" dirty="0">
                         <a:latin typeface="나눔스퀘어 네오 Regular" charset="0"/>
                         <a:ea typeface="나눔스퀘어 네오 Regular" charset="0"/>
                         <a:cs typeface="나눔스퀘어 네오 Regular" charset="0"/>
@@ -29158,7 +28691,7 @@
                         <a:buNone/>
                       </a:pPr>
                       <a:r>
-                        <a:rPr lang="en-US" sz="1300" dirty="0">
+                        <a:rPr lang="en-US" sz="1200" dirty="0">
                           <a:solidFill>
                             <a:srgbClr val="1D1D1F"/>
                           </a:solidFill>
@@ -29168,7 +28701,7 @@
                         </a:rPr>
                         <a:t>측정</a:t>
                       </a:r>
-                      <a:endParaRPr lang="en-US" sz="1300" dirty="0">
+                      <a:endParaRPr lang="en-US" sz="1200" dirty="0">
                         <a:latin typeface="나눔스퀘어 네오 Regular" charset="0"/>
                         <a:ea typeface="나눔스퀘어 네오 Regular" charset="0"/>
                         <a:cs typeface="나눔스퀘어 네오 Regular" charset="0"/>
@@ -29226,7 +28759,7 @@
                         <a:buNone/>
                       </a:pPr>
                       <a:r>
-                        <a:rPr lang="en-US" sz="1300" dirty="0">
+                        <a:rPr lang="en-US" sz="1200" dirty="0">
                           <a:solidFill>
                             <a:srgbClr val="1D1D1F"/>
                           </a:solidFill>
@@ -29236,7 +28769,7 @@
                         </a:rPr>
                         <a:t>결과</a:t>
                       </a:r>
-                      <a:endParaRPr lang="en-US" sz="1300" dirty="0">
+                      <a:endParaRPr lang="en-US" sz="1200" dirty="0">
                         <a:latin typeface="나눔스퀘어 네오 Regular" charset="0"/>
                         <a:ea typeface="나눔스퀘어 네오 Regular" charset="0"/>
                         <a:cs typeface="나눔스퀘어 네오 Regular" charset="0"/>
@@ -29294,7 +28827,7 @@
                         <a:buNone/>
                       </a:pPr>
                       <a:r>
-                        <a:rPr lang="en-US" sz="1300" dirty="0">
+                        <a:rPr lang="en-US" sz="1200" dirty="0">
                           <a:solidFill>
                             <a:srgbClr val="1D1D1F"/>
                           </a:solidFill>
@@ -29304,7 +28837,7 @@
                         </a:rPr>
                         <a:t>비고</a:t>
                       </a:r>
-                      <a:endParaRPr lang="en-US" sz="1300" dirty="0">
+                      <a:endParaRPr lang="en-US" sz="1200" dirty="0">
                         <a:latin typeface="나눔스퀘어 네오 Regular" charset="0"/>
                         <a:ea typeface="나눔스퀘어 네오 Regular" charset="0"/>
                         <a:cs typeface="나눔스퀘어 네오 Regular" charset="0"/>
@@ -29359,7 +28892,7 @@
                   </a:ext>
                 </a:extLst>
               </a:tr>
-              <a:tr h="640080">
+              <a:tr h="457200">
                 <a:tc>
                   <a:txBody>
                     <a:bodyPr/>
@@ -29369,7 +28902,7 @@
                         <a:buNone/>
                       </a:pPr>
                       <a:r>
-                        <a:rPr lang="en-US" sz="1300" dirty="0">
+                        <a:rPr lang="en-US" sz="1200" dirty="0">
                           <a:solidFill>
                             <a:srgbClr val="1D1D1F"/>
                           </a:solidFill>
@@ -29379,7 +28912,7 @@
                         </a:rPr>
                         <a:t>roll (교수)</a:t>
                       </a:r>
-                      <a:endParaRPr lang="en-US" sz="1300" dirty="0">
+                      <a:endParaRPr lang="en-US" sz="1200" dirty="0">
                         <a:latin typeface="나눔스퀘어 네오 Regular" charset="0"/>
                         <a:ea typeface="나눔스퀘어 네오 Regular" charset="0"/>
                         <a:cs typeface="나눔스퀘어 네오 Regular" charset="0"/>
@@ -29437,7 +28970,7 @@
                         <a:buNone/>
                       </a:pPr>
                       <a:r>
-                        <a:rPr lang="en-US" sz="1300" dirty="0">
+                        <a:rPr lang="en-US" sz="1200" dirty="0">
                           <a:solidFill>
                             <a:srgbClr val="1D1D1F"/>
                           </a:solidFill>
@@ -29447,7 +28980,7 @@
                         </a:rPr>
                         <a:t>ECC 대비 각도 오차, 정수 기준모델</a:t>
                       </a:r>
-                      <a:endParaRPr lang="en-US" sz="1300" dirty="0">
+                      <a:endParaRPr lang="en-US" sz="1200" dirty="0">
                         <a:latin typeface="나눔스퀘어 네오 Regular" charset="0"/>
                         <a:ea typeface="나눔스퀘어 네오 Regular" charset="0"/>
                         <a:cs typeface="나눔스퀘어 네오 Regular" charset="0"/>
@@ -29505,7 +29038,7 @@
                         <a:buNone/>
                       </a:pPr>
                       <a:r>
-                        <a:rPr lang="en-US" sz="1300" dirty="0">
+                        <a:rPr lang="en-US" sz="1200" dirty="0">
                           <a:solidFill>
                             <a:srgbClr val="1D1D1F"/>
                           </a:solidFill>
@@ -29515,7 +29048,7 @@
                         </a:rPr>
                         <a:t>평균 0.467° (오프셋 제거 0.462°)</a:t>
                       </a:r>
-                      <a:endParaRPr lang="en-US" sz="1300" dirty="0">
+                      <a:endParaRPr lang="en-US" sz="1200" dirty="0">
                         <a:latin typeface="나눔스퀘어 네오 Regular" charset="0"/>
                         <a:ea typeface="나눔스퀘어 네오 Regular" charset="0"/>
                         <a:cs typeface="나눔스퀘어 네오 Regular" charset="0"/>
@@ -29573,7 +29106,7 @@
                         <a:buNone/>
                       </a:pPr>
                       <a:r>
-                        <a:rPr lang="en-US" sz="1300" dirty="0">
+                        <a:rPr lang="en-US" sz="1200" dirty="0">
                           <a:solidFill>
                             <a:srgbClr val="1D1D1F"/>
                           </a:solidFill>
@@ -29583,7 +29116,7 @@
                         </a:rPr>
                         <a:t>정답 = 4프레임 ECC 정합</a:t>
                       </a:r>
-                      <a:endParaRPr lang="en-US" sz="1300" dirty="0">
+                      <a:endParaRPr lang="en-US" sz="1200" dirty="0">
                         <a:latin typeface="나눔스퀘어 네오 Regular" charset="0"/>
                         <a:ea typeface="나눔스퀘어 네오 Regular" charset="0"/>
                         <a:cs typeface="나눔스퀘어 네오 Regular" charset="0"/>
@@ -29638,7 +29171,7 @@
                   </a:ext>
                 </a:extLst>
               </a:tr>
-              <a:tr h="640080">
+              <a:tr h="457200">
                 <a:tc>
                   <a:txBody>
                     <a:bodyPr/>
@@ -29648,7 +29181,7 @@
                         <a:buNone/>
                       </a:pPr>
                       <a:r>
-                        <a:rPr lang="en-US" sz="1300" dirty="0">
+                        <a:rPr lang="en-US" sz="1200" dirty="0">
                           <a:solidFill>
                             <a:srgbClr val="1D1D1F"/>
                           </a:solidFill>
@@ -29658,7 +29191,7 @@
                         </a:rPr>
                         <a:t>pan (교수)</a:t>
                       </a:r>
-                      <a:endParaRPr lang="en-US" sz="1300" dirty="0">
+                      <a:endParaRPr lang="en-US" sz="1200" dirty="0">
                         <a:latin typeface="나눔스퀘어 네오 Regular" charset="0"/>
                         <a:ea typeface="나눔스퀘어 네오 Regular" charset="0"/>
                         <a:cs typeface="나눔스퀘어 네오 Regular" charset="0"/>
@@ -29716,7 +29249,7 @@
                         <a:buNone/>
                       </a:pPr>
                       <a:r>
-                        <a:rPr lang="en-US" sz="1300" dirty="0">
+                        <a:rPr lang="en-US" sz="1200" dirty="0">
                           <a:solidFill>
                             <a:srgbClr val="1D1D1F"/>
                           </a:solidFill>
@@ -29726,7 +29259,7 @@
                         </a:rPr>
                         <a:t>ECC 대비 이동 오차</a:t>
                       </a:r>
-                      <a:endParaRPr lang="en-US" sz="1300" dirty="0">
+                      <a:endParaRPr lang="en-US" sz="1200" dirty="0">
                         <a:latin typeface="나눔스퀘어 네오 Regular" charset="0"/>
                         <a:ea typeface="나눔스퀘어 네오 Regular" charset="0"/>
                         <a:cs typeface="나눔스퀘어 네오 Regular" charset="0"/>
@@ -29784,7 +29317,7 @@
                         <a:buNone/>
                       </a:pPr>
                       <a:r>
-                        <a:rPr lang="en-US" sz="1300" dirty="0">
+                        <a:rPr lang="en-US" sz="1200" dirty="0">
                           <a:solidFill>
                             <a:srgbClr val="1D1D1F"/>
                           </a:solidFill>
@@ -29794,7 +29327,7 @@
                         </a:rPr>
                         <a:t>평균 14.0 px (오프셋 제거 11.8 px)</a:t>
                       </a:r>
-                      <a:endParaRPr lang="en-US" sz="1300" dirty="0">
+                      <a:endParaRPr lang="en-US" sz="1200" dirty="0">
                         <a:latin typeface="나눔스퀘어 네오 Regular" charset="0"/>
                         <a:ea typeface="나눔스퀘어 네오 Regular" charset="0"/>
                         <a:cs typeface="나눔스퀘어 네오 Regular" charset="0"/>
@@ -29852,7 +29385,7 @@
                         <a:buNone/>
                       </a:pPr>
                       <a:r>
-                        <a:rPr lang="en-US" sz="1300" dirty="0">
+                        <a:rPr lang="en-US" sz="1200" dirty="0">
                           <a:solidFill>
                             <a:srgbClr val="1D1D1F"/>
                           </a:solidFill>
@@ -29862,7 +29395,7 @@
                         </a:rPr>
                         <a:t>pan은 회전+이동 연동 상수 사용</a:t>
                       </a:r>
-                      <a:endParaRPr lang="en-US" sz="1300" dirty="0">
+                      <a:endParaRPr lang="en-US" sz="1200" dirty="0">
                         <a:latin typeface="나눔스퀘어 네오 Regular" charset="0"/>
                         <a:ea typeface="나눔스퀘어 네오 Regular" charset="0"/>
                         <a:cs typeface="나눔스퀘어 네오 Regular" charset="0"/>
@@ -29917,7 +29450,7 @@
                   </a:ext>
                 </a:extLst>
               </a:tr>
-              <a:tr h="640080">
+              <a:tr h="457200">
                 <a:tc>
                   <a:txBody>
                     <a:bodyPr/>
@@ -29927,7 +29460,7 @@
                         <a:buNone/>
                       </a:pPr>
                       <a:r>
-                        <a:rPr lang="en-US" sz="1300" dirty="0">
+                        <a:rPr lang="en-US" sz="1200" dirty="0">
                           <a:solidFill>
                             <a:srgbClr val="1D1D1F"/>
                           </a:solidFill>
@@ -29937,7 +29470,7 @@
                         </a:rPr>
                         <a:t>UZH (3자유도)</a:t>
                       </a:r>
-                      <a:endParaRPr lang="en-US" sz="1300" dirty="0">
+                      <a:endParaRPr lang="en-US" sz="1200" dirty="0">
                         <a:latin typeface="나눔스퀘어 네오 Regular" charset="0"/>
                         <a:ea typeface="나눔스퀘어 네오 Regular" charset="0"/>
                         <a:cs typeface="나눔스퀘어 네오 Regular" charset="0"/>
@@ -29995,7 +29528,7 @@
                         <a:buNone/>
                       </a:pPr>
                       <a:r>
-                        <a:rPr lang="en-US" sz="1300" dirty="0">
+                        <a:rPr lang="en-US" sz="1200" dirty="0">
                           <a:solidFill>
                             <a:srgbClr val="1D1D1F"/>
                           </a:solidFill>
@@ -30005,7 +29538,7 @@
                         </a:rPr>
                         <a:t>float 복제 모델</a:t>
                       </a:r>
-                      <a:endParaRPr lang="en-US" sz="1300" dirty="0">
+                      <a:endParaRPr lang="en-US" sz="1200" dirty="0">
                         <a:latin typeface="나눔스퀘어 네오 Regular" charset="0"/>
                         <a:ea typeface="나눔스퀘어 네오 Regular" charset="0"/>
                         <a:cs typeface="나눔스퀘어 네오 Regular" charset="0"/>
@@ -30063,7 +29596,7 @@
                         <a:buNone/>
                       </a:pPr>
                       <a:r>
-                        <a:rPr lang="en-US" sz="1300" dirty="0">
+                        <a:rPr lang="en-US" sz="1200" dirty="0">
                           <a:solidFill>
                             <a:srgbClr val="1D1D1F"/>
                           </a:solidFill>
@@ -30073,7 +29606,7 @@
                         </a:rPr>
                         <a:t>5초 간격 중앙값 28 → 9 px (키프레임 8장), 모델 바닥 3.9 px</a:t>
                       </a:r>
-                      <a:endParaRPr lang="en-US" sz="1300" dirty="0">
+                      <a:endParaRPr lang="en-US" sz="1200" dirty="0">
                         <a:latin typeface="나눔스퀘어 네오 Regular" charset="0"/>
                         <a:ea typeface="나눔스퀘어 네오 Regular" charset="0"/>
                         <a:cs typeface="나눔스퀘어 네오 Regular" charset="0"/>
@@ -30131,7 +29664,7 @@
                         <a:buNone/>
                       </a:pPr>
                       <a:r>
-                        <a:rPr lang="en-US" sz="1300" dirty="0">
+                        <a:rPr lang="en-US" sz="1200" dirty="0">
                           <a:solidFill>
                             <a:srgbClr val="1D1D1F"/>
                           </a:solidFill>
@@ -30141,7 +29674,7 @@
                         </a:rPr>
                         <a:t>float 결과</a:t>
                       </a:r>
-                      <a:endParaRPr lang="en-US" sz="1300" dirty="0">
+                      <a:endParaRPr lang="en-US" sz="1200" dirty="0">
                         <a:latin typeface="나눔스퀘어 네오 Regular" charset="0"/>
                         <a:ea typeface="나눔스퀘어 네오 Regular" charset="0"/>
                         <a:cs typeface="나눔스퀘어 네오 Regular" charset="0"/>
@@ -30196,7 +29729,7 @@
                   </a:ext>
                 </a:extLst>
               </a:tr>
-              <a:tr h="640080">
+              <a:tr h="457200">
                 <a:tc>
                   <a:txBody>
                     <a:bodyPr/>
@@ -30206,7 +29739,7 @@
                         <a:buNone/>
                       </a:pPr>
                       <a:r>
-                        <a:rPr lang="en-US" sz="1300" dirty="0">
+                        <a:rPr lang="en-US" sz="1200" dirty="0">
                           <a:solidFill>
                             <a:srgbClr val="1D1D1F"/>
                           </a:solidFill>
@@ -30216,7 +29749,7 @@
                         </a:rPr>
                         <a:t>UZH (3자유도)</a:t>
                       </a:r>
-                      <a:endParaRPr lang="en-US" sz="1300" dirty="0">
+                      <a:endParaRPr lang="en-US" sz="1200" dirty="0">
                         <a:latin typeface="나눔스퀘어 네오 Regular" charset="0"/>
                         <a:ea typeface="나눔스퀘어 네오 Regular" charset="0"/>
                         <a:cs typeface="나눔스퀘어 네오 Regular" charset="0"/>
@@ -30274,7 +29807,7 @@
                         <a:buNone/>
                       </a:pPr>
                       <a:r>
-                        <a:rPr lang="en-US" sz="1300" dirty="0">
+                        <a:rPr lang="en-US" sz="1200" dirty="0">
                           <a:solidFill>
                             <a:srgbClr val="1D1D1F"/>
                           </a:solidFill>
@@ -30284,7 +29817,7 @@
                         </a:rPr>
                         <a:t>정수 기준모델</a:t>
                       </a:r>
-                      <a:endParaRPr lang="en-US" sz="1300" dirty="0">
+                      <a:endParaRPr lang="en-US" sz="1200" dirty="0">
                         <a:latin typeface="나눔스퀘어 네오 Regular" charset="0"/>
                         <a:ea typeface="나눔스퀘어 네오 Regular" charset="0"/>
                         <a:cs typeface="나눔스퀘어 네오 Regular" charset="0"/>
@@ -30342,7 +29875,7 @@
                         <a:buNone/>
                       </a:pPr>
                       <a:r>
-                        <a:rPr lang="en-US" sz="1300" dirty="0">
+                        <a:rPr lang="en-US" sz="1200" dirty="0">
                           <a:solidFill>
                             <a:srgbClr val="1D1D1F"/>
                           </a:solidFill>
@@ -30352,7 +29885,7 @@
                         </a:rPr>
                         <a:t>5초 91 px — 정확도 수치로 쓰지 않음</a:t>
                       </a:r>
-                      <a:endParaRPr lang="en-US" sz="1300" dirty="0">
+                      <a:endParaRPr lang="en-US" sz="1200" dirty="0">
                         <a:latin typeface="나눔스퀘어 네오 Regular" charset="0"/>
                         <a:ea typeface="나눔스퀘어 네오 Regular" charset="0"/>
                         <a:cs typeface="나눔스퀘어 네오 Regular" charset="0"/>
@@ -30410,7 +29943,7 @@
                         <a:buNone/>
                       </a:pPr>
                       <a:r>
-                        <a:rPr lang="en-US" sz="1300" dirty="0">
+                        <a:rPr lang="en-US" sz="1200" dirty="0">
                           <a:solidFill>
                             <a:srgbClr val="1D1D1F"/>
                           </a:solidFill>
@@ -30420,7 +29953,7 @@
                         </a:rPr>
                         <a:t>RTL=기준모델 일치 검증용</a:t>
                       </a:r>
-                      <a:endParaRPr lang="en-US" sz="1300" dirty="0">
+                      <a:endParaRPr lang="en-US" sz="1200" dirty="0">
                         <a:latin typeface="나눔스퀘어 네오 Regular" charset="0"/>
                         <a:ea typeface="나눔스퀘어 네오 Regular" charset="0"/>
                         <a:cs typeface="나눔스퀘어 네오 Regular" charset="0"/>
@@ -30479,20 +30012,36 @@
           </a:graphicData>
         </a:graphic>
       </p:graphicFrame>
+      <p:graphicFrame>
+        <p:nvGraphicFramePr>
+          <p:cNvPr id="5" name="Chart 0"/>
+          <p:cNvGraphicFramePr/>
+          <p:nvPr/>
+        </p:nvGraphicFramePr>
+        <p:xfrm>
+          <a:off x="548640" y="3840480"/>
+          <a:ext cx="5852160" cy="2560320"/>
+        </p:xfrm>
+        <a:graphic>
+          <a:graphicData uri="http://schemas.openxmlformats.org/drawingml/2006/chart">
+            <c:chart xmlns:c="http://schemas.openxmlformats.org/drawingml/2006/chart" xmlns:r="http://schemas.openxmlformats.org/officeDocument/2006/relationships" r:id="rId3"/>
+          </a:graphicData>
+        </a:graphic>
+      </p:graphicFrame>
       <p:sp>
         <p:nvSpPr>
-          <p:cNvPr id="5" name="Shape 1"/>
+          <p:cNvPr id="6" name="Shape 1"/>
           <p:cNvSpPr/>
           <p:nvPr/>
         </p:nvSpPr>
         <p:spPr>
           <a:xfrm>
-            <a:off x="548640" y="4754880"/>
-            <a:ext cx="5394960" cy="1554480"/>
+            <a:off x="6675120" y="3931920"/>
+            <a:ext cx="4937760" cy="1097280"/>
           </a:xfrm>
           <a:prstGeom prst="roundRect">
             <a:avLst>
-              <a:gd name="adj" fmla="val 7059"/>
+              <a:gd name="adj" fmla="val 10000"/>
             </a:avLst>
           </a:prstGeom>
           <a:solidFill>
@@ -30508,14 +30057,14 @@
       </p:sp>
       <p:sp>
         <p:nvSpPr>
-          <p:cNvPr id="6" name="Text 2"/>
+          <p:cNvPr id="7" name="Text 2"/>
           <p:cNvSpPr txBox="1"/>
           <p:nvPr/>
         </p:nvSpPr>
         <p:spPr>
           <a:xfrm>
-            <a:off x="731520" y="4892040"/>
-            <a:ext cx="5029200" cy="365760"/>
+            <a:off x="6858000" y="4069080"/>
+            <a:ext cx="4572000" cy="365760"/>
           </a:xfrm>
           <a:prstGeom prst="rect">
             <a:avLst/>
@@ -30547,14 +30096,14 @@
       </p:sp>
       <p:sp>
         <p:nvSpPr>
-          <p:cNvPr id="7" name="Text 3"/>
+          <p:cNvPr id="8" name="Text 3"/>
           <p:cNvSpPr txBox="1"/>
           <p:nvPr/>
         </p:nvSpPr>
         <p:spPr>
           <a:xfrm>
-            <a:off x="731520" y="5303520"/>
-            <a:ext cx="5029200" cy="868680"/>
+            <a:off x="6858000" y="4480560"/>
+            <a:ext cx="4572000" cy="411480"/>
           </a:xfrm>
           <a:prstGeom prst="rect">
             <a:avLst/>
@@ -30570,7 +30119,7 @@
               <a:buNone/>
             </a:pPr>
             <a:r>
-              <a:rPr lang="en-US" sz="1400" dirty="0">
+              <a:rPr lang="en-US" sz="1200" dirty="0">
                 <a:solidFill>
                   <a:srgbClr val="1D1D1F"/>
                 </a:solidFill>
@@ -30580,24 +30129,24 @@
               </a:rPr>
               <a:t>정답이 ECC 체인이라 그 자체의 오차가 섞여 있다. 교수 데이터와 UZH 정확도는 서로 직접 비교하면 안 된다.</a:t>
             </a:r>
-            <a:endParaRPr lang="en-US" sz="1400" dirty="0"/>
+            <a:endParaRPr lang="en-US" sz="1200" dirty="0"/>
           </a:p>
         </p:txBody>
       </p:sp>
       <p:sp>
         <p:nvSpPr>
-          <p:cNvPr id="8" name="Shape 4"/>
+          <p:cNvPr id="3" name="Shape 4"/>
           <p:cNvSpPr/>
           <p:nvPr/>
         </p:nvSpPr>
         <p:spPr>
           <a:xfrm>
-            <a:off x="6217920" y="4754880"/>
-            <a:ext cx="5394960" cy="1554480"/>
+            <a:off x="6675120" y="5120640"/>
+            <a:ext cx="4937760" cy="1234440"/>
           </a:xfrm>
           <a:prstGeom prst="roundRect">
             <a:avLst>
-              <a:gd name="adj" fmla="val 7059"/>
+              <a:gd name="adj" fmla="val 8889"/>
             </a:avLst>
           </a:prstGeom>
           <a:solidFill>
@@ -30613,14 +30162,14 @@
       </p:sp>
       <p:sp>
         <p:nvSpPr>
-          <p:cNvPr id="3" name="Text 5"/>
+          <p:cNvPr id="10" name="Text 5"/>
           <p:cNvSpPr txBox="1"/>
           <p:nvPr/>
         </p:nvSpPr>
         <p:spPr>
           <a:xfrm>
-            <a:off x="6400800" y="4892040"/>
-            <a:ext cx="5029200" cy="365760"/>
+            <a:off x="6858000" y="5257800"/>
+            <a:ext cx="4572000" cy="365760"/>
           </a:xfrm>
           <a:prstGeom prst="rect">
             <a:avLst/>
@@ -30652,14 +30201,14 @@
       </p:sp>
       <p:sp>
         <p:nvSpPr>
-          <p:cNvPr id="10" name="Text 6"/>
+          <p:cNvPr id="11" name="Text 6"/>
           <p:cNvSpPr txBox="1"/>
           <p:nvPr/>
         </p:nvSpPr>
         <p:spPr>
           <a:xfrm>
-            <a:off x="6400800" y="5303520"/>
-            <a:ext cx="5029200" cy="868680"/>
+            <a:off x="6858000" y="5669280"/>
+            <a:ext cx="4572000" cy="548640"/>
           </a:xfrm>
           <a:prstGeom prst="rect">
             <a:avLst/>
@@ -30675,7 +30224,7 @@
               <a:buNone/>
             </a:pPr>
             <a:r>
-              <a:rPr lang="en-US" sz="1400" dirty="0">
+              <a:rPr lang="en-US" sz="1200" dirty="0">
                 <a:solidFill>
                   <a:srgbClr val="1D1D1F"/>
                 </a:solidFill>
@@ -30685,7 +30234,7 @@
               </a:rPr>
               <a:t>빠른 3축 회전에서 추적을 잃으면 도형이 여러 벌로 복제된다. 키프레임·월드 앵커로 줄였지만 완전히 풀지는 못했다.</a:t>
             </a:r>
-            <a:endParaRPr lang="en-US" sz="1400" dirty="0"/>
+            <a:endParaRPr lang="en-US" sz="1200" dirty="0"/>
           </a:p>
         </p:txBody>
       </p:sp>

--- a/submission/REDRED_2차_발표자료_칩S.pptx
+++ b/submission/REDRED_2차_발표자료_칩S.pptx
@@ -290,7 +290,7 @@
           </c:val>
           <c:extLst>
             <c:ext xmlns:c16="http://schemas.microsoft.com/office/drawing/2014/chart" uri="{C3380CC4-5D6E-409C-BE32-E72D297353CC}">
-              <c16:uniqueId val="{00000000-720F-4766-90B6-8214FFDB5133}"/>
+              <c16:uniqueId val="{00000000-75C8-45C2-A141-FEAE55792859}"/>
             </c:ext>
           </c:extLst>
         </c:ser>
@@ -572,7 +572,7 @@
           </c:val>
           <c:extLst>
             <c:ext xmlns:c16="http://schemas.microsoft.com/office/drawing/2014/chart" uri="{C3380CC4-5D6E-409C-BE32-E72D297353CC}">
-              <c16:uniqueId val="{00000000-59B6-40BD-843D-30AAE8050D07}"/>
+              <c16:uniqueId val="{00000000-2601-4DB0-BF9F-ADE7B7A3D8C8}"/>
             </c:ext>
           </c:extLst>
         </c:ser>
@@ -673,7 +673,7 @@
           </c:val>
           <c:extLst>
             <c:ext xmlns:c16="http://schemas.microsoft.com/office/drawing/2014/chart" uri="{C3380CC4-5D6E-409C-BE32-E72D297353CC}">
-              <c16:uniqueId val="{00000001-59B6-40BD-843D-30AAE8050D07}"/>
+              <c16:uniqueId val="{00000001-2601-4DB0-BF9F-ADE7B7A3D8C8}"/>
             </c:ext>
           </c:extLst>
         </c:ser>
@@ -774,7 +774,7 @@
           </c:val>
           <c:extLst>
             <c:ext xmlns:c16="http://schemas.microsoft.com/office/drawing/2014/chart" uri="{C3380CC4-5D6E-409C-BE32-E72D297353CC}">
-              <c16:uniqueId val="{00000002-59B6-40BD-843D-30AAE8050D07}"/>
+              <c16:uniqueId val="{00000002-2601-4DB0-BF9F-ADE7B7A3D8C8}"/>
             </c:ext>
           </c:extLst>
         </c:ser>
@@ -1068,7 +1068,7 @@
           </c:val>
           <c:extLst>
             <c:ext xmlns:c16="http://schemas.microsoft.com/office/drawing/2014/chart" uri="{C3380CC4-5D6E-409C-BE32-E72D297353CC}">
-              <c16:uniqueId val="{00000000-E610-4721-B365-6A84FB1B5808}"/>
+              <c16:uniqueId val="{00000000-BE5C-42D0-A23B-DF0728B66C6E}"/>
             </c:ext>
           </c:extLst>
         </c:ser>
@@ -1163,7 +1163,7 @@
           </c:val>
           <c:extLst>
             <c:ext xmlns:c16="http://schemas.microsoft.com/office/drawing/2014/chart" uri="{C3380CC4-5D6E-409C-BE32-E72D297353CC}">
-              <c16:uniqueId val="{00000001-E610-4721-B365-6A84FB1B5808}"/>
+              <c16:uniqueId val="{00000001-BE5C-42D0-A23B-DF0728B66C6E}"/>
             </c:ext>
           </c:extLst>
         </c:ser>
@@ -1352,306 +1352,6 @@
                 <a:ea typeface="나눔스퀘어 네오 Regular"/>
                 <a:cs typeface="나눔스퀘어 네오 Regular"/>
               </a:rPr>
-              <a:t>메모리 비트당 면적 (µm²/bit)</a:t>
-            </a:r>
-          </a:p>
-        </c:rich>
-      </c:tx>
-      <c:overlay val="0"/>
-    </c:title>
-    <c:autoTitleDeleted val="0"/>
-    <c:plotArea>
-      <c:layout/>
-      <c:barChart>
-        <c:barDir val="col"/>
-        <c:grouping val="clustered"/>
-        <c:varyColors val="0"/>
-        <c:ser>
-          <c:idx val="0"/>
-          <c:order val="0"/>
-          <c:tx>
-            <c:strRef>
-              <c:f>Sheet1!$B$1</c:f>
-              <c:strCache>
-                <c:ptCount val="1"/>
-                <c:pt idx="0">
-                  <c:v>비트당 면적</c:v>
-                </c:pt>
-              </c:strCache>
-            </c:strRef>
-          </c:tx>
-          <c:spPr>
-            <a:solidFill>
-              <a:srgbClr val="0066CC"/>
-            </a:solidFill>
-            <a:effectLst/>
-          </c:spPr>
-          <c:invertIfNegative val="0"/>
-          <c:dPt>
-            <c:idx val="0"/>
-            <c:invertIfNegative val="0"/>
-            <c:bubble3D val="0"/>
-            <c:extLst>
-              <c:ext xmlns:c16="http://schemas.microsoft.com/office/drawing/2014/chart" uri="{C3380CC4-5D6E-409C-BE32-E72D297353CC}">
-                <c16:uniqueId val="{00000001-C80F-42A4-A66E-7AA9FECFA1EB}"/>
-              </c:ext>
-            </c:extLst>
-          </c:dPt>
-          <c:dPt>
-            <c:idx val="1"/>
-            <c:invertIfNegative val="0"/>
-            <c:bubble3D val="0"/>
-            <c:spPr>
-              <a:solidFill>
-                <a:srgbClr val="7A7A7A"/>
-              </a:solidFill>
-              <a:effectLst/>
-            </c:spPr>
-            <c:extLst>
-              <c:ext xmlns:c16="http://schemas.microsoft.com/office/drawing/2014/chart" uri="{C3380CC4-5D6E-409C-BE32-E72D297353CC}">
-                <c16:uniqueId val="{00000003-C80F-42A4-A66E-7AA9FECFA1EB}"/>
-              </c:ext>
-            </c:extLst>
-          </c:dPt>
-          <c:dLbls>
-            <c:numFmt formatCode="0.0" sourceLinked="0"/>
-            <c:spPr>
-              <a:noFill/>
-              <a:ln>
-                <a:noFill/>
-              </a:ln>
-              <a:effectLst/>
-            </c:spPr>
-            <c:txPr>
-              <a:bodyPr/>
-              <a:lstStyle/>
-              <a:p>
-                <a:pPr>
-                  <a:defRPr sz="1200" b="0" i="0" u="none" strike="noStrike">
-                    <a:solidFill>
-                      <a:srgbClr val="1D1D1F"/>
-                    </a:solidFill>
-                    <a:latin typeface="나눔스퀘어 네오 Regular"/>
-                    <a:ea typeface="나눔스퀘어 네오 Regular"/>
-                    <a:cs typeface="나눔스퀘어 네오 Regular"/>
-                  </a:defRPr>
-                </a:pPr>
-                <a:endParaRPr lang="ko-KR"/>
-              </a:p>
-            </c:txPr>
-            <c:showLegendKey val="0"/>
-            <c:showVal val="1"/>
-            <c:showCatName val="0"/>
-            <c:showSerName val="0"/>
-            <c:showPercent val="0"/>
-            <c:showBubbleSize val="0"/>
-            <c:showLeaderLines val="0"/>
-            <c:extLst>
-              <c:ext xmlns:c15="http://schemas.microsoft.com/office/drawing/2012/chart" uri="{CE6537A1-D6FC-4f65-9D91-7224C49458BB}">
-                <c15:showLeaderLines val="0"/>
-              </c:ext>
-            </c:extLst>
-          </c:dLbls>
-          <c:cat>
-            <c:strRef>
-              <c:f>Sheet1!$A$2:$A$3</c:f>
-              <c:strCache>
-                <c:ptCount val="2"/>
-                <c:pt idx="0">
-                  <c:v>FF+클록게이팅</c:v>
-                </c:pt>
-                <c:pt idx="1">
-                  <c:v>FF(게이팅 없음)</c:v>
-                </c:pt>
-              </c:strCache>
-            </c:strRef>
-          </c:cat>
-          <c:val>
-            <c:numRef>
-              <c:f>Sheet1!$B$2:$B$3</c:f>
-              <c:numCache>
-                <c:formatCode>General</c:formatCode>
-                <c:ptCount val="2"/>
-                <c:pt idx="0">
-                  <c:v>11.8</c:v>
-                </c:pt>
-                <c:pt idx="1">
-                  <c:v>15.5</c:v>
-                </c:pt>
-              </c:numCache>
-            </c:numRef>
-          </c:val>
-          <c:extLst>
-            <c:ext xmlns:c16="http://schemas.microsoft.com/office/drawing/2014/chart" uri="{C3380CC4-5D6E-409C-BE32-E72D297353CC}">
-              <c16:uniqueId val="{00000004-C80F-42A4-A66E-7AA9FECFA1EB}"/>
-            </c:ext>
-          </c:extLst>
-        </c:ser>
-        <c:dLbls>
-          <c:showLegendKey val="0"/>
-          <c:showVal val="1"/>
-          <c:showCatName val="0"/>
-          <c:showSerName val="0"/>
-          <c:showPercent val="0"/>
-          <c:showBubbleSize val="0"/>
-        </c:dLbls>
-        <c:gapWidth val="60"/>
-        <c:axId val="2094734554"/>
-        <c:axId val="2094734552"/>
-      </c:barChart>
-      <c:catAx>
-        <c:axId val="2094734554"/>
-        <c:scaling>
-          <c:orientation val="minMax"/>
-        </c:scaling>
-        <c:delete val="0"/>
-        <c:axPos val="b"/>
-        <c:numFmt formatCode="General" sourceLinked="1"/>
-        <c:majorTickMark val="out"/>
-        <c:minorTickMark val="none"/>
-        <c:tickLblPos val="low"/>
-        <c:spPr>
-          <a:ln w="12700" cap="flat">
-            <a:solidFill>
-              <a:srgbClr val="888888"/>
-            </a:solidFill>
-            <a:prstDash val="solid"/>
-            <a:round/>
-          </a:ln>
-        </c:spPr>
-        <c:txPr>
-          <a:bodyPr/>
-          <a:lstStyle/>
-          <a:p>
-            <a:pPr>
-              <a:defRPr sz="1200" b="0" i="0" u="none" strike="noStrike">
-                <a:solidFill>
-                  <a:srgbClr val="1D1D1F"/>
-                </a:solidFill>
-                <a:latin typeface="나눔스퀘어 네오 Regular"/>
-                <a:ea typeface="나눔스퀘어 네오 Regular"/>
-                <a:cs typeface="나눔스퀘어 네오 Regular"/>
-              </a:defRPr>
-            </a:pPr>
-            <a:endParaRPr lang="ko-KR"/>
-          </a:p>
-        </c:txPr>
-        <c:crossAx val="2094734552"/>
-        <c:crosses val="autoZero"/>
-        <c:auto val="1"/>
-        <c:lblAlgn val="ctr"/>
-        <c:lblOffset val="100"/>
-        <c:noMultiLvlLbl val="1"/>
-      </c:catAx>
-      <c:valAx>
-        <c:axId val="2094734552"/>
-        <c:scaling>
-          <c:orientation val="minMax"/>
-        </c:scaling>
-        <c:delete val="0"/>
-        <c:axPos val="l"/>
-        <c:majorGridlines>
-          <c:spPr>
-            <a:ln w="6350" cap="flat">
-              <a:solidFill>
-                <a:srgbClr val="E8E8ED"/>
-              </a:solidFill>
-              <a:prstDash val="solid"/>
-              <a:round/>
-            </a:ln>
-          </c:spPr>
-        </c:majorGridlines>
-        <c:numFmt formatCode="General" sourceLinked="0"/>
-        <c:majorTickMark val="out"/>
-        <c:minorTickMark val="none"/>
-        <c:tickLblPos val="nextTo"/>
-        <c:spPr>
-          <a:ln w="12700" cap="flat">
-            <a:solidFill>
-              <a:srgbClr val="888888"/>
-            </a:solidFill>
-            <a:prstDash val="solid"/>
-            <a:round/>
-          </a:ln>
-        </c:spPr>
-        <c:txPr>
-          <a:bodyPr/>
-          <a:lstStyle/>
-          <a:p>
-            <a:pPr>
-              <a:defRPr sz="1100" b="0" i="0" u="none" strike="noStrike">
-                <a:solidFill>
-                  <a:srgbClr val="7A7A7A"/>
-                </a:solidFill>
-                <a:latin typeface="나눔스퀘어 네오 Regular"/>
-                <a:ea typeface="나눔스퀘어 네오 Regular"/>
-                <a:cs typeface="나눔스퀘어 네오 Regular"/>
-              </a:defRPr>
-            </a:pPr>
-            <a:endParaRPr lang="ko-KR"/>
-          </a:p>
-        </c:txPr>
-        <c:crossAx val="2094734554"/>
-        <c:crosses val="autoZero"/>
-        <c:crossBetween val="between"/>
-      </c:valAx>
-      <c:spPr>
-        <a:noFill/>
-        <a:ln>
-          <a:noFill/>
-        </a:ln>
-        <a:effectLst/>
-      </c:spPr>
-    </c:plotArea>
-    <c:plotVisOnly val="1"/>
-    <c:dispBlanksAs val="span"/>
-    <c:showDLblsOverMax val="1"/>
-  </c:chart>
-  <c:spPr>
-    <a:noFill/>
-    <a:ln>
-      <a:noFill/>
-    </a:ln>
-    <a:effectLst/>
-  </c:spPr>
-  <c:externalData r:id="rId1">
-    <c:autoUpdate val="0"/>
-  </c:externalData>
-</c:chartSpace>
-</file>
-
-<file path=ppt/charts/chart5.xml><?xml version="1.0" encoding="utf-8"?>
-<c:chartSpace xmlns:c="http://schemas.openxmlformats.org/drawingml/2006/chart" xmlns:a="http://schemas.openxmlformats.org/drawingml/2006/main" xmlns:r="http://schemas.openxmlformats.org/officeDocument/2006/relationships" xmlns:c16r2="http://schemas.microsoft.com/office/drawing/2015/06/chart">
-  <c:date1904 val="0"/>
-  <c:lang val="ko-KR"/>
-  <c:roundedCorners val="1"/>
-  <c:style val="2"/>
-  <c:chart>
-    <c:title>
-      <c:tx>
-        <c:rich>
-          <a:bodyPr/>
-          <a:lstStyle/>
-          <a:p>
-            <a:pPr>
-              <a:defRPr sz="1400" b="0" i="0" u="none" strike="noStrike">
-                <a:solidFill>
-                  <a:srgbClr val="1D1D1F"/>
-                </a:solidFill>
-                <a:latin typeface="나눔스퀘어 네오 Regular"/>
-                <a:ea typeface="나눔스퀘어 네오 Regular"/>
-                <a:cs typeface="나눔스퀘어 네오 Regular"/>
-              </a:defRPr>
-            </a:pPr>
-            <a:r>
-              <a:rPr sz="1400" b="0" i="0" u="none" strike="noStrike">
-                <a:solidFill>
-                  <a:srgbClr val="1D1D1F"/>
-                </a:solidFill>
-                <a:latin typeface="나눔스퀘어 네오 Regular"/>
-                <a:ea typeface="나눔스퀘어 네오 Regular"/>
-                <a:cs typeface="나눔스퀘어 네오 Regular"/>
-              </a:rPr>
               <a:t>월드 표현별 지도 상관 (높을수록 좋음)</a:t>
             </a:r>
           </a:p>
@@ -1693,7 +1393,7 @@
             <c:bubble3D val="0"/>
             <c:extLst>
               <c:ext xmlns:c16="http://schemas.microsoft.com/office/drawing/2014/chart" uri="{C3380CC4-5D6E-409C-BE32-E72D297353CC}">
-                <c16:uniqueId val="{00000001-E554-4D9C-B262-3F0EEF482917}"/>
+                <c16:uniqueId val="{00000001-77FF-4970-AFBB-18F1692EC76E}"/>
               </c:ext>
             </c:extLst>
           </c:dPt>
@@ -1709,7 +1409,7 @@
             </c:spPr>
             <c:extLst>
               <c:ext xmlns:c16="http://schemas.microsoft.com/office/drawing/2014/chart" uri="{C3380CC4-5D6E-409C-BE32-E72D297353CC}">
-                <c16:uniqueId val="{00000003-E554-4D9C-B262-3F0EEF482917}"/>
+                <c16:uniqueId val="{00000003-77FF-4970-AFBB-18F1692EC76E}"/>
               </c:ext>
             </c:extLst>
           </c:dPt>
@@ -1725,7 +1425,7 @@
             </c:spPr>
             <c:extLst>
               <c:ext xmlns:c16="http://schemas.microsoft.com/office/drawing/2014/chart" uri="{C3380CC4-5D6E-409C-BE32-E72D297353CC}">
-                <c16:uniqueId val="{00000005-E554-4D9C-B262-3F0EEF482917}"/>
+                <c16:uniqueId val="{00000005-77FF-4970-AFBB-18F1692EC76E}"/>
               </c:ext>
             </c:extLst>
           </c:dPt>
@@ -1741,7 +1441,7 @@
             </c:spPr>
             <c:extLst>
               <c:ext xmlns:c16="http://schemas.microsoft.com/office/drawing/2014/chart" uri="{C3380CC4-5D6E-409C-BE32-E72D297353CC}">
-                <c16:uniqueId val="{00000007-E554-4D9C-B262-3F0EEF482917}"/>
+                <c16:uniqueId val="{00000007-77FF-4970-AFBB-18F1692EC76E}"/>
               </c:ext>
             </c:extLst>
           </c:dPt>
@@ -1827,7 +1527,7 @@
           </c:val>
           <c:extLst>
             <c:ext xmlns:c16="http://schemas.microsoft.com/office/drawing/2014/chart" uri="{C3380CC4-5D6E-409C-BE32-E72D297353CC}">
-              <c16:uniqueId val="{00000008-E554-4D9C-B262-3F0EEF482917}"/>
+              <c16:uniqueId val="{00000008-77FF-4970-AFBB-18F1692EC76E}"/>
             </c:ext>
           </c:extLst>
         </c:ser>
@@ -1991,7 +1691,7 @@
     </p:spTree>
     <p:extLst>
       <p:ext uri="{BB962C8B-B14F-4D97-AF65-F5344CB8AC3E}">
-        <p14:creationId xmlns:p14="http://schemas.microsoft.com/office/powerpoint/2010/main" val="1956786499"/>
+        <p14:creationId xmlns:p14="http://schemas.microsoft.com/office/powerpoint/2010/main" val="876522012"/>
       </p:ext>
     </p:extLst>
   </p:cSld>
@@ -9355,25 +9055,72 @@
           </a:graphicData>
         </a:graphic>
       </p:graphicFrame>
-      <p:graphicFrame>
-        <p:nvGraphicFramePr>
-          <p:cNvPr id="5" name="Chart 0"/>
-          <p:cNvGraphicFramePr/>
+      <p:pic>
+        <p:nvPicPr>
+          <p:cNvPr id="5" name="Image 0" descr="C:\SNU\포트폴리오\전국AI반도체경진대회\submission\figs\wave_row_gating.png"/>
+          <p:cNvPicPr>
+            <a:picLocks noChangeAspect="1"/>
+          </p:cNvPicPr>
           <p:nvPr/>
-        </p:nvGraphicFramePr>
-        <p:xfrm>
-          <a:off x="7772400" y="1371600"/>
-          <a:ext cx="3840480" cy="2743200"/>
-        </p:xfrm>
-        <a:graphic>
-          <a:graphicData uri="http://schemas.openxmlformats.org/drawingml/2006/chart">
-            <c:chart xmlns:c="http://schemas.openxmlformats.org/drawingml/2006/chart" xmlns:r="http://schemas.openxmlformats.org/officeDocument/2006/relationships" r:id="rId3"/>
-          </a:graphicData>
-        </a:graphic>
-      </p:graphicFrame>
+        </p:nvPicPr>
+        <p:blipFill>
+          <a:blip r:embed="rId3"/>
+          <a:stretch>
+            <a:fillRect/>
+          </a:stretch>
+        </p:blipFill>
+        <p:spPr>
+          <a:xfrm>
+            <a:off x="7726680" y="1371600"/>
+            <a:ext cx="3886200" cy="2075688"/>
+          </a:xfrm>
+          <a:prstGeom prst="rect">
+            <a:avLst/>
+          </a:prstGeom>
+        </p:spPr>
+      </p:pic>
       <p:sp>
         <p:nvSpPr>
-          <p:cNvPr id="6" name="Shape 1"/>
+          <p:cNvPr id="6" name="Text 1"/>
+          <p:cNvSpPr txBox="1"/>
+          <p:nvPr/>
+        </p:nvSpPr>
+        <p:spPr>
+          <a:xfrm>
+            <a:off x="7726680" y="3474720"/>
+            <a:ext cx="3886200" cy="640080"/>
+          </a:xfrm>
+          <a:prstGeom prst="rect">
+            <a:avLst/>
+          </a:prstGeom>
+          <a:noFill/>
+          <a:ln/>
+        </p:spPr>
+        <p:txBody>
+          <a:bodyPr wrap="square" lIns="0" tIns="0" rIns="0" bIns="0" rtlCol="0" anchor="t"/>
+          <a:lstStyle/>
+          <a:p>
+            <a:pPr marL="0" indent="0" eaLnBrk="0">
+              <a:buNone/>
+            </a:pPr>
+            <a:r>
+              <a:rPr lang="en-US" sz="1100" dirty="0">
+                <a:solidFill>
+                  <a:srgbClr val="7A7A7A"/>
+                </a:solidFill>
+                <a:latin typeface="나눔스퀘어 네오 Regular" pitchFamily="34" charset="0"/>
+                <a:ea typeface="나눔스퀘어 네오 Regular" pitchFamily="34" charset="-122"/>
+                <a:cs typeface="나눔스퀘어 네오 Regular" pitchFamily="34" charset="-120"/>
+              </a:rPr>
+              <a:t>행 단위 클록 게이팅 파형: 쓰는 행의 게이트 클록만 토글, 나머지 행은 꺼짐 (RTL 시뮬)</a:t>
+            </a:r>
+            <a:endParaRPr lang="en-US" sz="1100" dirty="0"/>
+          </a:p>
+        </p:txBody>
+      </p:sp>
+      <p:sp>
+        <p:nvSpPr>
+          <p:cNvPr id="7" name="Shape 2"/>
           <p:cNvSpPr/>
           <p:nvPr/>
         </p:nvSpPr>
@@ -9400,7 +9147,7 @@
       </p:sp>
       <p:sp>
         <p:nvSpPr>
-          <p:cNvPr id="7" name="Text 2"/>
+          <p:cNvPr id="8" name="Text 3"/>
           <p:cNvSpPr txBox="1"/>
           <p:nvPr/>
         </p:nvSpPr>
@@ -9439,7 +9186,7 @@
       </p:sp>
       <p:sp>
         <p:nvSpPr>
-          <p:cNvPr id="8" name="Text 3"/>
+          <p:cNvPr id="9" name="Text 4"/>
           <p:cNvSpPr txBox="1"/>
           <p:nvPr/>
         </p:nvSpPr>
@@ -9478,7 +9225,7 @@
       </p:sp>
       <p:sp>
         <p:nvSpPr>
-          <p:cNvPr id="9" name="Shape 4"/>
+          <p:cNvPr id="10" name="Shape 5"/>
           <p:cNvSpPr/>
           <p:nvPr/>
         </p:nvSpPr>
@@ -9505,7 +9252,7 @@
       </p:sp>
       <p:sp>
         <p:nvSpPr>
-          <p:cNvPr id="10" name="Text 5"/>
+          <p:cNvPr id="11" name="Text 6"/>
           <p:cNvSpPr txBox="1"/>
           <p:nvPr/>
         </p:nvSpPr>
@@ -9544,7 +9291,7 @@
       </p:sp>
       <p:sp>
         <p:nvSpPr>
-          <p:cNvPr id="11" name="Text 6"/>
+          <p:cNvPr id="12" name="Text 7"/>
           <p:cNvSpPr txBox="1"/>
           <p:nvPr/>
         </p:nvSpPr>
@@ -20093,82 +19840,40 @@
           </a:p>
         </p:txBody>
       </p:sp>
-      <p:sp>
-        <p:nvSpPr>
-          <p:cNvPr id="8" name="Shape 4"/>
-          <p:cNvSpPr/>
+      <p:pic>
+        <p:nvPicPr>
+          <p:cNvPr id="8" name="Image 0" descr="C:\SNU\포트폴리오\전국AI반도체경진대회\submission\figs\wave_blink.png"/>
+          <p:cNvPicPr>
+            <a:picLocks noChangeAspect="1"/>
+          </p:cNvPicPr>
           <p:nvPr/>
-        </p:nvSpPr>
+        </p:nvPicPr>
+        <p:blipFill>
+          <a:blip r:embed="rId3"/>
+          <a:stretch>
+            <a:fillRect/>
+          </a:stretch>
+        </p:blipFill>
         <p:spPr>
           <a:xfrm>
             <a:off x="8549640" y="2971800"/>
-            <a:ext cx="3063240" cy="1463040"/>
+            <a:ext cx="3063240" cy="1097280"/>
           </a:xfrm>
-          <a:prstGeom prst="roundRect">
-            <a:avLst>
-              <a:gd name="adj" fmla="val 7500"/>
-            </a:avLst>
+          <a:prstGeom prst="rect">
+            <a:avLst/>
           </a:prstGeom>
-          <a:solidFill>
-            <a:srgbClr val="272729"/>
-          </a:solidFill>
-          <a:ln w="12700">
-            <a:solidFill>
-              <a:srgbClr val="272729"/>
-            </a:solidFill>
-            <a:prstDash val="solid"/>
-          </a:ln>
         </p:spPr>
-      </p:sp>
+      </p:pic>
       <p:sp>
         <p:nvSpPr>
-          <p:cNvPr id="9" name="Text 5"/>
+          <p:cNvPr id="9" name="Text 4"/>
           <p:cNvSpPr txBox="1"/>
           <p:nvPr/>
         </p:nvSpPr>
         <p:spPr>
           <a:xfrm>
-            <a:off x="8732520" y="3063240"/>
-            <a:ext cx="2743200" cy="731520"/>
-          </a:xfrm>
-          <a:prstGeom prst="rect">
-            <a:avLst/>
-          </a:prstGeom>
-          <a:noFill/>
-          <a:ln/>
-        </p:spPr>
-        <p:txBody>
-          <a:bodyPr wrap="square" lIns="0" tIns="0" rIns="0" bIns="0" rtlCol="0" anchor="ctr"/>
-          <a:lstStyle/>
-          <a:p>
-            <a:pPr marL="0" indent="0" eaLnBrk="0">
-              <a:buNone/>
-            </a:pPr>
-            <a:r>
-              <a:rPr lang="en-US" sz="3600" dirty="0">
-                <a:solidFill>
-                  <a:srgbClr val="2997FF"/>
-                </a:solidFill>
-                <a:latin typeface="나눔스퀘어 네오 Bold" pitchFamily="34" charset="0"/>
-                <a:ea typeface="나눔스퀘어 네오 Bold" pitchFamily="34" charset="-122"/>
-                <a:cs typeface="나눔스퀘어 네오 Bold" pitchFamily="34" charset="-120"/>
-              </a:rPr>
-              <a:t>−71%</a:t>
-            </a:r>
-            <a:endParaRPr lang="en-US" sz="3600" dirty="0"/>
-          </a:p>
-        </p:txBody>
-      </p:sp>
-      <p:sp>
-        <p:nvSpPr>
-          <p:cNvPr id="10" name="Text 6"/>
-          <p:cNvSpPr txBox="1"/>
-          <p:nvPr/>
-        </p:nvSpPr>
-        <p:spPr>
-          <a:xfrm>
-            <a:off x="8732520" y="3794760"/>
-            <a:ext cx="2743200" cy="594360"/>
+            <a:off x="8549640" y="4087368"/>
+            <a:ext cx="3063240" cy="457200"/>
           </a:xfrm>
           <a:prstGeom prst="rect">
             <a:avLst/>
@@ -20184,40 +19889,23 @@
               <a:buNone/>
             </a:pPr>
             <a:r>
-              <a:rPr lang="en-US" sz="1200" dirty="0">
+              <a:rPr lang="en-US" sz="900" dirty="0">
                 <a:solidFill>
-                  <a:srgbClr val="FFFFFF"/>
+                  <a:srgbClr val="7A7A7A"/>
                 </a:solidFill>
                 <a:latin typeface="나눔스퀘어 네오 Regular" pitchFamily="34" charset="0"/>
                 <a:ea typeface="나눔스퀘어 네오 Regular" pitchFamily="34" charset="-122"/>
                 <a:cs typeface="나눔스퀘어 네오 Regular" pitchFamily="34" charset="-120"/>
               </a:rPr>
-              <a:t>blink 유휴 전력</a:t>
+              <a:t>Blink 파형: 입력이 끊기면 코어 클록 차단, 새 입력에 다시 켬. 유휴 전력 −71% (유휴 긴 시험 입력 한정)</a:t>
             </a:r>
-            <a:endParaRPr lang="en-US" sz="1200" dirty="0"/>
-          </a:p>
-          <a:p>
-            <a:pPr marL="0" indent="0" eaLnBrk="0">
-              <a:buNone/>
-            </a:pPr>
-            <a:r>
-              <a:rPr lang="en-US" sz="1200" dirty="0">
-                <a:solidFill>
-                  <a:srgbClr val="FFFFFF"/>
-                </a:solidFill>
-                <a:latin typeface="나눔스퀘어 네오 Regular" pitchFamily="34" charset="0"/>
-                <a:ea typeface="나눔스퀘어 네오 Regular" pitchFamily="34" charset="-122"/>
-                <a:cs typeface="나눔스퀘어 네오 Regular" pitchFamily="34" charset="-120"/>
-              </a:rPr>
-              <a:t>(유휴 긴 시험 입력 한정)</a:t>
-            </a:r>
-            <a:endParaRPr lang="en-US" sz="1200" dirty="0"/>
+            <a:endParaRPr lang="en-US" sz="900" dirty="0"/>
           </a:p>
         </p:txBody>
       </p:sp>
       <p:sp>
         <p:nvSpPr>
-          <p:cNvPr id="11" name="Shape 7"/>
+          <p:cNvPr id="10" name="Shape 5"/>
           <p:cNvSpPr/>
           <p:nvPr/>
         </p:nvSpPr>
@@ -20244,7 +19932,7 @@
       </p:sp>
       <p:sp>
         <p:nvSpPr>
-          <p:cNvPr id="12" name="Text 8"/>
+          <p:cNvPr id="11" name="Text 6"/>
           <p:cNvSpPr txBox="1"/>
           <p:nvPr/>
         </p:nvSpPr>
@@ -20283,7 +19971,7 @@
       </p:sp>
       <p:sp>
         <p:nvSpPr>
-          <p:cNvPr id="13" name="Text 9"/>
+          <p:cNvPr id="12" name="Text 7"/>
           <p:cNvSpPr txBox="1"/>
           <p:nvPr/>
         </p:nvSpPr>
@@ -20322,7 +20010,7 @@
       </p:sp>
       <p:sp>
         <p:nvSpPr>
-          <p:cNvPr id="14" name="Text 10"/>
+          <p:cNvPr id="13" name="Text 8"/>
           <p:cNvSpPr txBox="1"/>
           <p:nvPr/>
         </p:nvSpPr>

--- a/submission/REDRED_2차_발표자료_칩S.pptx
+++ b/submission/REDRED_2차_발표자료_칩S.pptx
@@ -173,294 +173,6 @@
                 <a:ea typeface="나눔스퀘어 네오 Regular"/>
                 <a:cs typeface="나눔스퀘어 네오 Regular"/>
               </a:rPr>
-              <a:t>roll 각도 오차 (°): 피벗 위치에 따른 변화</a:t>
-            </a:r>
-          </a:p>
-        </c:rich>
-      </c:tx>
-      <c:overlay val="0"/>
-    </c:title>
-    <c:autoTitleDeleted val="0"/>
-    <c:plotArea>
-      <c:layout/>
-      <c:barChart>
-        <c:barDir val="col"/>
-        <c:grouping val="clustered"/>
-        <c:varyColors val="0"/>
-        <c:ser>
-          <c:idx val="0"/>
-          <c:order val="0"/>
-          <c:tx>
-            <c:strRef>
-              <c:f>Sheet1!$B$1</c:f>
-              <c:strCache>
-                <c:ptCount val="1"/>
-                <c:pt idx="0">
-                  <c:v>roll 각도 오차</c:v>
-                </c:pt>
-              </c:strCache>
-            </c:strRef>
-          </c:tx>
-          <c:spPr>
-            <a:solidFill>
-              <a:srgbClr val="0066CC"/>
-            </a:solidFill>
-            <a:effectLst/>
-          </c:spPr>
-          <c:invertIfNegative val="0"/>
-          <c:dLbls>
-            <c:numFmt formatCode="0.000" sourceLinked="0"/>
-            <c:spPr>
-              <a:noFill/>
-              <a:ln>
-                <a:noFill/>
-              </a:ln>
-              <a:effectLst/>
-            </c:spPr>
-            <c:txPr>
-              <a:bodyPr/>
-              <a:lstStyle/>
-              <a:p>
-                <a:pPr>
-                  <a:defRPr sz="1200" b="0" i="0" u="none" strike="noStrike">
-                    <a:solidFill>
-                      <a:srgbClr val="1D1D1F"/>
-                    </a:solidFill>
-                    <a:latin typeface="나눔스퀘어 네오 Regular"/>
-                    <a:ea typeface="나눔스퀘어 네오 Regular"/>
-                    <a:cs typeface="나눔스퀘어 네오 Regular"/>
-                  </a:defRPr>
-                </a:pPr>
-                <a:endParaRPr lang="ko-KR"/>
-              </a:p>
-            </c:txPr>
-            <c:showLegendKey val="0"/>
-            <c:showVal val="1"/>
-            <c:showCatName val="0"/>
-            <c:showSerName val="0"/>
-            <c:showPercent val="0"/>
-            <c:showBubbleSize val="0"/>
-            <c:showLeaderLines val="0"/>
-            <c:extLst>
-              <c:ext xmlns:c15="http://schemas.microsoft.com/office/drawing/2012/chart" uri="{CE6537A1-D6FC-4f65-9D91-7224C49458BB}">
-                <c15:showLeaderLines val="0"/>
-              </c:ext>
-            </c:extLst>
-          </c:dLbls>
-          <c:cat>
-            <c:strRef>
-              <c:f>Sheet1!$A$2:$A$5</c:f>
-              <c:strCache>
-                <c:ptCount val="4"/>
-                <c:pt idx="0">
-                  <c:v>구한 피벗</c:v>
-                </c:pt>
-                <c:pt idx="1">
-                  <c:v>손으로 맞춘 피벗</c:v>
-                </c:pt>
-                <c:pt idx="2">
-                  <c:v>영상 중심</c:v>
-                </c:pt>
-                <c:pt idx="3">
-                  <c:v>100 px 어긋남</c:v>
-                </c:pt>
-              </c:strCache>
-            </c:strRef>
-          </c:cat>
-          <c:val>
-            <c:numRef>
-              <c:f>Sheet1!$B$2:$B$5</c:f>
-              <c:numCache>
-                <c:formatCode>General</c:formatCode>
-                <c:ptCount val="4"/>
-                <c:pt idx="0">
-                  <c:v>0.40500000000000003</c:v>
-                </c:pt>
-                <c:pt idx="1">
-                  <c:v>0.46700000000000003</c:v>
-                </c:pt>
-                <c:pt idx="2">
-                  <c:v>0.52900000000000003</c:v>
-                </c:pt>
-                <c:pt idx="3">
-                  <c:v>6.7</c:v>
-                </c:pt>
-              </c:numCache>
-            </c:numRef>
-          </c:val>
-          <c:extLst>
-            <c:ext xmlns:c16="http://schemas.microsoft.com/office/drawing/2014/chart" uri="{C3380CC4-5D6E-409C-BE32-E72D297353CC}">
-              <c16:uniqueId val="{00000000-75C8-45C2-A141-FEAE55792859}"/>
-            </c:ext>
-          </c:extLst>
-        </c:ser>
-        <c:dLbls>
-          <c:showLegendKey val="0"/>
-          <c:showVal val="1"/>
-          <c:showCatName val="0"/>
-          <c:showSerName val="0"/>
-          <c:showPercent val="0"/>
-          <c:showBubbleSize val="0"/>
-        </c:dLbls>
-        <c:gapWidth val="60"/>
-        <c:axId val="2094734554"/>
-        <c:axId val="2094734552"/>
-      </c:barChart>
-      <c:catAx>
-        <c:axId val="2094734554"/>
-        <c:scaling>
-          <c:orientation val="minMax"/>
-        </c:scaling>
-        <c:delete val="0"/>
-        <c:axPos val="b"/>
-        <c:numFmt formatCode="General" sourceLinked="1"/>
-        <c:majorTickMark val="out"/>
-        <c:minorTickMark val="none"/>
-        <c:tickLblPos val="low"/>
-        <c:spPr>
-          <a:ln w="12700" cap="flat">
-            <a:solidFill>
-              <a:srgbClr val="888888"/>
-            </a:solidFill>
-            <a:prstDash val="solid"/>
-            <a:round/>
-          </a:ln>
-        </c:spPr>
-        <c:txPr>
-          <a:bodyPr/>
-          <a:lstStyle/>
-          <a:p>
-            <a:pPr>
-              <a:defRPr sz="1200" b="0" i="0" u="none" strike="noStrike">
-                <a:solidFill>
-                  <a:srgbClr val="1D1D1F"/>
-                </a:solidFill>
-                <a:latin typeface="나눔스퀘어 네오 Regular"/>
-                <a:ea typeface="나눔스퀘어 네오 Regular"/>
-                <a:cs typeface="나눔스퀘어 네오 Regular"/>
-              </a:defRPr>
-            </a:pPr>
-            <a:endParaRPr lang="ko-KR"/>
-          </a:p>
-        </c:txPr>
-        <c:crossAx val="2094734552"/>
-        <c:crosses val="autoZero"/>
-        <c:auto val="1"/>
-        <c:lblAlgn val="ctr"/>
-        <c:lblOffset val="100"/>
-        <c:noMultiLvlLbl val="1"/>
-      </c:catAx>
-      <c:valAx>
-        <c:axId val="2094734552"/>
-        <c:scaling>
-          <c:orientation val="minMax"/>
-          <c:max val="8"/>
-          <c:min val="0"/>
-        </c:scaling>
-        <c:delete val="0"/>
-        <c:axPos val="l"/>
-        <c:majorGridlines>
-          <c:spPr>
-            <a:ln w="6350" cap="flat">
-              <a:solidFill>
-                <a:srgbClr val="E8E8ED"/>
-              </a:solidFill>
-              <a:prstDash val="solid"/>
-              <a:round/>
-            </a:ln>
-          </c:spPr>
-        </c:majorGridlines>
-        <c:numFmt formatCode="General" sourceLinked="0"/>
-        <c:majorTickMark val="out"/>
-        <c:minorTickMark val="none"/>
-        <c:tickLblPos val="nextTo"/>
-        <c:spPr>
-          <a:ln w="12700" cap="flat">
-            <a:solidFill>
-              <a:srgbClr val="888888"/>
-            </a:solidFill>
-            <a:prstDash val="solid"/>
-            <a:round/>
-          </a:ln>
-        </c:spPr>
-        <c:txPr>
-          <a:bodyPr/>
-          <a:lstStyle/>
-          <a:p>
-            <a:pPr>
-              <a:defRPr sz="1100" b="0" i="0" u="none" strike="noStrike">
-                <a:solidFill>
-                  <a:srgbClr val="7A7A7A"/>
-                </a:solidFill>
-                <a:latin typeface="나눔스퀘어 네오 Regular"/>
-                <a:ea typeface="나눔스퀘어 네오 Regular"/>
-                <a:cs typeface="나눔스퀘어 네오 Regular"/>
-              </a:defRPr>
-            </a:pPr>
-            <a:endParaRPr lang="ko-KR"/>
-          </a:p>
-        </c:txPr>
-        <c:crossAx val="2094734554"/>
-        <c:crosses val="autoZero"/>
-        <c:crossBetween val="between"/>
-      </c:valAx>
-      <c:spPr>
-        <a:noFill/>
-        <a:ln>
-          <a:noFill/>
-        </a:ln>
-        <a:effectLst/>
-      </c:spPr>
-    </c:plotArea>
-    <c:plotVisOnly val="1"/>
-    <c:dispBlanksAs val="span"/>
-    <c:showDLblsOverMax val="1"/>
-  </c:chart>
-  <c:spPr>
-    <a:noFill/>
-    <a:ln>
-      <a:noFill/>
-    </a:ln>
-    <a:effectLst/>
-  </c:spPr>
-  <c:externalData r:id="rId1">
-    <c:autoUpdate val="0"/>
-  </c:externalData>
-</c:chartSpace>
-</file>
-
-<file path=ppt/charts/chart2.xml><?xml version="1.0" encoding="utf-8"?>
-<c:chartSpace xmlns:c="http://schemas.openxmlformats.org/drawingml/2006/chart" xmlns:a="http://schemas.openxmlformats.org/drawingml/2006/main" xmlns:r="http://schemas.openxmlformats.org/officeDocument/2006/relationships" xmlns:c16r2="http://schemas.microsoft.com/office/drawing/2015/06/chart">
-  <c:date1904 val="0"/>
-  <c:lang val="ko-KR"/>
-  <c:roundedCorners val="1"/>
-  <c:style val="2"/>
-  <c:chart>
-    <c:title>
-      <c:tx>
-        <c:rich>
-          <a:bodyPr/>
-          <a:lstStyle/>
-          <a:p>
-            <a:pPr>
-              <a:defRPr sz="1400" b="0" i="0" u="none" strike="noStrike">
-                <a:solidFill>
-                  <a:srgbClr val="1D1D1F"/>
-                </a:solidFill>
-                <a:latin typeface="나눔스퀘어 네오 Regular"/>
-                <a:ea typeface="나눔스퀘어 네오 Regular"/>
-                <a:cs typeface="나눔스퀘어 네오 Regular"/>
-              </a:defRPr>
-            </a:pPr>
-            <a:r>
-              <a:rPr sz="1400" b="0" i="0" u="none" strike="noStrike">
-                <a:solidFill>
-                  <a:srgbClr val="1D1D1F"/>
-                </a:solidFill>
-                <a:latin typeface="나눔스퀘어 네오 Regular"/>
-                <a:ea typeface="나눔스퀘어 네오 Regular"/>
-                <a:cs typeface="나눔스퀘어 네오 Regular"/>
-              </a:rPr>
               <a:t>정답 있는 합성 장면: 각도 오차 (°)</a:t>
             </a:r>
           </a:p>
@@ -572,7 +284,7 @@
           </c:val>
           <c:extLst>
             <c:ext xmlns:c16="http://schemas.microsoft.com/office/drawing/2014/chart" uri="{C3380CC4-5D6E-409C-BE32-E72D297353CC}">
-              <c16:uniqueId val="{00000000-2601-4DB0-BF9F-ADE7B7A3D8C8}"/>
+              <c16:uniqueId val="{00000000-567E-4D1B-A4E2-454C5C1F7EDD}"/>
             </c:ext>
           </c:extLst>
         </c:ser>
@@ -673,7 +385,7 @@
           </c:val>
           <c:extLst>
             <c:ext xmlns:c16="http://schemas.microsoft.com/office/drawing/2014/chart" uri="{C3380CC4-5D6E-409C-BE32-E72D297353CC}">
-              <c16:uniqueId val="{00000001-2601-4DB0-BF9F-ADE7B7A3D8C8}"/>
+              <c16:uniqueId val="{00000001-567E-4D1B-A4E2-454C5C1F7EDD}"/>
             </c:ext>
           </c:extLst>
         </c:ser>
@@ -774,7 +486,7 @@
           </c:val>
           <c:extLst>
             <c:ext xmlns:c16="http://schemas.microsoft.com/office/drawing/2014/chart" uri="{C3380CC4-5D6E-409C-BE32-E72D297353CC}">
-              <c16:uniqueId val="{00000002-2601-4DB0-BF9F-ADE7B7A3D8C8}"/>
+              <c16:uniqueId val="{00000002-567E-4D1B-A4E2-454C5C1F7EDD}"/>
             </c:ext>
           </c:extLst>
         </c:ser>
@@ -931,7 +643,7 @@
 </c:chartSpace>
 </file>
 
-<file path=ppt/charts/chart3.xml><?xml version="1.0" encoding="utf-8"?>
+<file path=ppt/charts/chart2.xml><?xml version="1.0" encoding="utf-8"?>
 <c:chartSpace xmlns:c="http://schemas.openxmlformats.org/drawingml/2006/chart" xmlns:a="http://schemas.openxmlformats.org/drawingml/2006/main" xmlns:r="http://schemas.openxmlformats.org/officeDocument/2006/relationships" xmlns:c16r2="http://schemas.microsoft.com/office/drawing/2015/06/chart">
   <c:date1904 val="0"/>
   <c:lang val="ko-KR"/>
@@ -1068,7 +780,7 @@
           </c:val>
           <c:extLst>
             <c:ext xmlns:c16="http://schemas.microsoft.com/office/drawing/2014/chart" uri="{C3380CC4-5D6E-409C-BE32-E72D297353CC}">
-              <c16:uniqueId val="{00000000-BE5C-42D0-A23B-DF0728B66C6E}"/>
+              <c16:uniqueId val="{00000000-1E5E-40FC-8073-21241D53B19F}"/>
             </c:ext>
           </c:extLst>
         </c:ser>
@@ -1163,7 +875,7 @@
           </c:val>
           <c:extLst>
             <c:ext xmlns:c16="http://schemas.microsoft.com/office/drawing/2014/chart" uri="{C3380CC4-5D6E-409C-BE32-E72D297353CC}">
-              <c16:uniqueId val="{00000001-BE5C-42D0-A23B-DF0728B66C6E}"/>
+              <c16:uniqueId val="{00000001-1E5E-40FC-8073-21241D53B19F}"/>
             </c:ext>
           </c:extLst>
         </c:ser>
@@ -1320,7 +1032,7 @@
 </c:chartSpace>
 </file>
 
-<file path=ppt/charts/chart4.xml><?xml version="1.0" encoding="utf-8"?>
+<file path=ppt/charts/chart3.xml><?xml version="1.0" encoding="utf-8"?>
 <c:chartSpace xmlns:c="http://schemas.openxmlformats.org/drawingml/2006/chart" xmlns:a="http://schemas.openxmlformats.org/drawingml/2006/main" xmlns:r="http://schemas.openxmlformats.org/officeDocument/2006/relationships" xmlns:c16r2="http://schemas.microsoft.com/office/drawing/2015/06/chart">
   <c:date1904 val="0"/>
   <c:lang val="ko-KR"/>
@@ -1393,7 +1105,7 @@
             <c:bubble3D val="0"/>
             <c:extLst>
               <c:ext xmlns:c16="http://schemas.microsoft.com/office/drawing/2014/chart" uri="{C3380CC4-5D6E-409C-BE32-E72D297353CC}">
-                <c16:uniqueId val="{00000001-77FF-4970-AFBB-18F1692EC76E}"/>
+                <c16:uniqueId val="{00000001-625D-4678-9BB1-BC8BFBF24915}"/>
               </c:ext>
             </c:extLst>
           </c:dPt>
@@ -1409,7 +1121,7 @@
             </c:spPr>
             <c:extLst>
               <c:ext xmlns:c16="http://schemas.microsoft.com/office/drawing/2014/chart" uri="{C3380CC4-5D6E-409C-BE32-E72D297353CC}">
-                <c16:uniqueId val="{00000003-77FF-4970-AFBB-18F1692EC76E}"/>
+                <c16:uniqueId val="{00000003-625D-4678-9BB1-BC8BFBF24915}"/>
               </c:ext>
             </c:extLst>
           </c:dPt>
@@ -1425,7 +1137,7 @@
             </c:spPr>
             <c:extLst>
               <c:ext xmlns:c16="http://schemas.microsoft.com/office/drawing/2014/chart" uri="{C3380CC4-5D6E-409C-BE32-E72D297353CC}">
-                <c16:uniqueId val="{00000005-77FF-4970-AFBB-18F1692EC76E}"/>
+                <c16:uniqueId val="{00000005-625D-4678-9BB1-BC8BFBF24915}"/>
               </c:ext>
             </c:extLst>
           </c:dPt>
@@ -1441,7 +1153,7 @@
             </c:spPr>
             <c:extLst>
               <c:ext xmlns:c16="http://schemas.microsoft.com/office/drawing/2014/chart" uri="{C3380CC4-5D6E-409C-BE32-E72D297353CC}">
-                <c16:uniqueId val="{00000007-77FF-4970-AFBB-18F1692EC76E}"/>
+                <c16:uniqueId val="{00000007-625D-4678-9BB1-BC8BFBF24915}"/>
               </c:ext>
             </c:extLst>
           </c:dPt>
@@ -1527,7 +1239,7 @@
           </c:val>
           <c:extLst>
             <c:ext xmlns:c16="http://schemas.microsoft.com/office/drawing/2014/chart" uri="{C3380CC4-5D6E-409C-BE32-E72D297353CC}">
-              <c16:uniqueId val="{00000008-77FF-4970-AFBB-18F1692EC76E}"/>
+              <c16:uniqueId val="{00000008-625D-4678-9BB1-BC8BFBF24915}"/>
             </c:ext>
           </c:extLst>
         </c:ser>
@@ -1691,7 +1403,7 @@
     </p:spTree>
     <p:extLst>
       <p:ext uri="{BB962C8B-B14F-4D97-AF65-F5344CB8AC3E}">
-        <p14:creationId xmlns:p14="http://schemas.microsoft.com/office/powerpoint/2010/main" val="876522012"/>
+        <p14:creationId xmlns:p14="http://schemas.microsoft.com/office/powerpoint/2010/main" val="234390492"/>
       </p:ext>
     </p:extLst>
   </p:cSld>
@@ -8193,7 +7905,7 @@
                   </a:extLst>
                 </a:gridCol>
               </a:tblGrid>
-              <a:tr h="566928">
+              <a:tr h="420624">
                 <a:tc>
                   <a:txBody>
                     <a:bodyPr/>
@@ -8203,7 +7915,7 @@
                         <a:buNone/>
                       </a:pPr>
                       <a:r>
-                        <a:rPr lang="en-US" sz="1300" dirty="0">
+                        <a:rPr lang="en-US" sz="1200" dirty="0">
                           <a:solidFill>
                             <a:srgbClr val="1D1D1F"/>
                           </a:solidFill>
@@ -8213,7 +7925,7 @@
                         </a:rPr>
                         <a:t>항목</a:t>
                       </a:r>
-                      <a:endParaRPr lang="en-US" sz="1300" dirty="0">
+                      <a:endParaRPr lang="en-US" sz="1200" dirty="0">
                         <a:latin typeface="나눔스퀘어 네오 Regular" charset="0"/>
                         <a:ea typeface="나눔스퀘어 네오 Regular" charset="0"/>
                         <a:cs typeface="나눔스퀘어 네오 Regular" charset="0"/>
@@ -8271,7 +7983,7 @@
                         <a:buNone/>
                       </a:pPr>
                       <a:r>
-                        <a:rPr lang="en-US" sz="1300" dirty="0">
+                        <a:rPr lang="en-US" sz="1200" dirty="0">
                           <a:solidFill>
                             <a:srgbClr val="1D1D1F"/>
                           </a:solidFill>
@@ -8281,7 +7993,7 @@
                         </a:rPr>
                         <a:t>값</a:t>
                       </a:r>
-                      <a:endParaRPr lang="en-US" sz="1300" dirty="0">
+                      <a:endParaRPr lang="en-US" sz="1200" dirty="0">
                         <a:latin typeface="나눔스퀘어 네오 Regular" charset="0"/>
                         <a:ea typeface="나눔스퀘어 네오 Regular" charset="0"/>
                         <a:cs typeface="나눔스퀘어 네오 Regular" charset="0"/>
@@ -8336,7 +8048,7 @@
                   </a:ext>
                 </a:extLst>
               </a:tr>
-              <a:tr h="566928">
+              <a:tr h="420624">
                 <a:tc>
                   <a:txBody>
                     <a:bodyPr/>
@@ -8346,7 +8058,7 @@
                         <a:buNone/>
                       </a:pPr>
                       <a:r>
-                        <a:rPr lang="en-US" sz="1300" dirty="0">
+                        <a:rPr lang="en-US" sz="1200" dirty="0">
                           <a:solidFill>
                             <a:srgbClr val="1D1D1F"/>
                           </a:solidFill>
@@ -8356,7 +8068,7 @@
                         </a:rPr>
                         <a:t>셀</a:t>
                       </a:r>
-                      <a:endParaRPr lang="en-US" sz="1300" dirty="0">
+                      <a:endParaRPr lang="en-US" sz="1200" dirty="0">
                         <a:latin typeface="나눔스퀘어 네오 Regular" charset="0"/>
                         <a:ea typeface="나눔스퀘어 네오 Regular" charset="0"/>
                         <a:cs typeface="나눔스퀘어 네오 Regular" charset="0"/>
@@ -8414,7 +8126,7 @@
                         <a:buNone/>
                       </a:pPr>
                       <a:r>
-                        <a:rPr lang="en-US" sz="1300" dirty="0">
+                        <a:rPr lang="en-US" sz="1200" dirty="0">
                           <a:solidFill>
                             <a:srgbClr val="1D1D1F"/>
                           </a:solidFill>
@@ -8424,7 +8136,7 @@
                         </a:rPr>
                         <a:t>8 px × 8 px = 64 센서 픽셀, 4비트 Morris 로그 카운터 (LFSR16로 확률적 증가), 포화 0%</a:t>
                       </a:r>
-                      <a:endParaRPr lang="en-US" sz="1300" dirty="0">
+                      <a:endParaRPr lang="en-US" sz="1200" dirty="0">
                         <a:latin typeface="나눔스퀘어 네오 Regular" charset="0"/>
                         <a:ea typeface="나눔스퀘어 네오 Regular" charset="0"/>
                         <a:cs typeface="나눔스퀘어 네오 Regular" charset="0"/>
@@ -8479,7 +8191,7 @@
                   </a:ext>
                 </a:extLst>
               </a:tr>
-              <a:tr h="566928">
+              <a:tr h="420624">
                 <a:tc>
                   <a:txBody>
                     <a:bodyPr/>
@@ -8489,7 +8201,7 @@
                         <a:buNone/>
                       </a:pPr>
                       <a:r>
-                        <a:rPr lang="en-US" sz="1300" dirty="0">
+                        <a:rPr lang="en-US" sz="1200" dirty="0">
                           <a:solidFill>
                             <a:srgbClr val="1D1D1F"/>
                           </a:solidFill>
@@ -8499,7 +8211,7 @@
                         </a:rPr>
                         <a:t>뱅크</a:t>
                       </a:r>
-                      <a:endParaRPr lang="en-US" sz="1300" dirty="0">
+                      <a:endParaRPr lang="en-US" sz="1200" dirty="0">
                         <a:latin typeface="나눔스퀘어 네오 Regular" charset="0"/>
                         <a:ea typeface="나눔스퀘어 네오 Regular" charset="0"/>
                         <a:cs typeface="나눔스퀘어 네오 Regular" charset="0"/>
@@ -8557,7 +8269,7 @@
                         <a:buNone/>
                       </a:pPr>
                       <a:r>
-                        <a:rPr lang="en-US" sz="1300" dirty="0">
+                        <a:rPr lang="en-US" sz="1200" dirty="0">
                           <a:solidFill>
                             <a:srgbClr val="1D1D1F"/>
                           </a:solidFill>
@@ -8567,7 +8279,7 @@
                         </a:rPr>
                         <a:t>64×32셀 = 8 kbit 공간 타일 하드매크로. 워드 64비트(4×4셀), 뱅크당 128워드</a:t>
                       </a:r>
-                      <a:endParaRPr lang="en-US" sz="1300" dirty="0">
+                      <a:endParaRPr lang="en-US" sz="1200" dirty="0">
                         <a:latin typeface="나눔스퀘어 네오 Regular" charset="0"/>
                         <a:ea typeface="나눔스퀘어 네오 Regular" charset="0"/>
                         <a:cs typeface="나눔스퀘어 네오 Regular" charset="0"/>
@@ -8622,7 +8334,7 @@
                   </a:ext>
                 </a:extLst>
               </a:tr>
-              <a:tr h="566928">
+              <a:tr h="420624">
                 <a:tc>
                   <a:txBody>
                     <a:bodyPr/>
@@ -8632,7 +8344,7 @@
                         <a:buNone/>
                       </a:pPr>
                       <a:r>
-                        <a:rPr lang="en-US" sz="1300" dirty="0">
+                        <a:rPr lang="en-US" sz="1200" dirty="0">
                           <a:solidFill>
                             <a:srgbClr val="1D1D1F"/>
                           </a:solidFill>
@@ -8642,7 +8354,7 @@
                         </a:rPr>
                         <a:t>월드 크기</a:t>
                       </a:r>
-                      <a:endParaRPr lang="en-US" sz="1300" dirty="0">
+                      <a:endParaRPr lang="en-US" sz="1200" dirty="0">
                         <a:latin typeface="나눔스퀘어 네오 Regular" charset="0"/>
                         <a:ea typeface="나눔스퀘어 네오 Regular" charset="0"/>
                         <a:cs typeface="나눔스퀘어 네오 Regular" charset="0"/>
@@ -8700,7 +8412,7 @@
                         <a:buNone/>
                       </a:pPr>
                       <a:r>
-                        <a:rPr lang="en-US" sz="1300" dirty="0">
+                        <a:rPr lang="en-US" sz="1200" dirty="0">
                           <a:solidFill>
                             <a:srgbClr val="1D1D1F"/>
                           </a:solidFill>
@@ -8710,7 +8422,7 @@
                         </a:rPr>
                         <a:t>roll 180×180셀(1440×1440 px 영역), 칩은 16뱅크 약 131 kbit 사용</a:t>
                       </a:r>
-                      <a:endParaRPr lang="en-US" sz="1300" dirty="0">
+                      <a:endParaRPr lang="en-US" sz="1200" dirty="0">
                         <a:latin typeface="나눔스퀘어 네오 Regular" charset="0"/>
                         <a:ea typeface="나눔스퀘어 네오 Regular" charset="0"/>
                         <a:cs typeface="나눔스퀘어 네오 Regular" charset="0"/>
@@ -8765,7 +8477,7 @@
                   </a:ext>
                 </a:extLst>
               </a:tr>
-              <a:tr h="566928">
+              <a:tr h="420624">
                 <a:tc>
                   <a:txBody>
                     <a:bodyPr/>
@@ -8775,7 +8487,7 @@
                         <a:buNone/>
                       </a:pPr>
                       <a:r>
-                        <a:rPr lang="en-US" sz="1300" dirty="0">
+                        <a:rPr lang="en-US" sz="1200" dirty="0">
                           <a:solidFill>
                             <a:srgbClr val="1D1D1F"/>
                           </a:solidFill>
@@ -8785,7 +8497,7 @@
                         </a:rPr>
                         <a:t>병합 캐시</a:t>
                       </a:r>
-                      <a:endParaRPr lang="en-US" sz="1300" dirty="0">
+                      <a:endParaRPr lang="en-US" sz="1200" dirty="0">
                         <a:latin typeface="나눔스퀘어 네오 Regular" charset="0"/>
                         <a:ea typeface="나눔스퀘어 네오 Regular" charset="0"/>
                         <a:cs typeface="나눔스퀘어 네오 Regular" charset="0"/>
@@ -8843,7 +8555,7 @@
                         <a:buNone/>
                       </a:pPr>
                       <a:r>
-                        <a:rPr lang="en-US" sz="1300" dirty="0">
+                        <a:rPr lang="en-US" sz="1200" dirty="0">
                           <a:solidFill>
                             <a:srgbClr val="1D1D1F"/>
                           </a:solidFill>
@@ -8853,7 +8565,7 @@
                         </a:rPr>
                         <a:t>프레임 단위로 비우는 완전연관 write-back 64칸 — 읽기 14,568회 = 프레임당 서로 다른 워드 수</a:t>
                       </a:r>
-                      <a:endParaRPr lang="en-US" sz="1300" dirty="0">
+                      <a:endParaRPr lang="en-US" sz="1200" dirty="0">
                         <a:latin typeface="나눔스퀘어 네오 Regular" charset="0"/>
                         <a:ea typeface="나눔스퀘어 네오 Regular" charset="0"/>
                         <a:cs typeface="나눔스퀘어 네오 Regular" charset="0"/>
@@ -8908,7 +8620,7 @@
                   </a:ext>
                 </a:extLst>
               </a:tr>
-              <a:tr h="566928">
+              <a:tr h="420624">
                 <a:tc>
                   <a:txBody>
                     <a:bodyPr/>
@@ -8918,7 +8630,7 @@
                         <a:buNone/>
                       </a:pPr>
                       <a:r>
-                        <a:rPr lang="en-US" sz="1300" dirty="0">
+                        <a:rPr lang="en-US" sz="1200" dirty="0">
                           <a:solidFill>
                             <a:srgbClr val="1D1D1F"/>
                           </a:solidFill>
@@ -8928,7 +8640,7 @@
                         </a:rPr>
                         <a:t>뱅크 게이팅</a:t>
                       </a:r>
-                      <a:endParaRPr lang="en-US" sz="1300" dirty="0">
+                      <a:endParaRPr lang="en-US" sz="1200" dirty="0">
                         <a:latin typeface="나눔스퀘어 네오 Regular" charset="0"/>
                         <a:ea typeface="나눔스퀘어 네오 Regular" charset="0"/>
                         <a:cs typeface="나눔스퀘어 네오 Regular" charset="0"/>
@@ -8986,7 +8698,7 @@
                         <a:buNone/>
                       </a:pPr>
                       <a:r>
-                        <a:rPr lang="en-US" sz="1300" dirty="0">
+                        <a:rPr lang="en-US" sz="1200" dirty="0">
                           <a:solidFill>
                             <a:srgbClr val="1D1D1F"/>
                           </a:solidFill>
@@ -8996,7 +8708,7 @@
                         </a:rPr>
                         <a:t>시야 밑 뱅크만 클록 활성 (roll 약 71%, pan 약 41%)</a:t>
                       </a:r>
-                      <a:endParaRPr lang="en-US" sz="1300" dirty="0">
+                      <a:endParaRPr lang="en-US" sz="1200" dirty="0">
                         <a:latin typeface="나눔스퀘어 네오 Regular" charset="0"/>
                         <a:ea typeface="나눔스퀘어 네오 Regular" charset="0"/>
                         <a:cs typeface="나눔스퀘어 네오 Regular" charset="0"/>
@@ -9223,43 +8935,40 @@
           </a:p>
         </p:txBody>
       </p:sp>
+      <p:pic>
+        <p:nvPicPr>
+          <p:cNvPr id="10" name="Image 1" descr="C:\SNU\포트폴리오\전국AI반도체경진대회\submission\figs\chip_bank_hist.png"/>
+          <p:cNvPicPr>
+            <a:picLocks noChangeAspect="1"/>
+          </p:cNvPicPr>
+          <p:nvPr/>
+        </p:nvPicPr>
+        <p:blipFill>
+          <a:blip r:embed="rId4"/>
+          <a:stretch>
+            <a:fillRect/>
+          </a:stretch>
+        </p:blipFill>
+        <p:spPr>
+          <a:xfrm>
+            <a:off x="548640" y="4069080"/>
+            <a:ext cx="6949440" cy="1938528"/>
+          </a:xfrm>
+          <a:prstGeom prst="rect">
+            <a:avLst/>
+          </a:prstGeom>
+        </p:spPr>
+      </p:pic>
       <p:sp>
         <p:nvSpPr>
-          <p:cNvPr id="10" name="Shape 5"/>
-          <p:cNvSpPr/>
-          <p:nvPr/>
-        </p:nvSpPr>
-        <p:spPr>
-          <a:xfrm>
-            <a:off x="548640" y="5074920"/>
-            <a:ext cx="6949440" cy="1234440"/>
-          </a:xfrm>
-          <a:prstGeom prst="roundRect">
-            <a:avLst>
-              <a:gd name="adj" fmla="val 8889"/>
-            </a:avLst>
-          </a:prstGeom>
-          <a:solidFill>
-            <a:srgbClr val="F5F5F7"/>
-          </a:solidFill>
-          <a:ln w="9525">
-            <a:solidFill>
-              <a:srgbClr val="E0E0E0"/>
-            </a:solidFill>
-            <a:prstDash val="solid"/>
-          </a:ln>
-        </p:spPr>
-      </p:sp>
-      <p:sp>
-        <p:nvSpPr>
-          <p:cNvPr id="11" name="Text 6"/>
+          <p:cNvPr id="11" name="Text 5"/>
           <p:cNvSpPr txBox="1"/>
           <p:nvPr/>
         </p:nvSpPr>
         <p:spPr>
           <a:xfrm>
-            <a:off x="731520" y="5212080"/>
-            <a:ext cx="6583680" cy="365760"/>
+            <a:off x="548640" y="6035040"/>
+            <a:ext cx="6949440" cy="365760"/>
           </a:xfrm>
           <a:prstGeom prst="rect">
             <a:avLst/>
@@ -9275,56 +8984,17 @@
               <a:buNone/>
             </a:pPr>
             <a:r>
-              <a:rPr lang="en-US" sz="1600" dirty="0">
+              <a:rPr lang="en-US" sz="1100" dirty="0">
                 <a:solidFill>
-                  <a:srgbClr val="0066CC"/>
-                </a:solidFill>
-                <a:latin typeface="나눔스퀘어 네오 Bold" pitchFamily="34" charset="0"/>
-                <a:ea typeface="나눔스퀘어 네오 Bold" pitchFamily="34" charset="-122"/>
-                <a:cs typeface="나눔스퀘어 네오 Bold" pitchFamily="34" charset="-120"/>
-              </a:rPr>
-              <a:t>정직한 한계</a:t>
-            </a:r>
-            <a:endParaRPr lang="en-US" sz="1600" dirty="0"/>
-          </a:p>
-        </p:txBody>
-      </p:sp>
-      <p:sp>
-        <p:nvSpPr>
-          <p:cNvPr id="12" name="Text 7"/>
-          <p:cNvSpPr txBox="1"/>
-          <p:nvPr/>
-        </p:nvSpPr>
-        <p:spPr>
-          <a:xfrm>
-            <a:off x="731520" y="5623560"/>
-            <a:ext cx="6583680" cy="548640"/>
-          </a:xfrm>
-          <a:prstGeom prst="rect">
-            <a:avLst/>
-          </a:prstGeom>
-          <a:noFill/>
-          <a:ln/>
-        </p:spPr>
-        <p:txBody>
-          <a:bodyPr wrap="square" lIns="0" tIns="0" rIns="0" bIns="0" rtlCol="0" anchor="t"/>
-          <a:lstStyle/>
-          <a:p>
-            <a:pPr marL="0" indent="0" eaLnBrk="0">
-              <a:buNone/>
-            </a:pPr>
-            <a:r>
-              <a:rPr lang="en-US" sz="1300" dirty="0">
-                <a:solidFill>
-                  <a:srgbClr val="1D1D1F"/>
+                  <a:srgbClr val="7A7A7A"/>
                 </a:solidFill>
                 <a:latin typeface="나눔스퀘어 네오 Regular" pitchFamily="34" charset="0"/>
                 <a:ea typeface="나눔스퀘어 네오 Regular" pitchFamily="34" charset="-122"/>
                 <a:cs typeface="나눔스퀘어 네오 Regular" pitchFamily="34" charset="-120"/>
               </a:rPr>
-              <a:t>교육용 PDK에는 SRAM 매크로가 없어 FF 기반이다. 비트당 약 11.8 µm²라 큰 월드로 가려면 SRAM이 필요하다.</a:t>
+              <a:t>한계: 교육용 PDK에는 SRAM 매크로가 없어 FF 기반(비트당 약 11.8 µm²). 큰 월드로 가려면 SRAM이 필요하다.</a:t>
             </a:r>
-            <a:endParaRPr lang="en-US" sz="1300" dirty="0"/>
+            <a:endParaRPr lang="en-US" sz="1100" dirty="0"/>
           </a:p>
         </p:txBody>
       </p:sp>
@@ -22558,7 +22228,7 @@
                   </a:extLst>
                 </a:gridCol>
               </a:tblGrid>
-              <a:tr h="566928">
+              <a:tr h="365760">
                 <a:tc>
                   <a:txBody>
                     <a:bodyPr/>
@@ -22568,7 +22238,7 @@
                         <a:buNone/>
                       </a:pPr>
                       <a:r>
-                        <a:rPr lang="en-US" sz="1400" dirty="0">
+                        <a:rPr lang="en-US" sz="1200" dirty="0">
                           <a:solidFill>
                             <a:srgbClr val="1D1D1F"/>
                           </a:solidFill>
@@ -22578,7 +22248,7 @@
                         </a:rPr>
                         <a:t>항목</a:t>
                       </a:r>
-                      <a:endParaRPr lang="en-US" sz="1400" dirty="0">
+                      <a:endParaRPr lang="en-US" sz="1200" dirty="0">
                         <a:latin typeface="나눔스퀘어 네오 Regular" charset="0"/>
                         <a:ea typeface="나눔스퀘어 네오 Regular" charset="0"/>
                         <a:cs typeface="나눔스퀘어 네오 Regular" charset="0"/>
@@ -22636,7 +22306,7 @@
                         <a:buNone/>
                       </a:pPr>
                       <a:r>
-                        <a:rPr lang="en-US" sz="1400" dirty="0">
+                        <a:rPr lang="en-US" sz="1200" dirty="0">
                           <a:solidFill>
                             <a:srgbClr val="1D1D1F"/>
                           </a:solidFill>
@@ -22646,7 +22316,7 @@
                         </a:rPr>
                         <a:t>내용</a:t>
                       </a:r>
-                      <a:endParaRPr lang="en-US" sz="1400" dirty="0">
+                      <a:endParaRPr lang="en-US" sz="1200" dirty="0">
                         <a:latin typeface="나눔스퀘어 네오 Regular" charset="0"/>
                         <a:ea typeface="나눔스퀘어 네오 Regular" charset="0"/>
                         <a:cs typeface="나눔스퀘어 네오 Regular" charset="0"/>
@@ -22701,7 +22371,7 @@
                   </a:ext>
                 </a:extLst>
               </a:tr>
-              <a:tr h="566928">
+              <a:tr h="365760">
                 <a:tc>
                   <a:txBody>
                     <a:bodyPr/>
@@ -22711,7 +22381,7 @@
                         <a:buNone/>
                       </a:pPr>
                       <a:r>
-                        <a:rPr lang="en-US" sz="1400" dirty="0">
+                        <a:rPr lang="en-US" sz="1200" dirty="0">
                           <a:solidFill>
                             <a:srgbClr val="1D1D1F"/>
                           </a:solidFill>
@@ -22721,7 +22391,7 @@
                         </a:rPr>
                         <a:t>형식</a:t>
                       </a:r>
-                      <a:endParaRPr lang="en-US" sz="1400" dirty="0">
+                      <a:endParaRPr lang="en-US" sz="1200" dirty="0">
                         <a:latin typeface="나눔스퀘어 네오 Regular" charset="0"/>
                         <a:ea typeface="나눔스퀘어 네오 Regular" charset="0"/>
                         <a:cs typeface="나눔스퀘어 네오 Regular" charset="0"/>
@@ -22779,7 +22449,7 @@
                         <a:buNone/>
                       </a:pPr>
                       <a:r>
-                        <a:rPr lang="en-US" sz="1400" dirty="0">
+                        <a:rPr lang="en-US" sz="1200" dirty="0">
                           <a:solidFill>
                             <a:srgbClr val="1D1D1F"/>
                           </a:solidFill>
@@ -22789,7 +22459,7 @@
                         </a:rPr>
                         <a:t>Samsung S5KRC1S group AER. 이벤트 워드 1개 = 최대 16픽셀(8행 그룹 ×2), 컬럼 주소는 컬럼당 1회, 타임스탬프는 프레임당 1개</a:t>
                       </a:r>
-                      <a:endParaRPr lang="en-US" sz="1400" dirty="0">
+                      <a:endParaRPr lang="en-US" sz="1200" dirty="0">
                         <a:latin typeface="나눔스퀘어 네오 Regular" charset="0"/>
                         <a:ea typeface="나눔스퀘어 네오 Regular" charset="0"/>
                         <a:cs typeface="나눔스퀘어 네오 Regular" charset="0"/>
@@ -22844,7 +22514,7 @@
                   </a:ext>
                 </a:extLst>
               </a:tr>
-              <a:tr h="566928">
+              <a:tr h="365760">
                 <a:tc>
                   <a:txBody>
                     <a:bodyPr/>
@@ -22854,7 +22524,7 @@
                         <a:buNone/>
                       </a:pPr>
                       <a:r>
-                        <a:rPr lang="en-US" sz="1400" dirty="0">
+                        <a:rPr lang="en-US" sz="1200" dirty="0">
                           <a:solidFill>
                             <a:srgbClr val="1D1D1F"/>
                           </a:solidFill>
@@ -22864,7 +22534,7 @@
                         </a:rPr>
                         <a:t>프레임 주기</a:t>
                       </a:r>
-                      <a:endParaRPr lang="en-US" sz="1400" dirty="0">
+                      <a:endParaRPr lang="en-US" sz="1200" dirty="0">
                         <a:latin typeface="나눔스퀘어 네오 Regular" charset="0"/>
                         <a:ea typeface="나눔스퀘어 네오 Regular" charset="0"/>
                         <a:cs typeface="나눔스퀘어 네오 Regular" charset="0"/>
@@ -22922,7 +22592,7 @@
                         <a:buNone/>
                       </a:pPr>
                       <a:r>
-                        <a:rPr lang="en-US" sz="1400" dirty="0">
+                        <a:rPr lang="en-US" sz="1200" dirty="0">
                           <a:solidFill>
                             <a:srgbClr val="1D1D1F"/>
                           </a:solidFill>
@@ -22932,7 +22602,7 @@
                         </a:rPr>
                         <a:t>773 µs (약 1,294 fps) — "1000 fps"가 아님을 실측으로 확인</a:t>
                       </a:r>
-                      <a:endParaRPr lang="en-US" sz="1400" dirty="0">
+                      <a:endParaRPr lang="en-US" sz="1200" dirty="0">
                         <a:latin typeface="나눔스퀘어 네오 Regular" charset="0"/>
                         <a:ea typeface="나눔스퀘어 네오 Regular" charset="0"/>
                         <a:cs typeface="나눔스퀘어 네오 Regular" charset="0"/>
@@ -22987,7 +22657,7 @@
                   </a:ext>
                 </a:extLst>
               </a:tr>
-              <a:tr h="566928">
+              <a:tr h="365760">
                 <a:tc>
                   <a:txBody>
                     <a:bodyPr/>
@@ -22997,7 +22667,7 @@
                         <a:buNone/>
                       </a:pPr>
                       <a:r>
-                        <a:rPr lang="en-US" sz="1400" dirty="0">
+                        <a:rPr lang="en-US" sz="1200" dirty="0">
                           <a:solidFill>
                             <a:srgbClr val="1D1D1F"/>
                           </a:solidFill>
@@ -23007,7 +22677,7 @@
                         </a:rPr>
                         <a:t>roll 녹화 (9/22)</a:t>
                       </a:r>
-                      <a:endParaRPr lang="en-US" sz="1400" dirty="0">
+                      <a:endParaRPr lang="en-US" sz="1200" dirty="0">
                         <a:latin typeface="나눔스퀘어 네오 Regular" charset="0"/>
                         <a:ea typeface="나눔스퀘어 네오 Regular" charset="0"/>
                         <a:cs typeface="나눔스퀘어 네오 Regular" charset="0"/>
@@ -23065,7 +22735,7 @@
                         <a:buNone/>
                       </a:pPr>
                       <a:r>
-                        <a:rPr lang="en-US" sz="1400" dirty="0">
+                        <a:rPr lang="en-US" sz="1200" dirty="0">
                           <a:solidFill>
                             <a:srgbClr val="1D1D1F"/>
                           </a:solidFill>
@@ -23075,7 +22745,7 @@
                         </a:rPr>
                         <a:t>7,534만 이벤트, 약 2,060프레임, 총 회전 323°</a:t>
                       </a:r>
-                      <a:endParaRPr lang="en-US" sz="1400" dirty="0">
+                      <a:endParaRPr lang="en-US" sz="1200" dirty="0">
                         <a:latin typeface="나눔스퀘어 네오 Regular" charset="0"/>
                         <a:ea typeface="나눔스퀘어 네오 Regular" charset="0"/>
                         <a:cs typeface="나눔스퀘어 네오 Regular" charset="0"/>
@@ -23130,7 +22800,7 @@
                   </a:ext>
                 </a:extLst>
               </a:tr>
-              <a:tr h="566928">
+              <a:tr h="365760">
                 <a:tc>
                   <a:txBody>
                     <a:bodyPr/>
@@ -23140,7 +22810,7 @@
                         <a:buNone/>
                       </a:pPr>
                       <a:r>
-                        <a:rPr lang="en-US" sz="1400" dirty="0">
+                        <a:rPr lang="en-US" sz="1200" dirty="0">
                           <a:solidFill>
                             <a:srgbClr val="1D1D1F"/>
                           </a:solidFill>
@@ -23150,7 +22820,7 @@
                         </a:rPr>
                         <a:t>pan 녹화 (9/15)</a:t>
                       </a:r>
-                      <a:endParaRPr lang="en-US" sz="1400" dirty="0">
+                      <a:endParaRPr lang="en-US" sz="1200" dirty="0">
                         <a:latin typeface="나눔스퀘어 네오 Regular" charset="0"/>
                         <a:ea typeface="나눔스퀘어 네오 Regular" charset="0"/>
                         <a:cs typeface="나눔스퀘어 네오 Regular" charset="0"/>
@@ -23208,7 +22878,7 @@
                         <a:buNone/>
                       </a:pPr>
                       <a:r>
-                        <a:rPr lang="en-US" sz="1400" dirty="0">
+                        <a:rPr lang="en-US" sz="1200" dirty="0">
                           <a:solidFill>
                             <a:srgbClr val="1D1D1F"/>
                           </a:solidFill>
@@ -23218,7 +22888,7 @@
                         </a:rPr>
                         <a:t>8,678만 이벤트, 수평 이동 1,680 px</a:t>
                       </a:r>
-                      <a:endParaRPr lang="en-US" sz="1400" dirty="0">
+                      <a:endParaRPr lang="en-US" sz="1200" dirty="0">
                         <a:latin typeface="나눔스퀘어 네오 Regular" charset="0"/>
                         <a:ea typeface="나눔스퀘어 네오 Regular" charset="0"/>
                         <a:cs typeface="나눔스퀘어 네오 Regular" charset="0"/>
@@ -23273,7 +22943,7 @@
                   </a:ext>
                 </a:extLst>
               </a:tr>
-              <a:tr h="566928">
+              <a:tr h="365760">
                 <a:tc>
                   <a:txBody>
                     <a:bodyPr/>
@@ -23283,7 +22953,7 @@
                         <a:buNone/>
                       </a:pPr>
                       <a:r>
-                        <a:rPr lang="en-US" sz="1400" dirty="0">
+                        <a:rPr lang="en-US" sz="1200" dirty="0">
                           <a:solidFill>
                             <a:srgbClr val="1D1D1F"/>
                           </a:solidFill>
@@ -23293,7 +22963,7 @@
                         </a:rPr>
                         <a:t>정답</a:t>
                       </a:r>
-                      <a:endParaRPr lang="en-US" sz="1400" dirty="0">
+                      <a:endParaRPr lang="en-US" sz="1200" dirty="0">
                         <a:latin typeface="나눔스퀘어 네오 Regular" charset="0"/>
                         <a:ea typeface="나눔스퀘어 네오 Regular" charset="0"/>
                         <a:cs typeface="나눔스퀘어 네오 Regular" charset="0"/>
@@ -23351,7 +23021,7 @@
                         <a:buNone/>
                       </a:pPr>
                       <a:r>
-                        <a:rPr lang="en-US" sz="1400" dirty="0">
+                        <a:rPr lang="en-US" sz="1200" dirty="0">
                           <a:solidFill>
                             <a:srgbClr val="1D1D1F"/>
                           </a:solidFill>
@@ -23361,7 +23031,7 @@
                         </a:rPr>
                         <a:t>없음 → 4프레임 창을 유클리드 ECC로 정합한 각도를 정답 대용으로 사용</a:t>
                       </a:r>
-                      <a:endParaRPr lang="en-US" sz="1400" dirty="0">
+                      <a:endParaRPr lang="en-US" sz="1200" dirty="0">
                         <a:latin typeface="나눔스퀘어 네오 Regular" charset="0"/>
                         <a:ea typeface="나눔스퀘어 네오 Regular" charset="0"/>
                         <a:cs typeface="나눔스퀘어 네오 Regular" charset="0"/>
@@ -23416,7 +23086,7 @@
                   </a:ext>
                 </a:extLst>
               </a:tr>
-              <a:tr h="566928">
+              <a:tr h="365760">
                 <a:tc>
                   <a:txBody>
                     <a:bodyPr/>
@@ -23426,7 +23096,7 @@
                         <a:buNone/>
                       </a:pPr>
                       <a:r>
-                        <a:rPr lang="en-US" sz="1400" dirty="0">
+                        <a:rPr lang="en-US" sz="1200" dirty="0">
                           <a:solidFill>
                             <a:srgbClr val="1D1D1F"/>
                           </a:solidFill>
@@ -23436,7 +23106,7 @@
                         </a:rPr>
                         <a:t>외부 벤치마크</a:t>
                       </a:r>
-                      <a:endParaRPr lang="en-US" sz="1400" dirty="0">
+                      <a:endParaRPr lang="en-US" sz="1200" dirty="0">
                         <a:latin typeface="나눔스퀘어 네오 Regular" charset="0"/>
                         <a:ea typeface="나눔스퀘어 네오 Regular" charset="0"/>
                         <a:cs typeface="나눔스퀘어 네오 Regular" charset="0"/>
@@ -23494,7 +23164,7 @@
                         <a:buNone/>
                       </a:pPr>
                       <a:r>
-                        <a:rPr lang="en-US" sz="1400" dirty="0">
+                        <a:rPr lang="en-US" sz="1200" dirty="0">
                           <a:solidFill>
                             <a:srgbClr val="1D1D1F"/>
                           </a:solidFill>
@@ -23504,7 +23174,7 @@
                         </a:rPr>
                         <a:t>UZH 회전 시퀀스(IMU·모캡 정답)를 같은 group AER 워드로 다시 부호화해 같은 디코더로 통과</a:t>
                       </a:r>
-                      <a:endParaRPr lang="en-US" sz="1400" dirty="0">
+                      <a:endParaRPr lang="en-US" sz="1200" dirty="0">
                         <a:latin typeface="나눔스퀘어 네오 Regular" charset="0"/>
                         <a:ea typeface="나눔스퀘어 네오 Regular" charset="0"/>
                         <a:cs typeface="나눔스퀘어 네오 Regular" charset="0"/>
@@ -23571,12 +23241,12 @@
         </p:nvSpPr>
         <p:spPr>
           <a:xfrm>
-            <a:off x="548640" y="5440680"/>
-            <a:ext cx="11064240" cy="868680"/>
+            <a:off x="548640" y="4206240"/>
+            <a:ext cx="6492240" cy="2103120"/>
           </a:xfrm>
           <a:prstGeom prst="roundRect">
             <a:avLst>
-              <a:gd name="adj" fmla="val 12632"/>
+              <a:gd name="adj" fmla="val 5217"/>
             </a:avLst>
           </a:prstGeom>
           <a:solidFill>
@@ -23598,8 +23268,8 @@
         </p:nvSpPr>
         <p:spPr>
           <a:xfrm>
-            <a:off x="731520" y="5577840"/>
-            <a:ext cx="10698480" cy="365760"/>
+            <a:off x="731520" y="4343400"/>
+            <a:ext cx="6126480" cy="365760"/>
           </a:xfrm>
           <a:prstGeom prst="rect">
             <a:avLst/>
@@ -23637,8 +23307,8 @@
         </p:nvSpPr>
         <p:spPr>
           <a:xfrm>
-            <a:off x="731520" y="5989320"/>
-            <a:ext cx="10698480" cy="274320"/>
+            <a:off x="731520" y="4754880"/>
+            <a:ext cx="6126480" cy="1417320"/>
           </a:xfrm>
           <a:prstGeom prst="rect">
             <a:avLst/>
@@ -23654,7 +23324,7 @@
               <a:buNone/>
             </a:pPr>
             <a:r>
-              <a:rPr lang="en-US" sz="1400" dirty="0">
+              <a:rPr lang="en-US" sz="1300" dirty="0">
                 <a:solidFill>
                   <a:srgbClr val="1D1D1F"/>
                 </a:solidFill>
@@ -23664,10 +23334,51 @@
               </a:rPr>
               <a:t>데이터 형식을 풀어서 칩의 디코더가 센서 원본 워드를 그대로 받는다 — 전처리용 변환기 없이 센서에 바로 붙는 구조.</a:t>
             </a:r>
-            <a:endParaRPr lang="en-US" sz="1400" dirty="0"/>
+            <a:endParaRPr lang="en-US" sz="1300" dirty="0"/>
+          </a:p>
+          <a:p>
+            <a:pPr marL="0" indent="0" eaLnBrk="0">
+              <a:buNone/>
+            </a:pPr>
+            <a:r>
+              <a:rPr lang="en-US" sz="1300" dirty="0">
+                <a:solidFill>
+                  <a:srgbClr val="1D1D1F"/>
+                </a:solidFill>
+                <a:latin typeface="나눔스퀘어 네오 Regular" pitchFamily="34" charset="0"/>
+                <a:ea typeface="나눔스퀘어 네오 Regular" pitchFamily="34" charset="-122"/>
+                <a:cs typeface="나눔스퀘어 네오 Regular" pitchFamily="34" charset="-120"/>
+              </a:rPr>
+              <a:t>입력은 회전 중에 프레임당 수십만~수백만 이벤트가 몰리는 실제 센서 데이터다 (오른쪽: roll 녹화 100 ms 간격 이벤트 프레임).</a:t>
+            </a:r>
+            <a:endParaRPr lang="en-US" sz="1300" dirty="0"/>
           </a:p>
         </p:txBody>
       </p:sp>
+      <p:pic>
+        <p:nvPicPr>
+          <p:cNvPr id="8" name="Image 0" descr="C:\SNU\포트폴리오\전국AI반도체경진대회\submission\figs\raw_frames_roll.png"/>
+          <p:cNvPicPr>
+            <a:picLocks noChangeAspect="1"/>
+          </p:cNvPicPr>
+          <p:nvPr/>
+        </p:nvPicPr>
+        <p:blipFill>
+          <a:blip r:embed="rId3"/>
+          <a:stretch>
+            <a:fillRect/>
+          </a:stretch>
+        </p:blipFill>
+        <p:spPr>
+          <a:xfrm>
+            <a:off x="7269480" y="4160520"/>
+            <a:ext cx="4343400" cy="2240280"/>
+          </a:xfrm>
+          <a:prstGeom prst="rect">
+            <a:avLst/>
+          </a:prstGeom>
+        </p:spPr>
+      </p:pic>
       <p:sp>
         <p:nvSpPr>
           <p:cNvPr id="25" name="Slide Number Placeholder 0"/>
@@ -28301,7 +28012,7 @@
                   </a:extLst>
                 </a:gridCol>
               </a:tblGrid>
-              <a:tr h="457200">
+              <a:tr h="411480">
                 <a:tc>
                   <a:txBody>
                     <a:bodyPr/>
@@ -28580,7 +28291,7 @@
                   </a:ext>
                 </a:extLst>
               </a:tr>
-              <a:tr h="457200">
+              <a:tr h="411480">
                 <a:tc>
                   <a:txBody>
                     <a:bodyPr/>
@@ -28859,7 +28570,7 @@
                   </a:ext>
                 </a:extLst>
               </a:tr>
-              <a:tr h="457200">
+              <a:tr h="411480">
                 <a:tc>
                   <a:txBody>
                     <a:bodyPr/>
@@ -29138,7 +28849,7 @@
                   </a:ext>
                 </a:extLst>
               </a:tr>
-              <a:tr h="457200">
+              <a:tr h="411480">
                 <a:tc>
                   <a:txBody>
                     <a:bodyPr/>
@@ -29417,7 +29128,7 @@
                   </a:ext>
                 </a:extLst>
               </a:tr>
-              <a:tr h="457200">
+              <a:tr h="411480">
                 <a:tc>
                   <a:txBody>
                     <a:bodyPr/>
@@ -29700,22 +29411,30 @@
           </a:graphicData>
         </a:graphic>
       </p:graphicFrame>
-      <p:graphicFrame>
-        <p:nvGraphicFramePr>
-          <p:cNvPr id="5" name="Chart 0"/>
-          <p:cNvGraphicFramePr/>
+      <p:pic>
+        <p:nvPicPr>
+          <p:cNvPr id="5" name="Image 0" descr="C:\SNU\포트폴리오\전국AI반도체경진대회\submission\figs\chip_theta_vs_ecc.png"/>
+          <p:cNvPicPr>
+            <a:picLocks noChangeAspect="1"/>
+          </p:cNvPicPr>
           <p:nvPr/>
-        </p:nvGraphicFramePr>
-        <p:xfrm>
-          <a:off x="548640" y="3840480"/>
-          <a:ext cx="5852160" cy="2560320"/>
-        </p:xfrm>
-        <a:graphic>
-          <a:graphicData uri="http://schemas.openxmlformats.org/drawingml/2006/chart">
-            <c:chart xmlns:c="http://schemas.openxmlformats.org/drawingml/2006/chart" xmlns:r="http://schemas.openxmlformats.org/officeDocument/2006/relationships" r:id="rId3"/>
-          </a:graphicData>
-        </a:graphic>
-      </p:graphicFrame>
+        </p:nvPicPr>
+        <p:blipFill>
+          <a:blip r:embed="rId3"/>
+          <a:stretch>
+            <a:fillRect/>
+          </a:stretch>
+        </p:blipFill>
+        <p:spPr>
+          <a:xfrm>
+            <a:off x="548640" y="3657600"/>
+            <a:ext cx="7772400" cy="2569464"/>
+          </a:xfrm>
+          <a:prstGeom prst="rect">
+            <a:avLst/>
+          </a:prstGeom>
+        </p:spPr>
+      </p:pic>
       <p:sp>
         <p:nvSpPr>
           <p:cNvPr id="6" name="Shape 1"/>
@@ -29724,12 +29443,12 @@
         </p:nvSpPr>
         <p:spPr>
           <a:xfrm>
-            <a:off x="6675120" y="3931920"/>
-            <a:ext cx="4937760" cy="1097280"/>
+            <a:off x="8503920" y="3657600"/>
+            <a:ext cx="3108960" cy="1280160"/>
           </a:xfrm>
           <a:prstGeom prst="roundRect">
             <a:avLst>
-              <a:gd name="adj" fmla="val 10000"/>
+              <a:gd name="adj" fmla="val 8571"/>
             </a:avLst>
           </a:prstGeom>
           <a:solidFill>
@@ -29751,8 +29470,8 @@
         </p:nvSpPr>
         <p:spPr>
           <a:xfrm>
-            <a:off x="6858000" y="4069080"/>
-            <a:ext cx="4572000" cy="365760"/>
+            <a:off x="8686800" y="3794760"/>
+            <a:ext cx="2743200" cy="365760"/>
           </a:xfrm>
           <a:prstGeom prst="rect">
             <a:avLst/>
@@ -29790,8 +29509,8 @@
         </p:nvSpPr>
         <p:spPr>
           <a:xfrm>
-            <a:off x="6858000" y="4480560"/>
-            <a:ext cx="4572000" cy="411480"/>
+            <a:off x="8686800" y="4206240"/>
+            <a:ext cx="2743200" cy="594360"/>
           </a:xfrm>
           <a:prstGeom prst="rect">
             <a:avLst/>
@@ -29807,7 +29526,7 @@
               <a:buNone/>
             </a:pPr>
             <a:r>
-              <a:rPr lang="en-US" sz="1200" dirty="0">
+              <a:rPr lang="en-US" sz="1100" dirty="0">
                 <a:solidFill>
                   <a:srgbClr val="1D1D1F"/>
                 </a:solidFill>
@@ -29817,7 +29536,7 @@
               </a:rPr>
               <a:t>정답이 ECC 체인이라 그 자체의 오차가 섞여 있다. 교수 데이터와 UZH 정확도는 서로 직접 비교하면 안 된다.</a:t>
             </a:r>
-            <a:endParaRPr lang="en-US" sz="1200" dirty="0"/>
+            <a:endParaRPr lang="en-US" sz="1100" dirty="0"/>
           </a:p>
         </p:txBody>
       </p:sp>
@@ -29829,12 +29548,12 @@
         </p:nvSpPr>
         <p:spPr>
           <a:xfrm>
-            <a:off x="6675120" y="5120640"/>
-            <a:ext cx="4937760" cy="1234440"/>
+            <a:off x="8503920" y="5029200"/>
+            <a:ext cx="3108960" cy="1280160"/>
           </a:xfrm>
           <a:prstGeom prst="roundRect">
             <a:avLst>
-              <a:gd name="adj" fmla="val 8889"/>
+              <a:gd name="adj" fmla="val 8571"/>
             </a:avLst>
           </a:prstGeom>
           <a:solidFill>
@@ -29856,8 +29575,8 @@
         </p:nvSpPr>
         <p:spPr>
           <a:xfrm>
-            <a:off x="6858000" y="5257800"/>
-            <a:ext cx="4572000" cy="365760"/>
+            <a:off x="8686800" y="5166360"/>
+            <a:ext cx="2743200" cy="365760"/>
           </a:xfrm>
           <a:prstGeom prst="rect">
             <a:avLst/>
@@ -29895,8 +29614,8 @@
         </p:nvSpPr>
         <p:spPr>
           <a:xfrm>
-            <a:off x="6858000" y="5669280"/>
-            <a:ext cx="4572000" cy="548640"/>
+            <a:off x="8686800" y="5577840"/>
+            <a:ext cx="2743200" cy="594360"/>
           </a:xfrm>
           <a:prstGeom prst="rect">
             <a:avLst/>
@@ -29912,7 +29631,7 @@
               <a:buNone/>
             </a:pPr>
             <a:r>
-              <a:rPr lang="en-US" sz="1200" dirty="0">
+              <a:rPr lang="en-US" sz="1100" dirty="0">
                 <a:solidFill>
                   <a:srgbClr val="1D1D1F"/>
                 </a:solidFill>
@@ -29922,7 +29641,7 @@
               </a:rPr>
               <a:t>빠른 3축 회전에서 추적을 잃으면 도형이 여러 벌로 복제된다. 키프레임·월드 앵커로 줄였지만 완전히 풀지는 못했다.</a:t>
             </a:r>
-            <a:endParaRPr lang="en-US" sz="1200" dirty="0"/>
+            <a:endParaRPr lang="en-US" sz="1100" dirty="0"/>
           </a:p>
         </p:txBody>
       </p:sp>
@@ -30056,8 +29775,32 @@
         </p:blipFill>
         <p:spPr>
           <a:xfrm>
-            <a:off x="868680" y="1234440"/>
-            <a:ext cx="10424160" cy="3895344"/>
+            <a:off x="548640" y="1234440"/>
+            <a:ext cx="7772400" cy="2898648"/>
+          </a:xfrm>
+          <a:prstGeom prst="rect">
+            <a:avLst/>
+          </a:prstGeom>
+        </p:spPr>
+      </p:pic>
+      <p:pic>
+        <p:nvPicPr>
+          <p:cNvPr id="5" name="Image 1" descr="C:\SNU\포트폴리오\전국AI반도체경진대회\submission\figs\chip_map_growth.png"/>
+          <p:cNvPicPr>
+            <a:picLocks noChangeAspect="1"/>
+          </p:cNvPicPr>
+          <p:nvPr/>
+        </p:nvPicPr>
+        <p:blipFill>
+          <a:blip r:embed="rId4"/>
+          <a:stretch>
+            <a:fillRect/>
+          </a:stretch>
+        </p:blipFill>
+        <p:spPr>
+          <a:xfrm>
+            <a:off x="1097280" y="4206240"/>
+            <a:ext cx="9509760" cy="2157984"/>
           </a:xfrm>
           <a:prstGeom prst="rect">
             <a:avLst/>
@@ -30066,18 +29809,18 @@
       </p:pic>
       <p:sp>
         <p:nvSpPr>
-          <p:cNvPr id="5" name="Shape 1"/>
+          <p:cNvPr id="6" name="Shape 1"/>
           <p:cNvSpPr/>
           <p:nvPr/>
         </p:nvSpPr>
         <p:spPr>
           <a:xfrm>
-            <a:off x="548640" y="5212080"/>
-            <a:ext cx="5394960" cy="1143000"/>
+            <a:off x="8503920" y="1280160"/>
+            <a:ext cx="3108960" cy="1417320"/>
           </a:xfrm>
           <a:prstGeom prst="roundRect">
             <a:avLst>
-              <a:gd name="adj" fmla="val 9600"/>
+              <a:gd name="adj" fmla="val 7742"/>
             </a:avLst>
           </a:prstGeom>
           <a:solidFill>
@@ -30093,14 +29836,14 @@
       </p:sp>
       <p:sp>
         <p:nvSpPr>
-          <p:cNvPr id="6" name="Text 2"/>
+          <p:cNvPr id="7" name="Text 2"/>
           <p:cNvSpPr txBox="1"/>
           <p:nvPr/>
         </p:nvSpPr>
         <p:spPr>
           <a:xfrm>
-            <a:off x="731520" y="5349240"/>
-            <a:ext cx="5029200" cy="365760"/>
+            <a:off x="8686800" y="1417320"/>
+            <a:ext cx="2743200" cy="365760"/>
           </a:xfrm>
           <a:prstGeom prst="rect">
             <a:avLst/>
@@ -30132,14 +29875,14 @@
       </p:sp>
       <p:sp>
         <p:nvSpPr>
-          <p:cNvPr id="7" name="Text 3"/>
+          <p:cNvPr id="8" name="Text 3"/>
           <p:cNvSpPr txBox="1"/>
           <p:nvPr/>
         </p:nvSpPr>
         <p:spPr>
           <a:xfrm>
-            <a:off x="731520" y="5760720"/>
-            <a:ext cx="5029200" cy="457200"/>
+            <a:off x="8686800" y="1828800"/>
+            <a:ext cx="2743200" cy="731520"/>
           </a:xfrm>
           <a:prstGeom prst="rect">
             <a:avLst/>
@@ -30155,7 +29898,7 @@
               <a:buNone/>
             </a:pPr>
             <a:r>
-              <a:rPr lang="en-US" sz="1200" dirty="0">
+              <a:rPr lang="en-US" sz="1100" dirty="0">
                 <a:solidFill>
                   <a:srgbClr val="1D1D1F"/>
                 </a:solidFill>
@@ -30165,24 +29908,24 @@
               </a:rPr>
               <a:t>실제 DELTA roll 녹화 32프레임 → 칩 RTL 시뮬레이션이 쓴 월드 메모리 내용(8 px 셀, 4비트).</a:t>
             </a:r>
-            <a:endParaRPr lang="en-US" sz="1200" dirty="0"/>
+            <a:endParaRPr lang="en-US" sz="1100" dirty="0"/>
           </a:p>
         </p:txBody>
       </p:sp>
       <p:sp>
         <p:nvSpPr>
-          <p:cNvPr id="8" name="Shape 4"/>
+          <p:cNvPr id="9" name="Shape 4"/>
           <p:cNvSpPr/>
           <p:nvPr/>
         </p:nvSpPr>
         <p:spPr>
           <a:xfrm>
-            <a:off x="6217920" y="5212080"/>
-            <a:ext cx="5394960" cy="1143000"/>
+            <a:off x="8503920" y="2788920"/>
+            <a:ext cx="3108960" cy="1371600"/>
           </a:xfrm>
           <a:prstGeom prst="roundRect">
             <a:avLst>
-              <a:gd name="adj" fmla="val 9600"/>
+              <a:gd name="adj" fmla="val 8000"/>
             </a:avLst>
           </a:prstGeom>
           <a:solidFill>
@@ -30198,14 +29941,14 @@
       </p:sp>
       <p:sp>
         <p:nvSpPr>
-          <p:cNvPr id="9" name="Text 5"/>
+          <p:cNvPr id="10" name="Text 5"/>
           <p:cNvSpPr txBox="1"/>
           <p:nvPr/>
         </p:nvSpPr>
         <p:spPr>
           <a:xfrm>
-            <a:off x="6400800" y="5349240"/>
-            <a:ext cx="5029200" cy="365760"/>
+            <a:off x="8686800" y="2926080"/>
+            <a:ext cx="2743200" cy="365760"/>
           </a:xfrm>
           <a:prstGeom prst="rect">
             <a:avLst/>
@@ -30237,14 +29980,14 @@
       </p:sp>
       <p:sp>
         <p:nvSpPr>
-          <p:cNvPr id="10" name="Text 6"/>
+          <p:cNvPr id="11" name="Text 6"/>
           <p:cNvSpPr txBox="1"/>
           <p:nvPr/>
         </p:nvSpPr>
         <p:spPr>
           <a:xfrm>
-            <a:off x="6400800" y="5760720"/>
-            <a:ext cx="5029200" cy="457200"/>
+            <a:off x="8686800" y="3337560"/>
+            <a:ext cx="2743200" cy="685800"/>
           </a:xfrm>
           <a:prstGeom prst="rect">
             <a:avLst/>
@@ -30260,7 +30003,7 @@
               <a:buNone/>
             </a:pPr>
             <a:r>
-              <a:rPr lang="en-US" sz="1200" dirty="0">
+              <a:rPr lang="en-US" sz="1100" dirty="0">
                 <a:solidFill>
                   <a:srgbClr val="1D1D1F"/>
                 </a:solidFill>
@@ -30270,7 +30013,7 @@
               </a:rPr>
               <a:t>왼쪽은 같은 이벤트를 회전 보정 없이 쌓은 것. 가운데·오른쪽은 칩 출력으로, 보정 피벗 설정만 다르다.</a:t>
             </a:r>
-            <a:endParaRPr lang="en-US" sz="1200" dirty="0"/>
+            <a:endParaRPr lang="en-US" sz="1100" dirty="0"/>
           </a:p>
         </p:txBody>
       </p:sp>
